--- a/Documentations/SysArchitecture.pptx
+++ b/Documentations/SysArchitecture.pptx
@@ -266,7 +266,7 @@
           <a:p>
             <a:fld id="{8377380A-1819-462E-96FD-3D6CBD777CA0}" type="datetimeFigureOut">
               <a:rPr lang="en-IL" smtClean="0"/>
-              <a:t>09/08/2025</a:t>
+              <a:t>14/08/2025</a:t>
             </a:fld>
             <a:endParaRPr lang="en-IL"/>
           </a:p>
@@ -466,7 +466,7 @@
           <a:p>
             <a:fld id="{8377380A-1819-462E-96FD-3D6CBD777CA0}" type="datetimeFigureOut">
               <a:rPr lang="en-IL" smtClean="0"/>
-              <a:t>09/08/2025</a:t>
+              <a:t>14/08/2025</a:t>
             </a:fld>
             <a:endParaRPr lang="en-IL"/>
           </a:p>
@@ -676,7 +676,7 @@
           <a:p>
             <a:fld id="{8377380A-1819-462E-96FD-3D6CBD777CA0}" type="datetimeFigureOut">
               <a:rPr lang="en-IL" smtClean="0"/>
-              <a:t>09/08/2025</a:t>
+              <a:t>14/08/2025</a:t>
             </a:fld>
             <a:endParaRPr lang="en-IL"/>
           </a:p>
@@ -876,7 +876,7 @@
           <a:p>
             <a:fld id="{8377380A-1819-462E-96FD-3D6CBD777CA0}" type="datetimeFigureOut">
               <a:rPr lang="en-IL" smtClean="0"/>
-              <a:t>09/08/2025</a:t>
+              <a:t>14/08/2025</a:t>
             </a:fld>
             <a:endParaRPr lang="en-IL"/>
           </a:p>
@@ -1152,7 +1152,7 @@
           <a:p>
             <a:fld id="{8377380A-1819-462E-96FD-3D6CBD777CA0}" type="datetimeFigureOut">
               <a:rPr lang="en-IL" smtClean="0"/>
-              <a:t>09/08/2025</a:t>
+              <a:t>14/08/2025</a:t>
             </a:fld>
             <a:endParaRPr lang="en-IL"/>
           </a:p>
@@ -1420,7 +1420,7 @@
           <a:p>
             <a:fld id="{8377380A-1819-462E-96FD-3D6CBD777CA0}" type="datetimeFigureOut">
               <a:rPr lang="en-IL" smtClean="0"/>
-              <a:t>09/08/2025</a:t>
+              <a:t>14/08/2025</a:t>
             </a:fld>
             <a:endParaRPr lang="en-IL"/>
           </a:p>
@@ -1835,7 +1835,7 @@
           <a:p>
             <a:fld id="{8377380A-1819-462E-96FD-3D6CBD777CA0}" type="datetimeFigureOut">
               <a:rPr lang="en-IL" smtClean="0"/>
-              <a:t>09/08/2025</a:t>
+              <a:t>14/08/2025</a:t>
             </a:fld>
             <a:endParaRPr lang="en-IL"/>
           </a:p>
@@ -1977,7 +1977,7 @@
           <a:p>
             <a:fld id="{8377380A-1819-462E-96FD-3D6CBD777CA0}" type="datetimeFigureOut">
               <a:rPr lang="en-IL" smtClean="0"/>
-              <a:t>09/08/2025</a:t>
+              <a:t>14/08/2025</a:t>
             </a:fld>
             <a:endParaRPr lang="en-IL"/>
           </a:p>
@@ -2090,7 +2090,7 @@
           <a:p>
             <a:fld id="{8377380A-1819-462E-96FD-3D6CBD777CA0}" type="datetimeFigureOut">
               <a:rPr lang="en-IL" smtClean="0"/>
-              <a:t>09/08/2025</a:t>
+              <a:t>14/08/2025</a:t>
             </a:fld>
             <a:endParaRPr lang="en-IL"/>
           </a:p>
@@ -2403,7 +2403,7 @@
           <a:p>
             <a:fld id="{8377380A-1819-462E-96FD-3D6CBD777CA0}" type="datetimeFigureOut">
               <a:rPr lang="en-IL" smtClean="0"/>
-              <a:t>09/08/2025</a:t>
+              <a:t>14/08/2025</a:t>
             </a:fld>
             <a:endParaRPr lang="en-IL"/>
           </a:p>
@@ -2692,7 +2692,7 @@
           <a:p>
             <a:fld id="{8377380A-1819-462E-96FD-3D6CBD777CA0}" type="datetimeFigureOut">
               <a:rPr lang="en-IL" smtClean="0"/>
-              <a:t>09/08/2025</a:t>
+              <a:t>14/08/2025</a:t>
             </a:fld>
             <a:endParaRPr lang="en-IL"/>
           </a:p>
@@ -2935,7 +2935,7 @@
           <a:p>
             <a:fld id="{8377380A-1819-462E-96FD-3D6CBD777CA0}" type="datetimeFigureOut">
               <a:rPr lang="en-IL" smtClean="0"/>
-              <a:t>09/08/2025</a:t>
+              <a:t>14/08/2025</a:t>
             </a:fld>
             <a:endParaRPr lang="en-IL"/>
           </a:p>
@@ -11468,8 +11468,8 @@
         </p:nvGrpSpPr>
         <p:grpSpPr>
           <a:xfrm>
-            <a:off x="244438" y="566996"/>
-            <a:ext cx="2732855" cy="1693316"/>
+            <a:off x="950614" y="876860"/>
+            <a:ext cx="2031057" cy="1693316"/>
             <a:chOff x="2037028" y="1176951"/>
             <a:chExt cx="3108185" cy="2252047"/>
           </a:xfrm>
@@ -11707,376 +11707,6 @@
           </p:txBody>
         </p:sp>
       </p:grpSp>
-      <p:grpSp>
-        <p:nvGrpSpPr>
-          <p:cNvPr id="20" name="Group 19">
-            <a:extLst>
-              <a:ext uri="{FF2B5EF4-FFF2-40B4-BE49-F238E27FC236}">
-                <a16:creationId xmlns:a16="http://schemas.microsoft.com/office/drawing/2014/main" id="{BE573448-C636-3802-CA73-D3B35B47CE11}"/>
-              </a:ext>
-            </a:extLst>
-          </p:cNvPr>
-          <p:cNvGrpSpPr/>
-          <p:nvPr/>
-        </p:nvGrpSpPr>
-        <p:grpSpPr>
-          <a:xfrm>
-            <a:off x="4761816" y="911400"/>
-            <a:ext cx="2900756" cy="1518442"/>
-            <a:chOff x="2037029" y="1176950"/>
-            <a:chExt cx="2136619" cy="3911097"/>
-          </a:xfrm>
-        </p:grpSpPr>
-        <p:sp>
-          <p:nvSpPr>
-            <p:cNvPr id="21" name="Rectangle 20">
-              <a:extLst>
-                <a:ext uri="{FF2B5EF4-FFF2-40B4-BE49-F238E27FC236}">
-                  <a16:creationId xmlns:a16="http://schemas.microsoft.com/office/drawing/2014/main" id="{364D5F93-7406-7B24-3361-3D6D0AB0EDAD}"/>
-                </a:ext>
-              </a:extLst>
-            </p:cNvPr>
-            <p:cNvSpPr/>
-            <p:nvPr/>
-          </p:nvSpPr>
-          <p:spPr>
-            <a:xfrm>
-              <a:off x="2037030" y="1176950"/>
-              <a:ext cx="2136618" cy="743255"/>
-            </a:xfrm>
-            <a:prstGeom prst="rect">
-              <a:avLst/>
-            </a:prstGeom>
-          </p:spPr>
-          <p:style>
-            <a:lnRef idx="2">
-              <a:schemeClr val="accent4">
-                <a:shade val="15000"/>
-              </a:schemeClr>
-            </a:lnRef>
-            <a:fillRef idx="1">
-              <a:schemeClr val="accent4"/>
-            </a:fillRef>
-            <a:effectRef idx="0">
-              <a:schemeClr val="accent4"/>
-            </a:effectRef>
-            <a:fontRef idx="minor">
-              <a:schemeClr val="lt1"/>
-            </a:fontRef>
-          </p:style>
-          <p:txBody>
-            <a:bodyPr rtlCol="0" anchor="ctr"/>
-            <a:lstStyle/>
-            <a:p>
-              <a:pPr algn="ctr"/>
-              <a:r>
-                <a:rPr lang="en-US" sz="1200" dirty="0"/>
-                <a:t>Phone</a:t>
-              </a:r>
-              <a:endParaRPr lang="en-IL" sz="1200" dirty="0"/>
-            </a:p>
-          </p:txBody>
-        </p:sp>
-        <p:sp>
-          <p:nvSpPr>
-            <p:cNvPr id="22" name="Rectangle 21">
-              <a:extLst>
-                <a:ext uri="{FF2B5EF4-FFF2-40B4-BE49-F238E27FC236}">
-                  <a16:creationId xmlns:a16="http://schemas.microsoft.com/office/drawing/2014/main" id="{699912BD-6A1C-309E-5ECA-E69FDA719701}"/>
-                </a:ext>
-              </a:extLst>
-            </p:cNvPr>
-            <p:cNvSpPr/>
-            <p:nvPr/>
-          </p:nvSpPr>
-          <p:spPr>
-            <a:xfrm>
-              <a:off x="2037029" y="1920205"/>
-              <a:ext cx="2136618" cy="3167842"/>
-            </a:xfrm>
-            <a:prstGeom prst="rect">
-              <a:avLst/>
-            </a:prstGeom>
-            <a:noFill/>
-          </p:spPr>
-          <p:style>
-            <a:lnRef idx="2">
-              <a:schemeClr val="accent1">
-                <a:shade val="15000"/>
-              </a:schemeClr>
-            </a:lnRef>
-            <a:fillRef idx="1">
-              <a:schemeClr val="accent1"/>
-            </a:fillRef>
-            <a:effectRef idx="0">
-              <a:schemeClr val="accent1"/>
-            </a:effectRef>
-            <a:fontRef idx="minor">
-              <a:schemeClr val="lt1"/>
-            </a:fontRef>
-          </p:style>
-          <p:txBody>
-            <a:bodyPr rtlCol="0" anchor="t"/>
-            <a:lstStyle/>
-            <a:p>
-              <a:r>
-                <a:rPr lang="en-US" sz="1200" b="1" dirty="0" err="1">
-                  <a:solidFill>
-                    <a:schemeClr val="tx1"/>
-                  </a:solidFill>
-                </a:rPr>
-                <a:t>Phone_Id</a:t>
-              </a:r>
-              <a:r>
-                <a:rPr lang="en-US" sz="1200" dirty="0">
-                  <a:solidFill>
-                    <a:schemeClr val="tx1"/>
-                  </a:solidFill>
-                </a:rPr>
-                <a:t> : int</a:t>
-              </a:r>
-            </a:p>
-            <a:p>
-              <a:r>
-                <a:rPr lang="en-US" sz="1200" dirty="0" err="1">
-                  <a:solidFill>
-                    <a:schemeClr val="tx1"/>
-                  </a:solidFill>
-                </a:rPr>
-                <a:t>User_Id</a:t>
-              </a:r>
-              <a:r>
-                <a:rPr lang="en-US" sz="1200" dirty="0">
-                  <a:solidFill>
-                    <a:schemeClr val="tx1"/>
-                  </a:solidFill>
-                </a:rPr>
-                <a:t> (FK) : int</a:t>
-              </a:r>
-            </a:p>
-            <a:p>
-              <a:r>
-                <a:rPr lang="en-US" sz="1200" dirty="0" err="1">
-                  <a:solidFill>
-                    <a:schemeClr val="tx1"/>
-                  </a:solidFill>
-                </a:rPr>
-                <a:t>Phone_Type</a:t>
-              </a:r>
-              <a:r>
-                <a:rPr lang="en-US" sz="1200" dirty="0">
-                  <a:solidFill>
-                    <a:schemeClr val="tx1"/>
-                  </a:solidFill>
-                </a:rPr>
-                <a:t> : </a:t>
-              </a:r>
-              <a:r>
-                <a:rPr lang="en-US" sz="1200" dirty="0" err="1">
-                  <a:solidFill>
-                    <a:schemeClr val="tx1"/>
-                  </a:solidFill>
-                </a:rPr>
-                <a:t>enum</a:t>
-              </a:r>
-              <a:r>
-                <a:rPr lang="en-US" sz="1200" dirty="0">
-                  <a:solidFill>
-                    <a:schemeClr val="tx1"/>
-                  </a:solidFill>
-                </a:rPr>
-                <a:t>(Office, Mobile, Fax)</a:t>
-              </a:r>
-            </a:p>
-            <a:p>
-              <a:r>
-                <a:rPr lang="en-US" sz="1200" dirty="0" err="1">
-                  <a:solidFill>
-                    <a:schemeClr val="tx1"/>
-                  </a:solidFill>
-                </a:rPr>
-                <a:t>Phone_Number</a:t>
-              </a:r>
-              <a:r>
-                <a:rPr lang="en-US" sz="1200" dirty="0">
-                  <a:solidFill>
-                    <a:schemeClr val="tx1"/>
-                  </a:solidFill>
-                </a:rPr>
-                <a:t> : string</a:t>
-              </a:r>
-            </a:p>
-            <a:p>
-              <a:r>
-                <a:rPr lang="en-US" sz="1200" dirty="0" err="1">
-                  <a:solidFill>
-                    <a:schemeClr val="tx1"/>
-                  </a:solidFill>
-                </a:rPr>
-                <a:t>Country_Code</a:t>
-              </a:r>
-              <a:r>
-                <a:rPr lang="en-US" sz="1200" dirty="0">
-                  <a:solidFill>
-                    <a:schemeClr val="tx1"/>
-                  </a:solidFill>
-                </a:rPr>
-                <a:t> : string</a:t>
-              </a:r>
-            </a:p>
-            <a:p>
-              <a:r>
-                <a:rPr lang="en-US" sz="1200" dirty="0" err="1">
-                  <a:solidFill>
-                    <a:schemeClr val="tx1"/>
-                  </a:solidFill>
-                </a:rPr>
-                <a:t>Is_Primary</a:t>
-              </a:r>
-              <a:r>
-                <a:rPr lang="en-US" sz="1200" dirty="0">
-                  <a:solidFill>
-                    <a:schemeClr val="tx1"/>
-                  </a:solidFill>
-                </a:rPr>
-                <a:t> : bool</a:t>
-              </a:r>
-            </a:p>
-            <a:p>
-              <a:endParaRPr lang="en-US" sz="1200" dirty="0">
-                <a:solidFill>
-                  <a:schemeClr val="tx1"/>
-                </a:solidFill>
-              </a:endParaRPr>
-            </a:p>
-            <a:p>
-              <a:endParaRPr lang="en-IL" sz="1200" dirty="0"/>
-            </a:p>
-          </p:txBody>
-        </p:sp>
-      </p:grpSp>
-      <p:grpSp>
-        <p:nvGrpSpPr>
-          <p:cNvPr id="26" name="Group 25">
-            <a:extLst>
-              <a:ext uri="{FF2B5EF4-FFF2-40B4-BE49-F238E27FC236}">
-                <a16:creationId xmlns:a16="http://schemas.microsoft.com/office/drawing/2014/main" id="{2DE970F0-C183-25A1-6216-C454ED20313F}"/>
-              </a:ext>
-            </a:extLst>
-          </p:cNvPr>
-          <p:cNvGrpSpPr/>
-          <p:nvPr/>
-        </p:nvGrpSpPr>
-        <p:grpSpPr>
-          <a:xfrm>
-            <a:off x="2998319" y="1071698"/>
-            <a:ext cx="1943551" cy="344032"/>
-            <a:chOff x="4173647" y="2200743"/>
-            <a:chExt cx="2219785" cy="344032"/>
-          </a:xfrm>
-        </p:grpSpPr>
-        <p:sp>
-          <p:nvSpPr>
-            <p:cNvPr id="27" name="Rectangle 26">
-              <a:extLst>
-                <a:ext uri="{FF2B5EF4-FFF2-40B4-BE49-F238E27FC236}">
-                  <a16:creationId xmlns:a16="http://schemas.microsoft.com/office/drawing/2014/main" id="{84DBC245-4011-3661-9C7B-CFEBAE049002}"/>
-                </a:ext>
-              </a:extLst>
-            </p:cNvPr>
-            <p:cNvSpPr/>
-            <p:nvPr/>
-          </p:nvSpPr>
-          <p:spPr>
-            <a:xfrm>
-              <a:off x="5524299" y="2200743"/>
-              <a:ext cx="869133" cy="344032"/>
-            </a:xfrm>
-            <a:prstGeom prst="rect">
-              <a:avLst/>
-            </a:prstGeom>
-            <a:noFill/>
-            <a:ln>
-              <a:noFill/>
-            </a:ln>
-          </p:spPr>
-          <p:style>
-            <a:lnRef idx="2">
-              <a:schemeClr val="accent1">
-                <a:shade val="15000"/>
-              </a:schemeClr>
-            </a:lnRef>
-            <a:fillRef idx="1">
-              <a:schemeClr val="accent1"/>
-            </a:fillRef>
-            <a:effectRef idx="0">
-              <a:schemeClr val="accent1"/>
-            </a:effectRef>
-            <a:fontRef idx="minor">
-              <a:schemeClr val="lt1"/>
-            </a:fontRef>
-          </p:style>
-          <p:txBody>
-            <a:bodyPr rtlCol="0" anchor="ctr"/>
-            <a:lstStyle/>
-            <a:p>
-              <a:pPr algn="ctr"/>
-              <a:r>
-                <a:rPr lang="en-US" sz="1000" dirty="0">
-                  <a:solidFill>
-                    <a:schemeClr val="tx1"/>
-                  </a:solidFill>
-                </a:rPr>
-                <a:t>1:N</a:t>
-              </a:r>
-              <a:endParaRPr lang="en-IL" sz="1000" dirty="0">
-                <a:solidFill>
-                  <a:schemeClr val="tx1"/>
-                </a:solidFill>
-              </a:endParaRPr>
-            </a:p>
-          </p:txBody>
-        </p:sp>
-        <p:cxnSp>
-          <p:nvCxnSpPr>
-            <p:cNvPr id="28" name="Straight Arrow Connector 27">
-              <a:extLst>
-                <a:ext uri="{FF2B5EF4-FFF2-40B4-BE49-F238E27FC236}">
-                  <a16:creationId xmlns:a16="http://schemas.microsoft.com/office/drawing/2014/main" id="{73E6D519-B162-2DBE-088E-94D236CA79CE}"/>
-                </a:ext>
-              </a:extLst>
-            </p:cNvPr>
-            <p:cNvCxnSpPr/>
-            <p:nvPr/>
-          </p:nvCxnSpPr>
-          <p:spPr>
-            <a:xfrm>
-              <a:off x="4173647" y="2489707"/>
-              <a:ext cx="2008358" cy="0"/>
-            </a:xfrm>
-            <a:prstGeom prst="straightConnector1">
-              <a:avLst/>
-            </a:prstGeom>
-            <a:ln>
-              <a:tailEnd type="triangle"/>
-            </a:ln>
-          </p:spPr>
-          <p:style>
-            <a:lnRef idx="2">
-              <a:schemeClr val="accent1"/>
-            </a:lnRef>
-            <a:fillRef idx="0">
-              <a:schemeClr val="accent1"/>
-            </a:fillRef>
-            <a:effectRef idx="1">
-              <a:schemeClr val="accent1"/>
-            </a:effectRef>
-            <a:fontRef idx="minor">
-              <a:schemeClr val="tx1"/>
-            </a:fontRef>
-          </p:style>
-        </p:cxnSp>
-      </p:grpSp>
       <p:sp>
         <p:nvSpPr>
           <p:cNvPr id="35" name="Rectangle 34">
@@ -12147,8 +11777,8 @@
         </p:nvGrpSpPr>
         <p:grpSpPr>
           <a:xfrm>
-            <a:off x="4756752" y="2630391"/>
-            <a:ext cx="3822169" cy="1567554"/>
+            <a:off x="4040566" y="2645223"/>
+            <a:ext cx="2732853" cy="1567554"/>
             <a:chOff x="2029809" y="1176950"/>
             <a:chExt cx="2136619" cy="3410260"/>
           </a:xfrm>
@@ -12388,8 +12018,8 @@
         </p:nvSpPr>
         <p:spPr>
           <a:xfrm>
-            <a:off x="4180893" y="2977998"/>
-            <a:ext cx="712858" cy="280774"/>
+            <a:off x="3592420" y="3323922"/>
+            <a:ext cx="391107" cy="280774"/>
           </a:xfrm>
           <a:prstGeom prst="rect">
             <a:avLst/>
@@ -12447,17 +12077,19 @@
           </p:cNvPr>
           <p:cNvCxnSpPr>
             <a:cxnSpLocks/>
-            <a:stCxn id="3" idx="2"/>
+            <a:endCxn id="72" idx="1"/>
           </p:cNvCxnSpPr>
           <p:nvPr/>
         </p:nvCxnSpPr>
         <p:spPr>
-          <a:xfrm rot="16200000" flipH="1">
-            <a:off x="2684579" y="1186599"/>
-            <a:ext cx="998460" cy="3145886"/>
+          <a:xfrm>
+            <a:off x="2156266" y="2570176"/>
+            <a:ext cx="1884301" cy="1035271"/>
           </a:xfrm>
-          <a:prstGeom prst="bentConnector2">
-            <a:avLst/>
+          <a:prstGeom prst="bentConnector3">
+            <a:avLst>
+              <a:gd name="adj1" fmla="val 50000"/>
+            </a:avLst>
           </a:prstGeom>
           <a:ln>
             <a:tailEnd type="triangle"/>
@@ -12492,7 +12124,7 @@
         </p:nvGrpSpPr>
         <p:grpSpPr>
           <a:xfrm>
-            <a:off x="2297557" y="4650680"/>
+            <a:off x="3915010" y="1180507"/>
             <a:ext cx="2732855" cy="915347"/>
             <a:chOff x="2037028" y="1176951"/>
             <a:chExt cx="3108185" cy="2252047"/>
@@ -12703,130 +12335,9 @@
                 </a:solidFill>
               </a:endParaRPr>
             </a:p>
-            <a:p>
-              <a:endParaRPr lang="en-US" sz="1200" dirty="0">
-                <a:solidFill>
-                  <a:schemeClr val="tx1"/>
-                </a:solidFill>
-              </a:endParaRPr>
-            </a:p>
-            <a:p>
-              <a:endParaRPr lang="en-US" sz="1200" dirty="0">
-                <a:solidFill>
-                  <a:schemeClr val="tx1"/>
-                </a:solidFill>
-              </a:endParaRPr>
-            </a:p>
-            <a:p>
-              <a:endParaRPr lang="en-IL" sz="1200" dirty="0"/>
-            </a:p>
           </p:txBody>
         </p:sp>
       </p:grpSp>
-      <p:cxnSp>
-        <p:nvCxnSpPr>
-          <p:cNvPr id="24" name="Connector: Elbow 23">
-            <a:extLst>
-              <a:ext uri="{FF2B5EF4-FFF2-40B4-BE49-F238E27FC236}">
-                <a16:creationId xmlns:a16="http://schemas.microsoft.com/office/drawing/2014/main" id="{58A371E0-7D2B-9A05-02C8-25EAB0C14055}"/>
-              </a:ext>
-            </a:extLst>
-          </p:cNvPr>
-          <p:cNvCxnSpPr>
-            <a:cxnSpLocks/>
-            <a:endCxn id="17" idx="1"/>
-          </p:cNvCxnSpPr>
-          <p:nvPr/>
-        </p:nvCxnSpPr>
-        <p:spPr>
-          <a:xfrm rot="16200000" flipH="1">
-            <a:off x="16691" y="2983357"/>
-            <a:ext cx="3003914" cy="1557818"/>
-          </a:xfrm>
-          <a:prstGeom prst="bentConnector2">
-            <a:avLst/>
-          </a:prstGeom>
-          <a:ln>
-            <a:tailEnd type="triangle"/>
-          </a:ln>
-        </p:spPr>
-        <p:style>
-          <a:lnRef idx="2">
-            <a:schemeClr val="accent1"/>
-          </a:lnRef>
-          <a:fillRef idx="0">
-            <a:schemeClr val="accent1"/>
-          </a:fillRef>
-          <a:effectRef idx="1">
-            <a:schemeClr val="accent1"/>
-          </a:effectRef>
-          <a:fontRef idx="minor">
-            <a:schemeClr val="tx1"/>
-          </a:fontRef>
-        </p:style>
-      </p:cxnSp>
-      <p:sp>
-        <p:nvSpPr>
-          <p:cNvPr id="25" name="Rectangle 24">
-            <a:extLst>
-              <a:ext uri="{FF2B5EF4-FFF2-40B4-BE49-F238E27FC236}">
-                <a16:creationId xmlns:a16="http://schemas.microsoft.com/office/drawing/2014/main" id="{1049D720-5E23-9ECB-0085-9B8DB5FBEB86}"/>
-              </a:ext>
-            </a:extLst>
-          </p:cNvPr>
-          <p:cNvSpPr/>
-          <p:nvPr/>
-        </p:nvSpPr>
-        <p:spPr>
-          <a:xfrm>
-            <a:off x="1723880" y="5027461"/>
-            <a:ext cx="712858" cy="280774"/>
-          </a:xfrm>
-          <a:prstGeom prst="rect">
-            <a:avLst/>
-          </a:prstGeom>
-          <a:noFill/>
-          <a:ln>
-            <a:noFill/>
-          </a:ln>
-        </p:spPr>
-        <p:style>
-          <a:lnRef idx="2">
-            <a:schemeClr val="accent1">
-              <a:shade val="15000"/>
-            </a:schemeClr>
-          </a:lnRef>
-          <a:fillRef idx="1">
-            <a:schemeClr val="accent1"/>
-          </a:fillRef>
-          <a:effectRef idx="0">
-            <a:schemeClr val="accent1"/>
-          </a:effectRef>
-          <a:fontRef idx="minor">
-            <a:schemeClr val="lt1"/>
-          </a:fontRef>
-        </p:style>
-        <p:txBody>
-          <a:bodyPr rtlCol="0" anchor="ctr"/>
-          <a:lstStyle/>
-          <a:p>
-            <a:pPr algn="ctr"/>
-            <a:r>
-              <a:rPr lang="en-US" sz="1000" dirty="0">
-                <a:solidFill>
-                  <a:schemeClr val="tx1"/>
-                </a:solidFill>
-              </a:rPr>
-              <a:t>1:1</a:t>
-            </a:r>
-            <a:endParaRPr lang="en-IL" sz="1000" dirty="0">
-              <a:solidFill>
-                <a:schemeClr val="tx1"/>
-              </a:solidFill>
-            </a:endParaRPr>
-          </a:p>
-        </p:txBody>
-      </p:sp>
       <p:grpSp>
         <p:nvGrpSpPr>
           <p:cNvPr id="33" name="Group 32">
@@ -12841,8 +12352,8 @@
         </p:nvGrpSpPr>
         <p:grpSpPr>
           <a:xfrm>
-            <a:off x="7515116" y="4742692"/>
-            <a:ext cx="3642619" cy="1319062"/>
+            <a:off x="7676068" y="2821669"/>
+            <a:ext cx="3477808" cy="1319062"/>
             <a:chOff x="2037028" y="1176951"/>
             <a:chExt cx="3108185" cy="2030619"/>
           </a:xfrm>
@@ -13084,26 +12595,24 @@
       </p:grpSp>
       <p:cxnSp>
         <p:nvCxnSpPr>
-          <p:cNvPr id="38" name="Connector: Elbow 37">
-            <a:extLst>
-              <a:ext uri="{FF2B5EF4-FFF2-40B4-BE49-F238E27FC236}">
-                <a16:creationId xmlns:a16="http://schemas.microsoft.com/office/drawing/2014/main" id="{787A013B-B0C3-BB43-BBDC-D7D3CFA18BF8}"/>
+          <p:cNvPr id="5" name="Straight Arrow Connector 4">
+            <a:extLst>
+              <a:ext uri="{FF2B5EF4-FFF2-40B4-BE49-F238E27FC236}">
+                <a16:creationId xmlns:a16="http://schemas.microsoft.com/office/drawing/2014/main" id="{87A80F61-BCF6-C798-3F07-5C6AE73CB2F5}"/>
               </a:ext>
             </a:extLst>
           </p:cNvPr>
           <p:cNvCxnSpPr>
             <a:cxnSpLocks/>
-            <a:stCxn id="72" idx="2"/>
-            <a:endCxn id="36" idx="1"/>
           </p:cNvCxnSpPr>
           <p:nvPr/>
         </p:nvCxnSpPr>
         <p:spPr>
-          <a:xfrm rot="16200000" flipH="1">
-            <a:off x="6407314" y="4458469"/>
-            <a:ext cx="1368326" cy="847278"/>
+          <a:xfrm flipV="1">
+            <a:off x="2981670" y="1722787"/>
+            <a:ext cx="930377" cy="731"/>
           </a:xfrm>
-          <a:prstGeom prst="bentConnector2">
+          <a:prstGeom prst="straightConnector1">
             <a:avLst/>
           </a:prstGeom>
           <a:ln>
@@ -13127,10 +12636,10 @@
       </p:cxnSp>
       <p:sp>
         <p:nvSpPr>
-          <p:cNvPr id="39" name="Rectangle 38">
-            <a:extLst>
-              <a:ext uri="{FF2B5EF4-FFF2-40B4-BE49-F238E27FC236}">
-                <a16:creationId xmlns:a16="http://schemas.microsoft.com/office/drawing/2014/main" id="{FFC090D4-1F5A-6BD9-182C-B709FDCDE36D}"/>
+          <p:cNvPr id="8" name="Rectangle 7">
+            <a:extLst>
+              <a:ext uri="{FF2B5EF4-FFF2-40B4-BE49-F238E27FC236}">
+                <a16:creationId xmlns:a16="http://schemas.microsoft.com/office/drawing/2014/main" id="{1049D720-5E23-9ECB-0085-9B8DB5FBEB86}"/>
               </a:ext>
             </a:extLst>
           </p:cNvPr>
@@ -13139,8 +12648,8 @@
         </p:nvSpPr>
         <p:spPr>
           <a:xfrm>
-            <a:off x="6962000" y="5138765"/>
-            <a:ext cx="712858" cy="280774"/>
+            <a:off x="3447951" y="1442013"/>
+            <a:ext cx="458005" cy="280774"/>
           </a:xfrm>
           <a:prstGeom prst="rect">
             <a:avLst/>
@@ -13177,7 +12686,110 @@
                   <a:schemeClr val="tx1"/>
                 </a:solidFill>
               </a:rPr>
-              <a:t>1:1</a:t>
+              <a:t>1:N</a:t>
+            </a:r>
+            <a:endParaRPr lang="en-IL" sz="1000" dirty="0">
+              <a:solidFill>
+                <a:schemeClr val="tx1"/>
+              </a:solidFill>
+            </a:endParaRPr>
+          </a:p>
+        </p:txBody>
+      </p:sp>
+      <p:cxnSp>
+        <p:nvCxnSpPr>
+          <p:cNvPr id="10" name="Straight Arrow Connector 9">
+            <a:extLst>
+              <a:ext uri="{FF2B5EF4-FFF2-40B4-BE49-F238E27FC236}">
+                <a16:creationId xmlns:a16="http://schemas.microsoft.com/office/drawing/2014/main" id="{F0EC6AC8-2264-2579-F9A2-C0806CFDBCBF}"/>
+              </a:ext>
+            </a:extLst>
+          </p:cNvPr>
+          <p:cNvCxnSpPr>
+            <a:cxnSpLocks/>
+          </p:cNvCxnSpPr>
+          <p:nvPr/>
+        </p:nvCxnSpPr>
+        <p:spPr>
+          <a:xfrm flipV="1">
+            <a:off x="6746419" y="3559135"/>
+            <a:ext cx="930377" cy="731"/>
+          </a:xfrm>
+          <a:prstGeom prst="straightConnector1">
+            <a:avLst/>
+          </a:prstGeom>
+          <a:ln>
+            <a:tailEnd type="triangle"/>
+          </a:ln>
+        </p:spPr>
+        <p:style>
+          <a:lnRef idx="2">
+            <a:schemeClr val="accent1"/>
+          </a:lnRef>
+          <a:fillRef idx="0">
+            <a:schemeClr val="accent1"/>
+          </a:fillRef>
+          <a:effectRef idx="1">
+            <a:schemeClr val="accent1"/>
+          </a:effectRef>
+          <a:fontRef idx="minor">
+            <a:schemeClr val="tx1"/>
+          </a:fontRef>
+        </p:style>
+      </p:cxnSp>
+      <p:sp>
+        <p:nvSpPr>
+          <p:cNvPr id="11" name="Rectangle 10">
+            <a:extLst>
+              <a:ext uri="{FF2B5EF4-FFF2-40B4-BE49-F238E27FC236}">
+                <a16:creationId xmlns:a16="http://schemas.microsoft.com/office/drawing/2014/main" id="{D4435BEA-6437-E00D-577F-23D7D5718537}"/>
+              </a:ext>
+            </a:extLst>
+          </p:cNvPr>
+          <p:cNvSpPr/>
+          <p:nvPr/>
+        </p:nvSpPr>
+        <p:spPr>
+          <a:xfrm>
+            <a:off x="7230806" y="3278361"/>
+            <a:ext cx="458005" cy="280774"/>
+          </a:xfrm>
+          <a:prstGeom prst="rect">
+            <a:avLst/>
+          </a:prstGeom>
+          <a:noFill/>
+          <a:ln>
+            <a:noFill/>
+          </a:ln>
+        </p:spPr>
+        <p:style>
+          <a:lnRef idx="2">
+            <a:schemeClr val="accent1">
+              <a:shade val="15000"/>
+            </a:schemeClr>
+          </a:lnRef>
+          <a:fillRef idx="1">
+            <a:schemeClr val="accent1"/>
+          </a:fillRef>
+          <a:effectRef idx="0">
+            <a:schemeClr val="accent1"/>
+          </a:effectRef>
+          <a:fontRef idx="minor">
+            <a:schemeClr val="lt1"/>
+          </a:fontRef>
+        </p:style>
+        <p:txBody>
+          <a:bodyPr rtlCol="0" anchor="ctr"/>
+          <a:lstStyle/>
+          <a:p>
+            <a:pPr algn="ctr"/>
+            <a:r>
+              <a:rPr lang="en-US" sz="1000" dirty="0">
+                <a:solidFill>
+                  <a:schemeClr val="tx1"/>
+                </a:solidFill>
+              </a:rPr>
+              <a:t>1:N</a:t>
             </a:r>
             <a:endParaRPr lang="en-IL" sz="1000" dirty="0">
               <a:solidFill>

--- a/Documentations/SysArchitecture.pptx
+++ b/Documentations/SysArchitecture.pptx
@@ -10,7 +10,8 @@
     <p:sldId id="261" r:id="rId4"/>
     <p:sldId id="262" r:id="rId5"/>
     <p:sldId id="264" r:id="rId6"/>
-    <p:sldId id="265" r:id="rId7"/>
+    <p:sldId id="267" r:id="rId7"/>
+    <p:sldId id="265" r:id="rId8"/>
   </p:sldIdLst>
   <p:sldSz cx="12192000" cy="6858000"/>
   <p:notesSz cx="6858000" cy="9144000"/>
@@ -12077,19 +12078,18 @@
           </p:cNvPr>
           <p:cNvCxnSpPr>
             <a:cxnSpLocks/>
+            <a:stCxn id="3" idx="2"/>
             <a:endCxn id="72" idx="1"/>
           </p:cNvCxnSpPr>
           <p:nvPr/>
         </p:nvCxnSpPr>
         <p:spPr>
-          <a:xfrm>
-            <a:off x="2156266" y="2570176"/>
-            <a:ext cx="1884301" cy="1035271"/>
+          <a:xfrm rot="16200000" flipH="1">
+            <a:off x="2485720" y="2050599"/>
+            <a:ext cx="1035271" cy="2074424"/>
           </a:xfrm>
-          <a:prstGeom prst="bentConnector3">
-            <a:avLst>
-              <a:gd name="adj1" fmla="val 50000"/>
-            </a:avLst>
+          <a:prstGeom prst="bentConnector2">
+            <a:avLst/>
           </a:prstGeom>
           <a:ln>
             <a:tailEnd type="triangle"/>
@@ -12813,6 +12813,36 @@
 </file>
 
 <file path=ppt/slides/slide6.xml><?xml version="1.0" encoding="utf-8"?>
+<p:sld xmlns:a="http://schemas.openxmlformats.org/drawingml/2006/main" xmlns:r="http://schemas.openxmlformats.org/officeDocument/2006/relationships" xmlns:p="http://schemas.openxmlformats.org/presentationml/2006/main">
+  <p:cSld>
+    <p:spTree>
+      <p:nvGrpSpPr>
+        <p:cNvPr id="1" name=""/>
+        <p:cNvGrpSpPr/>
+        <p:nvPr/>
+      </p:nvGrpSpPr>
+      <p:grpSpPr>
+        <a:xfrm>
+          <a:off x="0" y="0"/>
+          <a:ext cx="0" cy="0"/>
+          <a:chOff x="0" y="0"/>
+          <a:chExt cx="0" cy="0"/>
+        </a:xfrm>
+      </p:grpSpPr>
+    </p:spTree>
+    <p:extLst>
+      <p:ext uri="{BB962C8B-B14F-4D97-AF65-F5344CB8AC3E}">
+        <p14:creationId xmlns:p14="http://schemas.microsoft.com/office/powerpoint/2010/main" val="903800887"/>
+      </p:ext>
+    </p:extLst>
+  </p:cSld>
+  <p:clrMapOvr>
+    <a:masterClrMapping/>
+  </p:clrMapOvr>
+</p:sld>
+</file>
+
+<file path=ppt/slides/slide7.xml><?xml version="1.0" encoding="utf-8"?>
 <p:sld xmlns:a="http://schemas.openxmlformats.org/drawingml/2006/main" xmlns:r="http://schemas.openxmlformats.org/officeDocument/2006/relationships" xmlns:p="http://schemas.openxmlformats.org/presentationml/2006/main">
   <p:cSld>
     <p:spTree>

--- a/Documentations/SysArchitecture.pptx
+++ b/Documentations/SysArchitecture.pptx
@@ -267,7 +267,7 @@
           <a:p>
             <a:fld id="{8377380A-1819-462E-96FD-3D6CBD777CA0}" type="datetimeFigureOut">
               <a:rPr lang="en-IL" smtClean="0"/>
-              <a:t>14/08/2025</a:t>
+              <a:t>15/08/2025</a:t>
             </a:fld>
             <a:endParaRPr lang="en-IL"/>
           </a:p>
@@ -467,7 +467,7 @@
           <a:p>
             <a:fld id="{8377380A-1819-462E-96FD-3D6CBD777CA0}" type="datetimeFigureOut">
               <a:rPr lang="en-IL" smtClean="0"/>
-              <a:t>14/08/2025</a:t>
+              <a:t>15/08/2025</a:t>
             </a:fld>
             <a:endParaRPr lang="en-IL"/>
           </a:p>
@@ -677,7 +677,7 @@
           <a:p>
             <a:fld id="{8377380A-1819-462E-96FD-3D6CBD777CA0}" type="datetimeFigureOut">
               <a:rPr lang="en-IL" smtClean="0"/>
-              <a:t>14/08/2025</a:t>
+              <a:t>15/08/2025</a:t>
             </a:fld>
             <a:endParaRPr lang="en-IL"/>
           </a:p>
@@ -877,7 +877,7 @@
           <a:p>
             <a:fld id="{8377380A-1819-462E-96FD-3D6CBD777CA0}" type="datetimeFigureOut">
               <a:rPr lang="en-IL" smtClean="0"/>
-              <a:t>14/08/2025</a:t>
+              <a:t>15/08/2025</a:t>
             </a:fld>
             <a:endParaRPr lang="en-IL"/>
           </a:p>
@@ -1153,7 +1153,7 @@
           <a:p>
             <a:fld id="{8377380A-1819-462E-96FD-3D6CBD777CA0}" type="datetimeFigureOut">
               <a:rPr lang="en-IL" smtClean="0"/>
-              <a:t>14/08/2025</a:t>
+              <a:t>15/08/2025</a:t>
             </a:fld>
             <a:endParaRPr lang="en-IL"/>
           </a:p>
@@ -1421,7 +1421,7 @@
           <a:p>
             <a:fld id="{8377380A-1819-462E-96FD-3D6CBD777CA0}" type="datetimeFigureOut">
               <a:rPr lang="en-IL" smtClean="0"/>
-              <a:t>14/08/2025</a:t>
+              <a:t>15/08/2025</a:t>
             </a:fld>
             <a:endParaRPr lang="en-IL"/>
           </a:p>
@@ -1836,7 +1836,7 @@
           <a:p>
             <a:fld id="{8377380A-1819-462E-96FD-3D6CBD777CA0}" type="datetimeFigureOut">
               <a:rPr lang="en-IL" smtClean="0"/>
-              <a:t>14/08/2025</a:t>
+              <a:t>15/08/2025</a:t>
             </a:fld>
             <a:endParaRPr lang="en-IL"/>
           </a:p>
@@ -1978,7 +1978,7 @@
           <a:p>
             <a:fld id="{8377380A-1819-462E-96FD-3D6CBD777CA0}" type="datetimeFigureOut">
               <a:rPr lang="en-IL" smtClean="0"/>
-              <a:t>14/08/2025</a:t>
+              <a:t>15/08/2025</a:t>
             </a:fld>
             <a:endParaRPr lang="en-IL"/>
           </a:p>
@@ -2091,7 +2091,7 @@
           <a:p>
             <a:fld id="{8377380A-1819-462E-96FD-3D6CBD777CA0}" type="datetimeFigureOut">
               <a:rPr lang="en-IL" smtClean="0"/>
-              <a:t>14/08/2025</a:t>
+              <a:t>15/08/2025</a:t>
             </a:fld>
             <a:endParaRPr lang="en-IL"/>
           </a:p>
@@ -2404,7 +2404,7 @@
           <a:p>
             <a:fld id="{8377380A-1819-462E-96FD-3D6CBD777CA0}" type="datetimeFigureOut">
               <a:rPr lang="en-IL" smtClean="0"/>
-              <a:t>14/08/2025</a:t>
+              <a:t>15/08/2025</a:t>
             </a:fld>
             <a:endParaRPr lang="en-IL"/>
           </a:p>
@@ -2693,7 +2693,7 @@
           <a:p>
             <a:fld id="{8377380A-1819-462E-96FD-3D6CBD777CA0}" type="datetimeFigureOut">
               <a:rPr lang="en-IL" smtClean="0"/>
-              <a:t>14/08/2025</a:t>
+              <a:t>15/08/2025</a:t>
             </a:fld>
             <a:endParaRPr lang="en-IL"/>
           </a:p>
@@ -2936,7 +2936,7 @@
           <a:p>
             <a:fld id="{8377380A-1819-462E-96FD-3D6CBD777CA0}" type="datetimeFigureOut">
               <a:rPr lang="en-IL" smtClean="0"/>
-              <a:t>14/08/2025</a:t>
+              <a:t>15/08/2025</a:t>
             </a:fld>
             <a:endParaRPr lang="en-IL"/>
           </a:p>
@@ -11470,7 +11470,7 @@
         <p:grpSpPr>
           <a:xfrm>
             <a:off x="950614" y="876860"/>
-            <a:ext cx="2031057" cy="1693316"/>
+            <a:ext cx="2031057" cy="1217532"/>
             <a:chOff x="2037028" y="1176951"/>
             <a:chExt cx="3108185" cy="2252047"/>
           </a:xfrm>
@@ -11589,7 +11589,23 @@
                     <a:schemeClr val="tx1"/>
                   </a:solidFill>
                 </a:rPr>
-                <a:t>: int</a:t>
+                <a:t>: </a:t>
+              </a:r>
+              <a:r>
+                <a:rPr lang="en-US" sz="1200" dirty="0" err="1">
+                  <a:solidFill>
+                    <a:schemeClr val="tx1"/>
+                  </a:solidFill>
+                </a:rPr>
+                <a:t>Guid</a:t>
+              </a:r>
+              <a:r>
+                <a:rPr lang="en-US" sz="1200" dirty="0">
+                  <a:solidFill>
+                    <a:schemeClr val="tx1"/>
+                  </a:solidFill>
+                </a:rPr>
+                <a:t> (PK)</a:t>
               </a:r>
             </a:p>
             <a:p>
@@ -11652,20 +11668,6 @@
                 </a:rPr>
                 <a:t> : datetime</a:t>
               </a:r>
-            </a:p>
-            <a:p>
-              <a:endParaRPr lang="en-US" sz="1200" dirty="0">
-                <a:solidFill>
-                  <a:schemeClr val="tx1"/>
-                </a:solidFill>
-              </a:endParaRPr>
-            </a:p>
-            <a:p>
-              <a:endParaRPr lang="en-US" sz="1200" dirty="0">
-                <a:solidFill>
-                  <a:schemeClr val="tx1"/>
-                </a:solidFill>
-              </a:endParaRPr>
             </a:p>
             <a:p>
               <a:endParaRPr lang="en-US" sz="1200" dirty="0">
@@ -11778,7 +11780,7 @@
         </p:nvGrpSpPr>
         <p:grpSpPr>
           <a:xfrm>
-            <a:off x="4040566" y="2645223"/>
+            <a:off x="3915009" y="2201940"/>
             <a:ext cx="2732853" cy="1567554"/>
             <a:chOff x="2029809" y="1176950"/>
             <a:chExt cx="2136619" cy="3410260"/>
@@ -12019,7 +12021,7 @@
         </p:nvSpPr>
         <p:spPr>
           <a:xfrm>
-            <a:off x="3592420" y="3323922"/>
+            <a:off x="3447923" y="2881391"/>
             <a:ext cx="391107" cy="280774"/>
           </a:xfrm>
           <a:prstGeom prst="rect">
@@ -12085,8 +12087,8 @@
         </p:nvCxnSpPr>
         <p:spPr>
           <a:xfrm rot="16200000" flipH="1">
-            <a:off x="2485720" y="2050599"/>
-            <a:ext cx="1035271" cy="2074424"/>
+            <a:off x="2406690" y="1653844"/>
+            <a:ext cx="1067772" cy="1948867"/>
           </a:xfrm>
           <a:prstGeom prst="bentConnector2">
             <a:avLst/>
@@ -12124,8 +12126,8 @@
         </p:nvGrpSpPr>
         <p:grpSpPr>
           <a:xfrm>
-            <a:off x="3915010" y="1180507"/>
-            <a:ext cx="2732855" cy="915347"/>
+            <a:off x="3915009" y="1180507"/>
+            <a:ext cx="3773801" cy="915347"/>
             <a:chOff x="2037028" y="1176951"/>
             <a:chExt cx="3108185" cy="2252047"/>
           </a:xfrm>
@@ -12244,17 +12246,15 @@
                     <a:schemeClr val="tx1"/>
                   </a:solidFill>
                 </a:rPr>
-                <a:t>: int</a:t>
-              </a:r>
-            </a:p>
-            <a:p>
+                <a:t>: </a:t>
+              </a:r>
               <a:r>
                 <a:rPr lang="en-US" sz="1200" dirty="0" err="1">
                   <a:solidFill>
                     <a:schemeClr val="tx1"/>
                   </a:solidFill>
                 </a:rPr>
-                <a:t>User_Id</a:t>
+                <a:t>Guid</a:t>
               </a:r>
               <a:r>
                 <a:rPr lang="en-US" sz="1200" dirty="0">
@@ -12262,17 +12262,25 @@
                     <a:schemeClr val="tx1"/>
                   </a:solidFill>
                 </a:rPr>
-                <a:t> (FK) : int</a:t>
-              </a:r>
-            </a:p>
-            <a:p>
+                <a:t> (PK)</a:t>
+              </a:r>
+            </a:p>
+            <a:p>
+              <a:r>
+                <a:rPr lang="en-US" sz="1200" dirty="0" err="1">
+                  <a:solidFill>
+                    <a:schemeClr val="tx1"/>
+                  </a:solidFill>
+                </a:rPr>
+                <a:t>RoleName</a:t>
+              </a:r>
               <a:r>
                 <a:rPr lang="en-US" sz="1200" dirty="0">
                   <a:solidFill>
                     <a:schemeClr val="tx1"/>
                   </a:solidFill>
                 </a:rPr>
-                <a:t>Role : </a:t>
+                <a:t> : </a:t>
               </a:r>
               <a:r>
                 <a:rPr lang="en-US" sz="1200" dirty="0" err="1">
@@ -12288,7 +12296,7 @@
                     <a:schemeClr val="tx1"/>
                   </a:solidFill>
                 </a:rPr>
-                <a:t> (Admin, </a:t>
+                <a:t> (User = 0, Admin = 1, </a:t>
               </a:r>
               <a:r>
                 <a:rPr lang="en-US" sz="1200" dirty="0" err="1">
@@ -12304,7 +12312,7 @@
                     <a:schemeClr val="tx1"/>
                   </a:solidFill>
                 </a:rPr>
-                <a:t>, User)</a:t>
+                <a:t> = 2)</a:t>
               </a:r>
             </a:p>
             <a:p>

--- a/Documentations/SysArchitecture.pptx
+++ b/Documentations/SysArchitecture.pptx
@@ -10009,10 +10009,18 @@
           <a:p>
             <a:pPr algn="ctr"/>
             <a:r>
-              <a:rPr lang="en-US" dirty="0"/>
+              <a:rPr lang="en-US" dirty="0">
+                <a:solidFill>
+                  <a:schemeClr val="tx1"/>
+                </a:solidFill>
+              </a:rPr>
               <a:t>Customer Data Model</a:t>
             </a:r>
-            <a:endParaRPr lang="en-IL" dirty="0"/>
+            <a:endParaRPr lang="en-IL" dirty="0">
+              <a:solidFill>
+                <a:schemeClr val="tx1"/>
+              </a:solidFill>
+            </a:endParaRPr>
           </a:p>
         </p:txBody>
       </p:sp>
@@ -11759,10 +11767,18 @@
           <a:p>
             <a:pPr algn="ctr"/>
             <a:r>
-              <a:rPr lang="en-US" dirty="0"/>
+              <a:rPr lang="en-US" dirty="0">
+                <a:solidFill>
+                  <a:schemeClr val="tx1"/>
+                </a:solidFill>
+              </a:rPr>
               <a:t>User Data Model</a:t>
             </a:r>
-            <a:endParaRPr lang="en-IL" dirty="0"/>
+            <a:endParaRPr lang="en-IL" dirty="0">
+              <a:solidFill>
+                <a:schemeClr val="tx1"/>
+              </a:solidFill>
+            </a:endParaRPr>
           </a:p>
         </p:txBody>
       </p:sp>
@@ -12837,6 +12853,1497 @@
           <a:chExt cx="0" cy="0"/>
         </a:xfrm>
       </p:grpSpPr>
+      <p:sp>
+        <p:nvSpPr>
+          <p:cNvPr id="2" name="AutoShape 13">
+            <a:extLst>
+              <a:ext uri="{FF2B5EF4-FFF2-40B4-BE49-F238E27FC236}">
+                <a16:creationId xmlns:a16="http://schemas.microsoft.com/office/drawing/2014/main" id="{78FF15C6-2884-A197-AD86-D46D737FF0CB}"/>
+              </a:ext>
+            </a:extLst>
+          </p:cNvPr>
+          <p:cNvSpPr>
+            <a:spLocks noChangeArrowheads="1"/>
+          </p:cNvSpPr>
+          <p:nvPr/>
+        </p:nvSpPr>
+        <p:spPr bwMode="auto">
+          <a:xfrm>
+            <a:off x="74234" y="701263"/>
+            <a:ext cx="1315653" cy="295343"/>
+          </a:xfrm>
+          <a:prstGeom prst="roundRect">
+            <a:avLst>
+              <a:gd name="adj" fmla="val 16667"/>
+            </a:avLst>
+          </a:prstGeom>
+          <a:solidFill>
+            <a:schemeClr val="bg1"/>
+          </a:solidFill>
+          <a:ln w="12700">
+            <a:solidFill>
+              <a:srgbClr val="09101D"/>
+            </a:solidFill>
+            <a:miter lim="800000"/>
+            <a:headEnd/>
+            <a:tailEnd/>
+          </a:ln>
+        </p:spPr>
+        <p:txBody>
+          <a:bodyPr vert="horz" wrap="square" lIns="91440" tIns="45720" rIns="91440" bIns="45720" numCol="1" anchor="ctr" anchorCtr="0" compatLnSpc="1">
+            <a:prstTxWarp prst="textNoShape">
+              <a:avLst/>
+            </a:prstTxWarp>
+          </a:bodyPr>
+          <a:lstStyle/>
+          <a:p>
+            <a:pPr marL="0" marR="0" lvl="0" indent="0" algn="ctr" defTabSz="914400" rtl="0" eaLnBrk="0" fontAlgn="base" latinLnBrk="0" hangingPunct="0">
+              <a:lnSpc>
+                <a:spcPct val="100000"/>
+              </a:lnSpc>
+              <a:spcBef>
+                <a:spcPct val="0"/>
+              </a:spcBef>
+              <a:spcAft>
+                <a:spcPct val="0"/>
+              </a:spcAft>
+              <a:buClrTx/>
+              <a:buSzTx/>
+              <a:buFontTx/>
+              <a:buNone/>
+              <a:tabLst/>
+            </a:pPr>
+            <a:r>
+              <a:rPr kumimoji="0" lang="en-US" altLang="en-IL" b="0" i="0" u="none" strike="noStrike" cap="none" normalizeH="0" baseline="0" dirty="0">
+                <a:ln>
+                  <a:noFill/>
+                </a:ln>
+                <a:solidFill>
+                  <a:schemeClr val="tx1"/>
+                </a:solidFill>
+                <a:effectLst/>
+                <a:latin typeface="Calibri" panose="020F0502020204030204" pitchFamily="34" charset="0"/>
+                <a:ea typeface="Yu Gothic" panose="020B0400000000000000" pitchFamily="34" charset="-128"/>
+                <a:cs typeface="Arial" panose="020B0604020202020204" pitchFamily="34" charset="0"/>
+              </a:rPr>
+              <a:t>A2C (Root)</a:t>
+            </a:r>
+            <a:endParaRPr kumimoji="0" lang="en-IL" altLang="en-IL" sz="4000" b="0" i="0" u="none" strike="noStrike" cap="none" normalizeH="0" baseline="0" dirty="0">
+              <a:ln>
+                <a:noFill/>
+              </a:ln>
+              <a:solidFill>
+                <a:schemeClr val="tx1"/>
+              </a:solidFill>
+              <a:effectLst/>
+              <a:latin typeface="Arial" panose="020B0604020202020204" pitchFamily="34" charset="0"/>
+            </a:endParaRPr>
+          </a:p>
+        </p:txBody>
+      </p:sp>
+      <p:sp>
+        <p:nvSpPr>
+          <p:cNvPr id="3" name="Rectangle 2">
+            <a:extLst>
+              <a:ext uri="{FF2B5EF4-FFF2-40B4-BE49-F238E27FC236}">
+                <a16:creationId xmlns:a16="http://schemas.microsoft.com/office/drawing/2014/main" id="{B4C09A88-5F98-C840-2E68-5720BEC0681D}"/>
+              </a:ext>
+            </a:extLst>
+          </p:cNvPr>
+          <p:cNvSpPr/>
+          <p:nvPr/>
+        </p:nvSpPr>
+        <p:spPr>
+          <a:xfrm>
+            <a:off x="2478179" y="117618"/>
+            <a:ext cx="3385068" cy="466687"/>
+          </a:xfrm>
+          <a:prstGeom prst="rect">
+            <a:avLst/>
+          </a:prstGeom>
+          <a:solidFill>
+            <a:schemeClr val="accent2">
+              <a:lumMod val="40000"/>
+              <a:lumOff val="60000"/>
+            </a:schemeClr>
+          </a:solidFill>
+        </p:spPr>
+        <p:style>
+          <a:lnRef idx="2">
+            <a:schemeClr val="accent1">
+              <a:shade val="15000"/>
+            </a:schemeClr>
+          </a:lnRef>
+          <a:fillRef idx="1">
+            <a:schemeClr val="accent1"/>
+          </a:fillRef>
+          <a:effectRef idx="0">
+            <a:schemeClr val="accent1"/>
+          </a:effectRef>
+          <a:fontRef idx="minor">
+            <a:schemeClr val="lt1"/>
+          </a:fontRef>
+        </p:style>
+        <p:txBody>
+          <a:bodyPr rtlCol="0" anchor="ctr"/>
+          <a:lstStyle/>
+          <a:p>
+            <a:pPr algn="ctr"/>
+            <a:r>
+              <a:rPr lang="en-US" dirty="0">
+                <a:solidFill>
+                  <a:schemeClr val="tx1"/>
+                </a:solidFill>
+              </a:rPr>
+              <a:t>Folders Structure</a:t>
+            </a:r>
+            <a:endParaRPr lang="en-IL" dirty="0">
+              <a:solidFill>
+                <a:schemeClr val="tx1"/>
+              </a:solidFill>
+            </a:endParaRPr>
+          </a:p>
+        </p:txBody>
+      </p:sp>
+      <p:sp>
+        <p:nvSpPr>
+          <p:cNvPr id="4" name="AutoShape 13">
+            <a:extLst>
+              <a:ext uri="{FF2B5EF4-FFF2-40B4-BE49-F238E27FC236}">
+                <a16:creationId xmlns:a16="http://schemas.microsoft.com/office/drawing/2014/main" id="{417BBC80-527E-A9B3-A84D-141B4841DB55}"/>
+              </a:ext>
+            </a:extLst>
+          </p:cNvPr>
+          <p:cNvSpPr>
+            <a:spLocks noChangeArrowheads="1"/>
+          </p:cNvSpPr>
+          <p:nvPr/>
+        </p:nvSpPr>
+        <p:spPr bwMode="auto">
+          <a:xfrm>
+            <a:off x="1298448" y="1842973"/>
+            <a:ext cx="832104" cy="305112"/>
+          </a:xfrm>
+          <a:prstGeom prst="roundRect">
+            <a:avLst>
+              <a:gd name="adj" fmla="val 16667"/>
+            </a:avLst>
+          </a:prstGeom>
+          <a:solidFill>
+            <a:schemeClr val="bg1"/>
+          </a:solidFill>
+          <a:ln w="12700">
+            <a:solidFill>
+              <a:srgbClr val="09101D"/>
+            </a:solidFill>
+            <a:miter lim="800000"/>
+            <a:headEnd/>
+            <a:tailEnd/>
+          </a:ln>
+        </p:spPr>
+        <p:txBody>
+          <a:bodyPr vert="horz" wrap="square" lIns="91440" tIns="45720" rIns="91440" bIns="45720" numCol="1" anchor="ctr" anchorCtr="0" compatLnSpc="1">
+            <a:prstTxWarp prst="textNoShape">
+              <a:avLst/>
+            </a:prstTxWarp>
+          </a:bodyPr>
+          <a:lstStyle/>
+          <a:p>
+            <a:pPr marL="0" marR="0" lvl="0" indent="0" algn="ctr" defTabSz="914400" rtl="0" eaLnBrk="0" fontAlgn="base" latinLnBrk="0" hangingPunct="0">
+              <a:lnSpc>
+                <a:spcPct val="100000"/>
+              </a:lnSpc>
+              <a:spcBef>
+                <a:spcPct val="0"/>
+              </a:spcBef>
+              <a:spcAft>
+                <a:spcPct val="0"/>
+              </a:spcAft>
+              <a:buClrTx/>
+              <a:buSzTx/>
+              <a:buFontTx/>
+              <a:buNone/>
+              <a:tabLst/>
+            </a:pPr>
+            <a:r>
+              <a:rPr kumimoji="0" lang="en-US" altLang="en-IL" b="0" i="0" u="none" strike="noStrike" cap="none" normalizeH="0" baseline="0" dirty="0">
+                <a:ln>
+                  <a:noFill/>
+                </a:ln>
+                <a:solidFill>
+                  <a:schemeClr val="tx1"/>
+                </a:solidFill>
+                <a:effectLst/>
+                <a:latin typeface="Calibri" panose="020F0502020204030204" pitchFamily="34" charset="0"/>
+                <a:ea typeface="Yu Gothic" panose="020B0400000000000000" pitchFamily="34" charset="-128"/>
+                <a:cs typeface="Arial" panose="020B0604020202020204" pitchFamily="34" charset="0"/>
+              </a:rPr>
+              <a:t>Server</a:t>
+            </a:r>
+            <a:endParaRPr kumimoji="0" lang="en-IL" altLang="en-IL" sz="4000" b="0" i="0" u="none" strike="noStrike" cap="none" normalizeH="0" baseline="0" dirty="0">
+              <a:ln>
+                <a:noFill/>
+              </a:ln>
+              <a:solidFill>
+                <a:schemeClr val="tx1"/>
+              </a:solidFill>
+              <a:effectLst/>
+              <a:latin typeface="Arial" panose="020B0604020202020204" pitchFamily="34" charset="0"/>
+            </a:endParaRPr>
+          </a:p>
+        </p:txBody>
+      </p:sp>
+      <p:sp>
+        <p:nvSpPr>
+          <p:cNvPr id="6" name="AutoShape 13">
+            <a:extLst>
+              <a:ext uri="{FF2B5EF4-FFF2-40B4-BE49-F238E27FC236}">
+                <a16:creationId xmlns:a16="http://schemas.microsoft.com/office/drawing/2014/main" id="{EFA49FBE-0BEA-95E9-179B-C50C986B99F4}"/>
+              </a:ext>
+            </a:extLst>
+          </p:cNvPr>
+          <p:cNvSpPr>
+            <a:spLocks noChangeArrowheads="1"/>
+          </p:cNvSpPr>
+          <p:nvPr/>
+        </p:nvSpPr>
+        <p:spPr bwMode="auto">
+          <a:xfrm>
+            <a:off x="1280160" y="1100440"/>
+            <a:ext cx="761080" cy="305112"/>
+          </a:xfrm>
+          <a:prstGeom prst="roundRect">
+            <a:avLst>
+              <a:gd name="adj" fmla="val 16667"/>
+            </a:avLst>
+          </a:prstGeom>
+          <a:solidFill>
+            <a:schemeClr val="bg1"/>
+          </a:solidFill>
+          <a:ln w="12700">
+            <a:solidFill>
+              <a:srgbClr val="09101D"/>
+            </a:solidFill>
+            <a:miter lim="800000"/>
+            <a:headEnd/>
+            <a:tailEnd/>
+          </a:ln>
+        </p:spPr>
+        <p:txBody>
+          <a:bodyPr vert="horz" wrap="square" lIns="91440" tIns="45720" rIns="91440" bIns="45720" numCol="1" anchor="ctr" anchorCtr="0" compatLnSpc="1">
+            <a:prstTxWarp prst="textNoShape">
+              <a:avLst/>
+            </a:prstTxWarp>
+          </a:bodyPr>
+          <a:lstStyle/>
+          <a:p>
+            <a:pPr marL="0" marR="0" lvl="0" indent="0" algn="ctr" defTabSz="914400" rtl="0" eaLnBrk="0" fontAlgn="base" latinLnBrk="0" hangingPunct="0">
+              <a:lnSpc>
+                <a:spcPct val="100000"/>
+              </a:lnSpc>
+              <a:spcBef>
+                <a:spcPct val="0"/>
+              </a:spcBef>
+              <a:spcAft>
+                <a:spcPct val="0"/>
+              </a:spcAft>
+              <a:buClrTx/>
+              <a:buSzTx/>
+              <a:buFontTx/>
+              <a:buNone/>
+              <a:tabLst/>
+            </a:pPr>
+            <a:r>
+              <a:rPr kumimoji="0" lang="en-US" altLang="en-IL" b="0" i="0" u="none" strike="noStrike" cap="none" normalizeH="0" baseline="0" dirty="0">
+                <a:ln>
+                  <a:noFill/>
+                </a:ln>
+                <a:solidFill>
+                  <a:schemeClr val="tx1"/>
+                </a:solidFill>
+                <a:effectLst/>
+                <a:latin typeface="Calibri" panose="020F0502020204030204" pitchFamily="34" charset="0"/>
+                <a:ea typeface="Yu Gothic" panose="020B0400000000000000" pitchFamily="34" charset="-128"/>
+                <a:cs typeface="Arial" panose="020B0604020202020204" pitchFamily="34" charset="0"/>
+              </a:rPr>
+              <a:t>Client</a:t>
+            </a:r>
+            <a:endParaRPr kumimoji="0" lang="en-IL" altLang="en-IL" sz="4000" b="0" i="0" u="none" strike="noStrike" cap="none" normalizeH="0" baseline="0" dirty="0">
+              <a:ln>
+                <a:noFill/>
+              </a:ln>
+              <a:solidFill>
+                <a:schemeClr val="tx1"/>
+              </a:solidFill>
+              <a:effectLst/>
+              <a:latin typeface="Arial" panose="020B0604020202020204" pitchFamily="34" charset="0"/>
+            </a:endParaRPr>
+          </a:p>
+        </p:txBody>
+      </p:sp>
+      <p:sp>
+        <p:nvSpPr>
+          <p:cNvPr id="7" name="AutoShape 13">
+            <a:extLst>
+              <a:ext uri="{FF2B5EF4-FFF2-40B4-BE49-F238E27FC236}">
+                <a16:creationId xmlns:a16="http://schemas.microsoft.com/office/drawing/2014/main" id="{0A62B873-9219-6D42-FED9-1EFD25F683FB}"/>
+              </a:ext>
+            </a:extLst>
+          </p:cNvPr>
+          <p:cNvSpPr>
+            <a:spLocks noChangeArrowheads="1"/>
+          </p:cNvSpPr>
+          <p:nvPr/>
+        </p:nvSpPr>
+        <p:spPr bwMode="auto">
+          <a:xfrm>
+            <a:off x="1283208" y="5817564"/>
+            <a:ext cx="1675482" cy="359441"/>
+          </a:xfrm>
+          <a:prstGeom prst="roundRect">
+            <a:avLst>
+              <a:gd name="adj" fmla="val 16667"/>
+            </a:avLst>
+          </a:prstGeom>
+          <a:solidFill>
+            <a:schemeClr val="bg1"/>
+          </a:solidFill>
+          <a:ln w="12700">
+            <a:solidFill>
+              <a:srgbClr val="09101D"/>
+            </a:solidFill>
+            <a:miter lim="800000"/>
+            <a:headEnd/>
+            <a:tailEnd/>
+          </a:ln>
+        </p:spPr>
+        <p:txBody>
+          <a:bodyPr vert="horz" wrap="square" lIns="91440" tIns="45720" rIns="91440" bIns="45720" numCol="1" anchor="ctr" anchorCtr="0" compatLnSpc="1">
+            <a:prstTxWarp prst="textNoShape">
+              <a:avLst/>
+            </a:prstTxWarp>
+          </a:bodyPr>
+          <a:lstStyle/>
+          <a:p>
+            <a:pPr algn="ctr" eaLnBrk="0" fontAlgn="base" hangingPunct="0">
+              <a:spcBef>
+                <a:spcPct val="0"/>
+              </a:spcBef>
+              <a:spcAft>
+                <a:spcPct val="0"/>
+              </a:spcAft>
+            </a:pPr>
+            <a:r>
+              <a:rPr lang="en-US" altLang="en-IL" dirty="0">
+                <a:latin typeface="Calibri" panose="020F0502020204030204" pitchFamily="34" charset="0"/>
+                <a:ea typeface="Yu Gothic" panose="020B0400000000000000" pitchFamily="34" charset="-128"/>
+                <a:cs typeface="Arial" panose="020B0604020202020204" pitchFamily="34" charset="0"/>
+              </a:rPr>
+              <a:t>Documentation</a:t>
+            </a:r>
+            <a:endParaRPr lang="en-IL" altLang="en-IL" dirty="0">
+              <a:latin typeface="Calibri" panose="020F0502020204030204" pitchFamily="34" charset="0"/>
+              <a:ea typeface="Yu Gothic" panose="020B0400000000000000" pitchFamily="34" charset="-128"/>
+              <a:cs typeface="Arial" panose="020B0604020202020204" pitchFamily="34" charset="0"/>
+            </a:endParaRPr>
+          </a:p>
+        </p:txBody>
+      </p:sp>
+      <p:cxnSp>
+        <p:nvCxnSpPr>
+          <p:cNvPr id="9" name="Straight Connector 8">
+            <a:extLst>
+              <a:ext uri="{FF2B5EF4-FFF2-40B4-BE49-F238E27FC236}">
+                <a16:creationId xmlns:a16="http://schemas.microsoft.com/office/drawing/2014/main" id="{57E11C29-6CF2-2E2F-E747-35691FFFFBC2}"/>
+              </a:ext>
+            </a:extLst>
+          </p:cNvPr>
+          <p:cNvCxnSpPr>
+            <a:cxnSpLocks/>
+          </p:cNvCxnSpPr>
+          <p:nvPr/>
+        </p:nvCxnSpPr>
+        <p:spPr>
+          <a:xfrm flipH="1">
+            <a:off x="625882" y="996606"/>
+            <a:ext cx="8184" cy="4979119"/>
+          </a:xfrm>
+          <a:prstGeom prst="line">
+            <a:avLst/>
+          </a:prstGeom>
+        </p:spPr>
+        <p:style>
+          <a:lnRef idx="2">
+            <a:schemeClr val="accent1"/>
+          </a:lnRef>
+          <a:fillRef idx="0">
+            <a:schemeClr val="accent1"/>
+          </a:fillRef>
+          <a:effectRef idx="1">
+            <a:schemeClr val="accent1"/>
+          </a:effectRef>
+          <a:fontRef idx="minor">
+            <a:schemeClr val="tx1"/>
+          </a:fontRef>
+        </p:style>
+      </p:cxnSp>
+      <p:cxnSp>
+        <p:nvCxnSpPr>
+          <p:cNvPr id="10" name="Straight Connector 9">
+            <a:extLst>
+              <a:ext uri="{FF2B5EF4-FFF2-40B4-BE49-F238E27FC236}">
+                <a16:creationId xmlns:a16="http://schemas.microsoft.com/office/drawing/2014/main" id="{8E575987-DD26-185B-E83A-9C5F84B0A4A3}"/>
+              </a:ext>
+            </a:extLst>
+          </p:cNvPr>
+          <p:cNvCxnSpPr>
+            <a:cxnSpLocks/>
+          </p:cNvCxnSpPr>
+          <p:nvPr/>
+        </p:nvCxnSpPr>
+        <p:spPr>
+          <a:xfrm>
+            <a:off x="634066" y="1280160"/>
+            <a:ext cx="646094" cy="9768"/>
+          </a:xfrm>
+          <a:prstGeom prst="line">
+            <a:avLst/>
+          </a:prstGeom>
+        </p:spPr>
+        <p:style>
+          <a:lnRef idx="2">
+            <a:schemeClr val="accent1"/>
+          </a:lnRef>
+          <a:fillRef idx="0">
+            <a:schemeClr val="accent1"/>
+          </a:fillRef>
+          <a:effectRef idx="1">
+            <a:schemeClr val="accent1"/>
+          </a:effectRef>
+          <a:fontRef idx="minor">
+            <a:schemeClr val="tx1"/>
+          </a:fontRef>
+        </p:style>
+      </p:cxnSp>
+      <p:cxnSp>
+        <p:nvCxnSpPr>
+          <p:cNvPr id="20" name="Straight Connector 19">
+            <a:extLst>
+              <a:ext uri="{FF2B5EF4-FFF2-40B4-BE49-F238E27FC236}">
+                <a16:creationId xmlns:a16="http://schemas.microsoft.com/office/drawing/2014/main" id="{63BA3F4B-DFBF-9FDB-CC15-5D15E7301C4E}"/>
+              </a:ext>
+            </a:extLst>
+          </p:cNvPr>
+          <p:cNvCxnSpPr>
+            <a:cxnSpLocks/>
+          </p:cNvCxnSpPr>
+          <p:nvPr/>
+        </p:nvCxnSpPr>
+        <p:spPr>
+          <a:xfrm>
+            <a:off x="640162" y="2008632"/>
+            <a:ext cx="658286" cy="0"/>
+          </a:xfrm>
+          <a:prstGeom prst="line">
+            <a:avLst/>
+          </a:prstGeom>
+        </p:spPr>
+        <p:style>
+          <a:lnRef idx="2">
+            <a:schemeClr val="accent1"/>
+          </a:lnRef>
+          <a:fillRef idx="0">
+            <a:schemeClr val="accent1"/>
+          </a:fillRef>
+          <a:effectRef idx="1">
+            <a:schemeClr val="accent1"/>
+          </a:effectRef>
+          <a:fontRef idx="minor">
+            <a:schemeClr val="tx1"/>
+          </a:fontRef>
+        </p:style>
+      </p:cxnSp>
+      <p:cxnSp>
+        <p:nvCxnSpPr>
+          <p:cNvPr id="22" name="Straight Connector 21">
+            <a:extLst>
+              <a:ext uri="{FF2B5EF4-FFF2-40B4-BE49-F238E27FC236}">
+                <a16:creationId xmlns:a16="http://schemas.microsoft.com/office/drawing/2014/main" id="{83E70F1E-D267-7CAE-D953-D335D1601B47}"/>
+              </a:ext>
+            </a:extLst>
+          </p:cNvPr>
+          <p:cNvCxnSpPr>
+            <a:cxnSpLocks/>
+          </p:cNvCxnSpPr>
+          <p:nvPr/>
+        </p:nvCxnSpPr>
+        <p:spPr>
+          <a:xfrm>
+            <a:off x="624922" y="5975725"/>
+            <a:ext cx="658286" cy="0"/>
+          </a:xfrm>
+          <a:prstGeom prst="line">
+            <a:avLst/>
+          </a:prstGeom>
+        </p:spPr>
+        <p:style>
+          <a:lnRef idx="2">
+            <a:schemeClr val="accent1"/>
+          </a:lnRef>
+          <a:fillRef idx="0">
+            <a:schemeClr val="accent1"/>
+          </a:fillRef>
+          <a:effectRef idx="1">
+            <a:schemeClr val="accent1"/>
+          </a:effectRef>
+          <a:fontRef idx="minor">
+            <a:schemeClr val="tx1"/>
+          </a:fontRef>
+        </p:style>
+      </p:cxnSp>
+      <p:sp>
+        <p:nvSpPr>
+          <p:cNvPr id="24" name="AutoShape 13">
+            <a:extLst>
+              <a:ext uri="{FF2B5EF4-FFF2-40B4-BE49-F238E27FC236}">
+                <a16:creationId xmlns:a16="http://schemas.microsoft.com/office/drawing/2014/main" id="{7B32EEA7-56D5-EB16-EF79-1E4E9A955A3E}"/>
+              </a:ext>
+            </a:extLst>
+          </p:cNvPr>
+          <p:cNvSpPr>
+            <a:spLocks noChangeArrowheads="1"/>
+          </p:cNvSpPr>
+          <p:nvPr/>
+        </p:nvSpPr>
+        <p:spPr bwMode="auto">
+          <a:xfrm>
+            <a:off x="2235397" y="2419045"/>
+            <a:ext cx="1495356" cy="359440"/>
+          </a:xfrm>
+          <a:prstGeom prst="roundRect">
+            <a:avLst>
+              <a:gd name="adj" fmla="val 16667"/>
+            </a:avLst>
+          </a:prstGeom>
+          <a:solidFill>
+            <a:schemeClr val="bg1"/>
+          </a:solidFill>
+          <a:ln w="12700">
+            <a:solidFill>
+              <a:srgbClr val="09101D"/>
+            </a:solidFill>
+            <a:miter lim="800000"/>
+            <a:headEnd/>
+            <a:tailEnd/>
+          </a:ln>
+        </p:spPr>
+        <p:txBody>
+          <a:bodyPr vert="horz" wrap="square" lIns="91440" tIns="45720" rIns="91440" bIns="45720" numCol="1" anchor="ctr" anchorCtr="0" compatLnSpc="1">
+            <a:prstTxWarp prst="textNoShape">
+              <a:avLst/>
+            </a:prstTxWarp>
+          </a:bodyPr>
+          <a:lstStyle/>
+          <a:p>
+            <a:pPr lvl="0" algn="ctr" eaLnBrk="0" fontAlgn="base" hangingPunct="0">
+              <a:spcBef>
+                <a:spcPct val="0"/>
+              </a:spcBef>
+              <a:spcAft>
+                <a:spcPct val="0"/>
+              </a:spcAft>
+            </a:pPr>
+            <a:r>
+              <a:rPr lang="en-US" altLang="en-IL" dirty="0">
+                <a:latin typeface="Calibri" panose="020F0502020204030204" pitchFamily="34" charset="0"/>
+                <a:ea typeface="Yu Gothic" panose="020B0400000000000000" pitchFamily="34" charset="-128"/>
+                <a:cs typeface="Arial" panose="020B0604020202020204" pitchFamily="34" charset="0"/>
+              </a:rPr>
+              <a:t>A2C.CRM.Api</a:t>
+            </a:r>
+            <a:endParaRPr kumimoji="0" lang="en-IL" altLang="en-IL" sz="4000" b="0" i="0" u="none" strike="noStrike" cap="none" normalizeH="0" baseline="0" dirty="0">
+              <a:ln>
+                <a:noFill/>
+              </a:ln>
+              <a:solidFill>
+                <a:schemeClr val="tx1"/>
+              </a:solidFill>
+              <a:effectLst/>
+              <a:latin typeface="Arial" panose="020B0604020202020204" pitchFamily="34" charset="0"/>
+            </a:endParaRPr>
+          </a:p>
+        </p:txBody>
+      </p:sp>
+      <p:cxnSp>
+        <p:nvCxnSpPr>
+          <p:cNvPr id="26" name="Straight Connector 25">
+            <a:extLst>
+              <a:ext uri="{FF2B5EF4-FFF2-40B4-BE49-F238E27FC236}">
+                <a16:creationId xmlns:a16="http://schemas.microsoft.com/office/drawing/2014/main" id="{5890FA60-DB45-EE3E-82FB-D028DB10995B}"/>
+              </a:ext>
+            </a:extLst>
+          </p:cNvPr>
+          <p:cNvCxnSpPr>
+            <a:cxnSpLocks/>
+          </p:cNvCxnSpPr>
+          <p:nvPr/>
+        </p:nvCxnSpPr>
+        <p:spPr>
+          <a:xfrm>
+            <a:off x="1702914" y="2598764"/>
+            <a:ext cx="532482" cy="0"/>
+          </a:xfrm>
+          <a:prstGeom prst="line">
+            <a:avLst/>
+          </a:prstGeom>
+        </p:spPr>
+        <p:style>
+          <a:lnRef idx="2">
+            <a:schemeClr val="accent1"/>
+          </a:lnRef>
+          <a:fillRef idx="0">
+            <a:schemeClr val="accent1"/>
+          </a:fillRef>
+          <a:effectRef idx="1">
+            <a:schemeClr val="accent1"/>
+          </a:effectRef>
+          <a:fontRef idx="minor">
+            <a:schemeClr val="tx1"/>
+          </a:fontRef>
+        </p:style>
+      </p:cxnSp>
+      <p:cxnSp>
+        <p:nvCxnSpPr>
+          <p:cNvPr id="27" name="Straight Connector 26">
+            <a:extLst>
+              <a:ext uri="{FF2B5EF4-FFF2-40B4-BE49-F238E27FC236}">
+                <a16:creationId xmlns:a16="http://schemas.microsoft.com/office/drawing/2014/main" id="{61B0946D-8097-6B78-E2CF-708C835A14FB}"/>
+              </a:ext>
+            </a:extLst>
+          </p:cNvPr>
+          <p:cNvCxnSpPr>
+            <a:cxnSpLocks/>
+          </p:cNvCxnSpPr>
+          <p:nvPr/>
+        </p:nvCxnSpPr>
+        <p:spPr>
+          <a:xfrm>
+            <a:off x="1702914" y="2156693"/>
+            <a:ext cx="0" cy="442071"/>
+          </a:xfrm>
+          <a:prstGeom prst="line">
+            <a:avLst/>
+          </a:prstGeom>
+        </p:spPr>
+        <p:style>
+          <a:lnRef idx="2">
+            <a:schemeClr val="accent1"/>
+          </a:lnRef>
+          <a:fillRef idx="0">
+            <a:schemeClr val="accent1"/>
+          </a:fillRef>
+          <a:effectRef idx="1">
+            <a:schemeClr val="accent1"/>
+          </a:effectRef>
+          <a:fontRef idx="minor">
+            <a:schemeClr val="tx1"/>
+          </a:fontRef>
+        </p:style>
+      </p:cxnSp>
+      <p:cxnSp>
+        <p:nvCxnSpPr>
+          <p:cNvPr id="31" name="Straight Connector 30">
+            <a:extLst>
+              <a:ext uri="{FF2B5EF4-FFF2-40B4-BE49-F238E27FC236}">
+                <a16:creationId xmlns:a16="http://schemas.microsoft.com/office/drawing/2014/main" id="{B11EEA41-506E-A630-D972-503CEA2836BB}"/>
+              </a:ext>
+            </a:extLst>
+          </p:cNvPr>
+          <p:cNvCxnSpPr>
+            <a:cxnSpLocks/>
+          </p:cNvCxnSpPr>
+          <p:nvPr/>
+        </p:nvCxnSpPr>
+        <p:spPr>
+          <a:xfrm>
+            <a:off x="3005091" y="2778485"/>
+            <a:ext cx="0" cy="2370973"/>
+          </a:xfrm>
+          <a:prstGeom prst="line">
+            <a:avLst/>
+          </a:prstGeom>
+        </p:spPr>
+        <p:style>
+          <a:lnRef idx="2">
+            <a:schemeClr val="accent1"/>
+          </a:lnRef>
+          <a:fillRef idx="0">
+            <a:schemeClr val="accent1"/>
+          </a:fillRef>
+          <a:effectRef idx="1">
+            <a:schemeClr val="accent1"/>
+          </a:effectRef>
+          <a:fontRef idx="minor">
+            <a:schemeClr val="tx1"/>
+          </a:fontRef>
+        </p:style>
+      </p:cxnSp>
+      <p:sp>
+        <p:nvSpPr>
+          <p:cNvPr id="36" name="AutoShape 13">
+            <a:extLst>
+              <a:ext uri="{FF2B5EF4-FFF2-40B4-BE49-F238E27FC236}">
+                <a16:creationId xmlns:a16="http://schemas.microsoft.com/office/drawing/2014/main" id="{CCF9E2EC-1E7B-DB39-289C-77C8A1C62207}"/>
+              </a:ext>
+            </a:extLst>
+          </p:cNvPr>
+          <p:cNvSpPr>
+            <a:spLocks noChangeArrowheads="1"/>
+          </p:cNvSpPr>
+          <p:nvPr/>
+        </p:nvSpPr>
+        <p:spPr bwMode="auto">
+          <a:xfrm>
+            <a:off x="3931920" y="2875013"/>
+            <a:ext cx="1360853" cy="343674"/>
+          </a:xfrm>
+          <a:prstGeom prst="roundRect">
+            <a:avLst>
+              <a:gd name="adj" fmla="val 16667"/>
+            </a:avLst>
+          </a:prstGeom>
+          <a:solidFill>
+            <a:schemeClr val="bg1"/>
+          </a:solidFill>
+          <a:ln w="12700">
+            <a:solidFill>
+              <a:srgbClr val="09101D"/>
+            </a:solidFill>
+            <a:miter lim="800000"/>
+            <a:headEnd/>
+            <a:tailEnd/>
+          </a:ln>
+        </p:spPr>
+        <p:txBody>
+          <a:bodyPr vert="horz" wrap="square" lIns="91440" tIns="45720" rIns="91440" bIns="45720" numCol="1" anchor="ctr" anchorCtr="0" compatLnSpc="1">
+            <a:prstTxWarp prst="textNoShape">
+              <a:avLst/>
+            </a:prstTxWarp>
+          </a:bodyPr>
+          <a:lstStyle/>
+          <a:p>
+            <a:pPr marL="0" marR="0" lvl="0" indent="0" algn="ctr" defTabSz="914400" rtl="0" eaLnBrk="0" fontAlgn="base" latinLnBrk="0" hangingPunct="0">
+              <a:lnSpc>
+                <a:spcPct val="100000"/>
+              </a:lnSpc>
+              <a:spcBef>
+                <a:spcPct val="0"/>
+              </a:spcBef>
+              <a:spcAft>
+                <a:spcPct val="0"/>
+              </a:spcAft>
+              <a:buClrTx/>
+              <a:buSzTx/>
+              <a:buFontTx/>
+              <a:buNone/>
+              <a:tabLst/>
+            </a:pPr>
+            <a:r>
+              <a:rPr kumimoji="0" lang="en-US" altLang="en-IL" b="0" i="0" u="none" strike="noStrike" cap="none" normalizeH="0" baseline="0" dirty="0">
+                <a:ln>
+                  <a:noFill/>
+                </a:ln>
+                <a:solidFill>
+                  <a:schemeClr val="tx1"/>
+                </a:solidFill>
+                <a:effectLst/>
+                <a:latin typeface="Calibri" panose="020F0502020204030204" pitchFamily="34" charset="0"/>
+                <a:ea typeface="Yu Gothic" panose="020B0400000000000000" pitchFamily="34" charset="-128"/>
+                <a:cs typeface="Arial" panose="020B0604020202020204" pitchFamily="34" charset="0"/>
+              </a:rPr>
+              <a:t>Controllers</a:t>
+            </a:r>
+            <a:endParaRPr kumimoji="0" lang="en-IL" altLang="en-IL" sz="4000" b="0" i="0" u="none" strike="noStrike" cap="none" normalizeH="0" baseline="0" dirty="0">
+              <a:ln>
+                <a:noFill/>
+              </a:ln>
+              <a:solidFill>
+                <a:schemeClr val="tx1"/>
+              </a:solidFill>
+              <a:effectLst/>
+              <a:latin typeface="Arial" panose="020B0604020202020204" pitchFamily="34" charset="0"/>
+            </a:endParaRPr>
+          </a:p>
+        </p:txBody>
+      </p:sp>
+      <p:cxnSp>
+        <p:nvCxnSpPr>
+          <p:cNvPr id="37" name="Straight Connector 36">
+            <a:extLst>
+              <a:ext uri="{FF2B5EF4-FFF2-40B4-BE49-F238E27FC236}">
+                <a16:creationId xmlns:a16="http://schemas.microsoft.com/office/drawing/2014/main" id="{FA71ECA9-6020-2668-0F61-288DC1B9B85A}"/>
+              </a:ext>
+            </a:extLst>
+          </p:cNvPr>
+          <p:cNvCxnSpPr>
+            <a:cxnSpLocks/>
+          </p:cNvCxnSpPr>
+          <p:nvPr/>
+        </p:nvCxnSpPr>
+        <p:spPr>
+          <a:xfrm>
+            <a:off x="3005091" y="3052916"/>
+            <a:ext cx="926829" cy="0"/>
+          </a:xfrm>
+          <a:prstGeom prst="line">
+            <a:avLst/>
+          </a:prstGeom>
+        </p:spPr>
+        <p:style>
+          <a:lnRef idx="2">
+            <a:schemeClr val="accent1"/>
+          </a:lnRef>
+          <a:fillRef idx="0">
+            <a:schemeClr val="accent1"/>
+          </a:fillRef>
+          <a:effectRef idx="1">
+            <a:schemeClr val="accent1"/>
+          </a:effectRef>
+          <a:fontRef idx="minor">
+            <a:schemeClr val="tx1"/>
+          </a:fontRef>
+        </p:style>
+      </p:cxnSp>
+      <p:sp>
+        <p:nvSpPr>
+          <p:cNvPr id="39" name="AutoShape 13">
+            <a:extLst>
+              <a:ext uri="{FF2B5EF4-FFF2-40B4-BE49-F238E27FC236}">
+                <a16:creationId xmlns:a16="http://schemas.microsoft.com/office/drawing/2014/main" id="{8F8E0109-A987-3884-2AAF-A55E71AC3CAD}"/>
+              </a:ext>
+            </a:extLst>
+          </p:cNvPr>
+          <p:cNvSpPr>
+            <a:spLocks noChangeArrowheads="1"/>
+          </p:cNvSpPr>
+          <p:nvPr/>
+        </p:nvSpPr>
+        <p:spPr bwMode="auto">
+          <a:xfrm>
+            <a:off x="3931920" y="3293553"/>
+            <a:ext cx="1360853" cy="343674"/>
+          </a:xfrm>
+          <a:prstGeom prst="roundRect">
+            <a:avLst>
+              <a:gd name="adj" fmla="val 16667"/>
+            </a:avLst>
+          </a:prstGeom>
+          <a:solidFill>
+            <a:schemeClr val="bg1"/>
+          </a:solidFill>
+          <a:ln w="12700">
+            <a:solidFill>
+              <a:srgbClr val="09101D"/>
+            </a:solidFill>
+            <a:miter lim="800000"/>
+            <a:headEnd/>
+            <a:tailEnd/>
+          </a:ln>
+        </p:spPr>
+        <p:txBody>
+          <a:bodyPr vert="horz" wrap="square" lIns="91440" tIns="45720" rIns="91440" bIns="45720" numCol="1" anchor="ctr" anchorCtr="0" compatLnSpc="1">
+            <a:prstTxWarp prst="textNoShape">
+              <a:avLst/>
+            </a:prstTxWarp>
+          </a:bodyPr>
+          <a:lstStyle/>
+          <a:p>
+            <a:pPr marL="0" marR="0" lvl="0" indent="0" algn="ctr" defTabSz="914400" rtl="0" eaLnBrk="0" fontAlgn="base" latinLnBrk="0" hangingPunct="0">
+              <a:lnSpc>
+                <a:spcPct val="100000"/>
+              </a:lnSpc>
+              <a:spcBef>
+                <a:spcPct val="0"/>
+              </a:spcBef>
+              <a:spcAft>
+                <a:spcPct val="0"/>
+              </a:spcAft>
+              <a:buClrTx/>
+              <a:buSzTx/>
+              <a:buFontTx/>
+              <a:buNone/>
+              <a:tabLst/>
+            </a:pPr>
+            <a:r>
+              <a:rPr kumimoji="0" lang="en-US" altLang="en-IL" b="0" i="0" u="none" strike="noStrike" cap="none" normalizeH="0" baseline="0" dirty="0">
+                <a:ln>
+                  <a:noFill/>
+                </a:ln>
+                <a:solidFill>
+                  <a:schemeClr val="tx1"/>
+                </a:solidFill>
+                <a:effectLst/>
+                <a:latin typeface="Calibri" panose="020F0502020204030204" pitchFamily="34" charset="0"/>
+                <a:ea typeface="Yu Gothic" panose="020B0400000000000000" pitchFamily="34" charset="-128"/>
+                <a:cs typeface="Arial" panose="020B0604020202020204" pitchFamily="34" charset="0"/>
+              </a:rPr>
+              <a:t>Data</a:t>
+            </a:r>
+            <a:endParaRPr kumimoji="0" lang="en-IL" altLang="en-IL" sz="4000" b="0" i="0" u="none" strike="noStrike" cap="none" normalizeH="0" baseline="0" dirty="0">
+              <a:ln>
+                <a:noFill/>
+              </a:ln>
+              <a:solidFill>
+                <a:schemeClr val="tx1"/>
+              </a:solidFill>
+              <a:effectLst/>
+              <a:latin typeface="Arial" panose="020B0604020202020204" pitchFamily="34" charset="0"/>
+            </a:endParaRPr>
+          </a:p>
+        </p:txBody>
+      </p:sp>
+      <p:cxnSp>
+        <p:nvCxnSpPr>
+          <p:cNvPr id="40" name="Straight Connector 39">
+            <a:extLst>
+              <a:ext uri="{FF2B5EF4-FFF2-40B4-BE49-F238E27FC236}">
+                <a16:creationId xmlns:a16="http://schemas.microsoft.com/office/drawing/2014/main" id="{F73FF06F-D158-D932-7EE8-5D76C7893249}"/>
+              </a:ext>
+            </a:extLst>
+          </p:cNvPr>
+          <p:cNvCxnSpPr>
+            <a:cxnSpLocks/>
+          </p:cNvCxnSpPr>
+          <p:nvPr/>
+        </p:nvCxnSpPr>
+        <p:spPr>
+          <a:xfrm>
+            <a:off x="3005091" y="3471456"/>
+            <a:ext cx="926829" cy="0"/>
+          </a:xfrm>
+          <a:prstGeom prst="line">
+            <a:avLst/>
+          </a:prstGeom>
+        </p:spPr>
+        <p:style>
+          <a:lnRef idx="2">
+            <a:schemeClr val="accent1"/>
+          </a:lnRef>
+          <a:fillRef idx="0">
+            <a:schemeClr val="accent1"/>
+          </a:fillRef>
+          <a:effectRef idx="1">
+            <a:schemeClr val="accent1"/>
+          </a:effectRef>
+          <a:fontRef idx="minor">
+            <a:schemeClr val="tx1"/>
+          </a:fontRef>
+        </p:style>
+      </p:cxnSp>
+      <p:sp>
+        <p:nvSpPr>
+          <p:cNvPr id="41" name="AutoShape 13">
+            <a:extLst>
+              <a:ext uri="{FF2B5EF4-FFF2-40B4-BE49-F238E27FC236}">
+                <a16:creationId xmlns:a16="http://schemas.microsoft.com/office/drawing/2014/main" id="{2A734496-13E5-C552-4657-6D89DA0A227F}"/>
+              </a:ext>
+            </a:extLst>
+          </p:cNvPr>
+          <p:cNvSpPr>
+            <a:spLocks noChangeArrowheads="1"/>
+          </p:cNvSpPr>
+          <p:nvPr/>
+        </p:nvSpPr>
+        <p:spPr bwMode="auto">
+          <a:xfrm>
+            <a:off x="3931920" y="3712731"/>
+            <a:ext cx="1360853" cy="343674"/>
+          </a:xfrm>
+          <a:prstGeom prst="roundRect">
+            <a:avLst>
+              <a:gd name="adj" fmla="val 16667"/>
+            </a:avLst>
+          </a:prstGeom>
+          <a:solidFill>
+            <a:schemeClr val="bg1"/>
+          </a:solidFill>
+          <a:ln w="12700">
+            <a:solidFill>
+              <a:srgbClr val="09101D"/>
+            </a:solidFill>
+            <a:miter lim="800000"/>
+            <a:headEnd/>
+            <a:tailEnd/>
+          </a:ln>
+        </p:spPr>
+        <p:txBody>
+          <a:bodyPr vert="horz" wrap="square" lIns="91440" tIns="45720" rIns="91440" bIns="45720" numCol="1" anchor="ctr" anchorCtr="0" compatLnSpc="1">
+            <a:prstTxWarp prst="textNoShape">
+              <a:avLst/>
+            </a:prstTxWarp>
+          </a:bodyPr>
+          <a:lstStyle/>
+          <a:p>
+            <a:pPr marL="0" marR="0" lvl="0" indent="0" algn="ctr" defTabSz="914400" rtl="0" eaLnBrk="0" fontAlgn="base" latinLnBrk="0" hangingPunct="0">
+              <a:lnSpc>
+                <a:spcPct val="100000"/>
+              </a:lnSpc>
+              <a:spcBef>
+                <a:spcPct val="0"/>
+              </a:spcBef>
+              <a:spcAft>
+                <a:spcPct val="0"/>
+              </a:spcAft>
+              <a:buClrTx/>
+              <a:buSzTx/>
+              <a:buFontTx/>
+              <a:buNone/>
+              <a:tabLst/>
+            </a:pPr>
+            <a:r>
+              <a:rPr kumimoji="0" lang="en-US" altLang="en-IL" b="0" i="0" u="none" strike="noStrike" cap="none" normalizeH="0" baseline="0" dirty="0">
+                <a:ln>
+                  <a:noFill/>
+                </a:ln>
+                <a:solidFill>
+                  <a:schemeClr val="tx1"/>
+                </a:solidFill>
+                <a:effectLst/>
+                <a:latin typeface="Calibri" panose="020F0502020204030204" pitchFamily="34" charset="0"/>
+                <a:ea typeface="Yu Gothic" panose="020B0400000000000000" pitchFamily="34" charset="-128"/>
+                <a:cs typeface="Arial" panose="020B0604020202020204" pitchFamily="34" charset="0"/>
+              </a:rPr>
+              <a:t>DTOs</a:t>
+            </a:r>
+            <a:endParaRPr kumimoji="0" lang="en-IL" altLang="en-IL" sz="4000" b="0" i="0" u="none" strike="noStrike" cap="none" normalizeH="0" baseline="0" dirty="0">
+              <a:ln>
+                <a:noFill/>
+              </a:ln>
+              <a:solidFill>
+                <a:schemeClr val="tx1"/>
+              </a:solidFill>
+              <a:effectLst/>
+              <a:latin typeface="Arial" panose="020B0604020202020204" pitchFamily="34" charset="0"/>
+            </a:endParaRPr>
+          </a:p>
+        </p:txBody>
+      </p:sp>
+      <p:cxnSp>
+        <p:nvCxnSpPr>
+          <p:cNvPr id="42" name="Straight Connector 41">
+            <a:extLst>
+              <a:ext uri="{FF2B5EF4-FFF2-40B4-BE49-F238E27FC236}">
+                <a16:creationId xmlns:a16="http://schemas.microsoft.com/office/drawing/2014/main" id="{CC6E8A8C-157D-F611-36B4-A162546C1B01}"/>
+              </a:ext>
+            </a:extLst>
+          </p:cNvPr>
+          <p:cNvCxnSpPr>
+            <a:cxnSpLocks/>
+          </p:cNvCxnSpPr>
+          <p:nvPr/>
+        </p:nvCxnSpPr>
+        <p:spPr>
+          <a:xfrm>
+            <a:off x="3005091" y="3890634"/>
+            <a:ext cx="926829" cy="0"/>
+          </a:xfrm>
+          <a:prstGeom prst="line">
+            <a:avLst/>
+          </a:prstGeom>
+        </p:spPr>
+        <p:style>
+          <a:lnRef idx="2">
+            <a:schemeClr val="accent1"/>
+          </a:lnRef>
+          <a:fillRef idx="0">
+            <a:schemeClr val="accent1"/>
+          </a:fillRef>
+          <a:effectRef idx="1">
+            <a:schemeClr val="accent1"/>
+          </a:effectRef>
+          <a:fontRef idx="minor">
+            <a:schemeClr val="tx1"/>
+          </a:fontRef>
+        </p:style>
+      </p:cxnSp>
+      <p:sp>
+        <p:nvSpPr>
+          <p:cNvPr id="43" name="AutoShape 13">
+            <a:extLst>
+              <a:ext uri="{FF2B5EF4-FFF2-40B4-BE49-F238E27FC236}">
+                <a16:creationId xmlns:a16="http://schemas.microsoft.com/office/drawing/2014/main" id="{5933977B-1DB3-63B2-5784-1EEAD9086AF0}"/>
+              </a:ext>
+            </a:extLst>
+          </p:cNvPr>
+          <p:cNvSpPr>
+            <a:spLocks noChangeArrowheads="1"/>
+          </p:cNvSpPr>
+          <p:nvPr/>
+        </p:nvSpPr>
+        <p:spPr bwMode="auto">
+          <a:xfrm>
+            <a:off x="3947160" y="4133837"/>
+            <a:ext cx="1360853" cy="343674"/>
+          </a:xfrm>
+          <a:prstGeom prst="roundRect">
+            <a:avLst>
+              <a:gd name="adj" fmla="val 16667"/>
+            </a:avLst>
+          </a:prstGeom>
+          <a:solidFill>
+            <a:schemeClr val="bg1"/>
+          </a:solidFill>
+          <a:ln w="12700">
+            <a:solidFill>
+              <a:srgbClr val="09101D"/>
+            </a:solidFill>
+            <a:miter lim="800000"/>
+            <a:headEnd/>
+            <a:tailEnd/>
+          </a:ln>
+        </p:spPr>
+        <p:txBody>
+          <a:bodyPr vert="horz" wrap="square" lIns="91440" tIns="45720" rIns="91440" bIns="45720" numCol="1" anchor="ctr" anchorCtr="0" compatLnSpc="1">
+            <a:prstTxWarp prst="textNoShape">
+              <a:avLst/>
+            </a:prstTxWarp>
+          </a:bodyPr>
+          <a:lstStyle/>
+          <a:p>
+            <a:pPr marL="0" marR="0" lvl="0" indent="0" algn="ctr" defTabSz="914400" rtl="0" eaLnBrk="0" fontAlgn="base" latinLnBrk="0" hangingPunct="0">
+              <a:lnSpc>
+                <a:spcPct val="100000"/>
+              </a:lnSpc>
+              <a:spcBef>
+                <a:spcPct val="0"/>
+              </a:spcBef>
+              <a:spcAft>
+                <a:spcPct val="0"/>
+              </a:spcAft>
+              <a:buClrTx/>
+              <a:buSzTx/>
+              <a:buFontTx/>
+              <a:buNone/>
+              <a:tabLst/>
+            </a:pPr>
+            <a:r>
+              <a:rPr kumimoji="0" lang="en-US" altLang="en-IL" b="0" i="0" u="none" strike="noStrike" cap="none" normalizeH="0" baseline="0" dirty="0">
+                <a:ln>
+                  <a:noFill/>
+                </a:ln>
+                <a:solidFill>
+                  <a:schemeClr val="tx1"/>
+                </a:solidFill>
+                <a:effectLst/>
+                <a:latin typeface="Calibri" panose="020F0502020204030204" pitchFamily="34" charset="0"/>
+                <a:ea typeface="Yu Gothic" panose="020B0400000000000000" pitchFamily="34" charset="-128"/>
+                <a:cs typeface="Arial" panose="020B0604020202020204" pitchFamily="34" charset="0"/>
+              </a:rPr>
+              <a:t>Migrations</a:t>
+            </a:r>
+            <a:endParaRPr kumimoji="0" lang="en-IL" altLang="en-IL" sz="4000" b="0" i="0" u="none" strike="noStrike" cap="none" normalizeH="0" baseline="0" dirty="0">
+              <a:ln>
+                <a:noFill/>
+              </a:ln>
+              <a:solidFill>
+                <a:schemeClr val="tx1"/>
+              </a:solidFill>
+              <a:effectLst/>
+              <a:latin typeface="Arial" panose="020B0604020202020204" pitchFamily="34" charset="0"/>
+            </a:endParaRPr>
+          </a:p>
+        </p:txBody>
+      </p:sp>
+      <p:cxnSp>
+        <p:nvCxnSpPr>
+          <p:cNvPr id="44" name="Straight Connector 43">
+            <a:extLst>
+              <a:ext uri="{FF2B5EF4-FFF2-40B4-BE49-F238E27FC236}">
+                <a16:creationId xmlns:a16="http://schemas.microsoft.com/office/drawing/2014/main" id="{0981965D-7B11-335C-EF5A-F7521F817921}"/>
+              </a:ext>
+            </a:extLst>
+          </p:cNvPr>
+          <p:cNvCxnSpPr>
+            <a:cxnSpLocks/>
+          </p:cNvCxnSpPr>
+          <p:nvPr/>
+        </p:nvCxnSpPr>
+        <p:spPr>
+          <a:xfrm>
+            <a:off x="3020331" y="4311740"/>
+            <a:ext cx="926829" cy="0"/>
+          </a:xfrm>
+          <a:prstGeom prst="line">
+            <a:avLst/>
+          </a:prstGeom>
+        </p:spPr>
+        <p:style>
+          <a:lnRef idx="2">
+            <a:schemeClr val="accent1"/>
+          </a:lnRef>
+          <a:fillRef idx="0">
+            <a:schemeClr val="accent1"/>
+          </a:fillRef>
+          <a:effectRef idx="1">
+            <a:schemeClr val="accent1"/>
+          </a:effectRef>
+          <a:fontRef idx="minor">
+            <a:schemeClr val="tx1"/>
+          </a:fontRef>
+        </p:style>
+      </p:cxnSp>
+      <p:sp>
+        <p:nvSpPr>
+          <p:cNvPr id="45" name="AutoShape 13">
+            <a:extLst>
+              <a:ext uri="{FF2B5EF4-FFF2-40B4-BE49-F238E27FC236}">
+                <a16:creationId xmlns:a16="http://schemas.microsoft.com/office/drawing/2014/main" id="{E9F760B8-FB4B-4A4B-BABE-2BF40D33C5E5}"/>
+              </a:ext>
+            </a:extLst>
+          </p:cNvPr>
+          <p:cNvSpPr>
+            <a:spLocks noChangeArrowheads="1"/>
+          </p:cNvSpPr>
+          <p:nvPr/>
+        </p:nvSpPr>
+        <p:spPr bwMode="auto">
+          <a:xfrm>
+            <a:off x="3947160" y="4552377"/>
+            <a:ext cx="1360853" cy="343674"/>
+          </a:xfrm>
+          <a:prstGeom prst="roundRect">
+            <a:avLst>
+              <a:gd name="adj" fmla="val 16667"/>
+            </a:avLst>
+          </a:prstGeom>
+          <a:solidFill>
+            <a:schemeClr val="bg1"/>
+          </a:solidFill>
+          <a:ln w="12700">
+            <a:solidFill>
+              <a:srgbClr val="09101D"/>
+            </a:solidFill>
+            <a:miter lim="800000"/>
+            <a:headEnd/>
+            <a:tailEnd/>
+          </a:ln>
+        </p:spPr>
+        <p:txBody>
+          <a:bodyPr vert="horz" wrap="square" lIns="91440" tIns="45720" rIns="91440" bIns="45720" numCol="1" anchor="ctr" anchorCtr="0" compatLnSpc="1">
+            <a:prstTxWarp prst="textNoShape">
+              <a:avLst/>
+            </a:prstTxWarp>
+          </a:bodyPr>
+          <a:lstStyle/>
+          <a:p>
+            <a:pPr marL="0" marR="0" lvl="0" indent="0" algn="ctr" defTabSz="914400" rtl="0" eaLnBrk="0" fontAlgn="base" latinLnBrk="0" hangingPunct="0">
+              <a:lnSpc>
+                <a:spcPct val="100000"/>
+              </a:lnSpc>
+              <a:spcBef>
+                <a:spcPct val="0"/>
+              </a:spcBef>
+              <a:spcAft>
+                <a:spcPct val="0"/>
+              </a:spcAft>
+              <a:buClrTx/>
+              <a:buSzTx/>
+              <a:buFontTx/>
+              <a:buNone/>
+              <a:tabLst/>
+            </a:pPr>
+            <a:r>
+              <a:rPr kumimoji="0" lang="en-US" altLang="en-IL" b="0" i="0" u="none" strike="noStrike" cap="none" normalizeH="0" baseline="0" dirty="0">
+                <a:ln>
+                  <a:noFill/>
+                </a:ln>
+                <a:solidFill>
+                  <a:schemeClr val="tx1"/>
+                </a:solidFill>
+                <a:effectLst/>
+                <a:latin typeface="Calibri" panose="020F0502020204030204" pitchFamily="34" charset="0"/>
+                <a:ea typeface="Yu Gothic" panose="020B0400000000000000" pitchFamily="34" charset="-128"/>
+                <a:cs typeface="Arial" panose="020B0604020202020204" pitchFamily="34" charset="0"/>
+              </a:rPr>
+              <a:t>Models</a:t>
+            </a:r>
+            <a:endParaRPr kumimoji="0" lang="en-IL" altLang="en-IL" sz="4000" b="0" i="0" u="none" strike="noStrike" cap="none" normalizeH="0" baseline="0" dirty="0">
+              <a:ln>
+                <a:noFill/>
+              </a:ln>
+              <a:solidFill>
+                <a:schemeClr val="tx1"/>
+              </a:solidFill>
+              <a:effectLst/>
+              <a:latin typeface="Arial" panose="020B0604020202020204" pitchFamily="34" charset="0"/>
+            </a:endParaRPr>
+          </a:p>
+        </p:txBody>
+      </p:sp>
+      <p:sp>
+        <p:nvSpPr>
+          <p:cNvPr id="46" name="AutoShape 13">
+            <a:extLst>
+              <a:ext uri="{FF2B5EF4-FFF2-40B4-BE49-F238E27FC236}">
+                <a16:creationId xmlns:a16="http://schemas.microsoft.com/office/drawing/2014/main" id="{42836964-E83A-B3D7-BB20-15372CAA0FA3}"/>
+              </a:ext>
+            </a:extLst>
+          </p:cNvPr>
+          <p:cNvSpPr>
+            <a:spLocks noChangeArrowheads="1"/>
+          </p:cNvSpPr>
+          <p:nvPr/>
+        </p:nvSpPr>
+        <p:spPr bwMode="auto">
+          <a:xfrm>
+            <a:off x="3947160" y="4971555"/>
+            <a:ext cx="1360853" cy="343674"/>
+          </a:xfrm>
+          <a:prstGeom prst="roundRect">
+            <a:avLst>
+              <a:gd name="adj" fmla="val 16667"/>
+            </a:avLst>
+          </a:prstGeom>
+          <a:solidFill>
+            <a:schemeClr val="bg1"/>
+          </a:solidFill>
+          <a:ln w="12700">
+            <a:solidFill>
+              <a:srgbClr val="09101D"/>
+            </a:solidFill>
+            <a:miter lim="800000"/>
+            <a:headEnd/>
+            <a:tailEnd/>
+          </a:ln>
+        </p:spPr>
+        <p:txBody>
+          <a:bodyPr vert="horz" wrap="square" lIns="91440" tIns="45720" rIns="91440" bIns="45720" numCol="1" anchor="ctr" anchorCtr="0" compatLnSpc="1">
+            <a:prstTxWarp prst="textNoShape">
+              <a:avLst/>
+            </a:prstTxWarp>
+          </a:bodyPr>
+          <a:lstStyle/>
+          <a:p>
+            <a:pPr marL="0" marR="0" lvl="0" indent="0" algn="ctr" defTabSz="914400" rtl="0" eaLnBrk="0" fontAlgn="base" latinLnBrk="0" hangingPunct="0">
+              <a:lnSpc>
+                <a:spcPct val="100000"/>
+              </a:lnSpc>
+              <a:spcBef>
+                <a:spcPct val="0"/>
+              </a:spcBef>
+              <a:spcAft>
+                <a:spcPct val="0"/>
+              </a:spcAft>
+              <a:buClrTx/>
+              <a:buSzTx/>
+              <a:buFontTx/>
+              <a:buNone/>
+              <a:tabLst/>
+            </a:pPr>
+            <a:r>
+              <a:rPr kumimoji="0" lang="en-US" altLang="en-IL" b="0" i="0" u="none" strike="noStrike" cap="none" normalizeH="0" baseline="0" dirty="0">
+                <a:ln>
+                  <a:noFill/>
+                </a:ln>
+                <a:solidFill>
+                  <a:schemeClr val="tx1"/>
+                </a:solidFill>
+                <a:effectLst/>
+                <a:latin typeface="Calibri" panose="020F0502020204030204" pitchFamily="34" charset="0"/>
+                <a:ea typeface="Yu Gothic" panose="020B0400000000000000" pitchFamily="34" charset="-128"/>
+                <a:cs typeface="Arial" panose="020B0604020202020204" pitchFamily="34" charset="0"/>
+              </a:rPr>
+              <a:t>Properties</a:t>
+            </a:r>
+            <a:endParaRPr kumimoji="0" lang="en-IL" altLang="en-IL" sz="4000" b="0" i="0" u="none" strike="noStrike" cap="none" normalizeH="0" baseline="0" dirty="0">
+              <a:ln>
+                <a:noFill/>
+              </a:ln>
+              <a:solidFill>
+                <a:schemeClr val="tx1"/>
+              </a:solidFill>
+              <a:effectLst/>
+              <a:latin typeface="Arial" panose="020B0604020202020204" pitchFamily="34" charset="0"/>
+            </a:endParaRPr>
+          </a:p>
+        </p:txBody>
+      </p:sp>
+      <p:cxnSp>
+        <p:nvCxnSpPr>
+          <p:cNvPr id="47" name="Straight Connector 46">
+            <a:extLst>
+              <a:ext uri="{FF2B5EF4-FFF2-40B4-BE49-F238E27FC236}">
+                <a16:creationId xmlns:a16="http://schemas.microsoft.com/office/drawing/2014/main" id="{FB9F25E6-DF5D-3A72-F754-0F0447644D2F}"/>
+              </a:ext>
+            </a:extLst>
+          </p:cNvPr>
+          <p:cNvCxnSpPr>
+            <a:cxnSpLocks/>
+          </p:cNvCxnSpPr>
+          <p:nvPr/>
+        </p:nvCxnSpPr>
+        <p:spPr>
+          <a:xfrm>
+            <a:off x="3020331" y="5149458"/>
+            <a:ext cx="926829" cy="0"/>
+          </a:xfrm>
+          <a:prstGeom prst="line">
+            <a:avLst/>
+          </a:prstGeom>
+        </p:spPr>
+        <p:style>
+          <a:lnRef idx="2">
+            <a:schemeClr val="accent1"/>
+          </a:lnRef>
+          <a:fillRef idx="0">
+            <a:schemeClr val="accent1"/>
+          </a:fillRef>
+          <a:effectRef idx="1">
+            <a:schemeClr val="accent1"/>
+          </a:effectRef>
+          <a:fontRef idx="minor">
+            <a:schemeClr val="tx1"/>
+          </a:fontRef>
+        </p:style>
+      </p:cxnSp>
+      <p:cxnSp>
+        <p:nvCxnSpPr>
+          <p:cNvPr id="48" name="Straight Connector 47">
+            <a:extLst>
+              <a:ext uri="{FF2B5EF4-FFF2-40B4-BE49-F238E27FC236}">
+                <a16:creationId xmlns:a16="http://schemas.microsoft.com/office/drawing/2014/main" id="{10FF5E8C-87F0-8001-0491-F0E429B85F20}"/>
+              </a:ext>
+            </a:extLst>
+          </p:cNvPr>
+          <p:cNvCxnSpPr>
+            <a:cxnSpLocks/>
+          </p:cNvCxnSpPr>
+          <p:nvPr/>
+        </p:nvCxnSpPr>
+        <p:spPr>
+          <a:xfrm>
+            <a:off x="3020331" y="4719690"/>
+            <a:ext cx="926829" cy="0"/>
+          </a:xfrm>
+          <a:prstGeom prst="line">
+            <a:avLst/>
+          </a:prstGeom>
+        </p:spPr>
+        <p:style>
+          <a:lnRef idx="2">
+            <a:schemeClr val="accent1"/>
+          </a:lnRef>
+          <a:fillRef idx="0">
+            <a:schemeClr val="accent1"/>
+          </a:fillRef>
+          <a:effectRef idx="1">
+            <a:schemeClr val="accent1"/>
+          </a:effectRef>
+          <a:fontRef idx="minor">
+            <a:schemeClr val="tx1"/>
+          </a:fontRef>
+        </p:style>
+      </p:cxnSp>
     </p:spTree>
     <p:extLst>
       <p:ext uri="{BB962C8B-B14F-4D97-AF65-F5344CB8AC3E}">

--- a/Documentations/SysArchitecture.pptx
+++ b/Documentations/SysArchitecture.pptx
@@ -8,10 +8,12 @@
     <p:sldId id="256" r:id="rId2"/>
     <p:sldId id="266" r:id="rId3"/>
     <p:sldId id="261" r:id="rId4"/>
-    <p:sldId id="262" r:id="rId5"/>
-    <p:sldId id="264" r:id="rId6"/>
-    <p:sldId id="267" r:id="rId7"/>
-    <p:sldId id="265" r:id="rId8"/>
+    <p:sldId id="268" r:id="rId5"/>
+    <p:sldId id="269" r:id="rId6"/>
+    <p:sldId id="262" r:id="rId7"/>
+    <p:sldId id="264" r:id="rId8"/>
+    <p:sldId id="267" r:id="rId9"/>
+    <p:sldId id="265" r:id="rId10"/>
   </p:sldIdLst>
   <p:sldSz cx="12192000" cy="6858000"/>
   <p:notesSz cx="6858000" cy="9144000"/>
@@ -267,7 +269,7 @@
           <a:p>
             <a:fld id="{8377380A-1819-462E-96FD-3D6CBD777CA0}" type="datetimeFigureOut">
               <a:rPr lang="en-IL" smtClean="0"/>
-              <a:t>15/08/2025</a:t>
+              <a:t>16/08/2025</a:t>
             </a:fld>
             <a:endParaRPr lang="en-IL"/>
           </a:p>
@@ -467,7 +469,7 @@
           <a:p>
             <a:fld id="{8377380A-1819-462E-96FD-3D6CBD777CA0}" type="datetimeFigureOut">
               <a:rPr lang="en-IL" smtClean="0"/>
-              <a:t>15/08/2025</a:t>
+              <a:t>16/08/2025</a:t>
             </a:fld>
             <a:endParaRPr lang="en-IL"/>
           </a:p>
@@ -677,7 +679,7 @@
           <a:p>
             <a:fld id="{8377380A-1819-462E-96FD-3D6CBD777CA0}" type="datetimeFigureOut">
               <a:rPr lang="en-IL" smtClean="0"/>
-              <a:t>15/08/2025</a:t>
+              <a:t>16/08/2025</a:t>
             </a:fld>
             <a:endParaRPr lang="en-IL"/>
           </a:p>
@@ -877,7 +879,7 @@
           <a:p>
             <a:fld id="{8377380A-1819-462E-96FD-3D6CBD777CA0}" type="datetimeFigureOut">
               <a:rPr lang="en-IL" smtClean="0"/>
-              <a:t>15/08/2025</a:t>
+              <a:t>16/08/2025</a:t>
             </a:fld>
             <a:endParaRPr lang="en-IL"/>
           </a:p>
@@ -1153,7 +1155,7 @@
           <a:p>
             <a:fld id="{8377380A-1819-462E-96FD-3D6CBD777CA0}" type="datetimeFigureOut">
               <a:rPr lang="en-IL" smtClean="0"/>
-              <a:t>15/08/2025</a:t>
+              <a:t>16/08/2025</a:t>
             </a:fld>
             <a:endParaRPr lang="en-IL"/>
           </a:p>
@@ -1421,7 +1423,7 @@
           <a:p>
             <a:fld id="{8377380A-1819-462E-96FD-3D6CBD777CA0}" type="datetimeFigureOut">
               <a:rPr lang="en-IL" smtClean="0"/>
-              <a:t>15/08/2025</a:t>
+              <a:t>16/08/2025</a:t>
             </a:fld>
             <a:endParaRPr lang="en-IL"/>
           </a:p>
@@ -1836,7 +1838,7 @@
           <a:p>
             <a:fld id="{8377380A-1819-462E-96FD-3D6CBD777CA0}" type="datetimeFigureOut">
               <a:rPr lang="en-IL" smtClean="0"/>
-              <a:t>15/08/2025</a:t>
+              <a:t>16/08/2025</a:t>
             </a:fld>
             <a:endParaRPr lang="en-IL"/>
           </a:p>
@@ -1978,7 +1980,7 @@
           <a:p>
             <a:fld id="{8377380A-1819-462E-96FD-3D6CBD777CA0}" type="datetimeFigureOut">
               <a:rPr lang="en-IL" smtClean="0"/>
-              <a:t>15/08/2025</a:t>
+              <a:t>16/08/2025</a:t>
             </a:fld>
             <a:endParaRPr lang="en-IL"/>
           </a:p>
@@ -2091,7 +2093,7 @@
           <a:p>
             <a:fld id="{8377380A-1819-462E-96FD-3D6CBD777CA0}" type="datetimeFigureOut">
               <a:rPr lang="en-IL" smtClean="0"/>
-              <a:t>15/08/2025</a:t>
+              <a:t>16/08/2025</a:t>
             </a:fld>
             <a:endParaRPr lang="en-IL"/>
           </a:p>
@@ -2404,7 +2406,7 @@
           <a:p>
             <a:fld id="{8377380A-1819-462E-96FD-3D6CBD777CA0}" type="datetimeFigureOut">
               <a:rPr lang="en-IL" smtClean="0"/>
-              <a:t>15/08/2025</a:t>
+              <a:t>16/08/2025</a:t>
             </a:fld>
             <a:endParaRPr lang="en-IL"/>
           </a:p>
@@ -2693,7 +2695,7 @@
           <a:p>
             <a:fld id="{8377380A-1819-462E-96FD-3D6CBD777CA0}" type="datetimeFigureOut">
               <a:rPr lang="en-IL" smtClean="0"/>
-              <a:t>15/08/2025</a:t>
+              <a:t>16/08/2025</a:t>
             </a:fld>
             <a:endParaRPr lang="en-IL"/>
           </a:p>
@@ -2936,7 +2938,7 @@
           <a:p>
             <a:fld id="{8377380A-1819-462E-96FD-3D6CBD777CA0}" type="datetimeFigureOut">
               <a:rPr lang="en-IL" smtClean="0"/>
-              <a:t>15/08/2025</a:t>
+              <a:t>16/08/2025</a:t>
             </a:fld>
             <a:endParaRPr lang="en-IL"/>
           </a:p>
@@ -8585,6 +8587,1609 @@
           <a:chExt cx="0" cy="0"/>
         </a:xfrm>
       </p:grpSpPr>
+      <p:sp>
+        <p:nvSpPr>
+          <p:cNvPr id="3" name="Rectangle 2">
+            <a:extLst>
+              <a:ext uri="{FF2B5EF4-FFF2-40B4-BE49-F238E27FC236}">
+                <a16:creationId xmlns:a16="http://schemas.microsoft.com/office/drawing/2014/main" id="{436CD954-48C9-7D5D-A37B-8130EF956A53}"/>
+              </a:ext>
+            </a:extLst>
+          </p:cNvPr>
+          <p:cNvSpPr>
+            <a:spLocks noChangeArrowheads="1"/>
+          </p:cNvSpPr>
+          <p:nvPr/>
+        </p:nvSpPr>
+        <p:spPr bwMode="auto">
+          <a:xfrm>
+            <a:off x="2121408" y="797363"/>
+            <a:ext cx="5769864" cy="3180277"/>
+          </a:xfrm>
+          <a:prstGeom prst="rect">
+            <a:avLst/>
+          </a:prstGeom>
+          <a:solidFill>
+            <a:srgbClr val="FAFAFA"/>
+          </a:solidFill>
+          <a:ln>
+            <a:noFill/>
+          </a:ln>
+          <a:effectLst/>
+          <a:extLst>
+            <a:ext uri="{91240B29-F687-4F45-9708-019B960494DF}">
+              <a14:hiddenLine xmlns:a14="http://schemas.microsoft.com/office/drawing/2010/main" w="9525">
+                <a:solidFill>
+                  <a:schemeClr val="tx1"/>
+                </a:solidFill>
+                <a:miter lim="800000"/>
+                <a:headEnd/>
+                <a:tailEnd/>
+              </a14:hiddenLine>
+            </a:ext>
+            <a:ext uri="{AF507438-7753-43E0-B8FC-AC1667EBCBE1}">
+              <a14:hiddenEffects xmlns:a14="http://schemas.microsoft.com/office/drawing/2010/main">
+                <a:effectLst>
+                  <a:outerShdw dist="35921" dir="2700000" algn="ctr" rotWithShape="0">
+                    <a:schemeClr val="bg2"/>
+                  </a:outerShdw>
+                </a:effectLst>
+              </a14:hiddenEffects>
+            </a:ext>
+          </a:extLst>
+        </p:spPr>
+        <p:txBody>
+          <a:bodyPr vert="horz" wrap="square" lIns="0" tIns="107916" rIns="0" bIns="146004" numCol="1" anchor="ctr" anchorCtr="0" compatLnSpc="1">
+            <a:prstTxWarp prst="textNoShape">
+              <a:avLst/>
+            </a:prstTxWarp>
+            <a:spAutoFit/>
+          </a:bodyPr>
+          <a:lstStyle/>
+          <a:p>
+            <a:pPr marL="0" marR="0" lvl="0" indent="0" algn="l" defTabSz="914400" rtl="0" eaLnBrk="0" fontAlgn="base" latinLnBrk="0" hangingPunct="0">
+              <a:lnSpc>
+                <a:spcPct val="100000"/>
+              </a:lnSpc>
+              <a:spcBef>
+                <a:spcPct val="0"/>
+              </a:spcBef>
+              <a:spcAft>
+                <a:spcPct val="0"/>
+              </a:spcAft>
+              <a:buClrTx/>
+              <a:buSzTx/>
+              <a:buFontTx/>
+              <a:buNone/>
+              <a:tabLst/>
+            </a:pPr>
+            <a:r>
+              <a:rPr kumimoji="0" lang="en-IL" altLang="en-IL" sz="1000" b="0" i="0" u="none" strike="noStrike" cap="none" normalizeH="0" baseline="0" dirty="0">
+                <a:ln>
+                  <a:noFill/>
+                </a:ln>
+                <a:solidFill>
+                  <a:srgbClr val="424242"/>
+                </a:solidFill>
+                <a:effectLst/>
+                <a:latin typeface="Arial Unicode MS"/>
+                <a:ea typeface="source-code-pro"/>
+              </a:rPr>
+              <a:t>A2C/ </a:t>
+            </a:r>
+            <a:endParaRPr kumimoji="0" lang="en-US" altLang="en-IL" sz="1000" b="0" i="0" u="none" strike="noStrike" cap="none" normalizeH="0" baseline="0" dirty="0">
+              <a:ln>
+                <a:noFill/>
+              </a:ln>
+              <a:solidFill>
+                <a:srgbClr val="424242"/>
+              </a:solidFill>
+              <a:effectLst/>
+              <a:latin typeface="Arial Unicode MS"/>
+              <a:ea typeface="source-code-pro"/>
+            </a:endParaRPr>
+          </a:p>
+          <a:p>
+            <a:pPr marL="0" marR="0" lvl="0" indent="0" algn="l" defTabSz="914400" rtl="0" eaLnBrk="0" fontAlgn="base" latinLnBrk="0" hangingPunct="0">
+              <a:lnSpc>
+                <a:spcPct val="100000"/>
+              </a:lnSpc>
+              <a:spcBef>
+                <a:spcPct val="0"/>
+              </a:spcBef>
+              <a:spcAft>
+                <a:spcPct val="0"/>
+              </a:spcAft>
+              <a:buClrTx/>
+              <a:buSzTx/>
+              <a:buFontTx/>
+              <a:buNone/>
+              <a:tabLst/>
+            </a:pPr>
+            <a:r>
+              <a:rPr kumimoji="0" lang="en-IL" altLang="en-IL" sz="1000" b="0" i="0" u="none" strike="noStrike" cap="none" normalizeH="0" baseline="0" dirty="0">
+                <a:ln>
+                  <a:noFill/>
+                </a:ln>
+                <a:solidFill>
+                  <a:srgbClr val="424242"/>
+                </a:solidFill>
+                <a:effectLst/>
+                <a:latin typeface="Arial Unicode MS"/>
+                <a:ea typeface="source-code-pro"/>
+              </a:rPr>
+              <a:t>├── Client/</a:t>
+            </a:r>
+            <a:r>
+              <a:rPr kumimoji="0" lang="en-US" altLang="en-IL" sz="1000" b="0" i="0" u="none" strike="noStrike" cap="none" normalizeH="0" baseline="0" dirty="0">
+                <a:ln>
+                  <a:noFill/>
+                </a:ln>
+                <a:solidFill>
+                  <a:srgbClr val="424242"/>
+                </a:solidFill>
+                <a:effectLst/>
+                <a:latin typeface="Arial Unicode MS"/>
+                <a:ea typeface="source-code-pro"/>
+              </a:rPr>
+              <a:t>                       		</a:t>
+            </a:r>
+            <a:r>
+              <a:rPr kumimoji="0" lang="en-IL" altLang="en-IL" sz="1000" b="0" i="0" u="none" strike="noStrike" cap="none" normalizeH="0" baseline="0" dirty="0">
+                <a:ln>
+                  <a:noFill/>
+                </a:ln>
+                <a:solidFill>
+                  <a:srgbClr val="424242"/>
+                </a:solidFill>
+                <a:effectLst/>
+                <a:latin typeface="Arial Unicode MS"/>
+                <a:ea typeface="source-code-pro"/>
+              </a:rPr>
+              <a:t>← Frontend (React) </a:t>
+            </a:r>
+            <a:endParaRPr kumimoji="0" lang="en-US" altLang="en-IL" sz="1000" b="0" i="0" u="none" strike="noStrike" cap="none" normalizeH="0" baseline="0" dirty="0">
+              <a:ln>
+                <a:noFill/>
+              </a:ln>
+              <a:solidFill>
+                <a:srgbClr val="424242"/>
+              </a:solidFill>
+              <a:effectLst/>
+              <a:latin typeface="Arial Unicode MS"/>
+              <a:ea typeface="source-code-pro"/>
+            </a:endParaRPr>
+          </a:p>
+          <a:p>
+            <a:pPr marL="0" marR="0" lvl="0" indent="0" algn="l" defTabSz="914400" rtl="0" eaLnBrk="0" fontAlgn="base" latinLnBrk="0" hangingPunct="0">
+              <a:lnSpc>
+                <a:spcPct val="100000"/>
+              </a:lnSpc>
+              <a:spcBef>
+                <a:spcPct val="0"/>
+              </a:spcBef>
+              <a:spcAft>
+                <a:spcPct val="0"/>
+              </a:spcAft>
+              <a:buClrTx/>
+              <a:buSzTx/>
+              <a:buFontTx/>
+              <a:buNone/>
+              <a:tabLst/>
+            </a:pPr>
+            <a:r>
+              <a:rPr kumimoji="0" lang="en-IL" altLang="en-IL" sz="1000" b="0" i="0" u="none" strike="noStrike" cap="none" normalizeH="0" baseline="0" dirty="0">
+                <a:ln>
+                  <a:noFill/>
+                </a:ln>
+                <a:solidFill>
+                  <a:srgbClr val="424242"/>
+                </a:solidFill>
+                <a:effectLst/>
+                <a:latin typeface="Arial Unicode MS"/>
+                <a:ea typeface="source-code-pro"/>
+              </a:rPr>
+              <a:t>├── Server/</a:t>
+            </a:r>
+            <a:r>
+              <a:rPr kumimoji="0" lang="en-US" altLang="en-IL" sz="1000" b="0" i="0" u="none" strike="noStrike" cap="none" normalizeH="0" baseline="0" dirty="0">
+                <a:ln>
+                  <a:noFill/>
+                </a:ln>
+                <a:solidFill>
+                  <a:srgbClr val="424242"/>
+                </a:solidFill>
+                <a:effectLst/>
+                <a:latin typeface="Arial Unicode MS"/>
+                <a:ea typeface="source-code-pro"/>
+              </a:rPr>
+              <a:t>                      </a:t>
+            </a:r>
+            <a:r>
+              <a:rPr kumimoji="0" lang="en-IL" altLang="en-IL" sz="1000" b="0" i="0" u="none" strike="noStrike" cap="none" normalizeH="0" baseline="0" dirty="0">
+                <a:ln>
+                  <a:noFill/>
+                </a:ln>
+                <a:solidFill>
+                  <a:srgbClr val="424242"/>
+                </a:solidFill>
+                <a:effectLst/>
+                <a:latin typeface="Arial Unicode MS"/>
+                <a:ea typeface="source-code-pro"/>
+              </a:rPr>
+              <a:t> </a:t>
+            </a:r>
+            <a:r>
+              <a:rPr kumimoji="0" lang="en-US" altLang="en-IL" sz="1000" b="0" i="0" u="none" strike="noStrike" cap="none" normalizeH="0" baseline="0" dirty="0">
+                <a:ln>
+                  <a:noFill/>
+                </a:ln>
+                <a:solidFill>
+                  <a:srgbClr val="424242"/>
+                </a:solidFill>
+                <a:effectLst/>
+                <a:latin typeface="Arial Unicode MS"/>
+                <a:ea typeface="source-code-pro"/>
+              </a:rPr>
+              <a:t>		</a:t>
+            </a:r>
+            <a:r>
+              <a:rPr kumimoji="0" lang="en-IL" altLang="en-IL" sz="1000" b="0" i="0" u="none" strike="noStrike" cap="none" normalizeH="0" baseline="0" dirty="0">
+                <a:ln>
+                  <a:noFill/>
+                </a:ln>
+                <a:solidFill>
+                  <a:srgbClr val="424242"/>
+                </a:solidFill>
+                <a:effectLst/>
+                <a:latin typeface="Arial Unicode MS"/>
+                <a:ea typeface="source-code-pro"/>
+              </a:rPr>
+              <a:t>← Backend </a:t>
+            </a:r>
+            <a:endParaRPr kumimoji="0" lang="en-US" altLang="en-IL" sz="1000" b="0" i="0" u="none" strike="noStrike" cap="none" normalizeH="0" baseline="0" dirty="0">
+              <a:ln>
+                <a:noFill/>
+              </a:ln>
+              <a:solidFill>
+                <a:srgbClr val="424242"/>
+              </a:solidFill>
+              <a:effectLst/>
+              <a:latin typeface="Arial Unicode MS"/>
+              <a:ea typeface="source-code-pro"/>
+            </a:endParaRPr>
+          </a:p>
+          <a:p>
+            <a:pPr marL="0" marR="0" lvl="0" indent="0" algn="l" defTabSz="914400" rtl="0" eaLnBrk="0" fontAlgn="base" latinLnBrk="0" hangingPunct="0">
+              <a:lnSpc>
+                <a:spcPct val="100000"/>
+              </a:lnSpc>
+              <a:spcBef>
+                <a:spcPct val="0"/>
+              </a:spcBef>
+              <a:spcAft>
+                <a:spcPct val="0"/>
+              </a:spcAft>
+              <a:buClrTx/>
+              <a:buSzTx/>
+              <a:buFontTx/>
+              <a:buNone/>
+              <a:tabLst/>
+            </a:pPr>
+            <a:r>
+              <a:rPr kumimoji="0" lang="en-IL" altLang="en-IL" sz="1000" b="0" i="0" u="none" strike="noStrike" cap="none" normalizeH="0" baseline="0" dirty="0">
+                <a:ln>
+                  <a:noFill/>
+                </a:ln>
+                <a:solidFill>
+                  <a:srgbClr val="424242"/>
+                </a:solidFill>
+                <a:effectLst/>
+                <a:latin typeface="Arial Unicode MS"/>
+                <a:ea typeface="source-code-pro"/>
+              </a:rPr>
+              <a:t>│ ├── AuthService/ </a:t>
+            </a:r>
+            <a:r>
+              <a:rPr kumimoji="0" lang="en-US" altLang="en-IL" sz="1000" b="0" i="0" u="none" strike="noStrike" cap="none" normalizeH="0" baseline="0" dirty="0">
+                <a:ln>
+                  <a:noFill/>
+                </a:ln>
+                <a:solidFill>
+                  <a:srgbClr val="424242"/>
+                </a:solidFill>
+                <a:effectLst/>
+                <a:latin typeface="Arial Unicode MS"/>
+                <a:ea typeface="source-code-pro"/>
+              </a:rPr>
+              <a:t>		</a:t>
+            </a:r>
+            <a:r>
+              <a:rPr kumimoji="0" lang="en-IL" altLang="en-IL" sz="1000" b="0" i="0" u="none" strike="noStrike" cap="none" normalizeH="0" baseline="0" dirty="0">
+                <a:ln>
+                  <a:noFill/>
+                </a:ln>
+                <a:solidFill>
+                  <a:srgbClr val="424242"/>
+                </a:solidFill>
+                <a:effectLst/>
+                <a:latin typeface="Arial Unicode MS"/>
+                <a:ea typeface="source-code-pro"/>
+              </a:rPr>
+              <a:t>← </a:t>
+            </a:r>
+            <a:r>
+              <a:rPr kumimoji="0" lang="en-US" altLang="en-IL" sz="1000" b="0" i="0" u="none" strike="noStrike" cap="none" normalizeH="0" baseline="0" dirty="0">
+                <a:ln>
+                  <a:noFill/>
+                </a:ln>
+                <a:solidFill>
+                  <a:srgbClr val="424242"/>
+                </a:solidFill>
+                <a:effectLst/>
+                <a:latin typeface="Arial Unicode MS"/>
+                <a:ea typeface="source-code-pro"/>
+                <a:cs typeface="Arial" panose="020B0604020202020204" pitchFamily="34" charset="0"/>
+              </a:rPr>
+              <a:t>Log in Service</a:t>
+            </a:r>
+            <a:endParaRPr kumimoji="0" lang="en-US" altLang="en-IL" sz="1000" b="0" i="0" u="none" strike="noStrike" cap="none" normalizeH="0" baseline="0" dirty="0">
+              <a:ln>
+                <a:noFill/>
+              </a:ln>
+              <a:solidFill>
+                <a:srgbClr val="424242"/>
+              </a:solidFill>
+              <a:effectLst/>
+              <a:latin typeface="Arial Unicode MS"/>
+              <a:ea typeface="source-code-pro"/>
+            </a:endParaRPr>
+          </a:p>
+          <a:p>
+            <a:pPr marL="0" marR="0" lvl="0" indent="0" algn="l" defTabSz="914400" rtl="0" eaLnBrk="0" fontAlgn="base" latinLnBrk="0" hangingPunct="0">
+              <a:lnSpc>
+                <a:spcPct val="100000"/>
+              </a:lnSpc>
+              <a:spcBef>
+                <a:spcPct val="0"/>
+              </a:spcBef>
+              <a:spcAft>
+                <a:spcPct val="0"/>
+              </a:spcAft>
+              <a:buClrTx/>
+              <a:buSzTx/>
+              <a:buFontTx/>
+              <a:buNone/>
+              <a:tabLst/>
+            </a:pPr>
+            <a:r>
+              <a:rPr kumimoji="0" lang="en-IL" altLang="en-IL" sz="1000" b="0" i="0" u="none" strike="noStrike" cap="none" normalizeH="0" baseline="0" dirty="0">
+                <a:ln>
+                  <a:noFill/>
+                </a:ln>
+                <a:solidFill>
+                  <a:srgbClr val="424242"/>
+                </a:solidFill>
+                <a:effectLst/>
+                <a:latin typeface="Arial Unicode MS"/>
+                <a:ea typeface="source-code-pro"/>
+              </a:rPr>
+              <a:t>│ ├── CustomersService/ </a:t>
+            </a:r>
+            <a:r>
+              <a:rPr kumimoji="0" lang="en-US" altLang="en-IL" sz="1000" b="0" i="0" u="none" strike="noStrike" cap="none" normalizeH="0" baseline="0" dirty="0">
+                <a:ln>
+                  <a:noFill/>
+                </a:ln>
+                <a:solidFill>
+                  <a:srgbClr val="424242"/>
+                </a:solidFill>
+                <a:effectLst/>
+                <a:latin typeface="Arial Unicode MS"/>
+                <a:ea typeface="source-code-pro"/>
+              </a:rPr>
+              <a:t>		</a:t>
+            </a:r>
+            <a:r>
+              <a:rPr kumimoji="0" lang="en-IL" altLang="en-IL" sz="1000" b="0" i="0" u="none" strike="noStrike" cap="none" normalizeH="0" baseline="0" dirty="0">
+                <a:ln>
+                  <a:noFill/>
+                </a:ln>
+                <a:solidFill>
+                  <a:srgbClr val="424242"/>
+                </a:solidFill>
+                <a:effectLst/>
+                <a:latin typeface="Arial Unicode MS"/>
+                <a:ea typeface="source-code-pro"/>
+              </a:rPr>
+              <a:t>← </a:t>
+            </a:r>
+            <a:r>
+              <a:rPr kumimoji="0" lang="en-US" altLang="en-IL" sz="1000" b="0" i="0" u="none" strike="noStrike" cap="none" normalizeH="0" baseline="0" dirty="0">
+                <a:ln>
+                  <a:noFill/>
+                </a:ln>
+                <a:solidFill>
+                  <a:srgbClr val="424242"/>
+                </a:solidFill>
+                <a:effectLst/>
+                <a:latin typeface="Arial Unicode MS"/>
+                <a:ea typeface="source-code-pro"/>
+                <a:cs typeface="Arial" panose="020B0604020202020204" pitchFamily="34" charset="0"/>
+              </a:rPr>
+              <a:t>Customers service</a:t>
+            </a:r>
+            <a:endParaRPr kumimoji="0" lang="en-US" altLang="en-IL" sz="1000" b="0" i="0" u="none" strike="noStrike" cap="none" normalizeH="0" baseline="0" dirty="0">
+              <a:ln>
+                <a:noFill/>
+              </a:ln>
+              <a:solidFill>
+                <a:srgbClr val="424242"/>
+              </a:solidFill>
+              <a:effectLst/>
+              <a:latin typeface="Arial Unicode MS"/>
+              <a:ea typeface="source-code-pro"/>
+            </a:endParaRPr>
+          </a:p>
+          <a:p>
+            <a:pPr marL="0" marR="0" lvl="0" indent="0" algn="l" defTabSz="914400" rtl="0" eaLnBrk="0" fontAlgn="base" latinLnBrk="0" hangingPunct="0">
+              <a:lnSpc>
+                <a:spcPct val="100000"/>
+              </a:lnSpc>
+              <a:spcBef>
+                <a:spcPct val="0"/>
+              </a:spcBef>
+              <a:spcAft>
+                <a:spcPct val="0"/>
+              </a:spcAft>
+              <a:buClrTx/>
+              <a:buSzTx/>
+              <a:buFontTx/>
+              <a:buNone/>
+              <a:tabLst/>
+            </a:pPr>
+            <a:r>
+              <a:rPr kumimoji="0" lang="en-IL" altLang="en-IL" sz="1000" b="0" i="0" u="none" strike="noStrike" cap="none" normalizeH="0" baseline="0" dirty="0">
+                <a:ln>
+                  <a:noFill/>
+                </a:ln>
+                <a:solidFill>
+                  <a:srgbClr val="424242"/>
+                </a:solidFill>
+                <a:effectLst/>
+                <a:latin typeface="Arial Unicode MS"/>
+                <a:ea typeface="source-code-pro"/>
+              </a:rPr>
+              <a:t>│ ├── OrdersService/ </a:t>
+            </a:r>
+            <a:r>
+              <a:rPr kumimoji="0" lang="en-US" altLang="en-IL" sz="1000" b="0" i="0" u="none" strike="noStrike" cap="none" normalizeH="0" baseline="0" dirty="0">
+                <a:ln>
+                  <a:noFill/>
+                </a:ln>
+                <a:solidFill>
+                  <a:srgbClr val="424242"/>
+                </a:solidFill>
+                <a:effectLst/>
+                <a:latin typeface="Arial Unicode MS"/>
+                <a:ea typeface="source-code-pro"/>
+              </a:rPr>
+              <a:t>		</a:t>
+            </a:r>
+            <a:r>
+              <a:rPr kumimoji="0" lang="en-IL" altLang="en-IL" sz="1000" b="0" i="0" u="none" strike="noStrike" cap="none" normalizeH="0" baseline="0" dirty="0">
+                <a:ln>
+                  <a:noFill/>
+                </a:ln>
+                <a:solidFill>
+                  <a:srgbClr val="424242"/>
+                </a:solidFill>
+                <a:effectLst/>
+                <a:latin typeface="Arial Unicode MS"/>
+                <a:ea typeface="source-code-pro"/>
+              </a:rPr>
+              <a:t>← </a:t>
+            </a:r>
+            <a:r>
+              <a:rPr kumimoji="0" lang="en-US" altLang="en-IL" sz="1000" b="0" i="0" u="none" strike="noStrike" cap="none" normalizeH="0" baseline="0" dirty="0">
+                <a:ln>
+                  <a:noFill/>
+                </a:ln>
+                <a:solidFill>
+                  <a:srgbClr val="424242"/>
+                </a:solidFill>
+                <a:effectLst/>
+                <a:latin typeface="Arial Unicode MS"/>
+                <a:ea typeface="source-code-pro"/>
+                <a:cs typeface="Arial" panose="020B0604020202020204" pitchFamily="34" charset="0"/>
+              </a:rPr>
+              <a:t>Orders Service</a:t>
+            </a:r>
+            <a:endParaRPr kumimoji="0" lang="en-US" altLang="en-IL" sz="1000" b="0" i="0" u="none" strike="noStrike" cap="none" normalizeH="0" baseline="0" dirty="0">
+              <a:ln>
+                <a:noFill/>
+              </a:ln>
+              <a:solidFill>
+                <a:srgbClr val="424242"/>
+              </a:solidFill>
+              <a:effectLst/>
+              <a:latin typeface="Arial Unicode MS"/>
+              <a:ea typeface="source-code-pro"/>
+            </a:endParaRPr>
+          </a:p>
+          <a:p>
+            <a:pPr marL="0" marR="0" lvl="0" indent="0" algn="l" defTabSz="914400" rtl="0" eaLnBrk="0" fontAlgn="base" latinLnBrk="0" hangingPunct="0">
+              <a:lnSpc>
+                <a:spcPct val="100000"/>
+              </a:lnSpc>
+              <a:spcBef>
+                <a:spcPct val="0"/>
+              </a:spcBef>
+              <a:spcAft>
+                <a:spcPct val="0"/>
+              </a:spcAft>
+              <a:buClrTx/>
+              <a:buSzTx/>
+              <a:buFontTx/>
+              <a:buNone/>
+              <a:tabLst/>
+            </a:pPr>
+            <a:r>
+              <a:rPr kumimoji="0" lang="en-IL" altLang="en-IL" sz="1000" b="0" i="0" u="none" strike="noStrike" cap="none" normalizeH="0" baseline="0" dirty="0">
+                <a:ln>
+                  <a:noFill/>
+                </a:ln>
+                <a:solidFill>
+                  <a:srgbClr val="424242"/>
+                </a:solidFill>
+                <a:effectLst/>
+                <a:latin typeface="Arial Unicode MS"/>
+                <a:ea typeface="source-code-pro"/>
+              </a:rPr>
+              <a:t>│ ├── LoggingService/ </a:t>
+            </a:r>
+            <a:r>
+              <a:rPr kumimoji="0" lang="en-US" altLang="en-IL" sz="1000" b="0" i="0" u="none" strike="noStrike" cap="none" normalizeH="0" baseline="0" dirty="0">
+                <a:ln>
+                  <a:noFill/>
+                </a:ln>
+                <a:solidFill>
+                  <a:srgbClr val="424242"/>
+                </a:solidFill>
+                <a:effectLst/>
+                <a:latin typeface="Arial Unicode MS"/>
+                <a:ea typeface="source-code-pro"/>
+              </a:rPr>
+              <a:t>		</a:t>
+            </a:r>
+            <a:r>
+              <a:rPr kumimoji="0" lang="en-IL" altLang="en-IL" sz="1000" b="0" i="0" u="none" strike="noStrike" cap="none" normalizeH="0" baseline="0" dirty="0">
+                <a:ln>
+                  <a:noFill/>
+                </a:ln>
+                <a:solidFill>
+                  <a:srgbClr val="424242"/>
+                </a:solidFill>
+                <a:effectLst/>
+                <a:latin typeface="Arial Unicode MS"/>
+                <a:ea typeface="source-code-pro"/>
+              </a:rPr>
+              <a:t>← </a:t>
+            </a:r>
+            <a:r>
+              <a:rPr kumimoji="0" lang="en-US" altLang="en-IL" sz="1000" b="0" i="0" u="none" strike="noStrike" cap="none" normalizeH="0" baseline="0" dirty="0">
+                <a:ln>
+                  <a:noFill/>
+                </a:ln>
+                <a:solidFill>
+                  <a:srgbClr val="424242"/>
+                </a:solidFill>
+                <a:effectLst/>
+                <a:latin typeface="Arial Unicode MS"/>
+                <a:ea typeface="source-code-pro"/>
+                <a:cs typeface="Arial" panose="020B0604020202020204" pitchFamily="34" charset="0"/>
+              </a:rPr>
+              <a:t>Logs service</a:t>
+            </a:r>
+            <a:endParaRPr kumimoji="0" lang="en-US" altLang="en-IL" sz="1000" b="0" i="0" u="none" strike="noStrike" cap="none" normalizeH="0" baseline="0" dirty="0">
+              <a:ln>
+                <a:noFill/>
+              </a:ln>
+              <a:solidFill>
+                <a:srgbClr val="424242"/>
+              </a:solidFill>
+              <a:effectLst/>
+              <a:latin typeface="Arial Unicode MS"/>
+              <a:ea typeface="source-code-pro"/>
+            </a:endParaRPr>
+          </a:p>
+          <a:p>
+            <a:pPr marL="0" marR="0" lvl="0" indent="0" algn="l" defTabSz="914400" rtl="0" eaLnBrk="0" fontAlgn="base" latinLnBrk="0" hangingPunct="0">
+              <a:lnSpc>
+                <a:spcPct val="100000"/>
+              </a:lnSpc>
+              <a:spcBef>
+                <a:spcPct val="0"/>
+              </a:spcBef>
+              <a:spcAft>
+                <a:spcPct val="0"/>
+              </a:spcAft>
+              <a:buClrTx/>
+              <a:buSzTx/>
+              <a:buFontTx/>
+              <a:buNone/>
+              <a:tabLst/>
+            </a:pPr>
+            <a:r>
+              <a:rPr kumimoji="0" lang="en-IL" altLang="en-IL" sz="1000" b="0" i="0" u="none" strike="noStrike" cap="none" normalizeH="0" baseline="0" dirty="0">
+                <a:ln>
+                  <a:noFill/>
+                </a:ln>
+                <a:solidFill>
+                  <a:srgbClr val="424242"/>
+                </a:solidFill>
+                <a:effectLst/>
+                <a:latin typeface="Arial Unicode MS"/>
+                <a:ea typeface="source-code-pro"/>
+              </a:rPr>
+              <a:t>│ ├── NotificationsWorker/ </a:t>
+            </a:r>
+            <a:r>
+              <a:rPr kumimoji="0" lang="en-US" altLang="en-IL" sz="1000" b="0" i="0" u="none" strike="noStrike" cap="none" normalizeH="0" baseline="0" dirty="0">
+                <a:ln>
+                  <a:noFill/>
+                </a:ln>
+                <a:solidFill>
+                  <a:srgbClr val="424242"/>
+                </a:solidFill>
+                <a:effectLst/>
+                <a:latin typeface="Arial Unicode MS"/>
+                <a:ea typeface="source-code-pro"/>
+              </a:rPr>
+              <a:t>		</a:t>
+            </a:r>
+            <a:r>
+              <a:rPr kumimoji="0" lang="en-IL" altLang="en-IL" sz="1000" b="0" i="0" u="none" strike="noStrike" cap="none" normalizeH="0" baseline="0" dirty="0">
+                <a:ln>
+                  <a:noFill/>
+                </a:ln>
+                <a:solidFill>
+                  <a:srgbClr val="424242"/>
+                </a:solidFill>
+                <a:effectLst/>
+                <a:latin typeface="Arial Unicode MS"/>
+                <a:ea typeface="source-code-pro"/>
+              </a:rPr>
+              <a:t>← </a:t>
+            </a:r>
+            <a:r>
+              <a:rPr lang="en-US" altLang="en-IL" sz="1000" dirty="0">
+                <a:solidFill>
+                  <a:srgbClr val="424242"/>
+                </a:solidFill>
+                <a:latin typeface="Arial Unicode MS"/>
+                <a:ea typeface="source-code-pro"/>
+              </a:rPr>
+              <a:t>Notifications w</a:t>
+            </a:r>
+            <a:r>
+              <a:rPr lang="en-US" altLang="en-IL" sz="1000" dirty="0">
+                <a:solidFill>
+                  <a:srgbClr val="424242"/>
+                </a:solidFill>
+                <a:latin typeface="Arial Unicode MS"/>
+                <a:ea typeface="source-code-pro"/>
+                <a:cs typeface="Arial" panose="020B0604020202020204" pitchFamily="34" charset="0"/>
+              </a:rPr>
+              <a:t>orker service </a:t>
+            </a:r>
+            <a:endParaRPr kumimoji="0" lang="en-US" altLang="en-IL" sz="1000" b="0" i="0" u="none" strike="noStrike" cap="none" normalizeH="0" baseline="0" dirty="0">
+              <a:ln>
+                <a:noFill/>
+              </a:ln>
+              <a:solidFill>
+                <a:srgbClr val="424242"/>
+              </a:solidFill>
+              <a:effectLst/>
+              <a:latin typeface="Arial Unicode MS"/>
+              <a:ea typeface="source-code-pro"/>
+            </a:endParaRPr>
+          </a:p>
+          <a:p>
+            <a:pPr marL="0" marR="0" lvl="0" indent="0" algn="l" defTabSz="914400" rtl="0" eaLnBrk="0" fontAlgn="base" latinLnBrk="0" hangingPunct="0">
+              <a:lnSpc>
+                <a:spcPct val="100000"/>
+              </a:lnSpc>
+              <a:spcBef>
+                <a:spcPct val="0"/>
+              </a:spcBef>
+              <a:spcAft>
+                <a:spcPct val="0"/>
+              </a:spcAft>
+              <a:buClrTx/>
+              <a:buSzTx/>
+              <a:buFontTx/>
+              <a:buNone/>
+              <a:tabLst/>
+            </a:pPr>
+            <a:r>
+              <a:rPr kumimoji="0" lang="en-IL" altLang="en-IL" sz="1000" b="0" i="0" u="none" strike="noStrike" cap="none" normalizeH="0" baseline="0" dirty="0">
+                <a:ln>
+                  <a:noFill/>
+                </a:ln>
+                <a:solidFill>
+                  <a:srgbClr val="424242"/>
+                </a:solidFill>
+                <a:effectLst/>
+                <a:latin typeface="Arial Unicode MS"/>
+                <a:ea typeface="source-code-pro"/>
+              </a:rPr>
+              <a:t>│ ├── PublisherService/ </a:t>
+            </a:r>
+            <a:r>
+              <a:rPr kumimoji="0" lang="en-US" altLang="en-IL" sz="1000" b="0" i="0" u="none" strike="noStrike" cap="none" normalizeH="0" baseline="0" dirty="0">
+                <a:ln>
+                  <a:noFill/>
+                </a:ln>
+                <a:solidFill>
+                  <a:srgbClr val="424242"/>
+                </a:solidFill>
+                <a:effectLst/>
+                <a:latin typeface="Arial Unicode MS"/>
+                <a:ea typeface="source-code-pro"/>
+              </a:rPr>
+              <a:t>		</a:t>
+            </a:r>
+            <a:r>
+              <a:rPr kumimoji="0" lang="en-IL" altLang="en-IL" sz="1000" b="0" i="0" u="none" strike="noStrike" cap="none" normalizeH="0" baseline="0" dirty="0">
+                <a:ln>
+                  <a:noFill/>
+                </a:ln>
+                <a:solidFill>
+                  <a:srgbClr val="424242"/>
+                </a:solidFill>
+                <a:effectLst/>
+                <a:latin typeface="Arial Unicode MS"/>
+                <a:ea typeface="source-code-pro"/>
+              </a:rPr>
+              <a:t>← </a:t>
+            </a:r>
+            <a:r>
+              <a:rPr kumimoji="0" lang="en-US" altLang="en-IL" sz="1000" b="0" i="0" u="none" strike="noStrike" cap="none" normalizeH="0" baseline="0" dirty="0">
+                <a:ln>
+                  <a:noFill/>
+                </a:ln>
+                <a:solidFill>
+                  <a:srgbClr val="424242"/>
+                </a:solidFill>
+                <a:effectLst/>
+                <a:latin typeface="Arial Unicode MS"/>
+                <a:ea typeface="source-code-pro"/>
+                <a:cs typeface="Arial" panose="020B0604020202020204" pitchFamily="34" charset="0"/>
+              </a:rPr>
+              <a:t>Data </a:t>
+            </a:r>
+            <a:r>
+              <a:rPr lang="en-US" altLang="en-IL" sz="1000" dirty="0">
+                <a:solidFill>
+                  <a:srgbClr val="424242"/>
+                </a:solidFill>
+                <a:latin typeface="Arial Unicode MS"/>
+                <a:ea typeface="source-code-pro"/>
+                <a:cs typeface="Arial" panose="020B0604020202020204" pitchFamily="34" charset="0"/>
+              </a:rPr>
+              <a:t>publishing service</a:t>
+            </a:r>
+            <a:endParaRPr kumimoji="0" lang="en-US" altLang="en-IL" sz="1000" b="0" i="0" u="none" strike="noStrike" cap="none" normalizeH="0" baseline="0" dirty="0">
+              <a:ln>
+                <a:noFill/>
+              </a:ln>
+              <a:solidFill>
+                <a:srgbClr val="424242"/>
+              </a:solidFill>
+              <a:effectLst/>
+              <a:latin typeface="Arial Unicode MS"/>
+              <a:ea typeface="source-code-pro"/>
+            </a:endParaRPr>
+          </a:p>
+          <a:p>
+            <a:pPr marL="0" marR="0" lvl="0" indent="0" algn="l" defTabSz="914400" rtl="0" eaLnBrk="0" fontAlgn="base" latinLnBrk="0" hangingPunct="0">
+              <a:lnSpc>
+                <a:spcPct val="100000"/>
+              </a:lnSpc>
+              <a:spcBef>
+                <a:spcPct val="0"/>
+              </a:spcBef>
+              <a:spcAft>
+                <a:spcPct val="0"/>
+              </a:spcAft>
+              <a:buClrTx/>
+              <a:buSzTx/>
+              <a:buFontTx/>
+              <a:buNone/>
+              <a:tabLst/>
+            </a:pPr>
+            <a:r>
+              <a:rPr kumimoji="0" lang="en-IL" altLang="en-IL" sz="1000" b="0" i="0" u="none" strike="noStrike" cap="none" normalizeH="0" baseline="0" dirty="0">
+                <a:ln>
+                  <a:noFill/>
+                </a:ln>
+                <a:solidFill>
+                  <a:srgbClr val="424242"/>
+                </a:solidFill>
+                <a:effectLst/>
+                <a:latin typeface="Arial Unicode MS"/>
+                <a:ea typeface="source-code-pro"/>
+              </a:rPr>
+              <a:t>│ └── Gateway/ </a:t>
+            </a:r>
+            <a:r>
+              <a:rPr kumimoji="0" lang="en-US" altLang="en-IL" sz="1000" b="0" i="0" u="none" strike="noStrike" cap="none" normalizeH="0" baseline="0" dirty="0">
+                <a:ln>
+                  <a:noFill/>
+                </a:ln>
+                <a:solidFill>
+                  <a:srgbClr val="424242"/>
+                </a:solidFill>
+                <a:effectLst/>
+                <a:latin typeface="Arial Unicode MS"/>
+                <a:ea typeface="source-code-pro"/>
+              </a:rPr>
+              <a:t>		</a:t>
+            </a:r>
+            <a:r>
+              <a:rPr kumimoji="0" lang="en-IL" altLang="en-IL" sz="1000" b="0" i="0" u="none" strike="noStrike" cap="none" normalizeH="0" baseline="0" dirty="0">
+                <a:ln>
+                  <a:noFill/>
+                </a:ln>
+                <a:solidFill>
+                  <a:srgbClr val="424242"/>
+                </a:solidFill>
+                <a:effectLst/>
+                <a:latin typeface="Arial Unicode MS"/>
+                <a:ea typeface="source-code-pro"/>
+              </a:rPr>
+              <a:t>← API Gateway </a:t>
+            </a:r>
+            <a:endParaRPr kumimoji="0" lang="en-US" altLang="en-IL" sz="1000" b="0" i="0" u="none" strike="noStrike" cap="none" normalizeH="0" baseline="0" dirty="0">
+              <a:ln>
+                <a:noFill/>
+              </a:ln>
+              <a:solidFill>
+                <a:srgbClr val="424242"/>
+              </a:solidFill>
+              <a:effectLst/>
+              <a:latin typeface="Arial Unicode MS"/>
+              <a:ea typeface="source-code-pro"/>
+            </a:endParaRPr>
+          </a:p>
+          <a:p>
+            <a:pPr marL="0" marR="0" lvl="0" indent="0" algn="l" defTabSz="914400" rtl="0" eaLnBrk="0" fontAlgn="base" latinLnBrk="0" hangingPunct="0">
+              <a:lnSpc>
+                <a:spcPct val="100000"/>
+              </a:lnSpc>
+              <a:spcBef>
+                <a:spcPct val="0"/>
+              </a:spcBef>
+              <a:spcAft>
+                <a:spcPct val="0"/>
+              </a:spcAft>
+              <a:buClrTx/>
+              <a:buSzTx/>
+              <a:buFontTx/>
+              <a:buNone/>
+              <a:tabLst/>
+            </a:pPr>
+            <a:r>
+              <a:rPr kumimoji="0" lang="en-IL" altLang="en-IL" sz="1000" b="0" i="0" u="none" strike="noStrike" cap="none" normalizeH="0" baseline="0" dirty="0">
+                <a:ln>
+                  <a:noFill/>
+                </a:ln>
+                <a:solidFill>
+                  <a:srgbClr val="424242"/>
+                </a:solidFill>
+                <a:effectLst/>
+                <a:latin typeface="Arial Unicode MS"/>
+                <a:ea typeface="source-code-pro"/>
+              </a:rPr>
+              <a:t>├── Shared/ </a:t>
+            </a:r>
+            <a:r>
+              <a:rPr kumimoji="0" lang="en-US" altLang="en-IL" sz="1000" b="0" i="0" u="none" strike="noStrike" cap="none" normalizeH="0" baseline="0" dirty="0">
+                <a:ln>
+                  <a:noFill/>
+                </a:ln>
+                <a:solidFill>
+                  <a:srgbClr val="424242"/>
+                </a:solidFill>
+                <a:effectLst/>
+                <a:latin typeface="Arial Unicode MS"/>
+                <a:ea typeface="source-code-pro"/>
+              </a:rPr>
+              <a:t>			</a:t>
+            </a:r>
+            <a:r>
+              <a:rPr kumimoji="0" lang="en-IL" altLang="en-IL" sz="1000" b="0" i="0" u="none" strike="noStrike" cap="none" normalizeH="0" baseline="0" dirty="0">
+                <a:ln>
+                  <a:noFill/>
+                </a:ln>
+                <a:solidFill>
+                  <a:srgbClr val="424242"/>
+                </a:solidFill>
+                <a:effectLst/>
+                <a:latin typeface="Arial Unicode MS"/>
+                <a:ea typeface="source-code-pro"/>
+              </a:rPr>
+              <a:t>← </a:t>
+            </a:r>
+            <a:r>
+              <a:rPr kumimoji="0" lang="en-US" altLang="en-IL" sz="1000" b="0" i="0" u="none" strike="noStrike" cap="none" normalizeH="0" baseline="0" dirty="0">
+                <a:ln>
+                  <a:noFill/>
+                </a:ln>
+                <a:solidFill>
+                  <a:srgbClr val="424242"/>
+                </a:solidFill>
+                <a:effectLst/>
+                <a:latin typeface="Arial Unicode MS"/>
+                <a:ea typeface="source-code-pro"/>
+                <a:cs typeface="Arial" panose="020B0604020202020204" pitchFamily="34" charset="0"/>
+              </a:rPr>
+              <a:t>Shared code </a:t>
+            </a:r>
+            <a:r>
+              <a:rPr kumimoji="0" lang="en-IL" altLang="en-IL" sz="1000" b="0" i="0" u="none" strike="noStrike" cap="none" normalizeH="0" baseline="0" dirty="0">
+                <a:ln>
+                  <a:noFill/>
+                </a:ln>
+                <a:solidFill>
+                  <a:srgbClr val="424242"/>
+                </a:solidFill>
+                <a:effectLst/>
+                <a:latin typeface="Arial Unicode MS"/>
+                <a:ea typeface="source-code-pro"/>
+              </a:rPr>
+              <a:t>(DTOs, Utils </a:t>
+            </a:r>
+            <a:r>
+              <a:rPr kumimoji="0" lang="en-US" altLang="en-IL" sz="1000" b="0" i="0" u="none" strike="noStrike" cap="none" normalizeH="0" baseline="0" dirty="0">
+                <a:ln>
+                  <a:noFill/>
+                </a:ln>
+                <a:solidFill>
+                  <a:srgbClr val="424242"/>
+                </a:solidFill>
+                <a:effectLst/>
+                <a:latin typeface="Arial Unicode MS"/>
+                <a:ea typeface="source-code-pro"/>
+                <a:cs typeface="Arial" panose="020B0604020202020204" pitchFamily="34" charset="0"/>
+              </a:rPr>
+              <a:t>etc.</a:t>
+            </a:r>
+            <a:r>
+              <a:rPr kumimoji="0" lang="en-IL" altLang="en-IL" sz="1000" b="0" i="0" u="none" strike="noStrike" cap="none" normalizeH="0" baseline="0" dirty="0">
+                <a:ln>
+                  <a:noFill/>
+                </a:ln>
+                <a:solidFill>
+                  <a:srgbClr val="424242"/>
+                </a:solidFill>
+                <a:effectLst/>
+                <a:latin typeface="Arial Unicode MS"/>
+                <a:ea typeface="source-code-pro"/>
+              </a:rPr>
+              <a:t>) </a:t>
+            </a:r>
+            <a:endParaRPr kumimoji="0" lang="en-US" altLang="en-IL" sz="1000" b="0" i="0" u="none" strike="noStrike" cap="none" normalizeH="0" baseline="0" dirty="0">
+              <a:ln>
+                <a:noFill/>
+              </a:ln>
+              <a:solidFill>
+                <a:srgbClr val="424242"/>
+              </a:solidFill>
+              <a:effectLst/>
+              <a:latin typeface="Arial Unicode MS"/>
+              <a:ea typeface="source-code-pro"/>
+            </a:endParaRPr>
+          </a:p>
+          <a:p>
+            <a:pPr marL="0" marR="0" lvl="0" indent="0" algn="l" defTabSz="914400" rtl="0" eaLnBrk="0" fontAlgn="base" latinLnBrk="0" hangingPunct="0">
+              <a:lnSpc>
+                <a:spcPct val="100000"/>
+              </a:lnSpc>
+              <a:spcBef>
+                <a:spcPct val="0"/>
+              </a:spcBef>
+              <a:spcAft>
+                <a:spcPct val="0"/>
+              </a:spcAft>
+              <a:buClrTx/>
+              <a:buSzTx/>
+              <a:buFontTx/>
+              <a:buNone/>
+              <a:tabLst/>
+            </a:pPr>
+            <a:r>
+              <a:rPr kumimoji="0" lang="en-IL" altLang="en-IL" sz="1000" b="0" i="0" u="none" strike="noStrike" cap="none" normalizeH="0" baseline="0" dirty="0">
+                <a:ln>
+                  <a:noFill/>
+                </a:ln>
+                <a:solidFill>
+                  <a:srgbClr val="424242"/>
+                </a:solidFill>
+                <a:effectLst/>
+                <a:latin typeface="Arial Unicode MS"/>
+                <a:ea typeface="source-code-pro"/>
+              </a:rPr>
+              <a:t>├── Tests/ </a:t>
+            </a:r>
+            <a:endParaRPr kumimoji="0" lang="en-US" altLang="en-IL" sz="1000" b="0" i="0" u="none" strike="noStrike" cap="none" normalizeH="0" baseline="0" dirty="0">
+              <a:ln>
+                <a:noFill/>
+              </a:ln>
+              <a:solidFill>
+                <a:srgbClr val="424242"/>
+              </a:solidFill>
+              <a:effectLst/>
+              <a:latin typeface="Arial Unicode MS"/>
+              <a:ea typeface="source-code-pro"/>
+            </a:endParaRPr>
+          </a:p>
+          <a:p>
+            <a:pPr marL="0" marR="0" lvl="0" indent="0" algn="l" defTabSz="914400" rtl="0" eaLnBrk="0" fontAlgn="base" latinLnBrk="0" hangingPunct="0">
+              <a:lnSpc>
+                <a:spcPct val="100000"/>
+              </a:lnSpc>
+              <a:spcBef>
+                <a:spcPct val="0"/>
+              </a:spcBef>
+              <a:spcAft>
+                <a:spcPct val="0"/>
+              </a:spcAft>
+              <a:buClrTx/>
+              <a:buSzTx/>
+              <a:buFontTx/>
+              <a:buNone/>
+              <a:tabLst/>
+            </a:pPr>
+            <a:r>
+              <a:rPr kumimoji="0" lang="en-IL" altLang="en-IL" sz="1000" b="0" i="0" u="none" strike="noStrike" cap="none" normalizeH="0" baseline="0" dirty="0">
+                <a:ln>
+                  <a:noFill/>
+                </a:ln>
+                <a:solidFill>
+                  <a:srgbClr val="424242"/>
+                </a:solidFill>
+                <a:effectLst/>
+                <a:latin typeface="Arial Unicode MS"/>
+                <a:ea typeface="source-code-pro"/>
+              </a:rPr>
+              <a:t>│ ├── AuthService.Tests/ </a:t>
+            </a:r>
+            <a:endParaRPr kumimoji="0" lang="en-US" altLang="en-IL" sz="1000" b="0" i="0" u="none" strike="noStrike" cap="none" normalizeH="0" baseline="0" dirty="0">
+              <a:ln>
+                <a:noFill/>
+              </a:ln>
+              <a:solidFill>
+                <a:srgbClr val="424242"/>
+              </a:solidFill>
+              <a:effectLst/>
+              <a:latin typeface="Arial Unicode MS"/>
+              <a:ea typeface="source-code-pro"/>
+            </a:endParaRPr>
+          </a:p>
+          <a:p>
+            <a:pPr marL="0" marR="0" lvl="0" indent="0" algn="l" defTabSz="914400" rtl="0" eaLnBrk="0" fontAlgn="base" latinLnBrk="0" hangingPunct="0">
+              <a:lnSpc>
+                <a:spcPct val="100000"/>
+              </a:lnSpc>
+              <a:spcBef>
+                <a:spcPct val="0"/>
+              </a:spcBef>
+              <a:spcAft>
+                <a:spcPct val="0"/>
+              </a:spcAft>
+              <a:buClrTx/>
+              <a:buSzTx/>
+              <a:buFontTx/>
+              <a:buNone/>
+              <a:tabLst/>
+            </a:pPr>
+            <a:r>
+              <a:rPr kumimoji="0" lang="en-IL" altLang="en-IL" sz="1000" b="0" i="0" u="none" strike="noStrike" cap="none" normalizeH="0" baseline="0" dirty="0">
+                <a:ln>
+                  <a:noFill/>
+                </a:ln>
+                <a:solidFill>
+                  <a:srgbClr val="424242"/>
+                </a:solidFill>
+                <a:effectLst/>
+                <a:latin typeface="Arial Unicode MS"/>
+                <a:ea typeface="source-code-pro"/>
+              </a:rPr>
+              <a:t>│ ├── CustomersService.Tests/ </a:t>
+            </a:r>
+            <a:endParaRPr kumimoji="0" lang="en-US" altLang="en-IL" sz="1000" b="0" i="0" u="none" strike="noStrike" cap="none" normalizeH="0" baseline="0" dirty="0">
+              <a:ln>
+                <a:noFill/>
+              </a:ln>
+              <a:solidFill>
+                <a:srgbClr val="424242"/>
+              </a:solidFill>
+              <a:effectLst/>
+              <a:latin typeface="Arial Unicode MS"/>
+              <a:ea typeface="source-code-pro"/>
+            </a:endParaRPr>
+          </a:p>
+          <a:p>
+            <a:pPr marL="0" marR="0" lvl="0" indent="0" algn="l" defTabSz="914400" rtl="0" eaLnBrk="0" fontAlgn="base" latinLnBrk="0" hangingPunct="0">
+              <a:lnSpc>
+                <a:spcPct val="100000"/>
+              </a:lnSpc>
+              <a:spcBef>
+                <a:spcPct val="0"/>
+              </a:spcBef>
+              <a:spcAft>
+                <a:spcPct val="0"/>
+              </a:spcAft>
+              <a:buClrTx/>
+              <a:buSzTx/>
+              <a:buFontTx/>
+              <a:buNone/>
+              <a:tabLst/>
+            </a:pPr>
+            <a:r>
+              <a:rPr kumimoji="0" lang="en-IL" altLang="en-IL" sz="1000" b="0" i="0" u="none" strike="noStrike" cap="none" normalizeH="0" baseline="0" dirty="0">
+                <a:ln>
+                  <a:noFill/>
+                </a:ln>
+                <a:solidFill>
+                  <a:srgbClr val="424242"/>
+                </a:solidFill>
+                <a:effectLst/>
+                <a:latin typeface="Arial Unicode MS"/>
+                <a:ea typeface="source-code-pro"/>
+              </a:rPr>
+              <a:t>│ └── ... </a:t>
+            </a:r>
+            <a:endParaRPr kumimoji="0" lang="en-US" altLang="en-IL" sz="1000" b="0" i="0" u="none" strike="noStrike" cap="none" normalizeH="0" baseline="0" dirty="0">
+              <a:ln>
+                <a:noFill/>
+              </a:ln>
+              <a:solidFill>
+                <a:srgbClr val="424242"/>
+              </a:solidFill>
+              <a:effectLst/>
+              <a:latin typeface="Arial Unicode MS"/>
+              <a:ea typeface="source-code-pro"/>
+            </a:endParaRPr>
+          </a:p>
+          <a:p>
+            <a:pPr marL="0" marR="0" lvl="0" indent="0" algn="l" defTabSz="914400" rtl="0" eaLnBrk="0" fontAlgn="base" latinLnBrk="0" hangingPunct="0">
+              <a:lnSpc>
+                <a:spcPct val="100000"/>
+              </a:lnSpc>
+              <a:spcBef>
+                <a:spcPct val="0"/>
+              </a:spcBef>
+              <a:spcAft>
+                <a:spcPct val="0"/>
+              </a:spcAft>
+              <a:buClrTx/>
+              <a:buSzTx/>
+              <a:buFontTx/>
+              <a:buNone/>
+              <a:tabLst/>
+            </a:pPr>
+            <a:r>
+              <a:rPr kumimoji="0" lang="en-IL" altLang="en-IL" sz="1000" b="0" i="0" u="none" strike="noStrike" cap="none" normalizeH="0" baseline="0" dirty="0">
+                <a:ln>
+                  <a:noFill/>
+                </a:ln>
+                <a:solidFill>
+                  <a:srgbClr val="424242"/>
+                </a:solidFill>
+                <a:effectLst/>
+                <a:latin typeface="Arial Unicode MS"/>
+                <a:ea typeface="source-code-pro"/>
+              </a:rPr>
+              <a:t>├── Documentation/ </a:t>
+            </a:r>
+            <a:r>
+              <a:rPr kumimoji="0" lang="en-US" altLang="en-IL" sz="1000" b="0" i="0" u="none" strike="noStrike" cap="none" normalizeH="0" baseline="0" dirty="0">
+                <a:ln>
+                  <a:noFill/>
+                </a:ln>
+                <a:solidFill>
+                  <a:srgbClr val="424242"/>
+                </a:solidFill>
+                <a:effectLst/>
+                <a:latin typeface="Arial Unicode MS"/>
+                <a:ea typeface="source-code-pro"/>
+              </a:rPr>
+              <a:t>		</a:t>
+            </a:r>
+            <a:r>
+              <a:rPr kumimoji="0" lang="en-IL" altLang="en-IL" sz="1000" b="0" i="0" u="none" strike="noStrike" cap="none" normalizeH="0" baseline="0" dirty="0">
+                <a:ln>
+                  <a:noFill/>
+                </a:ln>
+                <a:solidFill>
+                  <a:srgbClr val="424242"/>
+                </a:solidFill>
+                <a:effectLst/>
+                <a:latin typeface="Arial Unicode MS"/>
+                <a:ea typeface="source-code-pro"/>
+              </a:rPr>
+              <a:t>← SRS, SDD </a:t>
+            </a:r>
+            <a:r>
+              <a:rPr kumimoji="0" lang="en-US" altLang="en-IL" sz="1000" b="0" i="0" u="none" strike="noStrike" cap="none" normalizeH="0" baseline="0" dirty="0">
+                <a:ln>
+                  <a:noFill/>
+                </a:ln>
+                <a:solidFill>
+                  <a:srgbClr val="424242"/>
+                </a:solidFill>
+                <a:effectLst/>
+                <a:latin typeface="Arial Unicode MS"/>
+                <a:ea typeface="source-code-pro"/>
+                <a:cs typeface="Arial" panose="020B0604020202020204" pitchFamily="34" charset="0"/>
+              </a:rPr>
+              <a:t>documents etc.</a:t>
+            </a:r>
+            <a:r>
+              <a:rPr kumimoji="0" lang="en-IL" altLang="en-IL" sz="1000" b="0" i="0" u="none" strike="noStrike" cap="none" normalizeH="0" baseline="0" dirty="0">
+                <a:ln>
+                  <a:noFill/>
+                </a:ln>
+                <a:solidFill>
+                  <a:srgbClr val="424242"/>
+                </a:solidFill>
+                <a:effectLst/>
+                <a:latin typeface="Arial Unicode MS"/>
+                <a:ea typeface="source-code-pro"/>
+              </a:rPr>
+              <a:t> </a:t>
+            </a:r>
+            <a:endParaRPr kumimoji="0" lang="en-US" altLang="en-IL" sz="1000" b="0" i="0" u="none" strike="noStrike" cap="none" normalizeH="0" baseline="0" dirty="0">
+              <a:ln>
+                <a:noFill/>
+              </a:ln>
+              <a:solidFill>
+                <a:srgbClr val="424242"/>
+              </a:solidFill>
+              <a:effectLst/>
+              <a:latin typeface="Arial Unicode MS"/>
+              <a:ea typeface="source-code-pro"/>
+            </a:endParaRPr>
+          </a:p>
+          <a:p>
+            <a:pPr marL="0" marR="0" lvl="0" indent="0" algn="l" defTabSz="914400" rtl="0" eaLnBrk="0" fontAlgn="base" latinLnBrk="0" hangingPunct="0">
+              <a:lnSpc>
+                <a:spcPct val="100000"/>
+              </a:lnSpc>
+              <a:spcBef>
+                <a:spcPct val="0"/>
+              </a:spcBef>
+              <a:spcAft>
+                <a:spcPct val="0"/>
+              </a:spcAft>
+              <a:buClrTx/>
+              <a:buSzTx/>
+              <a:buFontTx/>
+              <a:buNone/>
+              <a:tabLst/>
+            </a:pPr>
+            <a:r>
+              <a:rPr kumimoji="0" lang="en-IL" altLang="en-IL" sz="1000" b="0" i="0" u="none" strike="noStrike" cap="none" normalizeH="0" baseline="0" dirty="0">
+                <a:ln>
+                  <a:noFill/>
+                </a:ln>
+                <a:solidFill>
+                  <a:srgbClr val="424242"/>
+                </a:solidFill>
+                <a:effectLst/>
+                <a:latin typeface="Arial Unicode MS"/>
+                <a:ea typeface="source-code-pro"/>
+              </a:rPr>
+              <a:t>├── docker-compose.yml </a:t>
+            </a:r>
+            <a:endParaRPr kumimoji="0" lang="en-US" altLang="en-IL" sz="1000" b="0" i="0" u="none" strike="noStrike" cap="none" normalizeH="0" baseline="0" dirty="0">
+              <a:ln>
+                <a:noFill/>
+              </a:ln>
+              <a:solidFill>
+                <a:srgbClr val="424242"/>
+              </a:solidFill>
+              <a:effectLst/>
+              <a:latin typeface="Arial Unicode MS"/>
+              <a:ea typeface="source-code-pro"/>
+            </a:endParaRPr>
+          </a:p>
+          <a:p>
+            <a:pPr marL="0" marR="0" lvl="0" indent="0" algn="l" defTabSz="914400" rtl="0" eaLnBrk="0" fontAlgn="base" latinLnBrk="0" hangingPunct="0">
+              <a:lnSpc>
+                <a:spcPct val="100000"/>
+              </a:lnSpc>
+              <a:spcBef>
+                <a:spcPct val="0"/>
+              </a:spcBef>
+              <a:spcAft>
+                <a:spcPct val="0"/>
+              </a:spcAft>
+              <a:buClrTx/>
+              <a:buSzTx/>
+              <a:buFontTx/>
+              <a:buNone/>
+              <a:tabLst/>
+            </a:pPr>
+            <a:r>
+              <a:rPr kumimoji="0" lang="en-IL" altLang="en-IL" sz="1000" b="0" i="0" u="none" strike="noStrike" cap="none" normalizeH="0" baseline="0" dirty="0">
+                <a:ln>
+                  <a:noFill/>
+                </a:ln>
+                <a:solidFill>
+                  <a:srgbClr val="424242"/>
+                </a:solidFill>
+                <a:effectLst/>
+                <a:latin typeface="Arial Unicode MS"/>
+                <a:ea typeface="source-code-pro"/>
+              </a:rPr>
+              <a:t>├── docker-compose.override.yml </a:t>
+            </a:r>
+            <a:endParaRPr kumimoji="0" lang="en-US" altLang="en-IL" sz="1000" b="0" i="0" u="none" strike="noStrike" cap="none" normalizeH="0" baseline="0" dirty="0">
+              <a:ln>
+                <a:noFill/>
+              </a:ln>
+              <a:solidFill>
+                <a:srgbClr val="424242"/>
+              </a:solidFill>
+              <a:effectLst/>
+              <a:latin typeface="Arial Unicode MS"/>
+              <a:ea typeface="source-code-pro"/>
+            </a:endParaRPr>
+          </a:p>
+          <a:p>
+            <a:pPr marL="0" marR="0" lvl="0" indent="0" algn="l" defTabSz="914400" rtl="0" eaLnBrk="0" fontAlgn="base" latinLnBrk="0" hangingPunct="0">
+              <a:lnSpc>
+                <a:spcPct val="100000"/>
+              </a:lnSpc>
+              <a:spcBef>
+                <a:spcPct val="0"/>
+              </a:spcBef>
+              <a:spcAft>
+                <a:spcPct val="0"/>
+              </a:spcAft>
+              <a:buClrTx/>
+              <a:buSzTx/>
+              <a:buFontTx/>
+              <a:buNone/>
+              <a:tabLst/>
+            </a:pPr>
+            <a:r>
+              <a:rPr kumimoji="0" lang="en-IL" altLang="en-IL" sz="1000" b="0" i="0" u="none" strike="noStrike" cap="none" normalizeH="0" baseline="0" dirty="0">
+                <a:ln>
+                  <a:noFill/>
+                </a:ln>
+                <a:solidFill>
+                  <a:srgbClr val="424242"/>
+                </a:solidFill>
+                <a:effectLst/>
+                <a:latin typeface="Arial Unicode MS"/>
+                <a:ea typeface="source-code-pro"/>
+              </a:rPr>
+              <a:t>└── A2C.sln </a:t>
+            </a:r>
+            <a:r>
+              <a:rPr kumimoji="0" lang="en-US" altLang="en-IL" sz="1000" b="0" i="0" u="none" strike="noStrike" cap="none" normalizeH="0" baseline="0" dirty="0">
+                <a:ln>
+                  <a:noFill/>
+                </a:ln>
+                <a:solidFill>
+                  <a:srgbClr val="424242"/>
+                </a:solidFill>
+                <a:effectLst/>
+                <a:latin typeface="Arial Unicode MS"/>
+                <a:ea typeface="source-code-pro"/>
+              </a:rPr>
+              <a:t>			</a:t>
+            </a:r>
+            <a:r>
+              <a:rPr kumimoji="0" lang="en-IL" altLang="en-IL" sz="1000" b="0" i="0" u="none" strike="noStrike" cap="none" normalizeH="0" baseline="0" dirty="0">
+                <a:ln>
+                  <a:noFill/>
+                </a:ln>
+                <a:solidFill>
+                  <a:srgbClr val="424242"/>
+                </a:solidFill>
+                <a:effectLst/>
+                <a:latin typeface="Arial Unicode MS"/>
+                <a:ea typeface="source-code-pro"/>
+              </a:rPr>
+              <a:t>← </a:t>
+            </a:r>
+            <a:r>
+              <a:rPr lang="en-US" altLang="en-IL" sz="1000" dirty="0">
+                <a:solidFill>
+                  <a:srgbClr val="424242"/>
+                </a:solidFill>
+                <a:latin typeface="Arial Unicode MS"/>
+                <a:ea typeface="source-code-pro"/>
+                <a:cs typeface="Arial" panose="020B0604020202020204" pitchFamily="34" charset="0"/>
+              </a:rPr>
+              <a:t>Main </a:t>
+            </a:r>
+            <a:r>
+              <a:rPr kumimoji="0" lang="en-IL" altLang="en-IL" sz="1000" b="0" i="0" u="none" strike="noStrike" cap="none" normalizeH="0" baseline="0" dirty="0">
+                <a:ln>
+                  <a:noFill/>
+                </a:ln>
+                <a:solidFill>
+                  <a:srgbClr val="424242"/>
+                </a:solidFill>
+                <a:effectLst/>
+                <a:latin typeface="Arial Unicode MS"/>
+                <a:ea typeface="source-code-pro"/>
+              </a:rPr>
+              <a:t>Solution </a:t>
+            </a:r>
+            <a:r>
+              <a:rPr kumimoji="0" lang="en-US" altLang="en-IL" sz="1000" b="0" i="0" u="none" strike="noStrike" cap="none" normalizeH="0" baseline="0" dirty="0">
+                <a:ln>
+                  <a:noFill/>
+                </a:ln>
+                <a:solidFill>
+                  <a:srgbClr val="424242"/>
+                </a:solidFill>
+                <a:effectLst/>
+                <a:latin typeface="Arial Unicode MS"/>
+                <a:ea typeface="source-code-pro"/>
+                <a:cs typeface="Arial" panose="020B0604020202020204" pitchFamily="34" charset="0"/>
+              </a:rPr>
+              <a:t>file</a:t>
+            </a:r>
+            <a:endParaRPr kumimoji="0" lang="en-IL" altLang="en-IL" sz="1800" b="0" i="0" u="none" strike="noStrike" cap="none" normalizeH="0" baseline="0" dirty="0">
+              <a:ln>
+                <a:noFill/>
+              </a:ln>
+              <a:solidFill>
+                <a:schemeClr val="tx1"/>
+              </a:solidFill>
+              <a:effectLst/>
+              <a:latin typeface="Arial" panose="020B0604020202020204" pitchFamily="34" charset="0"/>
+            </a:endParaRPr>
+          </a:p>
+        </p:txBody>
+      </p:sp>
+      <p:cxnSp>
+        <p:nvCxnSpPr>
+          <p:cNvPr id="5" name="Straight Connector 4">
+            <a:extLst>
+              <a:ext uri="{FF2B5EF4-FFF2-40B4-BE49-F238E27FC236}">
+                <a16:creationId xmlns:a16="http://schemas.microsoft.com/office/drawing/2014/main" id="{2775D967-AD34-DFF9-109B-EBB1CB82D2BA}"/>
+              </a:ext>
+            </a:extLst>
+          </p:cNvPr>
+          <p:cNvCxnSpPr>
+            <a:cxnSpLocks/>
+          </p:cNvCxnSpPr>
+          <p:nvPr/>
+        </p:nvCxnSpPr>
+        <p:spPr>
+          <a:xfrm>
+            <a:off x="2157984" y="1078992"/>
+            <a:ext cx="0" cy="2679192"/>
+          </a:xfrm>
+          <a:prstGeom prst="line">
+            <a:avLst/>
+          </a:prstGeom>
+        </p:spPr>
+        <p:style>
+          <a:lnRef idx="3">
+            <a:schemeClr val="dk1"/>
+          </a:lnRef>
+          <a:fillRef idx="0">
+            <a:schemeClr val="dk1"/>
+          </a:fillRef>
+          <a:effectRef idx="2">
+            <a:schemeClr val="dk1"/>
+          </a:effectRef>
+          <a:fontRef idx="minor">
+            <a:schemeClr val="tx1"/>
+          </a:fontRef>
+        </p:style>
+      </p:cxnSp>
+    </p:spTree>
+    <p:extLst>
+      <p:ext uri="{BB962C8B-B14F-4D97-AF65-F5344CB8AC3E}">
+        <p14:creationId xmlns:p14="http://schemas.microsoft.com/office/powerpoint/2010/main" val="2027742940"/>
+      </p:ext>
+    </p:extLst>
+  </p:cSld>
+  <p:clrMapOvr>
+    <a:masterClrMapping/>
+  </p:clrMapOvr>
+</p:sld>
+</file>
+
+<file path=ppt/slides/slide5.xml><?xml version="1.0" encoding="utf-8"?>
+<p:sld xmlns:a="http://schemas.openxmlformats.org/drawingml/2006/main" xmlns:r="http://schemas.openxmlformats.org/officeDocument/2006/relationships" xmlns:p="http://schemas.openxmlformats.org/presentationml/2006/main">
+  <p:cSld>
+    <p:spTree>
+      <p:nvGrpSpPr>
+        <p:cNvPr id="1" name=""/>
+        <p:cNvGrpSpPr/>
+        <p:nvPr/>
+      </p:nvGrpSpPr>
+      <p:grpSpPr>
+        <a:xfrm>
+          <a:off x="0" y="0"/>
+          <a:ext cx="0" cy="0"/>
+          <a:chOff x="0" y="0"/>
+          <a:chExt cx="0" cy="0"/>
+        </a:xfrm>
+      </p:grpSpPr>
+      <p:pic>
+        <p:nvPicPr>
+          <p:cNvPr id="3" name="Picture 2">
+            <a:extLst>
+              <a:ext uri="{FF2B5EF4-FFF2-40B4-BE49-F238E27FC236}">
+                <a16:creationId xmlns:a16="http://schemas.microsoft.com/office/drawing/2014/main" id="{D7C46D48-8519-3261-C8EE-454CC2EDF1AA}"/>
+              </a:ext>
+            </a:extLst>
+          </p:cNvPr>
+          <p:cNvPicPr>
+            <a:picLocks noChangeAspect="1"/>
+          </p:cNvPicPr>
+          <p:nvPr/>
+        </p:nvPicPr>
+        <p:blipFill>
+          <a:blip r:embed="rId2"/>
+          <a:stretch>
+            <a:fillRect/>
+          </a:stretch>
+        </p:blipFill>
+        <p:spPr>
+          <a:xfrm>
+            <a:off x="4581313" y="380574"/>
+            <a:ext cx="3029373" cy="6096851"/>
+          </a:xfrm>
+          <a:prstGeom prst="rect">
+            <a:avLst/>
+          </a:prstGeom>
+        </p:spPr>
+      </p:pic>
+    </p:spTree>
+    <p:extLst>
+      <p:ext uri="{BB962C8B-B14F-4D97-AF65-F5344CB8AC3E}">
+        <p14:creationId xmlns:p14="http://schemas.microsoft.com/office/powerpoint/2010/main" val="1299460525"/>
+      </p:ext>
+    </p:extLst>
+  </p:cSld>
+  <p:clrMapOvr>
+    <a:masterClrMapping/>
+  </p:clrMapOvr>
+</p:sld>
+</file>
+
+<file path=ppt/slides/slide6.xml><?xml version="1.0" encoding="utf-8"?>
+<p:sld xmlns:a="http://schemas.openxmlformats.org/drawingml/2006/main" xmlns:r="http://schemas.openxmlformats.org/officeDocument/2006/relationships" xmlns:p="http://schemas.openxmlformats.org/presentationml/2006/main">
+  <p:cSld>
+    <p:spTree>
+      <p:nvGrpSpPr>
+        <p:cNvPr id="1" name=""/>
+        <p:cNvGrpSpPr/>
+        <p:nvPr/>
+      </p:nvGrpSpPr>
+      <p:grpSpPr>
+        <a:xfrm>
+          <a:off x="0" y="0"/>
+          <a:ext cx="0" cy="0"/>
+          <a:chOff x="0" y="0"/>
+          <a:chExt cx="0" cy="0"/>
+        </a:xfrm>
+      </p:grpSpPr>
       <p:grpSp>
         <p:nvGrpSpPr>
           <p:cNvPr id="4" name="Group 3">
@@ -11440,7 +13045,7 @@
 </p:sld>
 </file>
 
-<file path=ppt/slides/slide5.xml><?xml version="1.0" encoding="utf-8"?>
+<file path=ppt/slides/slide7.xml><?xml version="1.0" encoding="utf-8"?>
 <p:sld xmlns:a="http://schemas.openxmlformats.org/drawingml/2006/main" xmlns:r="http://schemas.openxmlformats.org/officeDocument/2006/relationships" xmlns:p="http://schemas.openxmlformats.org/presentationml/2006/main">
   <p:cSld>
     <p:spTree>
@@ -12836,7 +14441,7 @@
 </p:sld>
 </file>
 
-<file path=ppt/slides/slide6.xml><?xml version="1.0" encoding="utf-8"?>
+<file path=ppt/slides/slide8.xml><?xml version="1.0" encoding="utf-8"?>
 <p:sld xmlns:a="http://schemas.openxmlformats.org/drawingml/2006/main" xmlns:r="http://schemas.openxmlformats.org/officeDocument/2006/relationships" xmlns:p="http://schemas.openxmlformats.org/presentationml/2006/main">
   <p:cSld>
     <p:spTree>
@@ -12926,7 +14531,7 @@
                 <a:ea typeface="Yu Gothic" panose="020B0400000000000000" pitchFamily="34" charset="-128"/>
                 <a:cs typeface="Arial" panose="020B0604020202020204" pitchFamily="34" charset="0"/>
               </a:rPr>
-              <a:t>A2C (Root)</a:t>
+              <a:t>A2C</a:t>
             </a:r>
             <a:endParaRPr kumimoji="0" lang="en-IL" altLang="en-IL" sz="4000" b="0" i="0" u="none" strike="noStrike" cap="none" normalizeH="0" baseline="0" dirty="0">
               <a:ln>
@@ -13197,7 +14802,7 @@
         </p:nvSpPr>
         <p:spPr bwMode="auto">
           <a:xfrm>
-            <a:off x="1283208" y="5817564"/>
+            <a:off x="1283208" y="6338772"/>
             <a:ext cx="1675482" cy="359441"/>
           </a:xfrm>
           <a:prstGeom prst="roundRect">
@@ -13264,9 +14869,9 @@
           <p:nvPr/>
         </p:nvCxnSpPr>
         <p:spPr>
-          <a:xfrm flipH="1">
-            <a:off x="625882" y="996606"/>
-            <a:ext cx="8184" cy="4979119"/>
+          <a:xfrm>
+            <a:off x="634066" y="996606"/>
+            <a:ext cx="0" cy="5500327"/>
           </a:xfrm>
           <a:prstGeom prst="line">
             <a:avLst/>
@@ -13379,7 +14984,7 @@
         </p:nvCxnSpPr>
         <p:spPr>
           <a:xfrm>
-            <a:off x="624922" y="5975725"/>
+            <a:off x="624922" y="6496933"/>
             <a:ext cx="658286" cy="0"/>
           </a:xfrm>
           <a:prstGeom prst="line">
@@ -14344,6 +15949,282 @@
           </a:fontRef>
         </p:style>
       </p:cxnSp>
+      <p:sp>
+        <p:nvSpPr>
+          <p:cNvPr id="11" name="AutoShape 13">
+            <a:extLst>
+              <a:ext uri="{FF2B5EF4-FFF2-40B4-BE49-F238E27FC236}">
+                <a16:creationId xmlns:a16="http://schemas.microsoft.com/office/drawing/2014/main" id="{F799A10B-14C1-1B55-ACA7-1DABE0E798E4}"/>
+              </a:ext>
+            </a:extLst>
+          </p:cNvPr>
+          <p:cNvSpPr>
+            <a:spLocks noChangeArrowheads="1"/>
+          </p:cNvSpPr>
+          <p:nvPr/>
+        </p:nvSpPr>
+        <p:spPr bwMode="auto">
+          <a:xfrm>
+            <a:off x="1286449" y="5132300"/>
+            <a:ext cx="832104" cy="305112"/>
+          </a:xfrm>
+          <a:prstGeom prst="roundRect">
+            <a:avLst>
+              <a:gd name="adj" fmla="val 16667"/>
+            </a:avLst>
+          </a:prstGeom>
+          <a:solidFill>
+            <a:schemeClr val="bg1"/>
+          </a:solidFill>
+          <a:ln w="12700">
+            <a:solidFill>
+              <a:srgbClr val="09101D"/>
+            </a:solidFill>
+            <a:miter lim="800000"/>
+            <a:headEnd/>
+            <a:tailEnd/>
+          </a:ln>
+        </p:spPr>
+        <p:txBody>
+          <a:bodyPr vert="horz" wrap="square" lIns="91440" tIns="45720" rIns="91440" bIns="45720" numCol="1" anchor="ctr" anchorCtr="0" compatLnSpc="1">
+            <a:prstTxWarp prst="textNoShape">
+              <a:avLst/>
+            </a:prstTxWarp>
+          </a:bodyPr>
+          <a:lstStyle/>
+          <a:p>
+            <a:pPr marL="0" marR="0" lvl="0" indent="0" algn="ctr" defTabSz="914400" rtl="0" eaLnBrk="0" fontAlgn="base" latinLnBrk="0" hangingPunct="0">
+              <a:lnSpc>
+                <a:spcPct val="100000"/>
+              </a:lnSpc>
+              <a:spcBef>
+                <a:spcPct val="0"/>
+              </a:spcBef>
+              <a:spcAft>
+                <a:spcPct val="0"/>
+              </a:spcAft>
+              <a:buClrTx/>
+              <a:buSzTx/>
+              <a:buFontTx/>
+              <a:buNone/>
+              <a:tabLst/>
+            </a:pPr>
+            <a:r>
+              <a:rPr kumimoji="0" lang="en-US" altLang="en-IL" b="0" i="0" u="none" strike="noStrike" cap="none" normalizeH="0" baseline="0" dirty="0">
+                <a:ln>
+                  <a:noFill/>
+                </a:ln>
+                <a:solidFill>
+                  <a:schemeClr val="tx1"/>
+                </a:solidFill>
+                <a:effectLst/>
+                <a:latin typeface="Calibri" panose="020F0502020204030204" pitchFamily="34" charset="0"/>
+                <a:ea typeface="Yu Gothic" panose="020B0400000000000000" pitchFamily="34" charset="-128"/>
+                <a:cs typeface="Arial" panose="020B0604020202020204" pitchFamily="34" charset="0"/>
+              </a:rPr>
+              <a:t>Tests</a:t>
+            </a:r>
+            <a:endParaRPr kumimoji="0" lang="en-IL" altLang="en-IL" sz="4000" b="0" i="0" u="none" strike="noStrike" cap="none" normalizeH="0" baseline="0" dirty="0">
+              <a:ln>
+                <a:noFill/>
+              </a:ln>
+              <a:solidFill>
+                <a:schemeClr val="tx1"/>
+              </a:solidFill>
+              <a:effectLst/>
+              <a:latin typeface="Arial" panose="020B0604020202020204" pitchFamily="34" charset="0"/>
+            </a:endParaRPr>
+          </a:p>
+        </p:txBody>
+      </p:sp>
+      <p:cxnSp>
+        <p:nvCxnSpPr>
+          <p:cNvPr id="12" name="Straight Connector 11">
+            <a:extLst>
+              <a:ext uri="{FF2B5EF4-FFF2-40B4-BE49-F238E27FC236}">
+                <a16:creationId xmlns:a16="http://schemas.microsoft.com/office/drawing/2014/main" id="{5C6BD2AB-A3B0-1F79-EF23-6F6E19FF3C4A}"/>
+              </a:ext>
+            </a:extLst>
+          </p:cNvPr>
+          <p:cNvCxnSpPr>
+            <a:cxnSpLocks/>
+          </p:cNvCxnSpPr>
+          <p:nvPr/>
+        </p:nvCxnSpPr>
+        <p:spPr>
+          <a:xfrm>
+            <a:off x="628163" y="5279671"/>
+            <a:ext cx="658286" cy="0"/>
+          </a:xfrm>
+          <a:prstGeom prst="line">
+            <a:avLst/>
+          </a:prstGeom>
+        </p:spPr>
+        <p:style>
+          <a:lnRef idx="2">
+            <a:schemeClr val="accent1"/>
+          </a:lnRef>
+          <a:fillRef idx="0">
+            <a:schemeClr val="accent1"/>
+          </a:fillRef>
+          <a:effectRef idx="1">
+            <a:schemeClr val="accent1"/>
+          </a:effectRef>
+          <a:fontRef idx="minor">
+            <a:schemeClr val="tx1"/>
+          </a:fontRef>
+        </p:style>
+      </p:cxnSp>
+      <p:sp>
+        <p:nvSpPr>
+          <p:cNvPr id="13" name="AutoShape 13">
+            <a:extLst>
+              <a:ext uri="{FF2B5EF4-FFF2-40B4-BE49-F238E27FC236}">
+                <a16:creationId xmlns:a16="http://schemas.microsoft.com/office/drawing/2014/main" id="{97672CD0-A1CE-374C-68C7-143497BCCE39}"/>
+              </a:ext>
+            </a:extLst>
+          </p:cNvPr>
+          <p:cNvSpPr>
+            <a:spLocks noChangeArrowheads="1"/>
+          </p:cNvSpPr>
+          <p:nvPr/>
+        </p:nvSpPr>
+        <p:spPr bwMode="auto">
+          <a:xfrm>
+            <a:off x="2259974" y="5708372"/>
+            <a:ext cx="2001130" cy="359440"/>
+          </a:xfrm>
+          <a:prstGeom prst="roundRect">
+            <a:avLst>
+              <a:gd name="adj" fmla="val 16667"/>
+            </a:avLst>
+          </a:prstGeom>
+          <a:solidFill>
+            <a:schemeClr val="bg1"/>
+          </a:solidFill>
+          <a:ln w="12700">
+            <a:solidFill>
+              <a:srgbClr val="09101D"/>
+            </a:solidFill>
+            <a:miter lim="800000"/>
+            <a:headEnd/>
+            <a:tailEnd/>
+          </a:ln>
+        </p:spPr>
+        <p:txBody>
+          <a:bodyPr vert="horz" wrap="square" lIns="91440" tIns="45720" rIns="91440" bIns="45720" numCol="1" anchor="ctr" anchorCtr="0" compatLnSpc="1">
+            <a:prstTxWarp prst="textNoShape">
+              <a:avLst/>
+            </a:prstTxWarp>
+          </a:bodyPr>
+          <a:lstStyle/>
+          <a:p>
+            <a:pPr lvl="0" algn="ctr" eaLnBrk="0" fontAlgn="base" hangingPunct="0">
+              <a:spcBef>
+                <a:spcPct val="0"/>
+              </a:spcBef>
+              <a:spcAft>
+                <a:spcPct val="0"/>
+              </a:spcAft>
+            </a:pPr>
+            <a:r>
+              <a:rPr lang="en-US" altLang="en-IL" dirty="0">
+                <a:latin typeface="Calibri" panose="020F0502020204030204" pitchFamily="34" charset="0"/>
+                <a:ea typeface="Yu Gothic" panose="020B0400000000000000" pitchFamily="34" charset="-128"/>
+                <a:cs typeface="Arial" panose="020B0604020202020204" pitchFamily="34" charset="0"/>
+              </a:rPr>
+              <a:t>A2C.CRM.Api.Tests</a:t>
+            </a:r>
+            <a:endParaRPr kumimoji="0" lang="en-IL" altLang="en-IL" sz="4000" b="0" i="0" u="none" strike="noStrike" cap="none" normalizeH="0" baseline="0" dirty="0">
+              <a:ln>
+                <a:noFill/>
+              </a:ln>
+              <a:solidFill>
+                <a:schemeClr val="tx1"/>
+              </a:solidFill>
+              <a:effectLst/>
+              <a:latin typeface="Arial" panose="020B0604020202020204" pitchFamily="34" charset="0"/>
+            </a:endParaRPr>
+          </a:p>
+        </p:txBody>
+      </p:sp>
+      <p:cxnSp>
+        <p:nvCxnSpPr>
+          <p:cNvPr id="14" name="Straight Connector 13">
+            <a:extLst>
+              <a:ext uri="{FF2B5EF4-FFF2-40B4-BE49-F238E27FC236}">
+                <a16:creationId xmlns:a16="http://schemas.microsoft.com/office/drawing/2014/main" id="{F2CC8B0A-5F34-9281-C371-A4FFFC090347}"/>
+              </a:ext>
+            </a:extLst>
+          </p:cNvPr>
+          <p:cNvCxnSpPr>
+            <a:cxnSpLocks/>
+          </p:cNvCxnSpPr>
+          <p:nvPr/>
+        </p:nvCxnSpPr>
+        <p:spPr>
+          <a:xfrm>
+            <a:off x="1718347" y="5446020"/>
+            <a:ext cx="0" cy="442071"/>
+          </a:xfrm>
+          <a:prstGeom prst="line">
+            <a:avLst/>
+          </a:prstGeom>
+        </p:spPr>
+        <p:style>
+          <a:lnRef idx="2">
+            <a:schemeClr val="accent1"/>
+          </a:lnRef>
+          <a:fillRef idx="0">
+            <a:schemeClr val="accent1"/>
+          </a:fillRef>
+          <a:effectRef idx="1">
+            <a:schemeClr val="accent1"/>
+          </a:effectRef>
+          <a:fontRef idx="minor">
+            <a:schemeClr val="tx1"/>
+          </a:fontRef>
+        </p:style>
+      </p:cxnSp>
+      <p:cxnSp>
+        <p:nvCxnSpPr>
+          <p:cNvPr id="16" name="Straight Connector 15">
+            <a:extLst>
+              <a:ext uri="{FF2B5EF4-FFF2-40B4-BE49-F238E27FC236}">
+                <a16:creationId xmlns:a16="http://schemas.microsoft.com/office/drawing/2014/main" id="{DDFF1663-547C-007D-0394-80FCA5C623AA}"/>
+              </a:ext>
+            </a:extLst>
+          </p:cNvPr>
+          <p:cNvCxnSpPr>
+            <a:cxnSpLocks/>
+            <a:endCxn id="13" idx="1"/>
+          </p:cNvCxnSpPr>
+          <p:nvPr/>
+        </p:nvCxnSpPr>
+        <p:spPr>
+          <a:xfrm>
+            <a:off x="1702914" y="5888091"/>
+            <a:ext cx="557060" cy="1"/>
+          </a:xfrm>
+          <a:prstGeom prst="line">
+            <a:avLst/>
+          </a:prstGeom>
+        </p:spPr>
+        <p:style>
+          <a:lnRef idx="2">
+            <a:schemeClr val="accent1"/>
+          </a:lnRef>
+          <a:fillRef idx="0">
+            <a:schemeClr val="accent1"/>
+          </a:fillRef>
+          <a:effectRef idx="1">
+            <a:schemeClr val="accent1"/>
+          </a:effectRef>
+          <a:fontRef idx="minor">
+            <a:schemeClr val="tx1"/>
+          </a:fontRef>
+        </p:style>
+      </p:cxnSp>
     </p:spTree>
     <p:extLst>
       <p:ext uri="{BB962C8B-B14F-4D97-AF65-F5344CB8AC3E}">
@@ -14357,7 +16238,7 @@
 </p:sld>
 </file>
 
-<file path=ppt/slides/slide7.xml><?xml version="1.0" encoding="utf-8"?>
+<file path=ppt/slides/slide9.xml><?xml version="1.0" encoding="utf-8"?>
 <p:sld xmlns:a="http://schemas.openxmlformats.org/drawingml/2006/main" xmlns:r="http://schemas.openxmlformats.org/officeDocument/2006/relationships" xmlns:p="http://schemas.openxmlformats.org/presentationml/2006/main">
   <p:cSld>
     <p:spTree>

--- a/Documentations/SysArchitecture.pptx
+++ b/Documentations/SysArchitecture.pptx
@@ -4868,8 +4868,8 @@
         </p:nvSpPr>
         <p:spPr>
           <a:xfrm>
-            <a:off x="4474671" y="259557"/>
-            <a:ext cx="4555029" cy="5833479"/>
+            <a:off x="4474671" y="109729"/>
+            <a:ext cx="4555029" cy="6528814"/>
           </a:xfrm>
           <a:prstGeom prst="rect">
             <a:avLst/>
@@ -4936,7 +4936,7 @@
         </p:nvSpPr>
         <p:spPr bwMode="auto">
           <a:xfrm>
-            <a:off x="2754861" y="1602741"/>
+            <a:off x="2754861" y="2809749"/>
             <a:ext cx="831850" cy="241300"/>
           </a:xfrm>
           <a:prstGeom prst="rect">
@@ -5029,7 +5029,7 @@
         </p:nvSpPr>
         <p:spPr bwMode="auto">
           <a:xfrm>
-            <a:off x="7104788" y="310040"/>
+            <a:off x="7104788" y="191168"/>
             <a:ext cx="651264" cy="593367"/>
           </a:xfrm>
           <a:prstGeom prst="flowChartMagneticDisk">
@@ -5187,7 +5187,7 @@
         </p:nvCxnSpPr>
         <p:spPr>
           <a:xfrm>
-            <a:off x="2714048" y="1823063"/>
+            <a:off x="2714048" y="3030071"/>
             <a:ext cx="894944" cy="0"/>
           </a:xfrm>
           <a:prstGeom prst="straightConnector1">
@@ -5227,7 +5227,7 @@
         </p:nvGrpSpPr>
         <p:grpSpPr>
           <a:xfrm>
-            <a:off x="4351942" y="764964"/>
+            <a:off x="4351942" y="646092"/>
             <a:ext cx="3164040" cy="632037"/>
             <a:chOff x="4351942" y="1669839"/>
             <a:chExt cx="3164040" cy="632037"/>
@@ -5600,7 +5600,7 @@
         </p:nvSpPr>
         <p:spPr bwMode="auto">
           <a:xfrm>
-            <a:off x="1431348" y="1441927"/>
+            <a:off x="1431348" y="2648935"/>
             <a:ext cx="1282700" cy="873125"/>
           </a:xfrm>
           <a:prstGeom prst="roundRect">
@@ -5817,8 +5817,8 @@
         </p:nvSpPr>
         <p:spPr bwMode="auto">
           <a:xfrm>
-            <a:off x="3608992" y="463256"/>
-            <a:ext cx="742950" cy="5508919"/>
+            <a:off x="3608992" y="109728"/>
+            <a:ext cx="742950" cy="6528814"/>
           </a:xfrm>
           <a:prstGeom prst="roundRect">
             <a:avLst>
@@ -5934,8 +5934,8 @@
         </p:nvSpPr>
         <p:spPr bwMode="auto">
           <a:xfrm>
-            <a:off x="8057804" y="416747"/>
-            <a:ext cx="688975" cy="5505450"/>
+            <a:off x="8057804" y="416746"/>
+            <a:ext cx="688975" cy="6020629"/>
           </a:xfrm>
           <a:prstGeom prst="roundRect">
             <a:avLst>
@@ -6207,7 +6207,7 @@
         </p:nvSpPr>
         <p:spPr bwMode="auto">
           <a:xfrm>
-            <a:off x="7017530" y="1359060"/>
+            <a:off x="7017530" y="1103028"/>
             <a:ext cx="688975" cy="593368"/>
           </a:xfrm>
           <a:prstGeom prst="flowChartMagneticDisk">
@@ -6365,7 +6365,7 @@
         </p:nvSpPr>
         <p:spPr bwMode="auto">
           <a:xfrm>
-            <a:off x="7036727" y="2576105"/>
+            <a:off x="7036727" y="3225329"/>
             <a:ext cx="688975" cy="593367"/>
           </a:xfrm>
           <a:prstGeom prst="flowChartMagneticDisk">
@@ -6523,7 +6523,7 @@
         </p:nvCxnSpPr>
         <p:spPr>
           <a:xfrm>
-            <a:off x="6481411" y="1116942"/>
+            <a:off x="6481411" y="998070"/>
             <a:ext cx="1592128" cy="8603"/>
           </a:xfrm>
           <a:prstGeom prst="straightConnector1">
@@ -6563,7 +6563,7 @@
         </p:nvGrpSpPr>
         <p:grpSpPr>
           <a:xfrm>
-            <a:off x="4351942" y="1845333"/>
+            <a:off x="4351942" y="1589301"/>
             <a:ext cx="3721597" cy="647518"/>
             <a:chOff x="4351942" y="2312058"/>
             <a:chExt cx="3721597" cy="647518"/>
@@ -7038,7 +7038,7 @@
         </p:nvGrpSpPr>
         <p:grpSpPr>
           <a:xfrm>
-            <a:off x="4351942" y="3064351"/>
+            <a:off x="4351942" y="3713575"/>
             <a:ext cx="3721597" cy="606743"/>
             <a:chOff x="4351942" y="3007201"/>
             <a:chExt cx="3721597" cy="606743"/>
@@ -7501,7 +7501,7 @@
         </p:nvGrpSpPr>
         <p:grpSpPr>
           <a:xfrm>
-            <a:off x="4351942" y="4159726"/>
+            <a:off x="4351942" y="4763230"/>
             <a:ext cx="3705862" cy="534011"/>
             <a:chOff x="4351942" y="3721576"/>
             <a:chExt cx="3705862" cy="534011"/>
@@ -7964,7 +7964,7 @@
         </p:nvSpPr>
         <p:spPr bwMode="auto">
           <a:xfrm>
-            <a:off x="6971639" y="3593787"/>
+            <a:off x="6971639" y="4197291"/>
             <a:ext cx="754063" cy="539750"/>
           </a:xfrm>
           <a:prstGeom prst="roundRect">
@@ -8046,7 +8046,7 @@
         </p:nvCxnSpPr>
         <p:spPr>
           <a:xfrm flipV="1">
-            <a:off x="6501745" y="2872789"/>
+            <a:off x="6501745" y="3522013"/>
             <a:ext cx="534982" cy="342799"/>
           </a:xfrm>
           <a:prstGeom prst="straightConnector1">
@@ -8089,7 +8089,7 @@
         </p:nvCxnSpPr>
         <p:spPr>
           <a:xfrm flipV="1">
-            <a:off x="6484592" y="3863662"/>
+            <a:off x="6484592" y="4467166"/>
             <a:ext cx="487047" cy="378131"/>
           </a:xfrm>
           <a:prstGeom prst="straightConnector1">
@@ -8132,7 +8132,7 @@
         </p:nvCxnSpPr>
         <p:spPr>
           <a:xfrm flipV="1">
-            <a:off x="6470905" y="1655744"/>
+            <a:off x="6470905" y="1399712"/>
             <a:ext cx="546625" cy="330517"/>
           </a:xfrm>
           <a:prstGeom prst="straightConnector1">
@@ -8175,7 +8175,7 @@
         </p:nvCxnSpPr>
         <p:spPr>
           <a:xfrm flipV="1">
-            <a:off x="6435070" y="606724"/>
+            <a:off x="6435070" y="487852"/>
             <a:ext cx="669718" cy="284764"/>
           </a:xfrm>
           <a:prstGeom prst="straightConnector1">
@@ -8215,9 +8215,9 @@
         </p:nvGrpSpPr>
         <p:grpSpPr>
           <a:xfrm>
-            <a:off x="5354285" y="5446641"/>
+            <a:off x="5354285" y="5949561"/>
             <a:ext cx="2719254" cy="386116"/>
-            <a:chOff x="5354285" y="4960866"/>
+            <a:chOff x="5354285" y="5463786"/>
             <a:chExt cx="2719254" cy="386116"/>
           </a:xfrm>
         </p:grpSpPr>
@@ -8237,7 +8237,7 @@
           </p:nvSpPr>
           <p:spPr bwMode="auto">
             <a:xfrm>
-              <a:off x="5354285" y="4960866"/>
+              <a:off x="5354285" y="5463786"/>
               <a:ext cx="1142999" cy="386116"/>
             </a:xfrm>
             <a:prstGeom prst="roundRect">
@@ -8363,7 +8363,7 @@
           </p:nvCxnSpPr>
           <p:spPr>
             <a:xfrm>
-              <a:off x="6497284" y="5146968"/>
+              <a:off x="6497284" y="5649888"/>
               <a:ext cx="1576255" cy="0"/>
             </a:xfrm>
             <a:prstGeom prst="straightConnector1">
@@ -8406,7 +8406,7 @@
         </p:nvSpPr>
         <p:spPr bwMode="auto">
           <a:xfrm>
-            <a:off x="5372524" y="4884672"/>
+            <a:off x="5372524" y="5424168"/>
             <a:ext cx="1142999" cy="386116"/>
           </a:xfrm>
           <a:prstGeom prst="roundRect">
@@ -8531,8 +8531,705 @@
         </p:nvCxnSpPr>
         <p:spPr>
           <a:xfrm>
-            <a:off x="6506671" y="5077730"/>
+            <a:off x="6506671" y="5617226"/>
             <a:ext cx="1576255" cy="0"/>
+          </a:xfrm>
+          <a:prstGeom prst="straightConnector1">
+            <a:avLst/>
+          </a:prstGeom>
+          <a:ln w="19050">
+            <a:headEnd type="triangle"/>
+            <a:tailEnd type="triangle"/>
+          </a:ln>
+        </p:spPr>
+        <p:style>
+          <a:lnRef idx="1">
+            <a:schemeClr val="accent1"/>
+          </a:lnRef>
+          <a:fillRef idx="0">
+            <a:schemeClr val="accent1"/>
+          </a:fillRef>
+          <a:effectRef idx="0">
+            <a:schemeClr val="accent1"/>
+          </a:effectRef>
+          <a:fontRef idx="minor">
+            <a:schemeClr val="tx1"/>
+          </a:fontRef>
+        </p:style>
+      </p:cxnSp>
+      <p:sp>
+        <p:nvSpPr>
+          <p:cNvPr id="3" name="AutoShape 2">
+            <a:extLst>
+              <a:ext uri="{FF2B5EF4-FFF2-40B4-BE49-F238E27FC236}">
+                <a16:creationId xmlns:a16="http://schemas.microsoft.com/office/drawing/2014/main" id="{4483E4C5-63C0-306A-7614-1D69DE2B6734}"/>
+              </a:ext>
+            </a:extLst>
+          </p:cNvPr>
+          <p:cNvSpPr>
+            <a:spLocks noChangeArrowheads="1"/>
+          </p:cNvSpPr>
+          <p:nvPr/>
+        </p:nvSpPr>
+        <p:spPr bwMode="auto">
+          <a:xfrm>
+            <a:off x="7014482" y="2188116"/>
+            <a:ext cx="688975" cy="593368"/>
+          </a:xfrm>
+          <a:prstGeom prst="flowChartMagneticDisk">
+            <a:avLst/>
+          </a:prstGeom>
+          <a:solidFill>
+            <a:schemeClr val="accent5">
+              <a:lumMod val="40000"/>
+              <a:lumOff val="60000"/>
+            </a:schemeClr>
+          </a:solidFill>
+          <a:ln w="12700">
+            <a:solidFill>
+              <a:srgbClr val="09101D"/>
+            </a:solidFill>
+            <a:miter lim="800000"/>
+            <a:headEnd/>
+            <a:tailEnd/>
+          </a:ln>
+        </p:spPr>
+        <p:txBody>
+          <a:bodyPr vert="horz" wrap="square" lIns="91440" tIns="45720" rIns="91440" bIns="45720" numCol="1" anchor="ctr" anchorCtr="0" compatLnSpc="1">
+            <a:prstTxWarp prst="textNoShape">
+              <a:avLst/>
+            </a:prstTxWarp>
+          </a:bodyPr>
+          <a:lstStyle/>
+          <a:p>
+            <a:pPr marL="0" marR="0" lvl="0" indent="0" algn="ctr" defTabSz="914400" rtl="0" eaLnBrk="0" fontAlgn="base" latinLnBrk="0" hangingPunct="0">
+              <a:lnSpc>
+                <a:spcPct val="100000"/>
+              </a:lnSpc>
+              <a:spcBef>
+                <a:spcPct val="0"/>
+              </a:spcBef>
+              <a:spcAft>
+                <a:spcPct val="0"/>
+              </a:spcAft>
+              <a:buClrTx/>
+              <a:buSzTx/>
+              <a:buFontTx/>
+              <a:buNone/>
+              <a:tabLst/>
+            </a:pPr>
+            <a:r>
+              <a:rPr kumimoji="0" lang="en-US" altLang="en-IL" sz="900" b="0" i="0" u="none" strike="noStrike" cap="none" normalizeH="0" baseline="0" dirty="0">
+                <a:ln>
+                  <a:noFill/>
+                </a:ln>
+                <a:solidFill>
+                  <a:schemeClr val="tx1"/>
+                </a:solidFill>
+                <a:effectLst/>
+                <a:latin typeface="Calibri" panose="020F0502020204030204" pitchFamily="34" charset="0"/>
+                <a:ea typeface="Yu Gothic" panose="020B0400000000000000" pitchFamily="34" charset="-128"/>
+                <a:cs typeface="Arial" panose="020B0604020202020204" pitchFamily="34" charset="0"/>
+              </a:rPr>
+              <a:t>Products</a:t>
+            </a:r>
+            <a:endParaRPr kumimoji="0" lang="en-IL" altLang="en-IL" sz="900" b="0" i="0" u="none" strike="noStrike" cap="none" normalizeH="0" baseline="0" dirty="0">
+              <a:ln>
+                <a:noFill/>
+              </a:ln>
+              <a:solidFill>
+                <a:schemeClr val="tx1"/>
+              </a:solidFill>
+              <a:effectLst/>
+            </a:endParaRPr>
+          </a:p>
+          <a:p>
+            <a:pPr marL="0" marR="0" lvl="0" indent="0" algn="ctr" defTabSz="914400" rtl="0" eaLnBrk="0" fontAlgn="base" latinLnBrk="0" hangingPunct="0">
+              <a:lnSpc>
+                <a:spcPct val="100000"/>
+              </a:lnSpc>
+              <a:spcBef>
+                <a:spcPct val="0"/>
+              </a:spcBef>
+              <a:spcAft>
+                <a:spcPct val="0"/>
+              </a:spcAft>
+              <a:buClrTx/>
+              <a:buSzTx/>
+              <a:buFontTx/>
+              <a:buNone/>
+              <a:tabLst/>
+            </a:pPr>
+            <a:r>
+              <a:rPr kumimoji="0" lang="en-US" altLang="en-IL" sz="1000" b="0" i="0" u="none" strike="noStrike" cap="none" normalizeH="0" baseline="0" dirty="0">
+                <a:ln>
+                  <a:noFill/>
+                </a:ln>
+                <a:solidFill>
+                  <a:schemeClr val="tx1"/>
+                </a:solidFill>
+                <a:effectLst/>
+                <a:latin typeface="Calibri" panose="020F0502020204030204" pitchFamily="34" charset="0"/>
+                <a:ea typeface="Yu Gothic" panose="020B0400000000000000" pitchFamily="34" charset="-128"/>
+                <a:cs typeface="Arial" panose="020B0604020202020204" pitchFamily="34" charset="0"/>
+              </a:rPr>
+              <a:t>(</a:t>
+            </a:r>
+            <a:r>
+              <a:rPr kumimoji="0" lang="en-IL" altLang="en-IL" sz="1000" b="0" i="0" u="none" strike="noStrike" cap="none" normalizeH="0" baseline="0" dirty="0">
+                <a:ln>
+                  <a:noFill/>
+                </a:ln>
+                <a:solidFill>
+                  <a:schemeClr val="tx1"/>
+                </a:solidFill>
+                <a:effectLst/>
+                <a:latin typeface="Calibri" panose="020F0502020204030204" pitchFamily="34" charset="0"/>
+                <a:ea typeface="Yu Gothic" panose="020B0400000000000000" pitchFamily="34" charset="-128"/>
+                <a:cs typeface="Arial" panose="020B0604020202020204" pitchFamily="34" charset="0"/>
+              </a:rPr>
+              <a:t>Docker</a:t>
+            </a:r>
+            <a:r>
+              <a:rPr kumimoji="0" lang="en-US" altLang="en-IL" sz="1000" b="0" i="0" u="none" strike="noStrike" cap="none" normalizeH="0" baseline="0" dirty="0">
+                <a:ln>
+                  <a:noFill/>
+                </a:ln>
+                <a:solidFill>
+                  <a:schemeClr val="tx1"/>
+                </a:solidFill>
+                <a:effectLst/>
+                <a:latin typeface="Calibri" panose="020F0502020204030204" pitchFamily="34" charset="0"/>
+                <a:ea typeface="Yu Gothic" panose="020B0400000000000000" pitchFamily="34" charset="-128"/>
+                <a:cs typeface="Arial" panose="020B0604020202020204" pitchFamily="34" charset="0"/>
+              </a:rPr>
+              <a:t>)</a:t>
+            </a:r>
+            <a:endParaRPr kumimoji="0" lang="en-IL" altLang="en-IL" sz="1800" b="0" i="0" u="none" strike="noStrike" cap="none" normalizeH="0" baseline="0" dirty="0">
+              <a:ln>
+                <a:noFill/>
+              </a:ln>
+              <a:solidFill>
+                <a:schemeClr val="tx1"/>
+              </a:solidFill>
+              <a:effectLst/>
+              <a:latin typeface="Arial" panose="020B0604020202020204" pitchFamily="34" charset="0"/>
+            </a:endParaRPr>
+          </a:p>
+        </p:txBody>
+      </p:sp>
+      <p:grpSp>
+        <p:nvGrpSpPr>
+          <p:cNvPr id="4" name="Group 3">
+            <a:extLst>
+              <a:ext uri="{FF2B5EF4-FFF2-40B4-BE49-F238E27FC236}">
+                <a16:creationId xmlns:a16="http://schemas.microsoft.com/office/drawing/2014/main" id="{7D9DE305-2E45-C2AA-47A4-18B13844B00E}"/>
+              </a:ext>
+            </a:extLst>
+          </p:cNvPr>
+          <p:cNvGrpSpPr/>
+          <p:nvPr/>
+        </p:nvGrpSpPr>
+        <p:grpSpPr>
+          <a:xfrm>
+            <a:off x="4348894" y="2674389"/>
+            <a:ext cx="3721597" cy="647518"/>
+            <a:chOff x="4351942" y="2312058"/>
+            <a:chExt cx="3721597" cy="647518"/>
+          </a:xfrm>
+        </p:grpSpPr>
+        <p:cxnSp>
+          <p:nvCxnSpPr>
+            <p:cNvPr id="6" name="Straight Arrow Connector 5">
+              <a:extLst>
+                <a:ext uri="{FF2B5EF4-FFF2-40B4-BE49-F238E27FC236}">
+                  <a16:creationId xmlns:a16="http://schemas.microsoft.com/office/drawing/2014/main" id="{A1181D7A-C33C-A9F4-B347-95A8BC983AD6}"/>
+                </a:ext>
+              </a:extLst>
+            </p:cNvPr>
+            <p:cNvCxnSpPr>
+              <a:cxnSpLocks/>
+              <a:endCxn id="12" idx="1"/>
+            </p:cNvCxnSpPr>
+            <p:nvPr/>
+          </p:nvCxnSpPr>
+          <p:spPr>
+            <a:xfrm>
+              <a:off x="4351942" y="2688250"/>
+              <a:ext cx="1018079" cy="10182"/>
+            </a:xfrm>
+            <a:prstGeom prst="straightConnector1">
+              <a:avLst/>
+            </a:prstGeom>
+            <a:ln w="19050">
+              <a:headEnd type="triangle"/>
+              <a:tailEnd type="triangle"/>
+            </a:ln>
+          </p:spPr>
+          <p:style>
+            <a:lnRef idx="1">
+              <a:schemeClr val="accent1"/>
+            </a:lnRef>
+            <a:fillRef idx="0">
+              <a:schemeClr val="accent1"/>
+            </a:fillRef>
+            <a:effectRef idx="0">
+              <a:schemeClr val="accent1"/>
+            </a:effectRef>
+            <a:fontRef idx="minor">
+              <a:schemeClr val="tx1"/>
+            </a:fontRef>
+          </p:style>
+        </p:cxnSp>
+        <p:sp>
+          <p:nvSpPr>
+            <p:cNvPr id="11" name="Text Box 22">
+              <a:extLst>
+                <a:ext uri="{FF2B5EF4-FFF2-40B4-BE49-F238E27FC236}">
+                  <a16:creationId xmlns:a16="http://schemas.microsoft.com/office/drawing/2014/main" id="{9D9877F4-1D62-5A0B-4DEA-FDCA84E06751}"/>
+                </a:ext>
+              </a:extLst>
+            </p:cNvPr>
+            <p:cNvSpPr txBox="1">
+              <a:spLocks noChangeArrowheads="1"/>
+            </p:cNvSpPr>
+            <p:nvPr/>
+          </p:nvSpPr>
+          <p:spPr bwMode="auto">
+            <a:xfrm>
+              <a:off x="6892270" y="2454070"/>
+              <a:ext cx="631672" cy="240306"/>
+            </a:xfrm>
+            <a:prstGeom prst="rect">
+              <a:avLst/>
+            </a:prstGeom>
+            <a:noFill/>
+            <a:ln>
+              <a:noFill/>
+            </a:ln>
+            <a:extLst>
+              <a:ext uri="{91240B29-F687-4F45-9708-019B960494DF}">
+                <a14:hiddenLine xmlns:a14="http://schemas.microsoft.com/office/drawing/2010/main" w="6350">
+                  <a:solidFill>
+                    <a:srgbClr val="000000"/>
+                  </a:solidFill>
+                  <a:miter lim="800000"/>
+                  <a:headEnd/>
+                  <a:tailEnd/>
+                </a14:hiddenLine>
+              </a:ext>
+            </a:extLst>
+          </p:spPr>
+          <p:txBody>
+            <a:bodyPr vert="horz" wrap="square" lIns="91440" tIns="45720" rIns="91440" bIns="45720" numCol="1" anchor="ctr" anchorCtr="0" compatLnSpc="1">
+              <a:prstTxWarp prst="textNoShape">
+                <a:avLst/>
+              </a:prstTxWarp>
+            </a:bodyPr>
+            <a:lstStyle>
+              <a:defPPr>
+                <a:defRPr lang="en-IL"/>
+              </a:defPPr>
+              <a:lvl1pPr marR="0" lvl="0" indent="0" algn="ctr" eaLnBrk="0" fontAlgn="base" hangingPunct="0">
+                <a:lnSpc>
+                  <a:spcPct val="100000"/>
+                </a:lnSpc>
+                <a:spcBef>
+                  <a:spcPct val="0"/>
+                </a:spcBef>
+                <a:spcAft>
+                  <a:spcPct val="0"/>
+                </a:spcAft>
+                <a:buClrTx/>
+                <a:buSzTx/>
+                <a:buFontTx/>
+                <a:buNone/>
+                <a:tabLst/>
+                <a:defRPr kumimoji="0" sz="1000" b="0" i="0" u="none" strike="noStrike" cap="none" normalizeH="0" baseline="0">
+                  <a:ln>
+                    <a:noFill/>
+                  </a:ln>
+                  <a:effectLst/>
+                  <a:latin typeface="Calibri" panose="020F0502020204030204" pitchFamily="34" charset="0"/>
+                  <a:ea typeface="Yu Gothic" panose="020B0400000000000000" pitchFamily="34" charset="-128"/>
+                  <a:cs typeface="Arial" panose="020B0604020202020204" pitchFamily="34" charset="0"/>
+                </a:defRPr>
+              </a:lvl1pPr>
+            </a:lstStyle>
+            <a:p>
+              <a:r>
+                <a:rPr lang="en-US" altLang="en-IL" dirty="0"/>
+                <a:t>Pub/Sub</a:t>
+              </a:r>
+            </a:p>
+          </p:txBody>
+        </p:sp>
+        <p:sp>
+          <p:nvSpPr>
+            <p:cNvPr id="12" name="AutoShape 10">
+              <a:extLst>
+                <a:ext uri="{FF2B5EF4-FFF2-40B4-BE49-F238E27FC236}">
+                  <a16:creationId xmlns:a16="http://schemas.microsoft.com/office/drawing/2014/main" id="{BD0C3D6D-457E-91CC-DA37-480249267BE7}"/>
+                </a:ext>
+              </a:extLst>
+            </p:cNvPr>
+            <p:cNvSpPr>
+              <a:spLocks noChangeArrowheads="1"/>
+            </p:cNvSpPr>
+            <p:nvPr/>
+          </p:nvSpPr>
+          <p:spPr bwMode="auto">
+            <a:xfrm>
+              <a:off x="5370021" y="2437288"/>
+              <a:ext cx="1143000" cy="522288"/>
+            </a:xfrm>
+            <a:prstGeom prst="roundRect">
+              <a:avLst>
+                <a:gd name="adj" fmla="val 16667"/>
+              </a:avLst>
+            </a:prstGeom>
+            <a:solidFill>
+              <a:schemeClr val="accent5">
+                <a:lumMod val="40000"/>
+                <a:lumOff val="60000"/>
+              </a:schemeClr>
+            </a:solidFill>
+            <a:ln w="12700">
+              <a:solidFill>
+                <a:srgbClr val="09101D"/>
+              </a:solidFill>
+              <a:miter lim="800000"/>
+              <a:headEnd/>
+              <a:tailEnd/>
+            </a:ln>
+          </p:spPr>
+          <p:txBody>
+            <a:bodyPr vert="horz" wrap="square" lIns="91440" tIns="45720" rIns="91440" bIns="45720" numCol="1" anchor="ctr" anchorCtr="0" compatLnSpc="1">
+              <a:prstTxWarp prst="textNoShape">
+                <a:avLst/>
+              </a:prstTxWarp>
+            </a:bodyPr>
+            <a:lstStyle/>
+            <a:p>
+              <a:pPr marL="0" marR="0" lvl="0" indent="0" algn="ctr" defTabSz="914400" rtl="0" eaLnBrk="0" fontAlgn="base" latinLnBrk="0" hangingPunct="0">
+                <a:lnSpc>
+                  <a:spcPct val="100000"/>
+                </a:lnSpc>
+                <a:spcBef>
+                  <a:spcPct val="0"/>
+                </a:spcBef>
+                <a:spcAft>
+                  <a:spcPct val="0"/>
+                </a:spcAft>
+                <a:buClrTx/>
+                <a:buSzTx/>
+                <a:buFontTx/>
+                <a:buNone/>
+                <a:tabLst/>
+              </a:pPr>
+              <a:endParaRPr kumimoji="0" lang="en-US" altLang="en-IL" sz="1000" b="0" i="0" u="none" strike="noStrike" cap="none" normalizeH="0" baseline="0" dirty="0">
+                <a:ln>
+                  <a:noFill/>
+                </a:ln>
+                <a:solidFill>
+                  <a:schemeClr val="tx1"/>
+                </a:solidFill>
+                <a:effectLst/>
+                <a:latin typeface="Calibri" panose="020F0502020204030204" pitchFamily="34" charset="0"/>
+                <a:ea typeface="Yu Gothic" panose="020B0400000000000000" pitchFamily="34" charset="-128"/>
+                <a:cs typeface="Arial" panose="020B0604020202020204" pitchFamily="34" charset="0"/>
+              </a:endParaRPr>
+            </a:p>
+            <a:p>
+              <a:pPr marL="0" marR="0" lvl="0" indent="0" algn="ctr" defTabSz="914400" rtl="0" eaLnBrk="0" fontAlgn="base" latinLnBrk="0" hangingPunct="0">
+                <a:lnSpc>
+                  <a:spcPct val="100000"/>
+                </a:lnSpc>
+                <a:spcBef>
+                  <a:spcPct val="0"/>
+                </a:spcBef>
+                <a:spcAft>
+                  <a:spcPct val="0"/>
+                </a:spcAft>
+                <a:buClrTx/>
+                <a:buSzTx/>
+                <a:buFontTx/>
+                <a:buNone/>
+                <a:tabLst/>
+              </a:pPr>
+              <a:r>
+                <a:rPr kumimoji="0" lang="en-US" altLang="en-IL" sz="1000" b="0" i="0" u="none" strike="noStrike" cap="none" normalizeH="0" baseline="0" dirty="0">
+                  <a:ln>
+                    <a:noFill/>
+                  </a:ln>
+                  <a:solidFill>
+                    <a:schemeClr val="tx1"/>
+                  </a:solidFill>
+                  <a:effectLst/>
+                  <a:latin typeface="Calibri" panose="020F0502020204030204" pitchFamily="34" charset="0"/>
+                  <a:ea typeface="Yu Gothic" panose="020B0400000000000000" pitchFamily="34" charset="-128"/>
+                  <a:cs typeface="Arial" panose="020B0604020202020204" pitchFamily="34" charset="0"/>
+                </a:rPr>
+                <a:t>Products</a:t>
+              </a:r>
+              <a:r>
+                <a:rPr kumimoji="0" lang="en-IL" altLang="en-IL" sz="1000" b="0" i="0" u="none" strike="noStrike" cap="none" normalizeH="0" baseline="0" dirty="0">
+                  <a:ln>
+                    <a:noFill/>
+                  </a:ln>
+                  <a:solidFill>
+                    <a:schemeClr val="tx1"/>
+                  </a:solidFill>
+                  <a:effectLst/>
+                  <a:latin typeface="Calibri" panose="020F0502020204030204" pitchFamily="34" charset="0"/>
+                  <a:ea typeface="Yu Gothic" panose="020B0400000000000000" pitchFamily="34" charset="-128"/>
+                  <a:cs typeface="Arial" panose="020B0604020202020204" pitchFamily="34" charset="0"/>
+                </a:rPr>
+                <a:t> Service </a:t>
+              </a:r>
+              <a:r>
+                <a:rPr kumimoji="0" lang="en-US" altLang="en-IL" sz="1000" b="0" i="0" u="none" strike="noStrike" cap="none" normalizeH="0" baseline="0" dirty="0">
+                  <a:ln>
+                    <a:noFill/>
+                  </a:ln>
+                  <a:solidFill>
+                    <a:schemeClr val="tx1"/>
+                  </a:solidFill>
+                  <a:effectLst/>
+                  <a:latin typeface="Calibri" panose="020F0502020204030204" pitchFamily="34" charset="0"/>
+                  <a:ea typeface="Yu Gothic" panose="020B0400000000000000" pitchFamily="34" charset="-128"/>
+                  <a:cs typeface="Arial" panose="020B0604020202020204" pitchFamily="34" charset="0"/>
+                </a:rPr>
+                <a:t>(</a:t>
+              </a:r>
+              <a:r>
+                <a:rPr kumimoji="0" lang="en-IL" altLang="en-IL" sz="1000" b="0" i="0" u="none" strike="noStrike" cap="none" normalizeH="0" baseline="0" dirty="0">
+                  <a:ln>
+                    <a:noFill/>
+                  </a:ln>
+                  <a:solidFill>
+                    <a:schemeClr val="tx1"/>
+                  </a:solidFill>
+                  <a:effectLst/>
+                  <a:latin typeface="Calibri" panose="020F0502020204030204" pitchFamily="34" charset="0"/>
+                  <a:ea typeface="Yu Gothic" panose="020B0400000000000000" pitchFamily="34" charset="-128"/>
+                  <a:cs typeface="Arial" panose="020B0604020202020204" pitchFamily="34" charset="0"/>
+                </a:rPr>
+                <a:t>Docker</a:t>
+              </a:r>
+              <a:r>
+                <a:rPr kumimoji="0" lang="en-US" altLang="en-IL" sz="1000" b="0" i="0" u="none" strike="noStrike" cap="none" normalizeH="0" baseline="0" dirty="0">
+                  <a:ln>
+                    <a:noFill/>
+                  </a:ln>
+                  <a:solidFill>
+                    <a:schemeClr val="tx1"/>
+                  </a:solidFill>
+                  <a:effectLst/>
+                  <a:latin typeface="Calibri" panose="020F0502020204030204" pitchFamily="34" charset="0"/>
+                  <a:ea typeface="Yu Gothic" panose="020B0400000000000000" pitchFamily="34" charset="-128"/>
+                  <a:cs typeface="Arial" panose="020B0604020202020204" pitchFamily="34" charset="0"/>
+                </a:rPr>
+                <a:t>)</a:t>
+              </a:r>
+              <a:endParaRPr kumimoji="0" lang="en-IL" altLang="en-IL" sz="800" b="0" i="0" u="none" strike="noStrike" cap="none" normalizeH="0" baseline="0" dirty="0">
+                <a:ln>
+                  <a:noFill/>
+                </a:ln>
+                <a:solidFill>
+                  <a:schemeClr val="tx1"/>
+                </a:solidFill>
+                <a:effectLst/>
+              </a:endParaRPr>
+            </a:p>
+            <a:p>
+              <a:pPr marL="0" marR="0" lvl="0" indent="0" algn="l" defTabSz="914400" rtl="0" eaLnBrk="0" fontAlgn="base" latinLnBrk="0" hangingPunct="0">
+                <a:lnSpc>
+                  <a:spcPct val="100000"/>
+                </a:lnSpc>
+                <a:spcBef>
+                  <a:spcPct val="0"/>
+                </a:spcBef>
+                <a:spcAft>
+                  <a:spcPct val="0"/>
+                </a:spcAft>
+                <a:buClrTx/>
+                <a:buSzTx/>
+                <a:buFontTx/>
+                <a:buNone/>
+                <a:tabLst/>
+              </a:pPr>
+              <a:endParaRPr lang="en-IL" altLang="en-IL" sz="1000" dirty="0">
+                <a:latin typeface="Calibri" panose="020F0502020204030204" pitchFamily="34" charset="0"/>
+                <a:ea typeface="Yu Gothic" panose="020B0400000000000000" pitchFamily="34" charset="-128"/>
+                <a:cs typeface="Arial" panose="020B0604020202020204" pitchFamily="34" charset="0"/>
+              </a:endParaRPr>
+            </a:p>
+          </p:txBody>
+        </p:sp>
+        <p:sp>
+          <p:nvSpPr>
+            <p:cNvPr id="16" name="Text Box 22">
+              <a:extLst>
+                <a:ext uri="{FF2B5EF4-FFF2-40B4-BE49-F238E27FC236}">
+                  <a16:creationId xmlns:a16="http://schemas.microsoft.com/office/drawing/2014/main" id="{141663BC-3A1D-7F8A-272A-2C7D68A86E15}"/>
+                </a:ext>
+              </a:extLst>
+            </p:cNvPr>
+            <p:cNvSpPr txBox="1">
+              <a:spLocks noChangeArrowheads="1"/>
+            </p:cNvSpPr>
+            <p:nvPr/>
+          </p:nvSpPr>
+          <p:spPr bwMode="auto">
+            <a:xfrm>
+              <a:off x="4546443" y="2312058"/>
+              <a:ext cx="782286" cy="342799"/>
+            </a:xfrm>
+            <a:prstGeom prst="rect">
+              <a:avLst/>
+            </a:prstGeom>
+            <a:solidFill>
+              <a:srgbClr val="FFFFFF"/>
+            </a:solidFill>
+            <a:ln>
+              <a:noFill/>
+            </a:ln>
+            <a:extLst>
+              <a:ext uri="{91240B29-F687-4F45-9708-019B960494DF}">
+                <a14:hiddenLine xmlns:a14="http://schemas.microsoft.com/office/drawing/2010/main" w="6350">
+                  <a:solidFill>
+                    <a:srgbClr val="000000"/>
+                  </a:solidFill>
+                  <a:miter lim="800000"/>
+                  <a:headEnd/>
+                  <a:tailEnd/>
+                </a14:hiddenLine>
+              </a:ext>
+            </a:extLst>
+          </p:spPr>
+          <p:txBody>
+            <a:bodyPr vert="horz" wrap="square" lIns="91440" tIns="45720" rIns="91440" bIns="45720" numCol="1" anchor="ctr" anchorCtr="0" compatLnSpc="1">
+              <a:prstTxWarp prst="textNoShape">
+                <a:avLst/>
+              </a:prstTxWarp>
+            </a:bodyPr>
+            <a:lstStyle/>
+            <a:p>
+              <a:pPr marL="0" marR="0" lvl="0" indent="0" algn="ctr" defTabSz="914400" rtl="0" eaLnBrk="0" fontAlgn="base" latinLnBrk="0" hangingPunct="0">
+                <a:lnSpc>
+                  <a:spcPct val="100000"/>
+                </a:lnSpc>
+                <a:spcBef>
+                  <a:spcPct val="0"/>
+                </a:spcBef>
+                <a:spcAft>
+                  <a:spcPct val="0"/>
+                </a:spcAft>
+                <a:buClrTx/>
+                <a:buSzTx/>
+                <a:buFontTx/>
+                <a:buNone/>
+                <a:tabLst/>
+              </a:pPr>
+              <a:r>
+                <a:rPr lang="en-US" altLang="en-IL" sz="1000" dirty="0">
+                  <a:latin typeface="Calibri" panose="020F0502020204030204" pitchFamily="34" charset="0"/>
+                  <a:ea typeface="Yu Gothic" panose="020B0400000000000000" pitchFamily="34" charset="-128"/>
+                  <a:cs typeface="Arial" panose="020B0604020202020204" pitchFamily="34" charset="0"/>
+                </a:rPr>
+                <a:t>Customer</a:t>
+              </a:r>
+              <a:r>
+                <a:rPr kumimoji="0" lang="en-US" altLang="en-IL" sz="1000" b="0" i="0" u="none" strike="noStrike" cap="none" normalizeH="0" baseline="0" dirty="0">
+                  <a:ln>
+                    <a:noFill/>
+                  </a:ln>
+                  <a:solidFill>
+                    <a:schemeClr val="tx1"/>
+                  </a:solidFill>
+                  <a:effectLst/>
+                  <a:latin typeface="Calibri" panose="020F0502020204030204" pitchFamily="34" charset="0"/>
+                  <a:ea typeface="Yu Gothic" panose="020B0400000000000000" pitchFamily="34" charset="-128"/>
+                  <a:cs typeface="Arial" panose="020B0604020202020204" pitchFamily="34" charset="0"/>
+                </a:rPr>
+                <a:t> info</a:t>
+              </a:r>
+              <a:endParaRPr kumimoji="0" lang="en-US" altLang="en-IL" sz="1800" b="0" i="0" u="none" strike="noStrike" cap="none" normalizeH="0" baseline="0" dirty="0">
+                <a:ln>
+                  <a:noFill/>
+                </a:ln>
+                <a:solidFill>
+                  <a:schemeClr val="tx1"/>
+                </a:solidFill>
+                <a:effectLst/>
+                <a:latin typeface="Arial" panose="020B0604020202020204" pitchFamily="34" charset="0"/>
+              </a:endParaRPr>
+            </a:p>
+          </p:txBody>
+        </p:sp>
+        <p:cxnSp>
+          <p:nvCxnSpPr>
+            <p:cNvPr id="20" name="Straight Arrow Connector 19">
+              <a:extLst>
+                <a:ext uri="{FF2B5EF4-FFF2-40B4-BE49-F238E27FC236}">
+                  <a16:creationId xmlns:a16="http://schemas.microsoft.com/office/drawing/2014/main" id="{CECB6946-EA85-EC66-2FCF-63B6B6EAA617}"/>
+                </a:ext>
+              </a:extLst>
+            </p:cNvPr>
+            <p:cNvCxnSpPr>
+              <a:cxnSpLocks/>
+            </p:cNvCxnSpPr>
+            <p:nvPr/>
+          </p:nvCxnSpPr>
+          <p:spPr>
+            <a:xfrm flipV="1">
+              <a:off x="6513021" y="2665913"/>
+              <a:ext cx="1560518" cy="22337"/>
+            </a:xfrm>
+            <a:prstGeom prst="straightConnector1">
+              <a:avLst/>
+            </a:prstGeom>
+            <a:ln w="19050">
+              <a:headEnd type="triangle"/>
+              <a:tailEnd type="triangle"/>
+            </a:ln>
+          </p:spPr>
+          <p:style>
+            <a:lnRef idx="1">
+              <a:schemeClr val="accent1"/>
+            </a:lnRef>
+            <a:fillRef idx="0">
+              <a:schemeClr val="accent1"/>
+            </a:fillRef>
+            <a:effectRef idx="0">
+              <a:schemeClr val="accent1"/>
+            </a:effectRef>
+            <a:fontRef idx="minor">
+              <a:schemeClr val="tx1"/>
+            </a:fontRef>
+          </p:style>
+        </p:cxnSp>
+      </p:grpSp>
+      <p:cxnSp>
+        <p:nvCxnSpPr>
+          <p:cNvPr id="22" name="Straight Arrow Connector 21">
+            <a:extLst>
+              <a:ext uri="{FF2B5EF4-FFF2-40B4-BE49-F238E27FC236}">
+                <a16:creationId xmlns:a16="http://schemas.microsoft.com/office/drawing/2014/main" id="{42E1C081-144F-E91D-4027-EA720632988A}"/>
+              </a:ext>
+            </a:extLst>
+          </p:cNvPr>
+          <p:cNvCxnSpPr>
+            <a:cxnSpLocks/>
+            <a:endCxn id="3" idx="2"/>
+          </p:cNvCxnSpPr>
+          <p:nvPr/>
+        </p:nvCxnSpPr>
+        <p:spPr>
+          <a:xfrm flipV="1">
+            <a:off x="6467857" y="2484800"/>
+            <a:ext cx="546625" cy="330517"/>
           </a:xfrm>
           <a:prstGeom prst="straightConnector1">
             <a:avLst/>
@@ -8587,1519 +9284,36 @@
           <a:chExt cx="0" cy="0"/>
         </a:xfrm>
       </p:grpSpPr>
-      <p:sp>
-        <p:nvSpPr>
-          <p:cNvPr id="3" name="Rectangle 2">
-            <a:extLst>
-              <a:ext uri="{FF2B5EF4-FFF2-40B4-BE49-F238E27FC236}">
-                <a16:creationId xmlns:a16="http://schemas.microsoft.com/office/drawing/2014/main" id="{436CD954-48C9-7D5D-A37B-8130EF956A53}"/>
-              </a:ext>
-            </a:extLst>
-          </p:cNvPr>
-          <p:cNvSpPr>
-            <a:spLocks noChangeArrowheads="1"/>
-          </p:cNvSpPr>
+      <p:pic>
+        <p:nvPicPr>
+          <p:cNvPr id="4" name="Picture 3">
+            <a:extLst>
+              <a:ext uri="{FF2B5EF4-FFF2-40B4-BE49-F238E27FC236}">
+                <a16:creationId xmlns:a16="http://schemas.microsoft.com/office/drawing/2014/main" id="{59AE54CA-2813-FFDA-E56A-B30EE08CAEA8}"/>
+              </a:ext>
+            </a:extLst>
+          </p:cNvPr>
+          <p:cNvPicPr>
+            <a:picLocks noChangeAspect="1"/>
+          </p:cNvPicPr>
           <p:nvPr/>
-        </p:nvSpPr>
-        <p:spPr bwMode="auto">
+        </p:nvPicPr>
+        <p:blipFill>
+          <a:blip r:embed="rId2"/>
+          <a:stretch>
+            <a:fillRect/>
+          </a:stretch>
+        </p:blipFill>
+        <p:spPr>
           <a:xfrm>
-            <a:off x="2121408" y="797363"/>
-            <a:ext cx="5769864" cy="3180277"/>
+            <a:off x="3104732" y="1052181"/>
+            <a:ext cx="5982535" cy="4753638"/>
           </a:xfrm>
           <a:prstGeom prst="rect">
             <a:avLst/>
           </a:prstGeom>
-          <a:solidFill>
-            <a:srgbClr val="FAFAFA"/>
-          </a:solidFill>
-          <a:ln>
-            <a:noFill/>
-          </a:ln>
-          <a:effectLst/>
-          <a:extLst>
-            <a:ext uri="{91240B29-F687-4F45-9708-019B960494DF}">
-              <a14:hiddenLine xmlns:a14="http://schemas.microsoft.com/office/drawing/2010/main" w="9525">
-                <a:solidFill>
-                  <a:schemeClr val="tx1"/>
-                </a:solidFill>
-                <a:miter lim="800000"/>
-                <a:headEnd/>
-                <a:tailEnd/>
-              </a14:hiddenLine>
-            </a:ext>
-            <a:ext uri="{AF507438-7753-43E0-B8FC-AC1667EBCBE1}">
-              <a14:hiddenEffects xmlns:a14="http://schemas.microsoft.com/office/drawing/2010/main">
-                <a:effectLst>
-                  <a:outerShdw dist="35921" dir="2700000" algn="ctr" rotWithShape="0">
-                    <a:schemeClr val="bg2"/>
-                  </a:outerShdw>
-                </a:effectLst>
-              </a14:hiddenEffects>
-            </a:ext>
-          </a:extLst>
         </p:spPr>
-        <p:txBody>
-          <a:bodyPr vert="horz" wrap="square" lIns="0" tIns="107916" rIns="0" bIns="146004" numCol="1" anchor="ctr" anchorCtr="0" compatLnSpc="1">
-            <a:prstTxWarp prst="textNoShape">
-              <a:avLst/>
-            </a:prstTxWarp>
-            <a:spAutoFit/>
-          </a:bodyPr>
-          <a:lstStyle/>
-          <a:p>
-            <a:pPr marL="0" marR="0" lvl="0" indent="0" algn="l" defTabSz="914400" rtl="0" eaLnBrk="0" fontAlgn="base" latinLnBrk="0" hangingPunct="0">
-              <a:lnSpc>
-                <a:spcPct val="100000"/>
-              </a:lnSpc>
-              <a:spcBef>
-                <a:spcPct val="0"/>
-              </a:spcBef>
-              <a:spcAft>
-                <a:spcPct val="0"/>
-              </a:spcAft>
-              <a:buClrTx/>
-              <a:buSzTx/>
-              <a:buFontTx/>
-              <a:buNone/>
-              <a:tabLst/>
-            </a:pPr>
-            <a:r>
-              <a:rPr kumimoji="0" lang="en-IL" altLang="en-IL" sz="1000" b="0" i="0" u="none" strike="noStrike" cap="none" normalizeH="0" baseline="0" dirty="0">
-                <a:ln>
-                  <a:noFill/>
-                </a:ln>
-                <a:solidFill>
-                  <a:srgbClr val="424242"/>
-                </a:solidFill>
-                <a:effectLst/>
-                <a:latin typeface="Arial Unicode MS"/>
-                <a:ea typeface="source-code-pro"/>
-              </a:rPr>
-              <a:t>A2C/ </a:t>
-            </a:r>
-            <a:endParaRPr kumimoji="0" lang="en-US" altLang="en-IL" sz="1000" b="0" i="0" u="none" strike="noStrike" cap="none" normalizeH="0" baseline="0" dirty="0">
-              <a:ln>
-                <a:noFill/>
-              </a:ln>
-              <a:solidFill>
-                <a:srgbClr val="424242"/>
-              </a:solidFill>
-              <a:effectLst/>
-              <a:latin typeface="Arial Unicode MS"/>
-              <a:ea typeface="source-code-pro"/>
-            </a:endParaRPr>
-          </a:p>
-          <a:p>
-            <a:pPr marL="0" marR="0" lvl="0" indent="0" algn="l" defTabSz="914400" rtl="0" eaLnBrk="0" fontAlgn="base" latinLnBrk="0" hangingPunct="0">
-              <a:lnSpc>
-                <a:spcPct val="100000"/>
-              </a:lnSpc>
-              <a:spcBef>
-                <a:spcPct val="0"/>
-              </a:spcBef>
-              <a:spcAft>
-                <a:spcPct val="0"/>
-              </a:spcAft>
-              <a:buClrTx/>
-              <a:buSzTx/>
-              <a:buFontTx/>
-              <a:buNone/>
-              <a:tabLst/>
-            </a:pPr>
-            <a:r>
-              <a:rPr kumimoji="0" lang="en-IL" altLang="en-IL" sz="1000" b="0" i="0" u="none" strike="noStrike" cap="none" normalizeH="0" baseline="0" dirty="0">
-                <a:ln>
-                  <a:noFill/>
-                </a:ln>
-                <a:solidFill>
-                  <a:srgbClr val="424242"/>
-                </a:solidFill>
-                <a:effectLst/>
-                <a:latin typeface="Arial Unicode MS"/>
-                <a:ea typeface="source-code-pro"/>
-              </a:rPr>
-              <a:t>├── Client/</a:t>
-            </a:r>
-            <a:r>
-              <a:rPr kumimoji="0" lang="en-US" altLang="en-IL" sz="1000" b="0" i="0" u="none" strike="noStrike" cap="none" normalizeH="0" baseline="0" dirty="0">
-                <a:ln>
-                  <a:noFill/>
-                </a:ln>
-                <a:solidFill>
-                  <a:srgbClr val="424242"/>
-                </a:solidFill>
-                <a:effectLst/>
-                <a:latin typeface="Arial Unicode MS"/>
-                <a:ea typeface="source-code-pro"/>
-              </a:rPr>
-              <a:t>                       		</a:t>
-            </a:r>
-            <a:r>
-              <a:rPr kumimoji="0" lang="en-IL" altLang="en-IL" sz="1000" b="0" i="0" u="none" strike="noStrike" cap="none" normalizeH="0" baseline="0" dirty="0">
-                <a:ln>
-                  <a:noFill/>
-                </a:ln>
-                <a:solidFill>
-                  <a:srgbClr val="424242"/>
-                </a:solidFill>
-                <a:effectLst/>
-                <a:latin typeface="Arial Unicode MS"/>
-                <a:ea typeface="source-code-pro"/>
-              </a:rPr>
-              <a:t>← Frontend (React) </a:t>
-            </a:r>
-            <a:endParaRPr kumimoji="0" lang="en-US" altLang="en-IL" sz="1000" b="0" i="0" u="none" strike="noStrike" cap="none" normalizeH="0" baseline="0" dirty="0">
-              <a:ln>
-                <a:noFill/>
-              </a:ln>
-              <a:solidFill>
-                <a:srgbClr val="424242"/>
-              </a:solidFill>
-              <a:effectLst/>
-              <a:latin typeface="Arial Unicode MS"/>
-              <a:ea typeface="source-code-pro"/>
-            </a:endParaRPr>
-          </a:p>
-          <a:p>
-            <a:pPr marL="0" marR="0" lvl="0" indent="0" algn="l" defTabSz="914400" rtl="0" eaLnBrk="0" fontAlgn="base" latinLnBrk="0" hangingPunct="0">
-              <a:lnSpc>
-                <a:spcPct val="100000"/>
-              </a:lnSpc>
-              <a:spcBef>
-                <a:spcPct val="0"/>
-              </a:spcBef>
-              <a:spcAft>
-                <a:spcPct val="0"/>
-              </a:spcAft>
-              <a:buClrTx/>
-              <a:buSzTx/>
-              <a:buFontTx/>
-              <a:buNone/>
-              <a:tabLst/>
-            </a:pPr>
-            <a:r>
-              <a:rPr kumimoji="0" lang="en-IL" altLang="en-IL" sz="1000" b="0" i="0" u="none" strike="noStrike" cap="none" normalizeH="0" baseline="0" dirty="0">
-                <a:ln>
-                  <a:noFill/>
-                </a:ln>
-                <a:solidFill>
-                  <a:srgbClr val="424242"/>
-                </a:solidFill>
-                <a:effectLst/>
-                <a:latin typeface="Arial Unicode MS"/>
-                <a:ea typeface="source-code-pro"/>
-              </a:rPr>
-              <a:t>├── Server/</a:t>
-            </a:r>
-            <a:r>
-              <a:rPr kumimoji="0" lang="en-US" altLang="en-IL" sz="1000" b="0" i="0" u="none" strike="noStrike" cap="none" normalizeH="0" baseline="0" dirty="0">
-                <a:ln>
-                  <a:noFill/>
-                </a:ln>
-                <a:solidFill>
-                  <a:srgbClr val="424242"/>
-                </a:solidFill>
-                <a:effectLst/>
-                <a:latin typeface="Arial Unicode MS"/>
-                <a:ea typeface="source-code-pro"/>
-              </a:rPr>
-              <a:t>                      </a:t>
-            </a:r>
-            <a:r>
-              <a:rPr kumimoji="0" lang="en-IL" altLang="en-IL" sz="1000" b="0" i="0" u="none" strike="noStrike" cap="none" normalizeH="0" baseline="0" dirty="0">
-                <a:ln>
-                  <a:noFill/>
-                </a:ln>
-                <a:solidFill>
-                  <a:srgbClr val="424242"/>
-                </a:solidFill>
-                <a:effectLst/>
-                <a:latin typeface="Arial Unicode MS"/>
-                <a:ea typeface="source-code-pro"/>
-              </a:rPr>
-              <a:t> </a:t>
-            </a:r>
-            <a:r>
-              <a:rPr kumimoji="0" lang="en-US" altLang="en-IL" sz="1000" b="0" i="0" u="none" strike="noStrike" cap="none" normalizeH="0" baseline="0" dirty="0">
-                <a:ln>
-                  <a:noFill/>
-                </a:ln>
-                <a:solidFill>
-                  <a:srgbClr val="424242"/>
-                </a:solidFill>
-                <a:effectLst/>
-                <a:latin typeface="Arial Unicode MS"/>
-                <a:ea typeface="source-code-pro"/>
-              </a:rPr>
-              <a:t>		</a:t>
-            </a:r>
-            <a:r>
-              <a:rPr kumimoji="0" lang="en-IL" altLang="en-IL" sz="1000" b="0" i="0" u="none" strike="noStrike" cap="none" normalizeH="0" baseline="0" dirty="0">
-                <a:ln>
-                  <a:noFill/>
-                </a:ln>
-                <a:solidFill>
-                  <a:srgbClr val="424242"/>
-                </a:solidFill>
-                <a:effectLst/>
-                <a:latin typeface="Arial Unicode MS"/>
-                <a:ea typeface="source-code-pro"/>
-              </a:rPr>
-              <a:t>← Backend </a:t>
-            </a:r>
-            <a:endParaRPr kumimoji="0" lang="en-US" altLang="en-IL" sz="1000" b="0" i="0" u="none" strike="noStrike" cap="none" normalizeH="0" baseline="0" dirty="0">
-              <a:ln>
-                <a:noFill/>
-              </a:ln>
-              <a:solidFill>
-                <a:srgbClr val="424242"/>
-              </a:solidFill>
-              <a:effectLst/>
-              <a:latin typeface="Arial Unicode MS"/>
-              <a:ea typeface="source-code-pro"/>
-            </a:endParaRPr>
-          </a:p>
-          <a:p>
-            <a:pPr marL="0" marR="0" lvl="0" indent="0" algn="l" defTabSz="914400" rtl="0" eaLnBrk="0" fontAlgn="base" latinLnBrk="0" hangingPunct="0">
-              <a:lnSpc>
-                <a:spcPct val="100000"/>
-              </a:lnSpc>
-              <a:spcBef>
-                <a:spcPct val="0"/>
-              </a:spcBef>
-              <a:spcAft>
-                <a:spcPct val="0"/>
-              </a:spcAft>
-              <a:buClrTx/>
-              <a:buSzTx/>
-              <a:buFontTx/>
-              <a:buNone/>
-              <a:tabLst/>
-            </a:pPr>
-            <a:r>
-              <a:rPr kumimoji="0" lang="en-IL" altLang="en-IL" sz="1000" b="0" i="0" u="none" strike="noStrike" cap="none" normalizeH="0" baseline="0" dirty="0">
-                <a:ln>
-                  <a:noFill/>
-                </a:ln>
-                <a:solidFill>
-                  <a:srgbClr val="424242"/>
-                </a:solidFill>
-                <a:effectLst/>
-                <a:latin typeface="Arial Unicode MS"/>
-                <a:ea typeface="source-code-pro"/>
-              </a:rPr>
-              <a:t>│ ├── AuthService/ </a:t>
-            </a:r>
-            <a:r>
-              <a:rPr kumimoji="0" lang="en-US" altLang="en-IL" sz="1000" b="0" i="0" u="none" strike="noStrike" cap="none" normalizeH="0" baseline="0" dirty="0">
-                <a:ln>
-                  <a:noFill/>
-                </a:ln>
-                <a:solidFill>
-                  <a:srgbClr val="424242"/>
-                </a:solidFill>
-                <a:effectLst/>
-                <a:latin typeface="Arial Unicode MS"/>
-                <a:ea typeface="source-code-pro"/>
-              </a:rPr>
-              <a:t>		</a:t>
-            </a:r>
-            <a:r>
-              <a:rPr kumimoji="0" lang="en-IL" altLang="en-IL" sz="1000" b="0" i="0" u="none" strike="noStrike" cap="none" normalizeH="0" baseline="0" dirty="0">
-                <a:ln>
-                  <a:noFill/>
-                </a:ln>
-                <a:solidFill>
-                  <a:srgbClr val="424242"/>
-                </a:solidFill>
-                <a:effectLst/>
-                <a:latin typeface="Arial Unicode MS"/>
-                <a:ea typeface="source-code-pro"/>
-              </a:rPr>
-              <a:t>← </a:t>
-            </a:r>
-            <a:r>
-              <a:rPr kumimoji="0" lang="en-US" altLang="en-IL" sz="1000" b="0" i="0" u="none" strike="noStrike" cap="none" normalizeH="0" baseline="0" dirty="0">
-                <a:ln>
-                  <a:noFill/>
-                </a:ln>
-                <a:solidFill>
-                  <a:srgbClr val="424242"/>
-                </a:solidFill>
-                <a:effectLst/>
-                <a:latin typeface="Arial Unicode MS"/>
-                <a:ea typeface="source-code-pro"/>
-                <a:cs typeface="Arial" panose="020B0604020202020204" pitchFamily="34" charset="0"/>
-              </a:rPr>
-              <a:t>Log in Service</a:t>
-            </a:r>
-            <a:endParaRPr kumimoji="0" lang="en-US" altLang="en-IL" sz="1000" b="0" i="0" u="none" strike="noStrike" cap="none" normalizeH="0" baseline="0" dirty="0">
-              <a:ln>
-                <a:noFill/>
-              </a:ln>
-              <a:solidFill>
-                <a:srgbClr val="424242"/>
-              </a:solidFill>
-              <a:effectLst/>
-              <a:latin typeface="Arial Unicode MS"/>
-              <a:ea typeface="source-code-pro"/>
-            </a:endParaRPr>
-          </a:p>
-          <a:p>
-            <a:pPr marL="0" marR="0" lvl="0" indent="0" algn="l" defTabSz="914400" rtl="0" eaLnBrk="0" fontAlgn="base" latinLnBrk="0" hangingPunct="0">
-              <a:lnSpc>
-                <a:spcPct val="100000"/>
-              </a:lnSpc>
-              <a:spcBef>
-                <a:spcPct val="0"/>
-              </a:spcBef>
-              <a:spcAft>
-                <a:spcPct val="0"/>
-              </a:spcAft>
-              <a:buClrTx/>
-              <a:buSzTx/>
-              <a:buFontTx/>
-              <a:buNone/>
-              <a:tabLst/>
-            </a:pPr>
-            <a:r>
-              <a:rPr kumimoji="0" lang="en-IL" altLang="en-IL" sz="1000" b="0" i="0" u="none" strike="noStrike" cap="none" normalizeH="0" baseline="0" dirty="0">
-                <a:ln>
-                  <a:noFill/>
-                </a:ln>
-                <a:solidFill>
-                  <a:srgbClr val="424242"/>
-                </a:solidFill>
-                <a:effectLst/>
-                <a:latin typeface="Arial Unicode MS"/>
-                <a:ea typeface="source-code-pro"/>
-              </a:rPr>
-              <a:t>│ ├── CustomersService/ </a:t>
-            </a:r>
-            <a:r>
-              <a:rPr kumimoji="0" lang="en-US" altLang="en-IL" sz="1000" b="0" i="0" u="none" strike="noStrike" cap="none" normalizeH="0" baseline="0" dirty="0">
-                <a:ln>
-                  <a:noFill/>
-                </a:ln>
-                <a:solidFill>
-                  <a:srgbClr val="424242"/>
-                </a:solidFill>
-                <a:effectLst/>
-                <a:latin typeface="Arial Unicode MS"/>
-                <a:ea typeface="source-code-pro"/>
-              </a:rPr>
-              <a:t>		</a:t>
-            </a:r>
-            <a:r>
-              <a:rPr kumimoji="0" lang="en-IL" altLang="en-IL" sz="1000" b="0" i="0" u="none" strike="noStrike" cap="none" normalizeH="0" baseline="0" dirty="0">
-                <a:ln>
-                  <a:noFill/>
-                </a:ln>
-                <a:solidFill>
-                  <a:srgbClr val="424242"/>
-                </a:solidFill>
-                <a:effectLst/>
-                <a:latin typeface="Arial Unicode MS"/>
-                <a:ea typeface="source-code-pro"/>
-              </a:rPr>
-              <a:t>← </a:t>
-            </a:r>
-            <a:r>
-              <a:rPr kumimoji="0" lang="en-US" altLang="en-IL" sz="1000" b="0" i="0" u="none" strike="noStrike" cap="none" normalizeH="0" baseline="0" dirty="0">
-                <a:ln>
-                  <a:noFill/>
-                </a:ln>
-                <a:solidFill>
-                  <a:srgbClr val="424242"/>
-                </a:solidFill>
-                <a:effectLst/>
-                <a:latin typeface="Arial Unicode MS"/>
-                <a:ea typeface="source-code-pro"/>
-                <a:cs typeface="Arial" panose="020B0604020202020204" pitchFamily="34" charset="0"/>
-              </a:rPr>
-              <a:t>Customers service</a:t>
-            </a:r>
-            <a:endParaRPr kumimoji="0" lang="en-US" altLang="en-IL" sz="1000" b="0" i="0" u="none" strike="noStrike" cap="none" normalizeH="0" baseline="0" dirty="0">
-              <a:ln>
-                <a:noFill/>
-              </a:ln>
-              <a:solidFill>
-                <a:srgbClr val="424242"/>
-              </a:solidFill>
-              <a:effectLst/>
-              <a:latin typeface="Arial Unicode MS"/>
-              <a:ea typeface="source-code-pro"/>
-            </a:endParaRPr>
-          </a:p>
-          <a:p>
-            <a:pPr marL="0" marR="0" lvl="0" indent="0" algn="l" defTabSz="914400" rtl="0" eaLnBrk="0" fontAlgn="base" latinLnBrk="0" hangingPunct="0">
-              <a:lnSpc>
-                <a:spcPct val="100000"/>
-              </a:lnSpc>
-              <a:spcBef>
-                <a:spcPct val="0"/>
-              </a:spcBef>
-              <a:spcAft>
-                <a:spcPct val="0"/>
-              </a:spcAft>
-              <a:buClrTx/>
-              <a:buSzTx/>
-              <a:buFontTx/>
-              <a:buNone/>
-              <a:tabLst/>
-            </a:pPr>
-            <a:r>
-              <a:rPr kumimoji="0" lang="en-IL" altLang="en-IL" sz="1000" b="0" i="0" u="none" strike="noStrike" cap="none" normalizeH="0" baseline="0" dirty="0">
-                <a:ln>
-                  <a:noFill/>
-                </a:ln>
-                <a:solidFill>
-                  <a:srgbClr val="424242"/>
-                </a:solidFill>
-                <a:effectLst/>
-                <a:latin typeface="Arial Unicode MS"/>
-                <a:ea typeface="source-code-pro"/>
-              </a:rPr>
-              <a:t>│ ├── OrdersService/ </a:t>
-            </a:r>
-            <a:r>
-              <a:rPr kumimoji="0" lang="en-US" altLang="en-IL" sz="1000" b="0" i="0" u="none" strike="noStrike" cap="none" normalizeH="0" baseline="0" dirty="0">
-                <a:ln>
-                  <a:noFill/>
-                </a:ln>
-                <a:solidFill>
-                  <a:srgbClr val="424242"/>
-                </a:solidFill>
-                <a:effectLst/>
-                <a:latin typeface="Arial Unicode MS"/>
-                <a:ea typeface="source-code-pro"/>
-              </a:rPr>
-              <a:t>		</a:t>
-            </a:r>
-            <a:r>
-              <a:rPr kumimoji="0" lang="en-IL" altLang="en-IL" sz="1000" b="0" i="0" u="none" strike="noStrike" cap="none" normalizeH="0" baseline="0" dirty="0">
-                <a:ln>
-                  <a:noFill/>
-                </a:ln>
-                <a:solidFill>
-                  <a:srgbClr val="424242"/>
-                </a:solidFill>
-                <a:effectLst/>
-                <a:latin typeface="Arial Unicode MS"/>
-                <a:ea typeface="source-code-pro"/>
-              </a:rPr>
-              <a:t>← </a:t>
-            </a:r>
-            <a:r>
-              <a:rPr kumimoji="0" lang="en-US" altLang="en-IL" sz="1000" b="0" i="0" u="none" strike="noStrike" cap="none" normalizeH="0" baseline="0" dirty="0">
-                <a:ln>
-                  <a:noFill/>
-                </a:ln>
-                <a:solidFill>
-                  <a:srgbClr val="424242"/>
-                </a:solidFill>
-                <a:effectLst/>
-                <a:latin typeface="Arial Unicode MS"/>
-                <a:ea typeface="source-code-pro"/>
-                <a:cs typeface="Arial" panose="020B0604020202020204" pitchFamily="34" charset="0"/>
-              </a:rPr>
-              <a:t>Orders Service</a:t>
-            </a:r>
-            <a:endParaRPr kumimoji="0" lang="en-US" altLang="en-IL" sz="1000" b="0" i="0" u="none" strike="noStrike" cap="none" normalizeH="0" baseline="0" dirty="0">
-              <a:ln>
-                <a:noFill/>
-              </a:ln>
-              <a:solidFill>
-                <a:srgbClr val="424242"/>
-              </a:solidFill>
-              <a:effectLst/>
-              <a:latin typeface="Arial Unicode MS"/>
-              <a:ea typeface="source-code-pro"/>
-            </a:endParaRPr>
-          </a:p>
-          <a:p>
-            <a:pPr marL="0" marR="0" lvl="0" indent="0" algn="l" defTabSz="914400" rtl="0" eaLnBrk="0" fontAlgn="base" latinLnBrk="0" hangingPunct="0">
-              <a:lnSpc>
-                <a:spcPct val="100000"/>
-              </a:lnSpc>
-              <a:spcBef>
-                <a:spcPct val="0"/>
-              </a:spcBef>
-              <a:spcAft>
-                <a:spcPct val="0"/>
-              </a:spcAft>
-              <a:buClrTx/>
-              <a:buSzTx/>
-              <a:buFontTx/>
-              <a:buNone/>
-              <a:tabLst/>
-            </a:pPr>
-            <a:r>
-              <a:rPr kumimoji="0" lang="en-IL" altLang="en-IL" sz="1000" b="0" i="0" u="none" strike="noStrike" cap="none" normalizeH="0" baseline="0" dirty="0">
-                <a:ln>
-                  <a:noFill/>
-                </a:ln>
-                <a:solidFill>
-                  <a:srgbClr val="424242"/>
-                </a:solidFill>
-                <a:effectLst/>
-                <a:latin typeface="Arial Unicode MS"/>
-                <a:ea typeface="source-code-pro"/>
-              </a:rPr>
-              <a:t>│ ├── LoggingService/ </a:t>
-            </a:r>
-            <a:r>
-              <a:rPr kumimoji="0" lang="en-US" altLang="en-IL" sz="1000" b="0" i="0" u="none" strike="noStrike" cap="none" normalizeH="0" baseline="0" dirty="0">
-                <a:ln>
-                  <a:noFill/>
-                </a:ln>
-                <a:solidFill>
-                  <a:srgbClr val="424242"/>
-                </a:solidFill>
-                <a:effectLst/>
-                <a:latin typeface="Arial Unicode MS"/>
-                <a:ea typeface="source-code-pro"/>
-              </a:rPr>
-              <a:t>		</a:t>
-            </a:r>
-            <a:r>
-              <a:rPr kumimoji="0" lang="en-IL" altLang="en-IL" sz="1000" b="0" i="0" u="none" strike="noStrike" cap="none" normalizeH="0" baseline="0" dirty="0">
-                <a:ln>
-                  <a:noFill/>
-                </a:ln>
-                <a:solidFill>
-                  <a:srgbClr val="424242"/>
-                </a:solidFill>
-                <a:effectLst/>
-                <a:latin typeface="Arial Unicode MS"/>
-                <a:ea typeface="source-code-pro"/>
-              </a:rPr>
-              <a:t>← </a:t>
-            </a:r>
-            <a:r>
-              <a:rPr kumimoji="0" lang="en-US" altLang="en-IL" sz="1000" b="0" i="0" u="none" strike="noStrike" cap="none" normalizeH="0" baseline="0" dirty="0">
-                <a:ln>
-                  <a:noFill/>
-                </a:ln>
-                <a:solidFill>
-                  <a:srgbClr val="424242"/>
-                </a:solidFill>
-                <a:effectLst/>
-                <a:latin typeface="Arial Unicode MS"/>
-                <a:ea typeface="source-code-pro"/>
-                <a:cs typeface="Arial" panose="020B0604020202020204" pitchFamily="34" charset="0"/>
-              </a:rPr>
-              <a:t>Logs service</a:t>
-            </a:r>
-            <a:endParaRPr kumimoji="0" lang="en-US" altLang="en-IL" sz="1000" b="0" i="0" u="none" strike="noStrike" cap="none" normalizeH="0" baseline="0" dirty="0">
-              <a:ln>
-                <a:noFill/>
-              </a:ln>
-              <a:solidFill>
-                <a:srgbClr val="424242"/>
-              </a:solidFill>
-              <a:effectLst/>
-              <a:latin typeface="Arial Unicode MS"/>
-              <a:ea typeface="source-code-pro"/>
-            </a:endParaRPr>
-          </a:p>
-          <a:p>
-            <a:pPr marL="0" marR="0" lvl="0" indent="0" algn="l" defTabSz="914400" rtl="0" eaLnBrk="0" fontAlgn="base" latinLnBrk="0" hangingPunct="0">
-              <a:lnSpc>
-                <a:spcPct val="100000"/>
-              </a:lnSpc>
-              <a:spcBef>
-                <a:spcPct val="0"/>
-              </a:spcBef>
-              <a:spcAft>
-                <a:spcPct val="0"/>
-              </a:spcAft>
-              <a:buClrTx/>
-              <a:buSzTx/>
-              <a:buFontTx/>
-              <a:buNone/>
-              <a:tabLst/>
-            </a:pPr>
-            <a:r>
-              <a:rPr kumimoji="0" lang="en-IL" altLang="en-IL" sz="1000" b="0" i="0" u="none" strike="noStrike" cap="none" normalizeH="0" baseline="0" dirty="0">
-                <a:ln>
-                  <a:noFill/>
-                </a:ln>
-                <a:solidFill>
-                  <a:srgbClr val="424242"/>
-                </a:solidFill>
-                <a:effectLst/>
-                <a:latin typeface="Arial Unicode MS"/>
-                <a:ea typeface="source-code-pro"/>
-              </a:rPr>
-              <a:t>│ ├── NotificationsWorker/ </a:t>
-            </a:r>
-            <a:r>
-              <a:rPr kumimoji="0" lang="en-US" altLang="en-IL" sz="1000" b="0" i="0" u="none" strike="noStrike" cap="none" normalizeH="0" baseline="0" dirty="0">
-                <a:ln>
-                  <a:noFill/>
-                </a:ln>
-                <a:solidFill>
-                  <a:srgbClr val="424242"/>
-                </a:solidFill>
-                <a:effectLst/>
-                <a:latin typeface="Arial Unicode MS"/>
-                <a:ea typeface="source-code-pro"/>
-              </a:rPr>
-              <a:t>		</a:t>
-            </a:r>
-            <a:r>
-              <a:rPr kumimoji="0" lang="en-IL" altLang="en-IL" sz="1000" b="0" i="0" u="none" strike="noStrike" cap="none" normalizeH="0" baseline="0" dirty="0">
-                <a:ln>
-                  <a:noFill/>
-                </a:ln>
-                <a:solidFill>
-                  <a:srgbClr val="424242"/>
-                </a:solidFill>
-                <a:effectLst/>
-                <a:latin typeface="Arial Unicode MS"/>
-                <a:ea typeface="source-code-pro"/>
-              </a:rPr>
-              <a:t>← </a:t>
-            </a:r>
-            <a:r>
-              <a:rPr lang="en-US" altLang="en-IL" sz="1000" dirty="0">
-                <a:solidFill>
-                  <a:srgbClr val="424242"/>
-                </a:solidFill>
-                <a:latin typeface="Arial Unicode MS"/>
-                <a:ea typeface="source-code-pro"/>
-              </a:rPr>
-              <a:t>Notifications w</a:t>
-            </a:r>
-            <a:r>
-              <a:rPr lang="en-US" altLang="en-IL" sz="1000" dirty="0">
-                <a:solidFill>
-                  <a:srgbClr val="424242"/>
-                </a:solidFill>
-                <a:latin typeface="Arial Unicode MS"/>
-                <a:ea typeface="source-code-pro"/>
-                <a:cs typeface="Arial" panose="020B0604020202020204" pitchFamily="34" charset="0"/>
-              </a:rPr>
-              <a:t>orker service </a:t>
-            </a:r>
-            <a:endParaRPr kumimoji="0" lang="en-US" altLang="en-IL" sz="1000" b="0" i="0" u="none" strike="noStrike" cap="none" normalizeH="0" baseline="0" dirty="0">
-              <a:ln>
-                <a:noFill/>
-              </a:ln>
-              <a:solidFill>
-                <a:srgbClr val="424242"/>
-              </a:solidFill>
-              <a:effectLst/>
-              <a:latin typeface="Arial Unicode MS"/>
-              <a:ea typeface="source-code-pro"/>
-            </a:endParaRPr>
-          </a:p>
-          <a:p>
-            <a:pPr marL="0" marR="0" lvl="0" indent="0" algn="l" defTabSz="914400" rtl="0" eaLnBrk="0" fontAlgn="base" latinLnBrk="0" hangingPunct="0">
-              <a:lnSpc>
-                <a:spcPct val="100000"/>
-              </a:lnSpc>
-              <a:spcBef>
-                <a:spcPct val="0"/>
-              </a:spcBef>
-              <a:spcAft>
-                <a:spcPct val="0"/>
-              </a:spcAft>
-              <a:buClrTx/>
-              <a:buSzTx/>
-              <a:buFontTx/>
-              <a:buNone/>
-              <a:tabLst/>
-            </a:pPr>
-            <a:r>
-              <a:rPr kumimoji="0" lang="en-IL" altLang="en-IL" sz="1000" b="0" i="0" u="none" strike="noStrike" cap="none" normalizeH="0" baseline="0" dirty="0">
-                <a:ln>
-                  <a:noFill/>
-                </a:ln>
-                <a:solidFill>
-                  <a:srgbClr val="424242"/>
-                </a:solidFill>
-                <a:effectLst/>
-                <a:latin typeface="Arial Unicode MS"/>
-                <a:ea typeface="source-code-pro"/>
-              </a:rPr>
-              <a:t>│ ├── PublisherService/ </a:t>
-            </a:r>
-            <a:r>
-              <a:rPr kumimoji="0" lang="en-US" altLang="en-IL" sz="1000" b="0" i="0" u="none" strike="noStrike" cap="none" normalizeH="0" baseline="0" dirty="0">
-                <a:ln>
-                  <a:noFill/>
-                </a:ln>
-                <a:solidFill>
-                  <a:srgbClr val="424242"/>
-                </a:solidFill>
-                <a:effectLst/>
-                <a:latin typeface="Arial Unicode MS"/>
-                <a:ea typeface="source-code-pro"/>
-              </a:rPr>
-              <a:t>		</a:t>
-            </a:r>
-            <a:r>
-              <a:rPr kumimoji="0" lang="en-IL" altLang="en-IL" sz="1000" b="0" i="0" u="none" strike="noStrike" cap="none" normalizeH="0" baseline="0" dirty="0">
-                <a:ln>
-                  <a:noFill/>
-                </a:ln>
-                <a:solidFill>
-                  <a:srgbClr val="424242"/>
-                </a:solidFill>
-                <a:effectLst/>
-                <a:latin typeface="Arial Unicode MS"/>
-                <a:ea typeface="source-code-pro"/>
-              </a:rPr>
-              <a:t>← </a:t>
-            </a:r>
-            <a:r>
-              <a:rPr kumimoji="0" lang="en-US" altLang="en-IL" sz="1000" b="0" i="0" u="none" strike="noStrike" cap="none" normalizeH="0" baseline="0" dirty="0">
-                <a:ln>
-                  <a:noFill/>
-                </a:ln>
-                <a:solidFill>
-                  <a:srgbClr val="424242"/>
-                </a:solidFill>
-                <a:effectLst/>
-                <a:latin typeface="Arial Unicode MS"/>
-                <a:ea typeface="source-code-pro"/>
-                <a:cs typeface="Arial" panose="020B0604020202020204" pitchFamily="34" charset="0"/>
-              </a:rPr>
-              <a:t>Data </a:t>
-            </a:r>
-            <a:r>
-              <a:rPr lang="en-US" altLang="en-IL" sz="1000" dirty="0">
-                <a:solidFill>
-                  <a:srgbClr val="424242"/>
-                </a:solidFill>
-                <a:latin typeface="Arial Unicode MS"/>
-                <a:ea typeface="source-code-pro"/>
-                <a:cs typeface="Arial" panose="020B0604020202020204" pitchFamily="34" charset="0"/>
-              </a:rPr>
-              <a:t>publishing service</a:t>
-            </a:r>
-            <a:endParaRPr kumimoji="0" lang="en-US" altLang="en-IL" sz="1000" b="0" i="0" u="none" strike="noStrike" cap="none" normalizeH="0" baseline="0" dirty="0">
-              <a:ln>
-                <a:noFill/>
-              </a:ln>
-              <a:solidFill>
-                <a:srgbClr val="424242"/>
-              </a:solidFill>
-              <a:effectLst/>
-              <a:latin typeface="Arial Unicode MS"/>
-              <a:ea typeface="source-code-pro"/>
-            </a:endParaRPr>
-          </a:p>
-          <a:p>
-            <a:pPr marL="0" marR="0" lvl="0" indent="0" algn="l" defTabSz="914400" rtl="0" eaLnBrk="0" fontAlgn="base" latinLnBrk="0" hangingPunct="0">
-              <a:lnSpc>
-                <a:spcPct val="100000"/>
-              </a:lnSpc>
-              <a:spcBef>
-                <a:spcPct val="0"/>
-              </a:spcBef>
-              <a:spcAft>
-                <a:spcPct val="0"/>
-              </a:spcAft>
-              <a:buClrTx/>
-              <a:buSzTx/>
-              <a:buFontTx/>
-              <a:buNone/>
-              <a:tabLst/>
-            </a:pPr>
-            <a:r>
-              <a:rPr kumimoji="0" lang="en-IL" altLang="en-IL" sz="1000" b="0" i="0" u="none" strike="noStrike" cap="none" normalizeH="0" baseline="0" dirty="0">
-                <a:ln>
-                  <a:noFill/>
-                </a:ln>
-                <a:solidFill>
-                  <a:srgbClr val="424242"/>
-                </a:solidFill>
-                <a:effectLst/>
-                <a:latin typeface="Arial Unicode MS"/>
-                <a:ea typeface="source-code-pro"/>
-              </a:rPr>
-              <a:t>│ └── Gateway/ </a:t>
-            </a:r>
-            <a:r>
-              <a:rPr kumimoji="0" lang="en-US" altLang="en-IL" sz="1000" b="0" i="0" u="none" strike="noStrike" cap="none" normalizeH="0" baseline="0" dirty="0">
-                <a:ln>
-                  <a:noFill/>
-                </a:ln>
-                <a:solidFill>
-                  <a:srgbClr val="424242"/>
-                </a:solidFill>
-                <a:effectLst/>
-                <a:latin typeface="Arial Unicode MS"/>
-                <a:ea typeface="source-code-pro"/>
-              </a:rPr>
-              <a:t>		</a:t>
-            </a:r>
-            <a:r>
-              <a:rPr kumimoji="0" lang="en-IL" altLang="en-IL" sz="1000" b="0" i="0" u="none" strike="noStrike" cap="none" normalizeH="0" baseline="0" dirty="0">
-                <a:ln>
-                  <a:noFill/>
-                </a:ln>
-                <a:solidFill>
-                  <a:srgbClr val="424242"/>
-                </a:solidFill>
-                <a:effectLst/>
-                <a:latin typeface="Arial Unicode MS"/>
-                <a:ea typeface="source-code-pro"/>
-              </a:rPr>
-              <a:t>← API Gateway </a:t>
-            </a:r>
-            <a:endParaRPr kumimoji="0" lang="en-US" altLang="en-IL" sz="1000" b="0" i="0" u="none" strike="noStrike" cap="none" normalizeH="0" baseline="0" dirty="0">
-              <a:ln>
-                <a:noFill/>
-              </a:ln>
-              <a:solidFill>
-                <a:srgbClr val="424242"/>
-              </a:solidFill>
-              <a:effectLst/>
-              <a:latin typeface="Arial Unicode MS"/>
-              <a:ea typeface="source-code-pro"/>
-            </a:endParaRPr>
-          </a:p>
-          <a:p>
-            <a:pPr marL="0" marR="0" lvl="0" indent="0" algn="l" defTabSz="914400" rtl="0" eaLnBrk="0" fontAlgn="base" latinLnBrk="0" hangingPunct="0">
-              <a:lnSpc>
-                <a:spcPct val="100000"/>
-              </a:lnSpc>
-              <a:spcBef>
-                <a:spcPct val="0"/>
-              </a:spcBef>
-              <a:spcAft>
-                <a:spcPct val="0"/>
-              </a:spcAft>
-              <a:buClrTx/>
-              <a:buSzTx/>
-              <a:buFontTx/>
-              <a:buNone/>
-              <a:tabLst/>
-            </a:pPr>
-            <a:r>
-              <a:rPr kumimoji="0" lang="en-IL" altLang="en-IL" sz="1000" b="0" i="0" u="none" strike="noStrike" cap="none" normalizeH="0" baseline="0" dirty="0">
-                <a:ln>
-                  <a:noFill/>
-                </a:ln>
-                <a:solidFill>
-                  <a:srgbClr val="424242"/>
-                </a:solidFill>
-                <a:effectLst/>
-                <a:latin typeface="Arial Unicode MS"/>
-                <a:ea typeface="source-code-pro"/>
-              </a:rPr>
-              <a:t>├── Shared/ </a:t>
-            </a:r>
-            <a:r>
-              <a:rPr kumimoji="0" lang="en-US" altLang="en-IL" sz="1000" b="0" i="0" u="none" strike="noStrike" cap="none" normalizeH="0" baseline="0" dirty="0">
-                <a:ln>
-                  <a:noFill/>
-                </a:ln>
-                <a:solidFill>
-                  <a:srgbClr val="424242"/>
-                </a:solidFill>
-                <a:effectLst/>
-                <a:latin typeface="Arial Unicode MS"/>
-                <a:ea typeface="source-code-pro"/>
-              </a:rPr>
-              <a:t>			</a:t>
-            </a:r>
-            <a:r>
-              <a:rPr kumimoji="0" lang="en-IL" altLang="en-IL" sz="1000" b="0" i="0" u="none" strike="noStrike" cap="none" normalizeH="0" baseline="0" dirty="0">
-                <a:ln>
-                  <a:noFill/>
-                </a:ln>
-                <a:solidFill>
-                  <a:srgbClr val="424242"/>
-                </a:solidFill>
-                <a:effectLst/>
-                <a:latin typeface="Arial Unicode MS"/>
-                <a:ea typeface="source-code-pro"/>
-              </a:rPr>
-              <a:t>← </a:t>
-            </a:r>
-            <a:r>
-              <a:rPr kumimoji="0" lang="en-US" altLang="en-IL" sz="1000" b="0" i="0" u="none" strike="noStrike" cap="none" normalizeH="0" baseline="0" dirty="0">
-                <a:ln>
-                  <a:noFill/>
-                </a:ln>
-                <a:solidFill>
-                  <a:srgbClr val="424242"/>
-                </a:solidFill>
-                <a:effectLst/>
-                <a:latin typeface="Arial Unicode MS"/>
-                <a:ea typeface="source-code-pro"/>
-                <a:cs typeface="Arial" panose="020B0604020202020204" pitchFamily="34" charset="0"/>
-              </a:rPr>
-              <a:t>Shared code </a:t>
-            </a:r>
-            <a:r>
-              <a:rPr kumimoji="0" lang="en-IL" altLang="en-IL" sz="1000" b="0" i="0" u="none" strike="noStrike" cap="none" normalizeH="0" baseline="0" dirty="0">
-                <a:ln>
-                  <a:noFill/>
-                </a:ln>
-                <a:solidFill>
-                  <a:srgbClr val="424242"/>
-                </a:solidFill>
-                <a:effectLst/>
-                <a:latin typeface="Arial Unicode MS"/>
-                <a:ea typeface="source-code-pro"/>
-              </a:rPr>
-              <a:t>(DTOs, Utils </a:t>
-            </a:r>
-            <a:r>
-              <a:rPr kumimoji="0" lang="en-US" altLang="en-IL" sz="1000" b="0" i="0" u="none" strike="noStrike" cap="none" normalizeH="0" baseline="0" dirty="0">
-                <a:ln>
-                  <a:noFill/>
-                </a:ln>
-                <a:solidFill>
-                  <a:srgbClr val="424242"/>
-                </a:solidFill>
-                <a:effectLst/>
-                <a:latin typeface="Arial Unicode MS"/>
-                <a:ea typeface="source-code-pro"/>
-                <a:cs typeface="Arial" panose="020B0604020202020204" pitchFamily="34" charset="0"/>
-              </a:rPr>
-              <a:t>etc.</a:t>
-            </a:r>
-            <a:r>
-              <a:rPr kumimoji="0" lang="en-IL" altLang="en-IL" sz="1000" b="0" i="0" u="none" strike="noStrike" cap="none" normalizeH="0" baseline="0" dirty="0">
-                <a:ln>
-                  <a:noFill/>
-                </a:ln>
-                <a:solidFill>
-                  <a:srgbClr val="424242"/>
-                </a:solidFill>
-                <a:effectLst/>
-                <a:latin typeface="Arial Unicode MS"/>
-                <a:ea typeface="source-code-pro"/>
-              </a:rPr>
-              <a:t>) </a:t>
-            </a:r>
-            <a:endParaRPr kumimoji="0" lang="en-US" altLang="en-IL" sz="1000" b="0" i="0" u="none" strike="noStrike" cap="none" normalizeH="0" baseline="0" dirty="0">
-              <a:ln>
-                <a:noFill/>
-              </a:ln>
-              <a:solidFill>
-                <a:srgbClr val="424242"/>
-              </a:solidFill>
-              <a:effectLst/>
-              <a:latin typeface="Arial Unicode MS"/>
-              <a:ea typeface="source-code-pro"/>
-            </a:endParaRPr>
-          </a:p>
-          <a:p>
-            <a:pPr marL="0" marR="0" lvl="0" indent="0" algn="l" defTabSz="914400" rtl="0" eaLnBrk="0" fontAlgn="base" latinLnBrk="0" hangingPunct="0">
-              <a:lnSpc>
-                <a:spcPct val="100000"/>
-              </a:lnSpc>
-              <a:spcBef>
-                <a:spcPct val="0"/>
-              </a:spcBef>
-              <a:spcAft>
-                <a:spcPct val="0"/>
-              </a:spcAft>
-              <a:buClrTx/>
-              <a:buSzTx/>
-              <a:buFontTx/>
-              <a:buNone/>
-              <a:tabLst/>
-            </a:pPr>
-            <a:r>
-              <a:rPr kumimoji="0" lang="en-IL" altLang="en-IL" sz="1000" b="0" i="0" u="none" strike="noStrike" cap="none" normalizeH="0" baseline="0" dirty="0">
-                <a:ln>
-                  <a:noFill/>
-                </a:ln>
-                <a:solidFill>
-                  <a:srgbClr val="424242"/>
-                </a:solidFill>
-                <a:effectLst/>
-                <a:latin typeface="Arial Unicode MS"/>
-                <a:ea typeface="source-code-pro"/>
-              </a:rPr>
-              <a:t>├── Tests/ </a:t>
-            </a:r>
-            <a:endParaRPr kumimoji="0" lang="en-US" altLang="en-IL" sz="1000" b="0" i="0" u="none" strike="noStrike" cap="none" normalizeH="0" baseline="0" dirty="0">
-              <a:ln>
-                <a:noFill/>
-              </a:ln>
-              <a:solidFill>
-                <a:srgbClr val="424242"/>
-              </a:solidFill>
-              <a:effectLst/>
-              <a:latin typeface="Arial Unicode MS"/>
-              <a:ea typeface="source-code-pro"/>
-            </a:endParaRPr>
-          </a:p>
-          <a:p>
-            <a:pPr marL="0" marR="0" lvl="0" indent="0" algn="l" defTabSz="914400" rtl="0" eaLnBrk="0" fontAlgn="base" latinLnBrk="0" hangingPunct="0">
-              <a:lnSpc>
-                <a:spcPct val="100000"/>
-              </a:lnSpc>
-              <a:spcBef>
-                <a:spcPct val="0"/>
-              </a:spcBef>
-              <a:spcAft>
-                <a:spcPct val="0"/>
-              </a:spcAft>
-              <a:buClrTx/>
-              <a:buSzTx/>
-              <a:buFontTx/>
-              <a:buNone/>
-              <a:tabLst/>
-            </a:pPr>
-            <a:r>
-              <a:rPr kumimoji="0" lang="en-IL" altLang="en-IL" sz="1000" b="0" i="0" u="none" strike="noStrike" cap="none" normalizeH="0" baseline="0" dirty="0">
-                <a:ln>
-                  <a:noFill/>
-                </a:ln>
-                <a:solidFill>
-                  <a:srgbClr val="424242"/>
-                </a:solidFill>
-                <a:effectLst/>
-                <a:latin typeface="Arial Unicode MS"/>
-                <a:ea typeface="source-code-pro"/>
-              </a:rPr>
-              <a:t>│ ├── AuthService.Tests/ </a:t>
-            </a:r>
-            <a:endParaRPr kumimoji="0" lang="en-US" altLang="en-IL" sz="1000" b="0" i="0" u="none" strike="noStrike" cap="none" normalizeH="0" baseline="0" dirty="0">
-              <a:ln>
-                <a:noFill/>
-              </a:ln>
-              <a:solidFill>
-                <a:srgbClr val="424242"/>
-              </a:solidFill>
-              <a:effectLst/>
-              <a:latin typeface="Arial Unicode MS"/>
-              <a:ea typeface="source-code-pro"/>
-            </a:endParaRPr>
-          </a:p>
-          <a:p>
-            <a:pPr marL="0" marR="0" lvl="0" indent="0" algn="l" defTabSz="914400" rtl="0" eaLnBrk="0" fontAlgn="base" latinLnBrk="0" hangingPunct="0">
-              <a:lnSpc>
-                <a:spcPct val="100000"/>
-              </a:lnSpc>
-              <a:spcBef>
-                <a:spcPct val="0"/>
-              </a:spcBef>
-              <a:spcAft>
-                <a:spcPct val="0"/>
-              </a:spcAft>
-              <a:buClrTx/>
-              <a:buSzTx/>
-              <a:buFontTx/>
-              <a:buNone/>
-              <a:tabLst/>
-            </a:pPr>
-            <a:r>
-              <a:rPr kumimoji="0" lang="en-IL" altLang="en-IL" sz="1000" b="0" i="0" u="none" strike="noStrike" cap="none" normalizeH="0" baseline="0" dirty="0">
-                <a:ln>
-                  <a:noFill/>
-                </a:ln>
-                <a:solidFill>
-                  <a:srgbClr val="424242"/>
-                </a:solidFill>
-                <a:effectLst/>
-                <a:latin typeface="Arial Unicode MS"/>
-                <a:ea typeface="source-code-pro"/>
-              </a:rPr>
-              <a:t>│ ├── CustomersService.Tests/ </a:t>
-            </a:r>
-            <a:endParaRPr kumimoji="0" lang="en-US" altLang="en-IL" sz="1000" b="0" i="0" u="none" strike="noStrike" cap="none" normalizeH="0" baseline="0" dirty="0">
-              <a:ln>
-                <a:noFill/>
-              </a:ln>
-              <a:solidFill>
-                <a:srgbClr val="424242"/>
-              </a:solidFill>
-              <a:effectLst/>
-              <a:latin typeface="Arial Unicode MS"/>
-              <a:ea typeface="source-code-pro"/>
-            </a:endParaRPr>
-          </a:p>
-          <a:p>
-            <a:pPr marL="0" marR="0" lvl="0" indent="0" algn="l" defTabSz="914400" rtl="0" eaLnBrk="0" fontAlgn="base" latinLnBrk="0" hangingPunct="0">
-              <a:lnSpc>
-                <a:spcPct val="100000"/>
-              </a:lnSpc>
-              <a:spcBef>
-                <a:spcPct val="0"/>
-              </a:spcBef>
-              <a:spcAft>
-                <a:spcPct val="0"/>
-              </a:spcAft>
-              <a:buClrTx/>
-              <a:buSzTx/>
-              <a:buFontTx/>
-              <a:buNone/>
-              <a:tabLst/>
-            </a:pPr>
-            <a:r>
-              <a:rPr kumimoji="0" lang="en-IL" altLang="en-IL" sz="1000" b="0" i="0" u="none" strike="noStrike" cap="none" normalizeH="0" baseline="0" dirty="0">
-                <a:ln>
-                  <a:noFill/>
-                </a:ln>
-                <a:solidFill>
-                  <a:srgbClr val="424242"/>
-                </a:solidFill>
-                <a:effectLst/>
-                <a:latin typeface="Arial Unicode MS"/>
-                <a:ea typeface="source-code-pro"/>
-              </a:rPr>
-              <a:t>│ └── ... </a:t>
-            </a:r>
-            <a:endParaRPr kumimoji="0" lang="en-US" altLang="en-IL" sz="1000" b="0" i="0" u="none" strike="noStrike" cap="none" normalizeH="0" baseline="0" dirty="0">
-              <a:ln>
-                <a:noFill/>
-              </a:ln>
-              <a:solidFill>
-                <a:srgbClr val="424242"/>
-              </a:solidFill>
-              <a:effectLst/>
-              <a:latin typeface="Arial Unicode MS"/>
-              <a:ea typeface="source-code-pro"/>
-            </a:endParaRPr>
-          </a:p>
-          <a:p>
-            <a:pPr marL="0" marR="0" lvl="0" indent="0" algn="l" defTabSz="914400" rtl="0" eaLnBrk="0" fontAlgn="base" latinLnBrk="0" hangingPunct="0">
-              <a:lnSpc>
-                <a:spcPct val="100000"/>
-              </a:lnSpc>
-              <a:spcBef>
-                <a:spcPct val="0"/>
-              </a:spcBef>
-              <a:spcAft>
-                <a:spcPct val="0"/>
-              </a:spcAft>
-              <a:buClrTx/>
-              <a:buSzTx/>
-              <a:buFontTx/>
-              <a:buNone/>
-              <a:tabLst/>
-            </a:pPr>
-            <a:r>
-              <a:rPr kumimoji="0" lang="en-IL" altLang="en-IL" sz="1000" b="0" i="0" u="none" strike="noStrike" cap="none" normalizeH="0" baseline="0" dirty="0">
-                <a:ln>
-                  <a:noFill/>
-                </a:ln>
-                <a:solidFill>
-                  <a:srgbClr val="424242"/>
-                </a:solidFill>
-                <a:effectLst/>
-                <a:latin typeface="Arial Unicode MS"/>
-                <a:ea typeface="source-code-pro"/>
-              </a:rPr>
-              <a:t>├── Documentation/ </a:t>
-            </a:r>
-            <a:r>
-              <a:rPr kumimoji="0" lang="en-US" altLang="en-IL" sz="1000" b="0" i="0" u="none" strike="noStrike" cap="none" normalizeH="0" baseline="0" dirty="0">
-                <a:ln>
-                  <a:noFill/>
-                </a:ln>
-                <a:solidFill>
-                  <a:srgbClr val="424242"/>
-                </a:solidFill>
-                <a:effectLst/>
-                <a:latin typeface="Arial Unicode MS"/>
-                <a:ea typeface="source-code-pro"/>
-              </a:rPr>
-              <a:t>		</a:t>
-            </a:r>
-            <a:r>
-              <a:rPr kumimoji="0" lang="en-IL" altLang="en-IL" sz="1000" b="0" i="0" u="none" strike="noStrike" cap="none" normalizeH="0" baseline="0" dirty="0">
-                <a:ln>
-                  <a:noFill/>
-                </a:ln>
-                <a:solidFill>
-                  <a:srgbClr val="424242"/>
-                </a:solidFill>
-                <a:effectLst/>
-                <a:latin typeface="Arial Unicode MS"/>
-                <a:ea typeface="source-code-pro"/>
-              </a:rPr>
-              <a:t>← SRS, SDD </a:t>
-            </a:r>
-            <a:r>
-              <a:rPr kumimoji="0" lang="en-US" altLang="en-IL" sz="1000" b="0" i="0" u="none" strike="noStrike" cap="none" normalizeH="0" baseline="0" dirty="0">
-                <a:ln>
-                  <a:noFill/>
-                </a:ln>
-                <a:solidFill>
-                  <a:srgbClr val="424242"/>
-                </a:solidFill>
-                <a:effectLst/>
-                <a:latin typeface="Arial Unicode MS"/>
-                <a:ea typeface="source-code-pro"/>
-                <a:cs typeface="Arial" panose="020B0604020202020204" pitchFamily="34" charset="0"/>
-              </a:rPr>
-              <a:t>documents etc.</a:t>
-            </a:r>
-            <a:r>
-              <a:rPr kumimoji="0" lang="en-IL" altLang="en-IL" sz="1000" b="0" i="0" u="none" strike="noStrike" cap="none" normalizeH="0" baseline="0" dirty="0">
-                <a:ln>
-                  <a:noFill/>
-                </a:ln>
-                <a:solidFill>
-                  <a:srgbClr val="424242"/>
-                </a:solidFill>
-                <a:effectLst/>
-                <a:latin typeface="Arial Unicode MS"/>
-                <a:ea typeface="source-code-pro"/>
-              </a:rPr>
-              <a:t> </a:t>
-            </a:r>
-            <a:endParaRPr kumimoji="0" lang="en-US" altLang="en-IL" sz="1000" b="0" i="0" u="none" strike="noStrike" cap="none" normalizeH="0" baseline="0" dirty="0">
-              <a:ln>
-                <a:noFill/>
-              </a:ln>
-              <a:solidFill>
-                <a:srgbClr val="424242"/>
-              </a:solidFill>
-              <a:effectLst/>
-              <a:latin typeface="Arial Unicode MS"/>
-              <a:ea typeface="source-code-pro"/>
-            </a:endParaRPr>
-          </a:p>
-          <a:p>
-            <a:pPr marL="0" marR="0" lvl="0" indent="0" algn="l" defTabSz="914400" rtl="0" eaLnBrk="0" fontAlgn="base" latinLnBrk="0" hangingPunct="0">
-              <a:lnSpc>
-                <a:spcPct val="100000"/>
-              </a:lnSpc>
-              <a:spcBef>
-                <a:spcPct val="0"/>
-              </a:spcBef>
-              <a:spcAft>
-                <a:spcPct val="0"/>
-              </a:spcAft>
-              <a:buClrTx/>
-              <a:buSzTx/>
-              <a:buFontTx/>
-              <a:buNone/>
-              <a:tabLst/>
-            </a:pPr>
-            <a:r>
-              <a:rPr kumimoji="0" lang="en-IL" altLang="en-IL" sz="1000" b="0" i="0" u="none" strike="noStrike" cap="none" normalizeH="0" baseline="0" dirty="0">
-                <a:ln>
-                  <a:noFill/>
-                </a:ln>
-                <a:solidFill>
-                  <a:srgbClr val="424242"/>
-                </a:solidFill>
-                <a:effectLst/>
-                <a:latin typeface="Arial Unicode MS"/>
-                <a:ea typeface="source-code-pro"/>
-              </a:rPr>
-              <a:t>├── docker-compose.yml </a:t>
-            </a:r>
-            <a:endParaRPr kumimoji="0" lang="en-US" altLang="en-IL" sz="1000" b="0" i="0" u="none" strike="noStrike" cap="none" normalizeH="0" baseline="0" dirty="0">
-              <a:ln>
-                <a:noFill/>
-              </a:ln>
-              <a:solidFill>
-                <a:srgbClr val="424242"/>
-              </a:solidFill>
-              <a:effectLst/>
-              <a:latin typeface="Arial Unicode MS"/>
-              <a:ea typeface="source-code-pro"/>
-            </a:endParaRPr>
-          </a:p>
-          <a:p>
-            <a:pPr marL="0" marR="0" lvl="0" indent="0" algn="l" defTabSz="914400" rtl="0" eaLnBrk="0" fontAlgn="base" latinLnBrk="0" hangingPunct="0">
-              <a:lnSpc>
-                <a:spcPct val="100000"/>
-              </a:lnSpc>
-              <a:spcBef>
-                <a:spcPct val="0"/>
-              </a:spcBef>
-              <a:spcAft>
-                <a:spcPct val="0"/>
-              </a:spcAft>
-              <a:buClrTx/>
-              <a:buSzTx/>
-              <a:buFontTx/>
-              <a:buNone/>
-              <a:tabLst/>
-            </a:pPr>
-            <a:r>
-              <a:rPr kumimoji="0" lang="en-IL" altLang="en-IL" sz="1000" b="0" i="0" u="none" strike="noStrike" cap="none" normalizeH="0" baseline="0" dirty="0">
-                <a:ln>
-                  <a:noFill/>
-                </a:ln>
-                <a:solidFill>
-                  <a:srgbClr val="424242"/>
-                </a:solidFill>
-                <a:effectLst/>
-                <a:latin typeface="Arial Unicode MS"/>
-                <a:ea typeface="source-code-pro"/>
-              </a:rPr>
-              <a:t>├── docker-compose.override.yml </a:t>
-            </a:r>
-            <a:endParaRPr kumimoji="0" lang="en-US" altLang="en-IL" sz="1000" b="0" i="0" u="none" strike="noStrike" cap="none" normalizeH="0" baseline="0" dirty="0">
-              <a:ln>
-                <a:noFill/>
-              </a:ln>
-              <a:solidFill>
-                <a:srgbClr val="424242"/>
-              </a:solidFill>
-              <a:effectLst/>
-              <a:latin typeface="Arial Unicode MS"/>
-              <a:ea typeface="source-code-pro"/>
-            </a:endParaRPr>
-          </a:p>
-          <a:p>
-            <a:pPr marL="0" marR="0" lvl="0" indent="0" algn="l" defTabSz="914400" rtl="0" eaLnBrk="0" fontAlgn="base" latinLnBrk="0" hangingPunct="0">
-              <a:lnSpc>
-                <a:spcPct val="100000"/>
-              </a:lnSpc>
-              <a:spcBef>
-                <a:spcPct val="0"/>
-              </a:spcBef>
-              <a:spcAft>
-                <a:spcPct val="0"/>
-              </a:spcAft>
-              <a:buClrTx/>
-              <a:buSzTx/>
-              <a:buFontTx/>
-              <a:buNone/>
-              <a:tabLst/>
-            </a:pPr>
-            <a:r>
-              <a:rPr kumimoji="0" lang="en-IL" altLang="en-IL" sz="1000" b="0" i="0" u="none" strike="noStrike" cap="none" normalizeH="0" baseline="0" dirty="0">
-                <a:ln>
-                  <a:noFill/>
-                </a:ln>
-                <a:solidFill>
-                  <a:srgbClr val="424242"/>
-                </a:solidFill>
-                <a:effectLst/>
-                <a:latin typeface="Arial Unicode MS"/>
-                <a:ea typeface="source-code-pro"/>
-              </a:rPr>
-              <a:t>└── A2C.sln </a:t>
-            </a:r>
-            <a:r>
-              <a:rPr kumimoji="0" lang="en-US" altLang="en-IL" sz="1000" b="0" i="0" u="none" strike="noStrike" cap="none" normalizeH="0" baseline="0" dirty="0">
-                <a:ln>
-                  <a:noFill/>
-                </a:ln>
-                <a:solidFill>
-                  <a:srgbClr val="424242"/>
-                </a:solidFill>
-                <a:effectLst/>
-                <a:latin typeface="Arial Unicode MS"/>
-                <a:ea typeface="source-code-pro"/>
-              </a:rPr>
-              <a:t>			</a:t>
-            </a:r>
-            <a:r>
-              <a:rPr kumimoji="0" lang="en-IL" altLang="en-IL" sz="1000" b="0" i="0" u="none" strike="noStrike" cap="none" normalizeH="0" baseline="0" dirty="0">
-                <a:ln>
-                  <a:noFill/>
-                </a:ln>
-                <a:solidFill>
-                  <a:srgbClr val="424242"/>
-                </a:solidFill>
-                <a:effectLst/>
-                <a:latin typeface="Arial Unicode MS"/>
-                <a:ea typeface="source-code-pro"/>
-              </a:rPr>
-              <a:t>← </a:t>
-            </a:r>
-            <a:r>
-              <a:rPr lang="en-US" altLang="en-IL" sz="1000" dirty="0">
-                <a:solidFill>
-                  <a:srgbClr val="424242"/>
-                </a:solidFill>
-                <a:latin typeface="Arial Unicode MS"/>
-                <a:ea typeface="source-code-pro"/>
-                <a:cs typeface="Arial" panose="020B0604020202020204" pitchFamily="34" charset="0"/>
-              </a:rPr>
-              <a:t>Main </a:t>
-            </a:r>
-            <a:r>
-              <a:rPr kumimoji="0" lang="en-IL" altLang="en-IL" sz="1000" b="0" i="0" u="none" strike="noStrike" cap="none" normalizeH="0" baseline="0" dirty="0">
-                <a:ln>
-                  <a:noFill/>
-                </a:ln>
-                <a:solidFill>
-                  <a:srgbClr val="424242"/>
-                </a:solidFill>
-                <a:effectLst/>
-                <a:latin typeface="Arial Unicode MS"/>
-                <a:ea typeface="source-code-pro"/>
-              </a:rPr>
-              <a:t>Solution </a:t>
-            </a:r>
-            <a:r>
-              <a:rPr kumimoji="0" lang="en-US" altLang="en-IL" sz="1000" b="0" i="0" u="none" strike="noStrike" cap="none" normalizeH="0" baseline="0" dirty="0">
-                <a:ln>
-                  <a:noFill/>
-                </a:ln>
-                <a:solidFill>
-                  <a:srgbClr val="424242"/>
-                </a:solidFill>
-                <a:effectLst/>
-                <a:latin typeface="Arial Unicode MS"/>
-                <a:ea typeface="source-code-pro"/>
-                <a:cs typeface="Arial" panose="020B0604020202020204" pitchFamily="34" charset="0"/>
-              </a:rPr>
-              <a:t>file</a:t>
-            </a:r>
-            <a:endParaRPr kumimoji="0" lang="en-IL" altLang="en-IL" sz="1800" b="0" i="0" u="none" strike="noStrike" cap="none" normalizeH="0" baseline="0" dirty="0">
-              <a:ln>
-                <a:noFill/>
-              </a:ln>
-              <a:solidFill>
-                <a:schemeClr val="tx1"/>
-              </a:solidFill>
-              <a:effectLst/>
-              <a:latin typeface="Arial" panose="020B0604020202020204" pitchFamily="34" charset="0"/>
-            </a:endParaRPr>
-          </a:p>
-        </p:txBody>
-      </p:sp>
-      <p:cxnSp>
-        <p:nvCxnSpPr>
-          <p:cNvPr id="5" name="Straight Connector 4">
-            <a:extLst>
-              <a:ext uri="{FF2B5EF4-FFF2-40B4-BE49-F238E27FC236}">
-                <a16:creationId xmlns:a16="http://schemas.microsoft.com/office/drawing/2014/main" id="{2775D967-AD34-DFF9-109B-EBB1CB82D2BA}"/>
-              </a:ext>
-            </a:extLst>
-          </p:cNvPr>
-          <p:cNvCxnSpPr>
-            <a:cxnSpLocks/>
-          </p:cNvCxnSpPr>
-          <p:nvPr/>
-        </p:nvCxnSpPr>
-        <p:spPr>
-          <a:xfrm>
-            <a:off x="2157984" y="1078992"/>
-            <a:ext cx="0" cy="2679192"/>
-          </a:xfrm>
-          <a:prstGeom prst="line">
-            <a:avLst/>
-          </a:prstGeom>
-        </p:spPr>
-        <p:style>
-          <a:lnRef idx="3">
-            <a:schemeClr val="dk1"/>
-          </a:lnRef>
-          <a:fillRef idx="0">
-            <a:schemeClr val="dk1"/>
-          </a:fillRef>
-          <a:effectRef idx="2">
-            <a:schemeClr val="dk1"/>
-          </a:effectRef>
-          <a:fontRef idx="minor">
-            <a:schemeClr val="tx1"/>
-          </a:fontRef>
-        </p:style>
-      </p:cxnSp>
+      </p:pic>
     </p:spTree>
     <p:extLst>
       <p:ext uri="{BB962C8B-B14F-4D97-AF65-F5344CB8AC3E}">

--- a/Documentations/SysArchitecture.pptx
+++ b/Documentations/SysArchitecture.pptx
@@ -10,10 +10,12 @@
     <p:sldId id="261" r:id="rId4"/>
     <p:sldId id="268" r:id="rId5"/>
     <p:sldId id="269" r:id="rId6"/>
-    <p:sldId id="262" r:id="rId7"/>
-    <p:sldId id="264" r:id="rId8"/>
-    <p:sldId id="267" r:id="rId9"/>
-    <p:sldId id="265" r:id="rId10"/>
+    <p:sldId id="271" r:id="rId7"/>
+    <p:sldId id="270" r:id="rId8"/>
+    <p:sldId id="262" r:id="rId9"/>
+    <p:sldId id="264" r:id="rId10"/>
+    <p:sldId id="267" r:id="rId11"/>
+    <p:sldId id="265" r:id="rId12"/>
   </p:sldIdLst>
   <p:sldSz cx="12192000" cy="6858000"/>
   <p:notesSz cx="6858000" cy="9144000"/>
@@ -269,7 +271,7 @@
           <a:p>
             <a:fld id="{8377380A-1819-462E-96FD-3D6CBD777CA0}" type="datetimeFigureOut">
               <a:rPr lang="en-IL" smtClean="0"/>
-              <a:t>16/08/2025</a:t>
+              <a:t>18/08/2025</a:t>
             </a:fld>
             <a:endParaRPr lang="en-IL"/>
           </a:p>
@@ -469,7 +471,7 @@
           <a:p>
             <a:fld id="{8377380A-1819-462E-96FD-3D6CBD777CA0}" type="datetimeFigureOut">
               <a:rPr lang="en-IL" smtClean="0"/>
-              <a:t>16/08/2025</a:t>
+              <a:t>18/08/2025</a:t>
             </a:fld>
             <a:endParaRPr lang="en-IL"/>
           </a:p>
@@ -679,7 +681,7 @@
           <a:p>
             <a:fld id="{8377380A-1819-462E-96FD-3D6CBD777CA0}" type="datetimeFigureOut">
               <a:rPr lang="en-IL" smtClean="0"/>
-              <a:t>16/08/2025</a:t>
+              <a:t>18/08/2025</a:t>
             </a:fld>
             <a:endParaRPr lang="en-IL"/>
           </a:p>
@@ -879,7 +881,7 @@
           <a:p>
             <a:fld id="{8377380A-1819-462E-96FD-3D6CBD777CA0}" type="datetimeFigureOut">
               <a:rPr lang="en-IL" smtClean="0"/>
-              <a:t>16/08/2025</a:t>
+              <a:t>18/08/2025</a:t>
             </a:fld>
             <a:endParaRPr lang="en-IL"/>
           </a:p>
@@ -1155,7 +1157,7 @@
           <a:p>
             <a:fld id="{8377380A-1819-462E-96FD-3D6CBD777CA0}" type="datetimeFigureOut">
               <a:rPr lang="en-IL" smtClean="0"/>
-              <a:t>16/08/2025</a:t>
+              <a:t>18/08/2025</a:t>
             </a:fld>
             <a:endParaRPr lang="en-IL"/>
           </a:p>
@@ -1423,7 +1425,7 @@
           <a:p>
             <a:fld id="{8377380A-1819-462E-96FD-3D6CBD777CA0}" type="datetimeFigureOut">
               <a:rPr lang="en-IL" smtClean="0"/>
-              <a:t>16/08/2025</a:t>
+              <a:t>18/08/2025</a:t>
             </a:fld>
             <a:endParaRPr lang="en-IL"/>
           </a:p>
@@ -1838,7 +1840,7 @@
           <a:p>
             <a:fld id="{8377380A-1819-462E-96FD-3D6CBD777CA0}" type="datetimeFigureOut">
               <a:rPr lang="en-IL" smtClean="0"/>
-              <a:t>16/08/2025</a:t>
+              <a:t>18/08/2025</a:t>
             </a:fld>
             <a:endParaRPr lang="en-IL"/>
           </a:p>
@@ -1980,7 +1982,7 @@
           <a:p>
             <a:fld id="{8377380A-1819-462E-96FD-3D6CBD777CA0}" type="datetimeFigureOut">
               <a:rPr lang="en-IL" smtClean="0"/>
-              <a:t>16/08/2025</a:t>
+              <a:t>18/08/2025</a:t>
             </a:fld>
             <a:endParaRPr lang="en-IL"/>
           </a:p>
@@ -2093,7 +2095,7 @@
           <a:p>
             <a:fld id="{8377380A-1819-462E-96FD-3D6CBD777CA0}" type="datetimeFigureOut">
               <a:rPr lang="en-IL" smtClean="0"/>
-              <a:t>16/08/2025</a:t>
+              <a:t>18/08/2025</a:t>
             </a:fld>
             <a:endParaRPr lang="en-IL"/>
           </a:p>
@@ -2406,7 +2408,7 @@
           <a:p>
             <a:fld id="{8377380A-1819-462E-96FD-3D6CBD777CA0}" type="datetimeFigureOut">
               <a:rPr lang="en-IL" smtClean="0"/>
-              <a:t>16/08/2025</a:t>
+              <a:t>18/08/2025</a:t>
             </a:fld>
             <a:endParaRPr lang="en-IL"/>
           </a:p>
@@ -2695,7 +2697,7 @@
           <a:p>
             <a:fld id="{8377380A-1819-462E-96FD-3D6CBD777CA0}" type="datetimeFigureOut">
               <a:rPr lang="en-IL" smtClean="0"/>
-              <a:t>16/08/2025</a:t>
+              <a:t>18/08/2025</a:t>
             </a:fld>
             <a:endParaRPr lang="en-IL"/>
           </a:p>
@@ -2938,7 +2940,7 @@
           <a:p>
             <a:fld id="{8377380A-1819-462E-96FD-3D6CBD777CA0}" type="datetimeFigureOut">
               <a:rPr lang="en-IL" smtClean="0"/>
-              <a:t>16/08/2025</a:t>
+              <a:t>18/08/2025</a:t>
             </a:fld>
             <a:endParaRPr lang="en-IL"/>
           </a:p>
@@ -3422,6 +3424,1869 @@
 </p:sld>
 </file>
 
+<file path=ppt/slides/slide10.xml><?xml version="1.0" encoding="utf-8"?>
+<p:sld xmlns:a="http://schemas.openxmlformats.org/drawingml/2006/main" xmlns:r="http://schemas.openxmlformats.org/officeDocument/2006/relationships" xmlns:p="http://schemas.openxmlformats.org/presentationml/2006/main">
+  <p:cSld>
+    <p:spTree>
+      <p:nvGrpSpPr>
+        <p:cNvPr id="1" name=""/>
+        <p:cNvGrpSpPr/>
+        <p:nvPr/>
+      </p:nvGrpSpPr>
+      <p:grpSpPr>
+        <a:xfrm>
+          <a:off x="0" y="0"/>
+          <a:ext cx="0" cy="0"/>
+          <a:chOff x="0" y="0"/>
+          <a:chExt cx="0" cy="0"/>
+        </a:xfrm>
+      </p:grpSpPr>
+      <p:sp>
+        <p:nvSpPr>
+          <p:cNvPr id="2" name="AutoShape 13">
+            <a:extLst>
+              <a:ext uri="{FF2B5EF4-FFF2-40B4-BE49-F238E27FC236}">
+                <a16:creationId xmlns:a16="http://schemas.microsoft.com/office/drawing/2014/main" id="{78FF15C6-2884-A197-AD86-D46D737FF0CB}"/>
+              </a:ext>
+            </a:extLst>
+          </p:cNvPr>
+          <p:cNvSpPr>
+            <a:spLocks noChangeArrowheads="1"/>
+          </p:cNvSpPr>
+          <p:nvPr/>
+        </p:nvSpPr>
+        <p:spPr bwMode="auto">
+          <a:xfrm>
+            <a:off x="74234" y="701263"/>
+            <a:ext cx="1315653" cy="295343"/>
+          </a:xfrm>
+          <a:prstGeom prst="roundRect">
+            <a:avLst>
+              <a:gd name="adj" fmla="val 16667"/>
+            </a:avLst>
+          </a:prstGeom>
+          <a:solidFill>
+            <a:schemeClr val="bg1"/>
+          </a:solidFill>
+          <a:ln w="12700">
+            <a:solidFill>
+              <a:srgbClr val="09101D"/>
+            </a:solidFill>
+            <a:miter lim="800000"/>
+            <a:headEnd/>
+            <a:tailEnd/>
+          </a:ln>
+        </p:spPr>
+        <p:txBody>
+          <a:bodyPr vert="horz" wrap="square" lIns="91440" tIns="45720" rIns="91440" bIns="45720" numCol="1" anchor="ctr" anchorCtr="0" compatLnSpc="1">
+            <a:prstTxWarp prst="textNoShape">
+              <a:avLst/>
+            </a:prstTxWarp>
+          </a:bodyPr>
+          <a:lstStyle/>
+          <a:p>
+            <a:pPr marL="0" marR="0" lvl="0" indent="0" algn="ctr" defTabSz="914400" rtl="0" eaLnBrk="0" fontAlgn="base" latinLnBrk="0" hangingPunct="0">
+              <a:lnSpc>
+                <a:spcPct val="100000"/>
+              </a:lnSpc>
+              <a:spcBef>
+                <a:spcPct val="0"/>
+              </a:spcBef>
+              <a:spcAft>
+                <a:spcPct val="0"/>
+              </a:spcAft>
+              <a:buClrTx/>
+              <a:buSzTx/>
+              <a:buFontTx/>
+              <a:buNone/>
+              <a:tabLst/>
+            </a:pPr>
+            <a:r>
+              <a:rPr kumimoji="0" lang="en-US" altLang="en-IL" b="0" i="0" u="none" strike="noStrike" cap="none" normalizeH="0" baseline="0" dirty="0">
+                <a:ln>
+                  <a:noFill/>
+                </a:ln>
+                <a:solidFill>
+                  <a:schemeClr val="tx1"/>
+                </a:solidFill>
+                <a:effectLst/>
+                <a:latin typeface="Calibri" panose="020F0502020204030204" pitchFamily="34" charset="0"/>
+                <a:ea typeface="Yu Gothic" panose="020B0400000000000000" pitchFamily="34" charset="-128"/>
+                <a:cs typeface="Arial" panose="020B0604020202020204" pitchFamily="34" charset="0"/>
+              </a:rPr>
+              <a:t>A2C</a:t>
+            </a:r>
+            <a:endParaRPr kumimoji="0" lang="en-IL" altLang="en-IL" sz="4000" b="0" i="0" u="none" strike="noStrike" cap="none" normalizeH="0" baseline="0" dirty="0">
+              <a:ln>
+                <a:noFill/>
+              </a:ln>
+              <a:solidFill>
+                <a:schemeClr val="tx1"/>
+              </a:solidFill>
+              <a:effectLst/>
+              <a:latin typeface="Arial" panose="020B0604020202020204" pitchFamily="34" charset="0"/>
+            </a:endParaRPr>
+          </a:p>
+        </p:txBody>
+      </p:sp>
+      <p:sp>
+        <p:nvSpPr>
+          <p:cNvPr id="3" name="Rectangle 2">
+            <a:extLst>
+              <a:ext uri="{FF2B5EF4-FFF2-40B4-BE49-F238E27FC236}">
+                <a16:creationId xmlns:a16="http://schemas.microsoft.com/office/drawing/2014/main" id="{B4C09A88-5F98-C840-2E68-5720BEC0681D}"/>
+              </a:ext>
+            </a:extLst>
+          </p:cNvPr>
+          <p:cNvSpPr/>
+          <p:nvPr/>
+        </p:nvSpPr>
+        <p:spPr>
+          <a:xfrm>
+            <a:off x="2478179" y="117618"/>
+            <a:ext cx="3385068" cy="466687"/>
+          </a:xfrm>
+          <a:prstGeom prst="rect">
+            <a:avLst/>
+          </a:prstGeom>
+          <a:solidFill>
+            <a:schemeClr val="accent2">
+              <a:lumMod val="40000"/>
+              <a:lumOff val="60000"/>
+            </a:schemeClr>
+          </a:solidFill>
+        </p:spPr>
+        <p:style>
+          <a:lnRef idx="2">
+            <a:schemeClr val="accent1">
+              <a:shade val="15000"/>
+            </a:schemeClr>
+          </a:lnRef>
+          <a:fillRef idx="1">
+            <a:schemeClr val="accent1"/>
+          </a:fillRef>
+          <a:effectRef idx="0">
+            <a:schemeClr val="accent1"/>
+          </a:effectRef>
+          <a:fontRef idx="minor">
+            <a:schemeClr val="lt1"/>
+          </a:fontRef>
+        </p:style>
+        <p:txBody>
+          <a:bodyPr rtlCol="0" anchor="ctr"/>
+          <a:lstStyle/>
+          <a:p>
+            <a:pPr algn="ctr"/>
+            <a:r>
+              <a:rPr lang="en-US" dirty="0">
+                <a:solidFill>
+                  <a:schemeClr val="tx1"/>
+                </a:solidFill>
+              </a:rPr>
+              <a:t>Folders Structure</a:t>
+            </a:r>
+            <a:endParaRPr lang="en-IL" dirty="0">
+              <a:solidFill>
+                <a:schemeClr val="tx1"/>
+              </a:solidFill>
+            </a:endParaRPr>
+          </a:p>
+        </p:txBody>
+      </p:sp>
+      <p:sp>
+        <p:nvSpPr>
+          <p:cNvPr id="4" name="AutoShape 13">
+            <a:extLst>
+              <a:ext uri="{FF2B5EF4-FFF2-40B4-BE49-F238E27FC236}">
+                <a16:creationId xmlns:a16="http://schemas.microsoft.com/office/drawing/2014/main" id="{417BBC80-527E-A9B3-A84D-141B4841DB55}"/>
+              </a:ext>
+            </a:extLst>
+          </p:cNvPr>
+          <p:cNvSpPr>
+            <a:spLocks noChangeArrowheads="1"/>
+          </p:cNvSpPr>
+          <p:nvPr/>
+        </p:nvSpPr>
+        <p:spPr bwMode="auto">
+          <a:xfrm>
+            <a:off x="1298448" y="1842973"/>
+            <a:ext cx="832104" cy="305112"/>
+          </a:xfrm>
+          <a:prstGeom prst="roundRect">
+            <a:avLst>
+              <a:gd name="adj" fmla="val 16667"/>
+            </a:avLst>
+          </a:prstGeom>
+          <a:solidFill>
+            <a:schemeClr val="bg1"/>
+          </a:solidFill>
+          <a:ln w="12700">
+            <a:solidFill>
+              <a:srgbClr val="09101D"/>
+            </a:solidFill>
+            <a:miter lim="800000"/>
+            <a:headEnd/>
+            <a:tailEnd/>
+          </a:ln>
+        </p:spPr>
+        <p:txBody>
+          <a:bodyPr vert="horz" wrap="square" lIns="91440" tIns="45720" rIns="91440" bIns="45720" numCol="1" anchor="ctr" anchorCtr="0" compatLnSpc="1">
+            <a:prstTxWarp prst="textNoShape">
+              <a:avLst/>
+            </a:prstTxWarp>
+          </a:bodyPr>
+          <a:lstStyle/>
+          <a:p>
+            <a:pPr marL="0" marR="0" lvl="0" indent="0" algn="ctr" defTabSz="914400" rtl="0" eaLnBrk="0" fontAlgn="base" latinLnBrk="0" hangingPunct="0">
+              <a:lnSpc>
+                <a:spcPct val="100000"/>
+              </a:lnSpc>
+              <a:spcBef>
+                <a:spcPct val="0"/>
+              </a:spcBef>
+              <a:spcAft>
+                <a:spcPct val="0"/>
+              </a:spcAft>
+              <a:buClrTx/>
+              <a:buSzTx/>
+              <a:buFontTx/>
+              <a:buNone/>
+              <a:tabLst/>
+            </a:pPr>
+            <a:r>
+              <a:rPr kumimoji="0" lang="en-US" altLang="en-IL" b="0" i="0" u="none" strike="noStrike" cap="none" normalizeH="0" baseline="0" dirty="0">
+                <a:ln>
+                  <a:noFill/>
+                </a:ln>
+                <a:solidFill>
+                  <a:schemeClr val="tx1"/>
+                </a:solidFill>
+                <a:effectLst/>
+                <a:latin typeface="Calibri" panose="020F0502020204030204" pitchFamily="34" charset="0"/>
+                <a:ea typeface="Yu Gothic" panose="020B0400000000000000" pitchFamily="34" charset="-128"/>
+                <a:cs typeface="Arial" panose="020B0604020202020204" pitchFamily="34" charset="0"/>
+              </a:rPr>
+              <a:t>Server</a:t>
+            </a:r>
+            <a:endParaRPr kumimoji="0" lang="en-IL" altLang="en-IL" sz="4000" b="0" i="0" u="none" strike="noStrike" cap="none" normalizeH="0" baseline="0" dirty="0">
+              <a:ln>
+                <a:noFill/>
+              </a:ln>
+              <a:solidFill>
+                <a:schemeClr val="tx1"/>
+              </a:solidFill>
+              <a:effectLst/>
+              <a:latin typeface="Arial" panose="020B0604020202020204" pitchFamily="34" charset="0"/>
+            </a:endParaRPr>
+          </a:p>
+        </p:txBody>
+      </p:sp>
+      <p:sp>
+        <p:nvSpPr>
+          <p:cNvPr id="6" name="AutoShape 13">
+            <a:extLst>
+              <a:ext uri="{FF2B5EF4-FFF2-40B4-BE49-F238E27FC236}">
+                <a16:creationId xmlns:a16="http://schemas.microsoft.com/office/drawing/2014/main" id="{EFA49FBE-0BEA-95E9-179B-C50C986B99F4}"/>
+              </a:ext>
+            </a:extLst>
+          </p:cNvPr>
+          <p:cNvSpPr>
+            <a:spLocks noChangeArrowheads="1"/>
+          </p:cNvSpPr>
+          <p:nvPr/>
+        </p:nvSpPr>
+        <p:spPr bwMode="auto">
+          <a:xfrm>
+            <a:off x="1280160" y="1100440"/>
+            <a:ext cx="761080" cy="305112"/>
+          </a:xfrm>
+          <a:prstGeom prst="roundRect">
+            <a:avLst>
+              <a:gd name="adj" fmla="val 16667"/>
+            </a:avLst>
+          </a:prstGeom>
+          <a:solidFill>
+            <a:schemeClr val="bg1"/>
+          </a:solidFill>
+          <a:ln w="12700">
+            <a:solidFill>
+              <a:srgbClr val="09101D"/>
+            </a:solidFill>
+            <a:miter lim="800000"/>
+            <a:headEnd/>
+            <a:tailEnd/>
+          </a:ln>
+        </p:spPr>
+        <p:txBody>
+          <a:bodyPr vert="horz" wrap="square" lIns="91440" tIns="45720" rIns="91440" bIns="45720" numCol="1" anchor="ctr" anchorCtr="0" compatLnSpc="1">
+            <a:prstTxWarp prst="textNoShape">
+              <a:avLst/>
+            </a:prstTxWarp>
+          </a:bodyPr>
+          <a:lstStyle/>
+          <a:p>
+            <a:pPr marL="0" marR="0" lvl="0" indent="0" algn="ctr" defTabSz="914400" rtl="0" eaLnBrk="0" fontAlgn="base" latinLnBrk="0" hangingPunct="0">
+              <a:lnSpc>
+                <a:spcPct val="100000"/>
+              </a:lnSpc>
+              <a:spcBef>
+                <a:spcPct val="0"/>
+              </a:spcBef>
+              <a:spcAft>
+                <a:spcPct val="0"/>
+              </a:spcAft>
+              <a:buClrTx/>
+              <a:buSzTx/>
+              <a:buFontTx/>
+              <a:buNone/>
+              <a:tabLst/>
+            </a:pPr>
+            <a:r>
+              <a:rPr kumimoji="0" lang="en-US" altLang="en-IL" b="0" i="0" u="none" strike="noStrike" cap="none" normalizeH="0" baseline="0" dirty="0">
+                <a:ln>
+                  <a:noFill/>
+                </a:ln>
+                <a:solidFill>
+                  <a:schemeClr val="tx1"/>
+                </a:solidFill>
+                <a:effectLst/>
+                <a:latin typeface="Calibri" panose="020F0502020204030204" pitchFamily="34" charset="0"/>
+                <a:ea typeface="Yu Gothic" panose="020B0400000000000000" pitchFamily="34" charset="-128"/>
+                <a:cs typeface="Arial" panose="020B0604020202020204" pitchFamily="34" charset="0"/>
+              </a:rPr>
+              <a:t>Client</a:t>
+            </a:r>
+            <a:endParaRPr kumimoji="0" lang="en-IL" altLang="en-IL" sz="4000" b="0" i="0" u="none" strike="noStrike" cap="none" normalizeH="0" baseline="0" dirty="0">
+              <a:ln>
+                <a:noFill/>
+              </a:ln>
+              <a:solidFill>
+                <a:schemeClr val="tx1"/>
+              </a:solidFill>
+              <a:effectLst/>
+              <a:latin typeface="Arial" panose="020B0604020202020204" pitchFamily="34" charset="0"/>
+            </a:endParaRPr>
+          </a:p>
+        </p:txBody>
+      </p:sp>
+      <p:sp>
+        <p:nvSpPr>
+          <p:cNvPr id="7" name="AutoShape 13">
+            <a:extLst>
+              <a:ext uri="{FF2B5EF4-FFF2-40B4-BE49-F238E27FC236}">
+                <a16:creationId xmlns:a16="http://schemas.microsoft.com/office/drawing/2014/main" id="{0A62B873-9219-6D42-FED9-1EFD25F683FB}"/>
+              </a:ext>
+            </a:extLst>
+          </p:cNvPr>
+          <p:cNvSpPr>
+            <a:spLocks noChangeArrowheads="1"/>
+          </p:cNvSpPr>
+          <p:nvPr/>
+        </p:nvSpPr>
+        <p:spPr bwMode="auto">
+          <a:xfrm>
+            <a:off x="1283208" y="6338772"/>
+            <a:ext cx="1675482" cy="359441"/>
+          </a:xfrm>
+          <a:prstGeom prst="roundRect">
+            <a:avLst>
+              <a:gd name="adj" fmla="val 16667"/>
+            </a:avLst>
+          </a:prstGeom>
+          <a:solidFill>
+            <a:schemeClr val="bg1"/>
+          </a:solidFill>
+          <a:ln w="12700">
+            <a:solidFill>
+              <a:srgbClr val="09101D"/>
+            </a:solidFill>
+            <a:miter lim="800000"/>
+            <a:headEnd/>
+            <a:tailEnd/>
+          </a:ln>
+        </p:spPr>
+        <p:txBody>
+          <a:bodyPr vert="horz" wrap="square" lIns="91440" tIns="45720" rIns="91440" bIns="45720" numCol="1" anchor="ctr" anchorCtr="0" compatLnSpc="1">
+            <a:prstTxWarp prst="textNoShape">
+              <a:avLst/>
+            </a:prstTxWarp>
+          </a:bodyPr>
+          <a:lstStyle/>
+          <a:p>
+            <a:pPr algn="ctr" eaLnBrk="0" fontAlgn="base" hangingPunct="0">
+              <a:spcBef>
+                <a:spcPct val="0"/>
+              </a:spcBef>
+              <a:spcAft>
+                <a:spcPct val="0"/>
+              </a:spcAft>
+            </a:pPr>
+            <a:r>
+              <a:rPr lang="en-US" altLang="en-IL" dirty="0">
+                <a:latin typeface="Calibri" panose="020F0502020204030204" pitchFamily="34" charset="0"/>
+                <a:ea typeface="Yu Gothic" panose="020B0400000000000000" pitchFamily="34" charset="-128"/>
+                <a:cs typeface="Arial" panose="020B0604020202020204" pitchFamily="34" charset="0"/>
+              </a:rPr>
+              <a:t>Documentation</a:t>
+            </a:r>
+            <a:endParaRPr lang="en-IL" altLang="en-IL" dirty="0">
+              <a:latin typeface="Calibri" panose="020F0502020204030204" pitchFamily="34" charset="0"/>
+              <a:ea typeface="Yu Gothic" panose="020B0400000000000000" pitchFamily="34" charset="-128"/>
+              <a:cs typeface="Arial" panose="020B0604020202020204" pitchFamily="34" charset="0"/>
+            </a:endParaRPr>
+          </a:p>
+        </p:txBody>
+      </p:sp>
+      <p:cxnSp>
+        <p:nvCxnSpPr>
+          <p:cNvPr id="9" name="Straight Connector 8">
+            <a:extLst>
+              <a:ext uri="{FF2B5EF4-FFF2-40B4-BE49-F238E27FC236}">
+                <a16:creationId xmlns:a16="http://schemas.microsoft.com/office/drawing/2014/main" id="{57E11C29-6CF2-2E2F-E747-35691FFFFBC2}"/>
+              </a:ext>
+            </a:extLst>
+          </p:cNvPr>
+          <p:cNvCxnSpPr>
+            <a:cxnSpLocks/>
+          </p:cNvCxnSpPr>
+          <p:nvPr/>
+        </p:nvCxnSpPr>
+        <p:spPr>
+          <a:xfrm>
+            <a:off x="634066" y="996606"/>
+            <a:ext cx="0" cy="5500327"/>
+          </a:xfrm>
+          <a:prstGeom prst="line">
+            <a:avLst/>
+          </a:prstGeom>
+        </p:spPr>
+        <p:style>
+          <a:lnRef idx="2">
+            <a:schemeClr val="accent1"/>
+          </a:lnRef>
+          <a:fillRef idx="0">
+            <a:schemeClr val="accent1"/>
+          </a:fillRef>
+          <a:effectRef idx="1">
+            <a:schemeClr val="accent1"/>
+          </a:effectRef>
+          <a:fontRef idx="minor">
+            <a:schemeClr val="tx1"/>
+          </a:fontRef>
+        </p:style>
+      </p:cxnSp>
+      <p:cxnSp>
+        <p:nvCxnSpPr>
+          <p:cNvPr id="10" name="Straight Connector 9">
+            <a:extLst>
+              <a:ext uri="{FF2B5EF4-FFF2-40B4-BE49-F238E27FC236}">
+                <a16:creationId xmlns:a16="http://schemas.microsoft.com/office/drawing/2014/main" id="{8E575987-DD26-185B-E83A-9C5F84B0A4A3}"/>
+              </a:ext>
+            </a:extLst>
+          </p:cNvPr>
+          <p:cNvCxnSpPr>
+            <a:cxnSpLocks/>
+          </p:cNvCxnSpPr>
+          <p:nvPr/>
+        </p:nvCxnSpPr>
+        <p:spPr>
+          <a:xfrm>
+            <a:off x="634066" y="1280160"/>
+            <a:ext cx="646094" cy="9768"/>
+          </a:xfrm>
+          <a:prstGeom prst="line">
+            <a:avLst/>
+          </a:prstGeom>
+        </p:spPr>
+        <p:style>
+          <a:lnRef idx="2">
+            <a:schemeClr val="accent1"/>
+          </a:lnRef>
+          <a:fillRef idx="0">
+            <a:schemeClr val="accent1"/>
+          </a:fillRef>
+          <a:effectRef idx="1">
+            <a:schemeClr val="accent1"/>
+          </a:effectRef>
+          <a:fontRef idx="minor">
+            <a:schemeClr val="tx1"/>
+          </a:fontRef>
+        </p:style>
+      </p:cxnSp>
+      <p:cxnSp>
+        <p:nvCxnSpPr>
+          <p:cNvPr id="20" name="Straight Connector 19">
+            <a:extLst>
+              <a:ext uri="{FF2B5EF4-FFF2-40B4-BE49-F238E27FC236}">
+                <a16:creationId xmlns:a16="http://schemas.microsoft.com/office/drawing/2014/main" id="{63BA3F4B-DFBF-9FDB-CC15-5D15E7301C4E}"/>
+              </a:ext>
+            </a:extLst>
+          </p:cNvPr>
+          <p:cNvCxnSpPr>
+            <a:cxnSpLocks/>
+          </p:cNvCxnSpPr>
+          <p:nvPr/>
+        </p:nvCxnSpPr>
+        <p:spPr>
+          <a:xfrm>
+            <a:off x="640162" y="2008632"/>
+            <a:ext cx="658286" cy="0"/>
+          </a:xfrm>
+          <a:prstGeom prst="line">
+            <a:avLst/>
+          </a:prstGeom>
+        </p:spPr>
+        <p:style>
+          <a:lnRef idx="2">
+            <a:schemeClr val="accent1"/>
+          </a:lnRef>
+          <a:fillRef idx="0">
+            <a:schemeClr val="accent1"/>
+          </a:fillRef>
+          <a:effectRef idx="1">
+            <a:schemeClr val="accent1"/>
+          </a:effectRef>
+          <a:fontRef idx="minor">
+            <a:schemeClr val="tx1"/>
+          </a:fontRef>
+        </p:style>
+      </p:cxnSp>
+      <p:cxnSp>
+        <p:nvCxnSpPr>
+          <p:cNvPr id="22" name="Straight Connector 21">
+            <a:extLst>
+              <a:ext uri="{FF2B5EF4-FFF2-40B4-BE49-F238E27FC236}">
+                <a16:creationId xmlns:a16="http://schemas.microsoft.com/office/drawing/2014/main" id="{83E70F1E-D267-7CAE-D953-D335D1601B47}"/>
+              </a:ext>
+            </a:extLst>
+          </p:cNvPr>
+          <p:cNvCxnSpPr>
+            <a:cxnSpLocks/>
+          </p:cNvCxnSpPr>
+          <p:nvPr/>
+        </p:nvCxnSpPr>
+        <p:spPr>
+          <a:xfrm>
+            <a:off x="624922" y="6496933"/>
+            <a:ext cx="658286" cy="0"/>
+          </a:xfrm>
+          <a:prstGeom prst="line">
+            <a:avLst/>
+          </a:prstGeom>
+        </p:spPr>
+        <p:style>
+          <a:lnRef idx="2">
+            <a:schemeClr val="accent1"/>
+          </a:lnRef>
+          <a:fillRef idx="0">
+            <a:schemeClr val="accent1"/>
+          </a:fillRef>
+          <a:effectRef idx="1">
+            <a:schemeClr val="accent1"/>
+          </a:effectRef>
+          <a:fontRef idx="minor">
+            <a:schemeClr val="tx1"/>
+          </a:fontRef>
+        </p:style>
+      </p:cxnSp>
+      <p:sp>
+        <p:nvSpPr>
+          <p:cNvPr id="24" name="AutoShape 13">
+            <a:extLst>
+              <a:ext uri="{FF2B5EF4-FFF2-40B4-BE49-F238E27FC236}">
+                <a16:creationId xmlns:a16="http://schemas.microsoft.com/office/drawing/2014/main" id="{7B32EEA7-56D5-EB16-EF79-1E4E9A955A3E}"/>
+              </a:ext>
+            </a:extLst>
+          </p:cNvPr>
+          <p:cNvSpPr>
+            <a:spLocks noChangeArrowheads="1"/>
+          </p:cNvSpPr>
+          <p:nvPr/>
+        </p:nvSpPr>
+        <p:spPr bwMode="auto">
+          <a:xfrm>
+            <a:off x="2235397" y="2419045"/>
+            <a:ext cx="1495356" cy="359440"/>
+          </a:xfrm>
+          <a:prstGeom prst="roundRect">
+            <a:avLst>
+              <a:gd name="adj" fmla="val 16667"/>
+            </a:avLst>
+          </a:prstGeom>
+          <a:solidFill>
+            <a:schemeClr val="bg1"/>
+          </a:solidFill>
+          <a:ln w="12700">
+            <a:solidFill>
+              <a:srgbClr val="09101D"/>
+            </a:solidFill>
+            <a:miter lim="800000"/>
+            <a:headEnd/>
+            <a:tailEnd/>
+          </a:ln>
+        </p:spPr>
+        <p:txBody>
+          <a:bodyPr vert="horz" wrap="square" lIns="91440" tIns="45720" rIns="91440" bIns="45720" numCol="1" anchor="ctr" anchorCtr="0" compatLnSpc="1">
+            <a:prstTxWarp prst="textNoShape">
+              <a:avLst/>
+            </a:prstTxWarp>
+          </a:bodyPr>
+          <a:lstStyle/>
+          <a:p>
+            <a:pPr lvl="0" algn="ctr" eaLnBrk="0" fontAlgn="base" hangingPunct="0">
+              <a:spcBef>
+                <a:spcPct val="0"/>
+              </a:spcBef>
+              <a:spcAft>
+                <a:spcPct val="0"/>
+              </a:spcAft>
+            </a:pPr>
+            <a:r>
+              <a:rPr lang="en-US" altLang="en-IL" dirty="0">
+                <a:latin typeface="Calibri" panose="020F0502020204030204" pitchFamily="34" charset="0"/>
+                <a:ea typeface="Yu Gothic" panose="020B0400000000000000" pitchFamily="34" charset="-128"/>
+                <a:cs typeface="Arial" panose="020B0604020202020204" pitchFamily="34" charset="0"/>
+              </a:rPr>
+              <a:t>A2C.CRM.Api</a:t>
+            </a:r>
+            <a:endParaRPr kumimoji="0" lang="en-IL" altLang="en-IL" sz="4000" b="0" i="0" u="none" strike="noStrike" cap="none" normalizeH="0" baseline="0" dirty="0">
+              <a:ln>
+                <a:noFill/>
+              </a:ln>
+              <a:solidFill>
+                <a:schemeClr val="tx1"/>
+              </a:solidFill>
+              <a:effectLst/>
+              <a:latin typeface="Arial" panose="020B0604020202020204" pitchFamily="34" charset="0"/>
+            </a:endParaRPr>
+          </a:p>
+        </p:txBody>
+      </p:sp>
+      <p:cxnSp>
+        <p:nvCxnSpPr>
+          <p:cNvPr id="26" name="Straight Connector 25">
+            <a:extLst>
+              <a:ext uri="{FF2B5EF4-FFF2-40B4-BE49-F238E27FC236}">
+                <a16:creationId xmlns:a16="http://schemas.microsoft.com/office/drawing/2014/main" id="{5890FA60-DB45-EE3E-82FB-D028DB10995B}"/>
+              </a:ext>
+            </a:extLst>
+          </p:cNvPr>
+          <p:cNvCxnSpPr>
+            <a:cxnSpLocks/>
+          </p:cNvCxnSpPr>
+          <p:nvPr/>
+        </p:nvCxnSpPr>
+        <p:spPr>
+          <a:xfrm>
+            <a:off x="1702914" y="2598764"/>
+            <a:ext cx="532482" cy="0"/>
+          </a:xfrm>
+          <a:prstGeom prst="line">
+            <a:avLst/>
+          </a:prstGeom>
+        </p:spPr>
+        <p:style>
+          <a:lnRef idx="2">
+            <a:schemeClr val="accent1"/>
+          </a:lnRef>
+          <a:fillRef idx="0">
+            <a:schemeClr val="accent1"/>
+          </a:fillRef>
+          <a:effectRef idx="1">
+            <a:schemeClr val="accent1"/>
+          </a:effectRef>
+          <a:fontRef idx="minor">
+            <a:schemeClr val="tx1"/>
+          </a:fontRef>
+        </p:style>
+      </p:cxnSp>
+      <p:cxnSp>
+        <p:nvCxnSpPr>
+          <p:cNvPr id="27" name="Straight Connector 26">
+            <a:extLst>
+              <a:ext uri="{FF2B5EF4-FFF2-40B4-BE49-F238E27FC236}">
+                <a16:creationId xmlns:a16="http://schemas.microsoft.com/office/drawing/2014/main" id="{61B0946D-8097-6B78-E2CF-708C835A14FB}"/>
+              </a:ext>
+            </a:extLst>
+          </p:cNvPr>
+          <p:cNvCxnSpPr>
+            <a:cxnSpLocks/>
+          </p:cNvCxnSpPr>
+          <p:nvPr/>
+        </p:nvCxnSpPr>
+        <p:spPr>
+          <a:xfrm>
+            <a:off x="1702914" y="2156693"/>
+            <a:ext cx="0" cy="442071"/>
+          </a:xfrm>
+          <a:prstGeom prst="line">
+            <a:avLst/>
+          </a:prstGeom>
+        </p:spPr>
+        <p:style>
+          <a:lnRef idx="2">
+            <a:schemeClr val="accent1"/>
+          </a:lnRef>
+          <a:fillRef idx="0">
+            <a:schemeClr val="accent1"/>
+          </a:fillRef>
+          <a:effectRef idx="1">
+            <a:schemeClr val="accent1"/>
+          </a:effectRef>
+          <a:fontRef idx="minor">
+            <a:schemeClr val="tx1"/>
+          </a:fontRef>
+        </p:style>
+      </p:cxnSp>
+      <p:cxnSp>
+        <p:nvCxnSpPr>
+          <p:cNvPr id="31" name="Straight Connector 30">
+            <a:extLst>
+              <a:ext uri="{FF2B5EF4-FFF2-40B4-BE49-F238E27FC236}">
+                <a16:creationId xmlns:a16="http://schemas.microsoft.com/office/drawing/2014/main" id="{B11EEA41-506E-A630-D972-503CEA2836BB}"/>
+              </a:ext>
+            </a:extLst>
+          </p:cNvPr>
+          <p:cNvCxnSpPr>
+            <a:cxnSpLocks/>
+          </p:cNvCxnSpPr>
+          <p:nvPr/>
+        </p:nvCxnSpPr>
+        <p:spPr>
+          <a:xfrm>
+            <a:off x="3005091" y="2778485"/>
+            <a:ext cx="0" cy="2370973"/>
+          </a:xfrm>
+          <a:prstGeom prst="line">
+            <a:avLst/>
+          </a:prstGeom>
+        </p:spPr>
+        <p:style>
+          <a:lnRef idx="2">
+            <a:schemeClr val="accent1"/>
+          </a:lnRef>
+          <a:fillRef idx="0">
+            <a:schemeClr val="accent1"/>
+          </a:fillRef>
+          <a:effectRef idx="1">
+            <a:schemeClr val="accent1"/>
+          </a:effectRef>
+          <a:fontRef idx="minor">
+            <a:schemeClr val="tx1"/>
+          </a:fontRef>
+        </p:style>
+      </p:cxnSp>
+      <p:sp>
+        <p:nvSpPr>
+          <p:cNvPr id="36" name="AutoShape 13">
+            <a:extLst>
+              <a:ext uri="{FF2B5EF4-FFF2-40B4-BE49-F238E27FC236}">
+                <a16:creationId xmlns:a16="http://schemas.microsoft.com/office/drawing/2014/main" id="{CCF9E2EC-1E7B-DB39-289C-77C8A1C62207}"/>
+              </a:ext>
+            </a:extLst>
+          </p:cNvPr>
+          <p:cNvSpPr>
+            <a:spLocks noChangeArrowheads="1"/>
+          </p:cNvSpPr>
+          <p:nvPr/>
+        </p:nvSpPr>
+        <p:spPr bwMode="auto">
+          <a:xfrm>
+            <a:off x="3931920" y="2875013"/>
+            <a:ext cx="1360853" cy="343674"/>
+          </a:xfrm>
+          <a:prstGeom prst="roundRect">
+            <a:avLst>
+              <a:gd name="adj" fmla="val 16667"/>
+            </a:avLst>
+          </a:prstGeom>
+          <a:solidFill>
+            <a:schemeClr val="bg1"/>
+          </a:solidFill>
+          <a:ln w="12700">
+            <a:solidFill>
+              <a:srgbClr val="09101D"/>
+            </a:solidFill>
+            <a:miter lim="800000"/>
+            <a:headEnd/>
+            <a:tailEnd/>
+          </a:ln>
+        </p:spPr>
+        <p:txBody>
+          <a:bodyPr vert="horz" wrap="square" lIns="91440" tIns="45720" rIns="91440" bIns="45720" numCol="1" anchor="ctr" anchorCtr="0" compatLnSpc="1">
+            <a:prstTxWarp prst="textNoShape">
+              <a:avLst/>
+            </a:prstTxWarp>
+          </a:bodyPr>
+          <a:lstStyle/>
+          <a:p>
+            <a:pPr marL="0" marR="0" lvl="0" indent="0" algn="ctr" defTabSz="914400" rtl="0" eaLnBrk="0" fontAlgn="base" latinLnBrk="0" hangingPunct="0">
+              <a:lnSpc>
+                <a:spcPct val="100000"/>
+              </a:lnSpc>
+              <a:spcBef>
+                <a:spcPct val="0"/>
+              </a:spcBef>
+              <a:spcAft>
+                <a:spcPct val="0"/>
+              </a:spcAft>
+              <a:buClrTx/>
+              <a:buSzTx/>
+              <a:buFontTx/>
+              <a:buNone/>
+              <a:tabLst/>
+            </a:pPr>
+            <a:r>
+              <a:rPr kumimoji="0" lang="en-US" altLang="en-IL" b="0" i="0" u="none" strike="noStrike" cap="none" normalizeH="0" baseline="0" dirty="0">
+                <a:ln>
+                  <a:noFill/>
+                </a:ln>
+                <a:solidFill>
+                  <a:schemeClr val="tx1"/>
+                </a:solidFill>
+                <a:effectLst/>
+                <a:latin typeface="Calibri" panose="020F0502020204030204" pitchFamily="34" charset="0"/>
+                <a:ea typeface="Yu Gothic" panose="020B0400000000000000" pitchFamily="34" charset="-128"/>
+                <a:cs typeface="Arial" panose="020B0604020202020204" pitchFamily="34" charset="0"/>
+              </a:rPr>
+              <a:t>Controllers</a:t>
+            </a:r>
+            <a:endParaRPr kumimoji="0" lang="en-IL" altLang="en-IL" sz="4000" b="0" i="0" u="none" strike="noStrike" cap="none" normalizeH="0" baseline="0" dirty="0">
+              <a:ln>
+                <a:noFill/>
+              </a:ln>
+              <a:solidFill>
+                <a:schemeClr val="tx1"/>
+              </a:solidFill>
+              <a:effectLst/>
+              <a:latin typeface="Arial" panose="020B0604020202020204" pitchFamily="34" charset="0"/>
+            </a:endParaRPr>
+          </a:p>
+        </p:txBody>
+      </p:sp>
+      <p:cxnSp>
+        <p:nvCxnSpPr>
+          <p:cNvPr id="37" name="Straight Connector 36">
+            <a:extLst>
+              <a:ext uri="{FF2B5EF4-FFF2-40B4-BE49-F238E27FC236}">
+                <a16:creationId xmlns:a16="http://schemas.microsoft.com/office/drawing/2014/main" id="{FA71ECA9-6020-2668-0F61-288DC1B9B85A}"/>
+              </a:ext>
+            </a:extLst>
+          </p:cNvPr>
+          <p:cNvCxnSpPr>
+            <a:cxnSpLocks/>
+          </p:cNvCxnSpPr>
+          <p:nvPr/>
+        </p:nvCxnSpPr>
+        <p:spPr>
+          <a:xfrm>
+            <a:off x="3005091" y="3052916"/>
+            <a:ext cx="926829" cy="0"/>
+          </a:xfrm>
+          <a:prstGeom prst="line">
+            <a:avLst/>
+          </a:prstGeom>
+        </p:spPr>
+        <p:style>
+          <a:lnRef idx="2">
+            <a:schemeClr val="accent1"/>
+          </a:lnRef>
+          <a:fillRef idx="0">
+            <a:schemeClr val="accent1"/>
+          </a:fillRef>
+          <a:effectRef idx="1">
+            <a:schemeClr val="accent1"/>
+          </a:effectRef>
+          <a:fontRef idx="minor">
+            <a:schemeClr val="tx1"/>
+          </a:fontRef>
+        </p:style>
+      </p:cxnSp>
+      <p:sp>
+        <p:nvSpPr>
+          <p:cNvPr id="39" name="AutoShape 13">
+            <a:extLst>
+              <a:ext uri="{FF2B5EF4-FFF2-40B4-BE49-F238E27FC236}">
+                <a16:creationId xmlns:a16="http://schemas.microsoft.com/office/drawing/2014/main" id="{8F8E0109-A987-3884-2AAF-A55E71AC3CAD}"/>
+              </a:ext>
+            </a:extLst>
+          </p:cNvPr>
+          <p:cNvSpPr>
+            <a:spLocks noChangeArrowheads="1"/>
+          </p:cNvSpPr>
+          <p:nvPr/>
+        </p:nvSpPr>
+        <p:spPr bwMode="auto">
+          <a:xfrm>
+            <a:off x="3931920" y="3293553"/>
+            <a:ext cx="1360853" cy="343674"/>
+          </a:xfrm>
+          <a:prstGeom prst="roundRect">
+            <a:avLst>
+              <a:gd name="adj" fmla="val 16667"/>
+            </a:avLst>
+          </a:prstGeom>
+          <a:solidFill>
+            <a:schemeClr val="bg1"/>
+          </a:solidFill>
+          <a:ln w="12700">
+            <a:solidFill>
+              <a:srgbClr val="09101D"/>
+            </a:solidFill>
+            <a:miter lim="800000"/>
+            <a:headEnd/>
+            <a:tailEnd/>
+          </a:ln>
+        </p:spPr>
+        <p:txBody>
+          <a:bodyPr vert="horz" wrap="square" lIns="91440" tIns="45720" rIns="91440" bIns="45720" numCol="1" anchor="ctr" anchorCtr="0" compatLnSpc="1">
+            <a:prstTxWarp prst="textNoShape">
+              <a:avLst/>
+            </a:prstTxWarp>
+          </a:bodyPr>
+          <a:lstStyle/>
+          <a:p>
+            <a:pPr marL="0" marR="0" lvl="0" indent="0" algn="ctr" defTabSz="914400" rtl="0" eaLnBrk="0" fontAlgn="base" latinLnBrk="0" hangingPunct="0">
+              <a:lnSpc>
+                <a:spcPct val="100000"/>
+              </a:lnSpc>
+              <a:spcBef>
+                <a:spcPct val="0"/>
+              </a:spcBef>
+              <a:spcAft>
+                <a:spcPct val="0"/>
+              </a:spcAft>
+              <a:buClrTx/>
+              <a:buSzTx/>
+              <a:buFontTx/>
+              <a:buNone/>
+              <a:tabLst/>
+            </a:pPr>
+            <a:r>
+              <a:rPr kumimoji="0" lang="en-US" altLang="en-IL" b="0" i="0" u="none" strike="noStrike" cap="none" normalizeH="0" baseline="0" dirty="0">
+                <a:ln>
+                  <a:noFill/>
+                </a:ln>
+                <a:solidFill>
+                  <a:schemeClr val="tx1"/>
+                </a:solidFill>
+                <a:effectLst/>
+                <a:latin typeface="Calibri" panose="020F0502020204030204" pitchFamily="34" charset="0"/>
+                <a:ea typeface="Yu Gothic" panose="020B0400000000000000" pitchFamily="34" charset="-128"/>
+                <a:cs typeface="Arial" panose="020B0604020202020204" pitchFamily="34" charset="0"/>
+              </a:rPr>
+              <a:t>Data</a:t>
+            </a:r>
+            <a:endParaRPr kumimoji="0" lang="en-IL" altLang="en-IL" sz="4000" b="0" i="0" u="none" strike="noStrike" cap="none" normalizeH="0" baseline="0" dirty="0">
+              <a:ln>
+                <a:noFill/>
+              </a:ln>
+              <a:solidFill>
+                <a:schemeClr val="tx1"/>
+              </a:solidFill>
+              <a:effectLst/>
+              <a:latin typeface="Arial" panose="020B0604020202020204" pitchFamily="34" charset="0"/>
+            </a:endParaRPr>
+          </a:p>
+        </p:txBody>
+      </p:sp>
+      <p:cxnSp>
+        <p:nvCxnSpPr>
+          <p:cNvPr id="40" name="Straight Connector 39">
+            <a:extLst>
+              <a:ext uri="{FF2B5EF4-FFF2-40B4-BE49-F238E27FC236}">
+                <a16:creationId xmlns:a16="http://schemas.microsoft.com/office/drawing/2014/main" id="{F73FF06F-D158-D932-7EE8-5D76C7893249}"/>
+              </a:ext>
+            </a:extLst>
+          </p:cNvPr>
+          <p:cNvCxnSpPr>
+            <a:cxnSpLocks/>
+          </p:cNvCxnSpPr>
+          <p:nvPr/>
+        </p:nvCxnSpPr>
+        <p:spPr>
+          <a:xfrm>
+            <a:off x="3005091" y="3471456"/>
+            <a:ext cx="926829" cy="0"/>
+          </a:xfrm>
+          <a:prstGeom prst="line">
+            <a:avLst/>
+          </a:prstGeom>
+        </p:spPr>
+        <p:style>
+          <a:lnRef idx="2">
+            <a:schemeClr val="accent1"/>
+          </a:lnRef>
+          <a:fillRef idx="0">
+            <a:schemeClr val="accent1"/>
+          </a:fillRef>
+          <a:effectRef idx="1">
+            <a:schemeClr val="accent1"/>
+          </a:effectRef>
+          <a:fontRef idx="minor">
+            <a:schemeClr val="tx1"/>
+          </a:fontRef>
+        </p:style>
+      </p:cxnSp>
+      <p:sp>
+        <p:nvSpPr>
+          <p:cNvPr id="41" name="AutoShape 13">
+            <a:extLst>
+              <a:ext uri="{FF2B5EF4-FFF2-40B4-BE49-F238E27FC236}">
+                <a16:creationId xmlns:a16="http://schemas.microsoft.com/office/drawing/2014/main" id="{2A734496-13E5-C552-4657-6D89DA0A227F}"/>
+              </a:ext>
+            </a:extLst>
+          </p:cNvPr>
+          <p:cNvSpPr>
+            <a:spLocks noChangeArrowheads="1"/>
+          </p:cNvSpPr>
+          <p:nvPr/>
+        </p:nvSpPr>
+        <p:spPr bwMode="auto">
+          <a:xfrm>
+            <a:off x="3931920" y="3712731"/>
+            <a:ext cx="1360853" cy="343674"/>
+          </a:xfrm>
+          <a:prstGeom prst="roundRect">
+            <a:avLst>
+              <a:gd name="adj" fmla="val 16667"/>
+            </a:avLst>
+          </a:prstGeom>
+          <a:solidFill>
+            <a:schemeClr val="bg1"/>
+          </a:solidFill>
+          <a:ln w="12700">
+            <a:solidFill>
+              <a:srgbClr val="09101D"/>
+            </a:solidFill>
+            <a:miter lim="800000"/>
+            <a:headEnd/>
+            <a:tailEnd/>
+          </a:ln>
+        </p:spPr>
+        <p:txBody>
+          <a:bodyPr vert="horz" wrap="square" lIns="91440" tIns="45720" rIns="91440" bIns="45720" numCol="1" anchor="ctr" anchorCtr="0" compatLnSpc="1">
+            <a:prstTxWarp prst="textNoShape">
+              <a:avLst/>
+            </a:prstTxWarp>
+          </a:bodyPr>
+          <a:lstStyle/>
+          <a:p>
+            <a:pPr marL="0" marR="0" lvl="0" indent="0" algn="ctr" defTabSz="914400" rtl="0" eaLnBrk="0" fontAlgn="base" latinLnBrk="0" hangingPunct="0">
+              <a:lnSpc>
+                <a:spcPct val="100000"/>
+              </a:lnSpc>
+              <a:spcBef>
+                <a:spcPct val="0"/>
+              </a:spcBef>
+              <a:spcAft>
+                <a:spcPct val="0"/>
+              </a:spcAft>
+              <a:buClrTx/>
+              <a:buSzTx/>
+              <a:buFontTx/>
+              <a:buNone/>
+              <a:tabLst/>
+            </a:pPr>
+            <a:r>
+              <a:rPr kumimoji="0" lang="en-US" altLang="en-IL" b="0" i="0" u="none" strike="noStrike" cap="none" normalizeH="0" baseline="0" dirty="0">
+                <a:ln>
+                  <a:noFill/>
+                </a:ln>
+                <a:solidFill>
+                  <a:schemeClr val="tx1"/>
+                </a:solidFill>
+                <a:effectLst/>
+                <a:latin typeface="Calibri" panose="020F0502020204030204" pitchFamily="34" charset="0"/>
+                <a:ea typeface="Yu Gothic" panose="020B0400000000000000" pitchFamily="34" charset="-128"/>
+                <a:cs typeface="Arial" panose="020B0604020202020204" pitchFamily="34" charset="0"/>
+              </a:rPr>
+              <a:t>DTOs</a:t>
+            </a:r>
+            <a:endParaRPr kumimoji="0" lang="en-IL" altLang="en-IL" sz="4000" b="0" i="0" u="none" strike="noStrike" cap="none" normalizeH="0" baseline="0" dirty="0">
+              <a:ln>
+                <a:noFill/>
+              </a:ln>
+              <a:solidFill>
+                <a:schemeClr val="tx1"/>
+              </a:solidFill>
+              <a:effectLst/>
+              <a:latin typeface="Arial" panose="020B0604020202020204" pitchFamily="34" charset="0"/>
+            </a:endParaRPr>
+          </a:p>
+        </p:txBody>
+      </p:sp>
+      <p:cxnSp>
+        <p:nvCxnSpPr>
+          <p:cNvPr id="42" name="Straight Connector 41">
+            <a:extLst>
+              <a:ext uri="{FF2B5EF4-FFF2-40B4-BE49-F238E27FC236}">
+                <a16:creationId xmlns:a16="http://schemas.microsoft.com/office/drawing/2014/main" id="{CC6E8A8C-157D-F611-36B4-A162546C1B01}"/>
+              </a:ext>
+            </a:extLst>
+          </p:cNvPr>
+          <p:cNvCxnSpPr>
+            <a:cxnSpLocks/>
+          </p:cNvCxnSpPr>
+          <p:nvPr/>
+        </p:nvCxnSpPr>
+        <p:spPr>
+          <a:xfrm>
+            <a:off x="3005091" y="3890634"/>
+            <a:ext cx="926829" cy="0"/>
+          </a:xfrm>
+          <a:prstGeom prst="line">
+            <a:avLst/>
+          </a:prstGeom>
+        </p:spPr>
+        <p:style>
+          <a:lnRef idx="2">
+            <a:schemeClr val="accent1"/>
+          </a:lnRef>
+          <a:fillRef idx="0">
+            <a:schemeClr val="accent1"/>
+          </a:fillRef>
+          <a:effectRef idx="1">
+            <a:schemeClr val="accent1"/>
+          </a:effectRef>
+          <a:fontRef idx="minor">
+            <a:schemeClr val="tx1"/>
+          </a:fontRef>
+        </p:style>
+      </p:cxnSp>
+      <p:sp>
+        <p:nvSpPr>
+          <p:cNvPr id="43" name="AutoShape 13">
+            <a:extLst>
+              <a:ext uri="{FF2B5EF4-FFF2-40B4-BE49-F238E27FC236}">
+                <a16:creationId xmlns:a16="http://schemas.microsoft.com/office/drawing/2014/main" id="{5933977B-1DB3-63B2-5784-1EEAD9086AF0}"/>
+              </a:ext>
+            </a:extLst>
+          </p:cNvPr>
+          <p:cNvSpPr>
+            <a:spLocks noChangeArrowheads="1"/>
+          </p:cNvSpPr>
+          <p:nvPr/>
+        </p:nvSpPr>
+        <p:spPr bwMode="auto">
+          <a:xfrm>
+            <a:off x="3947160" y="4133837"/>
+            <a:ext cx="1360853" cy="343674"/>
+          </a:xfrm>
+          <a:prstGeom prst="roundRect">
+            <a:avLst>
+              <a:gd name="adj" fmla="val 16667"/>
+            </a:avLst>
+          </a:prstGeom>
+          <a:solidFill>
+            <a:schemeClr val="bg1"/>
+          </a:solidFill>
+          <a:ln w="12700">
+            <a:solidFill>
+              <a:srgbClr val="09101D"/>
+            </a:solidFill>
+            <a:miter lim="800000"/>
+            <a:headEnd/>
+            <a:tailEnd/>
+          </a:ln>
+        </p:spPr>
+        <p:txBody>
+          <a:bodyPr vert="horz" wrap="square" lIns="91440" tIns="45720" rIns="91440" bIns="45720" numCol="1" anchor="ctr" anchorCtr="0" compatLnSpc="1">
+            <a:prstTxWarp prst="textNoShape">
+              <a:avLst/>
+            </a:prstTxWarp>
+          </a:bodyPr>
+          <a:lstStyle/>
+          <a:p>
+            <a:pPr marL="0" marR="0" lvl="0" indent="0" algn="ctr" defTabSz="914400" rtl="0" eaLnBrk="0" fontAlgn="base" latinLnBrk="0" hangingPunct="0">
+              <a:lnSpc>
+                <a:spcPct val="100000"/>
+              </a:lnSpc>
+              <a:spcBef>
+                <a:spcPct val="0"/>
+              </a:spcBef>
+              <a:spcAft>
+                <a:spcPct val="0"/>
+              </a:spcAft>
+              <a:buClrTx/>
+              <a:buSzTx/>
+              <a:buFontTx/>
+              <a:buNone/>
+              <a:tabLst/>
+            </a:pPr>
+            <a:r>
+              <a:rPr kumimoji="0" lang="en-US" altLang="en-IL" b="0" i="0" u="none" strike="noStrike" cap="none" normalizeH="0" baseline="0" dirty="0">
+                <a:ln>
+                  <a:noFill/>
+                </a:ln>
+                <a:solidFill>
+                  <a:schemeClr val="tx1"/>
+                </a:solidFill>
+                <a:effectLst/>
+                <a:latin typeface="Calibri" panose="020F0502020204030204" pitchFamily="34" charset="0"/>
+                <a:ea typeface="Yu Gothic" panose="020B0400000000000000" pitchFamily="34" charset="-128"/>
+                <a:cs typeface="Arial" panose="020B0604020202020204" pitchFamily="34" charset="0"/>
+              </a:rPr>
+              <a:t>Migrations</a:t>
+            </a:r>
+            <a:endParaRPr kumimoji="0" lang="en-IL" altLang="en-IL" sz="4000" b="0" i="0" u="none" strike="noStrike" cap="none" normalizeH="0" baseline="0" dirty="0">
+              <a:ln>
+                <a:noFill/>
+              </a:ln>
+              <a:solidFill>
+                <a:schemeClr val="tx1"/>
+              </a:solidFill>
+              <a:effectLst/>
+              <a:latin typeface="Arial" panose="020B0604020202020204" pitchFamily="34" charset="0"/>
+            </a:endParaRPr>
+          </a:p>
+        </p:txBody>
+      </p:sp>
+      <p:cxnSp>
+        <p:nvCxnSpPr>
+          <p:cNvPr id="44" name="Straight Connector 43">
+            <a:extLst>
+              <a:ext uri="{FF2B5EF4-FFF2-40B4-BE49-F238E27FC236}">
+                <a16:creationId xmlns:a16="http://schemas.microsoft.com/office/drawing/2014/main" id="{0981965D-7B11-335C-EF5A-F7521F817921}"/>
+              </a:ext>
+            </a:extLst>
+          </p:cNvPr>
+          <p:cNvCxnSpPr>
+            <a:cxnSpLocks/>
+          </p:cNvCxnSpPr>
+          <p:nvPr/>
+        </p:nvCxnSpPr>
+        <p:spPr>
+          <a:xfrm>
+            <a:off x="3020331" y="4311740"/>
+            <a:ext cx="926829" cy="0"/>
+          </a:xfrm>
+          <a:prstGeom prst="line">
+            <a:avLst/>
+          </a:prstGeom>
+        </p:spPr>
+        <p:style>
+          <a:lnRef idx="2">
+            <a:schemeClr val="accent1"/>
+          </a:lnRef>
+          <a:fillRef idx="0">
+            <a:schemeClr val="accent1"/>
+          </a:fillRef>
+          <a:effectRef idx="1">
+            <a:schemeClr val="accent1"/>
+          </a:effectRef>
+          <a:fontRef idx="minor">
+            <a:schemeClr val="tx1"/>
+          </a:fontRef>
+        </p:style>
+      </p:cxnSp>
+      <p:sp>
+        <p:nvSpPr>
+          <p:cNvPr id="45" name="AutoShape 13">
+            <a:extLst>
+              <a:ext uri="{FF2B5EF4-FFF2-40B4-BE49-F238E27FC236}">
+                <a16:creationId xmlns:a16="http://schemas.microsoft.com/office/drawing/2014/main" id="{E9F760B8-FB4B-4A4B-BABE-2BF40D33C5E5}"/>
+              </a:ext>
+            </a:extLst>
+          </p:cNvPr>
+          <p:cNvSpPr>
+            <a:spLocks noChangeArrowheads="1"/>
+          </p:cNvSpPr>
+          <p:nvPr/>
+        </p:nvSpPr>
+        <p:spPr bwMode="auto">
+          <a:xfrm>
+            <a:off x="3947160" y="4552377"/>
+            <a:ext cx="1360853" cy="343674"/>
+          </a:xfrm>
+          <a:prstGeom prst="roundRect">
+            <a:avLst>
+              <a:gd name="adj" fmla="val 16667"/>
+            </a:avLst>
+          </a:prstGeom>
+          <a:solidFill>
+            <a:schemeClr val="bg1"/>
+          </a:solidFill>
+          <a:ln w="12700">
+            <a:solidFill>
+              <a:srgbClr val="09101D"/>
+            </a:solidFill>
+            <a:miter lim="800000"/>
+            <a:headEnd/>
+            <a:tailEnd/>
+          </a:ln>
+        </p:spPr>
+        <p:txBody>
+          <a:bodyPr vert="horz" wrap="square" lIns="91440" tIns="45720" rIns="91440" bIns="45720" numCol="1" anchor="ctr" anchorCtr="0" compatLnSpc="1">
+            <a:prstTxWarp prst="textNoShape">
+              <a:avLst/>
+            </a:prstTxWarp>
+          </a:bodyPr>
+          <a:lstStyle/>
+          <a:p>
+            <a:pPr marL="0" marR="0" lvl="0" indent="0" algn="ctr" defTabSz="914400" rtl="0" eaLnBrk="0" fontAlgn="base" latinLnBrk="0" hangingPunct="0">
+              <a:lnSpc>
+                <a:spcPct val="100000"/>
+              </a:lnSpc>
+              <a:spcBef>
+                <a:spcPct val="0"/>
+              </a:spcBef>
+              <a:spcAft>
+                <a:spcPct val="0"/>
+              </a:spcAft>
+              <a:buClrTx/>
+              <a:buSzTx/>
+              <a:buFontTx/>
+              <a:buNone/>
+              <a:tabLst/>
+            </a:pPr>
+            <a:r>
+              <a:rPr kumimoji="0" lang="en-US" altLang="en-IL" b="0" i="0" u="none" strike="noStrike" cap="none" normalizeH="0" baseline="0" dirty="0">
+                <a:ln>
+                  <a:noFill/>
+                </a:ln>
+                <a:solidFill>
+                  <a:schemeClr val="tx1"/>
+                </a:solidFill>
+                <a:effectLst/>
+                <a:latin typeface="Calibri" panose="020F0502020204030204" pitchFamily="34" charset="0"/>
+                <a:ea typeface="Yu Gothic" panose="020B0400000000000000" pitchFamily="34" charset="-128"/>
+                <a:cs typeface="Arial" panose="020B0604020202020204" pitchFamily="34" charset="0"/>
+              </a:rPr>
+              <a:t>Models</a:t>
+            </a:r>
+            <a:endParaRPr kumimoji="0" lang="en-IL" altLang="en-IL" sz="4000" b="0" i="0" u="none" strike="noStrike" cap="none" normalizeH="0" baseline="0" dirty="0">
+              <a:ln>
+                <a:noFill/>
+              </a:ln>
+              <a:solidFill>
+                <a:schemeClr val="tx1"/>
+              </a:solidFill>
+              <a:effectLst/>
+              <a:latin typeface="Arial" panose="020B0604020202020204" pitchFamily="34" charset="0"/>
+            </a:endParaRPr>
+          </a:p>
+        </p:txBody>
+      </p:sp>
+      <p:sp>
+        <p:nvSpPr>
+          <p:cNvPr id="46" name="AutoShape 13">
+            <a:extLst>
+              <a:ext uri="{FF2B5EF4-FFF2-40B4-BE49-F238E27FC236}">
+                <a16:creationId xmlns:a16="http://schemas.microsoft.com/office/drawing/2014/main" id="{42836964-E83A-B3D7-BB20-15372CAA0FA3}"/>
+              </a:ext>
+            </a:extLst>
+          </p:cNvPr>
+          <p:cNvSpPr>
+            <a:spLocks noChangeArrowheads="1"/>
+          </p:cNvSpPr>
+          <p:nvPr/>
+        </p:nvSpPr>
+        <p:spPr bwMode="auto">
+          <a:xfrm>
+            <a:off x="3947160" y="4971555"/>
+            <a:ext cx="1360853" cy="343674"/>
+          </a:xfrm>
+          <a:prstGeom prst="roundRect">
+            <a:avLst>
+              <a:gd name="adj" fmla="val 16667"/>
+            </a:avLst>
+          </a:prstGeom>
+          <a:solidFill>
+            <a:schemeClr val="bg1"/>
+          </a:solidFill>
+          <a:ln w="12700">
+            <a:solidFill>
+              <a:srgbClr val="09101D"/>
+            </a:solidFill>
+            <a:miter lim="800000"/>
+            <a:headEnd/>
+            <a:tailEnd/>
+          </a:ln>
+        </p:spPr>
+        <p:txBody>
+          <a:bodyPr vert="horz" wrap="square" lIns="91440" tIns="45720" rIns="91440" bIns="45720" numCol="1" anchor="ctr" anchorCtr="0" compatLnSpc="1">
+            <a:prstTxWarp prst="textNoShape">
+              <a:avLst/>
+            </a:prstTxWarp>
+          </a:bodyPr>
+          <a:lstStyle/>
+          <a:p>
+            <a:pPr marL="0" marR="0" lvl="0" indent="0" algn="ctr" defTabSz="914400" rtl="0" eaLnBrk="0" fontAlgn="base" latinLnBrk="0" hangingPunct="0">
+              <a:lnSpc>
+                <a:spcPct val="100000"/>
+              </a:lnSpc>
+              <a:spcBef>
+                <a:spcPct val="0"/>
+              </a:spcBef>
+              <a:spcAft>
+                <a:spcPct val="0"/>
+              </a:spcAft>
+              <a:buClrTx/>
+              <a:buSzTx/>
+              <a:buFontTx/>
+              <a:buNone/>
+              <a:tabLst/>
+            </a:pPr>
+            <a:r>
+              <a:rPr kumimoji="0" lang="en-US" altLang="en-IL" b="0" i="0" u="none" strike="noStrike" cap="none" normalizeH="0" baseline="0" dirty="0">
+                <a:ln>
+                  <a:noFill/>
+                </a:ln>
+                <a:solidFill>
+                  <a:schemeClr val="tx1"/>
+                </a:solidFill>
+                <a:effectLst/>
+                <a:latin typeface="Calibri" panose="020F0502020204030204" pitchFamily="34" charset="0"/>
+                <a:ea typeface="Yu Gothic" panose="020B0400000000000000" pitchFamily="34" charset="-128"/>
+                <a:cs typeface="Arial" panose="020B0604020202020204" pitchFamily="34" charset="0"/>
+              </a:rPr>
+              <a:t>Properties</a:t>
+            </a:r>
+            <a:endParaRPr kumimoji="0" lang="en-IL" altLang="en-IL" sz="4000" b="0" i="0" u="none" strike="noStrike" cap="none" normalizeH="0" baseline="0" dirty="0">
+              <a:ln>
+                <a:noFill/>
+              </a:ln>
+              <a:solidFill>
+                <a:schemeClr val="tx1"/>
+              </a:solidFill>
+              <a:effectLst/>
+              <a:latin typeface="Arial" panose="020B0604020202020204" pitchFamily="34" charset="0"/>
+            </a:endParaRPr>
+          </a:p>
+        </p:txBody>
+      </p:sp>
+      <p:cxnSp>
+        <p:nvCxnSpPr>
+          <p:cNvPr id="47" name="Straight Connector 46">
+            <a:extLst>
+              <a:ext uri="{FF2B5EF4-FFF2-40B4-BE49-F238E27FC236}">
+                <a16:creationId xmlns:a16="http://schemas.microsoft.com/office/drawing/2014/main" id="{FB9F25E6-DF5D-3A72-F754-0F0447644D2F}"/>
+              </a:ext>
+            </a:extLst>
+          </p:cNvPr>
+          <p:cNvCxnSpPr>
+            <a:cxnSpLocks/>
+          </p:cNvCxnSpPr>
+          <p:nvPr/>
+        </p:nvCxnSpPr>
+        <p:spPr>
+          <a:xfrm>
+            <a:off x="3020331" y="5149458"/>
+            <a:ext cx="926829" cy="0"/>
+          </a:xfrm>
+          <a:prstGeom prst="line">
+            <a:avLst/>
+          </a:prstGeom>
+        </p:spPr>
+        <p:style>
+          <a:lnRef idx="2">
+            <a:schemeClr val="accent1"/>
+          </a:lnRef>
+          <a:fillRef idx="0">
+            <a:schemeClr val="accent1"/>
+          </a:fillRef>
+          <a:effectRef idx="1">
+            <a:schemeClr val="accent1"/>
+          </a:effectRef>
+          <a:fontRef idx="minor">
+            <a:schemeClr val="tx1"/>
+          </a:fontRef>
+        </p:style>
+      </p:cxnSp>
+      <p:cxnSp>
+        <p:nvCxnSpPr>
+          <p:cNvPr id="48" name="Straight Connector 47">
+            <a:extLst>
+              <a:ext uri="{FF2B5EF4-FFF2-40B4-BE49-F238E27FC236}">
+                <a16:creationId xmlns:a16="http://schemas.microsoft.com/office/drawing/2014/main" id="{10FF5E8C-87F0-8001-0491-F0E429B85F20}"/>
+              </a:ext>
+            </a:extLst>
+          </p:cNvPr>
+          <p:cNvCxnSpPr>
+            <a:cxnSpLocks/>
+          </p:cNvCxnSpPr>
+          <p:nvPr/>
+        </p:nvCxnSpPr>
+        <p:spPr>
+          <a:xfrm>
+            <a:off x="3020331" y="4719690"/>
+            <a:ext cx="926829" cy="0"/>
+          </a:xfrm>
+          <a:prstGeom prst="line">
+            <a:avLst/>
+          </a:prstGeom>
+        </p:spPr>
+        <p:style>
+          <a:lnRef idx="2">
+            <a:schemeClr val="accent1"/>
+          </a:lnRef>
+          <a:fillRef idx="0">
+            <a:schemeClr val="accent1"/>
+          </a:fillRef>
+          <a:effectRef idx="1">
+            <a:schemeClr val="accent1"/>
+          </a:effectRef>
+          <a:fontRef idx="minor">
+            <a:schemeClr val="tx1"/>
+          </a:fontRef>
+        </p:style>
+      </p:cxnSp>
+      <p:sp>
+        <p:nvSpPr>
+          <p:cNvPr id="11" name="AutoShape 13">
+            <a:extLst>
+              <a:ext uri="{FF2B5EF4-FFF2-40B4-BE49-F238E27FC236}">
+                <a16:creationId xmlns:a16="http://schemas.microsoft.com/office/drawing/2014/main" id="{F799A10B-14C1-1B55-ACA7-1DABE0E798E4}"/>
+              </a:ext>
+            </a:extLst>
+          </p:cNvPr>
+          <p:cNvSpPr>
+            <a:spLocks noChangeArrowheads="1"/>
+          </p:cNvSpPr>
+          <p:nvPr/>
+        </p:nvSpPr>
+        <p:spPr bwMode="auto">
+          <a:xfrm>
+            <a:off x="1286449" y="5132300"/>
+            <a:ext cx="832104" cy="305112"/>
+          </a:xfrm>
+          <a:prstGeom prst="roundRect">
+            <a:avLst>
+              <a:gd name="adj" fmla="val 16667"/>
+            </a:avLst>
+          </a:prstGeom>
+          <a:solidFill>
+            <a:schemeClr val="bg1"/>
+          </a:solidFill>
+          <a:ln w="12700">
+            <a:solidFill>
+              <a:srgbClr val="09101D"/>
+            </a:solidFill>
+            <a:miter lim="800000"/>
+            <a:headEnd/>
+            <a:tailEnd/>
+          </a:ln>
+        </p:spPr>
+        <p:txBody>
+          <a:bodyPr vert="horz" wrap="square" lIns="91440" tIns="45720" rIns="91440" bIns="45720" numCol="1" anchor="ctr" anchorCtr="0" compatLnSpc="1">
+            <a:prstTxWarp prst="textNoShape">
+              <a:avLst/>
+            </a:prstTxWarp>
+          </a:bodyPr>
+          <a:lstStyle/>
+          <a:p>
+            <a:pPr marL="0" marR="0" lvl="0" indent="0" algn="ctr" defTabSz="914400" rtl="0" eaLnBrk="0" fontAlgn="base" latinLnBrk="0" hangingPunct="0">
+              <a:lnSpc>
+                <a:spcPct val="100000"/>
+              </a:lnSpc>
+              <a:spcBef>
+                <a:spcPct val="0"/>
+              </a:spcBef>
+              <a:spcAft>
+                <a:spcPct val="0"/>
+              </a:spcAft>
+              <a:buClrTx/>
+              <a:buSzTx/>
+              <a:buFontTx/>
+              <a:buNone/>
+              <a:tabLst/>
+            </a:pPr>
+            <a:r>
+              <a:rPr kumimoji="0" lang="en-US" altLang="en-IL" b="0" i="0" u="none" strike="noStrike" cap="none" normalizeH="0" baseline="0" dirty="0">
+                <a:ln>
+                  <a:noFill/>
+                </a:ln>
+                <a:solidFill>
+                  <a:schemeClr val="tx1"/>
+                </a:solidFill>
+                <a:effectLst/>
+                <a:latin typeface="Calibri" panose="020F0502020204030204" pitchFamily="34" charset="0"/>
+                <a:ea typeface="Yu Gothic" panose="020B0400000000000000" pitchFamily="34" charset="-128"/>
+                <a:cs typeface="Arial" panose="020B0604020202020204" pitchFamily="34" charset="0"/>
+              </a:rPr>
+              <a:t>Tests</a:t>
+            </a:r>
+            <a:endParaRPr kumimoji="0" lang="en-IL" altLang="en-IL" sz="4000" b="0" i="0" u="none" strike="noStrike" cap="none" normalizeH="0" baseline="0" dirty="0">
+              <a:ln>
+                <a:noFill/>
+              </a:ln>
+              <a:solidFill>
+                <a:schemeClr val="tx1"/>
+              </a:solidFill>
+              <a:effectLst/>
+              <a:latin typeface="Arial" panose="020B0604020202020204" pitchFamily="34" charset="0"/>
+            </a:endParaRPr>
+          </a:p>
+        </p:txBody>
+      </p:sp>
+      <p:cxnSp>
+        <p:nvCxnSpPr>
+          <p:cNvPr id="12" name="Straight Connector 11">
+            <a:extLst>
+              <a:ext uri="{FF2B5EF4-FFF2-40B4-BE49-F238E27FC236}">
+                <a16:creationId xmlns:a16="http://schemas.microsoft.com/office/drawing/2014/main" id="{5C6BD2AB-A3B0-1F79-EF23-6F6E19FF3C4A}"/>
+              </a:ext>
+            </a:extLst>
+          </p:cNvPr>
+          <p:cNvCxnSpPr>
+            <a:cxnSpLocks/>
+          </p:cNvCxnSpPr>
+          <p:nvPr/>
+        </p:nvCxnSpPr>
+        <p:spPr>
+          <a:xfrm>
+            <a:off x="628163" y="5279671"/>
+            <a:ext cx="658286" cy="0"/>
+          </a:xfrm>
+          <a:prstGeom prst="line">
+            <a:avLst/>
+          </a:prstGeom>
+        </p:spPr>
+        <p:style>
+          <a:lnRef idx="2">
+            <a:schemeClr val="accent1"/>
+          </a:lnRef>
+          <a:fillRef idx="0">
+            <a:schemeClr val="accent1"/>
+          </a:fillRef>
+          <a:effectRef idx="1">
+            <a:schemeClr val="accent1"/>
+          </a:effectRef>
+          <a:fontRef idx="minor">
+            <a:schemeClr val="tx1"/>
+          </a:fontRef>
+        </p:style>
+      </p:cxnSp>
+      <p:sp>
+        <p:nvSpPr>
+          <p:cNvPr id="13" name="AutoShape 13">
+            <a:extLst>
+              <a:ext uri="{FF2B5EF4-FFF2-40B4-BE49-F238E27FC236}">
+                <a16:creationId xmlns:a16="http://schemas.microsoft.com/office/drawing/2014/main" id="{97672CD0-A1CE-374C-68C7-143497BCCE39}"/>
+              </a:ext>
+            </a:extLst>
+          </p:cNvPr>
+          <p:cNvSpPr>
+            <a:spLocks noChangeArrowheads="1"/>
+          </p:cNvSpPr>
+          <p:nvPr/>
+        </p:nvSpPr>
+        <p:spPr bwMode="auto">
+          <a:xfrm>
+            <a:off x="2259974" y="5708372"/>
+            <a:ext cx="2001130" cy="359440"/>
+          </a:xfrm>
+          <a:prstGeom prst="roundRect">
+            <a:avLst>
+              <a:gd name="adj" fmla="val 16667"/>
+            </a:avLst>
+          </a:prstGeom>
+          <a:solidFill>
+            <a:schemeClr val="bg1"/>
+          </a:solidFill>
+          <a:ln w="12700">
+            <a:solidFill>
+              <a:srgbClr val="09101D"/>
+            </a:solidFill>
+            <a:miter lim="800000"/>
+            <a:headEnd/>
+            <a:tailEnd/>
+          </a:ln>
+        </p:spPr>
+        <p:txBody>
+          <a:bodyPr vert="horz" wrap="square" lIns="91440" tIns="45720" rIns="91440" bIns="45720" numCol="1" anchor="ctr" anchorCtr="0" compatLnSpc="1">
+            <a:prstTxWarp prst="textNoShape">
+              <a:avLst/>
+            </a:prstTxWarp>
+          </a:bodyPr>
+          <a:lstStyle/>
+          <a:p>
+            <a:pPr lvl="0" algn="ctr" eaLnBrk="0" fontAlgn="base" hangingPunct="0">
+              <a:spcBef>
+                <a:spcPct val="0"/>
+              </a:spcBef>
+              <a:spcAft>
+                <a:spcPct val="0"/>
+              </a:spcAft>
+            </a:pPr>
+            <a:r>
+              <a:rPr lang="en-US" altLang="en-IL" dirty="0">
+                <a:latin typeface="Calibri" panose="020F0502020204030204" pitchFamily="34" charset="0"/>
+                <a:ea typeface="Yu Gothic" panose="020B0400000000000000" pitchFamily="34" charset="-128"/>
+                <a:cs typeface="Arial" panose="020B0604020202020204" pitchFamily="34" charset="0"/>
+              </a:rPr>
+              <a:t>A2C.CRM.Api.Tests</a:t>
+            </a:r>
+            <a:endParaRPr kumimoji="0" lang="en-IL" altLang="en-IL" sz="4000" b="0" i="0" u="none" strike="noStrike" cap="none" normalizeH="0" baseline="0" dirty="0">
+              <a:ln>
+                <a:noFill/>
+              </a:ln>
+              <a:solidFill>
+                <a:schemeClr val="tx1"/>
+              </a:solidFill>
+              <a:effectLst/>
+              <a:latin typeface="Arial" panose="020B0604020202020204" pitchFamily="34" charset="0"/>
+            </a:endParaRPr>
+          </a:p>
+        </p:txBody>
+      </p:sp>
+      <p:cxnSp>
+        <p:nvCxnSpPr>
+          <p:cNvPr id="14" name="Straight Connector 13">
+            <a:extLst>
+              <a:ext uri="{FF2B5EF4-FFF2-40B4-BE49-F238E27FC236}">
+                <a16:creationId xmlns:a16="http://schemas.microsoft.com/office/drawing/2014/main" id="{F2CC8B0A-5F34-9281-C371-A4FFFC090347}"/>
+              </a:ext>
+            </a:extLst>
+          </p:cNvPr>
+          <p:cNvCxnSpPr>
+            <a:cxnSpLocks/>
+          </p:cNvCxnSpPr>
+          <p:nvPr/>
+        </p:nvCxnSpPr>
+        <p:spPr>
+          <a:xfrm>
+            <a:off x="1718347" y="5446020"/>
+            <a:ext cx="0" cy="442071"/>
+          </a:xfrm>
+          <a:prstGeom prst="line">
+            <a:avLst/>
+          </a:prstGeom>
+        </p:spPr>
+        <p:style>
+          <a:lnRef idx="2">
+            <a:schemeClr val="accent1"/>
+          </a:lnRef>
+          <a:fillRef idx="0">
+            <a:schemeClr val="accent1"/>
+          </a:fillRef>
+          <a:effectRef idx="1">
+            <a:schemeClr val="accent1"/>
+          </a:effectRef>
+          <a:fontRef idx="minor">
+            <a:schemeClr val="tx1"/>
+          </a:fontRef>
+        </p:style>
+      </p:cxnSp>
+      <p:cxnSp>
+        <p:nvCxnSpPr>
+          <p:cNvPr id="16" name="Straight Connector 15">
+            <a:extLst>
+              <a:ext uri="{FF2B5EF4-FFF2-40B4-BE49-F238E27FC236}">
+                <a16:creationId xmlns:a16="http://schemas.microsoft.com/office/drawing/2014/main" id="{DDFF1663-547C-007D-0394-80FCA5C623AA}"/>
+              </a:ext>
+            </a:extLst>
+          </p:cNvPr>
+          <p:cNvCxnSpPr>
+            <a:cxnSpLocks/>
+            <a:endCxn id="13" idx="1"/>
+          </p:cNvCxnSpPr>
+          <p:nvPr/>
+        </p:nvCxnSpPr>
+        <p:spPr>
+          <a:xfrm>
+            <a:off x="1702914" y="5888091"/>
+            <a:ext cx="557060" cy="1"/>
+          </a:xfrm>
+          <a:prstGeom prst="line">
+            <a:avLst/>
+          </a:prstGeom>
+        </p:spPr>
+        <p:style>
+          <a:lnRef idx="2">
+            <a:schemeClr val="accent1"/>
+          </a:lnRef>
+          <a:fillRef idx="0">
+            <a:schemeClr val="accent1"/>
+          </a:fillRef>
+          <a:effectRef idx="1">
+            <a:schemeClr val="accent1"/>
+          </a:effectRef>
+          <a:fontRef idx="minor">
+            <a:schemeClr val="tx1"/>
+          </a:fontRef>
+        </p:style>
+      </p:cxnSp>
+    </p:spTree>
+    <p:extLst>
+      <p:ext uri="{BB962C8B-B14F-4D97-AF65-F5344CB8AC3E}">
+        <p14:creationId xmlns:p14="http://schemas.microsoft.com/office/powerpoint/2010/main" val="903800887"/>
+      </p:ext>
+    </p:extLst>
+  </p:cSld>
+  <p:clrMapOvr>
+    <a:masterClrMapping/>
+  </p:clrMapOvr>
+</p:sld>
+</file>
+
+<file path=ppt/slides/slide11.xml><?xml version="1.0" encoding="utf-8"?>
+<p:sld xmlns:a="http://schemas.openxmlformats.org/drawingml/2006/main" xmlns:r="http://schemas.openxmlformats.org/officeDocument/2006/relationships" xmlns:p="http://schemas.openxmlformats.org/presentationml/2006/main">
+  <p:cSld>
+    <p:spTree>
+      <p:nvGrpSpPr>
+        <p:cNvPr id="1" name=""/>
+        <p:cNvGrpSpPr/>
+        <p:nvPr/>
+      </p:nvGrpSpPr>
+      <p:grpSpPr>
+        <a:xfrm>
+          <a:off x="0" y="0"/>
+          <a:ext cx="0" cy="0"/>
+          <a:chOff x="0" y="0"/>
+          <a:chExt cx="0" cy="0"/>
+        </a:xfrm>
+      </p:grpSpPr>
+      <p:pic>
+        <p:nvPicPr>
+          <p:cNvPr id="3" name="Picture 2" descr="A diagram of a software flow&#10;&#10;AI-generated content may be incorrect.">
+            <a:extLst>
+              <a:ext uri="{FF2B5EF4-FFF2-40B4-BE49-F238E27FC236}">
+                <a16:creationId xmlns:a16="http://schemas.microsoft.com/office/drawing/2014/main" id="{4B6F9169-4CBB-3BB9-0B7F-49A764C826B9}"/>
+              </a:ext>
+            </a:extLst>
+          </p:cNvPr>
+          <p:cNvPicPr>
+            <a:picLocks noChangeAspect="1"/>
+          </p:cNvPicPr>
+          <p:nvPr/>
+        </p:nvPicPr>
+        <p:blipFill>
+          <a:blip r:embed="rId2">
+            <a:extLst>
+              <a:ext uri="{28A0092B-C50C-407E-A947-70E740481C1C}">
+                <a14:useLocalDpi xmlns:a14="http://schemas.microsoft.com/office/drawing/2010/main" val="0"/>
+              </a:ext>
+            </a:extLst>
+          </a:blip>
+          <a:stretch>
+            <a:fillRect/>
+          </a:stretch>
+        </p:blipFill>
+        <p:spPr>
+          <a:xfrm>
+            <a:off x="3169914" y="1225291"/>
+            <a:ext cx="5852172" cy="4407417"/>
+          </a:xfrm>
+          <a:prstGeom prst="rect">
+            <a:avLst/>
+          </a:prstGeom>
+        </p:spPr>
+      </p:pic>
+    </p:spTree>
+    <p:extLst>
+      <p:ext uri="{BB962C8B-B14F-4D97-AF65-F5344CB8AC3E}">
+        <p14:creationId xmlns:p14="http://schemas.microsoft.com/office/powerpoint/2010/main" val="24280522"/>
+      </p:ext>
+    </p:extLst>
+  </p:cSld>
+  <p:clrMapOvr>
+    <a:masterClrMapping/>
+  </p:clrMapOvr>
+</p:sld>
+</file>
+
 <file path=ppt/slides/slide2.xml><?xml version="1.0" encoding="utf-8"?>
 <p:sld xmlns:a="http://schemas.openxmlformats.org/drawingml/2006/main" xmlns:r="http://schemas.openxmlformats.org/officeDocument/2006/relationships" xmlns:p="http://schemas.openxmlformats.org/presentationml/2006/main">
   <p:cSld>
@@ -9330,6 +11195,940 @@
 <file path=ppt/slides/slide5.xml><?xml version="1.0" encoding="utf-8"?>
 <p:sld xmlns:a="http://schemas.openxmlformats.org/drawingml/2006/main" xmlns:r="http://schemas.openxmlformats.org/officeDocument/2006/relationships" xmlns:p="http://schemas.openxmlformats.org/presentationml/2006/main">
   <p:cSld>
+    <p:bg>
+      <p:bgPr>
+        <a:solidFill>
+          <a:schemeClr val="bg1"/>
+        </a:solidFill>
+        <a:effectLst/>
+      </p:bgPr>
+    </p:bg>
+    <p:spTree>
+      <p:nvGrpSpPr>
+        <p:cNvPr id="1" name=""/>
+        <p:cNvGrpSpPr/>
+        <p:nvPr/>
+      </p:nvGrpSpPr>
+      <p:grpSpPr>
+        <a:xfrm>
+          <a:off x="0" y="0"/>
+          <a:ext cx="0" cy="0"/>
+          <a:chOff x="0" y="0"/>
+          <a:chExt cx="0" cy="0"/>
+        </a:xfrm>
+      </p:grpSpPr>
+      <p:sp>
+        <p:nvSpPr>
+          <p:cNvPr id="9" name="Rectangle 8">
+            <a:extLst>
+              <a:ext uri="{FF2B5EF4-FFF2-40B4-BE49-F238E27FC236}">
+                <a16:creationId xmlns:a16="http://schemas.microsoft.com/office/drawing/2014/main" id="{F3060C83-F051-4F0E-ABAD-AA0DFC48B218}"/>
+              </a:ext>
+              <a:ext uri="{C183D7F6-B498-43B3-948B-1728B52AA6E4}">
+                <adec:decorative xmlns:adec="http://schemas.microsoft.com/office/drawing/2017/decorative" val="1"/>
+              </a:ext>
+            </a:extLst>
+          </p:cNvPr>
+          <p:cNvSpPr>
+            <a:spLocks noGrp="1" noRot="1" noChangeAspect="1" noMove="1" noResize="1" noEditPoints="1" noAdjustHandles="1" noChangeArrowheads="1" noChangeShapeType="1" noTextEdit="1"/>
+          </p:cNvSpPr>
+          <p:nvPr>
+            <p:extLst>
+              <p:ext uri="{386F3935-93C4-4BCD-93E2-E3B085C9AB24}">
+                <p16:designElem xmlns:p16="http://schemas.microsoft.com/office/powerpoint/2015/main" val="1"/>
+              </p:ext>
+            </p:extLst>
+          </p:nvPr>
+        </p:nvSpPr>
+        <p:spPr>
+          <a:xfrm>
+            <a:off x="0" y="0"/>
+            <a:ext cx="12192000" cy="6858000"/>
+          </a:xfrm>
+          <a:prstGeom prst="rect">
+            <a:avLst/>
+          </a:prstGeom>
+          <a:solidFill>
+            <a:schemeClr val="bg1"/>
+          </a:solidFill>
+          <a:ln>
+            <a:noFill/>
+          </a:ln>
+        </p:spPr>
+        <p:style>
+          <a:lnRef idx="2">
+            <a:schemeClr val="accent1">
+              <a:shade val="50000"/>
+            </a:schemeClr>
+          </a:lnRef>
+          <a:fillRef idx="1">
+            <a:schemeClr val="accent1"/>
+          </a:fillRef>
+          <a:effectRef idx="0">
+            <a:schemeClr val="accent1"/>
+          </a:effectRef>
+          <a:fontRef idx="minor">
+            <a:schemeClr val="lt1"/>
+          </a:fontRef>
+        </p:style>
+        <p:txBody>
+          <a:bodyPr rtlCol="0" anchor="ctr"/>
+          <a:lstStyle/>
+          <a:p>
+            <a:pPr algn="ctr"/>
+            <a:endParaRPr lang="en-US" dirty="0"/>
+          </a:p>
+        </p:txBody>
+      </p:sp>
+      <p:sp>
+        <p:nvSpPr>
+          <p:cNvPr id="11" name="Freeform: Shape 10">
+            <a:extLst>
+              <a:ext uri="{FF2B5EF4-FFF2-40B4-BE49-F238E27FC236}">
+                <a16:creationId xmlns:a16="http://schemas.microsoft.com/office/drawing/2014/main" id="{83C98ABE-055B-441F-B07E-44F97F083C39}"/>
+              </a:ext>
+              <a:ext uri="{C183D7F6-B498-43B3-948B-1728B52AA6E4}">
+                <adec:decorative xmlns:adec="http://schemas.microsoft.com/office/drawing/2017/decorative" val="1"/>
+              </a:ext>
+            </a:extLst>
+          </p:cNvPr>
+          <p:cNvSpPr>
+            <a:spLocks noGrp="1" noRot="1" noChangeAspect="1" noMove="1" noResize="1" noEditPoints="1" noAdjustHandles="1" noChangeArrowheads="1" noChangeShapeType="1" noTextEdit="1"/>
+          </p:cNvSpPr>
+          <p:nvPr>
+            <p:extLst>
+              <p:ext uri="{386F3935-93C4-4BCD-93E2-E3B085C9AB24}">
+                <p16:designElem xmlns:p16="http://schemas.microsoft.com/office/powerpoint/2015/main" val="1"/>
+              </p:ext>
+            </p:extLst>
+          </p:nvPr>
+        </p:nvSpPr>
+        <p:spPr>
+          <a:xfrm rot="18900000" flipH="1">
+            <a:off x="-376156" y="-253670"/>
+            <a:ext cx="1827638" cy="1376989"/>
+          </a:xfrm>
+          <a:custGeom>
+            <a:avLst/>
+            <a:gdLst>
+              <a:gd name="connsiteX0" fmla="*/ 0 w 1827638"/>
+              <a:gd name="connsiteY0" fmla="*/ 987379 h 1376989"/>
+              <a:gd name="connsiteX1" fmla="*/ 987379 w 1827638"/>
+              <a:gd name="connsiteY1" fmla="*/ 0 h 1376989"/>
+              <a:gd name="connsiteX2" fmla="*/ 1827638 w 1827638"/>
+              <a:gd name="connsiteY2" fmla="*/ 840260 h 1376989"/>
+              <a:gd name="connsiteX3" fmla="*/ 1827638 w 1827638"/>
+              <a:gd name="connsiteY3" fmla="*/ 1376989 h 1376989"/>
+              <a:gd name="connsiteX4" fmla="*/ 0 w 1827638"/>
+              <a:gd name="connsiteY4" fmla="*/ 1376989 h 1376989"/>
+            </a:gdLst>
+            <a:ahLst/>
+            <a:cxnLst>
+              <a:cxn ang="0">
+                <a:pos x="connsiteX0" y="connsiteY0"/>
+              </a:cxn>
+              <a:cxn ang="0">
+                <a:pos x="connsiteX1" y="connsiteY1"/>
+              </a:cxn>
+              <a:cxn ang="0">
+                <a:pos x="connsiteX2" y="connsiteY2"/>
+              </a:cxn>
+              <a:cxn ang="0">
+                <a:pos x="connsiteX3" y="connsiteY3"/>
+              </a:cxn>
+              <a:cxn ang="0">
+                <a:pos x="connsiteX4" y="connsiteY4"/>
+              </a:cxn>
+            </a:cxnLst>
+            <a:rect l="l" t="t" r="r" b="b"/>
+            <a:pathLst>
+              <a:path w="1827638" h="1376989">
+                <a:moveTo>
+                  <a:pt x="0" y="987379"/>
+                </a:moveTo>
+                <a:lnTo>
+                  <a:pt x="987379" y="0"/>
+                </a:lnTo>
+                <a:lnTo>
+                  <a:pt x="1827638" y="840260"/>
+                </a:lnTo>
+                <a:lnTo>
+                  <a:pt x="1827638" y="1376989"/>
+                </a:lnTo>
+                <a:lnTo>
+                  <a:pt x="0" y="1376989"/>
+                </a:lnTo>
+                <a:close/>
+              </a:path>
+            </a:pathLst>
+          </a:custGeom>
+          <a:solidFill>
+            <a:schemeClr val="accent1">
+              <a:alpha val="30000"/>
+            </a:schemeClr>
+          </a:solidFill>
+          <a:ln>
+            <a:noFill/>
+          </a:ln>
+        </p:spPr>
+        <p:style>
+          <a:lnRef idx="2">
+            <a:schemeClr val="accent1">
+              <a:shade val="50000"/>
+            </a:schemeClr>
+          </a:lnRef>
+          <a:fillRef idx="1">
+            <a:schemeClr val="accent1"/>
+          </a:fillRef>
+          <a:effectRef idx="0">
+            <a:schemeClr val="accent1"/>
+          </a:effectRef>
+          <a:fontRef idx="minor">
+            <a:schemeClr val="lt1"/>
+          </a:fontRef>
+        </p:style>
+        <p:txBody>
+          <a:bodyPr rtlCol="0" anchor="ctr"/>
+          <a:lstStyle/>
+          <a:p>
+            <a:pPr algn="ctr"/>
+            <a:endParaRPr lang="en-US" dirty="0"/>
+          </a:p>
+        </p:txBody>
+      </p:sp>
+      <p:sp>
+        <p:nvSpPr>
+          <p:cNvPr id="13" name="Rectangle 12">
+            <a:extLst>
+              <a:ext uri="{FF2B5EF4-FFF2-40B4-BE49-F238E27FC236}">
+                <a16:creationId xmlns:a16="http://schemas.microsoft.com/office/drawing/2014/main" id="{29FDB030-9B49-4CED-8CCD-4D99382388AC}"/>
+              </a:ext>
+              <a:ext uri="{C183D7F6-B498-43B3-948B-1728B52AA6E4}">
+                <adec:decorative xmlns:adec="http://schemas.microsoft.com/office/drawing/2017/decorative" val="1"/>
+              </a:ext>
+            </a:extLst>
+          </p:cNvPr>
+          <p:cNvSpPr>
+            <a:spLocks noGrp="1" noRot="1" noChangeAspect="1" noMove="1" noResize="1" noEditPoints="1" noAdjustHandles="1" noChangeArrowheads="1" noChangeShapeType="1" noTextEdit="1"/>
+          </p:cNvSpPr>
+          <p:nvPr>
+            <p:extLst>
+              <p:ext uri="{386F3935-93C4-4BCD-93E2-E3B085C9AB24}">
+                <p16:designElem xmlns:p16="http://schemas.microsoft.com/office/powerpoint/2015/main" val="1"/>
+              </p:ext>
+            </p:extLst>
+          </p:nvPr>
+        </p:nvSpPr>
+        <p:spPr>
+          <a:xfrm rot="18900000" flipH="1">
+            <a:off x="891641" y="422146"/>
+            <a:ext cx="645368" cy="645368"/>
+          </a:xfrm>
+          <a:prstGeom prst="rect">
+            <a:avLst/>
+          </a:prstGeom>
+          <a:solidFill>
+            <a:schemeClr val="accent1">
+              <a:alpha val="30000"/>
+            </a:schemeClr>
+          </a:solidFill>
+          <a:ln>
+            <a:noFill/>
+          </a:ln>
+        </p:spPr>
+        <p:style>
+          <a:lnRef idx="2">
+            <a:schemeClr val="accent1">
+              <a:shade val="50000"/>
+            </a:schemeClr>
+          </a:lnRef>
+          <a:fillRef idx="1">
+            <a:schemeClr val="accent1"/>
+          </a:fillRef>
+          <a:effectRef idx="0">
+            <a:schemeClr val="accent1"/>
+          </a:effectRef>
+          <a:fontRef idx="minor">
+            <a:schemeClr val="lt1"/>
+          </a:fontRef>
+        </p:style>
+        <p:txBody>
+          <a:bodyPr rtlCol="0" anchor="ctr"/>
+          <a:lstStyle/>
+          <a:p>
+            <a:pPr algn="ctr"/>
+            <a:endParaRPr lang="en-US"/>
+          </a:p>
+        </p:txBody>
+      </p:sp>
+      <p:sp>
+        <p:nvSpPr>
+          <p:cNvPr id="15" name="Rectangle 14">
+            <a:extLst>
+              <a:ext uri="{FF2B5EF4-FFF2-40B4-BE49-F238E27FC236}">
+                <a16:creationId xmlns:a16="http://schemas.microsoft.com/office/drawing/2014/main" id="{3783CA14-24A1-485C-8B30-D6A5D87987AD}"/>
+              </a:ext>
+              <a:ext uri="{C183D7F6-B498-43B3-948B-1728B52AA6E4}">
+                <adec:decorative xmlns:adec="http://schemas.microsoft.com/office/drawing/2017/decorative" val="1"/>
+              </a:ext>
+            </a:extLst>
+          </p:cNvPr>
+          <p:cNvSpPr>
+            <a:spLocks noGrp="1" noRot="1" noChangeAspect="1" noMove="1" noResize="1" noEditPoints="1" noAdjustHandles="1" noChangeArrowheads="1" noChangeShapeType="1" noTextEdit="1"/>
+          </p:cNvSpPr>
+          <p:nvPr>
+            <p:extLst>
+              <p:ext uri="{386F3935-93C4-4BCD-93E2-E3B085C9AB24}">
+                <p16:designElem xmlns:p16="http://schemas.microsoft.com/office/powerpoint/2015/main" val="1"/>
+              </p:ext>
+            </p:extLst>
+          </p:nvPr>
+        </p:nvSpPr>
+        <p:spPr>
+          <a:xfrm rot="18900000" flipH="1">
+            <a:off x="10043482" y="655140"/>
+            <a:ext cx="687472" cy="687472"/>
+          </a:xfrm>
+          <a:prstGeom prst="rect">
+            <a:avLst/>
+          </a:prstGeom>
+          <a:solidFill>
+            <a:schemeClr val="accent4">
+              <a:alpha val="30000"/>
+            </a:schemeClr>
+          </a:solidFill>
+          <a:ln>
+            <a:noFill/>
+          </a:ln>
+        </p:spPr>
+        <p:style>
+          <a:lnRef idx="2">
+            <a:schemeClr val="accent1">
+              <a:shade val="50000"/>
+            </a:schemeClr>
+          </a:lnRef>
+          <a:fillRef idx="1">
+            <a:schemeClr val="accent1"/>
+          </a:fillRef>
+          <a:effectRef idx="0">
+            <a:schemeClr val="accent1"/>
+          </a:effectRef>
+          <a:fontRef idx="minor">
+            <a:schemeClr val="lt1"/>
+          </a:fontRef>
+        </p:style>
+        <p:txBody>
+          <a:bodyPr rtlCol="0" anchor="ctr"/>
+          <a:lstStyle/>
+          <a:p>
+            <a:pPr algn="ctr"/>
+            <a:endParaRPr lang="en-US"/>
+          </a:p>
+        </p:txBody>
+      </p:sp>
+      <p:sp>
+        <p:nvSpPr>
+          <p:cNvPr id="17" name="Freeform: Shape 16">
+            <a:extLst>
+              <a:ext uri="{FF2B5EF4-FFF2-40B4-BE49-F238E27FC236}">
+                <a16:creationId xmlns:a16="http://schemas.microsoft.com/office/drawing/2014/main" id="{9A97C86A-04D6-40F7-AE84-31AB43E6A846}"/>
+              </a:ext>
+              <a:ext uri="{C183D7F6-B498-43B3-948B-1728B52AA6E4}">
+                <adec:decorative xmlns:adec="http://schemas.microsoft.com/office/drawing/2017/decorative" val="1"/>
+              </a:ext>
+            </a:extLst>
+          </p:cNvPr>
+          <p:cNvSpPr>
+            <a:spLocks noGrp="1" noRot="1" noChangeAspect="1" noMove="1" noResize="1" noEditPoints="1" noAdjustHandles="1" noChangeArrowheads="1" noChangeShapeType="1" noTextEdit="1"/>
+          </p:cNvSpPr>
+          <p:nvPr>
+            <p:extLst>
+              <p:ext uri="{386F3935-93C4-4BCD-93E2-E3B085C9AB24}">
+                <p16:designElem xmlns:p16="http://schemas.microsoft.com/office/powerpoint/2015/main" val="1"/>
+              </p:ext>
+            </p:extLst>
+          </p:nvPr>
+        </p:nvSpPr>
+        <p:spPr>
+          <a:xfrm rot="10800000" flipH="1">
+            <a:off x="9356643" y="0"/>
+            <a:ext cx="2835357" cy="1480837"/>
+          </a:xfrm>
+          <a:custGeom>
+            <a:avLst/>
+            <a:gdLst>
+              <a:gd name="connsiteX0" fmla="*/ 2835357 w 2835357"/>
+              <a:gd name="connsiteY0" fmla="*/ 1480837 h 1480837"/>
+              <a:gd name="connsiteX1" fmla="*/ 0 w 2835357"/>
+              <a:gd name="connsiteY1" fmla="*/ 1480837 h 1480837"/>
+              <a:gd name="connsiteX2" fmla="*/ 1552727 w 2835357"/>
+              <a:gd name="connsiteY2" fmla="*/ 0 h 1480837"/>
+              <a:gd name="connsiteX3" fmla="*/ 2835357 w 2835357"/>
+              <a:gd name="connsiteY3" fmla="*/ 1223245 h 1480837"/>
+            </a:gdLst>
+            <a:ahLst/>
+            <a:cxnLst>
+              <a:cxn ang="0">
+                <a:pos x="connsiteX0" y="connsiteY0"/>
+              </a:cxn>
+              <a:cxn ang="0">
+                <a:pos x="connsiteX1" y="connsiteY1"/>
+              </a:cxn>
+              <a:cxn ang="0">
+                <a:pos x="connsiteX2" y="connsiteY2"/>
+              </a:cxn>
+              <a:cxn ang="0">
+                <a:pos x="connsiteX3" y="connsiteY3"/>
+              </a:cxn>
+            </a:cxnLst>
+            <a:rect l="l" t="t" r="r" b="b"/>
+            <a:pathLst>
+              <a:path w="2835357" h="1480837">
+                <a:moveTo>
+                  <a:pt x="2835357" y="1480837"/>
+                </a:moveTo>
+                <a:lnTo>
+                  <a:pt x="0" y="1480837"/>
+                </a:lnTo>
+                <a:lnTo>
+                  <a:pt x="1552727" y="0"/>
+                </a:lnTo>
+                <a:lnTo>
+                  <a:pt x="2835357" y="1223245"/>
+                </a:lnTo>
+                <a:close/>
+              </a:path>
+            </a:pathLst>
+          </a:custGeom>
+          <a:solidFill>
+            <a:schemeClr val="accent4">
+              <a:alpha val="30000"/>
+            </a:schemeClr>
+          </a:solidFill>
+          <a:ln>
+            <a:noFill/>
+          </a:ln>
+        </p:spPr>
+        <p:style>
+          <a:lnRef idx="2">
+            <a:schemeClr val="accent1">
+              <a:shade val="50000"/>
+            </a:schemeClr>
+          </a:lnRef>
+          <a:fillRef idx="1">
+            <a:schemeClr val="accent1"/>
+          </a:fillRef>
+          <a:effectRef idx="0">
+            <a:schemeClr val="accent1"/>
+          </a:effectRef>
+          <a:fontRef idx="minor">
+            <a:schemeClr val="lt1"/>
+          </a:fontRef>
+        </p:style>
+        <p:txBody>
+          <a:bodyPr wrap="square" rtlCol="0" anchor="ctr">
+            <a:noAutofit/>
+          </a:bodyPr>
+          <a:lstStyle/>
+          <a:p>
+            <a:pPr algn="ctr"/>
+            <a:endParaRPr lang="en-US" dirty="0"/>
+          </a:p>
+        </p:txBody>
+      </p:sp>
+      <p:sp>
+        <p:nvSpPr>
+          <p:cNvPr id="19" name="Isosceles Triangle 18">
+            <a:extLst>
+              <a:ext uri="{FF2B5EF4-FFF2-40B4-BE49-F238E27FC236}">
+                <a16:creationId xmlns:a16="http://schemas.microsoft.com/office/drawing/2014/main" id="{FF9F2414-84E8-453E-B1F3-389FDE8192D9}"/>
+              </a:ext>
+              <a:ext uri="{C183D7F6-B498-43B3-948B-1728B52AA6E4}">
+                <adec:decorative xmlns:adec="http://schemas.microsoft.com/office/drawing/2017/decorative" val="1"/>
+              </a:ext>
+            </a:extLst>
+          </p:cNvPr>
+          <p:cNvSpPr>
+            <a:spLocks noGrp="1" noRot="1" noChangeAspect="1" noMove="1" noResize="1" noEditPoints="1" noAdjustHandles="1" noChangeArrowheads="1" noChangeShapeType="1" noTextEdit="1"/>
+          </p:cNvSpPr>
+          <p:nvPr>
+            <p:extLst>
+              <p:ext uri="{386F3935-93C4-4BCD-93E2-E3B085C9AB24}">
+                <p16:designElem xmlns:p16="http://schemas.microsoft.com/office/powerpoint/2015/main" val="1"/>
+              </p:ext>
+            </p:extLst>
+          </p:nvPr>
+        </p:nvSpPr>
+        <p:spPr>
+          <a:xfrm flipH="1">
+            <a:off x="7976344" y="6115501"/>
+            <a:ext cx="1494513" cy="742499"/>
+          </a:xfrm>
+          <a:prstGeom prst="triangle">
+            <a:avLst/>
+          </a:prstGeom>
+          <a:solidFill>
+            <a:schemeClr val="accent1">
+              <a:alpha val="30000"/>
+            </a:schemeClr>
+          </a:solidFill>
+          <a:ln>
+            <a:noFill/>
+          </a:ln>
+        </p:spPr>
+        <p:style>
+          <a:lnRef idx="2">
+            <a:schemeClr val="accent1">
+              <a:shade val="50000"/>
+            </a:schemeClr>
+          </a:lnRef>
+          <a:fillRef idx="1">
+            <a:schemeClr val="accent1"/>
+          </a:fillRef>
+          <a:effectRef idx="0">
+            <a:schemeClr val="accent1"/>
+          </a:effectRef>
+          <a:fontRef idx="minor">
+            <a:schemeClr val="lt1"/>
+          </a:fontRef>
+        </p:style>
+        <p:txBody>
+          <a:bodyPr rtlCol="0" anchor="ctr"/>
+          <a:lstStyle/>
+          <a:p>
+            <a:pPr algn="ctr"/>
+            <a:endParaRPr lang="en-US"/>
+          </a:p>
+        </p:txBody>
+      </p:sp>
+      <p:sp>
+        <p:nvSpPr>
+          <p:cNvPr id="21" name="Isosceles Triangle 20">
+            <a:extLst>
+              <a:ext uri="{FF2B5EF4-FFF2-40B4-BE49-F238E27FC236}">
+                <a16:creationId xmlns:a16="http://schemas.microsoft.com/office/drawing/2014/main" id="{3ECA69A1-7536-43AC-85EF-C7106179F5ED}"/>
+              </a:ext>
+              <a:ext uri="{C183D7F6-B498-43B3-948B-1728B52AA6E4}">
+                <adec:decorative xmlns:adec="http://schemas.microsoft.com/office/drawing/2017/decorative" val="1"/>
+              </a:ext>
+            </a:extLst>
+          </p:cNvPr>
+          <p:cNvSpPr>
+            <a:spLocks noGrp="1" noRot="1" noChangeAspect="1" noMove="1" noResize="1" noEditPoints="1" noAdjustHandles="1" noChangeArrowheads="1" noChangeShapeType="1" noTextEdit="1"/>
+          </p:cNvSpPr>
+          <p:nvPr>
+            <p:extLst>
+              <p:ext uri="{386F3935-93C4-4BCD-93E2-E3B085C9AB24}">
+                <p16:designElem xmlns:p16="http://schemas.microsoft.com/office/powerpoint/2015/main" val="1"/>
+              </p:ext>
+            </p:extLst>
+          </p:nvPr>
+        </p:nvSpPr>
+        <p:spPr>
+          <a:xfrm flipH="1">
+            <a:off x="7604080" y="6453143"/>
+            <a:ext cx="814903" cy="404857"/>
+          </a:xfrm>
+          <a:prstGeom prst="triangle">
+            <a:avLst/>
+          </a:prstGeom>
+          <a:solidFill>
+            <a:schemeClr val="accent1">
+              <a:alpha val="30000"/>
+            </a:schemeClr>
+          </a:solidFill>
+          <a:ln>
+            <a:noFill/>
+          </a:ln>
+        </p:spPr>
+        <p:style>
+          <a:lnRef idx="2">
+            <a:schemeClr val="accent1">
+              <a:shade val="50000"/>
+            </a:schemeClr>
+          </a:lnRef>
+          <a:fillRef idx="1">
+            <a:schemeClr val="accent1"/>
+          </a:fillRef>
+          <a:effectRef idx="0">
+            <a:schemeClr val="accent1"/>
+          </a:effectRef>
+          <a:fontRef idx="minor">
+            <a:schemeClr val="lt1"/>
+          </a:fontRef>
+        </p:style>
+        <p:txBody>
+          <a:bodyPr rtlCol="0" anchor="ctr"/>
+          <a:lstStyle/>
+          <a:p>
+            <a:pPr algn="ctr"/>
+            <a:endParaRPr lang="en-US"/>
+          </a:p>
+        </p:txBody>
+      </p:sp>
+      <p:sp>
+        <p:nvSpPr>
+          <p:cNvPr id="6" name="TextBox 5">
+            <a:extLst>
+              <a:ext uri="{FF2B5EF4-FFF2-40B4-BE49-F238E27FC236}">
+                <a16:creationId xmlns:a16="http://schemas.microsoft.com/office/drawing/2014/main" id="{42F092D9-9422-7B90-2990-F9E8BCF32CF5}"/>
+              </a:ext>
+            </a:extLst>
+          </p:cNvPr>
+          <p:cNvSpPr txBox="1"/>
+          <p:nvPr/>
+        </p:nvSpPr>
+        <p:spPr>
+          <a:xfrm>
+            <a:off x="1320800" y="790533"/>
+            <a:ext cx="9664700" cy="1380506"/>
+          </a:xfrm>
+          <a:prstGeom prst="rect">
+            <a:avLst/>
+          </a:prstGeom>
+          <a:noFill/>
+        </p:spPr>
+        <p:txBody>
+          <a:bodyPr wrap="square">
+            <a:spAutoFit/>
+          </a:bodyPr>
+          <a:lstStyle/>
+          <a:p>
+            <a:pPr algn="ctr">
+              <a:lnSpc>
+                <a:spcPts val="5100"/>
+              </a:lnSpc>
+              <a:buNone/>
+            </a:pPr>
+            <a:r>
+              <a:rPr lang="en-US" sz="4000" b="0" i="0" dirty="0">
+                <a:solidFill>
+                  <a:schemeClr val="accent1"/>
+                </a:solidFill>
+                <a:effectLst/>
+                <a:latin typeface="Noto Sans JP Thin" panose="020B0200000000000000" pitchFamily="34" charset="-128"/>
+                <a:ea typeface="Noto Sans JP Thin" panose="020B0200000000000000" pitchFamily="34" charset="-128"/>
+              </a:rPr>
+              <a:t>A2C - The AI-powered CRM your</a:t>
+            </a:r>
+          </a:p>
+          <a:p>
+            <a:pPr algn="ctr">
+              <a:lnSpc>
+                <a:spcPts val="5100"/>
+              </a:lnSpc>
+              <a:buNone/>
+            </a:pPr>
+            <a:r>
+              <a:rPr lang="en-US" sz="4000" b="0" i="0" dirty="0">
+                <a:solidFill>
+                  <a:schemeClr val="accent1"/>
+                </a:solidFill>
+                <a:effectLst/>
+                <a:latin typeface="Noto Sans JP Thin" panose="020B0200000000000000" pitchFamily="34" charset="-128"/>
+                <a:ea typeface="Noto Sans JP Thin" panose="020B0200000000000000" pitchFamily="34" charset="-128"/>
+              </a:rPr>
+              <a:t>team will love</a:t>
+            </a:r>
+          </a:p>
+        </p:txBody>
+      </p:sp>
+      <p:sp>
+        <p:nvSpPr>
+          <p:cNvPr id="7" name="Rectangle: Rounded Corners 6">
+            <a:extLst>
+              <a:ext uri="{FF2B5EF4-FFF2-40B4-BE49-F238E27FC236}">
+                <a16:creationId xmlns:a16="http://schemas.microsoft.com/office/drawing/2014/main" id="{C767CE8A-427D-4583-6496-B8DEBD8EA1D2}"/>
+              </a:ext>
+            </a:extLst>
+          </p:cNvPr>
+          <p:cNvSpPr/>
+          <p:nvPr/>
+        </p:nvSpPr>
+        <p:spPr>
+          <a:xfrm>
+            <a:off x="2209800" y="3302000"/>
+            <a:ext cx="1765300" cy="1092200"/>
+          </a:xfrm>
+          <a:prstGeom prst="roundRect">
+            <a:avLst/>
+          </a:prstGeom>
+          <a:noFill/>
+          <a:ln w="9525"/>
+        </p:spPr>
+        <p:style>
+          <a:lnRef idx="2">
+            <a:schemeClr val="accent1">
+              <a:shade val="15000"/>
+            </a:schemeClr>
+          </a:lnRef>
+          <a:fillRef idx="1">
+            <a:schemeClr val="accent1"/>
+          </a:fillRef>
+          <a:effectRef idx="0">
+            <a:schemeClr val="accent1"/>
+          </a:effectRef>
+          <a:fontRef idx="minor">
+            <a:schemeClr val="lt1"/>
+          </a:fontRef>
+        </p:style>
+        <p:txBody>
+          <a:bodyPr rtlCol="0" anchor="ctr"/>
+          <a:lstStyle/>
+          <a:p>
+            <a:pPr algn="ctr"/>
+            <a:r>
+              <a:rPr lang="en-US" sz="2400" dirty="0">
+                <a:solidFill>
+                  <a:schemeClr val="tx2">
+                    <a:lumMod val="90000"/>
+                    <a:lumOff val="10000"/>
+                  </a:schemeClr>
+                </a:solidFill>
+                <a:latin typeface="Noto Sans JP Thin" panose="020B0200000000000000" pitchFamily="34" charset="-128"/>
+                <a:ea typeface="Noto Sans JP Thin" panose="020B0200000000000000" pitchFamily="34" charset="-128"/>
+              </a:rPr>
+              <a:t>Users</a:t>
+            </a:r>
+            <a:endParaRPr lang="en-IL" sz="2400" dirty="0">
+              <a:solidFill>
+                <a:schemeClr val="tx2">
+                  <a:lumMod val="90000"/>
+                  <a:lumOff val="10000"/>
+                </a:schemeClr>
+              </a:solidFill>
+              <a:latin typeface="Noto Sans JP Thin" panose="020B0200000000000000" pitchFamily="34" charset="-128"/>
+              <a:ea typeface="Noto Sans JP Thin" panose="020B0200000000000000" pitchFamily="34" charset="-128"/>
+            </a:endParaRPr>
+          </a:p>
+        </p:txBody>
+      </p:sp>
+      <p:sp>
+        <p:nvSpPr>
+          <p:cNvPr id="8" name="Rectangle: Rounded Corners 7">
+            <a:extLst>
+              <a:ext uri="{FF2B5EF4-FFF2-40B4-BE49-F238E27FC236}">
+                <a16:creationId xmlns:a16="http://schemas.microsoft.com/office/drawing/2014/main" id="{D7509843-A905-17A7-655D-9C99B0FA186B}"/>
+              </a:ext>
+            </a:extLst>
+          </p:cNvPr>
+          <p:cNvSpPr/>
+          <p:nvPr/>
+        </p:nvSpPr>
+        <p:spPr>
+          <a:xfrm>
+            <a:off x="4241800" y="3302000"/>
+            <a:ext cx="1765300" cy="1092200"/>
+          </a:xfrm>
+          <a:prstGeom prst="roundRect">
+            <a:avLst/>
+          </a:prstGeom>
+          <a:noFill/>
+          <a:ln w="9525"/>
+        </p:spPr>
+        <p:style>
+          <a:lnRef idx="2">
+            <a:schemeClr val="accent1">
+              <a:shade val="15000"/>
+            </a:schemeClr>
+          </a:lnRef>
+          <a:fillRef idx="1">
+            <a:schemeClr val="accent1"/>
+          </a:fillRef>
+          <a:effectRef idx="0">
+            <a:schemeClr val="accent1"/>
+          </a:effectRef>
+          <a:fontRef idx="minor">
+            <a:schemeClr val="lt1"/>
+          </a:fontRef>
+        </p:style>
+        <p:txBody>
+          <a:bodyPr rtlCol="0" anchor="ctr"/>
+          <a:lstStyle/>
+          <a:p>
+            <a:pPr algn="ctr"/>
+            <a:r>
+              <a:rPr lang="en-US" sz="2400" dirty="0">
+                <a:solidFill>
+                  <a:schemeClr val="tx2">
+                    <a:lumMod val="90000"/>
+                    <a:lumOff val="10000"/>
+                  </a:schemeClr>
+                </a:solidFill>
+                <a:latin typeface="Noto Sans JP Thin" panose="020B0200000000000000" pitchFamily="34" charset="-128"/>
+                <a:ea typeface="Noto Sans JP Thin" panose="020B0200000000000000" pitchFamily="34" charset="-128"/>
+              </a:rPr>
+              <a:t>Customers</a:t>
+            </a:r>
+            <a:endParaRPr lang="en-IL" sz="2400" dirty="0">
+              <a:solidFill>
+                <a:schemeClr val="tx2">
+                  <a:lumMod val="90000"/>
+                  <a:lumOff val="10000"/>
+                </a:schemeClr>
+              </a:solidFill>
+              <a:latin typeface="Noto Sans JP Thin" panose="020B0200000000000000" pitchFamily="34" charset="-128"/>
+              <a:ea typeface="Noto Sans JP Thin" panose="020B0200000000000000" pitchFamily="34" charset="-128"/>
+            </a:endParaRPr>
+          </a:p>
+        </p:txBody>
+      </p:sp>
+      <p:sp>
+        <p:nvSpPr>
+          <p:cNvPr id="10" name="Rectangle: Rounded Corners 9">
+            <a:extLst>
+              <a:ext uri="{FF2B5EF4-FFF2-40B4-BE49-F238E27FC236}">
+                <a16:creationId xmlns:a16="http://schemas.microsoft.com/office/drawing/2014/main" id="{64F46349-61F2-626D-CD12-DE9047C4A70B}"/>
+              </a:ext>
+            </a:extLst>
+          </p:cNvPr>
+          <p:cNvSpPr/>
+          <p:nvPr/>
+        </p:nvSpPr>
+        <p:spPr>
+          <a:xfrm>
+            <a:off x="6273800" y="3302000"/>
+            <a:ext cx="1765300" cy="1092200"/>
+          </a:xfrm>
+          <a:prstGeom prst="roundRect">
+            <a:avLst/>
+          </a:prstGeom>
+          <a:noFill/>
+          <a:ln w="9525"/>
+        </p:spPr>
+        <p:style>
+          <a:lnRef idx="2">
+            <a:schemeClr val="accent1">
+              <a:shade val="15000"/>
+            </a:schemeClr>
+          </a:lnRef>
+          <a:fillRef idx="1">
+            <a:schemeClr val="accent1"/>
+          </a:fillRef>
+          <a:effectRef idx="0">
+            <a:schemeClr val="accent1"/>
+          </a:effectRef>
+          <a:fontRef idx="minor">
+            <a:schemeClr val="lt1"/>
+          </a:fontRef>
+        </p:style>
+        <p:txBody>
+          <a:bodyPr rtlCol="0" anchor="ctr"/>
+          <a:lstStyle/>
+          <a:p>
+            <a:pPr algn="ctr"/>
+            <a:r>
+              <a:rPr lang="en-US" sz="2400" dirty="0">
+                <a:solidFill>
+                  <a:schemeClr val="tx2">
+                    <a:lumMod val="90000"/>
+                    <a:lumOff val="10000"/>
+                  </a:schemeClr>
+                </a:solidFill>
+                <a:latin typeface="Noto Sans JP Thin" panose="020B0200000000000000" pitchFamily="34" charset="-128"/>
+                <a:ea typeface="Noto Sans JP Thin" panose="020B0200000000000000" pitchFamily="34" charset="-128"/>
+              </a:rPr>
+              <a:t>Products</a:t>
+            </a:r>
+            <a:endParaRPr lang="en-IL" sz="2400" dirty="0">
+              <a:solidFill>
+                <a:schemeClr val="tx2">
+                  <a:lumMod val="90000"/>
+                  <a:lumOff val="10000"/>
+                </a:schemeClr>
+              </a:solidFill>
+              <a:latin typeface="Noto Sans JP Thin" panose="020B0200000000000000" pitchFamily="34" charset="-128"/>
+              <a:ea typeface="Noto Sans JP Thin" panose="020B0200000000000000" pitchFamily="34" charset="-128"/>
+            </a:endParaRPr>
+          </a:p>
+        </p:txBody>
+      </p:sp>
+      <p:sp>
+        <p:nvSpPr>
+          <p:cNvPr id="12" name="Rectangle: Rounded Corners 11">
+            <a:extLst>
+              <a:ext uri="{FF2B5EF4-FFF2-40B4-BE49-F238E27FC236}">
+                <a16:creationId xmlns:a16="http://schemas.microsoft.com/office/drawing/2014/main" id="{999A1FC8-BEDD-F84A-0ABA-26C252BCE846}"/>
+              </a:ext>
+            </a:extLst>
+          </p:cNvPr>
+          <p:cNvSpPr/>
+          <p:nvPr/>
+        </p:nvSpPr>
+        <p:spPr>
+          <a:xfrm>
+            <a:off x="8305800" y="3302000"/>
+            <a:ext cx="1765300" cy="1092200"/>
+          </a:xfrm>
+          <a:prstGeom prst="roundRect">
+            <a:avLst/>
+          </a:prstGeom>
+          <a:noFill/>
+          <a:ln w="9525"/>
+        </p:spPr>
+        <p:style>
+          <a:lnRef idx="2">
+            <a:schemeClr val="accent1">
+              <a:shade val="15000"/>
+            </a:schemeClr>
+          </a:lnRef>
+          <a:fillRef idx="1">
+            <a:schemeClr val="accent1"/>
+          </a:fillRef>
+          <a:effectRef idx="0">
+            <a:schemeClr val="accent1"/>
+          </a:effectRef>
+          <a:fontRef idx="minor">
+            <a:schemeClr val="lt1"/>
+          </a:fontRef>
+        </p:style>
+        <p:txBody>
+          <a:bodyPr rtlCol="0" anchor="ctr"/>
+          <a:lstStyle/>
+          <a:p>
+            <a:pPr algn="ctr"/>
+            <a:r>
+              <a:rPr lang="en-US" sz="2400" dirty="0">
+                <a:solidFill>
+                  <a:schemeClr val="tx2">
+                    <a:lumMod val="90000"/>
+                    <a:lumOff val="10000"/>
+                  </a:schemeClr>
+                </a:solidFill>
+                <a:latin typeface="Noto Sans JP Thin" panose="020B0200000000000000" pitchFamily="34" charset="-128"/>
+                <a:ea typeface="Noto Sans JP Thin" panose="020B0200000000000000" pitchFamily="34" charset="-128"/>
+              </a:rPr>
+              <a:t>Orders</a:t>
+            </a:r>
+            <a:endParaRPr lang="en-IL" sz="2400" dirty="0">
+              <a:solidFill>
+                <a:schemeClr val="tx2">
+                  <a:lumMod val="90000"/>
+                  <a:lumOff val="10000"/>
+                </a:schemeClr>
+              </a:solidFill>
+              <a:latin typeface="Noto Sans JP Thin" panose="020B0200000000000000" pitchFamily="34" charset="-128"/>
+              <a:ea typeface="Noto Sans JP Thin" panose="020B0200000000000000" pitchFamily="34" charset="-128"/>
+            </a:endParaRPr>
+          </a:p>
+        </p:txBody>
+      </p:sp>
+    </p:spTree>
+    <p:extLst>
+      <p:ext uri="{BB962C8B-B14F-4D97-AF65-F5344CB8AC3E}">
+        <p14:creationId xmlns:p14="http://schemas.microsoft.com/office/powerpoint/2010/main" val="1299460525"/>
+      </p:ext>
+    </p:extLst>
+  </p:cSld>
+  <p:clrMapOvr>
+    <a:masterClrMapping/>
+  </p:clrMapOvr>
+</p:sld>
+</file>
+
+<file path=ppt/slides/slide6.xml><?xml version="1.0" encoding="utf-8"?>
+<p:sld xmlns:a="http://schemas.openxmlformats.org/drawingml/2006/main" xmlns:r="http://schemas.openxmlformats.org/officeDocument/2006/relationships" xmlns:p="http://schemas.openxmlformats.org/presentationml/2006/main">
+  <p:cSld>
     <p:spTree>
       <p:nvGrpSpPr>
         <p:cNvPr id="1" name=""/>
@@ -9346,10 +12145,10 @@
       </p:grpSpPr>
       <p:pic>
         <p:nvPicPr>
-          <p:cNvPr id="3" name="Picture 2">
-            <a:extLst>
-              <a:ext uri="{FF2B5EF4-FFF2-40B4-BE49-F238E27FC236}">
-                <a16:creationId xmlns:a16="http://schemas.microsoft.com/office/drawing/2014/main" id="{D7C46D48-8519-3261-C8EE-454CC2EDF1AA}"/>
+          <p:cNvPr id="4" name="Picture 3">
+            <a:extLst>
+              <a:ext uri="{FF2B5EF4-FFF2-40B4-BE49-F238E27FC236}">
+                <a16:creationId xmlns:a16="http://schemas.microsoft.com/office/drawing/2014/main" id="{EFBB7C5E-849A-AB2C-E179-FAAF5C4F195F}"/>
               </a:ext>
             </a:extLst>
           </p:cNvPr>
@@ -9366,18 +12165,21 @@
         </p:blipFill>
         <p:spPr>
           <a:xfrm>
-            <a:off x="4581313" y="380574"/>
-            <a:ext cx="3029373" cy="6096851"/>
+            <a:off x="1958006" y="643467"/>
+            <a:ext cx="8275988" cy="5571065"/>
           </a:xfrm>
           <a:prstGeom prst="rect">
             <a:avLst/>
           </a:prstGeom>
+          <a:ln>
+            <a:noFill/>
+          </a:ln>
         </p:spPr>
       </p:pic>
     </p:spTree>
     <p:extLst>
       <p:ext uri="{BB962C8B-B14F-4D97-AF65-F5344CB8AC3E}">
-        <p14:creationId xmlns:p14="http://schemas.microsoft.com/office/powerpoint/2010/main" val="1299460525"/>
+        <p14:creationId xmlns:p14="http://schemas.microsoft.com/office/powerpoint/2010/main" val="777301383"/>
       </p:ext>
     </p:extLst>
   </p:cSld>
@@ -9387,7 +12189,37 @@
 </p:sld>
 </file>
 
-<file path=ppt/slides/slide6.xml><?xml version="1.0" encoding="utf-8"?>
+<file path=ppt/slides/slide7.xml><?xml version="1.0" encoding="utf-8"?>
+<p:sld xmlns:a="http://schemas.openxmlformats.org/drawingml/2006/main" xmlns:r="http://schemas.openxmlformats.org/officeDocument/2006/relationships" xmlns:p="http://schemas.openxmlformats.org/presentationml/2006/main">
+  <p:cSld>
+    <p:spTree>
+      <p:nvGrpSpPr>
+        <p:cNvPr id="1" name=""/>
+        <p:cNvGrpSpPr/>
+        <p:nvPr/>
+      </p:nvGrpSpPr>
+      <p:grpSpPr>
+        <a:xfrm>
+          <a:off x="0" y="0"/>
+          <a:ext cx="0" cy="0"/>
+          <a:chOff x="0" y="0"/>
+          <a:chExt cx="0" cy="0"/>
+        </a:xfrm>
+      </p:grpSpPr>
+    </p:spTree>
+    <p:extLst>
+      <p:ext uri="{BB962C8B-B14F-4D97-AF65-F5344CB8AC3E}">
+        <p14:creationId xmlns:p14="http://schemas.microsoft.com/office/powerpoint/2010/main" val="387015301"/>
+      </p:ext>
+    </p:extLst>
+  </p:cSld>
+  <p:clrMapOvr>
+    <a:masterClrMapping/>
+  </p:clrMapOvr>
+</p:sld>
+</file>
+
+<file path=ppt/slides/slide8.xml><?xml version="1.0" encoding="utf-8"?>
 <p:sld xmlns:a="http://schemas.openxmlformats.org/drawingml/2006/main" xmlns:r="http://schemas.openxmlformats.org/officeDocument/2006/relationships" xmlns:p="http://schemas.openxmlformats.org/presentationml/2006/main">
   <p:cSld>
     <p:spTree>
@@ -12259,7 +15091,7 @@
 </p:sld>
 </file>
 
-<file path=ppt/slides/slide7.xml><?xml version="1.0" encoding="utf-8"?>
+<file path=ppt/slides/slide9.xml><?xml version="1.0" encoding="utf-8"?>
 <p:sld xmlns:a="http://schemas.openxmlformats.org/drawingml/2006/main" xmlns:r="http://schemas.openxmlformats.org/officeDocument/2006/relationships" xmlns:p="http://schemas.openxmlformats.org/presentationml/2006/main">
   <p:cSld>
     <p:spTree>
@@ -13646,1869 +16478,6 @@
     <p:extLst>
       <p:ext uri="{BB962C8B-B14F-4D97-AF65-F5344CB8AC3E}">
         <p14:creationId xmlns:p14="http://schemas.microsoft.com/office/powerpoint/2010/main" val="3836392025"/>
-      </p:ext>
-    </p:extLst>
-  </p:cSld>
-  <p:clrMapOvr>
-    <a:masterClrMapping/>
-  </p:clrMapOvr>
-</p:sld>
-</file>
-
-<file path=ppt/slides/slide8.xml><?xml version="1.0" encoding="utf-8"?>
-<p:sld xmlns:a="http://schemas.openxmlformats.org/drawingml/2006/main" xmlns:r="http://schemas.openxmlformats.org/officeDocument/2006/relationships" xmlns:p="http://schemas.openxmlformats.org/presentationml/2006/main">
-  <p:cSld>
-    <p:spTree>
-      <p:nvGrpSpPr>
-        <p:cNvPr id="1" name=""/>
-        <p:cNvGrpSpPr/>
-        <p:nvPr/>
-      </p:nvGrpSpPr>
-      <p:grpSpPr>
-        <a:xfrm>
-          <a:off x="0" y="0"/>
-          <a:ext cx="0" cy="0"/>
-          <a:chOff x="0" y="0"/>
-          <a:chExt cx="0" cy="0"/>
-        </a:xfrm>
-      </p:grpSpPr>
-      <p:sp>
-        <p:nvSpPr>
-          <p:cNvPr id="2" name="AutoShape 13">
-            <a:extLst>
-              <a:ext uri="{FF2B5EF4-FFF2-40B4-BE49-F238E27FC236}">
-                <a16:creationId xmlns:a16="http://schemas.microsoft.com/office/drawing/2014/main" id="{78FF15C6-2884-A197-AD86-D46D737FF0CB}"/>
-              </a:ext>
-            </a:extLst>
-          </p:cNvPr>
-          <p:cNvSpPr>
-            <a:spLocks noChangeArrowheads="1"/>
-          </p:cNvSpPr>
-          <p:nvPr/>
-        </p:nvSpPr>
-        <p:spPr bwMode="auto">
-          <a:xfrm>
-            <a:off x="74234" y="701263"/>
-            <a:ext cx="1315653" cy="295343"/>
-          </a:xfrm>
-          <a:prstGeom prst="roundRect">
-            <a:avLst>
-              <a:gd name="adj" fmla="val 16667"/>
-            </a:avLst>
-          </a:prstGeom>
-          <a:solidFill>
-            <a:schemeClr val="bg1"/>
-          </a:solidFill>
-          <a:ln w="12700">
-            <a:solidFill>
-              <a:srgbClr val="09101D"/>
-            </a:solidFill>
-            <a:miter lim="800000"/>
-            <a:headEnd/>
-            <a:tailEnd/>
-          </a:ln>
-        </p:spPr>
-        <p:txBody>
-          <a:bodyPr vert="horz" wrap="square" lIns="91440" tIns="45720" rIns="91440" bIns="45720" numCol="1" anchor="ctr" anchorCtr="0" compatLnSpc="1">
-            <a:prstTxWarp prst="textNoShape">
-              <a:avLst/>
-            </a:prstTxWarp>
-          </a:bodyPr>
-          <a:lstStyle/>
-          <a:p>
-            <a:pPr marL="0" marR="0" lvl="0" indent="0" algn="ctr" defTabSz="914400" rtl="0" eaLnBrk="0" fontAlgn="base" latinLnBrk="0" hangingPunct="0">
-              <a:lnSpc>
-                <a:spcPct val="100000"/>
-              </a:lnSpc>
-              <a:spcBef>
-                <a:spcPct val="0"/>
-              </a:spcBef>
-              <a:spcAft>
-                <a:spcPct val="0"/>
-              </a:spcAft>
-              <a:buClrTx/>
-              <a:buSzTx/>
-              <a:buFontTx/>
-              <a:buNone/>
-              <a:tabLst/>
-            </a:pPr>
-            <a:r>
-              <a:rPr kumimoji="0" lang="en-US" altLang="en-IL" b="0" i="0" u="none" strike="noStrike" cap="none" normalizeH="0" baseline="0" dirty="0">
-                <a:ln>
-                  <a:noFill/>
-                </a:ln>
-                <a:solidFill>
-                  <a:schemeClr val="tx1"/>
-                </a:solidFill>
-                <a:effectLst/>
-                <a:latin typeface="Calibri" panose="020F0502020204030204" pitchFamily="34" charset="0"/>
-                <a:ea typeface="Yu Gothic" panose="020B0400000000000000" pitchFamily="34" charset="-128"/>
-                <a:cs typeface="Arial" panose="020B0604020202020204" pitchFamily="34" charset="0"/>
-              </a:rPr>
-              <a:t>A2C</a:t>
-            </a:r>
-            <a:endParaRPr kumimoji="0" lang="en-IL" altLang="en-IL" sz="4000" b="0" i="0" u="none" strike="noStrike" cap="none" normalizeH="0" baseline="0" dirty="0">
-              <a:ln>
-                <a:noFill/>
-              </a:ln>
-              <a:solidFill>
-                <a:schemeClr val="tx1"/>
-              </a:solidFill>
-              <a:effectLst/>
-              <a:latin typeface="Arial" panose="020B0604020202020204" pitchFamily="34" charset="0"/>
-            </a:endParaRPr>
-          </a:p>
-        </p:txBody>
-      </p:sp>
-      <p:sp>
-        <p:nvSpPr>
-          <p:cNvPr id="3" name="Rectangle 2">
-            <a:extLst>
-              <a:ext uri="{FF2B5EF4-FFF2-40B4-BE49-F238E27FC236}">
-                <a16:creationId xmlns:a16="http://schemas.microsoft.com/office/drawing/2014/main" id="{B4C09A88-5F98-C840-2E68-5720BEC0681D}"/>
-              </a:ext>
-            </a:extLst>
-          </p:cNvPr>
-          <p:cNvSpPr/>
-          <p:nvPr/>
-        </p:nvSpPr>
-        <p:spPr>
-          <a:xfrm>
-            <a:off x="2478179" y="117618"/>
-            <a:ext cx="3385068" cy="466687"/>
-          </a:xfrm>
-          <a:prstGeom prst="rect">
-            <a:avLst/>
-          </a:prstGeom>
-          <a:solidFill>
-            <a:schemeClr val="accent2">
-              <a:lumMod val="40000"/>
-              <a:lumOff val="60000"/>
-            </a:schemeClr>
-          </a:solidFill>
-        </p:spPr>
-        <p:style>
-          <a:lnRef idx="2">
-            <a:schemeClr val="accent1">
-              <a:shade val="15000"/>
-            </a:schemeClr>
-          </a:lnRef>
-          <a:fillRef idx="1">
-            <a:schemeClr val="accent1"/>
-          </a:fillRef>
-          <a:effectRef idx="0">
-            <a:schemeClr val="accent1"/>
-          </a:effectRef>
-          <a:fontRef idx="minor">
-            <a:schemeClr val="lt1"/>
-          </a:fontRef>
-        </p:style>
-        <p:txBody>
-          <a:bodyPr rtlCol="0" anchor="ctr"/>
-          <a:lstStyle/>
-          <a:p>
-            <a:pPr algn="ctr"/>
-            <a:r>
-              <a:rPr lang="en-US" dirty="0">
-                <a:solidFill>
-                  <a:schemeClr val="tx1"/>
-                </a:solidFill>
-              </a:rPr>
-              <a:t>Folders Structure</a:t>
-            </a:r>
-            <a:endParaRPr lang="en-IL" dirty="0">
-              <a:solidFill>
-                <a:schemeClr val="tx1"/>
-              </a:solidFill>
-            </a:endParaRPr>
-          </a:p>
-        </p:txBody>
-      </p:sp>
-      <p:sp>
-        <p:nvSpPr>
-          <p:cNvPr id="4" name="AutoShape 13">
-            <a:extLst>
-              <a:ext uri="{FF2B5EF4-FFF2-40B4-BE49-F238E27FC236}">
-                <a16:creationId xmlns:a16="http://schemas.microsoft.com/office/drawing/2014/main" id="{417BBC80-527E-A9B3-A84D-141B4841DB55}"/>
-              </a:ext>
-            </a:extLst>
-          </p:cNvPr>
-          <p:cNvSpPr>
-            <a:spLocks noChangeArrowheads="1"/>
-          </p:cNvSpPr>
-          <p:nvPr/>
-        </p:nvSpPr>
-        <p:spPr bwMode="auto">
-          <a:xfrm>
-            <a:off x="1298448" y="1842973"/>
-            <a:ext cx="832104" cy="305112"/>
-          </a:xfrm>
-          <a:prstGeom prst="roundRect">
-            <a:avLst>
-              <a:gd name="adj" fmla="val 16667"/>
-            </a:avLst>
-          </a:prstGeom>
-          <a:solidFill>
-            <a:schemeClr val="bg1"/>
-          </a:solidFill>
-          <a:ln w="12700">
-            <a:solidFill>
-              <a:srgbClr val="09101D"/>
-            </a:solidFill>
-            <a:miter lim="800000"/>
-            <a:headEnd/>
-            <a:tailEnd/>
-          </a:ln>
-        </p:spPr>
-        <p:txBody>
-          <a:bodyPr vert="horz" wrap="square" lIns="91440" tIns="45720" rIns="91440" bIns="45720" numCol="1" anchor="ctr" anchorCtr="0" compatLnSpc="1">
-            <a:prstTxWarp prst="textNoShape">
-              <a:avLst/>
-            </a:prstTxWarp>
-          </a:bodyPr>
-          <a:lstStyle/>
-          <a:p>
-            <a:pPr marL="0" marR="0" lvl="0" indent="0" algn="ctr" defTabSz="914400" rtl="0" eaLnBrk="0" fontAlgn="base" latinLnBrk="0" hangingPunct="0">
-              <a:lnSpc>
-                <a:spcPct val="100000"/>
-              </a:lnSpc>
-              <a:spcBef>
-                <a:spcPct val="0"/>
-              </a:spcBef>
-              <a:spcAft>
-                <a:spcPct val="0"/>
-              </a:spcAft>
-              <a:buClrTx/>
-              <a:buSzTx/>
-              <a:buFontTx/>
-              <a:buNone/>
-              <a:tabLst/>
-            </a:pPr>
-            <a:r>
-              <a:rPr kumimoji="0" lang="en-US" altLang="en-IL" b="0" i="0" u="none" strike="noStrike" cap="none" normalizeH="0" baseline="0" dirty="0">
-                <a:ln>
-                  <a:noFill/>
-                </a:ln>
-                <a:solidFill>
-                  <a:schemeClr val="tx1"/>
-                </a:solidFill>
-                <a:effectLst/>
-                <a:latin typeface="Calibri" panose="020F0502020204030204" pitchFamily="34" charset="0"/>
-                <a:ea typeface="Yu Gothic" panose="020B0400000000000000" pitchFamily="34" charset="-128"/>
-                <a:cs typeface="Arial" panose="020B0604020202020204" pitchFamily="34" charset="0"/>
-              </a:rPr>
-              <a:t>Server</a:t>
-            </a:r>
-            <a:endParaRPr kumimoji="0" lang="en-IL" altLang="en-IL" sz="4000" b="0" i="0" u="none" strike="noStrike" cap="none" normalizeH="0" baseline="0" dirty="0">
-              <a:ln>
-                <a:noFill/>
-              </a:ln>
-              <a:solidFill>
-                <a:schemeClr val="tx1"/>
-              </a:solidFill>
-              <a:effectLst/>
-              <a:latin typeface="Arial" panose="020B0604020202020204" pitchFamily="34" charset="0"/>
-            </a:endParaRPr>
-          </a:p>
-        </p:txBody>
-      </p:sp>
-      <p:sp>
-        <p:nvSpPr>
-          <p:cNvPr id="6" name="AutoShape 13">
-            <a:extLst>
-              <a:ext uri="{FF2B5EF4-FFF2-40B4-BE49-F238E27FC236}">
-                <a16:creationId xmlns:a16="http://schemas.microsoft.com/office/drawing/2014/main" id="{EFA49FBE-0BEA-95E9-179B-C50C986B99F4}"/>
-              </a:ext>
-            </a:extLst>
-          </p:cNvPr>
-          <p:cNvSpPr>
-            <a:spLocks noChangeArrowheads="1"/>
-          </p:cNvSpPr>
-          <p:nvPr/>
-        </p:nvSpPr>
-        <p:spPr bwMode="auto">
-          <a:xfrm>
-            <a:off x="1280160" y="1100440"/>
-            <a:ext cx="761080" cy="305112"/>
-          </a:xfrm>
-          <a:prstGeom prst="roundRect">
-            <a:avLst>
-              <a:gd name="adj" fmla="val 16667"/>
-            </a:avLst>
-          </a:prstGeom>
-          <a:solidFill>
-            <a:schemeClr val="bg1"/>
-          </a:solidFill>
-          <a:ln w="12700">
-            <a:solidFill>
-              <a:srgbClr val="09101D"/>
-            </a:solidFill>
-            <a:miter lim="800000"/>
-            <a:headEnd/>
-            <a:tailEnd/>
-          </a:ln>
-        </p:spPr>
-        <p:txBody>
-          <a:bodyPr vert="horz" wrap="square" lIns="91440" tIns="45720" rIns="91440" bIns="45720" numCol="1" anchor="ctr" anchorCtr="0" compatLnSpc="1">
-            <a:prstTxWarp prst="textNoShape">
-              <a:avLst/>
-            </a:prstTxWarp>
-          </a:bodyPr>
-          <a:lstStyle/>
-          <a:p>
-            <a:pPr marL="0" marR="0" lvl="0" indent="0" algn="ctr" defTabSz="914400" rtl="0" eaLnBrk="0" fontAlgn="base" latinLnBrk="0" hangingPunct="0">
-              <a:lnSpc>
-                <a:spcPct val="100000"/>
-              </a:lnSpc>
-              <a:spcBef>
-                <a:spcPct val="0"/>
-              </a:spcBef>
-              <a:spcAft>
-                <a:spcPct val="0"/>
-              </a:spcAft>
-              <a:buClrTx/>
-              <a:buSzTx/>
-              <a:buFontTx/>
-              <a:buNone/>
-              <a:tabLst/>
-            </a:pPr>
-            <a:r>
-              <a:rPr kumimoji="0" lang="en-US" altLang="en-IL" b="0" i="0" u="none" strike="noStrike" cap="none" normalizeH="0" baseline="0" dirty="0">
-                <a:ln>
-                  <a:noFill/>
-                </a:ln>
-                <a:solidFill>
-                  <a:schemeClr val="tx1"/>
-                </a:solidFill>
-                <a:effectLst/>
-                <a:latin typeface="Calibri" panose="020F0502020204030204" pitchFamily="34" charset="0"/>
-                <a:ea typeface="Yu Gothic" panose="020B0400000000000000" pitchFamily="34" charset="-128"/>
-                <a:cs typeface="Arial" panose="020B0604020202020204" pitchFamily="34" charset="0"/>
-              </a:rPr>
-              <a:t>Client</a:t>
-            </a:r>
-            <a:endParaRPr kumimoji="0" lang="en-IL" altLang="en-IL" sz="4000" b="0" i="0" u="none" strike="noStrike" cap="none" normalizeH="0" baseline="0" dirty="0">
-              <a:ln>
-                <a:noFill/>
-              </a:ln>
-              <a:solidFill>
-                <a:schemeClr val="tx1"/>
-              </a:solidFill>
-              <a:effectLst/>
-              <a:latin typeface="Arial" panose="020B0604020202020204" pitchFamily="34" charset="0"/>
-            </a:endParaRPr>
-          </a:p>
-        </p:txBody>
-      </p:sp>
-      <p:sp>
-        <p:nvSpPr>
-          <p:cNvPr id="7" name="AutoShape 13">
-            <a:extLst>
-              <a:ext uri="{FF2B5EF4-FFF2-40B4-BE49-F238E27FC236}">
-                <a16:creationId xmlns:a16="http://schemas.microsoft.com/office/drawing/2014/main" id="{0A62B873-9219-6D42-FED9-1EFD25F683FB}"/>
-              </a:ext>
-            </a:extLst>
-          </p:cNvPr>
-          <p:cNvSpPr>
-            <a:spLocks noChangeArrowheads="1"/>
-          </p:cNvSpPr>
-          <p:nvPr/>
-        </p:nvSpPr>
-        <p:spPr bwMode="auto">
-          <a:xfrm>
-            <a:off x="1283208" y="6338772"/>
-            <a:ext cx="1675482" cy="359441"/>
-          </a:xfrm>
-          <a:prstGeom prst="roundRect">
-            <a:avLst>
-              <a:gd name="adj" fmla="val 16667"/>
-            </a:avLst>
-          </a:prstGeom>
-          <a:solidFill>
-            <a:schemeClr val="bg1"/>
-          </a:solidFill>
-          <a:ln w="12700">
-            <a:solidFill>
-              <a:srgbClr val="09101D"/>
-            </a:solidFill>
-            <a:miter lim="800000"/>
-            <a:headEnd/>
-            <a:tailEnd/>
-          </a:ln>
-        </p:spPr>
-        <p:txBody>
-          <a:bodyPr vert="horz" wrap="square" lIns="91440" tIns="45720" rIns="91440" bIns="45720" numCol="1" anchor="ctr" anchorCtr="0" compatLnSpc="1">
-            <a:prstTxWarp prst="textNoShape">
-              <a:avLst/>
-            </a:prstTxWarp>
-          </a:bodyPr>
-          <a:lstStyle/>
-          <a:p>
-            <a:pPr algn="ctr" eaLnBrk="0" fontAlgn="base" hangingPunct="0">
-              <a:spcBef>
-                <a:spcPct val="0"/>
-              </a:spcBef>
-              <a:spcAft>
-                <a:spcPct val="0"/>
-              </a:spcAft>
-            </a:pPr>
-            <a:r>
-              <a:rPr lang="en-US" altLang="en-IL" dirty="0">
-                <a:latin typeface="Calibri" panose="020F0502020204030204" pitchFamily="34" charset="0"/>
-                <a:ea typeface="Yu Gothic" panose="020B0400000000000000" pitchFamily="34" charset="-128"/>
-                <a:cs typeface="Arial" panose="020B0604020202020204" pitchFamily="34" charset="0"/>
-              </a:rPr>
-              <a:t>Documentation</a:t>
-            </a:r>
-            <a:endParaRPr lang="en-IL" altLang="en-IL" dirty="0">
-              <a:latin typeface="Calibri" panose="020F0502020204030204" pitchFamily="34" charset="0"/>
-              <a:ea typeface="Yu Gothic" panose="020B0400000000000000" pitchFamily="34" charset="-128"/>
-              <a:cs typeface="Arial" panose="020B0604020202020204" pitchFamily="34" charset="0"/>
-            </a:endParaRPr>
-          </a:p>
-        </p:txBody>
-      </p:sp>
-      <p:cxnSp>
-        <p:nvCxnSpPr>
-          <p:cNvPr id="9" name="Straight Connector 8">
-            <a:extLst>
-              <a:ext uri="{FF2B5EF4-FFF2-40B4-BE49-F238E27FC236}">
-                <a16:creationId xmlns:a16="http://schemas.microsoft.com/office/drawing/2014/main" id="{57E11C29-6CF2-2E2F-E747-35691FFFFBC2}"/>
-              </a:ext>
-            </a:extLst>
-          </p:cNvPr>
-          <p:cNvCxnSpPr>
-            <a:cxnSpLocks/>
-          </p:cNvCxnSpPr>
-          <p:nvPr/>
-        </p:nvCxnSpPr>
-        <p:spPr>
-          <a:xfrm>
-            <a:off x="634066" y="996606"/>
-            <a:ext cx="0" cy="5500327"/>
-          </a:xfrm>
-          <a:prstGeom prst="line">
-            <a:avLst/>
-          </a:prstGeom>
-        </p:spPr>
-        <p:style>
-          <a:lnRef idx="2">
-            <a:schemeClr val="accent1"/>
-          </a:lnRef>
-          <a:fillRef idx="0">
-            <a:schemeClr val="accent1"/>
-          </a:fillRef>
-          <a:effectRef idx="1">
-            <a:schemeClr val="accent1"/>
-          </a:effectRef>
-          <a:fontRef idx="minor">
-            <a:schemeClr val="tx1"/>
-          </a:fontRef>
-        </p:style>
-      </p:cxnSp>
-      <p:cxnSp>
-        <p:nvCxnSpPr>
-          <p:cNvPr id="10" name="Straight Connector 9">
-            <a:extLst>
-              <a:ext uri="{FF2B5EF4-FFF2-40B4-BE49-F238E27FC236}">
-                <a16:creationId xmlns:a16="http://schemas.microsoft.com/office/drawing/2014/main" id="{8E575987-DD26-185B-E83A-9C5F84B0A4A3}"/>
-              </a:ext>
-            </a:extLst>
-          </p:cNvPr>
-          <p:cNvCxnSpPr>
-            <a:cxnSpLocks/>
-          </p:cNvCxnSpPr>
-          <p:nvPr/>
-        </p:nvCxnSpPr>
-        <p:spPr>
-          <a:xfrm>
-            <a:off x="634066" y="1280160"/>
-            <a:ext cx="646094" cy="9768"/>
-          </a:xfrm>
-          <a:prstGeom prst="line">
-            <a:avLst/>
-          </a:prstGeom>
-        </p:spPr>
-        <p:style>
-          <a:lnRef idx="2">
-            <a:schemeClr val="accent1"/>
-          </a:lnRef>
-          <a:fillRef idx="0">
-            <a:schemeClr val="accent1"/>
-          </a:fillRef>
-          <a:effectRef idx="1">
-            <a:schemeClr val="accent1"/>
-          </a:effectRef>
-          <a:fontRef idx="minor">
-            <a:schemeClr val="tx1"/>
-          </a:fontRef>
-        </p:style>
-      </p:cxnSp>
-      <p:cxnSp>
-        <p:nvCxnSpPr>
-          <p:cNvPr id="20" name="Straight Connector 19">
-            <a:extLst>
-              <a:ext uri="{FF2B5EF4-FFF2-40B4-BE49-F238E27FC236}">
-                <a16:creationId xmlns:a16="http://schemas.microsoft.com/office/drawing/2014/main" id="{63BA3F4B-DFBF-9FDB-CC15-5D15E7301C4E}"/>
-              </a:ext>
-            </a:extLst>
-          </p:cNvPr>
-          <p:cNvCxnSpPr>
-            <a:cxnSpLocks/>
-          </p:cNvCxnSpPr>
-          <p:nvPr/>
-        </p:nvCxnSpPr>
-        <p:spPr>
-          <a:xfrm>
-            <a:off x="640162" y="2008632"/>
-            <a:ext cx="658286" cy="0"/>
-          </a:xfrm>
-          <a:prstGeom prst="line">
-            <a:avLst/>
-          </a:prstGeom>
-        </p:spPr>
-        <p:style>
-          <a:lnRef idx="2">
-            <a:schemeClr val="accent1"/>
-          </a:lnRef>
-          <a:fillRef idx="0">
-            <a:schemeClr val="accent1"/>
-          </a:fillRef>
-          <a:effectRef idx="1">
-            <a:schemeClr val="accent1"/>
-          </a:effectRef>
-          <a:fontRef idx="minor">
-            <a:schemeClr val="tx1"/>
-          </a:fontRef>
-        </p:style>
-      </p:cxnSp>
-      <p:cxnSp>
-        <p:nvCxnSpPr>
-          <p:cNvPr id="22" name="Straight Connector 21">
-            <a:extLst>
-              <a:ext uri="{FF2B5EF4-FFF2-40B4-BE49-F238E27FC236}">
-                <a16:creationId xmlns:a16="http://schemas.microsoft.com/office/drawing/2014/main" id="{83E70F1E-D267-7CAE-D953-D335D1601B47}"/>
-              </a:ext>
-            </a:extLst>
-          </p:cNvPr>
-          <p:cNvCxnSpPr>
-            <a:cxnSpLocks/>
-          </p:cNvCxnSpPr>
-          <p:nvPr/>
-        </p:nvCxnSpPr>
-        <p:spPr>
-          <a:xfrm>
-            <a:off x="624922" y="6496933"/>
-            <a:ext cx="658286" cy="0"/>
-          </a:xfrm>
-          <a:prstGeom prst="line">
-            <a:avLst/>
-          </a:prstGeom>
-        </p:spPr>
-        <p:style>
-          <a:lnRef idx="2">
-            <a:schemeClr val="accent1"/>
-          </a:lnRef>
-          <a:fillRef idx="0">
-            <a:schemeClr val="accent1"/>
-          </a:fillRef>
-          <a:effectRef idx="1">
-            <a:schemeClr val="accent1"/>
-          </a:effectRef>
-          <a:fontRef idx="minor">
-            <a:schemeClr val="tx1"/>
-          </a:fontRef>
-        </p:style>
-      </p:cxnSp>
-      <p:sp>
-        <p:nvSpPr>
-          <p:cNvPr id="24" name="AutoShape 13">
-            <a:extLst>
-              <a:ext uri="{FF2B5EF4-FFF2-40B4-BE49-F238E27FC236}">
-                <a16:creationId xmlns:a16="http://schemas.microsoft.com/office/drawing/2014/main" id="{7B32EEA7-56D5-EB16-EF79-1E4E9A955A3E}"/>
-              </a:ext>
-            </a:extLst>
-          </p:cNvPr>
-          <p:cNvSpPr>
-            <a:spLocks noChangeArrowheads="1"/>
-          </p:cNvSpPr>
-          <p:nvPr/>
-        </p:nvSpPr>
-        <p:spPr bwMode="auto">
-          <a:xfrm>
-            <a:off x="2235397" y="2419045"/>
-            <a:ext cx="1495356" cy="359440"/>
-          </a:xfrm>
-          <a:prstGeom prst="roundRect">
-            <a:avLst>
-              <a:gd name="adj" fmla="val 16667"/>
-            </a:avLst>
-          </a:prstGeom>
-          <a:solidFill>
-            <a:schemeClr val="bg1"/>
-          </a:solidFill>
-          <a:ln w="12700">
-            <a:solidFill>
-              <a:srgbClr val="09101D"/>
-            </a:solidFill>
-            <a:miter lim="800000"/>
-            <a:headEnd/>
-            <a:tailEnd/>
-          </a:ln>
-        </p:spPr>
-        <p:txBody>
-          <a:bodyPr vert="horz" wrap="square" lIns="91440" tIns="45720" rIns="91440" bIns="45720" numCol="1" anchor="ctr" anchorCtr="0" compatLnSpc="1">
-            <a:prstTxWarp prst="textNoShape">
-              <a:avLst/>
-            </a:prstTxWarp>
-          </a:bodyPr>
-          <a:lstStyle/>
-          <a:p>
-            <a:pPr lvl="0" algn="ctr" eaLnBrk="0" fontAlgn="base" hangingPunct="0">
-              <a:spcBef>
-                <a:spcPct val="0"/>
-              </a:spcBef>
-              <a:spcAft>
-                <a:spcPct val="0"/>
-              </a:spcAft>
-            </a:pPr>
-            <a:r>
-              <a:rPr lang="en-US" altLang="en-IL" dirty="0">
-                <a:latin typeface="Calibri" panose="020F0502020204030204" pitchFamily="34" charset="0"/>
-                <a:ea typeface="Yu Gothic" panose="020B0400000000000000" pitchFamily="34" charset="-128"/>
-                <a:cs typeface="Arial" panose="020B0604020202020204" pitchFamily="34" charset="0"/>
-              </a:rPr>
-              <a:t>A2C.CRM.Api</a:t>
-            </a:r>
-            <a:endParaRPr kumimoji="0" lang="en-IL" altLang="en-IL" sz="4000" b="0" i="0" u="none" strike="noStrike" cap="none" normalizeH="0" baseline="0" dirty="0">
-              <a:ln>
-                <a:noFill/>
-              </a:ln>
-              <a:solidFill>
-                <a:schemeClr val="tx1"/>
-              </a:solidFill>
-              <a:effectLst/>
-              <a:latin typeface="Arial" panose="020B0604020202020204" pitchFamily="34" charset="0"/>
-            </a:endParaRPr>
-          </a:p>
-        </p:txBody>
-      </p:sp>
-      <p:cxnSp>
-        <p:nvCxnSpPr>
-          <p:cNvPr id="26" name="Straight Connector 25">
-            <a:extLst>
-              <a:ext uri="{FF2B5EF4-FFF2-40B4-BE49-F238E27FC236}">
-                <a16:creationId xmlns:a16="http://schemas.microsoft.com/office/drawing/2014/main" id="{5890FA60-DB45-EE3E-82FB-D028DB10995B}"/>
-              </a:ext>
-            </a:extLst>
-          </p:cNvPr>
-          <p:cNvCxnSpPr>
-            <a:cxnSpLocks/>
-          </p:cNvCxnSpPr>
-          <p:nvPr/>
-        </p:nvCxnSpPr>
-        <p:spPr>
-          <a:xfrm>
-            <a:off x="1702914" y="2598764"/>
-            <a:ext cx="532482" cy="0"/>
-          </a:xfrm>
-          <a:prstGeom prst="line">
-            <a:avLst/>
-          </a:prstGeom>
-        </p:spPr>
-        <p:style>
-          <a:lnRef idx="2">
-            <a:schemeClr val="accent1"/>
-          </a:lnRef>
-          <a:fillRef idx="0">
-            <a:schemeClr val="accent1"/>
-          </a:fillRef>
-          <a:effectRef idx="1">
-            <a:schemeClr val="accent1"/>
-          </a:effectRef>
-          <a:fontRef idx="minor">
-            <a:schemeClr val="tx1"/>
-          </a:fontRef>
-        </p:style>
-      </p:cxnSp>
-      <p:cxnSp>
-        <p:nvCxnSpPr>
-          <p:cNvPr id="27" name="Straight Connector 26">
-            <a:extLst>
-              <a:ext uri="{FF2B5EF4-FFF2-40B4-BE49-F238E27FC236}">
-                <a16:creationId xmlns:a16="http://schemas.microsoft.com/office/drawing/2014/main" id="{61B0946D-8097-6B78-E2CF-708C835A14FB}"/>
-              </a:ext>
-            </a:extLst>
-          </p:cNvPr>
-          <p:cNvCxnSpPr>
-            <a:cxnSpLocks/>
-          </p:cNvCxnSpPr>
-          <p:nvPr/>
-        </p:nvCxnSpPr>
-        <p:spPr>
-          <a:xfrm>
-            <a:off x="1702914" y="2156693"/>
-            <a:ext cx="0" cy="442071"/>
-          </a:xfrm>
-          <a:prstGeom prst="line">
-            <a:avLst/>
-          </a:prstGeom>
-        </p:spPr>
-        <p:style>
-          <a:lnRef idx="2">
-            <a:schemeClr val="accent1"/>
-          </a:lnRef>
-          <a:fillRef idx="0">
-            <a:schemeClr val="accent1"/>
-          </a:fillRef>
-          <a:effectRef idx="1">
-            <a:schemeClr val="accent1"/>
-          </a:effectRef>
-          <a:fontRef idx="minor">
-            <a:schemeClr val="tx1"/>
-          </a:fontRef>
-        </p:style>
-      </p:cxnSp>
-      <p:cxnSp>
-        <p:nvCxnSpPr>
-          <p:cNvPr id="31" name="Straight Connector 30">
-            <a:extLst>
-              <a:ext uri="{FF2B5EF4-FFF2-40B4-BE49-F238E27FC236}">
-                <a16:creationId xmlns:a16="http://schemas.microsoft.com/office/drawing/2014/main" id="{B11EEA41-506E-A630-D972-503CEA2836BB}"/>
-              </a:ext>
-            </a:extLst>
-          </p:cNvPr>
-          <p:cNvCxnSpPr>
-            <a:cxnSpLocks/>
-          </p:cNvCxnSpPr>
-          <p:nvPr/>
-        </p:nvCxnSpPr>
-        <p:spPr>
-          <a:xfrm>
-            <a:off x="3005091" y="2778485"/>
-            <a:ext cx="0" cy="2370973"/>
-          </a:xfrm>
-          <a:prstGeom prst="line">
-            <a:avLst/>
-          </a:prstGeom>
-        </p:spPr>
-        <p:style>
-          <a:lnRef idx="2">
-            <a:schemeClr val="accent1"/>
-          </a:lnRef>
-          <a:fillRef idx="0">
-            <a:schemeClr val="accent1"/>
-          </a:fillRef>
-          <a:effectRef idx="1">
-            <a:schemeClr val="accent1"/>
-          </a:effectRef>
-          <a:fontRef idx="minor">
-            <a:schemeClr val="tx1"/>
-          </a:fontRef>
-        </p:style>
-      </p:cxnSp>
-      <p:sp>
-        <p:nvSpPr>
-          <p:cNvPr id="36" name="AutoShape 13">
-            <a:extLst>
-              <a:ext uri="{FF2B5EF4-FFF2-40B4-BE49-F238E27FC236}">
-                <a16:creationId xmlns:a16="http://schemas.microsoft.com/office/drawing/2014/main" id="{CCF9E2EC-1E7B-DB39-289C-77C8A1C62207}"/>
-              </a:ext>
-            </a:extLst>
-          </p:cNvPr>
-          <p:cNvSpPr>
-            <a:spLocks noChangeArrowheads="1"/>
-          </p:cNvSpPr>
-          <p:nvPr/>
-        </p:nvSpPr>
-        <p:spPr bwMode="auto">
-          <a:xfrm>
-            <a:off x="3931920" y="2875013"/>
-            <a:ext cx="1360853" cy="343674"/>
-          </a:xfrm>
-          <a:prstGeom prst="roundRect">
-            <a:avLst>
-              <a:gd name="adj" fmla="val 16667"/>
-            </a:avLst>
-          </a:prstGeom>
-          <a:solidFill>
-            <a:schemeClr val="bg1"/>
-          </a:solidFill>
-          <a:ln w="12700">
-            <a:solidFill>
-              <a:srgbClr val="09101D"/>
-            </a:solidFill>
-            <a:miter lim="800000"/>
-            <a:headEnd/>
-            <a:tailEnd/>
-          </a:ln>
-        </p:spPr>
-        <p:txBody>
-          <a:bodyPr vert="horz" wrap="square" lIns="91440" tIns="45720" rIns="91440" bIns="45720" numCol="1" anchor="ctr" anchorCtr="0" compatLnSpc="1">
-            <a:prstTxWarp prst="textNoShape">
-              <a:avLst/>
-            </a:prstTxWarp>
-          </a:bodyPr>
-          <a:lstStyle/>
-          <a:p>
-            <a:pPr marL="0" marR="0" lvl="0" indent="0" algn="ctr" defTabSz="914400" rtl="0" eaLnBrk="0" fontAlgn="base" latinLnBrk="0" hangingPunct="0">
-              <a:lnSpc>
-                <a:spcPct val="100000"/>
-              </a:lnSpc>
-              <a:spcBef>
-                <a:spcPct val="0"/>
-              </a:spcBef>
-              <a:spcAft>
-                <a:spcPct val="0"/>
-              </a:spcAft>
-              <a:buClrTx/>
-              <a:buSzTx/>
-              <a:buFontTx/>
-              <a:buNone/>
-              <a:tabLst/>
-            </a:pPr>
-            <a:r>
-              <a:rPr kumimoji="0" lang="en-US" altLang="en-IL" b="0" i="0" u="none" strike="noStrike" cap="none" normalizeH="0" baseline="0" dirty="0">
-                <a:ln>
-                  <a:noFill/>
-                </a:ln>
-                <a:solidFill>
-                  <a:schemeClr val="tx1"/>
-                </a:solidFill>
-                <a:effectLst/>
-                <a:latin typeface="Calibri" panose="020F0502020204030204" pitchFamily="34" charset="0"/>
-                <a:ea typeface="Yu Gothic" panose="020B0400000000000000" pitchFamily="34" charset="-128"/>
-                <a:cs typeface="Arial" panose="020B0604020202020204" pitchFamily="34" charset="0"/>
-              </a:rPr>
-              <a:t>Controllers</a:t>
-            </a:r>
-            <a:endParaRPr kumimoji="0" lang="en-IL" altLang="en-IL" sz="4000" b="0" i="0" u="none" strike="noStrike" cap="none" normalizeH="0" baseline="0" dirty="0">
-              <a:ln>
-                <a:noFill/>
-              </a:ln>
-              <a:solidFill>
-                <a:schemeClr val="tx1"/>
-              </a:solidFill>
-              <a:effectLst/>
-              <a:latin typeface="Arial" panose="020B0604020202020204" pitchFamily="34" charset="0"/>
-            </a:endParaRPr>
-          </a:p>
-        </p:txBody>
-      </p:sp>
-      <p:cxnSp>
-        <p:nvCxnSpPr>
-          <p:cNvPr id="37" name="Straight Connector 36">
-            <a:extLst>
-              <a:ext uri="{FF2B5EF4-FFF2-40B4-BE49-F238E27FC236}">
-                <a16:creationId xmlns:a16="http://schemas.microsoft.com/office/drawing/2014/main" id="{FA71ECA9-6020-2668-0F61-288DC1B9B85A}"/>
-              </a:ext>
-            </a:extLst>
-          </p:cNvPr>
-          <p:cNvCxnSpPr>
-            <a:cxnSpLocks/>
-          </p:cNvCxnSpPr>
-          <p:nvPr/>
-        </p:nvCxnSpPr>
-        <p:spPr>
-          <a:xfrm>
-            <a:off x="3005091" y="3052916"/>
-            <a:ext cx="926829" cy="0"/>
-          </a:xfrm>
-          <a:prstGeom prst="line">
-            <a:avLst/>
-          </a:prstGeom>
-        </p:spPr>
-        <p:style>
-          <a:lnRef idx="2">
-            <a:schemeClr val="accent1"/>
-          </a:lnRef>
-          <a:fillRef idx="0">
-            <a:schemeClr val="accent1"/>
-          </a:fillRef>
-          <a:effectRef idx="1">
-            <a:schemeClr val="accent1"/>
-          </a:effectRef>
-          <a:fontRef idx="minor">
-            <a:schemeClr val="tx1"/>
-          </a:fontRef>
-        </p:style>
-      </p:cxnSp>
-      <p:sp>
-        <p:nvSpPr>
-          <p:cNvPr id="39" name="AutoShape 13">
-            <a:extLst>
-              <a:ext uri="{FF2B5EF4-FFF2-40B4-BE49-F238E27FC236}">
-                <a16:creationId xmlns:a16="http://schemas.microsoft.com/office/drawing/2014/main" id="{8F8E0109-A987-3884-2AAF-A55E71AC3CAD}"/>
-              </a:ext>
-            </a:extLst>
-          </p:cNvPr>
-          <p:cNvSpPr>
-            <a:spLocks noChangeArrowheads="1"/>
-          </p:cNvSpPr>
-          <p:nvPr/>
-        </p:nvSpPr>
-        <p:spPr bwMode="auto">
-          <a:xfrm>
-            <a:off x="3931920" y="3293553"/>
-            <a:ext cx="1360853" cy="343674"/>
-          </a:xfrm>
-          <a:prstGeom prst="roundRect">
-            <a:avLst>
-              <a:gd name="adj" fmla="val 16667"/>
-            </a:avLst>
-          </a:prstGeom>
-          <a:solidFill>
-            <a:schemeClr val="bg1"/>
-          </a:solidFill>
-          <a:ln w="12700">
-            <a:solidFill>
-              <a:srgbClr val="09101D"/>
-            </a:solidFill>
-            <a:miter lim="800000"/>
-            <a:headEnd/>
-            <a:tailEnd/>
-          </a:ln>
-        </p:spPr>
-        <p:txBody>
-          <a:bodyPr vert="horz" wrap="square" lIns="91440" tIns="45720" rIns="91440" bIns="45720" numCol="1" anchor="ctr" anchorCtr="0" compatLnSpc="1">
-            <a:prstTxWarp prst="textNoShape">
-              <a:avLst/>
-            </a:prstTxWarp>
-          </a:bodyPr>
-          <a:lstStyle/>
-          <a:p>
-            <a:pPr marL="0" marR="0" lvl="0" indent="0" algn="ctr" defTabSz="914400" rtl="0" eaLnBrk="0" fontAlgn="base" latinLnBrk="0" hangingPunct="0">
-              <a:lnSpc>
-                <a:spcPct val="100000"/>
-              </a:lnSpc>
-              <a:spcBef>
-                <a:spcPct val="0"/>
-              </a:spcBef>
-              <a:spcAft>
-                <a:spcPct val="0"/>
-              </a:spcAft>
-              <a:buClrTx/>
-              <a:buSzTx/>
-              <a:buFontTx/>
-              <a:buNone/>
-              <a:tabLst/>
-            </a:pPr>
-            <a:r>
-              <a:rPr kumimoji="0" lang="en-US" altLang="en-IL" b="0" i="0" u="none" strike="noStrike" cap="none" normalizeH="0" baseline="0" dirty="0">
-                <a:ln>
-                  <a:noFill/>
-                </a:ln>
-                <a:solidFill>
-                  <a:schemeClr val="tx1"/>
-                </a:solidFill>
-                <a:effectLst/>
-                <a:latin typeface="Calibri" panose="020F0502020204030204" pitchFamily="34" charset="0"/>
-                <a:ea typeface="Yu Gothic" panose="020B0400000000000000" pitchFamily="34" charset="-128"/>
-                <a:cs typeface="Arial" panose="020B0604020202020204" pitchFamily="34" charset="0"/>
-              </a:rPr>
-              <a:t>Data</a:t>
-            </a:r>
-            <a:endParaRPr kumimoji="0" lang="en-IL" altLang="en-IL" sz="4000" b="0" i="0" u="none" strike="noStrike" cap="none" normalizeH="0" baseline="0" dirty="0">
-              <a:ln>
-                <a:noFill/>
-              </a:ln>
-              <a:solidFill>
-                <a:schemeClr val="tx1"/>
-              </a:solidFill>
-              <a:effectLst/>
-              <a:latin typeface="Arial" panose="020B0604020202020204" pitchFamily="34" charset="0"/>
-            </a:endParaRPr>
-          </a:p>
-        </p:txBody>
-      </p:sp>
-      <p:cxnSp>
-        <p:nvCxnSpPr>
-          <p:cNvPr id="40" name="Straight Connector 39">
-            <a:extLst>
-              <a:ext uri="{FF2B5EF4-FFF2-40B4-BE49-F238E27FC236}">
-                <a16:creationId xmlns:a16="http://schemas.microsoft.com/office/drawing/2014/main" id="{F73FF06F-D158-D932-7EE8-5D76C7893249}"/>
-              </a:ext>
-            </a:extLst>
-          </p:cNvPr>
-          <p:cNvCxnSpPr>
-            <a:cxnSpLocks/>
-          </p:cNvCxnSpPr>
-          <p:nvPr/>
-        </p:nvCxnSpPr>
-        <p:spPr>
-          <a:xfrm>
-            <a:off x="3005091" y="3471456"/>
-            <a:ext cx="926829" cy="0"/>
-          </a:xfrm>
-          <a:prstGeom prst="line">
-            <a:avLst/>
-          </a:prstGeom>
-        </p:spPr>
-        <p:style>
-          <a:lnRef idx="2">
-            <a:schemeClr val="accent1"/>
-          </a:lnRef>
-          <a:fillRef idx="0">
-            <a:schemeClr val="accent1"/>
-          </a:fillRef>
-          <a:effectRef idx="1">
-            <a:schemeClr val="accent1"/>
-          </a:effectRef>
-          <a:fontRef idx="minor">
-            <a:schemeClr val="tx1"/>
-          </a:fontRef>
-        </p:style>
-      </p:cxnSp>
-      <p:sp>
-        <p:nvSpPr>
-          <p:cNvPr id="41" name="AutoShape 13">
-            <a:extLst>
-              <a:ext uri="{FF2B5EF4-FFF2-40B4-BE49-F238E27FC236}">
-                <a16:creationId xmlns:a16="http://schemas.microsoft.com/office/drawing/2014/main" id="{2A734496-13E5-C552-4657-6D89DA0A227F}"/>
-              </a:ext>
-            </a:extLst>
-          </p:cNvPr>
-          <p:cNvSpPr>
-            <a:spLocks noChangeArrowheads="1"/>
-          </p:cNvSpPr>
-          <p:nvPr/>
-        </p:nvSpPr>
-        <p:spPr bwMode="auto">
-          <a:xfrm>
-            <a:off x="3931920" y="3712731"/>
-            <a:ext cx="1360853" cy="343674"/>
-          </a:xfrm>
-          <a:prstGeom prst="roundRect">
-            <a:avLst>
-              <a:gd name="adj" fmla="val 16667"/>
-            </a:avLst>
-          </a:prstGeom>
-          <a:solidFill>
-            <a:schemeClr val="bg1"/>
-          </a:solidFill>
-          <a:ln w="12700">
-            <a:solidFill>
-              <a:srgbClr val="09101D"/>
-            </a:solidFill>
-            <a:miter lim="800000"/>
-            <a:headEnd/>
-            <a:tailEnd/>
-          </a:ln>
-        </p:spPr>
-        <p:txBody>
-          <a:bodyPr vert="horz" wrap="square" lIns="91440" tIns="45720" rIns="91440" bIns="45720" numCol="1" anchor="ctr" anchorCtr="0" compatLnSpc="1">
-            <a:prstTxWarp prst="textNoShape">
-              <a:avLst/>
-            </a:prstTxWarp>
-          </a:bodyPr>
-          <a:lstStyle/>
-          <a:p>
-            <a:pPr marL="0" marR="0" lvl="0" indent="0" algn="ctr" defTabSz="914400" rtl="0" eaLnBrk="0" fontAlgn="base" latinLnBrk="0" hangingPunct="0">
-              <a:lnSpc>
-                <a:spcPct val="100000"/>
-              </a:lnSpc>
-              <a:spcBef>
-                <a:spcPct val="0"/>
-              </a:spcBef>
-              <a:spcAft>
-                <a:spcPct val="0"/>
-              </a:spcAft>
-              <a:buClrTx/>
-              <a:buSzTx/>
-              <a:buFontTx/>
-              <a:buNone/>
-              <a:tabLst/>
-            </a:pPr>
-            <a:r>
-              <a:rPr kumimoji="0" lang="en-US" altLang="en-IL" b="0" i="0" u="none" strike="noStrike" cap="none" normalizeH="0" baseline="0" dirty="0">
-                <a:ln>
-                  <a:noFill/>
-                </a:ln>
-                <a:solidFill>
-                  <a:schemeClr val="tx1"/>
-                </a:solidFill>
-                <a:effectLst/>
-                <a:latin typeface="Calibri" panose="020F0502020204030204" pitchFamily="34" charset="0"/>
-                <a:ea typeface="Yu Gothic" panose="020B0400000000000000" pitchFamily="34" charset="-128"/>
-                <a:cs typeface="Arial" panose="020B0604020202020204" pitchFamily="34" charset="0"/>
-              </a:rPr>
-              <a:t>DTOs</a:t>
-            </a:r>
-            <a:endParaRPr kumimoji="0" lang="en-IL" altLang="en-IL" sz="4000" b="0" i="0" u="none" strike="noStrike" cap="none" normalizeH="0" baseline="0" dirty="0">
-              <a:ln>
-                <a:noFill/>
-              </a:ln>
-              <a:solidFill>
-                <a:schemeClr val="tx1"/>
-              </a:solidFill>
-              <a:effectLst/>
-              <a:latin typeface="Arial" panose="020B0604020202020204" pitchFamily="34" charset="0"/>
-            </a:endParaRPr>
-          </a:p>
-        </p:txBody>
-      </p:sp>
-      <p:cxnSp>
-        <p:nvCxnSpPr>
-          <p:cNvPr id="42" name="Straight Connector 41">
-            <a:extLst>
-              <a:ext uri="{FF2B5EF4-FFF2-40B4-BE49-F238E27FC236}">
-                <a16:creationId xmlns:a16="http://schemas.microsoft.com/office/drawing/2014/main" id="{CC6E8A8C-157D-F611-36B4-A162546C1B01}"/>
-              </a:ext>
-            </a:extLst>
-          </p:cNvPr>
-          <p:cNvCxnSpPr>
-            <a:cxnSpLocks/>
-          </p:cNvCxnSpPr>
-          <p:nvPr/>
-        </p:nvCxnSpPr>
-        <p:spPr>
-          <a:xfrm>
-            <a:off x="3005091" y="3890634"/>
-            <a:ext cx="926829" cy="0"/>
-          </a:xfrm>
-          <a:prstGeom prst="line">
-            <a:avLst/>
-          </a:prstGeom>
-        </p:spPr>
-        <p:style>
-          <a:lnRef idx="2">
-            <a:schemeClr val="accent1"/>
-          </a:lnRef>
-          <a:fillRef idx="0">
-            <a:schemeClr val="accent1"/>
-          </a:fillRef>
-          <a:effectRef idx="1">
-            <a:schemeClr val="accent1"/>
-          </a:effectRef>
-          <a:fontRef idx="minor">
-            <a:schemeClr val="tx1"/>
-          </a:fontRef>
-        </p:style>
-      </p:cxnSp>
-      <p:sp>
-        <p:nvSpPr>
-          <p:cNvPr id="43" name="AutoShape 13">
-            <a:extLst>
-              <a:ext uri="{FF2B5EF4-FFF2-40B4-BE49-F238E27FC236}">
-                <a16:creationId xmlns:a16="http://schemas.microsoft.com/office/drawing/2014/main" id="{5933977B-1DB3-63B2-5784-1EEAD9086AF0}"/>
-              </a:ext>
-            </a:extLst>
-          </p:cNvPr>
-          <p:cNvSpPr>
-            <a:spLocks noChangeArrowheads="1"/>
-          </p:cNvSpPr>
-          <p:nvPr/>
-        </p:nvSpPr>
-        <p:spPr bwMode="auto">
-          <a:xfrm>
-            <a:off x="3947160" y="4133837"/>
-            <a:ext cx="1360853" cy="343674"/>
-          </a:xfrm>
-          <a:prstGeom prst="roundRect">
-            <a:avLst>
-              <a:gd name="adj" fmla="val 16667"/>
-            </a:avLst>
-          </a:prstGeom>
-          <a:solidFill>
-            <a:schemeClr val="bg1"/>
-          </a:solidFill>
-          <a:ln w="12700">
-            <a:solidFill>
-              <a:srgbClr val="09101D"/>
-            </a:solidFill>
-            <a:miter lim="800000"/>
-            <a:headEnd/>
-            <a:tailEnd/>
-          </a:ln>
-        </p:spPr>
-        <p:txBody>
-          <a:bodyPr vert="horz" wrap="square" lIns="91440" tIns="45720" rIns="91440" bIns="45720" numCol="1" anchor="ctr" anchorCtr="0" compatLnSpc="1">
-            <a:prstTxWarp prst="textNoShape">
-              <a:avLst/>
-            </a:prstTxWarp>
-          </a:bodyPr>
-          <a:lstStyle/>
-          <a:p>
-            <a:pPr marL="0" marR="0" lvl="0" indent="0" algn="ctr" defTabSz="914400" rtl="0" eaLnBrk="0" fontAlgn="base" latinLnBrk="0" hangingPunct="0">
-              <a:lnSpc>
-                <a:spcPct val="100000"/>
-              </a:lnSpc>
-              <a:spcBef>
-                <a:spcPct val="0"/>
-              </a:spcBef>
-              <a:spcAft>
-                <a:spcPct val="0"/>
-              </a:spcAft>
-              <a:buClrTx/>
-              <a:buSzTx/>
-              <a:buFontTx/>
-              <a:buNone/>
-              <a:tabLst/>
-            </a:pPr>
-            <a:r>
-              <a:rPr kumimoji="0" lang="en-US" altLang="en-IL" b="0" i="0" u="none" strike="noStrike" cap="none" normalizeH="0" baseline="0" dirty="0">
-                <a:ln>
-                  <a:noFill/>
-                </a:ln>
-                <a:solidFill>
-                  <a:schemeClr val="tx1"/>
-                </a:solidFill>
-                <a:effectLst/>
-                <a:latin typeface="Calibri" panose="020F0502020204030204" pitchFamily="34" charset="0"/>
-                <a:ea typeface="Yu Gothic" panose="020B0400000000000000" pitchFamily="34" charset="-128"/>
-                <a:cs typeface="Arial" panose="020B0604020202020204" pitchFamily="34" charset="0"/>
-              </a:rPr>
-              <a:t>Migrations</a:t>
-            </a:r>
-            <a:endParaRPr kumimoji="0" lang="en-IL" altLang="en-IL" sz="4000" b="0" i="0" u="none" strike="noStrike" cap="none" normalizeH="0" baseline="0" dirty="0">
-              <a:ln>
-                <a:noFill/>
-              </a:ln>
-              <a:solidFill>
-                <a:schemeClr val="tx1"/>
-              </a:solidFill>
-              <a:effectLst/>
-              <a:latin typeface="Arial" panose="020B0604020202020204" pitchFamily="34" charset="0"/>
-            </a:endParaRPr>
-          </a:p>
-        </p:txBody>
-      </p:sp>
-      <p:cxnSp>
-        <p:nvCxnSpPr>
-          <p:cNvPr id="44" name="Straight Connector 43">
-            <a:extLst>
-              <a:ext uri="{FF2B5EF4-FFF2-40B4-BE49-F238E27FC236}">
-                <a16:creationId xmlns:a16="http://schemas.microsoft.com/office/drawing/2014/main" id="{0981965D-7B11-335C-EF5A-F7521F817921}"/>
-              </a:ext>
-            </a:extLst>
-          </p:cNvPr>
-          <p:cNvCxnSpPr>
-            <a:cxnSpLocks/>
-          </p:cNvCxnSpPr>
-          <p:nvPr/>
-        </p:nvCxnSpPr>
-        <p:spPr>
-          <a:xfrm>
-            <a:off x="3020331" y="4311740"/>
-            <a:ext cx="926829" cy="0"/>
-          </a:xfrm>
-          <a:prstGeom prst="line">
-            <a:avLst/>
-          </a:prstGeom>
-        </p:spPr>
-        <p:style>
-          <a:lnRef idx="2">
-            <a:schemeClr val="accent1"/>
-          </a:lnRef>
-          <a:fillRef idx="0">
-            <a:schemeClr val="accent1"/>
-          </a:fillRef>
-          <a:effectRef idx="1">
-            <a:schemeClr val="accent1"/>
-          </a:effectRef>
-          <a:fontRef idx="minor">
-            <a:schemeClr val="tx1"/>
-          </a:fontRef>
-        </p:style>
-      </p:cxnSp>
-      <p:sp>
-        <p:nvSpPr>
-          <p:cNvPr id="45" name="AutoShape 13">
-            <a:extLst>
-              <a:ext uri="{FF2B5EF4-FFF2-40B4-BE49-F238E27FC236}">
-                <a16:creationId xmlns:a16="http://schemas.microsoft.com/office/drawing/2014/main" id="{E9F760B8-FB4B-4A4B-BABE-2BF40D33C5E5}"/>
-              </a:ext>
-            </a:extLst>
-          </p:cNvPr>
-          <p:cNvSpPr>
-            <a:spLocks noChangeArrowheads="1"/>
-          </p:cNvSpPr>
-          <p:nvPr/>
-        </p:nvSpPr>
-        <p:spPr bwMode="auto">
-          <a:xfrm>
-            <a:off x="3947160" y="4552377"/>
-            <a:ext cx="1360853" cy="343674"/>
-          </a:xfrm>
-          <a:prstGeom prst="roundRect">
-            <a:avLst>
-              <a:gd name="adj" fmla="val 16667"/>
-            </a:avLst>
-          </a:prstGeom>
-          <a:solidFill>
-            <a:schemeClr val="bg1"/>
-          </a:solidFill>
-          <a:ln w="12700">
-            <a:solidFill>
-              <a:srgbClr val="09101D"/>
-            </a:solidFill>
-            <a:miter lim="800000"/>
-            <a:headEnd/>
-            <a:tailEnd/>
-          </a:ln>
-        </p:spPr>
-        <p:txBody>
-          <a:bodyPr vert="horz" wrap="square" lIns="91440" tIns="45720" rIns="91440" bIns="45720" numCol="1" anchor="ctr" anchorCtr="0" compatLnSpc="1">
-            <a:prstTxWarp prst="textNoShape">
-              <a:avLst/>
-            </a:prstTxWarp>
-          </a:bodyPr>
-          <a:lstStyle/>
-          <a:p>
-            <a:pPr marL="0" marR="0" lvl="0" indent="0" algn="ctr" defTabSz="914400" rtl="0" eaLnBrk="0" fontAlgn="base" latinLnBrk="0" hangingPunct="0">
-              <a:lnSpc>
-                <a:spcPct val="100000"/>
-              </a:lnSpc>
-              <a:spcBef>
-                <a:spcPct val="0"/>
-              </a:spcBef>
-              <a:spcAft>
-                <a:spcPct val="0"/>
-              </a:spcAft>
-              <a:buClrTx/>
-              <a:buSzTx/>
-              <a:buFontTx/>
-              <a:buNone/>
-              <a:tabLst/>
-            </a:pPr>
-            <a:r>
-              <a:rPr kumimoji="0" lang="en-US" altLang="en-IL" b="0" i="0" u="none" strike="noStrike" cap="none" normalizeH="0" baseline="0" dirty="0">
-                <a:ln>
-                  <a:noFill/>
-                </a:ln>
-                <a:solidFill>
-                  <a:schemeClr val="tx1"/>
-                </a:solidFill>
-                <a:effectLst/>
-                <a:latin typeface="Calibri" panose="020F0502020204030204" pitchFamily="34" charset="0"/>
-                <a:ea typeface="Yu Gothic" panose="020B0400000000000000" pitchFamily="34" charset="-128"/>
-                <a:cs typeface="Arial" panose="020B0604020202020204" pitchFamily="34" charset="0"/>
-              </a:rPr>
-              <a:t>Models</a:t>
-            </a:r>
-            <a:endParaRPr kumimoji="0" lang="en-IL" altLang="en-IL" sz="4000" b="0" i="0" u="none" strike="noStrike" cap="none" normalizeH="0" baseline="0" dirty="0">
-              <a:ln>
-                <a:noFill/>
-              </a:ln>
-              <a:solidFill>
-                <a:schemeClr val="tx1"/>
-              </a:solidFill>
-              <a:effectLst/>
-              <a:latin typeface="Arial" panose="020B0604020202020204" pitchFamily="34" charset="0"/>
-            </a:endParaRPr>
-          </a:p>
-        </p:txBody>
-      </p:sp>
-      <p:sp>
-        <p:nvSpPr>
-          <p:cNvPr id="46" name="AutoShape 13">
-            <a:extLst>
-              <a:ext uri="{FF2B5EF4-FFF2-40B4-BE49-F238E27FC236}">
-                <a16:creationId xmlns:a16="http://schemas.microsoft.com/office/drawing/2014/main" id="{42836964-E83A-B3D7-BB20-15372CAA0FA3}"/>
-              </a:ext>
-            </a:extLst>
-          </p:cNvPr>
-          <p:cNvSpPr>
-            <a:spLocks noChangeArrowheads="1"/>
-          </p:cNvSpPr>
-          <p:nvPr/>
-        </p:nvSpPr>
-        <p:spPr bwMode="auto">
-          <a:xfrm>
-            <a:off x="3947160" y="4971555"/>
-            <a:ext cx="1360853" cy="343674"/>
-          </a:xfrm>
-          <a:prstGeom prst="roundRect">
-            <a:avLst>
-              <a:gd name="adj" fmla="val 16667"/>
-            </a:avLst>
-          </a:prstGeom>
-          <a:solidFill>
-            <a:schemeClr val="bg1"/>
-          </a:solidFill>
-          <a:ln w="12700">
-            <a:solidFill>
-              <a:srgbClr val="09101D"/>
-            </a:solidFill>
-            <a:miter lim="800000"/>
-            <a:headEnd/>
-            <a:tailEnd/>
-          </a:ln>
-        </p:spPr>
-        <p:txBody>
-          <a:bodyPr vert="horz" wrap="square" lIns="91440" tIns="45720" rIns="91440" bIns="45720" numCol="1" anchor="ctr" anchorCtr="0" compatLnSpc="1">
-            <a:prstTxWarp prst="textNoShape">
-              <a:avLst/>
-            </a:prstTxWarp>
-          </a:bodyPr>
-          <a:lstStyle/>
-          <a:p>
-            <a:pPr marL="0" marR="0" lvl="0" indent="0" algn="ctr" defTabSz="914400" rtl="0" eaLnBrk="0" fontAlgn="base" latinLnBrk="0" hangingPunct="0">
-              <a:lnSpc>
-                <a:spcPct val="100000"/>
-              </a:lnSpc>
-              <a:spcBef>
-                <a:spcPct val="0"/>
-              </a:spcBef>
-              <a:spcAft>
-                <a:spcPct val="0"/>
-              </a:spcAft>
-              <a:buClrTx/>
-              <a:buSzTx/>
-              <a:buFontTx/>
-              <a:buNone/>
-              <a:tabLst/>
-            </a:pPr>
-            <a:r>
-              <a:rPr kumimoji="0" lang="en-US" altLang="en-IL" b="0" i="0" u="none" strike="noStrike" cap="none" normalizeH="0" baseline="0" dirty="0">
-                <a:ln>
-                  <a:noFill/>
-                </a:ln>
-                <a:solidFill>
-                  <a:schemeClr val="tx1"/>
-                </a:solidFill>
-                <a:effectLst/>
-                <a:latin typeface="Calibri" panose="020F0502020204030204" pitchFamily="34" charset="0"/>
-                <a:ea typeface="Yu Gothic" panose="020B0400000000000000" pitchFamily="34" charset="-128"/>
-                <a:cs typeface="Arial" panose="020B0604020202020204" pitchFamily="34" charset="0"/>
-              </a:rPr>
-              <a:t>Properties</a:t>
-            </a:r>
-            <a:endParaRPr kumimoji="0" lang="en-IL" altLang="en-IL" sz="4000" b="0" i="0" u="none" strike="noStrike" cap="none" normalizeH="0" baseline="0" dirty="0">
-              <a:ln>
-                <a:noFill/>
-              </a:ln>
-              <a:solidFill>
-                <a:schemeClr val="tx1"/>
-              </a:solidFill>
-              <a:effectLst/>
-              <a:latin typeface="Arial" panose="020B0604020202020204" pitchFamily="34" charset="0"/>
-            </a:endParaRPr>
-          </a:p>
-        </p:txBody>
-      </p:sp>
-      <p:cxnSp>
-        <p:nvCxnSpPr>
-          <p:cNvPr id="47" name="Straight Connector 46">
-            <a:extLst>
-              <a:ext uri="{FF2B5EF4-FFF2-40B4-BE49-F238E27FC236}">
-                <a16:creationId xmlns:a16="http://schemas.microsoft.com/office/drawing/2014/main" id="{FB9F25E6-DF5D-3A72-F754-0F0447644D2F}"/>
-              </a:ext>
-            </a:extLst>
-          </p:cNvPr>
-          <p:cNvCxnSpPr>
-            <a:cxnSpLocks/>
-          </p:cNvCxnSpPr>
-          <p:nvPr/>
-        </p:nvCxnSpPr>
-        <p:spPr>
-          <a:xfrm>
-            <a:off x="3020331" y="5149458"/>
-            <a:ext cx="926829" cy="0"/>
-          </a:xfrm>
-          <a:prstGeom prst="line">
-            <a:avLst/>
-          </a:prstGeom>
-        </p:spPr>
-        <p:style>
-          <a:lnRef idx="2">
-            <a:schemeClr val="accent1"/>
-          </a:lnRef>
-          <a:fillRef idx="0">
-            <a:schemeClr val="accent1"/>
-          </a:fillRef>
-          <a:effectRef idx="1">
-            <a:schemeClr val="accent1"/>
-          </a:effectRef>
-          <a:fontRef idx="minor">
-            <a:schemeClr val="tx1"/>
-          </a:fontRef>
-        </p:style>
-      </p:cxnSp>
-      <p:cxnSp>
-        <p:nvCxnSpPr>
-          <p:cNvPr id="48" name="Straight Connector 47">
-            <a:extLst>
-              <a:ext uri="{FF2B5EF4-FFF2-40B4-BE49-F238E27FC236}">
-                <a16:creationId xmlns:a16="http://schemas.microsoft.com/office/drawing/2014/main" id="{10FF5E8C-87F0-8001-0491-F0E429B85F20}"/>
-              </a:ext>
-            </a:extLst>
-          </p:cNvPr>
-          <p:cNvCxnSpPr>
-            <a:cxnSpLocks/>
-          </p:cNvCxnSpPr>
-          <p:nvPr/>
-        </p:nvCxnSpPr>
-        <p:spPr>
-          <a:xfrm>
-            <a:off x="3020331" y="4719690"/>
-            <a:ext cx="926829" cy="0"/>
-          </a:xfrm>
-          <a:prstGeom prst="line">
-            <a:avLst/>
-          </a:prstGeom>
-        </p:spPr>
-        <p:style>
-          <a:lnRef idx="2">
-            <a:schemeClr val="accent1"/>
-          </a:lnRef>
-          <a:fillRef idx="0">
-            <a:schemeClr val="accent1"/>
-          </a:fillRef>
-          <a:effectRef idx="1">
-            <a:schemeClr val="accent1"/>
-          </a:effectRef>
-          <a:fontRef idx="minor">
-            <a:schemeClr val="tx1"/>
-          </a:fontRef>
-        </p:style>
-      </p:cxnSp>
-      <p:sp>
-        <p:nvSpPr>
-          <p:cNvPr id="11" name="AutoShape 13">
-            <a:extLst>
-              <a:ext uri="{FF2B5EF4-FFF2-40B4-BE49-F238E27FC236}">
-                <a16:creationId xmlns:a16="http://schemas.microsoft.com/office/drawing/2014/main" id="{F799A10B-14C1-1B55-ACA7-1DABE0E798E4}"/>
-              </a:ext>
-            </a:extLst>
-          </p:cNvPr>
-          <p:cNvSpPr>
-            <a:spLocks noChangeArrowheads="1"/>
-          </p:cNvSpPr>
-          <p:nvPr/>
-        </p:nvSpPr>
-        <p:spPr bwMode="auto">
-          <a:xfrm>
-            <a:off x="1286449" y="5132300"/>
-            <a:ext cx="832104" cy="305112"/>
-          </a:xfrm>
-          <a:prstGeom prst="roundRect">
-            <a:avLst>
-              <a:gd name="adj" fmla="val 16667"/>
-            </a:avLst>
-          </a:prstGeom>
-          <a:solidFill>
-            <a:schemeClr val="bg1"/>
-          </a:solidFill>
-          <a:ln w="12700">
-            <a:solidFill>
-              <a:srgbClr val="09101D"/>
-            </a:solidFill>
-            <a:miter lim="800000"/>
-            <a:headEnd/>
-            <a:tailEnd/>
-          </a:ln>
-        </p:spPr>
-        <p:txBody>
-          <a:bodyPr vert="horz" wrap="square" lIns="91440" tIns="45720" rIns="91440" bIns="45720" numCol="1" anchor="ctr" anchorCtr="0" compatLnSpc="1">
-            <a:prstTxWarp prst="textNoShape">
-              <a:avLst/>
-            </a:prstTxWarp>
-          </a:bodyPr>
-          <a:lstStyle/>
-          <a:p>
-            <a:pPr marL="0" marR="0" lvl="0" indent="0" algn="ctr" defTabSz="914400" rtl="0" eaLnBrk="0" fontAlgn="base" latinLnBrk="0" hangingPunct="0">
-              <a:lnSpc>
-                <a:spcPct val="100000"/>
-              </a:lnSpc>
-              <a:spcBef>
-                <a:spcPct val="0"/>
-              </a:spcBef>
-              <a:spcAft>
-                <a:spcPct val="0"/>
-              </a:spcAft>
-              <a:buClrTx/>
-              <a:buSzTx/>
-              <a:buFontTx/>
-              <a:buNone/>
-              <a:tabLst/>
-            </a:pPr>
-            <a:r>
-              <a:rPr kumimoji="0" lang="en-US" altLang="en-IL" b="0" i="0" u="none" strike="noStrike" cap="none" normalizeH="0" baseline="0" dirty="0">
-                <a:ln>
-                  <a:noFill/>
-                </a:ln>
-                <a:solidFill>
-                  <a:schemeClr val="tx1"/>
-                </a:solidFill>
-                <a:effectLst/>
-                <a:latin typeface="Calibri" panose="020F0502020204030204" pitchFamily="34" charset="0"/>
-                <a:ea typeface="Yu Gothic" panose="020B0400000000000000" pitchFamily="34" charset="-128"/>
-                <a:cs typeface="Arial" panose="020B0604020202020204" pitchFamily="34" charset="0"/>
-              </a:rPr>
-              <a:t>Tests</a:t>
-            </a:r>
-            <a:endParaRPr kumimoji="0" lang="en-IL" altLang="en-IL" sz="4000" b="0" i="0" u="none" strike="noStrike" cap="none" normalizeH="0" baseline="0" dirty="0">
-              <a:ln>
-                <a:noFill/>
-              </a:ln>
-              <a:solidFill>
-                <a:schemeClr val="tx1"/>
-              </a:solidFill>
-              <a:effectLst/>
-              <a:latin typeface="Arial" panose="020B0604020202020204" pitchFamily="34" charset="0"/>
-            </a:endParaRPr>
-          </a:p>
-        </p:txBody>
-      </p:sp>
-      <p:cxnSp>
-        <p:nvCxnSpPr>
-          <p:cNvPr id="12" name="Straight Connector 11">
-            <a:extLst>
-              <a:ext uri="{FF2B5EF4-FFF2-40B4-BE49-F238E27FC236}">
-                <a16:creationId xmlns:a16="http://schemas.microsoft.com/office/drawing/2014/main" id="{5C6BD2AB-A3B0-1F79-EF23-6F6E19FF3C4A}"/>
-              </a:ext>
-            </a:extLst>
-          </p:cNvPr>
-          <p:cNvCxnSpPr>
-            <a:cxnSpLocks/>
-          </p:cNvCxnSpPr>
-          <p:nvPr/>
-        </p:nvCxnSpPr>
-        <p:spPr>
-          <a:xfrm>
-            <a:off x="628163" y="5279671"/>
-            <a:ext cx="658286" cy="0"/>
-          </a:xfrm>
-          <a:prstGeom prst="line">
-            <a:avLst/>
-          </a:prstGeom>
-        </p:spPr>
-        <p:style>
-          <a:lnRef idx="2">
-            <a:schemeClr val="accent1"/>
-          </a:lnRef>
-          <a:fillRef idx="0">
-            <a:schemeClr val="accent1"/>
-          </a:fillRef>
-          <a:effectRef idx="1">
-            <a:schemeClr val="accent1"/>
-          </a:effectRef>
-          <a:fontRef idx="minor">
-            <a:schemeClr val="tx1"/>
-          </a:fontRef>
-        </p:style>
-      </p:cxnSp>
-      <p:sp>
-        <p:nvSpPr>
-          <p:cNvPr id="13" name="AutoShape 13">
-            <a:extLst>
-              <a:ext uri="{FF2B5EF4-FFF2-40B4-BE49-F238E27FC236}">
-                <a16:creationId xmlns:a16="http://schemas.microsoft.com/office/drawing/2014/main" id="{97672CD0-A1CE-374C-68C7-143497BCCE39}"/>
-              </a:ext>
-            </a:extLst>
-          </p:cNvPr>
-          <p:cNvSpPr>
-            <a:spLocks noChangeArrowheads="1"/>
-          </p:cNvSpPr>
-          <p:nvPr/>
-        </p:nvSpPr>
-        <p:spPr bwMode="auto">
-          <a:xfrm>
-            <a:off x="2259974" y="5708372"/>
-            <a:ext cx="2001130" cy="359440"/>
-          </a:xfrm>
-          <a:prstGeom prst="roundRect">
-            <a:avLst>
-              <a:gd name="adj" fmla="val 16667"/>
-            </a:avLst>
-          </a:prstGeom>
-          <a:solidFill>
-            <a:schemeClr val="bg1"/>
-          </a:solidFill>
-          <a:ln w="12700">
-            <a:solidFill>
-              <a:srgbClr val="09101D"/>
-            </a:solidFill>
-            <a:miter lim="800000"/>
-            <a:headEnd/>
-            <a:tailEnd/>
-          </a:ln>
-        </p:spPr>
-        <p:txBody>
-          <a:bodyPr vert="horz" wrap="square" lIns="91440" tIns="45720" rIns="91440" bIns="45720" numCol="1" anchor="ctr" anchorCtr="0" compatLnSpc="1">
-            <a:prstTxWarp prst="textNoShape">
-              <a:avLst/>
-            </a:prstTxWarp>
-          </a:bodyPr>
-          <a:lstStyle/>
-          <a:p>
-            <a:pPr lvl="0" algn="ctr" eaLnBrk="0" fontAlgn="base" hangingPunct="0">
-              <a:spcBef>
-                <a:spcPct val="0"/>
-              </a:spcBef>
-              <a:spcAft>
-                <a:spcPct val="0"/>
-              </a:spcAft>
-            </a:pPr>
-            <a:r>
-              <a:rPr lang="en-US" altLang="en-IL" dirty="0">
-                <a:latin typeface="Calibri" panose="020F0502020204030204" pitchFamily="34" charset="0"/>
-                <a:ea typeface="Yu Gothic" panose="020B0400000000000000" pitchFamily="34" charset="-128"/>
-                <a:cs typeface="Arial" panose="020B0604020202020204" pitchFamily="34" charset="0"/>
-              </a:rPr>
-              <a:t>A2C.CRM.Api.Tests</a:t>
-            </a:r>
-            <a:endParaRPr kumimoji="0" lang="en-IL" altLang="en-IL" sz="4000" b="0" i="0" u="none" strike="noStrike" cap="none" normalizeH="0" baseline="0" dirty="0">
-              <a:ln>
-                <a:noFill/>
-              </a:ln>
-              <a:solidFill>
-                <a:schemeClr val="tx1"/>
-              </a:solidFill>
-              <a:effectLst/>
-              <a:latin typeface="Arial" panose="020B0604020202020204" pitchFamily="34" charset="0"/>
-            </a:endParaRPr>
-          </a:p>
-        </p:txBody>
-      </p:sp>
-      <p:cxnSp>
-        <p:nvCxnSpPr>
-          <p:cNvPr id="14" name="Straight Connector 13">
-            <a:extLst>
-              <a:ext uri="{FF2B5EF4-FFF2-40B4-BE49-F238E27FC236}">
-                <a16:creationId xmlns:a16="http://schemas.microsoft.com/office/drawing/2014/main" id="{F2CC8B0A-5F34-9281-C371-A4FFFC090347}"/>
-              </a:ext>
-            </a:extLst>
-          </p:cNvPr>
-          <p:cNvCxnSpPr>
-            <a:cxnSpLocks/>
-          </p:cNvCxnSpPr>
-          <p:nvPr/>
-        </p:nvCxnSpPr>
-        <p:spPr>
-          <a:xfrm>
-            <a:off x="1718347" y="5446020"/>
-            <a:ext cx="0" cy="442071"/>
-          </a:xfrm>
-          <a:prstGeom prst="line">
-            <a:avLst/>
-          </a:prstGeom>
-        </p:spPr>
-        <p:style>
-          <a:lnRef idx="2">
-            <a:schemeClr val="accent1"/>
-          </a:lnRef>
-          <a:fillRef idx="0">
-            <a:schemeClr val="accent1"/>
-          </a:fillRef>
-          <a:effectRef idx="1">
-            <a:schemeClr val="accent1"/>
-          </a:effectRef>
-          <a:fontRef idx="minor">
-            <a:schemeClr val="tx1"/>
-          </a:fontRef>
-        </p:style>
-      </p:cxnSp>
-      <p:cxnSp>
-        <p:nvCxnSpPr>
-          <p:cNvPr id="16" name="Straight Connector 15">
-            <a:extLst>
-              <a:ext uri="{FF2B5EF4-FFF2-40B4-BE49-F238E27FC236}">
-                <a16:creationId xmlns:a16="http://schemas.microsoft.com/office/drawing/2014/main" id="{DDFF1663-547C-007D-0394-80FCA5C623AA}"/>
-              </a:ext>
-            </a:extLst>
-          </p:cNvPr>
-          <p:cNvCxnSpPr>
-            <a:cxnSpLocks/>
-            <a:endCxn id="13" idx="1"/>
-          </p:cNvCxnSpPr>
-          <p:nvPr/>
-        </p:nvCxnSpPr>
-        <p:spPr>
-          <a:xfrm>
-            <a:off x="1702914" y="5888091"/>
-            <a:ext cx="557060" cy="1"/>
-          </a:xfrm>
-          <a:prstGeom prst="line">
-            <a:avLst/>
-          </a:prstGeom>
-        </p:spPr>
-        <p:style>
-          <a:lnRef idx="2">
-            <a:schemeClr val="accent1"/>
-          </a:lnRef>
-          <a:fillRef idx="0">
-            <a:schemeClr val="accent1"/>
-          </a:fillRef>
-          <a:effectRef idx="1">
-            <a:schemeClr val="accent1"/>
-          </a:effectRef>
-          <a:fontRef idx="minor">
-            <a:schemeClr val="tx1"/>
-          </a:fontRef>
-        </p:style>
-      </p:cxnSp>
-    </p:spTree>
-    <p:extLst>
-      <p:ext uri="{BB962C8B-B14F-4D97-AF65-F5344CB8AC3E}">
-        <p14:creationId xmlns:p14="http://schemas.microsoft.com/office/powerpoint/2010/main" val="903800887"/>
-      </p:ext>
-    </p:extLst>
-  </p:cSld>
-  <p:clrMapOvr>
-    <a:masterClrMapping/>
-  </p:clrMapOvr>
-</p:sld>
-</file>
-
-<file path=ppt/slides/slide9.xml><?xml version="1.0" encoding="utf-8"?>
-<p:sld xmlns:a="http://schemas.openxmlformats.org/drawingml/2006/main" xmlns:r="http://schemas.openxmlformats.org/officeDocument/2006/relationships" xmlns:p="http://schemas.openxmlformats.org/presentationml/2006/main">
-  <p:cSld>
-    <p:spTree>
-      <p:nvGrpSpPr>
-        <p:cNvPr id="1" name=""/>
-        <p:cNvGrpSpPr/>
-        <p:nvPr/>
-      </p:nvGrpSpPr>
-      <p:grpSpPr>
-        <a:xfrm>
-          <a:off x="0" y="0"/>
-          <a:ext cx="0" cy="0"/>
-          <a:chOff x="0" y="0"/>
-          <a:chExt cx="0" cy="0"/>
-        </a:xfrm>
-      </p:grpSpPr>
-      <p:pic>
-        <p:nvPicPr>
-          <p:cNvPr id="3" name="Picture 2" descr="A diagram of a software flow&#10;&#10;AI-generated content may be incorrect.">
-            <a:extLst>
-              <a:ext uri="{FF2B5EF4-FFF2-40B4-BE49-F238E27FC236}">
-                <a16:creationId xmlns:a16="http://schemas.microsoft.com/office/drawing/2014/main" id="{4B6F9169-4CBB-3BB9-0B7F-49A764C826B9}"/>
-              </a:ext>
-            </a:extLst>
-          </p:cNvPr>
-          <p:cNvPicPr>
-            <a:picLocks noChangeAspect="1"/>
-          </p:cNvPicPr>
-          <p:nvPr/>
-        </p:nvPicPr>
-        <p:blipFill>
-          <a:blip r:embed="rId2">
-            <a:extLst>
-              <a:ext uri="{28A0092B-C50C-407E-A947-70E740481C1C}">
-                <a14:useLocalDpi xmlns:a14="http://schemas.microsoft.com/office/drawing/2010/main" val="0"/>
-              </a:ext>
-            </a:extLst>
-          </a:blip>
-          <a:stretch>
-            <a:fillRect/>
-          </a:stretch>
-        </p:blipFill>
-        <p:spPr>
-          <a:xfrm>
-            <a:off x="3169914" y="1225291"/>
-            <a:ext cx="5852172" cy="4407417"/>
-          </a:xfrm>
-          <a:prstGeom prst="rect">
-            <a:avLst/>
-          </a:prstGeom>
-        </p:spPr>
-      </p:pic>
-    </p:spTree>
-    <p:extLst>
-      <p:ext uri="{BB962C8B-B14F-4D97-AF65-F5344CB8AC3E}">
-        <p14:creationId xmlns:p14="http://schemas.microsoft.com/office/powerpoint/2010/main" val="24280522"/>
       </p:ext>
     </p:extLst>
   </p:cSld>

--- a/Documentations/SysArchitecture.pptx
+++ b/Documentations/SysArchitecture.pptx
@@ -9,8 +9,8 @@
     <p:sldId id="266" r:id="rId3"/>
     <p:sldId id="261" r:id="rId4"/>
     <p:sldId id="268" r:id="rId5"/>
-    <p:sldId id="269" r:id="rId6"/>
-    <p:sldId id="271" r:id="rId7"/>
+    <p:sldId id="271" r:id="rId6"/>
+    <p:sldId id="272" r:id="rId7"/>
     <p:sldId id="270" r:id="rId8"/>
     <p:sldId id="262" r:id="rId9"/>
     <p:sldId id="264" r:id="rId10"/>
@@ -271,7 +271,7 @@
           <a:p>
             <a:fld id="{8377380A-1819-462E-96FD-3D6CBD777CA0}" type="datetimeFigureOut">
               <a:rPr lang="en-IL" smtClean="0"/>
-              <a:t>18/08/2025</a:t>
+              <a:t>19/08/2025</a:t>
             </a:fld>
             <a:endParaRPr lang="en-IL"/>
           </a:p>
@@ -471,7 +471,7 @@
           <a:p>
             <a:fld id="{8377380A-1819-462E-96FD-3D6CBD777CA0}" type="datetimeFigureOut">
               <a:rPr lang="en-IL" smtClean="0"/>
-              <a:t>18/08/2025</a:t>
+              <a:t>19/08/2025</a:t>
             </a:fld>
             <a:endParaRPr lang="en-IL"/>
           </a:p>
@@ -681,7 +681,7 @@
           <a:p>
             <a:fld id="{8377380A-1819-462E-96FD-3D6CBD777CA0}" type="datetimeFigureOut">
               <a:rPr lang="en-IL" smtClean="0"/>
-              <a:t>18/08/2025</a:t>
+              <a:t>19/08/2025</a:t>
             </a:fld>
             <a:endParaRPr lang="en-IL"/>
           </a:p>
@@ -881,7 +881,7 @@
           <a:p>
             <a:fld id="{8377380A-1819-462E-96FD-3D6CBD777CA0}" type="datetimeFigureOut">
               <a:rPr lang="en-IL" smtClean="0"/>
-              <a:t>18/08/2025</a:t>
+              <a:t>19/08/2025</a:t>
             </a:fld>
             <a:endParaRPr lang="en-IL"/>
           </a:p>
@@ -1157,7 +1157,7 @@
           <a:p>
             <a:fld id="{8377380A-1819-462E-96FD-3D6CBD777CA0}" type="datetimeFigureOut">
               <a:rPr lang="en-IL" smtClean="0"/>
-              <a:t>18/08/2025</a:t>
+              <a:t>19/08/2025</a:t>
             </a:fld>
             <a:endParaRPr lang="en-IL"/>
           </a:p>
@@ -1425,7 +1425,7 @@
           <a:p>
             <a:fld id="{8377380A-1819-462E-96FD-3D6CBD777CA0}" type="datetimeFigureOut">
               <a:rPr lang="en-IL" smtClean="0"/>
-              <a:t>18/08/2025</a:t>
+              <a:t>19/08/2025</a:t>
             </a:fld>
             <a:endParaRPr lang="en-IL"/>
           </a:p>
@@ -1840,7 +1840,7 @@
           <a:p>
             <a:fld id="{8377380A-1819-462E-96FD-3D6CBD777CA0}" type="datetimeFigureOut">
               <a:rPr lang="en-IL" smtClean="0"/>
-              <a:t>18/08/2025</a:t>
+              <a:t>19/08/2025</a:t>
             </a:fld>
             <a:endParaRPr lang="en-IL"/>
           </a:p>
@@ -1982,7 +1982,7 @@
           <a:p>
             <a:fld id="{8377380A-1819-462E-96FD-3D6CBD777CA0}" type="datetimeFigureOut">
               <a:rPr lang="en-IL" smtClean="0"/>
-              <a:t>18/08/2025</a:t>
+              <a:t>19/08/2025</a:t>
             </a:fld>
             <a:endParaRPr lang="en-IL"/>
           </a:p>
@@ -2095,7 +2095,7 @@
           <a:p>
             <a:fld id="{8377380A-1819-462E-96FD-3D6CBD777CA0}" type="datetimeFigureOut">
               <a:rPr lang="en-IL" smtClean="0"/>
-              <a:t>18/08/2025</a:t>
+              <a:t>19/08/2025</a:t>
             </a:fld>
             <a:endParaRPr lang="en-IL"/>
           </a:p>
@@ -2408,7 +2408,7 @@
           <a:p>
             <a:fld id="{8377380A-1819-462E-96FD-3D6CBD777CA0}" type="datetimeFigureOut">
               <a:rPr lang="en-IL" smtClean="0"/>
-              <a:t>18/08/2025</a:t>
+              <a:t>19/08/2025</a:t>
             </a:fld>
             <a:endParaRPr lang="en-IL"/>
           </a:p>
@@ -2697,7 +2697,7 @@
           <a:p>
             <a:fld id="{8377380A-1819-462E-96FD-3D6CBD777CA0}" type="datetimeFigureOut">
               <a:rPr lang="en-IL" smtClean="0"/>
-              <a:t>18/08/2025</a:t>
+              <a:t>19/08/2025</a:t>
             </a:fld>
             <a:endParaRPr lang="en-IL"/>
           </a:p>
@@ -2940,7 +2940,7 @@
           <a:p>
             <a:fld id="{8377380A-1819-462E-96FD-3D6CBD777CA0}" type="datetimeFigureOut">
               <a:rPr lang="en-IL" smtClean="0"/>
-              <a:t>18/08/2025</a:t>
+              <a:t>19/08/2025</a:t>
             </a:fld>
             <a:endParaRPr lang="en-IL"/>
           </a:p>
@@ -11195,940 +11195,6 @@
 <file path=ppt/slides/slide5.xml><?xml version="1.0" encoding="utf-8"?>
 <p:sld xmlns:a="http://schemas.openxmlformats.org/drawingml/2006/main" xmlns:r="http://schemas.openxmlformats.org/officeDocument/2006/relationships" xmlns:p="http://schemas.openxmlformats.org/presentationml/2006/main">
   <p:cSld>
-    <p:bg>
-      <p:bgPr>
-        <a:solidFill>
-          <a:schemeClr val="bg1"/>
-        </a:solidFill>
-        <a:effectLst/>
-      </p:bgPr>
-    </p:bg>
-    <p:spTree>
-      <p:nvGrpSpPr>
-        <p:cNvPr id="1" name=""/>
-        <p:cNvGrpSpPr/>
-        <p:nvPr/>
-      </p:nvGrpSpPr>
-      <p:grpSpPr>
-        <a:xfrm>
-          <a:off x="0" y="0"/>
-          <a:ext cx="0" cy="0"/>
-          <a:chOff x="0" y="0"/>
-          <a:chExt cx="0" cy="0"/>
-        </a:xfrm>
-      </p:grpSpPr>
-      <p:sp>
-        <p:nvSpPr>
-          <p:cNvPr id="9" name="Rectangle 8">
-            <a:extLst>
-              <a:ext uri="{FF2B5EF4-FFF2-40B4-BE49-F238E27FC236}">
-                <a16:creationId xmlns:a16="http://schemas.microsoft.com/office/drawing/2014/main" id="{F3060C83-F051-4F0E-ABAD-AA0DFC48B218}"/>
-              </a:ext>
-              <a:ext uri="{C183D7F6-B498-43B3-948B-1728B52AA6E4}">
-                <adec:decorative xmlns:adec="http://schemas.microsoft.com/office/drawing/2017/decorative" val="1"/>
-              </a:ext>
-            </a:extLst>
-          </p:cNvPr>
-          <p:cNvSpPr>
-            <a:spLocks noGrp="1" noRot="1" noChangeAspect="1" noMove="1" noResize="1" noEditPoints="1" noAdjustHandles="1" noChangeArrowheads="1" noChangeShapeType="1" noTextEdit="1"/>
-          </p:cNvSpPr>
-          <p:nvPr>
-            <p:extLst>
-              <p:ext uri="{386F3935-93C4-4BCD-93E2-E3B085C9AB24}">
-                <p16:designElem xmlns:p16="http://schemas.microsoft.com/office/powerpoint/2015/main" val="1"/>
-              </p:ext>
-            </p:extLst>
-          </p:nvPr>
-        </p:nvSpPr>
-        <p:spPr>
-          <a:xfrm>
-            <a:off x="0" y="0"/>
-            <a:ext cx="12192000" cy="6858000"/>
-          </a:xfrm>
-          <a:prstGeom prst="rect">
-            <a:avLst/>
-          </a:prstGeom>
-          <a:solidFill>
-            <a:schemeClr val="bg1"/>
-          </a:solidFill>
-          <a:ln>
-            <a:noFill/>
-          </a:ln>
-        </p:spPr>
-        <p:style>
-          <a:lnRef idx="2">
-            <a:schemeClr val="accent1">
-              <a:shade val="50000"/>
-            </a:schemeClr>
-          </a:lnRef>
-          <a:fillRef idx="1">
-            <a:schemeClr val="accent1"/>
-          </a:fillRef>
-          <a:effectRef idx="0">
-            <a:schemeClr val="accent1"/>
-          </a:effectRef>
-          <a:fontRef idx="minor">
-            <a:schemeClr val="lt1"/>
-          </a:fontRef>
-        </p:style>
-        <p:txBody>
-          <a:bodyPr rtlCol="0" anchor="ctr"/>
-          <a:lstStyle/>
-          <a:p>
-            <a:pPr algn="ctr"/>
-            <a:endParaRPr lang="en-US" dirty="0"/>
-          </a:p>
-        </p:txBody>
-      </p:sp>
-      <p:sp>
-        <p:nvSpPr>
-          <p:cNvPr id="11" name="Freeform: Shape 10">
-            <a:extLst>
-              <a:ext uri="{FF2B5EF4-FFF2-40B4-BE49-F238E27FC236}">
-                <a16:creationId xmlns:a16="http://schemas.microsoft.com/office/drawing/2014/main" id="{83C98ABE-055B-441F-B07E-44F97F083C39}"/>
-              </a:ext>
-              <a:ext uri="{C183D7F6-B498-43B3-948B-1728B52AA6E4}">
-                <adec:decorative xmlns:adec="http://schemas.microsoft.com/office/drawing/2017/decorative" val="1"/>
-              </a:ext>
-            </a:extLst>
-          </p:cNvPr>
-          <p:cNvSpPr>
-            <a:spLocks noGrp="1" noRot="1" noChangeAspect="1" noMove="1" noResize="1" noEditPoints="1" noAdjustHandles="1" noChangeArrowheads="1" noChangeShapeType="1" noTextEdit="1"/>
-          </p:cNvSpPr>
-          <p:nvPr>
-            <p:extLst>
-              <p:ext uri="{386F3935-93C4-4BCD-93E2-E3B085C9AB24}">
-                <p16:designElem xmlns:p16="http://schemas.microsoft.com/office/powerpoint/2015/main" val="1"/>
-              </p:ext>
-            </p:extLst>
-          </p:nvPr>
-        </p:nvSpPr>
-        <p:spPr>
-          <a:xfrm rot="18900000" flipH="1">
-            <a:off x="-376156" y="-253670"/>
-            <a:ext cx="1827638" cy="1376989"/>
-          </a:xfrm>
-          <a:custGeom>
-            <a:avLst/>
-            <a:gdLst>
-              <a:gd name="connsiteX0" fmla="*/ 0 w 1827638"/>
-              <a:gd name="connsiteY0" fmla="*/ 987379 h 1376989"/>
-              <a:gd name="connsiteX1" fmla="*/ 987379 w 1827638"/>
-              <a:gd name="connsiteY1" fmla="*/ 0 h 1376989"/>
-              <a:gd name="connsiteX2" fmla="*/ 1827638 w 1827638"/>
-              <a:gd name="connsiteY2" fmla="*/ 840260 h 1376989"/>
-              <a:gd name="connsiteX3" fmla="*/ 1827638 w 1827638"/>
-              <a:gd name="connsiteY3" fmla="*/ 1376989 h 1376989"/>
-              <a:gd name="connsiteX4" fmla="*/ 0 w 1827638"/>
-              <a:gd name="connsiteY4" fmla="*/ 1376989 h 1376989"/>
-            </a:gdLst>
-            <a:ahLst/>
-            <a:cxnLst>
-              <a:cxn ang="0">
-                <a:pos x="connsiteX0" y="connsiteY0"/>
-              </a:cxn>
-              <a:cxn ang="0">
-                <a:pos x="connsiteX1" y="connsiteY1"/>
-              </a:cxn>
-              <a:cxn ang="0">
-                <a:pos x="connsiteX2" y="connsiteY2"/>
-              </a:cxn>
-              <a:cxn ang="0">
-                <a:pos x="connsiteX3" y="connsiteY3"/>
-              </a:cxn>
-              <a:cxn ang="0">
-                <a:pos x="connsiteX4" y="connsiteY4"/>
-              </a:cxn>
-            </a:cxnLst>
-            <a:rect l="l" t="t" r="r" b="b"/>
-            <a:pathLst>
-              <a:path w="1827638" h="1376989">
-                <a:moveTo>
-                  <a:pt x="0" y="987379"/>
-                </a:moveTo>
-                <a:lnTo>
-                  <a:pt x="987379" y="0"/>
-                </a:lnTo>
-                <a:lnTo>
-                  <a:pt x="1827638" y="840260"/>
-                </a:lnTo>
-                <a:lnTo>
-                  <a:pt x="1827638" y="1376989"/>
-                </a:lnTo>
-                <a:lnTo>
-                  <a:pt x="0" y="1376989"/>
-                </a:lnTo>
-                <a:close/>
-              </a:path>
-            </a:pathLst>
-          </a:custGeom>
-          <a:solidFill>
-            <a:schemeClr val="accent1">
-              <a:alpha val="30000"/>
-            </a:schemeClr>
-          </a:solidFill>
-          <a:ln>
-            <a:noFill/>
-          </a:ln>
-        </p:spPr>
-        <p:style>
-          <a:lnRef idx="2">
-            <a:schemeClr val="accent1">
-              <a:shade val="50000"/>
-            </a:schemeClr>
-          </a:lnRef>
-          <a:fillRef idx="1">
-            <a:schemeClr val="accent1"/>
-          </a:fillRef>
-          <a:effectRef idx="0">
-            <a:schemeClr val="accent1"/>
-          </a:effectRef>
-          <a:fontRef idx="minor">
-            <a:schemeClr val="lt1"/>
-          </a:fontRef>
-        </p:style>
-        <p:txBody>
-          <a:bodyPr rtlCol="0" anchor="ctr"/>
-          <a:lstStyle/>
-          <a:p>
-            <a:pPr algn="ctr"/>
-            <a:endParaRPr lang="en-US" dirty="0"/>
-          </a:p>
-        </p:txBody>
-      </p:sp>
-      <p:sp>
-        <p:nvSpPr>
-          <p:cNvPr id="13" name="Rectangle 12">
-            <a:extLst>
-              <a:ext uri="{FF2B5EF4-FFF2-40B4-BE49-F238E27FC236}">
-                <a16:creationId xmlns:a16="http://schemas.microsoft.com/office/drawing/2014/main" id="{29FDB030-9B49-4CED-8CCD-4D99382388AC}"/>
-              </a:ext>
-              <a:ext uri="{C183D7F6-B498-43B3-948B-1728B52AA6E4}">
-                <adec:decorative xmlns:adec="http://schemas.microsoft.com/office/drawing/2017/decorative" val="1"/>
-              </a:ext>
-            </a:extLst>
-          </p:cNvPr>
-          <p:cNvSpPr>
-            <a:spLocks noGrp="1" noRot="1" noChangeAspect="1" noMove="1" noResize="1" noEditPoints="1" noAdjustHandles="1" noChangeArrowheads="1" noChangeShapeType="1" noTextEdit="1"/>
-          </p:cNvSpPr>
-          <p:nvPr>
-            <p:extLst>
-              <p:ext uri="{386F3935-93C4-4BCD-93E2-E3B085C9AB24}">
-                <p16:designElem xmlns:p16="http://schemas.microsoft.com/office/powerpoint/2015/main" val="1"/>
-              </p:ext>
-            </p:extLst>
-          </p:nvPr>
-        </p:nvSpPr>
-        <p:spPr>
-          <a:xfrm rot="18900000" flipH="1">
-            <a:off x="891641" y="422146"/>
-            <a:ext cx="645368" cy="645368"/>
-          </a:xfrm>
-          <a:prstGeom prst="rect">
-            <a:avLst/>
-          </a:prstGeom>
-          <a:solidFill>
-            <a:schemeClr val="accent1">
-              <a:alpha val="30000"/>
-            </a:schemeClr>
-          </a:solidFill>
-          <a:ln>
-            <a:noFill/>
-          </a:ln>
-        </p:spPr>
-        <p:style>
-          <a:lnRef idx="2">
-            <a:schemeClr val="accent1">
-              <a:shade val="50000"/>
-            </a:schemeClr>
-          </a:lnRef>
-          <a:fillRef idx="1">
-            <a:schemeClr val="accent1"/>
-          </a:fillRef>
-          <a:effectRef idx="0">
-            <a:schemeClr val="accent1"/>
-          </a:effectRef>
-          <a:fontRef idx="minor">
-            <a:schemeClr val="lt1"/>
-          </a:fontRef>
-        </p:style>
-        <p:txBody>
-          <a:bodyPr rtlCol="0" anchor="ctr"/>
-          <a:lstStyle/>
-          <a:p>
-            <a:pPr algn="ctr"/>
-            <a:endParaRPr lang="en-US"/>
-          </a:p>
-        </p:txBody>
-      </p:sp>
-      <p:sp>
-        <p:nvSpPr>
-          <p:cNvPr id="15" name="Rectangle 14">
-            <a:extLst>
-              <a:ext uri="{FF2B5EF4-FFF2-40B4-BE49-F238E27FC236}">
-                <a16:creationId xmlns:a16="http://schemas.microsoft.com/office/drawing/2014/main" id="{3783CA14-24A1-485C-8B30-D6A5D87987AD}"/>
-              </a:ext>
-              <a:ext uri="{C183D7F6-B498-43B3-948B-1728B52AA6E4}">
-                <adec:decorative xmlns:adec="http://schemas.microsoft.com/office/drawing/2017/decorative" val="1"/>
-              </a:ext>
-            </a:extLst>
-          </p:cNvPr>
-          <p:cNvSpPr>
-            <a:spLocks noGrp="1" noRot="1" noChangeAspect="1" noMove="1" noResize="1" noEditPoints="1" noAdjustHandles="1" noChangeArrowheads="1" noChangeShapeType="1" noTextEdit="1"/>
-          </p:cNvSpPr>
-          <p:nvPr>
-            <p:extLst>
-              <p:ext uri="{386F3935-93C4-4BCD-93E2-E3B085C9AB24}">
-                <p16:designElem xmlns:p16="http://schemas.microsoft.com/office/powerpoint/2015/main" val="1"/>
-              </p:ext>
-            </p:extLst>
-          </p:nvPr>
-        </p:nvSpPr>
-        <p:spPr>
-          <a:xfrm rot="18900000" flipH="1">
-            <a:off x="10043482" y="655140"/>
-            <a:ext cx="687472" cy="687472"/>
-          </a:xfrm>
-          <a:prstGeom prst="rect">
-            <a:avLst/>
-          </a:prstGeom>
-          <a:solidFill>
-            <a:schemeClr val="accent4">
-              <a:alpha val="30000"/>
-            </a:schemeClr>
-          </a:solidFill>
-          <a:ln>
-            <a:noFill/>
-          </a:ln>
-        </p:spPr>
-        <p:style>
-          <a:lnRef idx="2">
-            <a:schemeClr val="accent1">
-              <a:shade val="50000"/>
-            </a:schemeClr>
-          </a:lnRef>
-          <a:fillRef idx="1">
-            <a:schemeClr val="accent1"/>
-          </a:fillRef>
-          <a:effectRef idx="0">
-            <a:schemeClr val="accent1"/>
-          </a:effectRef>
-          <a:fontRef idx="minor">
-            <a:schemeClr val="lt1"/>
-          </a:fontRef>
-        </p:style>
-        <p:txBody>
-          <a:bodyPr rtlCol="0" anchor="ctr"/>
-          <a:lstStyle/>
-          <a:p>
-            <a:pPr algn="ctr"/>
-            <a:endParaRPr lang="en-US"/>
-          </a:p>
-        </p:txBody>
-      </p:sp>
-      <p:sp>
-        <p:nvSpPr>
-          <p:cNvPr id="17" name="Freeform: Shape 16">
-            <a:extLst>
-              <a:ext uri="{FF2B5EF4-FFF2-40B4-BE49-F238E27FC236}">
-                <a16:creationId xmlns:a16="http://schemas.microsoft.com/office/drawing/2014/main" id="{9A97C86A-04D6-40F7-AE84-31AB43E6A846}"/>
-              </a:ext>
-              <a:ext uri="{C183D7F6-B498-43B3-948B-1728B52AA6E4}">
-                <adec:decorative xmlns:adec="http://schemas.microsoft.com/office/drawing/2017/decorative" val="1"/>
-              </a:ext>
-            </a:extLst>
-          </p:cNvPr>
-          <p:cNvSpPr>
-            <a:spLocks noGrp="1" noRot="1" noChangeAspect="1" noMove="1" noResize="1" noEditPoints="1" noAdjustHandles="1" noChangeArrowheads="1" noChangeShapeType="1" noTextEdit="1"/>
-          </p:cNvSpPr>
-          <p:nvPr>
-            <p:extLst>
-              <p:ext uri="{386F3935-93C4-4BCD-93E2-E3B085C9AB24}">
-                <p16:designElem xmlns:p16="http://schemas.microsoft.com/office/powerpoint/2015/main" val="1"/>
-              </p:ext>
-            </p:extLst>
-          </p:nvPr>
-        </p:nvSpPr>
-        <p:spPr>
-          <a:xfrm rot="10800000" flipH="1">
-            <a:off x="9356643" y="0"/>
-            <a:ext cx="2835357" cy="1480837"/>
-          </a:xfrm>
-          <a:custGeom>
-            <a:avLst/>
-            <a:gdLst>
-              <a:gd name="connsiteX0" fmla="*/ 2835357 w 2835357"/>
-              <a:gd name="connsiteY0" fmla="*/ 1480837 h 1480837"/>
-              <a:gd name="connsiteX1" fmla="*/ 0 w 2835357"/>
-              <a:gd name="connsiteY1" fmla="*/ 1480837 h 1480837"/>
-              <a:gd name="connsiteX2" fmla="*/ 1552727 w 2835357"/>
-              <a:gd name="connsiteY2" fmla="*/ 0 h 1480837"/>
-              <a:gd name="connsiteX3" fmla="*/ 2835357 w 2835357"/>
-              <a:gd name="connsiteY3" fmla="*/ 1223245 h 1480837"/>
-            </a:gdLst>
-            <a:ahLst/>
-            <a:cxnLst>
-              <a:cxn ang="0">
-                <a:pos x="connsiteX0" y="connsiteY0"/>
-              </a:cxn>
-              <a:cxn ang="0">
-                <a:pos x="connsiteX1" y="connsiteY1"/>
-              </a:cxn>
-              <a:cxn ang="0">
-                <a:pos x="connsiteX2" y="connsiteY2"/>
-              </a:cxn>
-              <a:cxn ang="0">
-                <a:pos x="connsiteX3" y="connsiteY3"/>
-              </a:cxn>
-            </a:cxnLst>
-            <a:rect l="l" t="t" r="r" b="b"/>
-            <a:pathLst>
-              <a:path w="2835357" h="1480837">
-                <a:moveTo>
-                  <a:pt x="2835357" y="1480837"/>
-                </a:moveTo>
-                <a:lnTo>
-                  <a:pt x="0" y="1480837"/>
-                </a:lnTo>
-                <a:lnTo>
-                  <a:pt x="1552727" y="0"/>
-                </a:lnTo>
-                <a:lnTo>
-                  <a:pt x="2835357" y="1223245"/>
-                </a:lnTo>
-                <a:close/>
-              </a:path>
-            </a:pathLst>
-          </a:custGeom>
-          <a:solidFill>
-            <a:schemeClr val="accent4">
-              <a:alpha val="30000"/>
-            </a:schemeClr>
-          </a:solidFill>
-          <a:ln>
-            <a:noFill/>
-          </a:ln>
-        </p:spPr>
-        <p:style>
-          <a:lnRef idx="2">
-            <a:schemeClr val="accent1">
-              <a:shade val="50000"/>
-            </a:schemeClr>
-          </a:lnRef>
-          <a:fillRef idx="1">
-            <a:schemeClr val="accent1"/>
-          </a:fillRef>
-          <a:effectRef idx="0">
-            <a:schemeClr val="accent1"/>
-          </a:effectRef>
-          <a:fontRef idx="minor">
-            <a:schemeClr val="lt1"/>
-          </a:fontRef>
-        </p:style>
-        <p:txBody>
-          <a:bodyPr wrap="square" rtlCol="0" anchor="ctr">
-            <a:noAutofit/>
-          </a:bodyPr>
-          <a:lstStyle/>
-          <a:p>
-            <a:pPr algn="ctr"/>
-            <a:endParaRPr lang="en-US" dirty="0"/>
-          </a:p>
-        </p:txBody>
-      </p:sp>
-      <p:sp>
-        <p:nvSpPr>
-          <p:cNvPr id="19" name="Isosceles Triangle 18">
-            <a:extLst>
-              <a:ext uri="{FF2B5EF4-FFF2-40B4-BE49-F238E27FC236}">
-                <a16:creationId xmlns:a16="http://schemas.microsoft.com/office/drawing/2014/main" id="{FF9F2414-84E8-453E-B1F3-389FDE8192D9}"/>
-              </a:ext>
-              <a:ext uri="{C183D7F6-B498-43B3-948B-1728B52AA6E4}">
-                <adec:decorative xmlns:adec="http://schemas.microsoft.com/office/drawing/2017/decorative" val="1"/>
-              </a:ext>
-            </a:extLst>
-          </p:cNvPr>
-          <p:cNvSpPr>
-            <a:spLocks noGrp="1" noRot="1" noChangeAspect="1" noMove="1" noResize="1" noEditPoints="1" noAdjustHandles="1" noChangeArrowheads="1" noChangeShapeType="1" noTextEdit="1"/>
-          </p:cNvSpPr>
-          <p:nvPr>
-            <p:extLst>
-              <p:ext uri="{386F3935-93C4-4BCD-93E2-E3B085C9AB24}">
-                <p16:designElem xmlns:p16="http://schemas.microsoft.com/office/powerpoint/2015/main" val="1"/>
-              </p:ext>
-            </p:extLst>
-          </p:nvPr>
-        </p:nvSpPr>
-        <p:spPr>
-          <a:xfrm flipH="1">
-            <a:off x="7976344" y="6115501"/>
-            <a:ext cx="1494513" cy="742499"/>
-          </a:xfrm>
-          <a:prstGeom prst="triangle">
-            <a:avLst/>
-          </a:prstGeom>
-          <a:solidFill>
-            <a:schemeClr val="accent1">
-              <a:alpha val="30000"/>
-            </a:schemeClr>
-          </a:solidFill>
-          <a:ln>
-            <a:noFill/>
-          </a:ln>
-        </p:spPr>
-        <p:style>
-          <a:lnRef idx="2">
-            <a:schemeClr val="accent1">
-              <a:shade val="50000"/>
-            </a:schemeClr>
-          </a:lnRef>
-          <a:fillRef idx="1">
-            <a:schemeClr val="accent1"/>
-          </a:fillRef>
-          <a:effectRef idx="0">
-            <a:schemeClr val="accent1"/>
-          </a:effectRef>
-          <a:fontRef idx="minor">
-            <a:schemeClr val="lt1"/>
-          </a:fontRef>
-        </p:style>
-        <p:txBody>
-          <a:bodyPr rtlCol="0" anchor="ctr"/>
-          <a:lstStyle/>
-          <a:p>
-            <a:pPr algn="ctr"/>
-            <a:endParaRPr lang="en-US"/>
-          </a:p>
-        </p:txBody>
-      </p:sp>
-      <p:sp>
-        <p:nvSpPr>
-          <p:cNvPr id="21" name="Isosceles Triangle 20">
-            <a:extLst>
-              <a:ext uri="{FF2B5EF4-FFF2-40B4-BE49-F238E27FC236}">
-                <a16:creationId xmlns:a16="http://schemas.microsoft.com/office/drawing/2014/main" id="{3ECA69A1-7536-43AC-85EF-C7106179F5ED}"/>
-              </a:ext>
-              <a:ext uri="{C183D7F6-B498-43B3-948B-1728B52AA6E4}">
-                <adec:decorative xmlns:adec="http://schemas.microsoft.com/office/drawing/2017/decorative" val="1"/>
-              </a:ext>
-            </a:extLst>
-          </p:cNvPr>
-          <p:cNvSpPr>
-            <a:spLocks noGrp="1" noRot="1" noChangeAspect="1" noMove="1" noResize="1" noEditPoints="1" noAdjustHandles="1" noChangeArrowheads="1" noChangeShapeType="1" noTextEdit="1"/>
-          </p:cNvSpPr>
-          <p:nvPr>
-            <p:extLst>
-              <p:ext uri="{386F3935-93C4-4BCD-93E2-E3B085C9AB24}">
-                <p16:designElem xmlns:p16="http://schemas.microsoft.com/office/powerpoint/2015/main" val="1"/>
-              </p:ext>
-            </p:extLst>
-          </p:nvPr>
-        </p:nvSpPr>
-        <p:spPr>
-          <a:xfrm flipH="1">
-            <a:off x="7604080" y="6453143"/>
-            <a:ext cx="814903" cy="404857"/>
-          </a:xfrm>
-          <a:prstGeom prst="triangle">
-            <a:avLst/>
-          </a:prstGeom>
-          <a:solidFill>
-            <a:schemeClr val="accent1">
-              <a:alpha val="30000"/>
-            </a:schemeClr>
-          </a:solidFill>
-          <a:ln>
-            <a:noFill/>
-          </a:ln>
-        </p:spPr>
-        <p:style>
-          <a:lnRef idx="2">
-            <a:schemeClr val="accent1">
-              <a:shade val="50000"/>
-            </a:schemeClr>
-          </a:lnRef>
-          <a:fillRef idx="1">
-            <a:schemeClr val="accent1"/>
-          </a:fillRef>
-          <a:effectRef idx="0">
-            <a:schemeClr val="accent1"/>
-          </a:effectRef>
-          <a:fontRef idx="minor">
-            <a:schemeClr val="lt1"/>
-          </a:fontRef>
-        </p:style>
-        <p:txBody>
-          <a:bodyPr rtlCol="0" anchor="ctr"/>
-          <a:lstStyle/>
-          <a:p>
-            <a:pPr algn="ctr"/>
-            <a:endParaRPr lang="en-US"/>
-          </a:p>
-        </p:txBody>
-      </p:sp>
-      <p:sp>
-        <p:nvSpPr>
-          <p:cNvPr id="6" name="TextBox 5">
-            <a:extLst>
-              <a:ext uri="{FF2B5EF4-FFF2-40B4-BE49-F238E27FC236}">
-                <a16:creationId xmlns:a16="http://schemas.microsoft.com/office/drawing/2014/main" id="{42F092D9-9422-7B90-2990-F9E8BCF32CF5}"/>
-              </a:ext>
-            </a:extLst>
-          </p:cNvPr>
-          <p:cNvSpPr txBox="1"/>
-          <p:nvPr/>
-        </p:nvSpPr>
-        <p:spPr>
-          <a:xfrm>
-            <a:off x="1320800" y="790533"/>
-            <a:ext cx="9664700" cy="1380506"/>
-          </a:xfrm>
-          <a:prstGeom prst="rect">
-            <a:avLst/>
-          </a:prstGeom>
-          <a:noFill/>
-        </p:spPr>
-        <p:txBody>
-          <a:bodyPr wrap="square">
-            <a:spAutoFit/>
-          </a:bodyPr>
-          <a:lstStyle/>
-          <a:p>
-            <a:pPr algn="ctr">
-              <a:lnSpc>
-                <a:spcPts val="5100"/>
-              </a:lnSpc>
-              <a:buNone/>
-            </a:pPr>
-            <a:r>
-              <a:rPr lang="en-US" sz="4000" b="0" i="0" dirty="0">
-                <a:solidFill>
-                  <a:schemeClr val="accent1"/>
-                </a:solidFill>
-                <a:effectLst/>
-                <a:latin typeface="Noto Sans JP Thin" panose="020B0200000000000000" pitchFamily="34" charset="-128"/>
-                <a:ea typeface="Noto Sans JP Thin" panose="020B0200000000000000" pitchFamily="34" charset="-128"/>
-              </a:rPr>
-              <a:t>A2C - The AI-powered CRM your</a:t>
-            </a:r>
-          </a:p>
-          <a:p>
-            <a:pPr algn="ctr">
-              <a:lnSpc>
-                <a:spcPts val="5100"/>
-              </a:lnSpc>
-              <a:buNone/>
-            </a:pPr>
-            <a:r>
-              <a:rPr lang="en-US" sz="4000" b="0" i="0" dirty="0">
-                <a:solidFill>
-                  <a:schemeClr val="accent1"/>
-                </a:solidFill>
-                <a:effectLst/>
-                <a:latin typeface="Noto Sans JP Thin" panose="020B0200000000000000" pitchFamily="34" charset="-128"/>
-                <a:ea typeface="Noto Sans JP Thin" panose="020B0200000000000000" pitchFamily="34" charset="-128"/>
-              </a:rPr>
-              <a:t>team will love</a:t>
-            </a:r>
-          </a:p>
-        </p:txBody>
-      </p:sp>
-      <p:sp>
-        <p:nvSpPr>
-          <p:cNvPr id="7" name="Rectangle: Rounded Corners 6">
-            <a:extLst>
-              <a:ext uri="{FF2B5EF4-FFF2-40B4-BE49-F238E27FC236}">
-                <a16:creationId xmlns:a16="http://schemas.microsoft.com/office/drawing/2014/main" id="{C767CE8A-427D-4583-6496-B8DEBD8EA1D2}"/>
-              </a:ext>
-            </a:extLst>
-          </p:cNvPr>
-          <p:cNvSpPr/>
-          <p:nvPr/>
-        </p:nvSpPr>
-        <p:spPr>
-          <a:xfrm>
-            <a:off x="2209800" y="3302000"/>
-            <a:ext cx="1765300" cy="1092200"/>
-          </a:xfrm>
-          <a:prstGeom prst="roundRect">
-            <a:avLst/>
-          </a:prstGeom>
-          <a:noFill/>
-          <a:ln w="9525"/>
-        </p:spPr>
-        <p:style>
-          <a:lnRef idx="2">
-            <a:schemeClr val="accent1">
-              <a:shade val="15000"/>
-            </a:schemeClr>
-          </a:lnRef>
-          <a:fillRef idx="1">
-            <a:schemeClr val="accent1"/>
-          </a:fillRef>
-          <a:effectRef idx="0">
-            <a:schemeClr val="accent1"/>
-          </a:effectRef>
-          <a:fontRef idx="minor">
-            <a:schemeClr val="lt1"/>
-          </a:fontRef>
-        </p:style>
-        <p:txBody>
-          <a:bodyPr rtlCol="0" anchor="ctr"/>
-          <a:lstStyle/>
-          <a:p>
-            <a:pPr algn="ctr"/>
-            <a:r>
-              <a:rPr lang="en-US" sz="2400" dirty="0">
-                <a:solidFill>
-                  <a:schemeClr val="tx2">
-                    <a:lumMod val="90000"/>
-                    <a:lumOff val="10000"/>
-                  </a:schemeClr>
-                </a:solidFill>
-                <a:latin typeface="Noto Sans JP Thin" panose="020B0200000000000000" pitchFamily="34" charset="-128"/>
-                <a:ea typeface="Noto Sans JP Thin" panose="020B0200000000000000" pitchFamily="34" charset="-128"/>
-              </a:rPr>
-              <a:t>Users</a:t>
-            </a:r>
-            <a:endParaRPr lang="en-IL" sz="2400" dirty="0">
-              <a:solidFill>
-                <a:schemeClr val="tx2">
-                  <a:lumMod val="90000"/>
-                  <a:lumOff val="10000"/>
-                </a:schemeClr>
-              </a:solidFill>
-              <a:latin typeface="Noto Sans JP Thin" panose="020B0200000000000000" pitchFamily="34" charset="-128"/>
-              <a:ea typeface="Noto Sans JP Thin" panose="020B0200000000000000" pitchFamily="34" charset="-128"/>
-            </a:endParaRPr>
-          </a:p>
-        </p:txBody>
-      </p:sp>
-      <p:sp>
-        <p:nvSpPr>
-          <p:cNvPr id="8" name="Rectangle: Rounded Corners 7">
-            <a:extLst>
-              <a:ext uri="{FF2B5EF4-FFF2-40B4-BE49-F238E27FC236}">
-                <a16:creationId xmlns:a16="http://schemas.microsoft.com/office/drawing/2014/main" id="{D7509843-A905-17A7-655D-9C99B0FA186B}"/>
-              </a:ext>
-            </a:extLst>
-          </p:cNvPr>
-          <p:cNvSpPr/>
-          <p:nvPr/>
-        </p:nvSpPr>
-        <p:spPr>
-          <a:xfrm>
-            <a:off x="4241800" y="3302000"/>
-            <a:ext cx="1765300" cy="1092200"/>
-          </a:xfrm>
-          <a:prstGeom prst="roundRect">
-            <a:avLst/>
-          </a:prstGeom>
-          <a:noFill/>
-          <a:ln w="9525"/>
-        </p:spPr>
-        <p:style>
-          <a:lnRef idx="2">
-            <a:schemeClr val="accent1">
-              <a:shade val="15000"/>
-            </a:schemeClr>
-          </a:lnRef>
-          <a:fillRef idx="1">
-            <a:schemeClr val="accent1"/>
-          </a:fillRef>
-          <a:effectRef idx="0">
-            <a:schemeClr val="accent1"/>
-          </a:effectRef>
-          <a:fontRef idx="minor">
-            <a:schemeClr val="lt1"/>
-          </a:fontRef>
-        </p:style>
-        <p:txBody>
-          <a:bodyPr rtlCol="0" anchor="ctr"/>
-          <a:lstStyle/>
-          <a:p>
-            <a:pPr algn="ctr"/>
-            <a:r>
-              <a:rPr lang="en-US" sz="2400" dirty="0">
-                <a:solidFill>
-                  <a:schemeClr val="tx2">
-                    <a:lumMod val="90000"/>
-                    <a:lumOff val="10000"/>
-                  </a:schemeClr>
-                </a:solidFill>
-                <a:latin typeface="Noto Sans JP Thin" panose="020B0200000000000000" pitchFamily="34" charset="-128"/>
-                <a:ea typeface="Noto Sans JP Thin" panose="020B0200000000000000" pitchFamily="34" charset="-128"/>
-              </a:rPr>
-              <a:t>Customers</a:t>
-            </a:r>
-            <a:endParaRPr lang="en-IL" sz="2400" dirty="0">
-              <a:solidFill>
-                <a:schemeClr val="tx2">
-                  <a:lumMod val="90000"/>
-                  <a:lumOff val="10000"/>
-                </a:schemeClr>
-              </a:solidFill>
-              <a:latin typeface="Noto Sans JP Thin" panose="020B0200000000000000" pitchFamily="34" charset="-128"/>
-              <a:ea typeface="Noto Sans JP Thin" panose="020B0200000000000000" pitchFamily="34" charset="-128"/>
-            </a:endParaRPr>
-          </a:p>
-        </p:txBody>
-      </p:sp>
-      <p:sp>
-        <p:nvSpPr>
-          <p:cNvPr id="10" name="Rectangle: Rounded Corners 9">
-            <a:extLst>
-              <a:ext uri="{FF2B5EF4-FFF2-40B4-BE49-F238E27FC236}">
-                <a16:creationId xmlns:a16="http://schemas.microsoft.com/office/drawing/2014/main" id="{64F46349-61F2-626D-CD12-DE9047C4A70B}"/>
-              </a:ext>
-            </a:extLst>
-          </p:cNvPr>
-          <p:cNvSpPr/>
-          <p:nvPr/>
-        </p:nvSpPr>
-        <p:spPr>
-          <a:xfrm>
-            <a:off x="6273800" y="3302000"/>
-            <a:ext cx="1765300" cy="1092200"/>
-          </a:xfrm>
-          <a:prstGeom prst="roundRect">
-            <a:avLst/>
-          </a:prstGeom>
-          <a:noFill/>
-          <a:ln w="9525"/>
-        </p:spPr>
-        <p:style>
-          <a:lnRef idx="2">
-            <a:schemeClr val="accent1">
-              <a:shade val="15000"/>
-            </a:schemeClr>
-          </a:lnRef>
-          <a:fillRef idx="1">
-            <a:schemeClr val="accent1"/>
-          </a:fillRef>
-          <a:effectRef idx="0">
-            <a:schemeClr val="accent1"/>
-          </a:effectRef>
-          <a:fontRef idx="minor">
-            <a:schemeClr val="lt1"/>
-          </a:fontRef>
-        </p:style>
-        <p:txBody>
-          <a:bodyPr rtlCol="0" anchor="ctr"/>
-          <a:lstStyle/>
-          <a:p>
-            <a:pPr algn="ctr"/>
-            <a:r>
-              <a:rPr lang="en-US" sz="2400" dirty="0">
-                <a:solidFill>
-                  <a:schemeClr val="tx2">
-                    <a:lumMod val="90000"/>
-                    <a:lumOff val="10000"/>
-                  </a:schemeClr>
-                </a:solidFill>
-                <a:latin typeface="Noto Sans JP Thin" panose="020B0200000000000000" pitchFamily="34" charset="-128"/>
-                <a:ea typeface="Noto Sans JP Thin" panose="020B0200000000000000" pitchFamily="34" charset="-128"/>
-              </a:rPr>
-              <a:t>Products</a:t>
-            </a:r>
-            <a:endParaRPr lang="en-IL" sz="2400" dirty="0">
-              <a:solidFill>
-                <a:schemeClr val="tx2">
-                  <a:lumMod val="90000"/>
-                  <a:lumOff val="10000"/>
-                </a:schemeClr>
-              </a:solidFill>
-              <a:latin typeface="Noto Sans JP Thin" panose="020B0200000000000000" pitchFamily="34" charset="-128"/>
-              <a:ea typeface="Noto Sans JP Thin" panose="020B0200000000000000" pitchFamily="34" charset="-128"/>
-            </a:endParaRPr>
-          </a:p>
-        </p:txBody>
-      </p:sp>
-      <p:sp>
-        <p:nvSpPr>
-          <p:cNvPr id="12" name="Rectangle: Rounded Corners 11">
-            <a:extLst>
-              <a:ext uri="{FF2B5EF4-FFF2-40B4-BE49-F238E27FC236}">
-                <a16:creationId xmlns:a16="http://schemas.microsoft.com/office/drawing/2014/main" id="{999A1FC8-BEDD-F84A-0ABA-26C252BCE846}"/>
-              </a:ext>
-            </a:extLst>
-          </p:cNvPr>
-          <p:cNvSpPr/>
-          <p:nvPr/>
-        </p:nvSpPr>
-        <p:spPr>
-          <a:xfrm>
-            <a:off x="8305800" y="3302000"/>
-            <a:ext cx="1765300" cy="1092200"/>
-          </a:xfrm>
-          <a:prstGeom prst="roundRect">
-            <a:avLst/>
-          </a:prstGeom>
-          <a:noFill/>
-          <a:ln w="9525"/>
-        </p:spPr>
-        <p:style>
-          <a:lnRef idx="2">
-            <a:schemeClr val="accent1">
-              <a:shade val="15000"/>
-            </a:schemeClr>
-          </a:lnRef>
-          <a:fillRef idx="1">
-            <a:schemeClr val="accent1"/>
-          </a:fillRef>
-          <a:effectRef idx="0">
-            <a:schemeClr val="accent1"/>
-          </a:effectRef>
-          <a:fontRef idx="minor">
-            <a:schemeClr val="lt1"/>
-          </a:fontRef>
-        </p:style>
-        <p:txBody>
-          <a:bodyPr rtlCol="0" anchor="ctr"/>
-          <a:lstStyle/>
-          <a:p>
-            <a:pPr algn="ctr"/>
-            <a:r>
-              <a:rPr lang="en-US" sz="2400" dirty="0">
-                <a:solidFill>
-                  <a:schemeClr val="tx2">
-                    <a:lumMod val="90000"/>
-                    <a:lumOff val="10000"/>
-                  </a:schemeClr>
-                </a:solidFill>
-                <a:latin typeface="Noto Sans JP Thin" panose="020B0200000000000000" pitchFamily="34" charset="-128"/>
-                <a:ea typeface="Noto Sans JP Thin" panose="020B0200000000000000" pitchFamily="34" charset="-128"/>
-              </a:rPr>
-              <a:t>Orders</a:t>
-            </a:r>
-            <a:endParaRPr lang="en-IL" sz="2400" dirty="0">
-              <a:solidFill>
-                <a:schemeClr val="tx2">
-                  <a:lumMod val="90000"/>
-                  <a:lumOff val="10000"/>
-                </a:schemeClr>
-              </a:solidFill>
-              <a:latin typeface="Noto Sans JP Thin" panose="020B0200000000000000" pitchFamily="34" charset="-128"/>
-              <a:ea typeface="Noto Sans JP Thin" panose="020B0200000000000000" pitchFamily="34" charset="-128"/>
-            </a:endParaRPr>
-          </a:p>
-        </p:txBody>
-      </p:sp>
-    </p:spTree>
-    <p:extLst>
-      <p:ext uri="{BB962C8B-B14F-4D97-AF65-F5344CB8AC3E}">
-        <p14:creationId xmlns:p14="http://schemas.microsoft.com/office/powerpoint/2010/main" val="1299460525"/>
-      </p:ext>
-    </p:extLst>
-  </p:cSld>
-  <p:clrMapOvr>
-    <a:masterClrMapping/>
-  </p:clrMapOvr>
-</p:sld>
-</file>
-
-<file path=ppt/slides/slide6.xml><?xml version="1.0" encoding="utf-8"?>
-<p:sld xmlns:a="http://schemas.openxmlformats.org/drawingml/2006/main" xmlns:r="http://schemas.openxmlformats.org/officeDocument/2006/relationships" xmlns:p="http://schemas.openxmlformats.org/presentationml/2006/main">
-  <p:cSld>
     <p:spTree>
       <p:nvGrpSpPr>
         <p:cNvPr id="1" name=""/>
@@ -12189,6 +11255,72 @@
 </p:sld>
 </file>
 
+<file path=ppt/slides/slide6.xml><?xml version="1.0" encoding="utf-8"?>
+<p:sld xmlns:a="http://schemas.openxmlformats.org/drawingml/2006/main" xmlns:r="http://schemas.openxmlformats.org/officeDocument/2006/relationships" xmlns:p="http://schemas.openxmlformats.org/presentationml/2006/main">
+  <p:cSld>
+    <p:spTree>
+      <p:nvGrpSpPr>
+        <p:cNvPr id="1" name=""/>
+        <p:cNvGrpSpPr/>
+        <p:nvPr/>
+      </p:nvGrpSpPr>
+      <p:grpSpPr>
+        <a:xfrm>
+          <a:off x="0" y="0"/>
+          <a:ext cx="0" cy="0"/>
+          <a:chOff x="0" y="0"/>
+          <a:chExt cx="0" cy="0"/>
+        </a:xfrm>
+      </p:grpSpPr>
+      <p:pic>
+        <p:nvPicPr>
+          <p:cNvPr id="3" name="Picture 2">
+            <a:extLst>
+              <a:ext uri="{FF2B5EF4-FFF2-40B4-BE49-F238E27FC236}">
+                <a16:creationId xmlns:a16="http://schemas.microsoft.com/office/drawing/2014/main" id="{F89B5F49-256A-91EB-7D48-6A8A5D0F64CC}"/>
+              </a:ext>
+            </a:extLst>
+          </p:cNvPr>
+          <p:cNvPicPr>
+            <a:picLocks noChangeAspect="1"/>
+          </p:cNvPicPr>
+          <p:nvPr/>
+        </p:nvPicPr>
+        <p:blipFill>
+          <a:blip r:embed="rId2"/>
+          <a:stretch>
+            <a:fillRect/>
+          </a:stretch>
+        </p:blipFill>
+        <p:spPr>
+          <a:xfrm>
+            <a:off x="1162641" y="595236"/>
+            <a:ext cx="9429160" cy="5667527"/>
+          </a:xfrm>
+          <a:prstGeom prst="rect">
+            <a:avLst/>
+          </a:prstGeom>
+          <a:noFill/>
+          <a:ln>
+            <a:solidFill>
+              <a:schemeClr val="accent1"/>
+            </a:solidFill>
+          </a:ln>
+        </p:spPr>
+      </p:pic>
+    </p:spTree>
+    <p:extLst>
+      <p:ext uri="{BB962C8B-B14F-4D97-AF65-F5344CB8AC3E}">
+        <p14:creationId xmlns:p14="http://schemas.microsoft.com/office/powerpoint/2010/main" val="3443422260"/>
+      </p:ext>
+    </p:extLst>
+  </p:cSld>
+  <p:clrMapOvr>
+    <a:masterClrMapping/>
+  </p:clrMapOvr>
+</p:sld>
+</file>
+
 <file path=ppt/slides/slide7.xml><?xml version="1.0" encoding="utf-8"?>
 <p:sld xmlns:a="http://schemas.openxmlformats.org/drawingml/2006/main" xmlns:r="http://schemas.openxmlformats.org/officeDocument/2006/relationships" xmlns:p="http://schemas.openxmlformats.org/presentationml/2006/main">
   <p:cSld>
@@ -12206,6 +11338,41 @@
           <a:chExt cx="0" cy="0"/>
         </a:xfrm>
       </p:grpSpPr>
+      <p:pic>
+        <p:nvPicPr>
+          <p:cNvPr id="3" name="Picture 2">
+            <a:extLst>
+              <a:ext uri="{FF2B5EF4-FFF2-40B4-BE49-F238E27FC236}">
+                <a16:creationId xmlns:a16="http://schemas.microsoft.com/office/drawing/2014/main" id="{62EF3622-3E09-1582-E7C7-C93D2F126BBE}"/>
+              </a:ext>
+            </a:extLst>
+          </p:cNvPr>
+          <p:cNvPicPr>
+            <a:picLocks noChangeAspect="1"/>
+          </p:cNvPicPr>
+          <p:nvPr/>
+        </p:nvPicPr>
+        <p:blipFill>
+          <a:blip r:embed="rId2"/>
+          <a:stretch>
+            <a:fillRect/>
+          </a:stretch>
+        </p:blipFill>
+        <p:spPr>
+          <a:xfrm>
+            <a:off x="680936" y="1731524"/>
+            <a:ext cx="10542591" cy="2340962"/>
+          </a:xfrm>
+          <a:prstGeom prst="rect">
+            <a:avLst/>
+          </a:prstGeom>
+          <a:ln>
+            <a:solidFill>
+              <a:schemeClr val="accent1"/>
+            </a:solidFill>
+          </a:ln>
+        </p:spPr>
+      </p:pic>
     </p:spTree>
     <p:extLst>
       <p:ext uri="{BB962C8B-B14F-4D97-AF65-F5344CB8AC3E}">

--- a/Documentations/SysArchitecture.pptx
+++ b/Documentations/SysArchitecture.pptx
@@ -7,15 +7,16 @@
   <p:sldIdLst>
     <p:sldId id="256" r:id="rId2"/>
     <p:sldId id="266" r:id="rId3"/>
-    <p:sldId id="261" r:id="rId4"/>
-    <p:sldId id="268" r:id="rId5"/>
-    <p:sldId id="271" r:id="rId6"/>
-    <p:sldId id="272" r:id="rId7"/>
-    <p:sldId id="270" r:id="rId8"/>
-    <p:sldId id="262" r:id="rId9"/>
-    <p:sldId id="264" r:id="rId10"/>
-    <p:sldId id="267" r:id="rId11"/>
-    <p:sldId id="265" r:id="rId12"/>
+    <p:sldId id="273" r:id="rId4"/>
+    <p:sldId id="261" r:id="rId5"/>
+    <p:sldId id="268" r:id="rId6"/>
+    <p:sldId id="271" r:id="rId7"/>
+    <p:sldId id="272" r:id="rId8"/>
+    <p:sldId id="270" r:id="rId9"/>
+    <p:sldId id="262" r:id="rId10"/>
+    <p:sldId id="264" r:id="rId11"/>
+    <p:sldId id="267" r:id="rId12"/>
+    <p:sldId id="265" r:id="rId13"/>
   </p:sldIdLst>
   <p:sldSz cx="12192000" cy="6858000"/>
   <p:notesSz cx="6858000" cy="9144000"/>
@@ -271,7 +272,7 @@
           <a:p>
             <a:fld id="{8377380A-1819-462E-96FD-3D6CBD777CA0}" type="datetimeFigureOut">
               <a:rPr lang="en-IL" smtClean="0"/>
-              <a:t>19/08/2025</a:t>
+              <a:t>23/08/2025</a:t>
             </a:fld>
             <a:endParaRPr lang="en-IL"/>
           </a:p>
@@ -471,7 +472,7 @@
           <a:p>
             <a:fld id="{8377380A-1819-462E-96FD-3D6CBD777CA0}" type="datetimeFigureOut">
               <a:rPr lang="en-IL" smtClean="0"/>
-              <a:t>19/08/2025</a:t>
+              <a:t>23/08/2025</a:t>
             </a:fld>
             <a:endParaRPr lang="en-IL"/>
           </a:p>
@@ -681,7 +682,7 @@
           <a:p>
             <a:fld id="{8377380A-1819-462E-96FD-3D6CBD777CA0}" type="datetimeFigureOut">
               <a:rPr lang="en-IL" smtClean="0"/>
-              <a:t>19/08/2025</a:t>
+              <a:t>23/08/2025</a:t>
             </a:fld>
             <a:endParaRPr lang="en-IL"/>
           </a:p>
@@ -881,7 +882,7 @@
           <a:p>
             <a:fld id="{8377380A-1819-462E-96FD-3D6CBD777CA0}" type="datetimeFigureOut">
               <a:rPr lang="en-IL" smtClean="0"/>
-              <a:t>19/08/2025</a:t>
+              <a:t>23/08/2025</a:t>
             </a:fld>
             <a:endParaRPr lang="en-IL"/>
           </a:p>
@@ -1157,7 +1158,7 @@
           <a:p>
             <a:fld id="{8377380A-1819-462E-96FD-3D6CBD777CA0}" type="datetimeFigureOut">
               <a:rPr lang="en-IL" smtClean="0"/>
-              <a:t>19/08/2025</a:t>
+              <a:t>23/08/2025</a:t>
             </a:fld>
             <a:endParaRPr lang="en-IL"/>
           </a:p>
@@ -1425,7 +1426,7 @@
           <a:p>
             <a:fld id="{8377380A-1819-462E-96FD-3D6CBD777CA0}" type="datetimeFigureOut">
               <a:rPr lang="en-IL" smtClean="0"/>
-              <a:t>19/08/2025</a:t>
+              <a:t>23/08/2025</a:t>
             </a:fld>
             <a:endParaRPr lang="en-IL"/>
           </a:p>
@@ -1840,7 +1841,7 @@
           <a:p>
             <a:fld id="{8377380A-1819-462E-96FD-3D6CBD777CA0}" type="datetimeFigureOut">
               <a:rPr lang="en-IL" smtClean="0"/>
-              <a:t>19/08/2025</a:t>
+              <a:t>23/08/2025</a:t>
             </a:fld>
             <a:endParaRPr lang="en-IL"/>
           </a:p>
@@ -1982,7 +1983,7 @@
           <a:p>
             <a:fld id="{8377380A-1819-462E-96FD-3D6CBD777CA0}" type="datetimeFigureOut">
               <a:rPr lang="en-IL" smtClean="0"/>
-              <a:t>19/08/2025</a:t>
+              <a:t>23/08/2025</a:t>
             </a:fld>
             <a:endParaRPr lang="en-IL"/>
           </a:p>
@@ -2095,7 +2096,7 @@
           <a:p>
             <a:fld id="{8377380A-1819-462E-96FD-3D6CBD777CA0}" type="datetimeFigureOut">
               <a:rPr lang="en-IL" smtClean="0"/>
-              <a:t>19/08/2025</a:t>
+              <a:t>23/08/2025</a:t>
             </a:fld>
             <a:endParaRPr lang="en-IL"/>
           </a:p>
@@ -2408,7 +2409,7 @@
           <a:p>
             <a:fld id="{8377380A-1819-462E-96FD-3D6CBD777CA0}" type="datetimeFigureOut">
               <a:rPr lang="en-IL" smtClean="0"/>
-              <a:t>19/08/2025</a:t>
+              <a:t>23/08/2025</a:t>
             </a:fld>
             <a:endParaRPr lang="en-IL"/>
           </a:p>
@@ -2697,7 +2698,7 @@
           <a:p>
             <a:fld id="{8377380A-1819-462E-96FD-3D6CBD777CA0}" type="datetimeFigureOut">
               <a:rPr lang="en-IL" smtClean="0"/>
-              <a:t>19/08/2025</a:t>
+              <a:t>23/08/2025</a:t>
             </a:fld>
             <a:endParaRPr lang="en-IL"/>
           </a:p>
@@ -2940,7 +2941,7 @@
           <a:p>
             <a:fld id="{8377380A-1819-462E-96FD-3D6CBD777CA0}" type="datetimeFigureOut">
               <a:rPr lang="en-IL" smtClean="0"/>
-              <a:t>19/08/2025</a:t>
+              <a:t>23/08/2025</a:t>
             </a:fld>
             <a:endParaRPr lang="en-IL"/>
           </a:p>
@@ -3429,6 +3430,745 @@
   <p:cSld>
     <p:spTree>
       <p:nvGrpSpPr>
+        <p:cNvPr id="1" name="">
+          <a:extLst>
+            <a:ext uri="{FF2B5EF4-FFF2-40B4-BE49-F238E27FC236}">
+              <a16:creationId xmlns:a16="http://schemas.microsoft.com/office/drawing/2014/main" id="{8A80315B-977F-53A3-A176-4DBE858BEEDC}"/>
+            </a:ext>
+          </a:extLst>
+        </p:cNvPr>
+        <p:cNvGrpSpPr/>
+        <p:nvPr/>
+      </p:nvGrpSpPr>
+      <p:grpSpPr>
+        <a:xfrm>
+          <a:off x="0" y="0"/>
+          <a:ext cx="0" cy="0"/>
+          <a:chOff x="0" y="0"/>
+          <a:chExt cx="0" cy="0"/>
+        </a:xfrm>
+      </p:grpSpPr>
+      <p:grpSp>
+        <p:nvGrpSpPr>
+          <p:cNvPr id="4" name="Group 3">
+            <a:extLst>
+              <a:ext uri="{FF2B5EF4-FFF2-40B4-BE49-F238E27FC236}">
+                <a16:creationId xmlns:a16="http://schemas.microsoft.com/office/drawing/2014/main" id="{F388EE8C-03BB-2855-EA9E-24240F1CA08E}"/>
+              </a:ext>
+            </a:extLst>
+          </p:cNvPr>
+          <p:cNvGrpSpPr/>
+          <p:nvPr/>
+        </p:nvGrpSpPr>
+        <p:grpSpPr>
+          <a:xfrm>
+            <a:off x="2551176" y="1059740"/>
+            <a:ext cx="3621751" cy="1482292"/>
+            <a:chOff x="2037028" y="1176951"/>
+            <a:chExt cx="3108185" cy="2252047"/>
+          </a:xfrm>
+        </p:grpSpPr>
+        <p:sp>
+          <p:nvSpPr>
+            <p:cNvPr id="2" name="Rectangle 1">
+              <a:extLst>
+                <a:ext uri="{FF2B5EF4-FFF2-40B4-BE49-F238E27FC236}">
+                  <a16:creationId xmlns:a16="http://schemas.microsoft.com/office/drawing/2014/main" id="{8E274EA6-9412-5A4A-0059-BF214D4EF3AB}"/>
+                </a:ext>
+              </a:extLst>
+            </p:cNvPr>
+            <p:cNvSpPr/>
+            <p:nvPr/>
+          </p:nvSpPr>
+          <p:spPr>
+            <a:xfrm>
+              <a:off x="2037029" y="1176951"/>
+              <a:ext cx="3108183" cy="367079"/>
+            </a:xfrm>
+            <a:prstGeom prst="rect">
+              <a:avLst/>
+            </a:prstGeom>
+          </p:spPr>
+          <p:style>
+            <a:lnRef idx="2">
+              <a:schemeClr val="accent4">
+                <a:shade val="15000"/>
+              </a:schemeClr>
+            </a:lnRef>
+            <a:fillRef idx="1">
+              <a:schemeClr val="accent4"/>
+            </a:fillRef>
+            <a:effectRef idx="0">
+              <a:schemeClr val="accent4"/>
+            </a:effectRef>
+            <a:fontRef idx="minor">
+              <a:schemeClr val="lt1"/>
+            </a:fontRef>
+          </p:style>
+          <p:txBody>
+            <a:bodyPr rtlCol="0" anchor="ctr"/>
+            <a:lstStyle/>
+            <a:p>
+              <a:pPr algn="ctr"/>
+              <a:r>
+                <a:rPr lang="en-US" sz="1200" dirty="0"/>
+                <a:t>users</a:t>
+              </a:r>
+              <a:endParaRPr lang="en-IL" sz="1200" dirty="0"/>
+            </a:p>
+          </p:txBody>
+        </p:sp>
+        <p:sp>
+          <p:nvSpPr>
+            <p:cNvPr id="3" name="Rectangle 2">
+              <a:extLst>
+                <a:ext uri="{FF2B5EF4-FFF2-40B4-BE49-F238E27FC236}">
+                  <a16:creationId xmlns:a16="http://schemas.microsoft.com/office/drawing/2014/main" id="{7CE5B30F-F7B8-C9E2-0918-D79F11D0F812}"/>
+                </a:ext>
+              </a:extLst>
+            </p:cNvPr>
+            <p:cNvSpPr/>
+            <p:nvPr/>
+          </p:nvSpPr>
+          <p:spPr>
+            <a:xfrm>
+              <a:off x="2037028" y="1548759"/>
+              <a:ext cx="3108185" cy="1880239"/>
+            </a:xfrm>
+            <a:prstGeom prst="rect">
+              <a:avLst/>
+            </a:prstGeom>
+            <a:noFill/>
+          </p:spPr>
+          <p:style>
+            <a:lnRef idx="2">
+              <a:schemeClr val="accent1">
+                <a:shade val="15000"/>
+              </a:schemeClr>
+            </a:lnRef>
+            <a:fillRef idx="1">
+              <a:schemeClr val="accent1"/>
+            </a:fillRef>
+            <a:effectRef idx="0">
+              <a:schemeClr val="accent1"/>
+            </a:effectRef>
+            <a:fontRef idx="minor">
+              <a:schemeClr val="lt1"/>
+            </a:fontRef>
+          </p:style>
+          <p:txBody>
+            <a:bodyPr rtlCol="0" anchor="t"/>
+            <a:lstStyle/>
+            <a:p>
+              <a:r>
+                <a:rPr lang="en-US" sz="1200" b="1" dirty="0" err="1">
+                  <a:solidFill>
+                    <a:schemeClr val="tx1"/>
+                  </a:solidFill>
+                </a:rPr>
+                <a:t>user_id</a:t>
+              </a:r>
+              <a:r>
+                <a:rPr lang="en-US" sz="1200" b="1" dirty="0">
+                  <a:solidFill>
+                    <a:schemeClr val="tx1"/>
+                  </a:solidFill>
+                </a:rPr>
+                <a:t> </a:t>
+              </a:r>
+              <a:r>
+                <a:rPr lang="en-US" sz="1200" dirty="0">
+                  <a:solidFill>
+                    <a:schemeClr val="tx1"/>
+                  </a:solidFill>
+                </a:rPr>
+                <a:t>: </a:t>
+              </a:r>
+              <a:r>
+                <a:rPr lang="en-US" sz="1200" dirty="0" err="1">
+                  <a:solidFill>
+                    <a:schemeClr val="tx1"/>
+                  </a:solidFill>
+                </a:rPr>
+                <a:t>uuid</a:t>
+              </a:r>
+              <a:r>
+                <a:rPr lang="en-US" sz="1200" dirty="0">
+                  <a:solidFill>
+                    <a:schemeClr val="tx1"/>
+                  </a:solidFill>
+                </a:rPr>
+                <a:t> (PK)</a:t>
+              </a:r>
+            </a:p>
+            <a:p>
+              <a:r>
+                <a:rPr lang="en-US" sz="1200" dirty="0" err="1">
+                  <a:solidFill>
+                    <a:schemeClr val="tx1"/>
+                  </a:solidFill>
+                </a:rPr>
+                <a:t>user_name</a:t>
+              </a:r>
+              <a:r>
+                <a:rPr lang="en-US" sz="1200" dirty="0">
+                  <a:solidFill>
+                    <a:schemeClr val="tx1"/>
+                  </a:solidFill>
+                </a:rPr>
+                <a:t> : string</a:t>
+              </a:r>
+            </a:p>
+            <a:p>
+              <a:r>
+                <a:rPr lang="en-US" sz="1200" dirty="0" err="1">
+                  <a:solidFill>
+                    <a:schemeClr val="tx1"/>
+                  </a:solidFill>
+                </a:rPr>
+                <a:t>user_email</a:t>
+              </a:r>
+              <a:r>
+                <a:rPr lang="en-US" sz="1200" dirty="0">
+                  <a:solidFill>
+                    <a:schemeClr val="tx1"/>
+                  </a:solidFill>
+                </a:rPr>
+                <a:t> : string (Unique constraint)</a:t>
+              </a:r>
+            </a:p>
+            <a:p>
+              <a:r>
+                <a:rPr lang="en-US" sz="1200" dirty="0" err="1">
+                  <a:solidFill>
+                    <a:schemeClr val="tx1"/>
+                  </a:solidFill>
+                </a:rPr>
+                <a:t>user_password</a:t>
+              </a:r>
+              <a:r>
+                <a:rPr lang="en-US" sz="1200" dirty="0">
+                  <a:solidFill>
+                    <a:schemeClr val="tx1"/>
+                  </a:solidFill>
+                </a:rPr>
+                <a:t> : </a:t>
+              </a:r>
+              <a:r>
+                <a:rPr lang="en-US" sz="1200" dirty="0" err="1">
+                  <a:solidFill>
+                    <a:schemeClr val="tx1"/>
+                  </a:solidFill>
+                </a:rPr>
+                <a:t>Password_Hash</a:t>
+              </a:r>
+              <a:endParaRPr lang="en-US" sz="1200" dirty="0">
+                <a:solidFill>
+                  <a:schemeClr val="tx1"/>
+                </a:solidFill>
+              </a:endParaRPr>
+            </a:p>
+            <a:p>
+              <a:r>
+                <a:rPr lang="en-US" sz="1200" dirty="0" err="1">
+                  <a:solidFill>
+                    <a:schemeClr val="tx1"/>
+                  </a:solidFill>
+                </a:rPr>
+                <a:t>created_at</a:t>
+              </a:r>
+              <a:r>
+                <a:rPr lang="en-US" sz="1200" dirty="0">
+                  <a:solidFill>
+                    <a:schemeClr val="tx1"/>
+                  </a:solidFill>
+                </a:rPr>
+                <a:t> : datetime</a:t>
+              </a:r>
+            </a:p>
+            <a:p>
+              <a:r>
+                <a:rPr lang="en-US" sz="1200" dirty="0" err="1">
+                  <a:solidFill>
+                    <a:schemeClr val="tx1"/>
+                  </a:solidFill>
+                </a:rPr>
+                <a:t>user_role</a:t>
+              </a:r>
+              <a:r>
+                <a:rPr lang="en-US" sz="1200" dirty="0">
+                  <a:solidFill>
+                    <a:schemeClr val="tx1"/>
+                  </a:solidFill>
+                </a:rPr>
+                <a:t> int (user = 0, admin = 1, superuser = 2)</a:t>
+              </a:r>
+            </a:p>
+            <a:p>
+              <a:endParaRPr lang="en-US" sz="1200" dirty="0">
+                <a:solidFill>
+                  <a:schemeClr val="tx1"/>
+                </a:solidFill>
+              </a:endParaRPr>
+            </a:p>
+            <a:p>
+              <a:endParaRPr lang="en-US" sz="1200" dirty="0">
+                <a:solidFill>
+                  <a:schemeClr val="tx1"/>
+                </a:solidFill>
+              </a:endParaRPr>
+            </a:p>
+            <a:p>
+              <a:endParaRPr lang="en-US" sz="1200" dirty="0">
+                <a:solidFill>
+                  <a:schemeClr val="tx1"/>
+                </a:solidFill>
+              </a:endParaRPr>
+            </a:p>
+            <a:p>
+              <a:endParaRPr lang="en-US" sz="1200" dirty="0">
+                <a:solidFill>
+                  <a:schemeClr val="tx1"/>
+                </a:solidFill>
+              </a:endParaRPr>
+            </a:p>
+            <a:p>
+              <a:endParaRPr lang="en-US" sz="1200" dirty="0">
+                <a:solidFill>
+                  <a:schemeClr val="tx1"/>
+                </a:solidFill>
+              </a:endParaRPr>
+            </a:p>
+            <a:p>
+              <a:endParaRPr lang="en-IL" sz="1200" dirty="0"/>
+            </a:p>
+          </p:txBody>
+        </p:sp>
+      </p:grpSp>
+      <p:sp>
+        <p:nvSpPr>
+          <p:cNvPr id="35" name="Rectangle 34">
+            <a:extLst>
+              <a:ext uri="{FF2B5EF4-FFF2-40B4-BE49-F238E27FC236}">
+                <a16:creationId xmlns:a16="http://schemas.microsoft.com/office/drawing/2014/main" id="{459601A3-99ED-B43C-218A-119DF3434E31}"/>
+              </a:ext>
+            </a:extLst>
+          </p:cNvPr>
+          <p:cNvSpPr/>
+          <p:nvPr/>
+        </p:nvSpPr>
+        <p:spPr>
+          <a:xfrm>
+            <a:off x="4700171" y="76200"/>
+            <a:ext cx="3385068" cy="466687"/>
+          </a:xfrm>
+          <a:prstGeom prst="rect">
+            <a:avLst/>
+          </a:prstGeom>
+          <a:solidFill>
+            <a:schemeClr val="accent2">
+              <a:lumMod val="40000"/>
+              <a:lumOff val="60000"/>
+            </a:schemeClr>
+          </a:solidFill>
+        </p:spPr>
+        <p:style>
+          <a:lnRef idx="2">
+            <a:schemeClr val="accent1">
+              <a:shade val="15000"/>
+            </a:schemeClr>
+          </a:lnRef>
+          <a:fillRef idx="1">
+            <a:schemeClr val="accent1"/>
+          </a:fillRef>
+          <a:effectRef idx="0">
+            <a:schemeClr val="accent1"/>
+          </a:effectRef>
+          <a:fontRef idx="minor">
+            <a:schemeClr val="lt1"/>
+          </a:fontRef>
+        </p:style>
+        <p:txBody>
+          <a:bodyPr rtlCol="0" anchor="ctr"/>
+          <a:lstStyle/>
+          <a:p>
+            <a:pPr algn="ctr"/>
+            <a:r>
+              <a:rPr lang="en-US" dirty="0">
+                <a:solidFill>
+                  <a:schemeClr val="tx1"/>
+                </a:solidFill>
+              </a:rPr>
+              <a:t>Users Data Model</a:t>
+            </a:r>
+            <a:endParaRPr lang="en-IL" dirty="0">
+              <a:solidFill>
+                <a:schemeClr val="tx1"/>
+              </a:solidFill>
+            </a:endParaRPr>
+          </a:p>
+        </p:txBody>
+      </p:sp>
+      <p:grpSp>
+        <p:nvGrpSpPr>
+          <p:cNvPr id="70" name="Group 69">
+            <a:extLst>
+              <a:ext uri="{FF2B5EF4-FFF2-40B4-BE49-F238E27FC236}">
+                <a16:creationId xmlns:a16="http://schemas.microsoft.com/office/drawing/2014/main" id="{85825C91-5ADB-214A-91A8-802C8048308B}"/>
+              </a:ext>
+            </a:extLst>
+          </p:cNvPr>
+          <p:cNvGrpSpPr/>
+          <p:nvPr/>
+        </p:nvGrpSpPr>
+        <p:grpSpPr>
+          <a:xfrm>
+            <a:off x="7014999" y="1132093"/>
+            <a:ext cx="3006825" cy="1327643"/>
+            <a:chOff x="2029809" y="1176950"/>
+            <a:chExt cx="2136619" cy="3410259"/>
+          </a:xfrm>
+        </p:grpSpPr>
+        <p:sp>
+          <p:nvSpPr>
+            <p:cNvPr id="71" name="Rectangle 70">
+              <a:extLst>
+                <a:ext uri="{FF2B5EF4-FFF2-40B4-BE49-F238E27FC236}">
+                  <a16:creationId xmlns:a16="http://schemas.microsoft.com/office/drawing/2014/main" id="{CB0DD690-FD61-CD5A-E240-84522BE96D76}"/>
+                </a:ext>
+              </a:extLst>
+            </p:cNvPr>
+            <p:cNvSpPr/>
+            <p:nvPr/>
+          </p:nvSpPr>
+          <p:spPr>
+            <a:xfrm>
+              <a:off x="2029809" y="1176950"/>
+              <a:ext cx="2136619" cy="767730"/>
+            </a:xfrm>
+            <a:prstGeom prst="rect">
+              <a:avLst/>
+            </a:prstGeom>
+          </p:spPr>
+          <p:style>
+            <a:lnRef idx="2">
+              <a:schemeClr val="accent4">
+                <a:shade val="15000"/>
+              </a:schemeClr>
+            </a:lnRef>
+            <a:fillRef idx="1">
+              <a:schemeClr val="accent4"/>
+            </a:fillRef>
+            <a:effectRef idx="0">
+              <a:schemeClr val="accent4"/>
+            </a:effectRef>
+            <a:fontRef idx="minor">
+              <a:schemeClr val="lt1"/>
+            </a:fontRef>
+          </p:style>
+          <p:txBody>
+            <a:bodyPr rtlCol="0" anchor="ctr"/>
+            <a:lstStyle/>
+            <a:p>
+              <a:pPr algn="ctr"/>
+              <a:r>
+                <a:rPr lang="en-US" sz="1200" dirty="0" err="1"/>
+                <a:t>users_history</a:t>
+              </a:r>
+              <a:endParaRPr lang="en-IL" sz="1200" dirty="0"/>
+            </a:p>
+          </p:txBody>
+        </p:sp>
+        <p:sp>
+          <p:nvSpPr>
+            <p:cNvPr id="72" name="Rectangle 71">
+              <a:extLst>
+                <a:ext uri="{FF2B5EF4-FFF2-40B4-BE49-F238E27FC236}">
+                  <a16:creationId xmlns:a16="http://schemas.microsoft.com/office/drawing/2014/main" id="{6958FC87-2FE8-1E33-9044-CAD0A96A1188}"/>
+                </a:ext>
+              </a:extLst>
+            </p:cNvPr>
+            <p:cNvSpPr/>
+            <p:nvPr/>
+          </p:nvSpPr>
+          <p:spPr>
+            <a:xfrm>
+              <a:off x="2029810" y="1944679"/>
+              <a:ext cx="2136618" cy="2642530"/>
+            </a:xfrm>
+            <a:prstGeom prst="rect">
+              <a:avLst/>
+            </a:prstGeom>
+            <a:noFill/>
+          </p:spPr>
+          <p:style>
+            <a:lnRef idx="2">
+              <a:schemeClr val="accent1">
+                <a:shade val="15000"/>
+              </a:schemeClr>
+            </a:lnRef>
+            <a:fillRef idx="1">
+              <a:schemeClr val="accent1"/>
+            </a:fillRef>
+            <a:effectRef idx="0">
+              <a:schemeClr val="accent1"/>
+            </a:effectRef>
+            <a:fontRef idx="minor">
+              <a:schemeClr val="lt1"/>
+            </a:fontRef>
+          </p:style>
+          <p:txBody>
+            <a:bodyPr rtlCol="0" anchor="t"/>
+            <a:lstStyle/>
+            <a:p>
+              <a:r>
+                <a:rPr lang="en-US" sz="1200" b="1" dirty="0" err="1">
+                  <a:solidFill>
+                    <a:schemeClr val="tx1"/>
+                  </a:solidFill>
+                </a:rPr>
+                <a:t>history_id</a:t>
+              </a:r>
+              <a:r>
+                <a:rPr lang="en-US" sz="1200" dirty="0">
+                  <a:solidFill>
+                    <a:schemeClr val="tx1"/>
+                  </a:solidFill>
+                </a:rPr>
+                <a:t> : </a:t>
+              </a:r>
+              <a:r>
+                <a:rPr lang="en-US" sz="1200" dirty="0" err="1">
+                  <a:solidFill>
+                    <a:schemeClr val="tx1"/>
+                  </a:solidFill>
+                </a:rPr>
+                <a:t>uuid</a:t>
+              </a:r>
+              <a:r>
+                <a:rPr lang="en-US" sz="1200" dirty="0">
+                  <a:solidFill>
+                    <a:schemeClr val="tx1"/>
+                  </a:solidFill>
+                </a:rPr>
+                <a:t> (PK)</a:t>
+              </a:r>
+            </a:p>
+            <a:p>
+              <a:r>
+                <a:rPr lang="en-US" sz="1200" dirty="0" err="1">
+                  <a:solidFill>
+                    <a:schemeClr val="tx1"/>
+                  </a:solidFill>
+                </a:rPr>
+                <a:t>user_id</a:t>
+              </a:r>
+              <a:r>
+                <a:rPr lang="en-US" sz="1200" dirty="0">
+                  <a:solidFill>
+                    <a:schemeClr val="tx1"/>
+                  </a:solidFill>
+                </a:rPr>
+                <a:t> : </a:t>
+              </a:r>
+              <a:r>
+                <a:rPr lang="en-US" sz="1200" dirty="0" err="1">
+                  <a:solidFill>
+                    <a:schemeClr val="tx1"/>
+                  </a:solidFill>
+                </a:rPr>
+                <a:t>uuid</a:t>
+              </a:r>
+              <a:r>
+                <a:rPr lang="en-US" sz="1200" dirty="0">
+                  <a:solidFill>
+                    <a:schemeClr val="tx1"/>
+                  </a:solidFill>
+                </a:rPr>
+                <a:t> (FK)</a:t>
+              </a:r>
+            </a:p>
+            <a:p>
+              <a:r>
+                <a:rPr lang="en-US" sz="1200" dirty="0" err="1">
+                  <a:solidFill>
+                    <a:schemeClr val="tx1"/>
+                  </a:solidFill>
+                </a:rPr>
+                <a:t>last_login_date</a:t>
+              </a:r>
+              <a:r>
+                <a:rPr lang="en-US" sz="1200" dirty="0">
+                  <a:solidFill>
+                    <a:schemeClr val="tx1"/>
+                  </a:solidFill>
+                </a:rPr>
+                <a:t> : datetime</a:t>
+              </a:r>
+            </a:p>
+            <a:p>
+              <a:r>
+                <a:rPr lang="en-US" sz="1200" dirty="0" err="1">
+                  <a:solidFill>
+                    <a:schemeClr val="tx1"/>
+                  </a:solidFill>
+                </a:rPr>
+                <a:t>login_ip</a:t>
+              </a:r>
+              <a:r>
+                <a:rPr lang="en-US" sz="1200" dirty="0">
+                  <a:solidFill>
+                    <a:schemeClr val="tx1"/>
+                  </a:solidFill>
+                </a:rPr>
+                <a:t> : string</a:t>
+              </a:r>
+            </a:p>
+            <a:p>
+              <a:r>
+                <a:rPr lang="en-US" sz="1200" dirty="0" err="1">
+                  <a:solidFill>
+                    <a:schemeClr val="tx1"/>
+                  </a:solidFill>
+                </a:rPr>
+                <a:t>login_status</a:t>
+              </a:r>
+              <a:r>
+                <a:rPr lang="en-US" sz="1200" dirty="0">
+                  <a:solidFill>
+                    <a:schemeClr val="tx1"/>
+                  </a:solidFill>
+                </a:rPr>
+                <a:t> : int (success = 0, Failure = 1)</a:t>
+              </a:r>
+            </a:p>
+            <a:p>
+              <a:endParaRPr lang="en-IL" sz="1200" dirty="0"/>
+            </a:p>
+          </p:txBody>
+        </p:sp>
+      </p:grpSp>
+      <p:cxnSp>
+        <p:nvCxnSpPr>
+          <p:cNvPr id="12" name="Straight Arrow Connector 11">
+            <a:extLst>
+              <a:ext uri="{FF2B5EF4-FFF2-40B4-BE49-F238E27FC236}">
+                <a16:creationId xmlns:a16="http://schemas.microsoft.com/office/drawing/2014/main" id="{8DCABB9A-F3EC-F982-1334-4892148EEF6F}"/>
+              </a:ext>
+            </a:extLst>
+          </p:cNvPr>
+          <p:cNvCxnSpPr>
+            <a:cxnSpLocks/>
+          </p:cNvCxnSpPr>
+          <p:nvPr/>
+        </p:nvCxnSpPr>
+        <p:spPr>
+          <a:xfrm>
+            <a:off x="6172927" y="1674019"/>
+            <a:ext cx="842072" cy="0"/>
+          </a:xfrm>
+          <a:prstGeom prst="straightConnector1">
+            <a:avLst/>
+          </a:prstGeom>
+          <a:ln>
+            <a:tailEnd type="triangle"/>
+          </a:ln>
+        </p:spPr>
+        <p:style>
+          <a:lnRef idx="2">
+            <a:schemeClr val="accent1"/>
+          </a:lnRef>
+          <a:fillRef idx="0">
+            <a:schemeClr val="accent1"/>
+          </a:fillRef>
+          <a:effectRef idx="1">
+            <a:schemeClr val="accent1"/>
+          </a:effectRef>
+          <a:fontRef idx="minor">
+            <a:schemeClr val="tx1"/>
+          </a:fontRef>
+        </p:style>
+      </p:cxnSp>
+      <p:sp>
+        <p:nvSpPr>
+          <p:cNvPr id="14" name="Rectangle 13">
+            <a:extLst>
+              <a:ext uri="{FF2B5EF4-FFF2-40B4-BE49-F238E27FC236}">
+                <a16:creationId xmlns:a16="http://schemas.microsoft.com/office/drawing/2014/main" id="{CDBAB245-6770-65A1-67DF-0FD3020F767B}"/>
+              </a:ext>
+            </a:extLst>
+          </p:cNvPr>
+          <p:cNvSpPr/>
+          <p:nvPr/>
+        </p:nvSpPr>
+        <p:spPr>
+          <a:xfrm>
+            <a:off x="6526431" y="1429821"/>
+            <a:ext cx="458005" cy="280774"/>
+          </a:xfrm>
+          <a:prstGeom prst="rect">
+            <a:avLst/>
+          </a:prstGeom>
+          <a:noFill/>
+          <a:ln>
+            <a:noFill/>
+          </a:ln>
+        </p:spPr>
+        <p:style>
+          <a:lnRef idx="2">
+            <a:schemeClr val="accent1">
+              <a:shade val="15000"/>
+            </a:schemeClr>
+          </a:lnRef>
+          <a:fillRef idx="1">
+            <a:schemeClr val="accent1"/>
+          </a:fillRef>
+          <a:effectRef idx="0">
+            <a:schemeClr val="accent1"/>
+          </a:effectRef>
+          <a:fontRef idx="minor">
+            <a:schemeClr val="lt1"/>
+          </a:fontRef>
+        </p:style>
+        <p:txBody>
+          <a:bodyPr rtlCol="0" anchor="ctr"/>
+          <a:lstStyle/>
+          <a:p>
+            <a:pPr algn="ctr"/>
+            <a:r>
+              <a:rPr lang="en-US" sz="1000" dirty="0">
+                <a:solidFill>
+                  <a:schemeClr val="tx1"/>
+                </a:solidFill>
+              </a:rPr>
+              <a:t>1:N</a:t>
+            </a:r>
+            <a:endParaRPr lang="en-IL" sz="1000" dirty="0">
+              <a:solidFill>
+                <a:schemeClr val="tx1"/>
+              </a:solidFill>
+            </a:endParaRPr>
+          </a:p>
+        </p:txBody>
+      </p:sp>
+    </p:spTree>
+    <p:extLst>
+      <p:ext uri="{BB962C8B-B14F-4D97-AF65-F5344CB8AC3E}">
+        <p14:creationId xmlns:p14="http://schemas.microsoft.com/office/powerpoint/2010/main" val="3836392025"/>
+      </p:ext>
+    </p:extLst>
+  </p:cSld>
+  <p:clrMapOvr>
+    <a:masterClrMapping/>
+  </p:clrMapOvr>
+</p:sld>
+</file>
+
+<file path=ppt/slides/slide11.xml><?xml version="1.0" encoding="utf-8"?>
+<p:sld xmlns:a="http://schemas.openxmlformats.org/drawingml/2006/main" xmlns:r="http://schemas.openxmlformats.org/officeDocument/2006/relationships" xmlns:p="http://schemas.openxmlformats.org/presentationml/2006/main">
+  <p:cSld>
+    <p:spTree>
+      <p:nvGrpSpPr>
         <p:cNvPr id="1" name=""/>
         <p:cNvGrpSpPr/>
         <p:nvPr/>
@@ -5221,7 +5961,7 @@
 </p:sld>
 </file>
 
-<file path=ppt/slides/slide11.xml><?xml version="1.0" encoding="utf-8"?>
+<file path=ppt/slides/slide12.xml><?xml version="1.0" encoding="utf-8"?>
 <p:sld xmlns:a="http://schemas.openxmlformats.org/drawingml/2006/main" xmlns:r="http://schemas.openxmlformats.org/officeDocument/2006/relationships" xmlns:p="http://schemas.openxmlformats.org/presentationml/2006/main">
   <p:cSld>
     <p:spTree>
@@ -5318,8 +6058,8 @@
         </p:nvSpPr>
         <p:spPr>
           <a:xfrm>
-            <a:off x="2205282" y="1273570"/>
-            <a:ext cx="1035594" cy="430803"/>
+            <a:off x="713232" y="1143000"/>
+            <a:ext cx="1183476" cy="570517"/>
           </a:xfrm>
           <a:prstGeom prst="roundRect">
             <a:avLst/>
@@ -5368,8 +6108,8 @@
         </p:nvSpPr>
         <p:spPr>
           <a:xfrm>
-            <a:off x="4053418" y="1273570"/>
-            <a:ext cx="1035594" cy="430816"/>
+            <a:off x="2643664" y="1142996"/>
+            <a:ext cx="1183476" cy="570534"/>
           </a:xfrm>
           <a:prstGeom prst="roundRect">
             <a:avLst/>
@@ -5405,7 +6145,14 @@
             <a:pPr algn="ctr"/>
             <a:r>
               <a:rPr lang="en-US" sz="1100" dirty="0"/>
-              <a:t>&lt;&lt;Browser&gt;&gt;</a:t>
+              <a:t>&lt;&lt;Browser\</a:t>
+            </a:r>
+          </a:p>
+          <a:p>
+            <a:pPr algn="ctr"/>
+            <a:r>
+              <a:rPr lang="en-US" sz="1100" dirty="0"/>
+              <a:t>Mobile app&gt;&gt;</a:t>
             </a:r>
             <a:endParaRPr lang="en-IL" sz="1100" dirty="0"/>
           </a:p>
@@ -5425,8 +6172,8 @@
         </p:nvSpPr>
         <p:spPr>
           <a:xfrm>
-            <a:off x="6229288" y="1273571"/>
-            <a:ext cx="1021028" cy="430802"/>
+            <a:off x="4711886" y="1143001"/>
+            <a:ext cx="1166830" cy="570516"/>
           </a:xfrm>
           <a:prstGeom prst="roundRect">
             <a:avLst/>
@@ -5455,6 +6202,13 @@
             <a:pPr algn="ctr"/>
             <a:r>
               <a:rPr lang="en-US" sz="1200" dirty="0"/>
+              <a:t>Gateway</a:t>
+            </a:r>
+          </a:p>
+          <a:p>
+            <a:pPr algn="ctr"/>
+            <a:r>
+              <a:rPr lang="en-US" sz="1200" dirty="0"/>
               <a:t>Server</a:t>
             </a:r>
             <a:endParaRPr lang="en-IL" sz="1000" dirty="0"/>
@@ -5475,8 +6229,8 @@
         </p:nvSpPr>
         <p:spPr>
           <a:xfrm>
-            <a:off x="8141674" y="1273571"/>
-            <a:ext cx="1021028" cy="430802"/>
+            <a:off x="10592768" y="1143001"/>
+            <a:ext cx="1166830" cy="570516"/>
           </a:xfrm>
           <a:prstGeom prst="roundRect">
             <a:avLst/>
@@ -5525,7 +6279,7 @@
         </p:nvSpPr>
         <p:spPr>
           <a:xfrm>
-            <a:off x="2869125" y="1902688"/>
+            <a:off x="1524957" y="1811248"/>
             <a:ext cx="1526262" cy="197809"/>
           </a:xfrm>
           <a:prstGeom prst="roundRect">
@@ -5589,7 +6343,7 @@
         </p:nvCxnSpPr>
         <p:spPr>
           <a:xfrm>
-            <a:off x="2713329" y="2095468"/>
+            <a:off x="1323441" y="2013172"/>
             <a:ext cx="1837854" cy="0"/>
           </a:xfrm>
           <a:prstGeom prst="straightConnector1">
@@ -5627,9 +6381,9 @@
           <p:nvPr/>
         </p:nvSpPr>
         <p:spPr>
-          <a:xfrm>
-            <a:off x="4534856" y="1745350"/>
-            <a:ext cx="45719" cy="3561541"/>
+          <a:xfrm flipH="1">
+            <a:off x="3144969" y="1745349"/>
+            <a:ext cx="45719" cy="4428957"/>
           </a:xfrm>
           <a:prstGeom prst="rect">
             <a:avLst/>
@@ -5682,9 +6436,9 @@
           <p:nvPr/>
         </p:nvCxnSpPr>
         <p:spPr>
-          <a:xfrm flipH="1">
-            <a:off x="2713329" y="1704373"/>
-            <a:ext cx="9750" cy="3606533"/>
+          <a:xfrm>
+            <a:off x="1304970" y="1713517"/>
+            <a:ext cx="9917" cy="4411018"/>
           </a:xfrm>
           <a:prstGeom prst="line">
             <a:avLst/>
@@ -5710,10 +6464,10 @@
       </p:cxnSp>
       <p:sp>
         <p:nvSpPr>
-          <p:cNvPr id="24" name="Rectangle 23">
-            <a:extLst>
-              <a:ext uri="{FF2B5EF4-FFF2-40B4-BE49-F238E27FC236}">
-                <a16:creationId xmlns:a16="http://schemas.microsoft.com/office/drawing/2014/main" id="{EA8EE5C9-3D41-92DE-B565-A0DA78877F9B}"/>
+          <p:cNvPr id="25" name="Rectangle: Rounded Corners 24">
+            <a:extLst>
+              <a:ext uri="{FF2B5EF4-FFF2-40B4-BE49-F238E27FC236}">
+                <a16:creationId xmlns:a16="http://schemas.microsoft.com/office/drawing/2014/main" id="{FEA9289A-8C23-2B52-87B8-3256D09322E1}"/>
               </a:ext>
             </a:extLst>
           </p:cNvPr>
@@ -5722,59 +6476,7 @@
         </p:nvSpPr>
         <p:spPr>
           <a:xfrm>
-            <a:off x="6724860" y="1745350"/>
-            <a:ext cx="45719" cy="3561541"/>
-          </a:xfrm>
-          <a:prstGeom prst="rect">
-            <a:avLst/>
-          </a:prstGeom>
-          <a:noFill/>
-          <a:ln>
-            <a:solidFill>
-              <a:schemeClr val="tx1"/>
-            </a:solidFill>
-          </a:ln>
-        </p:spPr>
-        <p:style>
-          <a:lnRef idx="2">
-            <a:schemeClr val="accent1">
-              <a:shade val="15000"/>
-            </a:schemeClr>
-          </a:lnRef>
-          <a:fillRef idx="1">
-            <a:schemeClr val="accent1"/>
-          </a:fillRef>
-          <a:effectRef idx="0">
-            <a:schemeClr val="accent1"/>
-          </a:effectRef>
-          <a:fontRef idx="minor">
-            <a:schemeClr val="lt1"/>
-          </a:fontRef>
-        </p:style>
-        <p:txBody>
-          <a:bodyPr rtlCol="0" anchor="ctr"/>
-          <a:lstStyle/>
-          <a:p>
-            <a:pPr algn="ctr"/>
-            <a:endParaRPr lang="en-IL"/>
-          </a:p>
-        </p:txBody>
-      </p:sp>
-      <p:sp>
-        <p:nvSpPr>
-          <p:cNvPr id="25" name="Rectangle: Rounded Corners 24">
-            <a:extLst>
-              <a:ext uri="{FF2B5EF4-FFF2-40B4-BE49-F238E27FC236}">
-                <a16:creationId xmlns:a16="http://schemas.microsoft.com/office/drawing/2014/main" id="{FEA9289A-8C23-2B52-87B8-3256D09322E1}"/>
-              </a:ext>
-            </a:extLst>
-          </p:cNvPr>
-          <p:cNvSpPr/>
-          <p:nvPr/>
-        </p:nvSpPr>
-        <p:spPr>
-          <a:xfrm>
-            <a:off x="4767197" y="2202866"/>
+            <a:off x="3423029" y="2083994"/>
             <a:ext cx="1526262" cy="197809"/>
           </a:xfrm>
           <a:prstGeom prst="roundRect">
@@ -5812,7 +6514,7 @@
                   <a:schemeClr val="tx1"/>
                 </a:solidFill>
               </a:rPr>
-              <a:t>POST / Login (JSON)</a:t>
+              <a:t>POST Login (JSON)</a:t>
             </a:r>
             <a:endParaRPr lang="en-IL" sz="1000" dirty="0">
               <a:solidFill>
@@ -5838,8 +6540,8 @@
         </p:nvCxnSpPr>
         <p:spPr>
           <a:xfrm>
-            <a:off x="4602165" y="2395646"/>
-            <a:ext cx="2122695" cy="0"/>
+            <a:off x="3212277" y="2285918"/>
+            <a:ext cx="2088319" cy="1"/>
           </a:xfrm>
           <a:prstGeom prst="straightConnector1">
             <a:avLst/>
@@ -5863,161 +6565,6 @@
           </a:fontRef>
         </p:style>
       </p:cxnSp>
-      <p:sp>
-        <p:nvSpPr>
-          <p:cNvPr id="27" name="Rectangle 26">
-            <a:extLst>
-              <a:ext uri="{FF2B5EF4-FFF2-40B4-BE49-F238E27FC236}">
-                <a16:creationId xmlns:a16="http://schemas.microsoft.com/office/drawing/2014/main" id="{8A7E9FDD-96C6-F894-ABA3-85DD817AD64E}"/>
-              </a:ext>
-            </a:extLst>
-          </p:cNvPr>
-          <p:cNvSpPr/>
-          <p:nvPr/>
-        </p:nvSpPr>
-        <p:spPr>
-          <a:xfrm>
-            <a:off x="8626192" y="1745350"/>
-            <a:ext cx="45719" cy="3561541"/>
-          </a:xfrm>
-          <a:prstGeom prst="rect">
-            <a:avLst/>
-          </a:prstGeom>
-          <a:noFill/>
-          <a:ln>
-            <a:solidFill>
-              <a:schemeClr val="tx1"/>
-            </a:solidFill>
-          </a:ln>
-        </p:spPr>
-        <p:style>
-          <a:lnRef idx="2">
-            <a:schemeClr val="accent1">
-              <a:shade val="15000"/>
-            </a:schemeClr>
-          </a:lnRef>
-          <a:fillRef idx="1">
-            <a:schemeClr val="accent1"/>
-          </a:fillRef>
-          <a:effectRef idx="0">
-            <a:schemeClr val="accent1"/>
-          </a:effectRef>
-          <a:fontRef idx="minor">
-            <a:schemeClr val="lt1"/>
-          </a:fontRef>
-        </p:style>
-        <p:txBody>
-          <a:bodyPr rtlCol="0" anchor="ctr"/>
-          <a:lstStyle/>
-          <a:p>
-            <a:pPr algn="ctr"/>
-            <a:endParaRPr lang="en-IL"/>
-          </a:p>
-        </p:txBody>
-      </p:sp>
-      <p:cxnSp>
-        <p:nvCxnSpPr>
-          <p:cNvPr id="28" name="Straight Arrow Connector 27">
-            <a:extLst>
-              <a:ext uri="{FF2B5EF4-FFF2-40B4-BE49-F238E27FC236}">
-                <a16:creationId xmlns:a16="http://schemas.microsoft.com/office/drawing/2014/main" id="{B090B249-015C-6A9D-EF23-99567AAEFA65}"/>
-              </a:ext>
-            </a:extLst>
-          </p:cNvPr>
-          <p:cNvCxnSpPr>
-            <a:cxnSpLocks/>
-          </p:cNvCxnSpPr>
-          <p:nvPr/>
-        </p:nvCxnSpPr>
-        <p:spPr>
-          <a:xfrm>
-            <a:off x="6795798" y="2695827"/>
-            <a:ext cx="1837854" cy="0"/>
-          </a:xfrm>
-          <a:prstGeom prst="straightConnector1">
-            <a:avLst/>
-          </a:prstGeom>
-          <a:ln>
-            <a:tailEnd type="triangle"/>
-          </a:ln>
-        </p:spPr>
-        <p:style>
-          <a:lnRef idx="2">
-            <a:schemeClr val="accent1"/>
-          </a:lnRef>
-          <a:fillRef idx="0">
-            <a:schemeClr val="accent1"/>
-          </a:fillRef>
-          <a:effectRef idx="1">
-            <a:schemeClr val="accent1"/>
-          </a:effectRef>
-          <a:fontRef idx="minor">
-            <a:schemeClr val="tx1"/>
-          </a:fontRef>
-        </p:style>
-      </p:cxnSp>
-      <p:sp>
-        <p:nvSpPr>
-          <p:cNvPr id="30" name="Rectangle: Rounded Corners 29">
-            <a:extLst>
-              <a:ext uri="{FF2B5EF4-FFF2-40B4-BE49-F238E27FC236}">
-                <a16:creationId xmlns:a16="http://schemas.microsoft.com/office/drawing/2014/main" id="{6D835078-C732-7C5A-E3CA-954A9C698AF8}"/>
-              </a:ext>
-            </a:extLst>
-          </p:cNvPr>
-          <p:cNvSpPr/>
-          <p:nvPr/>
-        </p:nvSpPr>
-        <p:spPr>
-          <a:xfrm>
-            <a:off x="6840757" y="2493808"/>
-            <a:ext cx="1760215" cy="161039"/>
-          </a:xfrm>
-          <a:prstGeom prst="roundRect">
-            <a:avLst/>
-          </a:prstGeom>
-          <a:noFill/>
-          <a:ln>
-            <a:noFill/>
-          </a:ln>
-        </p:spPr>
-        <p:style>
-          <a:lnRef idx="2">
-            <a:schemeClr val="accent1">
-              <a:shade val="15000"/>
-            </a:schemeClr>
-          </a:lnRef>
-          <a:fillRef idx="1">
-            <a:schemeClr val="accent1"/>
-          </a:fillRef>
-          <a:effectRef idx="0">
-            <a:schemeClr val="accent1"/>
-          </a:effectRef>
-          <a:fontRef idx="minor">
-            <a:schemeClr val="lt1"/>
-          </a:fontRef>
-        </p:style>
-        <p:txBody>
-          <a:bodyPr rtlCol="0" anchor="ctr"/>
-          <a:lstStyle/>
-          <a:p>
-            <a:pPr algn="ctr"/>
-            <a:r>
-              <a:rPr lang="en-US" sz="1000" dirty="0">
-                <a:solidFill>
-                  <a:schemeClr val="tx1"/>
-                </a:solidFill>
-              </a:rPr>
-              <a:t>Validate (Email, Password)</a:t>
-            </a:r>
-            <a:endParaRPr lang="en-IL" sz="1000" dirty="0">
-              <a:solidFill>
-                <a:schemeClr val="tx1"/>
-              </a:solidFill>
-            </a:endParaRPr>
-          </a:p>
-        </p:txBody>
-      </p:sp>
       <p:grpSp>
         <p:nvGrpSpPr>
           <p:cNvPr id="43" name="Group 42">
@@ -6032,8 +6579,8 @@
         </p:nvGrpSpPr>
         <p:grpSpPr>
           <a:xfrm>
-            <a:off x="6791185" y="3462441"/>
-            <a:ext cx="739155" cy="386740"/>
+            <a:off x="7348969" y="3389289"/>
+            <a:ext cx="739155" cy="268311"/>
             <a:chOff x="5273718" y="3731491"/>
             <a:chExt cx="739155" cy="386740"/>
           </a:xfrm>
@@ -6177,7 +6724,7 @@
         </p:nvSpPr>
         <p:spPr>
           <a:xfrm>
-            <a:off x="6674521" y="3270965"/>
+            <a:off x="7296313" y="3197813"/>
             <a:ext cx="1035591" cy="197809"/>
           </a:xfrm>
           <a:prstGeom prst="roundRect">
@@ -6241,7 +6788,7 @@
         </p:nvCxnSpPr>
         <p:spPr>
           <a:xfrm>
-            <a:off x="6772706" y="3060662"/>
+            <a:off x="9296450" y="5593550"/>
             <a:ext cx="1837854" cy="0"/>
           </a:xfrm>
           <a:prstGeom prst="straightConnector1">
@@ -6281,7 +6828,7 @@
         </p:nvSpPr>
         <p:spPr>
           <a:xfrm>
-            <a:off x="6827257" y="2867880"/>
+            <a:off x="9360145" y="5400768"/>
             <a:ext cx="1760215" cy="161039"/>
           </a:xfrm>
           <a:prstGeom prst="roundRect">
@@ -6345,8 +6892,8 @@
         </p:nvCxnSpPr>
         <p:spPr>
           <a:xfrm>
-            <a:off x="4588309" y="4219823"/>
-            <a:ext cx="2136551" cy="0"/>
+            <a:off x="3199304" y="6098458"/>
+            <a:ext cx="2076784" cy="0"/>
           </a:xfrm>
           <a:prstGeom prst="straightConnector1">
             <a:avLst/>
@@ -6385,7 +6932,7 @@
         </p:nvSpPr>
         <p:spPr>
           <a:xfrm>
-            <a:off x="4527122" y="4027041"/>
+            <a:off x="3182954" y="5883273"/>
             <a:ext cx="1875953" cy="187753"/>
           </a:xfrm>
           <a:prstGeom prst="roundRect">
@@ -6423,7 +6970,7 @@
                   <a:schemeClr val="tx1"/>
                 </a:solidFill>
               </a:rPr>
-              <a:t>Token (user info + secret key)</a:t>
+              <a:t>Token (user info + JWT)</a:t>
             </a:r>
             <a:endParaRPr lang="en-IL" sz="1000" dirty="0">
               <a:solidFill>
@@ -6433,12 +6980,481 @@
           </a:p>
         </p:txBody>
       </p:sp>
+      <p:sp>
+        <p:nvSpPr>
+          <p:cNvPr id="61" name="Rectangle: Rounded Corners 60">
+            <a:extLst>
+              <a:ext uri="{FF2B5EF4-FFF2-40B4-BE49-F238E27FC236}">
+                <a16:creationId xmlns:a16="http://schemas.microsoft.com/office/drawing/2014/main" id="{27719293-2F5E-F735-44E9-EACA9FB9502E}"/>
+              </a:ext>
+            </a:extLst>
+          </p:cNvPr>
+          <p:cNvSpPr/>
+          <p:nvPr/>
+        </p:nvSpPr>
+        <p:spPr>
+          <a:xfrm>
+            <a:off x="4415953" y="228261"/>
+            <a:ext cx="3143734" cy="430803"/>
+          </a:xfrm>
+          <a:prstGeom prst="roundRect">
+            <a:avLst/>
+          </a:prstGeom>
+        </p:spPr>
+        <p:style>
+          <a:lnRef idx="2">
+            <a:schemeClr val="accent1">
+              <a:shade val="15000"/>
+            </a:schemeClr>
+          </a:lnRef>
+          <a:fillRef idx="1">
+            <a:schemeClr val="accent1"/>
+          </a:fillRef>
+          <a:effectRef idx="0">
+            <a:schemeClr val="accent1"/>
+          </a:effectRef>
+          <a:fontRef idx="minor">
+            <a:schemeClr val="lt1"/>
+          </a:fontRef>
+        </p:style>
+        <p:txBody>
+          <a:bodyPr rtlCol="0" anchor="ctr"/>
+          <a:lstStyle/>
+          <a:p>
+            <a:pPr algn="ctr"/>
+            <a:r>
+              <a:rPr lang="en-US" sz="1400" dirty="0"/>
+              <a:t>Valid Login Sequence Diagram</a:t>
+            </a:r>
+            <a:endParaRPr lang="en-IL" sz="1050" dirty="0"/>
+          </a:p>
+        </p:txBody>
+      </p:sp>
+      <p:sp>
+        <p:nvSpPr>
+          <p:cNvPr id="5" name="Rectangle: Rounded Corners 4">
+            <a:extLst>
+              <a:ext uri="{FF2B5EF4-FFF2-40B4-BE49-F238E27FC236}">
+                <a16:creationId xmlns:a16="http://schemas.microsoft.com/office/drawing/2014/main" id="{515520FF-3508-BB0D-0155-1DAAF5258134}"/>
+              </a:ext>
+            </a:extLst>
+          </p:cNvPr>
+          <p:cNvSpPr/>
+          <p:nvPr/>
+        </p:nvSpPr>
+        <p:spPr>
+          <a:xfrm>
+            <a:off x="6773704" y="1139948"/>
+            <a:ext cx="1183476" cy="570534"/>
+          </a:xfrm>
+          <a:prstGeom prst="roundRect">
+            <a:avLst/>
+          </a:prstGeom>
+        </p:spPr>
+        <p:style>
+          <a:lnRef idx="2">
+            <a:schemeClr val="accent1">
+              <a:shade val="15000"/>
+            </a:schemeClr>
+          </a:lnRef>
+          <a:fillRef idx="1">
+            <a:schemeClr val="accent1"/>
+          </a:fillRef>
+          <a:effectRef idx="0">
+            <a:schemeClr val="accent1"/>
+          </a:effectRef>
+          <a:fontRef idx="minor">
+            <a:schemeClr val="lt1"/>
+          </a:fontRef>
+        </p:style>
+        <p:txBody>
+          <a:bodyPr rtlCol="0" anchor="ctr"/>
+          <a:lstStyle/>
+          <a:p>
+            <a:pPr algn="ctr"/>
+            <a:r>
+              <a:rPr lang="en-US" sz="1100" dirty="0" err="1"/>
+              <a:t>TokenService</a:t>
+            </a:r>
+            <a:endParaRPr lang="en-US" sz="1100" dirty="0"/>
+          </a:p>
+          <a:p>
+            <a:pPr algn="ctr"/>
+            <a:r>
+              <a:rPr lang="en-US" sz="1100" dirty="0"/>
+              <a:t>(IdP)</a:t>
+            </a:r>
+            <a:endParaRPr lang="en-IL" sz="1100" dirty="0"/>
+          </a:p>
+        </p:txBody>
+      </p:sp>
+      <p:sp>
+        <p:nvSpPr>
+          <p:cNvPr id="7" name="Rectangle: Rounded Corners 6">
+            <a:extLst>
+              <a:ext uri="{FF2B5EF4-FFF2-40B4-BE49-F238E27FC236}">
+                <a16:creationId xmlns:a16="http://schemas.microsoft.com/office/drawing/2014/main" id="{1F5DA385-14E5-054A-B165-E2697664B127}"/>
+              </a:ext>
+            </a:extLst>
+          </p:cNvPr>
+          <p:cNvSpPr/>
+          <p:nvPr/>
+        </p:nvSpPr>
+        <p:spPr>
+          <a:xfrm>
+            <a:off x="8706136" y="1142996"/>
+            <a:ext cx="1183476" cy="570534"/>
+          </a:xfrm>
+          <a:prstGeom prst="roundRect">
+            <a:avLst/>
+          </a:prstGeom>
+        </p:spPr>
+        <p:style>
+          <a:lnRef idx="2">
+            <a:schemeClr val="accent1">
+              <a:shade val="15000"/>
+            </a:schemeClr>
+          </a:lnRef>
+          <a:fillRef idx="1">
+            <a:schemeClr val="accent1"/>
+          </a:fillRef>
+          <a:effectRef idx="0">
+            <a:schemeClr val="accent1"/>
+          </a:effectRef>
+          <a:fontRef idx="minor">
+            <a:schemeClr val="lt1"/>
+          </a:fontRef>
+        </p:style>
+        <p:txBody>
+          <a:bodyPr rtlCol="0" anchor="ctr"/>
+          <a:lstStyle/>
+          <a:p>
+            <a:pPr algn="ctr"/>
+            <a:r>
+              <a:rPr lang="en-US" sz="1100" dirty="0" err="1"/>
+              <a:t>AutoService</a:t>
+            </a:r>
+            <a:endParaRPr lang="en-IL" sz="1100" dirty="0"/>
+          </a:p>
+        </p:txBody>
+      </p:sp>
+      <p:sp>
+        <p:nvSpPr>
+          <p:cNvPr id="18" name="Rectangle: Rounded Corners 17">
+            <a:extLst>
+              <a:ext uri="{FF2B5EF4-FFF2-40B4-BE49-F238E27FC236}">
+                <a16:creationId xmlns:a16="http://schemas.microsoft.com/office/drawing/2014/main" id="{B4EF3829-E8D7-1709-9720-6AAE60CD67B2}"/>
+              </a:ext>
+            </a:extLst>
+          </p:cNvPr>
+          <p:cNvSpPr/>
+          <p:nvPr/>
+        </p:nvSpPr>
+        <p:spPr>
+          <a:xfrm>
+            <a:off x="5513957" y="2977058"/>
+            <a:ext cx="1526262" cy="197809"/>
+          </a:xfrm>
+          <a:prstGeom prst="roundRect">
+            <a:avLst/>
+          </a:prstGeom>
+          <a:noFill/>
+          <a:ln>
+            <a:noFill/>
+          </a:ln>
+        </p:spPr>
+        <p:style>
+          <a:lnRef idx="2">
+            <a:schemeClr val="accent1">
+              <a:shade val="15000"/>
+            </a:schemeClr>
+          </a:lnRef>
+          <a:fillRef idx="1">
+            <a:schemeClr val="accent1"/>
+          </a:fillRef>
+          <a:effectRef idx="0">
+            <a:schemeClr val="accent1"/>
+          </a:effectRef>
+          <a:fontRef idx="minor">
+            <a:schemeClr val="lt1"/>
+          </a:fontRef>
+        </p:style>
+        <p:txBody>
+          <a:bodyPr rtlCol="0" anchor="ctr"/>
+          <a:lstStyle/>
+          <a:p>
+            <a:pPr algn="ctr"/>
+            <a:r>
+              <a:rPr lang="en-US" sz="1000" dirty="0">
+                <a:solidFill>
+                  <a:schemeClr val="tx1"/>
+                </a:solidFill>
+              </a:rPr>
+              <a:t>POST Login (JSON)</a:t>
+            </a:r>
+            <a:endParaRPr lang="en-IL" sz="1000" dirty="0">
+              <a:solidFill>
+                <a:schemeClr val="tx1"/>
+              </a:solidFill>
+            </a:endParaRPr>
+          </a:p>
+        </p:txBody>
+      </p:sp>
+      <p:cxnSp>
+        <p:nvCxnSpPr>
+          <p:cNvPr id="19" name="Straight Arrow Connector 18">
+            <a:extLst>
+              <a:ext uri="{FF2B5EF4-FFF2-40B4-BE49-F238E27FC236}">
+                <a16:creationId xmlns:a16="http://schemas.microsoft.com/office/drawing/2014/main" id="{F639F454-59B4-7688-94E9-FE6972708A40}"/>
+              </a:ext>
+            </a:extLst>
+          </p:cNvPr>
+          <p:cNvCxnSpPr>
+            <a:cxnSpLocks/>
+          </p:cNvCxnSpPr>
+          <p:nvPr/>
+        </p:nvCxnSpPr>
+        <p:spPr>
+          <a:xfrm>
+            <a:off x="5348925" y="3169838"/>
+            <a:ext cx="1944372" cy="5028"/>
+          </a:xfrm>
+          <a:prstGeom prst="straightConnector1">
+            <a:avLst/>
+          </a:prstGeom>
+          <a:ln>
+            <a:tailEnd type="triangle"/>
+          </a:ln>
+        </p:spPr>
+        <p:style>
+          <a:lnRef idx="2">
+            <a:schemeClr val="accent1"/>
+          </a:lnRef>
+          <a:fillRef idx="0">
+            <a:schemeClr val="accent1"/>
+          </a:fillRef>
+          <a:effectRef idx="1">
+            <a:schemeClr val="accent1"/>
+          </a:effectRef>
+          <a:fontRef idx="minor">
+            <a:schemeClr val="tx1"/>
+          </a:fontRef>
+        </p:style>
+      </p:cxnSp>
+      <p:sp>
+        <p:nvSpPr>
+          <p:cNvPr id="21" name="Rectangle 20">
+            <a:extLst>
+              <a:ext uri="{FF2B5EF4-FFF2-40B4-BE49-F238E27FC236}">
+                <a16:creationId xmlns:a16="http://schemas.microsoft.com/office/drawing/2014/main" id="{A17B5574-739D-E97E-9148-AF5E10D02066}"/>
+              </a:ext>
+            </a:extLst>
+          </p:cNvPr>
+          <p:cNvSpPr/>
+          <p:nvPr/>
+        </p:nvSpPr>
+        <p:spPr>
+          <a:xfrm>
+            <a:off x="5290760" y="1742302"/>
+            <a:ext cx="45719" cy="4411018"/>
+          </a:xfrm>
+          <a:prstGeom prst="rect">
+            <a:avLst/>
+          </a:prstGeom>
+          <a:noFill/>
+          <a:ln>
+            <a:solidFill>
+              <a:schemeClr val="tx1"/>
+            </a:solidFill>
+          </a:ln>
+        </p:spPr>
+        <p:style>
+          <a:lnRef idx="2">
+            <a:schemeClr val="accent1">
+              <a:shade val="15000"/>
+            </a:schemeClr>
+          </a:lnRef>
+          <a:fillRef idx="1">
+            <a:schemeClr val="accent1"/>
+          </a:fillRef>
+          <a:effectRef idx="0">
+            <a:schemeClr val="accent1"/>
+          </a:effectRef>
+          <a:fontRef idx="minor">
+            <a:schemeClr val="lt1"/>
+          </a:fontRef>
+        </p:style>
+        <p:txBody>
+          <a:bodyPr rtlCol="0" anchor="ctr"/>
+          <a:lstStyle/>
+          <a:p>
+            <a:pPr algn="ctr"/>
+            <a:endParaRPr lang="en-IL"/>
+          </a:p>
+        </p:txBody>
+      </p:sp>
+      <p:sp>
+        <p:nvSpPr>
+          <p:cNvPr id="22" name="Rectangle 21">
+            <a:extLst>
+              <a:ext uri="{FF2B5EF4-FFF2-40B4-BE49-F238E27FC236}">
+                <a16:creationId xmlns:a16="http://schemas.microsoft.com/office/drawing/2014/main" id="{22BD1D6B-3F59-DED1-AC63-96B9CAF3F9F7}"/>
+              </a:ext>
+            </a:extLst>
+          </p:cNvPr>
+          <p:cNvSpPr/>
+          <p:nvPr/>
+        </p:nvSpPr>
+        <p:spPr>
+          <a:xfrm flipH="1">
+            <a:off x="7293297" y="1724013"/>
+            <a:ext cx="45719" cy="4428957"/>
+          </a:xfrm>
+          <a:prstGeom prst="rect">
+            <a:avLst/>
+          </a:prstGeom>
+          <a:noFill/>
+          <a:ln>
+            <a:solidFill>
+              <a:schemeClr val="tx1"/>
+            </a:solidFill>
+          </a:ln>
+        </p:spPr>
+        <p:style>
+          <a:lnRef idx="2">
+            <a:schemeClr val="accent1">
+              <a:shade val="15000"/>
+            </a:schemeClr>
+          </a:lnRef>
+          <a:fillRef idx="1">
+            <a:schemeClr val="accent1"/>
+          </a:fillRef>
+          <a:effectRef idx="0">
+            <a:schemeClr val="accent1"/>
+          </a:effectRef>
+          <a:fontRef idx="minor">
+            <a:schemeClr val="lt1"/>
+          </a:fontRef>
+        </p:style>
+        <p:txBody>
+          <a:bodyPr rtlCol="0" anchor="ctr"/>
+          <a:lstStyle/>
+          <a:p>
+            <a:pPr algn="ctr"/>
+            <a:endParaRPr lang="en-IL"/>
+          </a:p>
+        </p:txBody>
+      </p:sp>
+      <p:sp>
+        <p:nvSpPr>
+          <p:cNvPr id="23" name="Rectangle 22">
+            <a:extLst>
+              <a:ext uri="{FF2B5EF4-FFF2-40B4-BE49-F238E27FC236}">
+                <a16:creationId xmlns:a16="http://schemas.microsoft.com/office/drawing/2014/main" id="{652905BA-650B-7863-9157-D7D93833271C}"/>
+              </a:ext>
+            </a:extLst>
+          </p:cNvPr>
+          <p:cNvSpPr/>
+          <p:nvPr/>
+        </p:nvSpPr>
+        <p:spPr>
+          <a:xfrm>
+            <a:off x="9250112" y="1751446"/>
+            <a:ext cx="45719" cy="4401874"/>
+          </a:xfrm>
+          <a:prstGeom prst="rect">
+            <a:avLst/>
+          </a:prstGeom>
+          <a:noFill/>
+          <a:ln>
+            <a:solidFill>
+              <a:schemeClr val="tx1"/>
+            </a:solidFill>
+          </a:ln>
+        </p:spPr>
+        <p:style>
+          <a:lnRef idx="2">
+            <a:schemeClr val="accent1">
+              <a:shade val="15000"/>
+            </a:schemeClr>
+          </a:lnRef>
+          <a:fillRef idx="1">
+            <a:schemeClr val="accent1"/>
+          </a:fillRef>
+          <a:effectRef idx="0">
+            <a:schemeClr val="accent1"/>
+          </a:effectRef>
+          <a:fontRef idx="minor">
+            <a:schemeClr val="lt1"/>
+          </a:fontRef>
+        </p:style>
+        <p:txBody>
+          <a:bodyPr rtlCol="0" anchor="ctr"/>
+          <a:lstStyle/>
+          <a:p>
+            <a:pPr algn="ctr"/>
+            <a:endParaRPr lang="en-IL"/>
+          </a:p>
+        </p:txBody>
+      </p:sp>
+      <p:sp>
+        <p:nvSpPr>
+          <p:cNvPr id="29" name="Rectangle 28">
+            <a:extLst>
+              <a:ext uri="{FF2B5EF4-FFF2-40B4-BE49-F238E27FC236}">
+                <a16:creationId xmlns:a16="http://schemas.microsoft.com/office/drawing/2014/main" id="{487906EA-1F94-B48C-7D7A-3304A7832896}"/>
+              </a:ext>
+            </a:extLst>
+          </p:cNvPr>
+          <p:cNvSpPr/>
+          <p:nvPr/>
+        </p:nvSpPr>
+        <p:spPr>
+          <a:xfrm>
+            <a:off x="11142920" y="1769733"/>
+            <a:ext cx="45719" cy="4383587"/>
+          </a:xfrm>
+          <a:prstGeom prst="rect">
+            <a:avLst/>
+          </a:prstGeom>
+          <a:noFill/>
+          <a:ln>
+            <a:solidFill>
+              <a:schemeClr val="tx1"/>
+            </a:solidFill>
+          </a:ln>
+        </p:spPr>
+        <p:style>
+          <a:lnRef idx="2">
+            <a:schemeClr val="accent1">
+              <a:shade val="15000"/>
+            </a:schemeClr>
+          </a:lnRef>
+          <a:fillRef idx="1">
+            <a:schemeClr val="accent1"/>
+          </a:fillRef>
+          <a:effectRef idx="0">
+            <a:schemeClr val="accent1"/>
+          </a:effectRef>
+          <a:fontRef idx="minor">
+            <a:schemeClr val="lt1"/>
+          </a:fontRef>
+        </p:style>
+        <p:txBody>
+          <a:bodyPr rtlCol="0" anchor="ctr"/>
+          <a:lstStyle/>
+          <a:p>
+            <a:pPr algn="ctr"/>
+            <a:endParaRPr lang="en-IL"/>
+          </a:p>
+        </p:txBody>
+      </p:sp>
       <p:grpSp>
         <p:nvGrpSpPr>
-          <p:cNvPr id="51" name="Group 50">
-            <a:extLst>
-              <a:ext uri="{FF2B5EF4-FFF2-40B4-BE49-F238E27FC236}">
-                <a16:creationId xmlns:a16="http://schemas.microsoft.com/office/drawing/2014/main" id="{563FB805-5378-1F9A-A37C-1DBD556E1939}"/>
+          <p:cNvPr id="33" name="Group 32">
+            <a:extLst>
+              <a:ext uri="{FF2B5EF4-FFF2-40B4-BE49-F238E27FC236}">
+                <a16:creationId xmlns:a16="http://schemas.microsoft.com/office/drawing/2014/main" id="{3FC4BFAB-2C28-2C05-A8FE-5C3322C7A4D1}"/>
               </a:ext>
             </a:extLst>
           </p:cNvPr>
@@ -6447,18 +7463,18 @@
         </p:nvGrpSpPr>
         <p:grpSpPr>
           <a:xfrm>
-            <a:off x="4597552" y="4630839"/>
-            <a:ext cx="739155" cy="386740"/>
+            <a:off x="5361673" y="2618145"/>
+            <a:ext cx="903687" cy="290158"/>
             <a:chOff x="5273718" y="3731491"/>
             <a:chExt cx="739155" cy="386740"/>
           </a:xfrm>
         </p:grpSpPr>
         <p:cxnSp>
           <p:nvCxnSpPr>
-            <p:cNvPr id="52" name="Straight Arrow Connector 51">
+            <p:cNvPr id="34" name="Straight Arrow Connector 33">
               <a:extLst>
                 <a:ext uri="{FF2B5EF4-FFF2-40B4-BE49-F238E27FC236}">
-                  <a16:creationId xmlns:a16="http://schemas.microsoft.com/office/drawing/2014/main" id="{E9C10E3D-FC0B-C844-D1DC-6528F6357672}"/>
+                  <a16:creationId xmlns:a16="http://schemas.microsoft.com/office/drawing/2014/main" id="{4F8E99FD-0084-9253-6438-F84CD35BA848}"/>
                 </a:ext>
               </a:extLst>
             </p:cNvPr>
@@ -6497,10 +7513,10 @@
         </p:cxnSp>
         <p:cxnSp>
           <p:nvCxnSpPr>
-            <p:cNvPr id="53" name="Straight Arrow Connector 52">
+            <p:cNvPr id="35" name="Straight Arrow Connector 34">
               <a:extLst>
                 <a:ext uri="{FF2B5EF4-FFF2-40B4-BE49-F238E27FC236}">
-                  <a16:creationId xmlns:a16="http://schemas.microsoft.com/office/drawing/2014/main" id="{76E7C902-4AF0-84FB-E97B-0319DF5B4E86}"/>
+                  <a16:creationId xmlns:a16="http://schemas.microsoft.com/office/drawing/2014/main" id="{158CFE0B-78BA-CE6D-406E-A4488F064177}"/>
                 </a:ext>
               </a:extLst>
             </p:cNvPr>
@@ -6538,10 +7554,10 @@
         </p:cxnSp>
         <p:cxnSp>
           <p:nvCxnSpPr>
-            <p:cNvPr id="54" name="Straight Arrow Connector 53">
+            <p:cNvPr id="37" name="Straight Arrow Connector 36">
               <a:extLst>
                 <a:ext uri="{FF2B5EF4-FFF2-40B4-BE49-F238E27FC236}">
-                  <a16:creationId xmlns:a16="http://schemas.microsoft.com/office/drawing/2014/main" id="{C2386B1D-3CDB-91E1-B84C-C413E9B93B63}"/>
+                  <a16:creationId xmlns:a16="http://schemas.microsoft.com/office/drawing/2014/main" id="{E0E60503-97C2-DA34-D673-41419B9E5D73}"/>
                 </a:ext>
               </a:extLst>
             </p:cNvPr>
@@ -6580,10 +7596,10 @@
       </p:grpSp>
       <p:sp>
         <p:nvSpPr>
-          <p:cNvPr id="55" name="Rectangle: Rounded Corners 54">
-            <a:extLst>
-              <a:ext uri="{FF2B5EF4-FFF2-40B4-BE49-F238E27FC236}">
-                <a16:creationId xmlns:a16="http://schemas.microsoft.com/office/drawing/2014/main" id="{A220F6EC-5DF4-C13D-C19E-BBF0C56B68DE}"/>
+          <p:cNvPr id="38" name="Rectangle: Rounded Corners 37">
+            <a:extLst>
+              <a:ext uri="{FF2B5EF4-FFF2-40B4-BE49-F238E27FC236}">
+                <a16:creationId xmlns:a16="http://schemas.microsoft.com/office/drawing/2014/main" id="{D4F81C37-9259-B7F2-F268-C67F1881750D}"/>
               </a:ext>
             </a:extLst>
           </p:cNvPr>
@@ -6592,8 +7608,8 @@
         </p:nvSpPr>
         <p:spPr>
           <a:xfrm>
-            <a:off x="4524691" y="4438058"/>
-            <a:ext cx="2321910" cy="163475"/>
+            <a:off x="5217577" y="2466258"/>
+            <a:ext cx="2013535" cy="245522"/>
           </a:xfrm>
           <a:prstGeom prst="roundRect">
             <a:avLst/>
@@ -6623,14 +7639,31 @@
           <a:bodyPr rtlCol="0" anchor="ctr"/>
           <a:lstStyle/>
           <a:p>
+            <a:pPr algn="ctr"/>
             <a:r>
               <a:rPr lang="en-US" sz="1000" dirty="0">
                 <a:solidFill>
                   <a:schemeClr val="tx1"/>
                 </a:solidFill>
               </a:rPr>
-              <a:t>Store token (for future Authorizations)</a:t>
-            </a:r>
+              <a:t>Middleware </a:t>
+            </a:r>
+            <a:r>
+              <a:rPr lang="en-US" sz="1000" dirty="0" err="1">
+                <a:solidFill>
+                  <a:schemeClr val="tx1"/>
+                </a:solidFill>
+              </a:rPr>
+              <a:t>UseAuthentication</a:t>
+            </a:r>
+            <a:endParaRPr lang="en-US" sz="1000" dirty="0">
+              <a:solidFill>
+                <a:schemeClr val="tx1"/>
+              </a:solidFill>
+            </a:endParaRPr>
+          </a:p>
+          <a:p>
+            <a:pPr algn="ctr"/>
             <a:endParaRPr lang="en-IL" sz="1000" dirty="0">
               <a:solidFill>
                 <a:schemeClr val="tx1"/>
@@ -6639,12 +7672,54 @@
           </a:p>
         </p:txBody>
       </p:sp>
+      <p:cxnSp>
+        <p:nvCxnSpPr>
+          <p:cNvPr id="45" name="Straight Arrow Connector 44">
+            <a:extLst>
+              <a:ext uri="{FF2B5EF4-FFF2-40B4-BE49-F238E27FC236}">
+                <a16:creationId xmlns:a16="http://schemas.microsoft.com/office/drawing/2014/main" id="{A286CA19-6121-0E95-8806-7959708CB067}"/>
+              </a:ext>
+            </a:extLst>
+          </p:cNvPr>
+          <p:cNvCxnSpPr>
+            <a:cxnSpLocks/>
+          </p:cNvCxnSpPr>
+          <p:nvPr/>
+        </p:nvCxnSpPr>
+        <p:spPr>
+          <a:xfrm>
+            <a:off x="5343194" y="4017734"/>
+            <a:ext cx="1995822" cy="0"/>
+          </a:xfrm>
+          <a:prstGeom prst="straightConnector1">
+            <a:avLst/>
+          </a:prstGeom>
+          <a:ln>
+            <a:headEnd type="triangle"/>
+            <a:tailEnd type="none"/>
+          </a:ln>
+        </p:spPr>
+        <p:style>
+          <a:lnRef idx="2">
+            <a:schemeClr val="accent1"/>
+          </a:lnRef>
+          <a:fillRef idx="0">
+            <a:schemeClr val="accent1"/>
+          </a:fillRef>
+          <a:effectRef idx="1">
+            <a:schemeClr val="accent1"/>
+          </a:effectRef>
+          <a:fontRef idx="minor">
+            <a:schemeClr val="tx1"/>
+          </a:fontRef>
+        </p:style>
+      </p:cxnSp>
       <p:sp>
         <p:nvSpPr>
-          <p:cNvPr id="61" name="Rectangle: Rounded Corners 60">
-            <a:extLst>
-              <a:ext uri="{FF2B5EF4-FFF2-40B4-BE49-F238E27FC236}">
-                <a16:creationId xmlns:a16="http://schemas.microsoft.com/office/drawing/2014/main" id="{27719293-2F5E-F735-44E9-EACA9FB9502E}"/>
+          <p:cNvPr id="50" name="Rectangle: Rounded Corners 49">
+            <a:extLst>
+              <a:ext uri="{FF2B5EF4-FFF2-40B4-BE49-F238E27FC236}">
+                <a16:creationId xmlns:a16="http://schemas.microsoft.com/office/drawing/2014/main" id="{B21D04CD-FD2C-404B-21F5-0C40342C7815}"/>
               </a:ext>
             </a:extLst>
           </p:cNvPr>
@@ -6653,12 +7728,16 @@
         </p:nvSpPr>
         <p:spPr>
           <a:xfrm>
-            <a:off x="3931321" y="310557"/>
-            <a:ext cx="3143734" cy="430803"/>
+            <a:off x="5406889" y="3824952"/>
+            <a:ext cx="1760215" cy="161039"/>
           </a:xfrm>
           <a:prstGeom prst="roundRect">
             <a:avLst/>
           </a:prstGeom>
+          <a:noFill/>
+          <a:ln>
+            <a:noFill/>
+          </a:ln>
         </p:spPr>
         <p:style>
           <a:lnRef idx="2">
@@ -6682,10 +7761,535 @@
           <a:p>
             <a:pPr algn="ctr"/>
             <a:r>
-              <a:rPr lang="en-US" sz="1400" dirty="0"/>
-              <a:t>Valid Login Sequence Diagram</a:t>
-            </a:r>
-            <a:endParaRPr lang="en-IL" sz="1050" dirty="0"/>
+              <a:rPr lang="en-US" sz="1000" dirty="0">
+                <a:solidFill>
+                  <a:schemeClr val="tx1"/>
+                </a:solidFill>
+              </a:rPr>
+              <a:t>Singed JWT (OK)</a:t>
+            </a:r>
+            <a:endParaRPr lang="en-IL" sz="1000" dirty="0">
+              <a:solidFill>
+                <a:schemeClr val="tx1"/>
+              </a:solidFill>
+            </a:endParaRPr>
+          </a:p>
+        </p:txBody>
+      </p:sp>
+      <p:sp>
+        <p:nvSpPr>
+          <p:cNvPr id="57" name="Rectangle: Rounded Corners 56">
+            <a:extLst>
+              <a:ext uri="{FF2B5EF4-FFF2-40B4-BE49-F238E27FC236}">
+                <a16:creationId xmlns:a16="http://schemas.microsoft.com/office/drawing/2014/main" id="{0C91CD8A-C06D-F30A-15BD-B9B1FB9D72E6}"/>
+              </a:ext>
+            </a:extLst>
+          </p:cNvPr>
+          <p:cNvSpPr/>
+          <p:nvPr/>
+        </p:nvSpPr>
+        <p:spPr>
+          <a:xfrm>
+            <a:off x="5309740" y="4199307"/>
+            <a:ext cx="2910714" cy="134626"/>
+          </a:xfrm>
+          <a:prstGeom prst="roundRect">
+            <a:avLst/>
+          </a:prstGeom>
+          <a:noFill/>
+          <a:ln>
+            <a:noFill/>
+          </a:ln>
+        </p:spPr>
+        <p:style>
+          <a:lnRef idx="2">
+            <a:schemeClr val="accent1">
+              <a:shade val="15000"/>
+            </a:schemeClr>
+          </a:lnRef>
+          <a:fillRef idx="1">
+            <a:schemeClr val="accent1"/>
+          </a:fillRef>
+          <a:effectRef idx="0">
+            <a:schemeClr val="accent1"/>
+          </a:effectRef>
+          <a:fontRef idx="minor">
+            <a:schemeClr val="lt1"/>
+          </a:fontRef>
+        </p:style>
+        <p:txBody>
+          <a:bodyPr rtlCol="0" anchor="ctr"/>
+          <a:lstStyle/>
+          <a:p>
+            <a:pPr algn="ctr"/>
+            <a:r>
+              <a:rPr lang="en-US" sz="1000" dirty="0">
+                <a:solidFill>
+                  <a:schemeClr val="tx1"/>
+                </a:solidFill>
+              </a:rPr>
+              <a:t>Login (email, password, JWT with secret key)</a:t>
+            </a:r>
+            <a:endParaRPr lang="en-IL" sz="1000" dirty="0">
+              <a:solidFill>
+                <a:schemeClr val="tx1"/>
+              </a:solidFill>
+            </a:endParaRPr>
+          </a:p>
+        </p:txBody>
+      </p:sp>
+      <p:cxnSp>
+        <p:nvCxnSpPr>
+          <p:cNvPr id="58" name="Straight Arrow Connector 57">
+            <a:extLst>
+              <a:ext uri="{FF2B5EF4-FFF2-40B4-BE49-F238E27FC236}">
+                <a16:creationId xmlns:a16="http://schemas.microsoft.com/office/drawing/2014/main" id="{5FD44059-4300-85AB-D893-26DCB45FB0A3}"/>
+              </a:ext>
+            </a:extLst>
+          </p:cNvPr>
+          <p:cNvCxnSpPr>
+            <a:cxnSpLocks/>
+          </p:cNvCxnSpPr>
+          <p:nvPr/>
+        </p:nvCxnSpPr>
+        <p:spPr>
+          <a:xfrm flipV="1">
+            <a:off x="5300157" y="4365677"/>
+            <a:ext cx="3949336" cy="26409"/>
+          </a:xfrm>
+          <a:prstGeom prst="straightConnector1">
+            <a:avLst/>
+          </a:prstGeom>
+          <a:ln>
+            <a:tailEnd type="triangle"/>
+          </a:ln>
+        </p:spPr>
+        <p:style>
+          <a:lnRef idx="2">
+            <a:schemeClr val="accent1"/>
+          </a:lnRef>
+          <a:fillRef idx="0">
+            <a:schemeClr val="accent1"/>
+          </a:fillRef>
+          <a:effectRef idx="1">
+            <a:schemeClr val="accent1"/>
+          </a:effectRef>
+          <a:fontRef idx="minor">
+            <a:schemeClr val="tx1"/>
+          </a:fontRef>
+        </p:style>
+      </p:cxnSp>
+      <p:cxnSp>
+        <p:nvCxnSpPr>
+          <p:cNvPr id="63" name="Straight Arrow Connector 62">
+            <a:extLst>
+              <a:ext uri="{FF2B5EF4-FFF2-40B4-BE49-F238E27FC236}">
+                <a16:creationId xmlns:a16="http://schemas.microsoft.com/office/drawing/2014/main" id="{603A1BDB-A8B1-2518-0F60-90A0F5AD9052}"/>
+              </a:ext>
+            </a:extLst>
+          </p:cNvPr>
+          <p:cNvCxnSpPr>
+            <a:cxnSpLocks/>
+          </p:cNvCxnSpPr>
+          <p:nvPr/>
+        </p:nvCxnSpPr>
+        <p:spPr>
+          <a:xfrm>
+            <a:off x="9307350" y="5307963"/>
+            <a:ext cx="1837854" cy="0"/>
+          </a:xfrm>
+          <a:prstGeom prst="straightConnector1">
+            <a:avLst/>
+          </a:prstGeom>
+          <a:ln>
+            <a:tailEnd type="triangle"/>
+          </a:ln>
+        </p:spPr>
+        <p:style>
+          <a:lnRef idx="2">
+            <a:schemeClr val="accent1"/>
+          </a:lnRef>
+          <a:fillRef idx="0">
+            <a:schemeClr val="accent1"/>
+          </a:fillRef>
+          <a:effectRef idx="1">
+            <a:schemeClr val="accent1"/>
+          </a:effectRef>
+          <a:fontRef idx="minor">
+            <a:schemeClr val="tx1"/>
+          </a:fontRef>
+        </p:style>
+      </p:cxnSp>
+      <p:sp>
+        <p:nvSpPr>
+          <p:cNvPr id="64" name="Rectangle: Rounded Corners 63">
+            <a:extLst>
+              <a:ext uri="{FF2B5EF4-FFF2-40B4-BE49-F238E27FC236}">
+                <a16:creationId xmlns:a16="http://schemas.microsoft.com/office/drawing/2014/main" id="{547EC07C-EC91-C23A-CF54-FF3D95A8E3E9}"/>
+              </a:ext>
+            </a:extLst>
+          </p:cNvPr>
+          <p:cNvSpPr/>
+          <p:nvPr/>
+        </p:nvSpPr>
+        <p:spPr>
+          <a:xfrm>
+            <a:off x="9343165" y="5105944"/>
+            <a:ext cx="1760215" cy="161039"/>
+          </a:xfrm>
+          <a:prstGeom prst="roundRect">
+            <a:avLst/>
+          </a:prstGeom>
+          <a:noFill/>
+          <a:ln>
+            <a:noFill/>
+          </a:ln>
+        </p:spPr>
+        <p:style>
+          <a:lnRef idx="2">
+            <a:schemeClr val="accent1">
+              <a:shade val="15000"/>
+            </a:schemeClr>
+          </a:lnRef>
+          <a:fillRef idx="1">
+            <a:schemeClr val="accent1"/>
+          </a:fillRef>
+          <a:effectRef idx="0">
+            <a:schemeClr val="accent1"/>
+          </a:effectRef>
+          <a:fontRef idx="minor">
+            <a:schemeClr val="lt1"/>
+          </a:fontRef>
+        </p:style>
+        <p:txBody>
+          <a:bodyPr rtlCol="0" anchor="ctr"/>
+          <a:lstStyle/>
+          <a:p>
+            <a:pPr algn="ctr"/>
+            <a:r>
+              <a:rPr lang="en-US" sz="1000" dirty="0">
+                <a:solidFill>
+                  <a:schemeClr val="tx1"/>
+                </a:solidFill>
+              </a:rPr>
+              <a:t>Validate (Email, Password)</a:t>
+            </a:r>
+            <a:endParaRPr lang="en-IL" sz="1000" dirty="0">
+              <a:solidFill>
+                <a:schemeClr val="tx1"/>
+              </a:solidFill>
+            </a:endParaRPr>
+          </a:p>
+        </p:txBody>
+      </p:sp>
+      <p:cxnSp>
+        <p:nvCxnSpPr>
+          <p:cNvPr id="65" name="Straight Arrow Connector 64">
+            <a:extLst>
+              <a:ext uri="{FF2B5EF4-FFF2-40B4-BE49-F238E27FC236}">
+                <a16:creationId xmlns:a16="http://schemas.microsoft.com/office/drawing/2014/main" id="{FDF4007A-1978-EDFD-33F1-A7CFDE7ED900}"/>
+              </a:ext>
+            </a:extLst>
+          </p:cNvPr>
+          <p:cNvCxnSpPr>
+            <a:cxnSpLocks/>
+          </p:cNvCxnSpPr>
+          <p:nvPr/>
+        </p:nvCxnSpPr>
+        <p:spPr>
+          <a:xfrm>
+            <a:off x="5361673" y="5843486"/>
+            <a:ext cx="3887820" cy="0"/>
+          </a:xfrm>
+          <a:prstGeom prst="straightConnector1">
+            <a:avLst/>
+          </a:prstGeom>
+          <a:ln>
+            <a:headEnd type="triangle"/>
+            <a:tailEnd type="none"/>
+          </a:ln>
+        </p:spPr>
+        <p:style>
+          <a:lnRef idx="2">
+            <a:schemeClr val="accent1"/>
+          </a:lnRef>
+          <a:fillRef idx="0">
+            <a:schemeClr val="accent1"/>
+          </a:fillRef>
+          <a:effectRef idx="1">
+            <a:schemeClr val="accent1"/>
+          </a:effectRef>
+          <a:fontRef idx="minor">
+            <a:schemeClr val="tx1"/>
+          </a:fontRef>
+        </p:style>
+      </p:cxnSp>
+      <p:sp>
+        <p:nvSpPr>
+          <p:cNvPr id="66" name="Rectangle: Rounded Corners 65">
+            <a:extLst>
+              <a:ext uri="{FF2B5EF4-FFF2-40B4-BE49-F238E27FC236}">
+                <a16:creationId xmlns:a16="http://schemas.microsoft.com/office/drawing/2014/main" id="{6E75F121-4D19-728E-92CB-998B55838C1C}"/>
+              </a:ext>
+            </a:extLst>
+          </p:cNvPr>
+          <p:cNvSpPr/>
+          <p:nvPr/>
+        </p:nvSpPr>
+        <p:spPr>
+          <a:xfrm>
+            <a:off x="7369801" y="5650704"/>
+            <a:ext cx="1760215" cy="161039"/>
+          </a:xfrm>
+          <a:prstGeom prst="roundRect">
+            <a:avLst/>
+          </a:prstGeom>
+          <a:noFill/>
+          <a:ln>
+            <a:noFill/>
+          </a:ln>
+        </p:spPr>
+        <p:style>
+          <a:lnRef idx="2">
+            <a:schemeClr val="accent1">
+              <a:shade val="15000"/>
+            </a:schemeClr>
+          </a:lnRef>
+          <a:fillRef idx="1">
+            <a:schemeClr val="accent1"/>
+          </a:fillRef>
+          <a:effectRef idx="0">
+            <a:schemeClr val="accent1"/>
+          </a:effectRef>
+          <a:fontRef idx="minor">
+            <a:schemeClr val="lt1"/>
+          </a:fontRef>
+        </p:style>
+        <p:txBody>
+          <a:bodyPr rtlCol="0" anchor="ctr"/>
+          <a:lstStyle/>
+          <a:p>
+            <a:pPr algn="ctr"/>
+            <a:r>
+              <a:rPr lang="en-US" sz="1000" dirty="0">
+                <a:solidFill>
+                  <a:schemeClr val="tx1"/>
+                </a:solidFill>
+              </a:rPr>
+              <a:t>Singed (user inf + JWT)</a:t>
+            </a:r>
+            <a:endParaRPr lang="en-IL" sz="1000" dirty="0">
+              <a:solidFill>
+                <a:schemeClr val="tx1"/>
+              </a:solidFill>
+            </a:endParaRPr>
+          </a:p>
+        </p:txBody>
+      </p:sp>
+      <p:grpSp>
+        <p:nvGrpSpPr>
+          <p:cNvPr id="69" name="Group 68">
+            <a:extLst>
+              <a:ext uri="{FF2B5EF4-FFF2-40B4-BE49-F238E27FC236}">
+                <a16:creationId xmlns:a16="http://schemas.microsoft.com/office/drawing/2014/main" id="{573B2F48-0E1D-4222-1883-F90AA2D0C63E}"/>
+              </a:ext>
+            </a:extLst>
+          </p:cNvPr>
+          <p:cNvGrpSpPr/>
+          <p:nvPr/>
+        </p:nvGrpSpPr>
+        <p:grpSpPr>
+          <a:xfrm>
+            <a:off x="9307350" y="4666966"/>
+            <a:ext cx="739155" cy="268311"/>
+            <a:chOff x="5273718" y="3731491"/>
+            <a:chExt cx="739155" cy="386740"/>
+          </a:xfrm>
+        </p:grpSpPr>
+        <p:cxnSp>
+          <p:nvCxnSpPr>
+            <p:cNvPr id="70" name="Straight Arrow Connector 69">
+              <a:extLst>
+                <a:ext uri="{FF2B5EF4-FFF2-40B4-BE49-F238E27FC236}">
+                  <a16:creationId xmlns:a16="http://schemas.microsoft.com/office/drawing/2014/main" id="{5B5DE3AD-521D-10E4-F432-D947D3ADAF98}"/>
+                </a:ext>
+              </a:extLst>
+            </p:cNvPr>
+            <p:cNvCxnSpPr>
+              <a:cxnSpLocks/>
+            </p:cNvCxnSpPr>
+            <p:nvPr/>
+          </p:nvCxnSpPr>
+          <p:spPr>
+            <a:xfrm>
+              <a:off x="5273718" y="4118231"/>
+              <a:ext cx="739155" cy="0"/>
+            </a:xfrm>
+            <a:prstGeom prst="straightConnector1">
+              <a:avLst/>
+            </a:prstGeom>
+            <a:ln>
+              <a:headEnd type="triangle"/>
+              <a:tailEnd type="none"/>
+            </a:ln>
+          </p:spPr>
+          <p:style>
+            <a:lnRef idx="2">
+              <a:schemeClr val="accent1"/>
+            </a:lnRef>
+            <a:fillRef idx="0">
+              <a:schemeClr val="accent1"/>
+            </a:fillRef>
+            <a:effectRef idx="1">
+              <a:schemeClr val="accent1"/>
+            </a:effectRef>
+            <a:fontRef idx="minor">
+              <a:schemeClr val="tx1"/>
+            </a:fontRef>
+          </p:style>
+        </p:cxnSp>
+        <p:cxnSp>
+          <p:nvCxnSpPr>
+            <p:cNvPr id="71" name="Straight Arrow Connector 70">
+              <a:extLst>
+                <a:ext uri="{FF2B5EF4-FFF2-40B4-BE49-F238E27FC236}">
+                  <a16:creationId xmlns:a16="http://schemas.microsoft.com/office/drawing/2014/main" id="{5513DF9E-41C2-6064-A95F-53BD123C9488}"/>
+                </a:ext>
+              </a:extLst>
+            </p:cNvPr>
+            <p:cNvCxnSpPr>
+              <a:cxnSpLocks/>
+            </p:cNvCxnSpPr>
+            <p:nvPr/>
+          </p:nvCxnSpPr>
+          <p:spPr>
+            <a:xfrm flipV="1">
+              <a:off x="6012445" y="3731491"/>
+              <a:ext cx="0" cy="386740"/>
+            </a:xfrm>
+            <a:prstGeom prst="straightConnector1">
+              <a:avLst/>
+            </a:prstGeom>
+            <a:ln>
+              <a:tailEnd type="none"/>
+            </a:ln>
+          </p:spPr>
+          <p:style>
+            <a:lnRef idx="2">
+              <a:schemeClr val="accent1"/>
+            </a:lnRef>
+            <a:fillRef idx="0">
+              <a:schemeClr val="accent1"/>
+            </a:fillRef>
+            <a:effectRef idx="1">
+              <a:schemeClr val="accent1"/>
+            </a:effectRef>
+            <a:fontRef idx="minor">
+              <a:schemeClr val="tx1"/>
+            </a:fontRef>
+          </p:style>
+        </p:cxnSp>
+        <p:cxnSp>
+          <p:nvCxnSpPr>
+            <p:cNvPr id="72" name="Straight Arrow Connector 71">
+              <a:extLst>
+                <a:ext uri="{FF2B5EF4-FFF2-40B4-BE49-F238E27FC236}">
+                  <a16:creationId xmlns:a16="http://schemas.microsoft.com/office/drawing/2014/main" id="{02D5D033-2F3A-A7EC-9862-D83F1DEA3D36}"/>
+                </a:ext>
+              </a:extLst>
+            </p:cNvPr>
+            <p:cNvCxnSpPr>
+              <a:cxnSpLocks/>
+            </p:cNvCxnSpPr>
+            <p:nvPr/>
+          </p:nvCxnSpPr>
+          <p:spPr>
+            <a:xfrm flipH="1">
+              <a:off x="5273718" y="3744158"/>
+              <a:ext cx="738727" cy="0"/>
+            </a:xfrm>
+            <a:prstGeom prst="straightConnector1">
+              <a:avLst/>
+            </a:prstGeom>
+            <a:ln>
+              <a:tailEnd type="none"/>
+            </a:ln>
+          </p:spPr>
+          <p:style>
+            <a:lnRef idx="2">
+              <a:schemeClr val="accent1"/>
+            </a:lnRef>
+            <a:fillRef idx="0">
+              <a:schemeClr val="accent1"/>
+            </a:fillRef>
+            <a:effectRef idx="1">
+              <a:schemeClr val="accent1"/>
+            </a:effectRef>
+            <a:fontRef idx="minor">
+              <a:schemeClr val="tx1"/>
+            </a:fontRef>
+          </p:style>
+        </p:cxnSp>
+      </p:grpSp>
+      <p:sp>
+        <p:nvSpPr>
+          <p:cNvPr id="73" name="Rectangle: Rounded Corners 72">
+            <a:extLst>
+              <a:ext uri="{FF2B5EF4-FFF2-40B4-BE49-F238E27FC236}">
+                <a16:creationId xmlns:a16="http://schemas.microsoft.com/office/drawing/2014/main" id="{D5EDC7AD-00D2-5823-2FAC-12146C1352EE}"/>
+              </a:ext>
+            </a:extLst>
+          </p:cNvPr>
+          <p:cNvSpPr/>
+          <p:nvPr/>
+        </p:nvSpPr>
+        <p:spPr>
+          <a:xfrm>
+            <a:off x="9199830" y="4429771"/>
+            <a:ext cx="1668776" cy="161040"/>
+          </a:xfrm>
+          <a:prstGeom prst="roundRect">
+            <a:avLst/>
+          </a:prstGeom>
+          <a:noFill/>
+          <a:ln>
+            <a:noFill/>
+          </a:ln>
+        </p:spPr>
+        <p:style>
+          <a:lnRef idx="2">
+            <a:schemeClr val="accent1">
+              <a:shade val="15000"/>
+            </a:schemeClr>
+          </a:lnRef>
+          <a:fillRef idx="1">
+            <a:schemeClr val="accent1"/>
+          </a:fillRef>
+          <a:effectRef idx="0">
+            <a:schemeClr val="accent1"/>
+          </a:effectRef>
+          <a:fontRef idx="minor">
+            <a:schemeClr val="lt1"/>
+          </a:fontRef>
+        </p:style>
+        <p:txBody>
+          <a:bodyPr rtlCol="0" anchor="ctr"/>
+          <a:lstStyle/>
+          <a:p>
+            <a:pPr algn="ctr"/>
+            <a:r>
+              <a:rPr lang="en-US" sz="1000" dirty="0">
+                <a:solidFill>
+                  <a:schemeClr val="tx1"/>
+                </a:solidFill>
+              </a:rPr>
+              <a:t>Validate  with public key</a:t>
+            </a:r>
+            <a:endParaRPr lang="en-IL" sz="1000" dirty="0">
+              <a:solidFill>
+                <a:schemeClr val="tx1"/>
+              </a:solidFill>
+            </a:endParaRPr>
           </a:p>
         </p:txBody>
       </p:sp>
@@ -6721,6 +8325,941 @@
       </p:grpSpPr>
       <p:sp>
         <p:nvSpPr>
+          <p:cNvPr id="5" name="TextBox 4">
+            <a:extLst>
+              <a:ext uri="{FF2B5EF4-FFF2-40B4-BE49-F238E27FC236}">
+                <a16:creationId xmlns:a16="http://schemas.microsoft.com/office/drawing/2014/main" id="{AA6401BE-F7B5-24CE-20E1-F44CB8755F53}"/>
+              </a:ext>
+            </a:extLst>
+          </p:cNvPr>
+          <p:cNvSpPr txBox="1"/>
+          <p:nvPr/>
+        </p:nvSpPr>
+        <p:spPr>
+          <a:xfrm rot="16200000">
+            <a:off x="3047238" y="-6866126"/>
+            <a:ext cx="6094476" cy="20590252"/>
+          </a:xfrm>
+          <a:prstGeom prst="rect">
+            <a:avLst/>
+          </a:prstGeom>
+          <a:noFill/>
+        </p:spPr>
+        <p:txBody>
+          <a:bodyPr wrap="square">
+            <a:spAutoFit/>
+          </a:bodyPr>
+          <a:lstStyle/>
+          <a:p>
+            <a:r>
+              <a:rPr lang="en-IL" dirty="0"/>
+              <a:t>┌──────────────┐</a:t>
+            </a:r>
+          </a:p>
+          <a:p>
+            <a:r>
+              <a:rPr lang="en-IL" dirty="0"/>
+              <a:t>        │   Client     │</a:t>
+            </a:r>
+          </a:p>
+          <a:p>
+            <a:r>
+              <a:rPr lang="en-IL" dirty="0"/>
+              <a:t>        └─────┬────────┘</a:t>
+            </a:r>
+          </a:p>
+          <a:p>
+            <a:r>
+              <a:rPr lang="en-IL" dirty="0"/>
+              <a:t>              │</a:t>
+            </a:r>
+          </a:p>
+          <a:p>
+            <a:r>
+              <a:rPr lang="en-IL" dirty="0"/>
+              <a:t>              │ 1️⃣ Login (email + password)</a:t>
+            </a:r>
+          </a:p>
+          <a:p>
+            <a:r>
+              <a:rPr lang="en-IL" dirty="0"/>
+              <a:t>              ▼</a:t>
+            </a:r>
+          </a:p>
+          <a:p>
+            <a:r>
+              <a:rPr lang="en-IL" dirty="0"/>
+              <a:t>        ┌──────────────┐</a:t>
+            </a:r>
+          </a:p>
+          <a:p>
+            <a:r>
+              <a:rPr lang="en-IL" dirty="0"/>
+              <a:t>        │ </a:t>
+            </a:r>
+            <a:r>
+              <a:rPr lang="en-IL" dirty="0" err="1"/>
+              <a:t>AuthService</a:t>
+            </a:r>
+            <a:r>
+              <a:rPr lang="en-IL" dirty="0"/>
+              <a:t>  │</a:t>
+            </a:r>
+          </a:p>
+          <a:p>
+            <a:r>
+              <a:rPr lang="en-IL" dirty="0"/>
+              <a:t>        └─────┬────────┘</a:t>
+            </a:r>
+          </a:p>
+          <a:p>
+            <a:r>
+              <a:rPr lang="en-IL" dirty="0"/>
+              <a:t>              │</a:t>
+            </a:r>
+          </a:p>
+          <a:p>
+            <a:r>
+              <a:rPr lang="en-IL" dirty="0"/>
+              <a:t>              │ 2️⃣ </a:t>
+            </a:r>
+            <a:r>
+              <a:rPr lang="en-IL" dirty="0" err="1"/>
+              <a:t>בדיקת</a:t>
+            </a:r>
+            <a:r>
+              <a:rPr lang="en-IL" dirty="0"/>
+              <a:t> </a:t>
+            </a:r>
+            <a:r>
+              <a:rPr lang="en-IL" dirty="0" err="1"/>
+              <a:t>פרטי</a:t>
+            </a:r>
+            <a:r>
+              <a:rPr lang="en-IL" dirty="0"/>
+              <a:t> </a:t>
+            </a:r>
+            <a:r>
+              <a:rPr lang="en-IL" dirty="0" err="1"/>
+              <a:t>המשתמש</a:t>
+            </a:r>
+            <a:r>
+              <a:rPr lang="en-IL" dirty="0"/>
+              <a:t> </a:t>
+            </a:r>
+            <a:r>
+              <a:rPr lang="en-IL" dirty="0" err="1"/>
+              <a:t>מול</a:t>
+            </a:r>
+            <a:r>
+              <a:rPr lang="en-IL" dirty="0"/>
+              <a:t> DB</a:t>
+            </a:r>
+          </a:p>
+          <a:p>
+            <a:r>
+              <a:rPr lang="en-IL" dirty="0"/>
+              <a:t>              │    (✔ </a:t>
+            </a:r>
+            <a:r>
+              <a:rPr lang="en-IL" dirty="0" err="1"/>
+              <a:t>אם</a:t>
+            </a:r>
+            <a:r>
+              <a:rPr lang="en-IL" dirty="0"/>
+              <a:t> </a:t>
+            </a:r>
+            <a:r>
+              <a:rPr lang="en-IL" dirty="0" err="1"/>
+              <a:t>תקין</a:t>
+            </a:r>
+            <a:r>
+              <a:rPr lang="en-IL" dirty="0"/>
+              <a:t>)</a:t>
+            </a:r>
+          </a:p>
+          <a:p>
+            <a:r>
+              <a:rPr lang="en-IL" dirty="0"/>
+              <a:t>              ▼</a:t>
+            </a:r>
+          </a:p>
+          <a:p>
+            <a:r>
+              <a:rPr lang="en-IL" dirty="0"/>
+              <a:t>        ┌──────────────┐</a:t>
+            </a:r>
+          </a:p>
+          <a:p>
+            <a:r>
+              <a:rPr lang="en-IL" dirty="0"/>
+              <a:t>        │    DB 🗄️     │</a:t>
+            </a:r>
+          </a:p>
+          <a:p>
+            <a:r>
+              <a:rPr lang="en-IL" dirty="0"/>
+              <a:t>        └──────────────┘</a:t>
+            </a:r>
+          </a:p>
+          <a:p>
+            <a:r>
+              <a:rPr lang="en-IL" dirty="0"/>
+              <a:t>              ▲</a:t>
+            </a:r>
+          </a:p>
+          <a:p>
+            <a:r>
+              <a:rPr lang="en-IL" dirty="0"/>
+              <a:t>              │</a:t>
+            </a:r>
+          </a:p>
+          <a:p>
+            <a:r>
+              <a:rPr lang="en-IL" dirty="0"/>
+              <a:t>              │</a:t>
+            </a:r>
+          </a:p>
+          <a:p>
+            <a:r>
+              <a:rPr lang="en-IL" dirty="0"/>
+              <a:t>        ┌─────┴────────┐</a:t>
+            </a:r>
+          </a:p>
+          <a:p>
+            <a:r>
+              <a:rPr lang="en-IL" dirty="0"/>
+              <a:t>        │ </a:t>
+            </a:r>
+            <a:r>
+              <a:rPr lang="en-IL" dirty="0" err="1"/>
+              <a:t>AuthService</a:t>
+            </a:r>
+            <a:r>
+              <a:rPr lang="en-IL" dirty="0"/>
+              <a:t>  │</a:t>
+            </a:r>
+          </a:p>
+          <a:p>
+            <a:r>
+              <a:rPr lang="en-IL" dirty="0"/>
+              <a:t>        └─────┬────────┘</a:t>
+            </a:r>
+          </a:p>
+          <a:p>
+            <a:r>
+              <a:rPr lang="en-IL" dirty="0"/>
+              <a:t>              │</a:t>
+            </a:r>
+          </a:p>
+          <a:p>
+            <a:r>
+              <a:rPr lang="en-IL" dirty="0"/>
+              <a:t>              │ 3️⃣ </a:t>
+            </a:r>
+            <a:r>
+              <a:rPr lang="en-IL" dirty="0" err="1"/>
+              <a:t>מבקש</a:t>
+            </a:r>
+            <a:r>
+              <a:rPr lang="en-IL" dirty="0"/>
+              <a:t> </a:t>
+            </a:r>
+            <a:r>
+              <a:rPr lang="en-IL" dirty="0" err="1"/>
+              <a:t>מה-TokenService</a:t>
+            </a:r>
+            <a:r>
+              <a:rPr lang="en-IL" dirty="0"/>
+              <a:t> </a:t>
+            </a:r>
+            <a:r>
+              <a:rPr lang="en-IL" dirty="0" err="1"/>
+              <a:t>לחתום</a:t>
+            </a:r>
+            <a:r>
+              <a:rPr lang="en-IL" dirty="0"/>
+              <a:t> JWT</a:t>
+            </a:r>
+          </a:p>
+          <a:p>
+            <a:r>
+              <a:rPr lang="en-IL" dirty="0"/>
+              <a:t>              ▼</a:t>
+            </a:r>
+          </a:p>
+          <a:p>
+            <a:r>
+              <a:rPr lang="en-IL" dirty="0"/>
+              <a:t>        ┌──────────────┐</a:t>
+            </a:r>
+          </a:p>
+          <a:p>
+            <a:r>
+              <a:rPr lang="en-IL" dirty="0"/>
+              <a:t>        │ </a:t>
+            </a:r>
+            <a:r>
+              <a:rPr lang="en-IL" dirty="0" err="1"/>
+              <a:t>TokenService</a:t>
+            </a:r>
+            <a:r>
+              <a:rPr lang="en-IL" dirty="0"/>
+              <a:t> │</a:t>
+            </a:r>
+          </a:p>
+          <a:p>
+            <a:r>
+              <a:rPr lang="en-IL" dirty="0"/>
+              <a:t>        │ 🔑 </a:t>
+            </a:r>
+            <a:r>
+              <a:rPr lang="en-IL" dirty="0" err="1"/>
+              <a:t>PrivateKey</a:t>
+            </a:r>
+            <a:r>
+              <a:rPr lang="en-IL" dirty="0"/>
+              <a:t> │</a:t>
+            </a:r>
+          </a:p>
+          <a:p>
+            <a:r>
+              <a:rPr lang="en-IL" dirty="0"/>
+              <a:t>        └─────┬────────┘</a:t>
+            </a:r>
+          </a:p>
+          <a:p>
+            <a:r>
+              <a:rPr lang="en-IL" dirty="0"/>
+              <a:t>              │</a:t>
+            </a:r>
+          </a:p>
+          <a:p>
+            <a:r>
+              <a:rPr lang="en-IL" dirty="0"/>
+              <a:t>              │ 4️⃣ </a:t>
+            </a:r>
+            <a:r>
+              <a:rPr lang="en-IL" dirty="0" err="1"/>
+              <a:t>מחזיר</a:t>
+            </a:r>
+            <a:r>
+              <a:rPr lang="en-IL" dirty="0"/>
+              <a:t> JWT </a:t>
+            </a:r>
+            <a:r>
+              <a:rPr lang="en-IL" dirty="0" err="1"/>
+              <a:t>חתום</a:t>
+            </a:r>
+            <a:r>
+              <a:rPr lang="en-IL" dirty="0"/>
+              <a:t> ל-</a:t>
+            </a:r>
+            <a:r>
+              <a:rPr lang="en-IL" dirty="0" err="1"/>
+              <a:t>AuthService</a:t>
+            </a:r>
+            <a:endParaRPr lang="en-IL" dirty="0"/>
+          </a:p>
+          <a:p>
+            <a:r>
+              <a:rPr lang="en-IL" dirty="0"/>
+              <a:t>              ▼</a:t>
+            </a:r>
+          </a:p>
+          <a:p>
+            <a:r>
+              <a:rPr lang="en-IL" dirty="0"/>
+              <a:t>        ┌──────────────┐</a:t>
+            </a:r>
+          </a:p>
+          <a:p>
+            <a:r>
+              <a:rPr lang="en-IL" dirty="0"/>
+              <a:t>        │ </a:t>
+            </a:r>
+            <a:r>
+              <a:rPr lang="en-IL" dirty="0" err="1"/>
+              <a:t>AuthService</a:t>
+            </a:r>
+            <a:r>
+              <a:rPr lang="en-IL" dirty="0"/>
+              <a:t>  │</a:t>
+            </a:r>
+          </a:p>
+          <a:p>
+            <a:r>
+              <a:rPr lang="en-IL" dirty="0"/>
+              <a:t>        └─────┬────────┘</a:t>
+            </a:r>
+          </a:p>
+          <a:p>
+            <a:r>
+              <a:rPr lang="en-IL" dirty="0"/>
+              <a:t>              │</a:t>
+            </a:r>
+          </a:p>
+          <a:p>
+            <a:r>
+              <a:rPr lang="en-IL" dirty="0"/>
+              <a:t>              │ 5️⃣ </a:t>
+            </a:r>
+            <a:r>
+              <a:rPr lang="en-IL" dirty="0" err="1"/>
+              <a:t>מחזיר</a:t>
+            </a:r>
+            <a:r>
+              <a:rPr lang="en-IL" dirty="0"/>
+              <a:t> JWT ל-Client</a:t>
+            </a:r>
+          </a:p>
+          <a:p>
+            <a:r>
+              <a:rPr lang="en-IL" dirty="0"/>
+              <a:t>              ▼</a:t>
+            </a:r>
+          </a:p>
+          <a:p>
+            <a:r>
+              <a:rPr lang="en-IL" dirty="0"/>
+              <a:t>        ┌──────────────┐</a:t>
+            </a:r>
+          </a:p>
+          <a:p>
+            <a:r>
+              <a:rPr lang="en-IL" dirty="0"/>
+              <a:t>        │   Client     │</a:t>
+            </a:r>
+          </a:p>
+          <a:p>
+            <a:r>
+              <a:rPr lang="en-IL" dirty="0"/>
+              <a:t>        │ 🗝️ JWT       │</a:t>
+            </a:r>
+          </a:p>
+          <a:p>
+            <a:r>
+              <a:rPr lang="en-IL" dirty="0"/>
+              <a:t>        └─────┬────────┘</a:t>
+            </a:r>
+          </a:p>
+          <a:p>
+            <a:r>
+              <a:rPr lang="en-IL" dirty="0"/>
+              <a:t>              │</a:t>
+            </a:r>
+          </a:p>
+          <a:p>
+            <a:r>
+              <a:rPr lang="en-IL" dirty="0"/>
+              <a:t>              │ 6️⃣ </a:t>
+            </a:r>
+            <a:r>
+              <a:rPr lang="en-IL" dirty="0" err="1"/>
+              <a:t>שומר</a:t>
+            </a:r>
+            <a:r>
+              <a:rPr lang="en-IL" dirty="0"/>
+              <a:t> JWT ב-local/session </a:t>
+            </a:r>
+            <a:r>
+              <a:rPr lang="en-IL" dirty="0" err="1"/>
+              <a:t>ושולח</a:t>
+            </a:r>
+            <a:r>
+              <a:rPr lang="en-IL" dirty="0"/>
+              <a:t> </a:t>
+            </a:r>
+            <a:r>
+              <a:rPr lang="en-IL" dirty="0" err="1"/>
+              <a:t>בכל</a:t>
+            </a:r>
+            <a:r>
+              <a:rPr lang="en-IL" dirty="0"/>
+              <a:t> </a:t>
+            </a:r>
+            <a:r>
+              <a:rPr lang="en-IL" dirty="0" err="1"/>
+              <a:t>בקשה</a:t>
+            </a:r>
+            <a:endParaRPr lang="en-IL" dirty="0"/>
+          </a:p>
+          <a:p>
+            <a:r>
+              <a:rPr lang="en-IL" dirty="0"/>
+              <a:t>              ▼</a:t>
+            </a:r>
+          </a:p>
+          <a:p>
+            <a:r>
+              <a:rPr lang="en-IL" dirty="0"/>
+              <a:t>        ┌─────────────────────┐</a:t>
+            </a:r>
+          </a:p>
+          <a:p>
+            <a:r>
+              <a:rPr lang="en-IL" dirty="0"/>
+              <a:t>        │ Microservice (API)  │</a:t>
+            </a:r>
+          </a:p>
+          <a:p>
+            <a:r>
+              <a:rPr lang="en-IL" dirty="0"/>
+              <a:t>        └─────────┬───────────┘</a:t>
+            </a:r>
+          </a:p>
+          <a:p>
+            <a:r>
+              <a:rPr lang="en-IL" dirty="0"/>
+              <a:t>                  │</a:t>
+            </a:r>
+          </a:p>
+          <a:p>
+            <a:r>
+              <a:rPr lang="en-IL" dirty="0"/>
+              <a:t>                  │ 7️⃣ Middleware:</a:t>
+            </a:r>
+          </a:p>
+          <a:p>
+            <a:r>
+              <a:rPr lang="en-IL" dirty="0"/>
+              <a:t>                  │    - </a:t>
+            </a:r>
+            <a:r>
+              <a:rPr lang="en-IL" dirty="0" err="1"/>
+              <a:t>קורא</a:t>
+            </a:r>
+            <a:r>
+              <a:rPr lang="en-IL" dirty="0"/>
+              <a:t> JWT </a:t>
+            </a:r>
+            <a:r>
+              <a:rPr lang="en-IL" dirty="0" err="1"/>
+              <a:t>מה</a:t>
+            </a:r>
+            <a:r>
+              <a:rPr lang="en-IL" dirty="0"/>
+              <a:t>-Header</a:t>
+            </a:r>
+          </a:p>
+          <a:p>
+            <a:r>
+              <a:rPr lang="en-IL" dirty="0"/>
+              <a:t>                  │    - </a:t>
+            </a:r>
+            <a:r>
+              <a:rPr lang="en-IL" dirty="0" err="1"/>
+              <a:t>מוריד</a:t>
+            </a:r>
+            <a:r>
+              <a:rPr lang="en-IL" dirty="0"/>
+              <a:t> Public Key 🔓 מ-JWKS </a:t>
+            </a:r>
+            <a:r>
+              <a:rPr lang="en-IL" dirty="0" err="1"/>
+              <a:t>של</a:t>
+            </a:r>
+            <a:r>
+              <a:rPr lang="en-IL" dirty="0"/>
+              <a:t> </a:t>
+            </a:r>
+            <a:r>
+              <a:rPr lang="en-IL" dirty="0" err="1"/>
+              <a:t>TokenService</a:t>
+            </a:r>
+            <a:endParaRPr lang="en-IL" dirty="0"/>
+          </a:p>
+          <a:p>
+            <a:r>
+              <a:rPr lang="en-IL" dirty="0"/>
+              <a:t>                  │    - </a:t>
+            </a:r>
+            <a:r>
+              <a:rPr lang="en-IL" dirty="0" err="1"/>
+              <a:t>בודק</a:t>
+            </a:r>
+            <a:r>
+              <a:rPr lang="en-IL" dirty="0"/>
+              <a:t> </a:t>
+            </a:r>
+            <a:r>
+              <a:rPr lang="en-IL" dirty="0" err="1"/>
+              <a:t>חתימה</a:t>
+            </a:r>
+            <a:r>
+              <a:rPr lang="en-IL" dirty="0"/>
+              <a:t>, Issuer, Audience, Expiration</a:t>
+            </a:r>
+          </a:p>
+          <a:p>
+            <a:r>
+              <a:rPr lang="en-IL" dirty="0"/>
+              <a:t>                  ▼</a:t>
+            </a:r>
+          </a:p>
+          <a:p>
+            <a:r>
+              <a:rPr lang="en-IL" dirty="0"/>
+              <a:t>        ┌─────────────────────┐</a:t>
+            </a:r>
+          </a:p>
+          <a:p>
+            <a:r>
+              <a:rPr lang="en-IL" dirty="0"/>
+              <a:t>        │ </a:t>
+            </a:r>
+            <a:r>
+              <a:rPr lang="en-IL" dirty="0" err="1"/>
+              <a:t>HttpContext.User</a:t>
+            </a:r>
+            <a:r>
+              <a:rPr lang="en-IL" dirty="0"/>
+              <a:t>    │</a:t>
+            </a:r>
+          </a:p>
+          <a:p>
+            <a:r>
+              <a:rPr lang="en-IL" dirty="0"/>
+              <a:t>        │ </a:t>
+            </a:r>
+            <a:r>
+              <a:rPr lang="en-IL" dirty="0" err="1"/>
+              <a:t>עם</a:t>
+            </a:r>
+            <a:r>
+              <a:rPr lang="en-IL" dirty="0"/>
+              <a:t> Claims </a:t>
+            </a:r>
+            <a:r>
+              <a:rPr lang="en-IL" dirty="0" err="1"/>
+              <a:t>מלאים</a:t>
+            </a:r>
+            <a:r>
+              <a:rPr lang="en-IL" dirty="0"/>
+              <a:t>     │</a:t>
+            </a:r>
+          </a:p>
+          <a:p>
+            <a:r>
+              <a:rPr lang="en-IL" dirty="0"/>
+              <a:t>        └─────────┬───────────┘</a:t>
+            </a:r>
+          </a:p>
+          <a:p>
+            <a:r>
+              <a:rPr lang="en-IL" dirty="0"/>
+              <a:t>                  │</a:t>
+            </a:r>
+          </a:p>
+          <a:p>
+            <a:r>
+              <a:rPr lang="en-IL" dirty="0"/>
+              <a:t>                  │ 8️⃣ Controller </a:t>
+            </a:r>
+            <a:r>
+              <a:rPr lang="en-IL" dirty="0" err="1"/>
+              <a:t>מבצע</a:t>
+            </a:r>
+            <a:r>
+              <a:rPr lang="en-IL" dirty="0"/>
+              <a:t> </a:t>
+            </a:r>
+            <a:r>
+              <a:rPr lang="en-IL" dirty="0" err="1"/>
+              <a:t>פעולה</a:t>
+            </a:r>
+            <a:endParaRPr lang="en-IL" dirty="0"/>
+          </a:p>
+          <a:p>
+            <a:r>
+              <a:rPr lang="en-IL" dirty="0"/>
+              <a:t>                  ▼</a:t>
+            </a:r>
+          </a:p>
+          <a:p>
+            <a:r>
+              <a:rPr lang="en-IL" dirty="0"/>
+              <a:t>        ┌──────────────┐</a:t>
+            </a:r>
+          </a:p>
+          <a:p>
+            <a:r>
+              <a:rPr lang="en-IL" dirty="0"/>
+              <a:t>        │   Client     │</a:t>
+            </a:r>
+          </a:p>
+          <a:p>
+            <a:r>
+              <a:rPr lang="en-IL" dirty="0"/>
+              <a:t>        └──────────────┘</a:t>
+            </a:r>
+          </a:p>
+          <a:p>
+            <a:r>
+              <a:rPr lang="en-IL" dirty="0" err="1"/>
+              <a:t>הדגשים</a:t>
+            </a:r>
+            <a:r>
+              <a:rPr lang="en-IL" dirty="0"/>
+              <a:t>:</a:t>
+            </a:r>
+          </a:p>
+          <a:p>
+            <a:r>
+              <a:rPr lang="en-IL" dirty="0"/>
+              <a:t>🔑 Private Key </a:t>
+            </a:r>
+            <a:r>
+              <a:rPr lang="en-IL" dirty="0" err="1"/>
+              <a:t>נשאר</a:t>
+            </a:r>
+            <a:r>
+              <a:rPr lang="en-IL" dirty="0"/>
+              <a:t> ב-</a:t>
+            </a:r>
+            <a:r>
+              <a:rPr lang="en-IL" dirty="0" err="1"/>
+              <a:t>TokenService</a:t>
+            </a:r>
+            <a:r>
+              <a:rPr lang="en-IL" dirty="0"/>
+              <a:t> </a:t>
+            </a:r>
+            <a:r>
+              <a:rPr lang="en-IL" dirty="0" err="1"/>
+              <a:t>בלבד</a:t>
+            </a:r>
+            <a:r>
+              <a:rPr lang="en-IL" dirty="0"/>
+              <a:t>.</a:t>
+            </a:r>
+          </a:p>
+          <a:p>
+            <a:endParaRPr lang="en-IL" dirty="0"/>
+          </a:p>
+          <a:p>
+            <a:r>
+              <a:rPr lang="en-IL" dirty="0"/>
+              <a:t>🔓 Public Key </a:t>
+            </a:r>
+            <a:r>
+              <a:rPr lang="en-IL" dirty="0" err="1"/>
+              <a:t>זמין</a:t>
+            </a:r>
+            <a:r>
+              <a:rPr lang="en-IL" dirty="0"/>
+              <a:t> </a:t>
+            </a:r>
+            <a:r>
+              <a:rPr lang="en-IL" dirty="0" err="1"/>
+              <a:t>לכל</a:t>
+            </a:r>
+            <a:r>
+              <a:rPr lang="en-IL" dirty="0"/>
+              <a:t> Microservice </a:t>
+            </a:r>
+            <a:r>
+              <a:rPr lang="en-IL" dirty="0" err="1"/>
+              <a:t>דרך</a:t>
+            </a:r>
+            <a:r>
+              <a:rPr lang="en-IL" dirty="0"/>
+              <a:t> JWKS.</a:t>
+            </a:r>
+          </a:p>
+          <a:p>
+            <a:endParaRPr lang="en-IL" dirty="0"/>
+          </a:p>
+          <a:p>
+            <a:r>
+              <a:rPr lang="en-IL" dirty="0" err="1"/>
+              <a:t>AuthService</a:t>
+            </a:r>
+            <a:r>
+              <a:rPr lang="en-IL" dirty="0"/>
+              <a:t> </a:t>
+            </a:r>
+            <a:r>
+              <a:rPr lang="en-IL" dirty="0" err="1"/>
+              <a:t>לא</a:t>
+            </a:r>
+            <a:r>
+              <a:rPr lang="en-IL" dirty="0"/>
+              <a:t> </a:t>
+            </a:r>
+            <a:r>
+              <a:rPr lang="en-IL" dirty="0" err="1"/>
+              <a:t>מחזיק</a:t>
+            </a:r>
+            <a:r>
+              <a:rPr lang="en-IL" dirty="0"/>
+              <a:t> </a:t>
+            </a:r>
+            <a:r>
+              <a:rPr lang="en-IL" dirty="0" err="1"/>
+              <a:t>סוד</a:t>
+            </a:r>
+            <a:r>
+              <a:rPr lang="en-IL" dirty="0"/>
+              <a:t>, </a:t>
+            </a:r>
+            <a:r>
+              <a:rPr lang="en-IL" dirty="0" err="1"/>
+              <a:t>רק</a:t>
+            </a:r>
+            <a:r>
+              <a:rPr lang="en-IL" dirty="0"/>
+              <a:t> </a:t>
+            </a:r>
+            <a:r>
+              <a:rPr lang="en-IL" dirty="0" err="1"/>
+              <a:t>מבקש</a:t>
+            </a:r>
+            <a:r>
+              <a:rPr lang="en-IL" dirty="0"/>
+              <a:t> </a:t>
+            </a:r>
+            <a:r>
+              <a:rPr lang="en-IL" dirty="0" err="1"/>
+              <a:t>חתימה</a:t>
+            </a:r>
+            <a:r>
+              <a:rPr lang="en-IL" dirty="0"/>
+              <a:t> </a:t>
+            </a:r>
+            <a:r>
+              <a:rPr lang="en-IL" dirty="0" err="1"/>
+              <a:t>או</a:t>
+            </a:r>
+            <a:r>
+              <a:rPr lang="en-IL" dirty="0"/>
+              <a:t> JWT.</a:t>
+            </a:r>
+          </a:p>
+          <a:p>
+            <a:endParaRPr lang="en-IL" dirty="0"/>
+          </a:p>
+          <a:p>
+            <a:r>
+              <a:rPr lang="en-IL" dirty="0"/>
+              <a:t>Microservices </a:t>
+            </a:r>
+            <a:r>
+              <a:rPr lang="en-IL" dirty="0" err="1"/>
+              <a:t>רק</a:t>
+            </a:r>
+            <a:r>
+              <a:rPr lang="en-IL" dirty="0"/>
+              <a:t> </a:t>
+            </a:r>
+            <a:r>
+              <a:rPr lang="en-IL" dirty="0" err="1"/>
+              <a:t>מאמתים</a:t>
+            </a:r>
+            <a:r>
+              <a:rPr lang="en-IL" dirty="0"/>
+              <a:t> JWT, </a:t>
+            </a:r>
+            <a:r>
+              <a:rPr lang="en-IL" dirty="0" err="1"/>
+              <a:t>לא</a:t>
+            </a:r>
+            <a:r>
+              <a:rPr lang="en-IL" dirty="0"/>
+              <a:t> </a:t>
+            </a:r>
+            <a:r>
+              <a:rPr lang="en-IL" dirty="0" err="1"/>
+              <a:t>יוצרים</a:t>
+            </a:r>
+            <a:r>
+              <a:rPr lang="en-IL" dirty="0"/>
+              <a:t> </a:t>
+            </a:r>
+            <a:r>
+              <a:rPr lang="en-IL" dirty="0" err="1"/>
+              <a:t>אותו</a:t>
+            </a:r>
+            <a:r>
+              <a:rPr lang="en-IL" dirty="0"/>
+              <a:t>.</a:t>
+            </a:r>
+          </a:p>
+          <a:p>
+            <a:endParaRPr lang="en-IL" dirty="0"/>
+          </a:p>
+          <a:p>
+            <a:r>
+              <a:rPr lang="en-IL" dirty="0"/>
+              <a:t>Client </a:t>
+            </a:r>
+            <a:r>
+              <a:rPr lang="en-IL" dirty="0" err="1"/>
+              <a:t>שולח</a:t>
+            </a:r>
+            <a:r>
+              <a:rPr lang="en-IL" dirty="0"/>
+              <a:t> </a:t>
+            </a:r>
+            <a:r>
+              <a:rPr lang="en-IL" dirty="0" err="1"/>
+              <a:t>את</a:t>
+            </a:r>
+            <a:r>
+              <a:rPr lang="en-IL" dirty="0"/>
+              <a:t> ה-JWT </a:t>
+            </a:r>
+            <a:r>
+              <a:rPr lang="en-IL" dirty="0" err="1"/>
+              <a:t>בכל</a:t>
+            </a:r>
+            <a:r>
+              <a:rPr lang="en-IL" dirty="0"/>
+              <a:t> </a:t>
+            </a:r>
+            <a:r>
+              <a:rPr lang="en-IL" dirty="0" err="1"/>
+              <a:t>בקשה</a:t>
+            </a:r>
+            <a:r>
+              <a:rPr lang="en-IL" dirty="0"/>
+              <a:t> ל-Microservice.</a:t>
+            </a:r>
+          </a:p>
+        </p:txBody>
+      </p:sp>
+    </p:spTree>
+    <p:extLst>
+      <p:ext uri="{BB962C8B-B14F-4D97-AF65-F5344CB8AC3E}">
+        <p14:creationId xmlns:p14="http://schemas.microsoft.com/office/powerpoint/2010/main" val="539859102"/>
+      </p:ext>
+    </p:extLst>
+  </p:cSld>
+  <p:clrMapOvr>
+    <a:masterClrMapping/>
+  </p:clrMapOvr>
+</p:sld>
+</file>
+
+<file path=ppt/slides/slide4.xml><?xml version="1.0" encoding="utf-8"?>
+<p:sld xmlns:a="http://schemas.openxmlformats.org/drawingml/2006/main" xmlns:r="http://schemas.openxmlformats.org/officeDocument/2006/relationships" xmlns:p="http://schemas.openxmlformats.org/presentationml/2006/main">
+  <p:cSld>
+    <p:spTree>
+      <p:nvGrpSpPr>
+        <p:cNvPr id="1" name=""/>
+        <p:cNvGrpSpPr/>
+        <p:nvPr/>
+      </p:nvGrpSpPr>
+      <p:grpSpPr>
+        <a:xfrm>
+          <a:off x="0" y="0"/>
+          <a:ext cx="0" cy="0"/>
+          <a:chOff x="0" y="0"/>
+          <a:chExt cx="0" cy="0"/>
+        </a:xfrm>
+      </p:grpSpPr>
+      <p:sp>
+        <p:nvSpPr>
           <p:cNvPr id="7" name="Text Box 3">
             <a:extLst>
               <a:ext uri="{FF2B5EF4-FFF2-40B4-BE49-F238E27FC236}">
@@ -6733,8 +9272,8 @@
         </p:nvSpPr>
         <p:spPr>
           <a:xfrm>
-            <a:off x="4474671" y="109729"/>
-            <a:ext cx="4555029" cy="6528814"/>
+            <a:off x="3438145" y="237745"/>
+            <a:ext cx="5591556" cy="6435299"/>
           </a:xfrm>
           <a:prstGeom prst="rect">
             <a:avLst/>
@@ -6801,7 +9340,7 @@
         </p:nvSpPr>
         <p:spPr bwMode="auto">
           <a:xfrm>
-            <a:off x="2754861" y="2809749"/>
+            <a:off x="2754861" y="2937765"/>
             <a:ext cx="831850" cy="241300"/>
           </a:xfrm>
           <a:prstGeom prst="rect">
@@ -6894,7 +9433,7 @@
         </p:nvSpPr>
         <p:spPr bwMode="auto">
           <a:xfrm>
-            <a:off x="7104788" y="191168"/>
+            <a:off x="7104788" y="319184"/>
             <a:ext cx="651264" cy="593367"/>
           </a:xfrm>
           <a:prstGeom prst="flowChartMagneticDisk">
@@ -7052,7 +9591,7 @@
         </p:nvCxnSpPr>
         <p:spPr>
           <a:xfrm>
-            <a:off x="2714048" y="3030071"/>
+            <a:off x="2714048" y="3158087"/>
             <a:ext cx="894944" cy="0"/>
           </a:xfrm>
           <a:prstGeom prst="straightConnector1">
@@ -7092,7 +9631,7 @@
         </p:nvGrpSpPr>
         <p:grpSpPr>
           <a:xfrm>
-            <a:off x="4351942" y="646092"/>
+            <a:off x="4351942" y="774108"/>
             <a:ext cx="3164040" cy="632037"/>
             <a:chOff x="4351942" y="1669839"/>
             <a:chExt cx="3164040" cy="632037"/>
@@ -7388,7 +9927,7 @@
                   <a:ea typeface="Yu Gothic" panose="020B0400000000000000" pitchFamily="34" charset="-128"/>
                   <a:cs typeface="Arial" panose="020B0604020202020204" pitchFamily="34" charset="0"/>
                 </a:rPr>
-                <a:t>Authentication Service </a:t>
+                <a:t>Authentication </a:t>
               </a:r>
               <a:r>
                 <a:rPr kumimoji="0" lang="en-US" altLang="en-IL" sz="1000" b="0" i="0" u="none" strike="noStrike" cap="none" normalizeH="0" baseline="0" dirty="0">
@@ -7403,7 +9942,7 @@
                   <a:ea typeface="Yu Gothic" panose="020B0400000000000000" pitchFamily="34" charset="-128"/>
                   <a:cs typeface="Arial" panose="020B0604020202020204" pitchFamily="34" charset="0"/>
                 </a:rPr>
-                <a:t>(</a:t>
+                <a:t>Micro-</a:t>
               </a:r>
               <a:r>
                 <a:rPr kumimoji="0" lang="en-IL" altLang="en-IL" sz="1000" b="0" i="0" u="none" strike="noStrike" cap="none" normalizeH="0" baseline="0" dirty="0">
@@ -7418,22 +9957,7 @@
                   <a:ea typeface="Yu Gothic" panose="020B0400000000000000" pitchFamily="34" charset="-128"/>
                   <a:cs typeface="Arial" panose="020B0604020202020204" pitchFamily="34" charset="0"/>
                 </a:rPr>
-                <a:t>Docker</a:t>
-              </a:r>
-              <a:r>
-                <a:rPr kumimoji="0" lang="en-US" altLang="en-IL" sz="1000" b="0" i="0" u="none" strike="noStrike" cap="none" normalizeH="0" baseline="0" dirty="0">
-                  <a:ln>
-                    <a:noFill/>
-                  </a:ln>
-                  <a:solidFill>
-                    <a:schemeClr val="tx1"/>
-                  </a:solidFill>
-                  <a:effectLst/>
-                  <a:latin typeface="Calibri" panose="020F0502020204030204" pitchFamily="34" charset="0"/>
-                  <a:ea typeface="Yu Gothic" panose="020B0400000000000000" pitchFamily="34" charset="-128"/>
-                  <a:cs typeface="Arial" panose="020B0604020202020204" pitchFamily="34" charset="0"/>
-                </a:rPr>
-                <a:t>)</a:t>
+                <a:t>Service</a:t>
               </a:r>
               <a:endParaRPr kumimoji="0" lang="en-IL" altLang="en-IL" sz="1800" b="0" i="0" u="none" strike="noStrike" cap="none" normalizeH="0" baseline="0" dirty="0">
                 <a:ln>
@@ -7465,8 +9989,8 @@
         </p:nvSpPr>
         <p:spPr bwMode="auto">
           <a:xfrm>
-            <a:off x="1431348" y="2648935"/>
-            <a:ext cx="1282700" cy="873125"/>
+            <a:off x="1069848" y="2776951"/>
+            <a:ext cx="1644200" cy="1064640"/>
           </a:xfrm>
           <a:prstGeom prst="roundRect">
             <a:avLst>
@@ -7514,7 +10038,7 @@
                 <a:noFill/>
               </a:ln>
               <a:solidFill>
-                <a:schemeClr val="tx1"/>
+                <a:schemeClr val="bg1"/>
               </a:solidFill>
               <a:effectLst/>
               <a:latin typeface="Calibri" panose="020F0502020204030204" pitchFamily="34" charset="0"/>
@@ -7544,7 +10068,7 @@
                 <a:noFill/>
               </a:ln>
               <a:solidFill>
-                <a:schemeClr val="tx1"/>
+                <a:schemeClr val="bg1"/>
               </a:solidFill>
               <a:effectLst/>
               <a:latin typeface="Calibri" panose="020F0502020204030204" pitchFamily="34" charset="0"/>
@@ -7570,12 +10094,12 @@
               <a:tabLst/>
             </a:pPr>
             <a:r>
-              <a:rPr kumimoji="0" lang="en-IL" altLang="en-IL" sz="1000" b="0" i="0" u="none" strike="noStrike" cap="none" normalizeH="0" baseline="0" dirty="0">
+              <a:rPr kumimoji="0" lang="en-IL" altLang="en-IL" sz="1000" b="1" i="0" u="none" strike="noStrike" cap="none" normalizeH="0" baseline="0" dirty="0">
                 <a:ln>
                   <a:noFill/>
                 </a:ln>
                 <a:solidFill>
-                  <a:schemeClr val="tx1"/>
+                  <a:schemeClr val="bg1"/>
                 </a:solidFill>
                 <a:effectLst/>
                 <a:latin typeface="Calibri" panose="020F0502020204030204" pitchFamily="34" charset="0"/>
@@ -7584,12 +10108,12 @@
               </a:rPr>
               <a:t>Frontend - React</a:t>
             </a:r>
-            <a:endParaRPr kumimoji="0" lang="en-IL" altLang="en-IL" sz="800" b="0" i="0" u="none" strike="noStrike" cap="none" normalizeH="0" baseline="0" dirty="0">
+            <a:endParaRPr kumimoji="0" lang="en-IL" altLang="en-IL" sz="800" b="1" i="0" u="none" strike="noStrike" cap="none" normalizeH="0" baseline="0" dirty="0">
               <a:ln>
                 <a:noFill/>
               </a:ln>
               <a:solidFill>
-                <a:schemeClr val="tx1"/>
+                <a:schemeClr val="bg1"/>
               </a:solidFill>
               <a:effectLst/>
             </a:endParaRPr>
@@ -7612,26 +10136,82 @@
               <a:tabLst/>
             </a:pPr>
             <a:r>
-              <a:rPr kumimoji="0" lang="en-IL" altLang="en-IL" sz="1000" b="0" i="0" u="none" strike="noStrike" cap="none" normalizeH="0" baseline="0" dirty="0">
+              <a:rPr kumimoji="0" lang="en-IL" altLang="en-IL" sz="1000" b="1" i="0" u="none" strike="noStrike" cap="none" normalizeH="0" baseline="0" dirty="0">
                 <a:ln>
                   <a:noFill/>
                 </a:ln>
                 <a:solidFill>
-                  <a:schemeClr val="tx1"/>
+                  <a:schemeClr val="bg1"/>
                 </a:solidFill>
                 <a:effectLst/>
                 <a:latin typeface="Calibri" panose="020F0502020204030204" pitchFamily="34" charset="0"/>
                 <a:ea typeface="Yu Gothic" panose="020B0400000000000000" pitchFamily="34" charset="-128"/>
                 <a:cs typeface="Arial" panose="020B0604020202020204" pitchFamily="34" charset="0"/>
               </a:rPr>
-              <a:t>(Web-based client)</a:t>
-            </a:r>
-            <a:endParaRPr kumimoji="0" lang="en-IL" altLang="en-IL" sz="800" b="0" i="0" u="none" strike="noStrike" cap="none" normalizeH="0" baseline="0" dirty="0">
+              <a:t>(</a:t>
+            </a:r>
+            <a:r>
+              <a:rPr kumimoji="0" lang="en-US" altLang="en-IL" sz="1000" b="1" i="0" u="none" strike="noStrike" cap="none" normalizeH="0" baseline="0" dirty="0">
+                <a:ln>
+                  <a:noFill/>
+                </a:ln>
+                <a:solidFill>
+                  <a:schemeClr val="bg1"/>
+                </a:solidFill>
+                <a:effectLst/>
+                <a:latin typeface="Calibri" panose="020F0502020204030204" pitchFamily="34" charset="0"/>
+                <a:ea typeface="Yu Gothic" panose="020B0400000000000000" pitchFamily="34" charset="-128"/>
+                <a:cs typeface="Arial" panose="020B0604020202020204" pitchFamily="34" charset="0"/>
+              </a:rPr>
+              <a:t>W</a:t>
+            </a:r>
+            <a:r>
+              <a:rPr lang="en-US" altLang="en-IL" sz="1000" b="1" dirty="0">
+                <a:solidFill>
+                  <a:schemeClr val="bg1"/>
+                </a:solidFill>
+                <a:latin typeface="Calibri" panose="020F0502020204030204" pitchFamily="34" charset="0"/>
+                <a:ea typeface="Yu Gothic" panose="020B0400000000000000" pitchFamily="34" charset="-128"/>
+                <a:cs typeface="Arial" panose="020B0604020202020204" pitchFamily="34" charset="0"/>
+              </a:rPr>
+              <a:t>eb</a:t>
+            </a:r>
+            <a:r>
+              <a:rPr kumimoji="0" lang="en-US" altLang="en-IL" sz="1000" b="1" i="0" u="none" strike="noStrike" cap="none" normalizeH="0" baseline="0" dirty="0">
+                <a:ln>
+                  <a:noFill/>
+                </a:ln>
+                <a:solidFill>
+                  <a:schemeClr val="bg1"/>
+                </a:solidFill>
+                <a:effectLst/>
+                <a:latin typeface="Calibri" panose="020F0502020204030204" pitchFamily="34" charset="0"/>
+                <a:ea typeface="Yu Gothic" panose="020B0400000000000000" pitchFamily="34" charset="-128"/>
+                <a:cs typeface="Arial" panose="020B0604020202020204" pitchFamily="34" charset="0"/>
+              </a:rPr>
+              <a:t>\Mobile App</a:t>
+            </a:r>
+            <a:r>
+              <a:rPr kumimoji="0" lang="en-IL" altLang="en-IL" sz="1000" b="1" i="0" u="none" strike="noStrike" cap="none" normalizeH="0" baseline="0" dirty="0">
+                <a:ln>
+                  <a:noFill/>
+                </a:ln>
+                <a:solidFill>
+                  <a:schemeClr val="bg1"/>
+                </a:solidFill>
+                <a:effectLst/>
+                <a:latin typeface="Calibri" panose="020F0502020204030204" pitchFamily="34" charset="0"/>
+                <a:ea typeface="Yu Gothic" panose="020B0400000000000000" pitchFamily="34" charset="-128"/>
+                <a:cs typeface="Arial" panose="020B0604020202020204" pitchFamily="34" charset="0"/>
+              </a:rPr>
+              <a:t> client)</a:t>
+            </a:r>
+            <a:endParaRPr kumimoji="0" lang="en-IL" altLang="en-IL" sz="800" b="1" i="0" u="none" strike="noStrike" cap="none" normalizeH="0" baseline="0" dirty="0">
               <a:ln>
                 <a:noFill/>
               </a:ln>
               <a:solidFill>
-                <a:schemeClr val="tx1"/>
+                <a:schemeClr val="bg1"/>
               </a:solidFill>
               <a:effectLst/>
             </a:endParaRPr>
@@ -7658,7 +10238,7 @@
                 <a:noFill/>
               </a:ln>
               <a:solidFill>
-                <a:schemeClr val="tx1"/>
+                <a:schemeClr val="bg1"/>
               </a:solidFill>
               <a:effectLst/>
               <a:latin typeface="Arial" panose="020B0604020202020204" pitchFamily="34" charset="0"/>
@@ -7682,8 +10262,8 @@
         </p:nvSpPr>
         <p:spPr bwMode="auto">
           <a:xfrm>
-            <a:off x="3608992" y="109728"/>
-            <a:ext cx="742950" cy="6528814"/>
+            <a:off x="3583749" y="544762"/>
+            <a:ext cx="742950" cy="6020629"/>
           </a:xfrm>
           <a:prstGeom prst="roundRect">
             <a:avLst>
@@ -7745,42 +10325,6 @@
               <a:t>API Gateway </a:t>
             </a:r>
           </a:p>
-          <a:p>
-            <a:pPr marL="0" marR="0" lvl="0" indent="0" algn="ctr" defTabSz="914400" rtl="0" eaLnBrk="0" fontAlgn="base" latinLnBrk="0" hangingPunct="0">
-              <a:lnSpc>
-                <a:spcPct val="100000"/>
-              </a:lnSpc>
-              <a:spcBef>
-                <a:spcPct val="0"/>
-              </a:spcBef>
-              <a:spcAft>
-                <a:spcPct val="0"/>
-              </a:spcAft>
-              <a:buClrTx/>
-              <a:buSzTx/>
-              <a:buFontTx/>
-              <a:buNone/>
-              <a:tabLst/>
-            </a:pPr>
-            <a:r>
-              <a:rPr lang="en-US" altLang="en-IL" sz="1000" dirty="0">
-                <a:latin typeface="Calibri" panose="020F0502020204030204" pitchFamily="34" charset="0"/>
-                <a:ea typeface="Yu Gothic" panose="020B0400000000000000" pitchFamily="34" charset="-128"/>
-                <a:cs typeface="Arial" panose="020B0604020202020204" pitchFamily="34" charset="0"/>
-              </a:rPr>
-              <a:t>(Docker)</a:t>
-            </a:r>
-            <a:endParaRPr kumimoji="0" lang="en-US" altLang="en-IL" sz="1800" b="0" i="0" u="none" strike="noStrike" cap="none" normalizeH="0" baseline="0" dirty="0">
-              <a:ln>
-                <a:noFill/>
-              </a:ln>
-              <a:solidFill>
-                <a:schemeClr val="tx1"/>
-              </a:solidFill>
-              <a:effectLst/>
-              <a:latin typeface="Arial" panose="020B0604020202020204" pitchFamily="34" charset="0"/>
-            </a:endParaRPr>
-          </a:p>
         </p:txBody>
       </p:sp>
       <p:sp>
@@ -7799,7 +10343,7 @@
         </p:nvSpPr>
         <p:spPr bwMode="auto">
           <a:xfrm>
-            <a:off x="8057804" y="416746"/>
+            <a:off x="8057804" y="544762"/>
             <a:ext cx="688975" cy="6020629"/>
           </a:xfrm>
           <a:prstGeom prst="roundRect">
@@ -7957,63 +10501,6 @@
                 <a:ea typeface="Yu Gothic" panose="020B0400000000000000" pitchFamily="34" charset="-128"/>
                 <a:cs typeface="Arial" panose="020B0604020202020204" pitchFamily="34" charset="0"/>
               </a:rPr>
-              <a:t>Docker </a:t>
-            </a:r>
-            <a:r>
-              <a:rPr kumimoji="0" lang="en-US" altLang="en-IL" sz="900" b="0" i="0" u="none" strike="noStrike" cap="none" normalizeH="0" baseline="0" dirty="0">
-                <a:ln>
-                  <a:noFill/>
-                </a:ln>
-                <a:solidFill>
-                  <a:schemeClr val="tx1"/>
-                </a:solidFill>
-                <a:effectLst/>
-                <a:latin typeface="Calibri" panose="020F0502020204030204" pitchFamily="34" charset="0"/>
-                <a:ea typeface="Yu Gothic" panose="020B0400000000000000" pitchFamily="34" charset="-128"/>
-                <a:cs typeface="Arial" panose="020B0604020202020204" pitchFamily="34" charset="0"/>
-              </a:rPr>
-              <a:t>-</a:t>
-            </a:r>
-            <a:endParaRPr kumimoji="0" lang="en-IL" altLang="en-IL" sz="800" b="0" i="0" u="none" strike="noStrike" cap="none" normalizeH="0" baseline="0" dirty="0">
-              <a:ln>
-                <a:noFill/>
-              </a:ln>
-              <a:solidFill>
-                <a:schemeClr val="tx1"/>
-              </a:solidFill>
-              <a:effectLst/>
-            </a:endParaRPr>
-          </a:p>
-          <a:p>
-            <a:pPr marL="0" marR="0" lvl="0" indent="0" algn="ctr" defTabSz="914400" rtl="0" eaLnBrk="0" fontAlgn="base" latinLnBrk="0" hangingPunct="0">
-              <a:lnSpc>
-                <a:spcPct val="100000"/>
-              </a:lnSpc>
-              <a:spcBef>
-                <a:spcPct val="0"/>
-              </a:spcBef>
-              <a:spcAft>
-                <a:spcPct val="0"/>
-              </a:spcAft>
-              <a:buClrTx/>
-              <a:buSzTx/>
-              <a:buFontTx/>
-              <a:buNone/>
-              <a:tabLst/>
-            </a:pPr>
-            <a:r>
-              <a:rPr kumimoji="0" lang="en-IL" altLang="en-IL" sz="900" b="0" i="0" u="none" strike="noStrike" cap="none" normalizeH="0" baseline="0" dirty="0">
-                <a:ln>
-                  <a:noFill/>
-                </a:ln>
-                <a:solidFill>
-                  <a:schemeClr val="tx1"/>
-                </a:solidFill>
-                <a:effectLst/>
-                <a:latin typeface="Calibri" panose="020F0502020204030204" pitchFamily="34" charset="0"/>
-                <a:ea typeface="Yu Gothic" panose="020B0400000000000000" pitchFamily="34" charset="-128"/>
-                <a:cs typeface="Arial" panose="020B0604020202020204" pitchFamily="34" charset="0"/>
-              </a:rPr>
               <a:t>Kafka)</a:t>
             </a:r>
             <a:endParaRPr kumimoji="0" lang="en-IL" altLang="en-IL" sz="800" b="0" i="0" u="none" strike="noStrike" cap="none" normalizeH="0" baseline="0" dirty="0">
@@ -8072,7 +10559,7 @@
         </p:nvSpPr>
         <p:spPr bwMode="auto">
           <a:xfrm>
-            <a:off x="7017530" y="1103028"/>
+            <a:off x="7017530" y="1231044"/>
             <a:ext cx="688975" cy="593368"/>
           </a:xfrm>
           <a:prstGeom prst="flowChartMagneticDisk">
@@ -8230,7 +10717,7 @@
         </p:nvSpPr>
         <p:spPr bwMode="auto">
           <a:xfrm>
-            <a:off x="7036727" y="3225329"/>
+            <a:off x="7036727" y="3353345"/>
             <a:ext cx="688975" cy="593367"/>
           </a:xfrm>
           <a:prstGeom prst="flowChartMagneticDisk">
@@ -8388,7 +10875,7 @@
         </p:nvCxnSpPr>
         <p:spPr>
           <a:xfrm>
-            <a:off x="6481411" y="998070"/>
+            <a:off x="6481411" y="1126086"/>
             <a:ext cx="1592128" cy="8603"/>
           </a:xfrm>
           <a:prstGeom prst="straightConnector1">
@@ -8428,7 +10915,7 @@
         </p:nvGrpSpPr>
         <p:grpSpPr>
           <a:xfrm>
-            <a:off x="4351942" y="1589301"/>
+            <a:off x="4351942" y="1717317"/>
             <a:ext cx="3721597" cy="647518"/>
             <a:chOff x="4351942" y="2312058"/>
             <a:chExt cx="3721597" cy="647518"/>
@@ -8663,7 +11150,7 @@
                   <a:ea typeface="Yu Gothic" panose="020B0400000000000000" pitchFamily="34" charset="-128"/>
                   <a:cs typeface="Arial" panose="020B0604020202020204" pitchFamily="34" charset="0"/>
                 </a:rPr>
-                <a:t>Customers Service </a:t>
+                <a:t>Customers </a:t>
               </a:r>
               <a:r>
                 <a:rPr kumimoji="0" lang="en-US" altLang="en-IL" sz="1000" b="0" i="0" u="none" strike="noStrike" cap="none" normalizeH="0" baseline="0" dirty="0">
@@ -8678,37 +11165,7 @@
                   <a:ea typeface="Yu Gothic" panose="020B0400000000000000" pitchFamily="34" charset="-128"/>
                   <a:cs typeface="Arial" panose="020B0604020202020204" pitchFamily="34" charset="0"/>
                 </a:rPr>
-                <a:t>(</a:t>
-              </a:r>
-              <a:r>
-                <a:rPr kumimoji="0" lang="en-IL" altLang="en-IL" sz="1000" b="0" i="0" u="none" strike="noStrike" cap="none" normalizeH="0" baseline="0" dirty="0">
-                  <a:ln>
-                    <a:noFill/>
-                  </a:ln>
-                  <a:solidFill>
-                    <a:schemeClr val="tx1"/>
-                  </a:solidFill>
-                  <a:effectLst/>
-                  <a:latin typeface="Calibri" panose="020F0502020204030204" pitchFamily="34" charset="0"/>
-                  <a:ea typeface="Yu Gothic" panose="020B0400000000000000" pitchFamily="34" charset="-128"/>
-                  <a:cs typeface="Arial" panose="020B0604020202020204" pitchFamily="34" charset="0"/>
-                </a:rPr>
-                <a:t>Docker</a:t>
-              </a:r>
-              <a:r>
-                <a:rPr kumimoji="0" lang="en-US" altLang="en-IL" sz="1000" b="0" i="0" u="none" strike="noStrike" cap="none" normalizeH="0" baseline="0" dirty="0">
-                  <a:ln>
-                    <a:noFill/>
-                  </a:ln>
-                  <a:solidFill>
-                    <a:schemeClr val="tx1"/>
-                  </a:solidFill>
-                  <a:effectLst/>
-                  <a:latin typeface="Calibri" panose="020F0502020204030204" pitchFamily="34" charset="0"/>
-                  <a:ea typeface="Yu Gothic" panose="020B0400000000000000" pitchFamily="34" charset="-128"/>
-                  <a:cs typeface="Arial" panose="020B0604020202020204" pitchFamily="34" charset="0"/>
-                </a:rPr>
-                <a:t>)</a:t>
+                <a:t>Micro-Service</a:t>
               </a:r>
               <a:endParaRPr kumimoji="0" lang="en-IL" altLang="en-IL" sz="800" b="0" i="0" u="none" strike="noStrike" cap="none" normalizeH="0" baseline="0" dirty="0">
                 <a:ln>
@@ -8903,7 +11360,7 @@
         </p:nvGrpSpPr>
         <p:grpSpPr>
           <a:xfrm>
-            <a:off x="4351942" y="3713575"/>
+            <a:off x="4351942" y="3841591"/>
             <a:ext cx="3721597" cy="606743"/>
             <a:chOff x="4351942" y="3007201"/>
             <a:chExt cx="3721597" cy="606743"/>
@@ -9188,7 +11645,7 @@
                   <a:ea typeface="Yu Gothic" panose="020B0400000000000000" pitchFamily="34" charset="-128"/>
                   <a:cs typeface="Arial" panose="020B0604020202020204" pitchFamily="34" charset="0"/>
                 </a:rPr>
-                <a:t>Orders Service </a:t>
+                <a:t>Orders </a:t>
               </a:r>
               <a:r>
                 <a:rPr kumimoji="0" lang="en-US" altLang="en-IL" sz="1000" b="0" i="0" u="none" strike="noStrike" cap="none" normalizeH="0" baseline="0" dirty="0">
@@ -9203,7 +11660,7 @@
                   <a:ea typeface="Yu Gothic" panose="020B0400000000000000" pitchFamily="34" charset="-128"/>
                   <a:cs typeface="Arial" panose="020B0604020202020204" pitchFamily="34" charset="0"/>
                 </a:rPr>
-                <a:t>(</a:t>
+                <a:t>       Micro-</a:t>
               </a:r>
               <a:r>
                 <a:rPr kumimoji="0" lang="en-IL" altLang="en-IL" sz="1000" b="0" i="0" u="none" strike="noStrike" cap="none" normalizeH="0" baseline="0" dirty="0">
@@ -9218,22 +11675,7 @@
                   <a:ea typeface="Yu Gothic" panose="020B0400000000000000" pitchFamily="34" charset="-128"/>
                   <a:cs typeface="Arial" panose="020B0604020202020204" pitchFamily="34" charset="0"/>
                 </a:rPr>
-                <a:t>Docker</a:t>
-              </a:r>
-              <a:r>
-                <a:rPr kumimoji="0" lang="en-US" altLang="en-IL" sz="1000" b="0" i="0" u="none" strike="noStrike" cap="none" normalizeH="0" baseline="0" dirty="0">
-                  <a:ln>
-                    <a:noFill/>
-                  </a:ln>
-                  <a:solidFill>
-                    <a:schemeClr val="tx1"/>
-                  </a:solidFill>
-                  <a:effectLst/>
-                  <a:latin typeface="Calibri" panose="020F0502020204030204" pitchFamily="34" charset="0"/>
-                  <a:ea typeface="Yu Gothic" panose="020B0400000000000000" pitchFamily="34" charset="-128"/>
-                  <a:cs typeface="Arial" panose="020B0604020202020204" pitchFamily="34" charset="0"/>
-                </a:rPr>
-                <a:t>)</a:t>
+                <a:t>Service</a:t>
               </a:r>
               <a:endParaRPr kumimoji="0" lang="en-IL" altLang="en-IL" sz="800" b="0" i="0" u="none" strike="noStrike" cap="none" normalizeH="0" baseline="0" dirty="0">
                 <a:ln>
@@ -9366,7 +11808,7 @@
         </p:nvGrpSpPr>
         <p:grpSpPr>
           <a:xfrm>
-            <a:off x="4351942" y="4763230"/>
+            <a:off x="4351942" y="4891246"/>
             <a:ext cx="3705862" cy="534011"/>
             <a:chOff x="4351942" y="3721576"/>
             <a:chExt cx="3705862" cy="534011"/>
@@ -9660,7 +12102,7 @@
                   <a:ea typeface="Yu Gothic" panose="020B0400000000000000" pitchFamily="34" charset="-128"/>
                   <a:cs typeface="Arial" panose="020B0604020202020204" pitchFamily="34" charset="0"/>
                 </a:rPr>
-                <a:t>Logging Service </a:t>
+                <a:t>Logging </a:t>
               </a:r>
               <a:r>
                 <a:rPr kumimoji="0" lang="en-US" altLang="en-IL" sz="1000" b="0" i="0" u="none" strike="noStrike" cap="none" normalizeH="0" baseline="0" dirty="0">
@@ -9675,7 +12117,7 @@
                   <a:ea typeface="Yu Gothic" panose="020B0400000000000000" pitchFamily="34" charset="-128"/>
                   <a:cs typeface="Arial" panose="020B0604020202020204" pitchFamily="34" charset="0"/>
                 </a:rPr>
-                <a:t>(</a:t>
+                <a:t>      Micro-</a:t>
               </a:r>
               <a:r>
                 <a:rPr kumimoji="0" lang="en-IL" altLang="en-IL" sz="1000" b="0" i="0" u="none" strike="noStrike" cap="none" normalizeH="0" baseline="0" dirty="0">
@@ -9690,7 +12132,7 @@
                   <a:ea typeface="Yu Gothic" panose="020B0400000000000000" pitchFamily="34" charset="-128"/>
                   <a:cs typeface="Arial" panose="020B0604020202020204" pitchFamily="34" charset="0"/>
                 </a:rPr>
-                <a:t>Docker)</a:t>
+                <a:t>Service</a:t>
               </a:r>
               <a:endParaRPr kumimoji="0" lang="en-IL" altLang="en-IL" sz="800" b="0" i="0" u="none" strike="noStrike" cap="none" normalizeH="0" baseline="0" dirty="0">
                 <a:ln>
@@ -9829,7 +12271,7 @@
         </p:nvSpPr>
         <p:spPr bwMode="auto">
           <a:xfrm>
-            <a:off x="6971639" y="4197291"/>
+            <a:off x="6971639" y="4325307"/>
             <a:ext cx="754063" cy="539750"/>
           </a:xfrm>
           <a:prstGeom prst="roundRect">
@@ -9911,7 +12353,7 @@
         </p:nvCxnSpPr>
         <p:spPr>
           <a:xfrm flipV="1">
-            <a:off x="6501745" y="3522013"/>
+            <a:off x="6501745" y="3650029"/>
             <a:ext cx="534982" cy="342799"/>
           </a:xfrm>
           <a:prstGeom prst="straightConnector1">
@@ -9954,7 +12396,7 @@
         </p:nvCxnSpPr>
         <p:spPr>
           <a:xfrm flipV="1">
-            <a:off x="6484592" y="4467166"/>
+            <a:off x="6484592" y="4595182"/>
             <a:ext cx="487047" cy="378131"/>
           </a:xfrm>
           <a:prstGeom prst="straightConnector1">
@@ -9997,7 +12439,7 @@
         </p:nvCxnSpPr>
         <p:spPr>
           <a:xfrm flipV="1">
-            <a:off x="6470905" y="1399712"/>
+            <a:off x="6470905" y="1527728"/>
             <a:ext cx="546625" cy="330517"/>
           </a:xfrm>
           <a:prstGeom prst="straightConnector1">
@@ -10040,7 +12482,7 @@
         </p:nvCxnSpPr>
         <p:spPr>
           <a:xfrm flipV="1">
-            <a:off x="6435070" y="487852"/>
+            <a:off x="6435070" y="615868"/>
             <a:ext cx="669718" cy="284764"/>
           </a:xfrm>
           <a:prstGeom prst="straightConnector1">
@@ -10080,7 +12522,7 @@
         </p:nvGrpSpPr>
         <p:grpSpPr>
           <a:xfrm>
-            <a:off x="5354285" y="5949561"/>
+            <a:off x="5354285" y="6077577"/>
             <a:ext cx="2719254" cy="386116"/>
             <a:chOff x="5354285" y="5463786"/>
             <a:chExt cx="2719254" cy="386116"/>
@@ -10141,14 +12583,9 @@
                 <a:spcAft>
                   <a:spcPts val="800"/>
                 </a:spcAft>
-                <a:buNone/>
               </a:pPr>
               <a:r>
-                <a:rPr lang="en-US" sz="900" kern="1200" dirty="0">
-                  <a:solidFill>
-                    <a:srgbClr val="000000"/>
-                  </a:solidFill>
-                  <a:effectLst/>
+                <a:rPr lang="en-US" sz="1000" dirty="0">
                   <a:latin typeface="Calibri" panose="020F0502020204030204" pitchFamily="34" charset="0"/>
                   <a:ea typeface="Yu Gothic" panose="020B0400000000000000" pitchFamily="34" charset="-128"/>
                   <a:cs typeface="Arial" panose="020B0604020202020204" pitchFamily="34" charset="0"/>
@@ -10156,59 +12593,29 @@
                 <a:t>Publisher</a:t>
               </a:r>
               <a:r>
-                <a:rPr lang="en-IL" sz="900" kern="1200" dirty="0">
-                  <a:solidFill>
-                    <a:srgbClr val="000000"/>
-                  </a:solidFill>
-                  <a:effectLst/>
+                <a:rPr lang="en-IL" sz="1000" dirty="0">
                   <a:latin typeface="Calibri" panose="020F0502020204030204" pitchFamily="34" charset="0"/>
                   <a:ea typeface="Yu Gothic" panose="020B0400000000000000" pitchFamily="34" charset="-128"/>
                   <a:cs typeface="Arial" panose="020B0604020202020204" pitchFamily="34" charset="0"/>
                 </a:rPr>
-                <a:t> Service </a:t>
-              </a:r>
-              <a:r>
-                <a:rPr lang="en-US" sz="900" kern="1200" dirty="0">
-                  <a:solidFill>
-                    <a:srgbClr val="000000"/>
-                  </a:solidFill>
-                  <a:effectLst/>
+                <a:t> </a:t>
+              </a:r>
+              <a:r>
+                <a:rPr lang="en-US" sz="1000" dirty="0">
                   <a:latin typeface="Calibri" panose="020F0502020204030204" pitchFamily="34" charset="0"/>
                   <a:ea typeface="Yu Gothic" panose="020B0400000000000000" pitchFamily="34" charset="-128"/>
                   <a:cs typeface="Arial" panose="020B0604020202020204" pitchFamily="34" charset="0"/>
                 </a:rPr>
-                <a:t>(</a:t>
-              </a:r>
-              <a:r>
-                <a:rPr lang="en-IL" sz="900" kern="1200" dirty="0">
-                  <a:solidFill>
-                    <a:srgbClr val="000000"/>
-                  </a:solidFill>
-                  <a:effectLst/>
+                <a:t>       Micro-</a:t>
+              </a:r>
+              <a:r>
+                <a:rPr lang="en-IL" sz="1000" dirty="0">
                   <a:latin typeface="Calibri" panose="020F0502020204030204" pitchFamily="34" charset="0"/>
                   <a:ea typeface="Yu Gothic" panose="020B0400000000000000" pitchFamily="34" charset="-128"/>
                   <a:cs typeface="Arial" panose="020B0604020202020204" pitchFamily="34" charset="0"/>
                 </a:rPr>
-                <a:t>Docker</a:t>
-              </a:r>
-              <a:r>
-                <a:rPr lang="en-US" sz="900" kern="1200" dirty="0">
-                  <a:solidFill>
-                    <a:srgbClr val="000000"/>
-                  </a:solidFill>
-                  <a:effectLst/>
-                  <a:latin typeface="Calibri" panose="020F0502020204030204" pitchFamily="34" charset="0"/>
-                  <a:ea typeface="Yu Gothic" panose="020B0400000000000000" pitchFamily="34" charset="-128"/>
-                  <a:cs typeface="Arial" panose="020B0604020202020204" pitchFamily="34" charset="0"/>
-                </a:rPr>
-                <a:t>)</a:t>
-              </a:r>
-              <a:endParaRPr lang="en-IL" sz="1050" dirty="0">
-                <a:effectLst/>
-                <a:latin typeface="Calibri" panose="020F0502020204030204" pitchFamily="34" charset="0"/>
-                <a:ea typeface="Yu Gothic" panose="020B0400000000000000" pitchFamily="34" charset="-128"/>
-                <a:cs typeface="Arial" panose="020B0604020202020204" pitchFamily="34" charset="0"/>
-              </a:endParaRPr>
+                <a:t>Service</a:t>
+              </a:r>
             </a:p>
           </p:txBody>
         </p:sp>
@@ -10271,7 +12678,7 @@
         </p:nvSpPr>
         <p:spPr bwMode="auto">
           <a:xfrm>
-            <a:off x="5372524" y="5424168"/>
+            <a:off x="5372524" y="5552184"/>
             <a:ext cx="1142999" cy="386116"/>
           </a:xfrm>
           <a:prstGeom prst="roundRect">
@@ -10312,67 +12719,14 @@
               <a:buNone/>
             </a:pPr>
             <a:r>
-              <a:rPr lang="en-US" sz="900" kern="1200" dirty="0">
-                <a:solidFill>
-                  <a:srgbClr val="000000"/>
-                </a:solidFill>
-                <a:effectLst/>
+              <a:rPr lang="en-US" sz="1000" dirty="0">
                 <a:latin typeface="Calibri" panose="020F0502020204030204" pitchFamily="34" charset="0"/>
                 <a:ea typeface="Yu Gothic" panose="020B0400000000000000" pitchFamily="34" charset="-128"/>
                 <a:cs typeface="Arial" panose="020B0604020202020204" pitchFamily="34" charset="0"/>
               </a:rPr>
               <a:t>Notifications worker</a:t>
             </a:r>
-            <a:r>
-              <a:rPr lang="en-IL" sz="900" kern="1200" dirty="0">
-                <a:solidFill>
-                  <a:srgbClr val="000000"/>
-                </a:solidFill>
-                <a:effectLst/>
-                <a:latin typeface="Calibri" panose="020F0502020204030204" pitchFamily="34" charset="0"/>
-                <a:ea typeface="Yu Gothic" panose="020B0400000000000000" pitchFamily="34" charset="-128"/>
-                <a:cs typeface="Arial" panose="020B0604020202020204" pitchFamily="34" charset="0"/>
-              </a:rPr>
-              <a:t> </a:t>
-            </a:r>
-            <a:r>
-              <a:rPr lang="en-US" sz="900" kern="1200" dirty="0">
-                <a:solidFill>
-                  <a:srgbClr val="000000"/>
-                </a:solidFill>
-                <a:effectLst/>
-                <a:latin typeface="Calibri" panose="020F0502020204030204" pitchFamily="34" charset="0"/>
-                <a:ea typeface="Yu Gothic" panose="020B0400000000000000" pitchFamily="34" charset="-128"/>
-                <a:cs typeface="Arial" panose="020B0604020202020204" pitchFamily="34" charset="0"/>
-              </a:rPr>
-              <a:t>(</a:t>
-            </a:r>
-            <a:r>
-              <a:rPr lang="en-IL" sz="900" kern="1200" dirty="0">
-                <a:solidFill>
-                  <a:srgbClr val="000000"/>
-                </a:solidFill>
-                <a:effectLst/>
-                <a:latin typeface="Calibri" panose="020F0502020204030204" pitchFamily="34" charset="0"/>
-                <a:ea typeface="Yu Gothic" panose="020B0400000000000000" pitchFamily="34" charset="-128"/>
-                <a:cs typeface="Arial" panose="020B0604020202020204" pitchFamily="34" charset="0"/>
-              </a:rPr>
-              <a:t>Docker</a:t>
-            </a:r>
-            <a:r>
-              <a:rPr lang="en-US" sz="900" kern="1200" dirty="0">
-                <a:solidFill>
-                  <a:srgbClr val="000000"/>
-                </a:solidFill>
-                <a:effectLst/>
-                <a:latin typeface="Calibri" panose="020F0502020204030204" pitchFamily="34" charset="0"/>
-                <a:ea typeface="Yu Gothic" panose="020B0400000000000000" pitchFamily="34" charset="-128"/>
-                <a:cs typeface="Arial" panose="020B0604020202020204" pitchFamily="34" charset="0"/>
-              </a:rPr>
-              <a:t>)</a:t>
-            </a:r>
-            <a:endParaRPr lang="en-IL" sz="1050" dirty="0">
-              <a:effectLst/>
+            <a:endParaRPr lang="en-IL" sz="1000" dirty="0">
               <a:latin typeface="Calibri" panose="020F0502020204030204" pitchFamily="34" charset="0"/>
               <a:ea typeface="Yu Gothic" panose="020B0400000000000000" pitchFamily="34" charset="-128"/>
               <a:cs typeface="Arial" panose="020B0604020202020204" pitchFamily="34" charset="0"/>
@@ -10396,7 +12750,7 @@
         </p:nvCxnSpPr>
         <p:spPr>
           <a:xfrm>
-            <a:off x="6506671" y="5617226"/>
+            <a:off x="6506671" y="5745242"/>
             <a:ext cx="1576255" cy="0"/>
           </a:xfrm>
           <a:prstGeom prst="straightConnector1">
@@ -10438,7 +12792,7 @@
         </p:nvSpPr>
         <p:spPr bwMode="auto">
           <a:xfrm>
-            <a:off x="7014482" y="2188116"/>
+            <a:off x="7014482" y="2316132"/>
             <a:ext cx="688975" cy="593368"/>
           </a:xfrm>
           <a:prstGeom prst="flowChartMagneticDisk">
@@ -10597,7 +12951,7 @@
         </p:nvGrpSpPr>
         <p:grpSpPr>
           <a:xfrm>
-            <a:off x="4348894" y="2674389"/>
+            <a:off x="4348894" y="2802405"/>
             <a:ext cx="3721597" cy="647518"/>
             <a:chOff x="4351942" y="2312058"/>
             <a:chExt cx="3721597" cy="647518"/>
@@ -10850,7 +13204,15 @@
                   <a:ea typeface="Yu Gothic" panose="020B0400000000000000" pitchFamily="34" charset="-128"/>
                   <a:cs typeface="Arial" panose="020B0604020202020204" pitchFamily="34" charset="0"/>
                 </a:rPr>
-                <a:t> Service </a:t>
+                <a:t> </a:t>
+              </a:r>
+              <a:r>
+                <a:rPr lang="en-US" altLang="en-IL" sz="1000" dirty="0">
+                  <a:latin typeface="Calibri" panose="020F0502020204030204" pitchFamily="34" charset="0"/>
+                  <a:ea typeface="Yu Gothic" panose="020B0400000000000000" pitchFamily="34" charset="-128"/>
+                  <a:cs typeface="Arial" panose="020B0604020202020204" pitchFamily="34" charset="0"/>
+                </a:rPr>
+                <a:t>   </a:t>
               </a:r>
               <a:r>
                 <a:rPr kumimoji="0" lang="en-US" altLang="en-IL" sz="1000" b="0" i="0" u="none" strike="noStrike" cap="none" normalizeH="0" baseline="0" dirty="0">
@@ -10865,7 +13227,7 @@
                   <a:ea typeface="Yu Gothic" panose="020B0400000000000000" pitchFamily="34" charset="-128"/>
                   <a:cs typeface="Arial" panose="020B0604020202020204" pitchFamily="34" charset="0"/>
                 </a:rPr>
-                <a:t>(</a:t>
+                <a:t>Micro-</a:t>
               </a:r>
               <a:r>
                 <a:rPr kumimoji="0" lang="en-IL" altLang="en-IL" sz="1000" b="0" i="0" u="none" strike="noStrike" cap="none" normalizeH="0" baseline="0" dirty="0">
@@ -10880,22 +13242,7 @@
                   <a:ea typeface="Yu Gothic" panose="020B0400000000000000" pitchFamily="34" charset="-128"/>
                   <a:cs typeface="Arial" panose="020B0604020202020204" pitchFamily="34" charset="0"/>
                 </a:rPr>
-                <a:t>Docker</a:t>
-              </a:r>
-              <a:r>
-                <a:rPr kumimoji="0" lang="en-US" altLang="en-IL" sz="1000" b="0" i="0" u="none" strike="noStrike" cap="none" normalizeH="0" baseline="0" dirty="0">
-                  <a:ln>
-                    <a:noFill/>
-                  </a:ln>
-                  <a:solidFill>
-                    <a:schemeClr val="tx1"/>
-                  </a:solidFill>
-                  <a:effectLst/>
-                  <a:latin typeface="Calibri" panose="020F0502020204030204" pitchFamily="34" charset="0"/>
-                  <a:ea typeface="Yu Gothic" panose="020B0400000000000000" pitchFamily="34" charset="-128"/>
-                  <a:cs typeface="Arial" panose="020B0604020202020204" pitchFamily="34" charset="0"/>
-                </a:rPr>
-                <a:t>)</a:t>
+                <a:t>Service</a:t>
               </a:r>
               <a:endParaRPr kumimoji="0" lang="en-IL" altLang="en-IL" sz="800" b="0" i="0" u="none" strike="noStrike" cap="none" normalizeH="0" baseline="0" dirty="0">
                 <a:ln>
@@ -11093,7 +13440,7 @@
         </p:nvCxnSpPr>
         <p:spPr>
           <a:xfrm flipV="1">
-            <a:off x="6467857" y="2484800"/>
+            <a:off x="6467857" y="2612816"/>
             <a:ext cx="546625" cy="330517"/>
           </a:xfrm>
           <a:prstGeom prst="straightConnector1">
@@ -11119,6 +13466,56 @@
           </a:fontRef>
         </p:style>
       </p:cxnSp>
+      <p:sp>
+        <p:nvSpPr>
+          <p:cNvPr id="23" name="Rectangle 22">
+            <a:extLst>
+              <a:ext uri="{FF2B5EF4-FFF2-40B4-BE49-F238E27FC236}">
+                <a16:creationId xmlns:a16="http://schemas.microsoft.com/office/drawing/2014/main" id="{FA38DB61-8E23-E6C0-5B07-C56D010130C4}"/>
+              </a:ext>
+            </a:extLst>
+          </p:cNvPr>
+          <p:cNvSpPr/>
+          <p:nvPr/>
+        </p:nvSpPr>
+        <p:spPr>
+          <a:xfrm>
+            <a:off x="5119590" y="74315"/>
+            <a:ext cx="1801368" cy="314819"/>
+          </a:xfrm>
+          <a:prstGeom prst="rect">
+            <a:avLst/>
+          </a:prstGeom>
+        </p:spPr>
+        <p:style>
+          <a:lnRef idx="2">
+            <a:schemeClr val="accent1">
+              <a:shade val="15000"/>
+            </a:schemeClr>
+          </a:lnRef>
+          <a:fillRef idx="1">
+            <a:schemeClr val="accent1"/>
+          </a:fillRef>
+          <a:effectRef idx="0">
+            <a:schemeClr val="accent1"/>
+          </a:effectRef>
+          <a:fontRef idx="minor">
+            <a:schemeClr val="lt1"/>
+          </a:fontRef>
+        </p:style>
+        <p:txBody>
+          <a:bodyPr rtlCol="0" anchor="ctr"/>
+          <a:lstStyle/>
+          <a:p>
+            <a:pPr algn="ctr"/>
+            <a:r>
+              <a:rPr lang="en-US" dirty="0"/>
+              <a:t>Docker</a:t>
+            </a:r>
+            <a:endParaRPr lang="en-IL" dirty="0"/>
+          </a:p>
+        </p:txBody>
+      </p:sp>
     </p:spTree>
     <p:extLst>
       <p:ext uri="{BB962C8B-B14F-4D97-AF65-F5344CB8AC3E}">
@@ -11132,7 +13529,7 @@
 </p:sld>
 </file>
 
-<file path=ppt/slides/slide4.xml><?xml version="1.0" encoding="utf-8"?>
+<file path=ppt/slides/slide5.xml><?xml version="1.0" encoding="utf-8"?>
 <p:sld xmlns:a="http://schemas.openxmlformats.org/drawingml/2006/main" xmlns:r="http://schemas.openxmlformats.org/officeDocument/2006/relationships" xmlns:p="http://schemas.openxmlformats.org/presentationml/2006/main">
   <p:cSld>
     <p:spTree>
@@ -11192,7 +13589,7 @@
 </p:sld>
 </file>
 
-<file path=ppt/slides/slide5.xml><?xml version="1.0" encoding="utf-8"?>
+<file path=ppt/slides/slide6.xml><?xml version="1.0" encoding="utf-8"?>
 <p:sld xmlns:a="http://schemas.openxmlformats.org/drawingml/2006/main" xmlns:r="http://schemas.openxmlformats.org/officeDocument/2006/relationships" xmlns:p="http://schemas.openxmlformats.org/presentationml/2006/main">
   <p:cSld>
     <p:spTree>
@@ -11255,7 +13652,7 @@
 </p:sld>
 </file>
 
-<file path=ppt/slides/slide6.xml><?xml version="1.0" encoding="utf-8"?>
+<file path=ppt/slides/slide7.xml><?xml version="1.0" encoding="utf-8"?>
 <p:sld xmlns:a="http://schemas.openxmlformats.org/drawingml/2006/main" xmlns:r="http://schemas.openxmlformats.org/officeDocument/2006/relationships" xmlns:p="http://schemas.openxmlformats.org/presentationml/2006/main">
   <p:cSld>
     <p:spTree>
@@ -11321,7 +13718,7 @@
 </p:sld>
 </file>
 
-<file path=ppt/slides/slide7.xml><?xml version="1.0" encoding="utf-8"?>
+<file path=ppt/slides/slide8.xml><?xml version="1.0" encoding="utf-8"?>
 <p:sld xmlns:a="http://schemas.openxmlformats.org/drawingml/2006/main" xmlns:r="http://schemas.openxmlformats.org/officeDocument/2006/relationships" xmlns:p="http://schemas.openxmlformats.org/presentationml/2006/main">
   <p:cSld>
     <p:spTree>
@@ -11386,7 +13783,7 @@
 </p:sld>
 </file>
 
-<file path=ppt/slides/slide8.xml><?xml version="1.0" encoding="utf-8"?>
+<file path=ppt/slides/slide9.xml><?xml version="1.0" encoding="utf-8"?>
 <p:sld xmlns:a="http://schemas.openxmlformats.org/drawingml/2006/main" xmlns:r="http://schemas.openxmlformats.org/officeDocument/2006/relationships" xmlns:p="http://schemas.openxmlformats.org/presentationml/2006/main">
   <p:cSld>
     <p:spTree>
@@ -14249,1402 +16646,6 @@
     <p:extLst>
       <p:ext uri="{BB962C8B-B14F-4D97-AF65-F5344CB8AC3E}">
         <p14:creationId xmlns:p14="http://schemas.microsoft.com/office/powerpoint/2010/main" val="317202327"/>
-      </p:ext>
-    </p:extLst>
-  </p:cSld>
-  <p:clrMapOvr>
-    <a:masterClrMapping/>
-  </p:clrMapOvr>
-</p:sld>
-</file>
-
-<file path=ppt/slides/slide9.xml><?xml version="1.0" encoding="utf-8"?>
-<p:sld xmlns:a="http://schemas.openxmlformats.org/drawingml/2006/main" xmlns:r="http://schemas.openxmlformats.org/officeDocument/2006/relationships" xmlns:p="http://schemas.openxmlformats.org/presentationml/2006/main">
-  <p:cSld>
-    <p:spTree>
-      <p:nvGrpSpPr>
-        <p:cNvPr id="1" name="">
-          <a:extLst>
-            <a:ext uri="{FF2B5EF4-FFF2-40B4-BE49-F238E27FC236}">
-              <a16:creationId xmlns:a16="http://schemas.microsoft.com/office/drawing/2014/main" id="{8A80315B-977F-53A3-A176-4DBE858BEEDC}"/>
-            </a:ext>
-          </a:extLst>
-        </p:cNvPr>
-        <p:cNvGrpSpPr/>
-        <p:nvPr/>
-      </p:nvGrpSpPr>
-      <p:grpSpPr>
-        <a:xfrm>
-          <a:off x="0" y="0"/>
-          <a:ext cx="0" cy="0"/>
-          <a:chOff x="0" y="0"/>
-          <a:chExt cx="0" cy="0"/>
-        </a:xfrm>
-      </p:grpSpPr>
-      <p:grpSp>
-        <p:nvGrpSpPr>
-          <p:cNvPr id="4" name="Group 3">
-            <a:extLst>
-              <a:ext uri="{FF2B5EF4-FFF2-40B4-BE49-F238E27FC236}">
-                <a16:creationId xmlns:a16="http://schemas.microsoft.com/office/drawing/2014/main" id="{F388EE8C-03BB-2855-EA9E-24240F1CA08E}"/>
-              </a:ext>
-            </a:extLst>
-          </p:cNvPr>
-          <p:cNvGrpSpPr/>
-          <p:nvPr/>
-        </p:nvGrpSpPr>
-        <p:grpSpPr>
-          <a:xfrm>
-            <a:off x="950614" y="876860"/>
-            <a:ext cx="2031057" cy="1217532"/>
-            <a:chOff x="2037028" y="1176951"/>
-            <a:chExt cx="3108185" cy="2252047"/>
-          </a:xfrm>
-        </p:grpSpPr>
-        <p:sp>
-          <p:nvSpPr>
-            <p:cNvPr id="2" name="Rectangle 1">
-              <a:extLst>
-                <a:ext uri="{FF2B5EF4-FFF2-40B4-BE49-F238E27FC236}">
-                  <a16:creationId xmlns:a16="http://schemas.microsoft.com/office/drawing/2014/main" id="{8E274EA6-9412-5A4A-0059-BF214D4EF3AB}"/>
-                </a:ext>
-              </a:extLst>
-            </p:cNvPr>
-            <p:cNvSpPr/>
-            <p:nvPr/>
-          </p:nvSpPr>
-          <p:spPr>
-            <a:xfrm>
-              <a:off x="2037029" y="1176951"/>
-              <a:ext cx="3108183" cy="367079"/>
-            </a:xfrm>
-            <a:prstGeom prst="rect">
-              <a:avLst/>
-            </a:prstGeom>
-          </p:spPr>
-          <p:style>
-            <a:lnRef idx="2">
-              <a:schemeClr val="accent4">
-                <a:shade val="15000"/>
-              </a:schemeClr>
-            </a:lnRef>
-            <a:fillRef idx="1">
-              <a:schemeClr val="accent4"/>
-            </a:fillRef>
-            <a:effectRef idx="0">
-              <a:schemeClr val="accent4"/>
-            </a:effectRef>
-            <a:fontRef idx="minor">
-              <a:schemeClr val="lt1"/>
-            </a:fontRef>
-          </p:style>
-          <p:txBody>
-            <a:bodyPr rtlCol="0" anchor="ctr"/>
-            <a:lstStyle/>
-            <a:p>
-              <a:pPr algn="ctr"/>
-              <a:r>
-                <a:rPr lang="en-US" sz="1200" dirty="0"/>
-                <a:t>User</a:t>
-              </a:r>
-              <a:endParaRPr lang="en-IL" sz="1200" dirty="0"/>
-            </a:p>
-          </p:txBody>
-        </p:sp>
-        <p:sp>
-          <p:nvSpPr>
-            <p:cNvPr id="3" name="Rectangle 2">
-              <a:extLst>
-                <a:ext uri="{FF2B5EF4-FFF2-40B4-BE49-F238E27FC236}">
-                  <a16:creationId xmlns:a16="http://schemas.microsoft.com/office/drawing/2014/main" id="{7CE5B30F-F7B8-C9E2-0918-D79F11D0F812}"/>
-                </a:ext>
-              </a:extLst>
-            </p:cNvPr>
-            <p:cNvSpPr/>
-            <p:nvPr/>
-          </p:nvSpPr>
-          <p:spPr>
-            <a:xfrm>
-              <a:off x="2037028" y="1548759"/>
-              <a:ext cx="3108185" cy="1880239"/>
-            </a:xfrm>
-            <a:prstGeom prst="rect">
-              <a:avLst/>
-            </a:prstGeom>
-            <a:noFill/>
-          </p:spPr>
-          <p:style>
-            <a:lnRef idx="2">
-              <a:schemeClr val="accent1">
-                <a:shade val="15000"/>
-              </a:schemeClr>
-            </a:lnRef>
-            <a:fillRef idx="1">
-              <a:schemeClr val="accent1"/>
-            </a:fillRef>
-            <a:effectRef idx="0">
-              <a:schemeClr val="accent1"/>
-            </a:effectRef>
-            <a:fontRef idx="minor">
-              <a:schemeClr val="lt1"/>
-            </a:fontRef>
-          </p:style>
-          <p:txBody>
-            <a:bodyPr rtlCol="0" anchor="t"/>
-            <a:lstStyle/>
-            <a:p>
-              <a:r>
-                <a:rPr lang="en-US" sz="1200" b="1" dirty="0" err="1">
-                  <a:solidFill>
-                    <a:schemeClr val="tx1"/>
-                  </a:solidFill>
-                </a:rPr>
-                <a:t>User_Id</a:t>
-              </a:r>
-              <a:r>
-                <a:rPr lang="en-US" sz="1200" b="1" dirty="0">
-                  <a:solidFill>
-                    <a:schemeClr val="tx1"/>
-                  </a:solidFill>
-                </a:rPr>
-                <a:t> </a:t>
-              </a:r>
-              <a:r>
-                <a:rPr lang="en-US" sz="1200" dirty="0">
-                  <a:solidFill>
-                    <a:schemeClr val="tx1"/>
-                  </a:solidFill>
-                </a:rPr>
-                <a:t>: </a:t>
-              </a:r>
-              <a:r>
-                <a:rPr lang="en-US" sz="1200" dirty="0" err="1">
-                  <a:solidFill>
-                    <a:schemeClr val="tx1"/>
-                  </a:solidFill>
-                </a:rPr>
-                <a:t>Guid</a:t>
-              </a:r>
-              <a:r>
-                <a:rPr lang="en-US" sz="1200" dirty="0">
-                  <a:solidFill>
-                    <a:schemeClr val="tx1"/>
-                  </a:solidFill>
-                </a:rPr>
-                <a:t> (PK)</a:t>
-              </a:r>
-            </a:p>
-            <a:p>
-              <a:r>
-                <a:rPr lang="en-US" sz="1200" dirty="0">
-                  <a:solidFill>
-                    <a:schemeClr val="tx1"/>
-                  </a:solidFill>
-                </a:rPr>
-                <a:t>Name : string</a:t>
-              </a:r>
-            </a:p>
-            <a:p>
-              <a:r>
-                <a:rPr lang="en-US" sz="1200" dirty="0">
-                  <a:solidFill>
-                    <a:schemeClr val="tx1"/>
-                  </a:solidFill>
-                </a:rPr>
-                <a:t>Email : string</a:t>
-              </a:r>
-            </a:p>
-            <a:p>
-              <a:r>
-                <a:rPr lang="en-US" sz="1200" dirty="0">
-                  <a:solidFill>
-                    <a:schemeClr val="tx1"/>
-                  </a:solidFill>
-                </a:rPr>
-                <a:t>Password : </a:t>
-              </a:r>
-              <a:r>
-                <a:rPr lang="en-US" sz="1200" dirty="0" err="1">
-                  <a:solidFill>
-                    <a:schemeClr val="tx1"/>
-                  </a:solidFill>
-                </a:rPr>
-                <a:t>Password_Hash</a:t>
-              </a:r>
-              <a:endParaRPr lang="en-US" sz="1200" dirty="0">
-                <a:solidFill>
-                  <a:schemeClr val="tx1"/>
-                </a:solidFill>
-              </a:endParaRPr>
-            </a:p>
-            <a:p>
-              <a:r>
-                <a:rPr lang="en-US" sz="1200" dirty="0" err="1">
-                  <a:solidFill>
-                    <a:schemeClr val="tx1"/>
-                  </a:solidFill>
-                </a:rPr>
-                <a:t>Created_At</a:t>
-              </a:r>
-              <a:r>
-                <a:rPr lang="en-US" sz="1200" dirty="0">
-                  <a:solidFill>
-                    <a:schemeClr val="tx1"/>
-                  </a:solidFill>
-                </a:rPr>
-                <a:t> : datetime</a:t>
-              </a:r>
-            </a:p>
-            <a:p>
-              <a:endParaRPr lang="en-US" sz="1200" dirty="0">
-                <a:solidFill>
-                  <a:schemeClr val="tx1"/>
-                </a:solidFill>
-              </a:endParaRPr>
-            </a:p>
-            <a:p>
-              <a:endParaRPr lang="en-US" sz="1200" dirty="0">
-                <a:solidFill>
-                  <a:schemeClr val="tx1"/>
-                </a:solidFill>
-              </a:endParaRPr>
-            </a:p>
-            <a:p>
-              <a:endParaRPr lang="en-US" sz="1200" dirty="0">
-                <a:solidFill>
-                  <a:schemeClr val="tx1"/>
-                </a:solidFill>
-              </a:endParaRPr>
-            </a:p>
-            <a:p>
-              <a:endParaRPr lang="en-US" sz="1200" dirty="0">
-                <a:solidFill>
-                  <a:schemeClr val="tx1"/>
-                </a:solidFill>
-              </a:endParaRPr>
-            </a:p>
-            <a:p>
-              <a:endParaRPr lang="en-US" sz="1200" dirty="0">
-                <a:solidFill>
-                  <a:schemeClr val="tx1"/>
-                </a:solidFill>
-              </a:endParaRPr>
-            </a:p>
-            <a:p>
-              <a:endParaRPr lang="en-IL" sz="1200" dirty="0"/>
-            </a:p>
-          </p:txBody>
-        </p:sp>
-      </p:grpSp>
-      <p:sp>
-        <p:nvSpPr>
-          <p:cNvPr id="35" name="Rectangle 34">
-            <a:extLst>
-              <a:ext uri="{FF2B5EF4-FFF2-40B4-BE49-F238E27FC236}">
-                <a16:creationId xmlns:a16="http://schemas.microsoft.com/office/drawing/2014/main" id="{459601A3-99ED-B43C-218A-119DF3434E31}"/>
-              </a:ext>
-            </a:extLst>
-          </p:cNvPr>
-          <p:cNvSpPr/>
-          <p:nvPr/>
-        </p:nvSpPr>
-        <p:spPr>
-          <a:xfrm>
-            <a:off x="4700171" y="76200"/>
-            <a:ext cx="3385068" cy="466687"/>
-          </a:xfrm>
-          <a:prstGeom prst="rect">
-            <a:avLst/>
-          </a:prstGeom>
-          <a:solidFill>
-            <a:schemeClr val="accent2">
-              <a:lumMod val="40000"/>
-              <a:lumOff val="60000"/>
-            </a:schemeClr>
-          </a:solidFill>
-        </p:spPr>
-        <p:style>
-          <a:lnRef idx="2">
-            <a:schemeClr val="accent1">
-              <a:shade val="15000"/>
-            </a:schemeClr>
-          </a:lnRef>
-          <a:fillRef idx="1">
-            <a:schemeClr val="accent1"/>
-          </a:fillRef>
-          <a:effectRef idx="0">
-            <a:schemeClr val="accent1"/>
-          </a:effectRef>
-          <a:fontRef idx="minor">
-            <a:schemeClr val="lt1"/>
-          </a:fontRef>
-        </p:style>
-        <p:txBody>
-          <a:bodyPr rtlCol="0" anchor="ctr"/>
-          <a:lstStyle/>
-          <a:p>
-            <a:pPr algn="ctr"/>
-            <a:r>
-              <a:rPr lang="en-US" dirty="0">
-                <a:solidFill>
-                  <a:schemeClr val="tx1"/>
-                </a:solidFill>
-              </a:rPr>
-              <a:t>User Data Model</a:t>
-            </a:r>
-            <a:endParaRPr lang="en-IL" dirty="0">
-              <a:solidFill>
-                <a:schemeClr val="tx1"/>
-              </a:solidFill>
-            </a:endParaRPr>
-          </a:p>
-        </p:txBody>
-      </p:sp>
-      <p:grpSp>
-        <p:nvGrpSpPr>
-          <p:cNvPr id="70" name="Group 69">
-            <a:extLst>
-              <a:ext uri="{FF2B5EF4-FFF2-40B4-BE49-F238E27FC236}">
-                <a16:creationId xmlns:a16="http://schemas.microsoft.com/office/drawing/2014/main" id="{85825C91-5ADB-214A-91A8-802C8048308B}"/>
-              </a:ext>
-            </a:extLst>
-          </p:cNvPr>
-          <p:cNvGrpSpPr/>
-          <p:nvPr/>
-        </p:nvGrpSpPr>
-        <p:grpSpPr>
-          <a:xfrm>
-            <a:off x="3915009" y="2201940"/>
-            <a:ext cx="2732853" cy="1567554"/>
-            <a:chOff x="2029809" y="1176950"/>
-            <a:chExt cx="2136619" cy="3410260"/>
-          </a:xfrm>
-        </p:grpSpPr>
-        <p:sp>
-          <p:nvSpPr>
-            <p:cNvPr id="71" name="Rectangle 70">
-              <a:extLst>
-                <a:ext uri="{FF2B5EF4-FFF2-40B4-BE49-F238E27FC236}">
-                  <a16:creationId xmlns:a16="http://schemas.microsoft.com/office/drawing/2014/main" id="{CB0DD690-FD61-CD5A-E240-84522BE96D76}"/>
-                </a:ext>
-              </a:extLst>
-            </p:cNvPr>
-            <p:cNvSpPr/>
-            <p:nvPr/>
-          </p:nvSpPr>
-          <p:spPr>
-            <a:xfrm>
-              <a:off x="2029809" y="1176950"/>
-              <a:ext cx="2136619" cy="767730"/>
-            </a:xfrm>
-            <a:prstGeom prst="rect">
-              <a:avLst/>
-            </a:prstGeom>
-          </p:spPr>
-          <p:style>
-            <a:lnRef idx="2">
-              <a:schemeClr val="accent4">
-                <a:shade val="15000"/>
-              </a:schemeClr>
-            </a:lnRef>
-            <a:fillRef idx="1">
-              <a:schemeClr val="accent4"/>
-            </a:fillRef>
-            <a:effectRef idx="0">
-              <a:schemeClr val="accent4"/>
-            </a:effectRef>
-            <a:fontRef idx="minor">
-              <a:schemeClr val="lt1"/>
-            </a:fontRef>
-          </p:style>
-          <p:txBody>
-            <a:bodyPr rtlCol="0" anchor="ctr"/>
-            <a:lstStyle/>
-            <a:p>
-              <a:pPr algn="ctr"/>
-              <a:r>
-                <a:rPr lang="en-US" sz="1200" dirty="0" err="1"/>
-                <a:t>User_History</a:t>
-              </a:r>
-              <a:endParaRPr lang="en-IL" sz="1200" dirty="0"/>
-            </a:p>
-          </p:txBody>
-        </p:sp>
-        <p:sp>
-          <p:nvSpPr>
-            <p:cNvPr id="72" name="Rectangle 71">
-              <a:extLst>
-                <a:ext uri="{FF2B5EF4-FFF2-40B4-BE49-F238E27FC236}">
-                  <a16:creationId xmlns:a16="http://schemas.microsoft.com/office/drawing/2014/main" id="{6958FC87-2FE8-1E33-9044-CAD0A96A1188}"/>
-                </a:ext>
-              </a:extLst>
-            </p:cNvPr>
-            <p:cNvSpPr/>
-            <p:nvPr/>
-          </p:nvSpPr>
-          <p:spPr>
-            <a:xfrm>
-              <a:off x="2029810" y="1944679"/>
-              <a:ext cx="2136618" cy="2642531"/>
-            </a:xfrm>
-            <a:prstGeom prst="rect">
-              <a:avLst/>
-            </a:prstGeom>
-            <a:noFill/>
-          </p:spPr>
-          <p:style>
-            <a:lnRef idx="2">
-              <a:schemeClr val="accent1">
-                <a:shade val="15000"/>
-              </a:schemeClr>
-            </a:lnRef>
-            <a:fillRef idx="1">
-              <a:schemeClr val="accent1"/>
-            </a:fillRef>
-            <a:effectRef idx="0">
-              <a:schemeClr val="accent1"/>
-            </a:effectRef>
-            <a:fontRef idx="minor">
-              <a:schemeClr val="lt1"/>
-            </a:fontRef>
-          </p:style>
-          <p:txBody>
-            <a:bodyPr rtlCol="0" anchor="t"/>
-            <a:lstStyle/>
-            <a:p>
-              <a:r>
-                <a:rPr lang="en-US" sz="1200" b="1" dirty="0" err="1">
-                  <a:solidFill>
-                    <a:schemeClr val="tx1"/>
-                  </a:solidFill>
-                </a:rPr>
-                <a:t>History_Id</a:t>
-              </a:r>
-              <a:r>
-                <a:rPr lang="en-US" sz="1200" dirty="0">
-                  <a:solidFill>
-                    <a:schemeClr val="tx1"/>
-                  </a:solidFill>
-                </a:rPr>
-                <a:t> : int</a:t>
-              </a:r>
-            </a:p>
-            <a:p>
-              <a:r>
-                <a:rPr lang="en-US" sz="1200" dirty="0" err="1">
-                  <a:solidFill>
-                    <a:schemeClr val="tx1"/>
-                  </a:solidFill>
-                </a:rPr>
-                <a:t>User_Id</a:t>
-              </a:r>
-              <a:r>
-                <a:rPr lang="en-US" sz="1200" dirty="0">
-                  <a:solidFill>
-                    <a:schemeClr val="tx1"/>
-                  </a:solidFill>
-                </a:rPr>
-                <a:t> (FK) : int</a:t>
-              </a:r>
-            </a:p>
-            <a:p>
-              <a:r>
-                <a:rPr lang="en-US" sz="1200" dirty="0" err="1">
-                  <a:solidFill>
-                    <a:schemeClr val="tx1"/>
-                  </a:solidFill>
-                </a:rPr>
-                <a:t>Last_Login_Date</a:t>
-              </a:r>
-              <a:r>
-                <a:rPr lang="en-US" sz="1200" dirty="0">
-                  <a:solidFill>
-                    <a:schemeClr val="tx1"/>
-                  </a:solidFill>
-                </a:rPr>
-                <a:t> : datetime</a:t>
-              </a:r>
-            </a:p>
-            <a:p>
-              <a:r>
-                <a:rPr lang="en-US" sz="1200" dirty="0" err="1">
-                  <a:solidFill>
-                    <a:schemeClr val="tx1"/>
-                  </a:solidFill>
-                </a:rPr>
-                <a:t>Login_IP</a:t>
-              </a:r>
-              <a:r>
-                <a:rPr lang="en-US" sz="1200" dirty="0">
-                  <a:solidFill>
-                    <a:schemeClr val="tx1"/>
-                  </a:solidFill>
-                </a:rPr>
-                <a:t> : string</a:t>
-              </a:r>
-            </a:p>
-            <a:p>
-              <a:r>
-                <a:rPr lang="en-US" sz="1200" dirty="0" err="1">
-                  <a:solidFill>
-                    <a:schemeClr val="tx1"/>
-                  </a:solidFill>
-                </a:rPr>
-                <a:t>Login_Device</a:t>
-              </a:r>
-              <a:r>
-                <a:rPr lang="en-US" sz="1200" dirty="0">
-                  <a:solidFill>
-                    <a:schemeClr val="tx1"/>
-                  </a:solidFill>
-                </a:rPr>
-                <a:t> : string</a:t>
-              </a:r>
-            </a:p>
-            <a:p>
-              <a:r>
-                <a:rPr lang="en-US" sz="1200" dirty="0" err="1">
-                  <a:solidFill>
-                    <a:schemeClr val="tx1"/>
-                  </a:solidFill>
-                </a:rPr>
-                <a:t>Login_Status</a:t>
-              </a:r>
-              <a:r>
-                <a:rPr lang="en-US" sz="1200" dirty="0">
-                  <a:solidFill>
-                    <a:schemeClr val="tx1"/>
-                  </a:solidFill>
-                </a:rPr>
-                <a:t> : </a:t>
-              </a:r>
-              <a:r>
-                <a:rPr lang="en-US" sz="1200" dirty="0" err="1">
-                  <a:solidFill>
-                    <a:schemeClr val="tx1"/>
-                  </a:solidFill>
-                </a:rPr>
-                <a:t>enum</a:t>
-              </a:r>
-              <a:r>
-                <a:rPr lang="en-US" sz="1200" dirty="0">
-                  <a:solidFill>
-                    <a:schemeClr val="tx1"/>
-                  </a:solidFill>
-                </a:rPr>
-                <a:t> (Success, Failure)</a:t>
-              </a:r>
-            </a:p>
-            <a:p>
-              <a:endParaRPr lang="en-IL" sz="1200" dirty="0"/>
-            </a:p>
-          </p:txBody>
-        </p:sp>
-      </p:grpSp>
-      <p:sp>
-        <p:nvSpPr>
-          <p:cNvPr id="89" name="Rectangle 88">
-            <a:extLst>
-              <a:ext uri="{FF2B5EF4-FFF2-40B4-BE49-F238E27FC236}">
-                <a16:creationId xmlns:a16="http://schemas.microsoft.com/office/drawing/2014/main" id="{627045B2-93A6-09AC-5F94-A49DBC3D9084}"/>
-              </a:ext>
-            </a:extLst>
-          </p:cNvPr>
-          <p:cNvSpPr/>
-          <p:nvPr/>
-        </p:nvSpPr>
-        <p:spPr>
-          <a:xfrm>
-            <a:off x="3447923" y="2881391"/>
-            <a:ext cx="391107" cy="280774"/>
-          </a:xfrm>
-          <a:prstGeom prst="rect">
-            <a:avLst/>
-          </a:prstGeom>
-          <a:noFill/>
-          <a:ln>
-            <a:noFill/>
-          </a:ln>
-        </p:spPr>
-        <p:style>
-          <a:lnRef idx="2">
-            <a:schemeClr val="accent1">
-              <a:shade val="15000"/>
-            </a:schemeClr>
-          </a:lnRef>
-          <a:fillRef idx="1">
-            <a:schemeClr val="accent1"/>
-          </a:fillRef>
-          <a:effectRef idx="0">
-            <a:schemeClr val="accent1"/>
-          </a:effectRef>
-          <a:fontRef idx="minor">
-            <a:schemeClr val="lt1"/>
-          </a:fontRef>
-        </p:style>
-        <p:txBody>
-          <a:bodyPr rtlCol="0" anchor="ctr"/>
-          <a:lstStyle/>
-          <a:p>
-            <a:pPr algn="ctr"/>
-            <a:r>
-              <a:rPr lang="en-US" sz="1000" dirty="0">
-                <a:solidFill>
-                  <a:schemeClr val="tx1"/>
-                </a:solidFill>
-              </a:rPr>
-              <a:t>1:N</a:t>
-            </a:r>
-            <a:endParaRPr lang="en-IL" sz="1000" dirty="0">
-              <a:solidFill>
-                <a:schemeClr val="tx1"/>
-              </a:solidFill>
-            </a:endParaRPr>
-          </a:p>
-        </p:txBody>
-      </p:sp>
-      <p:cxnSp>
-        <p:nvCxnSpPr>
-          <p:cNvPr id="9" name="Connector: Elbow 8">
-            <a:extLst>
-              <a:ext uri="{FF2B5EF4-FFF2-40B4-BE49-F238E27FC236}">
-                <a16:creationId xmlns:a16="http://schemas.microsoft.com/office/drawing/2014/main" id="{42FF7E0B-4CCA-3C60-C4C6-9A6F35BC89B0}"/>
-              </a:ext>
-            </a:extLst>
-          </p:cNvPr>
-          <p:cNvCxnSpPr>
-            <a:cxnSpLocks/>
-            <a:stCxn id="3" idx="2"/>
-            <a:endCxn id="72" idx="1"/>
-          </p:cNvCxnSpPr>
-          <p:nvPr/>
-        </p:nvCxnSpPr>
-        <p:spPr>
-          <a:xfrm rot="16200000" flipH="1">
-            <a:off x="2406690" y="1653844"/>
-            <a:ext cx="1067772" cy="1948867"/>
-          </a:xfrm>
-          <a:prstGeom prst="bentConnector2">
-            <a:avLst/>
-          </a:prstGeom>
-          <a:ln>
-            <a:tailEnd type="triangle"/>
-          </a:ln>
-        </p:spPr>
-        <p:style>
-          <a:lnRef idx="2">
-            <a:schemeClr val="accent1"/>
-          </a:lnRef>
-          <a:fillRef idx="0">
-            <a:schemeClr val="accent1"/>
-          </a:fillRef>
-          <a:effectRef idx="1">
-            <a:schemeClr val="accent1"/>
-          </a:effectRef>
-          <a:fontRef idx="minor">
-            <a:schemeClr val="tx1"/>
-          </a:fontRef>
-        </p:style>
-      </p:cxnSp>
-      <p:grpSp>
-        <p:nvGrpSpPr>
-          <p:cNvPr id="13" name="Group 12">
-            <a:extLst>
-              <a:ext uri="{FF2B5EF4-FFF2-40B4-BE49-F238E27FC236}">
-                <a16:creationId xmlns:a16="http://schemas.microsoft.com/office/drawing/2014/main" id="{38B2C072-BA52-75BE-C978-7F367426DBF5}"/>
-              </a:ext>
-            </a:extLst>
-          </p:cNvPr>
-          <p:cNvGrpSpPr/>
-          <p:nvPr/>
-        </p:nvGrpSpPr>
-        <p:grpSpPr>
-          <a:xfrm>
-            <a:off x="3915009" y="1180507"/>
-            <a:ext cx="3773801" cy="915347"/>
-            <a:chOff x="2037028" y="1176951"/>
-            <a:chExt cx="3108185" cy="2252047"/>
-          </a:xfrm>
-        </p:grpSpPr>
-        <p:sp>
-          <p:nvSpPr>
-            <p:cNvPr id="16" name="Rectangle 15">
-              <a:extLst>
-                <a:ext uri="{FF2B5EF4-FFF2-40B4-BE49-F238E27FC236}">
-                  <a16:creationId xmlns:a16="http://schemas.microsoft.com/office/drawing/2014/main" id="{3367DFCA-8375-FD2D-26A5-D7CD84615DA6}"/>
-                </a:ext>
-              </a:extLst>
-            </p:cNvPr>
-            <p:cNvSpPr/>
-            <p:nvPr/>
-          </p:nvSpPr>
-          <p:spPr>
-            <a:xfrm>
-              <a:off x="2037029" y="1176951"/>
-              <a:ext cx="3108183" cy="766975"/>
-            </a:xfrm>
-            <a:prstGeom prst="rect">
-              <a:avLst/>
-            </a:prstGeom>
-          </p:spPr>
-          <p:style>
-            <a:lnRef idx="2">
-              <a:schemeClr val="accent4">
-                <a:shade val="15000"/>
-              </a:schemeClr>
-            </a:lnRef>
-            <a:fillRef idx="1">
-              <a:schemeClr val="accent4"/>
-            </a:fillRef>
-            <a:effectRef idx="0">
-              <a:schemeClr val="accent4"/>
-            </a:effectRef>
-            <a:fontRef idx="minor">
-              <a:schemeClr val="lt1"/>
-            </a:fontRef>
-          </p:style>
-          <p:txBody>
-            <a:bodyPr rtlCol="0" anchor="ctr"/>
-            <a:lstStyle/>
-            <a:p>
-              <a:pPr algn="ctr"/>
-              <a:r>
-                <a:rPr lang="en-US" sz="1200" dirty="0" err="1"/>
-                <a:t>User_Roles</a:t>
-              </a:r>
-              <a:endParaRPr lang="en-IL" sz="1200" dirty="0"/>
-            </a:p>
-          </p:txBody>
-        </p:sp>
-        <p:sp>
-          <p:nvSpPr>
-            <p:cNvPr id="17" name="Rectangle 16">
-              <a:extLst>
-                <a:ext uri="{FF2B5EF4-FFF2-40B4-BE49-F238E27FC236}">
-                  <a16:creationId xmlns:a16="http://schemas.microsoft.com/office/drawing/2014/main" id="{00980417-C13A-3807-0F84-31D7977CDB74}"/>
-                </a:ext>
-              </a:extLst>
-            </p:cNvPr>
-            <p:cNvSpPr/>
-            <p:nvPr/>
-          </p:nvSpPr>
-          <p:spPr>
-            <a:xfrm>
-              <a:off x="2037028" y="1943926"/>
-              <a:ext cx="3108185" cy="1485072"/>
-            </a:xfrm>
-            <a:prstGeom prst="rect">
-              <a:avLst/>
-            </a:prstGeom>
-            <a:noFill/>
-          </p:spPr>
-          <p:style>
-            <a:lnRef idx="2">
-              <a:schemeClr val="accent1">
-                <a:shade val="15000"/>
-              </a:schemeClr>
-            </a:lnRef>
-            <a:fillRef idx="1">
-              <a:schemeClr val="accent1"/>
-            </a:fillRef>
-            <a:effectRef idx="0">
-              <a:schemeClr val="accent1"/>
-            </a:effectRef>
-            <a:fontRef idx="minor">
-              <a:schemeClr val="lt1"/>
-            </a:fontRef>
-          </p:style>
-          <p:txBody>
-            <a:bodyPr rtlCol="0" anchor="t"/>
-            <a:lstStyle/>
-            <a:p>
-              <a:r>
-                <a:rPr lang="en-US" sz="1200" b="1" dirty="0" err="1">
-                  <a:solidFill>
-                    <a:schemeClr val="tx1"/>
-                  </a:solidFill>
-                </a:rPr>
-                <a:t>Role_Id</a:t>
-              </a:r>
-              <a:r>
-                <a:rPr lang="en-US" sz="1200" b="1" dirty="0">
-                  <a:solidFill>
-                    <a:schemeClr val="tx1"/>
-                  </a:solidFill>
-                </a:rPr>
-                <a:t> </a:t>
-              </a:r>
-              <a:r>
-                <a:rPr lang="en-US" sz="1200" dirty="0">
-                  <a:solidFill>
-                    <a:schemeClr val="tx1"/>
-                  </a:solidFill>
-                </a:rPr>
-                <a:t>: </a:t>
-              </a:r>
-              <a:r>
-                <a:rPr lang="en-US" sz="1200" dirty="0" err="1">
-                  <a:solidFill>
-                    <a:schemeClr val="tx1"/>
-                  </a:solidFill>
-                </a:rPr>
-                <a:t>Guid</a:t>
-              </a:r>
-              <a:r>
-                <a:rPr lang="en-US" sz="1200" dirty="0">
-                  <a:solidFill>
-                    <a:schemeClr val="tx1"/>
-                  </a:solidFill>
-                </a:rPr>
-                <a:t> (PK)</a:t>
-              </a:r>
-            </a:p>
-            <a:p>
-              <a:r>
-                <a:rPr lang="en-US" sz="1200" dirty="0" err="1">
-                  <a:solidFill>
-                    <a:schemeClr val="tx1"/>
-                  </a:solidFill>
-                </a:rPr>
-                <a:t>RoleName</a:t>
-              </a:r>
-              <a:r>
-                <a:rPr lang="en-US" sz="1200" dirty="0">
-                  <a:solidFill>
-                    <a:schemeClr val="tx1"/>
-                  </a:solidFill>
-                </a:rPr>
-                <a:t> : </a:t>
-              </a:r>
-              <a:r>
-                <a:rPr lang="en-US" sz="1200" dirty="0" err="1">
-                  <a:solidFill>
-                    <a:schemeClr val="tx1"/>
-                  </a:solidFill>
-                </a:rPr>
-                <a:t>enum</a:t>
-              </a:r>
-              <a:r>
-                <a:rPr lang="en-US" sz="1200" dirty="0">
-                  <a:solidFill>
-                    <a:schemeClr val="tx1"/>
-                  </a:solidFill>
-                </a:rPr>
-                <a:t> (User = 0, Admin = 1, </a:t>
-              </a:r>
-              <a:r>
-                <a:rPr lang="en-US" sz="1200" dirty="0" err="1">
-                  <a:solidFill>
-                    <a:schemeClr val="tx1"/>
-                  </a:solidFill>
-                </a:rPr>
-                <a:t>SuperUser</a:t>
-              </a:r>
-              <a:r>
-                <a:rPr lang="en-US" sz="1200" dirty="0">
-                  <a:solidFill>
-                    <a:schemeClr val="tx1"/>
-                  </a:solidFill>
-                </a:rPr>
-                <a:t> = 2)</a:t>
-              </a:r>
-            </a:p>
-            <a:p>
-              <a:endParaRPr lang="en-US" sz="1200" dirty="0">
-                <a:solidFill>
-                  <a:schemeClr val="tx1"/>
-                </a:solidFill>
-              </a:endParaRPr>
-            </a:p>
-            <a:p>
-              <a:endParaRPr lang="en-US" sz="1200" dirty="0">
-                <a:solidFill>
-                  <a:schemeClr val="tx1"/>
-                </a:solidFill>
-              </a:endParaRPr>
-            </a:p>
-            <a:p>
-              <a:endParaRPr lang="en-US" sz="1200" dirty="0">
-                <a:solidFill>
-                  <a:schemeClr val="tx1"/>
-                </a:solidFill>
-              </a:endParaRPr>
-            </a:p>
-            <a:p>
-              <a:endParaRPr lang="en-US" sz="1200" dirty="0">
-                <a:solidFill>
-                  <a:schemeClr val="tx1"/>
-                </a:solidFill>
-              </a:endParaRPr>
-            </a:p>
-          </p:txBody>
-        </p:sp>
-      </p:grpSp>
-      <p:grpSp>
-        <p:nvGrpSpPr>
-          <p:cNvPr id="33" name="Group 32">
-            <a:extLst>
-              <a:ext uri="{FF2B5EF4-FFF2-40B4-BE49-F238E27FC236}">
-                <a16:creationId xmlns:a16="http://schemas.microsoft.com/office/drawing/2014/main" id="{D289895D-2133-ACD1-DA4A-DBBAB3C96FF5}"/>
-              </a:ext>
-            </a:extLst>
-          </p:cNvPr>
-          <p:cNvGrpSpPr/>
-          <p:nvPr/>
-        </p:nvGrpSpPr>
-        <p:grpSpPr>
-          <a:xfrm>
-            <a:off x="7676068" y="2821669"/>
-            <a:ext cx="3477808" cy="1319062"/>
-            <a:chOff x="2037028" y="1176951"/>
-            <a:chExt cx="3108185" cy="2030619"/>
-          </a:xfrm>
-        </p:grpSpPr>
-        <p:sp>
-          <p:nvSpPr>
-            <p:cNvPr id="34" name="Rectangle 33">
-              <a:extLst>
-                <a:ext uri="{FF2B5EF4-FFF2-40B4-BE49-F238E27FC236}">
-                  <a16:creationId xmlns:a16="http://schemas.microsoft.com/office/drawing/2014/main" id="{1CFEFFC7-8569-10C3-8550-73CA9ECCE27C}"/>
-                </a:ext>
-              </a:extLst>
-            </p:cNvPr>
-            <p:cNvSpPr/>
-            <p:nvPr/>
-          </p:nvSpPr>
-          <p:spPr>
-            <a:xfrm>
-              <a:off x="2037029" y="1176951"/>
-              <a:ext cx="3108183" cy="505085"/>
-            </a:xfrm>
-            <a:prstGeom prst="rect">
-              <a:avLst/>
-            </a:prstGeom>
-          </p:spPr>
-          <p:style>
-            <a:lnRef idx="2">
-              <a:schemeClr val="accent4">
-                <a:shade val="15000"/>
-              </a:schemeClr>
-            </a:lnRef>
-            <a:fillRef idx="1">
-              <a:schemeClr val="accent4"/>
-            </a:fillRef>
-            <a:effectRef idx="0">
-              <a:schemeClr val="accent4"/>
-            </a:effectRef>
-            <a:fontRef idx="minor">
-              <a:schemeClr val="lt1"/>
-            </a:fontRef>
-          </p:style>
-          <p:txBody>
-            <a:bodyPr rtlCol="0" anchor="ctr"/>
-            <a:lstStyle/>
-            <a:p>
-              <a:pPr algn="ctr"/>
-              <a:r>
-                <a:rPr lang="en-US" sz="1200" dirty="0" err="1"/>
-                <a:t>User_Action_Type</a:t>
-              </a:r>
-              <a:endParaRPr lang="en-IL" sz="1200" dirty="0"/>
-            </a:p>
-          </p:txBody>
-        </p:sp>
-        <p:sp>
-          <p:nvSpPr>
-            <p:cNvPr id="36" name="Rectangle 35">
-              <a:extLst>
-                <a:ext uri="{FF2B5EF4-FFF2-40B4-BE49-F238E27FC236}">
-                  <a16:creationId xmlns:a16="http://schemas.microsoft.com/office/drawing/2014/main" id="{1739C2CC-28EC-1E3E-F1B5-8C8203C1617C}"/>
-                </a:ext>
-              </a:extLst>
-            </p:cNvPr>
-            <p:cNvSpPr/>
-            <p:nvPr/>
-          </p:nvSpPr>
-          <p:spPr>
-            <a:xfrm>
-              <a:off x="2037028" y="1682036"/>
-              <a:ext cx="3108185" cy="1525534"/>
-            </a:xfrm>
-            <a:prstGeom prst="rect">
-              <a:avLst/>
-            </a:prstGeom>
-            <a:noFill/>
-          </p:spPr>
-          <p:style>
-            <a:lnRef idx="2">
-              <a:schemeClr val="accent1">
-                <a:shade val="15000"/>
-              </a:schemeClr>
-            </a:lnRef>
-            <a:fillRef idx="1">
-              <a:schemeClr val="accent1"/>
-            </a:fillRef>
-            <a:effectRef idx="0">
-              <a:schemeClr val="accent1"/>
-            </a:effectRef>
-            <a:fontRef idx="minor">
-              <a:schemeClr val="lt1"/>
-            </a:fontRef>
-          </p:style>
-          <p:txBody>
-            <a:bodyPr rtlCol="0" anchor="t"/>
-            <a:lstStyle/>
-            <a:p>
-              <a:r>
-                <a:rPr lang="en-US" sz="1200" b="1" dirty="0" err="1">
-                  <a:solidFill>
-                    <a:schemeClr val="tx1"/>
-                  </a:solidFill>
-                </a:rPr>
-                <a:t>Action_Id</a:t>
-              </a:r>
-              <a:r>
-                <a:rPr lang="en-US" sz="1200" b="1" dirty="0">
-                  <a:solidFill>
-                    <a:schemeClr val="tx1"/>
-                  </a:solidFill>
-                </a:rPr>
-                <a:t> </a:t>
-              </a:r>
-              <a:r>
-                <a:rPr lang="en-US" sz="1200" dirty="0">
-                  <a:solidFill>
-                    <a:schemeClr val="tx1"/>
-                  </a:solidFill>
-                </a:rPr>
-                <a:t>: int</a:t>
-              </a:r>
-            </a:p>
-            <a:p>
-              <a:r>
-                <a:rPr lang="en-US" sz="1200" dirty="0" err="1">
-                  <a:solidFill>
-                    <a:schemeClr val="tx1"/>
-                  </a:solidFill>
-                </a:rPr>
-                <a:t>User_Id</a:t>
-              </a:r>
-              <a:r>
-                <a:rPr lang="en-US" sz="1200" dirty="0">
-                  <a:solidFill>
-                    <a:schemeClr val="tx1"/>
-                  </a:solidFill>
-                </a:rPr>
-                <a:t> (FK) : int</a:t>
-              </a:r>
-            </a:p>
-            <a:p>
-              <a:r>
-                <a:rPr lang="en-US" sz="1200" dirty="0" err="1">
-                  <a:solidFill>
-                    <a:schemeClr val="tx1"/>
-                  </a:solidFill>
-                </a:rPr>
-                <a:t>Action_Type</a:t>
-              </a:r>
-              <a:r>
-                <a:rPr lang="en-US" sz="1200" dirty="0">
-                  <a:solidFill>
-                    <a:schemeClr val="tx1"/>
-                  </a:solidFill>
-                </a:rPr>
-                <a:t> : </a:t>
-              </a:r>
-              <a:r>
-                <a:rPr lang="en-US" sz="1200" dirty="0" err="1">
-                  <a:solidFill>
-                    <a:schemeClr val="tx1"/>
-                  </a:solidFill>
-                </a:rPr>
-                <a:t>enum</a:t>
-              </a:r>
-              <a:r>
-                <a:rPr lang="en-US" sz="1200" dirty="0">
-                  <a:solidFill>
-                    <a:schemeClr val="tx1"/>
-                  </a:solidFill>
-                </a:rPr>
-                <a:t> (Login, Update, Maintenance)</a:t>
-              </a:r>
-            </a:p>
-            <a:p>
-              <a:r>
-                <a:rPr lang="en-US" sz="1200" dirty="0" err="1">
-                  <a:solidFill>
-                    <a:schemeClr val="tx1"/>
-                  </a:solidFill>
-                </a:rPr>
-                <a:t>Time_Stamp</a:t>
-              </a:r>
-              <a:r>
-                <a:rPr lang="en-US" sz="1200" dirty="0">
-                  <a:solidFill>
-                    <a:schemeClr val="tx1"/>
-                  </a:solidFill>
-                </a:rPr>
-                <a:t> : datetime</a:t>
-              </a:r>
-            </a:p>
-            <a:p>
-              <a:endParaRPr lang="en-US" sz="1200" dirty="0">
-                <a:solidFill>
-                  <a:schemeClr val="tx1"/>
-                </a:solidFill>
-              </a:endParaRPr>
-            </a:p>
-            <a:p>
-              <a:endParaRPr lang="en-US" sz="1200" dirty="0">
-                <a:solidFill>
-                  <a:schemeClr val="tx1"/>
-                </a:solidFill>
-              </a:endParaRPr>
-            </a:p>
-            <a:p>
-              <a:endParaRPr lang="en-US" sz="1200" dirty="0">
-                <a:solidFill>
-                  <a:schemeClr val="tx1"/>
-                </a:solidFill>
-              </a:endParaRPr>
-            </a:p>
-            <a:p>
-              <a:endParaRPr lang="en-US" sz="1200" dirty="0">
-                <a:solidFill>
-                  <a:schemeClr val="tx1"/>
-                </a:solidFill>
-              </a:endParaRPr>
-            </a:p>
-            <a:p>
-              <a:endParaRPr lang="en-US" sz="1200" dirty="0">
-                <a:solidFill>
-                  <a:schemeClr val="tx1"/>
-                </a:solidFill>
-              </a:endParaRPr>
-            </a:p>
-            <a:p>
-              <a:endParaRPr lang="en-US" sz="1200" dirty="0">
-                <a:solidFill>
-                  <a:schemeClr val="tx1"/>
-                </a:solidFill>
-              </a:endParaRPr>
-            </a:p>
-            <a:p>
-              <a:endParaRPr lang="en-IL" sz="1200" dirty="0"/>
-            </a:p>
-          </p:txBody>
-        </p:sp>
-      </p:grpSp>
-      <p:cxnSp>
-        <p:nvCxnSpPr>
-          <p:cNvPr id="5" name="Straight Arrow Connector 4">
-            <a:extLst>
-              <a:ext uri="{FF2B5EF4-FFF2-40B4-BE49-F238E27FC236}">
-                <a16:creationId xmlns:a16="http://schemas.microsoft.com/office/drawing/2014/main" id="{87A80F61-BCF6-C798-3F07-5C6AE73CB2F5}"/>
-              </a:ext>
-            </a:extLst>
-          </p:cNvPr>
-          <p:cNvCxnSpPr>
-            <a:cxnSpLocks/>
-          </p:cNvCxnSpPr>
-          <p:nvPr/>
-        </p:nvCxnSpPr>
-        <p:spPr>
-          <a:xfrm flipV="1">
-            <a:off x="2981670" y="1722787"/>
-            <a:ext cx="930377" cy="731"/>
-          </a:xfrm>
-          <a:prstGeom prst="straightConnector1">
-            <a:avLst/>
-          </a:prstGeom>
-          <a:ln>
-            <a:tailEnd type="triangle"/>
-          </a:ln>
-        </p:spPr>
-        <p:style>
-          <a:lnRef idx="2">
-            <a:schemeClr val="accent1"/>
-          </a:lnRef>
-          <a:fillRef idx="0">
-            <a:schemeClr val="accent1"/>
-          </a:fillRef>
-          <a:effectRef idx="1">
-            <a:schemeClr val="accent1"/>
-          </a:effectRef>
-          <a:fontRef idx="minor">
-            <a:schemeClr val="tx1"/>
-          </a:fontRef>
-        </p:style>
-      </p:cxnSp>
-      <p:sp>
-        <p:nvSpPr>
-          <p:cNvPr id="8" name="Rectangle 7">
-            <a:extLst>
-              <a:ext uri="{FF2B5EF4-FFF2-40B4-BE49-F238E27FC236}">
-                <a16:creationId xmlns:a16="http://schemas.microsoft.com/office/drawing/2014/main" id="{1049D720-5E23-9ECB-0085-9B8DB5FBEB86}"/>
-              </a:ext>
-            </a:extLst>
-          </p:cNvPr>
-          <p:cNvSpPr/>
-          <p:nvPr/>
-        </p:nvSpPr>
-        <p:spPr>
-          <a:xfrm>
-            <a:off x="3447951" y="1442013"/>
-            <a:ext cx="458005" cy="280774"/>
-          </a:xfrm>
-          <a:prstGeom prst="rect">
-            <a:avLst/>
-          </a:prstGeom>
-          <a:noFill/>
-          <a:ln>
-            <a:noFill/>
-          </a:ln>
-        </p:spPr>
-        <p:style>
-          <a:lnRef idx="2">
-            <a:schemeClr val="accent1">
-              <a:shade val="15000"/>
-            </a:schemeClr>
-          </a:lnRef>
-          <a:fillRef idx="1">
-            <a:schemeClr val="accent1"/>
-          </a:fillRef>
-          <a:effectRef idx="0">
-            <a:schemeClr val="accent1"/>
-          </a:effectRef>
-          <a:fontRef idx="minor">
-            <a:schemeClr val="lt1"/>
-          </a:fontRef>
-        </p:style>
-        <p:txBody>
-          <a:bodyPr rtlCol="0" anchor="ctr"/>
-          <a:lstStyle/>
-          <a:p>
-            <a:pPr algn="ctr"/>
-            <a:r>
-              <a:rPr lang="en-US" sz="1000" dirty="0">
-                <a:solidFill>
-                  <a:schemeClr val="tx1"/>
-                </a:solidFill>
-              </a:rPr>
-              <a:t>1:N</a:t>
-            </a:r>
-            <a:endParaRPr lang="en-IL" sz="1000" dirty="0">
-              <a:solidFill>
-                <a:schemeClr val="tx1"/>
-              </a:solidFill>
-            </a:endParaRPr>
-          </a:p>
-        </p:txBody>
-      </p:sp>
-      <p:cxnSp>
-        <p:nvCxnSpPr>
-          <p:cNvPr id="10" name="Straight Arrow Connector 9">
-            <a:extLst>
-              <a:ext uri="{FF2B5EF4-FFF2-40B4-BE49-F238E27FC236}">
-                <a16:creationId xmlns:a16="http://schemas.microsoft.com/office/drawing/2014/main" id="{F0EC6AC8-2264-2579-F9A2-C0806CFDBCBF}"/>
-              </a:ext>
-            </a:extLst>
-          </p:cNvPr>
-          <p:cNvCxnSpPr>
-            <a:cxnSpLocks/>
-          </p:cNvCxnSpPr>
-          <p:nvPr/>
-        </p:nvCxnSpPr>
-        <p:spPr>
-          <a:xfrm flipV="1">
-            <a:off x="6746419" y="3559135"/>
-            <a:ext cx="930377" cy="731"/>
-          </a:xfrm>
-          <a:prstGeom prst="straightConnector1">
-            <a:avLst/>
-          </a:prstGeom>
-          <a:ln>
-            <a:tailEnd type="triangle"/>
-          </a:ln>
-        </p:spPr>
-        <p:style>
-          <a:lnRef idx="2">
-            <a:schemeClr val="accent1"/>
-          </a:lnRef>
-          <a:fillRef idx="0">
-            <a:schemeClr val="accent1"/>
-          </a:fillRef>
-          <a:effectRef idx="1">
-            <a:schemeClr val="accent1"/>
-          </a:effectRef>
-          <a:fontRef idx="minor">
-            <a:schemeClr val="tx1"/>
-          </a:fontRef>
-        </p:style>
-      </p:cxnSp>
-      <p:sp>
-        <p:nvSpPr>
-          <p:cNvPr id="11" name="Rectangle 10">
-            <a:extLst>
-              <a:ext uri="{FF2B5EF4-FFF2-40B4-BE49-F238E27FC236}">
-                <a16:creationId xmlns:a16="http://schemas.microsoft.com/office/drawing/2014/main" id="{D4435BEA-6437-E00D-577F-23D7D5718537}"/>
-              </a:ext>
-            </a:extLst>
-          </p:cNvPr>
-          <p:cNvSpPr/>
-          <p:nvPr/>
-        </p:nvSpPr>
-        <p:spPr>
-          <a:xfrm>
-            <a:off x="7230806" y="3278361"/>
-            <a:ext cx="458005" cy="280774"/>
-          </a:xfrm>
-          <a:prstGeom prst="rect">
-            <a:avLst/>
-          </a:prstGeom>
-          <a:noFill/>
-          <a:ln>
-            <a:noFill/>
-          </a:ln>
-        </p:spPr>
-        <p:style>
-          <a:lnRef idx="2">
-            <a:schemeClr val="accent1">
-              <a:shade val="15000"/>
-            </a:schemeClr>
-          </a:lnRef>
-          <a:fillRef idx="1">
-            <a:schemeClr val="accent1"/>
-          </a:fillRef>
-          <a:effectRef idx="0">
-            <a:schemeClr val="accent1"/>
-          </a:effectRef>
-          <a:fontRef idx="minor">
-            <a:schemeClr val="lt1"/>
-          </a:fontRef>
-        </p:style>
-        <p:txBody>
-          <a:bodyPr rtlCol="0" anchor="ctr"/>
-          <a:lstStyle/>
-          <a:p>
-            <a:pPr algn="ctr"/>
-            <a:r>
-              <a:rPr lang="en-US" sz="1000" dirty="0">
-                <a:solidFill>
-                  <a:schemeClr val="tx1"/>
-                </a:solidFill>
-              </a:rPr>
-              <a:t>1:N</a:t>
-            </a:r>
-            <a:endParaRPr lang="en-IL" sz="1000" dirty="0">
-              <a:solidFill>
-                <a:schemeClr val="tx1"/>
-              </a:solidFill>
-            </a:endParaRPr>
-          </a:p>
-        </p:txBody>
-      </p:sp>
-    </p:spTree>
-    <p:extLst>
-      <p:ext uri="{BB962C8B-B14F-4D97-AF65-F5344CB8AC3E}">
-        <p14:creationId xmlns:p14="http://schemas.microsoft.com/office/powerpoint/2010/main" val="3836392025"/>
       </p:ext>
     </p:extLst>
   </p:cSld>
